--- a/thesis/defense/defense_deck.pptx
+++ b/thesis/defense/defense_deck.pptx
@@ -4,9 +4,6 @@
   <p:sldMasterIdLst>
     <p:sldMasterId id="2147483648" r:id="rId1"/>
   </p:sldMasterIdLst>
-  <p:notesMasterIdLst>
-    <p:notesMasterId r:id="rId15"/>
-  </p:notesMasterIdLst>
   <p:sldIdLst>
     <p:sldId id="256" r:id="rId2"/>
     <p:sldId id="257" r:id="rId3"/>
@@ -22,6 +19,9 @@
     <p:sldId id="267" r:id="rId13"/>
     <p:sldId id="268" r:id="rId14"/>
   </p:sldIdLst>
+  <p:notesMasterIdLst>
+    <p:notesMasterId r:id="rId15"/>
+  </p:notesMasterIdLst>
   <p:sldSz cx="12192000" cy="6858000"/>
   <p:notesSz cx="6858000" cy="12192000"/>
   <p:defaultTextStyle>
@@ -116,11 +116,6 @@
       </a:defRPr>
     </a:lvl9pPr>
   </p:defaultTextStyle>
-  <p:extLst>
-    <p:ext uri="{EFAFB233-063F-42B5-8137-9DF3F51BA10A}">
-      <p15:sldGuideLst xmlns:p15="http://schemas.microsoft.com/office/powerpoint/2012/main"/>
-    </p:ext>
-  </p:extLst>
 </p:presentation>
 </file>
 
@@ -146,10 +141,234 @@
           <a:chExt cx="0" cy="0"/>
         </a:xfrm>
       </p:grpSpPr>
+      <p:sp>
+        <p:nvSpPr>
+          <p:cNvPr id="2" name="Header Placeholder 1"/>
+          <p:cNvSpPr>
+            <a:spLocks noGrp="1"/>
+          </p:cNvSpPr>
+          <p:nvPr>
+            <p:ph type="hdr" sz="quarter"/>
+          </p:nvPr>
+        </p:nvSpPr>
+        <p:spPr>
+          <a:xfrm>
+            <a:off x="0" y="0"/>
+            <a:ext cx="2971800" cy="458788"/>
+          </a:xfrm>
+          <a:prstGeom prst="rect">
+            <a:avLst/>
+          </a:prstGeom>
+        </p:spPr>
+        <p:txBody>
+          <a:bodyPr vert="horz" lIns="91440" tIns="45720" rIns="91440" bIns="45720" rtlCol="0"/>
+          <a:lstStyle>
+            <a:lvl1pPr algn="l">
+              <a:defRPr sz="1200"/>
+            </a:lvl1pPr>
+          </a:lstStyle>
+          <a:p>
+            <a:endParaRPr lang="en-US"/>
+          </a:p>
+        </p:txBody>
+      </p:sp>
+      <p:sp>
+        <p:nvSpPr>
+          <p:cNvPr id="3" name="Date Placeholder 2"/>
+          <p:cNvSpPr>
+            <a:spLocks noGrp="1"/>
+          </p:cNvSpPr>
+          <p:nvPr>
+            <p:ph type="dt" idx="1"/>
+          </p:nvPr>
+        </p:nvSpPr>
+        <p:spPr>
+          <a:xfrm>
+            <a:off x="3884613" y="0"/>
+            <a:ext cx="2971800" cy="458788"/>
+          </a:xfrm>
+          <a:prstGeom prst="rect">
+            <a:avLst/>
+          </a:prstGeom>
+        </p:spPr>
+        <p:txBody>
+          <a:bodyPr vert="horz" lIns="91440" tIns="45720" rIns="91440" bIns="45720" rtlCol="0"/>
+          <a:lstStyle>
+            <a:lvl1pPr algn="r">
+              <a:defRPr sz="1200"/>
+            </a:lvl1pPr>
+          </a:lstStyle>
+          <a:p>
+            <a:fld id="{5282F153-3F37-0F45-9E97-73ACFA13230C}" type="datetimeFigureOut">
+              <a:rPr lang="en-US"/>
+              <a:t>7/23/19</a:t>
+            </a:fld>
+            <a:endParaRPr lang="en-US"/>
+          </a:p>
+        </p:txBody>
+      </p:sp>
+      <p:sp>
+        <p:nvSpPr>
+          <p:cNvPr id="4" name="Slide Image Placeholder 3"/>
+          <p:cNvSpPr>
+            <a:spLocks noGrp="1" noRot="1" noChangeAspect="1"/>
+          </p:cNvSpPr>
+          <p:nvPr>
+            <p:ph type="sldImg" idx="2"/>
+          </p:nvPr>
+        </p:nvSpPr>
+        <p:spPr>
+          <a:xfrm>
+            <a:off x="685800" y="1143000"/>
+            <a:ext cx="5486400" cy="3086100"/>
+          </a:xfrm>
+          <a:prstGeom prst="rect">
+            <a:avLst/>
+          </a:prstGeom>
+          <a:noFill/>
+          <a:ln w="12700">
+            <a:solidFill>
+              <a:prstClr val="black"/>
+            </a:solidFill>
+          </a:ln>
+        </p:spPr>
+        <p:txBody>
+          <a:bodyPr vert="horz" lIns="91440" tIns="45720" rIns="91440" bIns="45720" rtlCol="0" anchor="ctr"/>
+          <a:lstStyle/>
+          <a:p>
+            <a:endParaRPr lang="en-US"/>
+          </a:p>
+        </p:txBody>
+      </p:sp>
+      <p:sp>
+        <p:nvSpPr>
+          <p:cNvPr id="5" name="Notes Placeholder 4"/>
+          <p:cNvSpPr>
+            <a:spLocks noGrp="1"/>
+          </p:cNvSpPr>
+          <p:nvPr>
+            <p:ph type="body" sz="quarter" idx="3"/>
+          </p:nvPr>
+        </p:nvSpPr>
+        <p:spPr>
+          <a:xfrm>
+            <a:off x="685800" y="4400550"/>
+            <a:ext cx="5486400" cy="3600450"/>
+          </a:xfrm>
+          <a:prstGeom prst="rect">
+            <a:avLst/>
+          </a:prstGeom>
+        </p:spPr>
+        <p:txBody>
+          <a:bodyPr vert="horz" lIns="91440" tIns="45720" rIns="91440" bIns="45720" rtlCol="0"/>
+          <a:lstStyle/>
+          <a:p>
+            <a:pPr lvl="0"/>
+            <a:r>
+              <a:rPr lang="en-US"/>
+              <a:t>Click to edit Master text styles</a:t>
+            </a:r>
+          </a:p>
+          <a:p>
+            <a:pPr lvl="1"/>
+            <a:r>
+              <a:rPr lang="en-US"/>
+              <a:t>Second level</a:t>
+            </a:r>
+          </a:p>
+          <a:p>
+            <a:pPr lvl="2"/>
+            <a:r>
+              <a:rPr lang="en-US"/>
+              <a:t>Third level</a:t>
+            </a:r>
+          </a:p>
+          <a:p>
+            <a:pPr lvl="3"/>
+            <a:r>
+              <a:rPr lang="en-US"/>
+              <a:t>Fourth level</a:t>
+            </a:r>
+          </a:p>
+          <a:p>
+            <a:pPr lvl="4"/>
+            <a:r>
+              <a:rPr lang="en-US"/>
+              <a:t>Fifth level</a:t>
+            </a:r>
+          </a:p>
+        </p:txBody>
+      </p:sp>
+      <p:sp>
+        <p:nvSpPr>
+          <p:cNvPr id="6" name="Footer Placeholder 5"/>
+          <p:cNvSpPr>
+            <a:spLocks noGrp="1"/>
+          </p:cNvSpPr>
+          <p:nvPr>
+            <p:ph type="ftr" sz="quarter" idx="4"/>
+          </p:nvPr>
+        </p:nvSpPr>
+        <p:spPr>
+          <a:xfrm>
+            <a:off x="0" y="8685213"/>
+            <a:ext cx="2971800" cy="458787"/>
+          </a:xfrm>
+          <a:prstGeom prst="rect">
+            <a:avLst/>
+          </a:prstGeom>
+        </p:spPr>
+        <p:txBody>
+          <a:bodyPr vert="horz" lIns="91440" tIns="45720" rIns="91440" bIns="45720" rtlCol="0" anchor="b"/>
+          <a:lstStyle>
+            <a:lvl1pPr algn="l">
+              <a:defRPr sz="1200"/>
+            </a:lvl1pPr>
+          </a:lstStyle>
+          <a:p>
+            <a:endParaRPr lang="en-US"/>
+          </a:p>
+        </p:txBody>
+      </p:sp>
+      <p:sp>
+        <p:nvSpPr>
+          <p:cNvPr id="7" name="Slide Number Placeholder 6"/>
+          <p:cNvSpPr>
+            <a:spLocks noGrp="1"/>
+          </p:cNvSpPr>
+          <p:nvPr>
+            <p:ph type="sldNum" sz="quarter" idx="5"/>
+          </p:nvPr>
+        </p:nvSpPr>
+        <p:spPr>
+          <a:xfrm>
+            <a:off x="3884613" y="8685213"/>
+            <a:ext cx="2971800" cy="458787"/>
+          </a:xfrm>
+          <a:prstGeom prst="rect">
+            <a:avLst/>
+          </a:prstGeom>
+        </p:spPr>
+        <p:txBody>
+          <a:bodyPr vert="horz" lIns="91440" tIns="45720" rIns="91440" bIns="45720" rtlCol="0" anchor="b"/>
+          <a:lstStyle>
+            <a:lvl1pPr algn="r">
+              <a:defRPr sz="1200"/>
+            </a:lvl1pPr>
+          </a:lstStyle>
+          <a:p>
+            <a:fld id="{CE5E9CC1-C706-0F49-92D6-E571CC5EEA8F}" type="slidenum">
+              <a:rPr lang="en-US"/>
+              <a:t>‹#›</a:t>
+            </a:fld>
+            <a:endParaRPr lang="en-US"/>
+          </a:p>
+        </p:txBody>
+      </p:sp>
     </p:spTree>
     <p:extLst>
       <p:ext uri="{BB962C8B-B14F-4D97-AF65-F5344CB8AC3E}">
-        <p14:creationId xmlns:p14="http://schemas.microsoft.com/office/powerpoint/2010/main" val="2119406421"/>
+        <p14:creationId xmlns:p14="http://schemas.microsoft.com/office/powerpoint/2010/main" val="1024086991"/>
       </p:ext>
     </p:extLst>
   </p:cSld>
@@ -297,6 +516,7 @@
               <a:rPr lang="en-US" dirty="0"/>
               <a:t>60–90s. Frame in one breath: organisations collect more feedback than ever, yet fewer than a third systematically close the loop. This thesis designs, builds and evaluates a platform where the loop is not just closed but GOVERNED and MEASURED — and where what worked becomes organisational memory. One system, studied through Design Science Research.</a:t>
             </a:r>
+            <a:endParaRPr lang="en-US" dirty="0"/>
           </a:p>
         </p:txBody>
       </p:sp>
@@ -382,8 +602,9 @@
           <a:p>
             <a:r>
               <a:rPr lang="en-US" dirty="0"/>
-              <a:t>90s. Pre-empt the researcher-as-founder question here: externally-labelled gold sets, standardised instruments, reproducible harness, and this matrix. Conflict of interest is declared in the front matter and managed by method, not denial.</a:t>
-            </a:r>
+              <a:t>90s. Pre-empt the researcher-as-founder question here: externally-labelled gold sets, standardised instruments, reproducible harness, and this matrix. Conflict of interest is declared in the front matter and managed by method, not denial. If asked about the July external reviews (§5A.8): two independent LLM strategic reviews, 45 claims adversarially verified (27 confirmed / 13 partial / 2 refuted), 20 hardening PRs, 17/17 live production checks — and the refuted claims are themselves a finding: unsurfaced capability reads as absent.</a:t>
+            </a:r>
+            <a:endParaRPr lang="en-US" dirty="0"/>
           </a:p>
         </p:txBody>
       </p:sp>
@@ -471,6 +692,7 @@
               <a:rPr lang="en-US" dirty="0"/>
               <a:t>90s. Category has moved TOWARD the thesis: analysts declared the insight half commoditised. Each rival owns a fragment; nobody verifiably holds the combination — and we apply the same verification standard to ourselves (previous slide).</a:t>
             </a:r>
+            <a:endParaRPr lang="en-US" dirty="0"/>
           </a:p>
         </p:txBody>
       </p:sp>
@@ -558,6 +780,7 @@
               <a:rPr lang="en-US" dirty="0"/>
               <a:t>90s. Say number ① slowly: the single most important next artifact — a real action, a real metric, a contract, a window, a verdict. The method is already specified (ITS, then SDID). Everything else is engineering.</a:t>
             </a:r>
+            <a:endParaRPr lang="en-US" dirty="0"/>
           </a:p>
         </p:txBody>
       </p:sp>
@@ -645,6 +868,7 @@
               <a:rPr lang="en-US" dirty="0"/>
               <a:t>60s. Read the four contributions crisply, end on the one-liner, invite questions. Likely probes: novelty vs MemoryBank (answered on slide 5), founder COI (slide 10), simulated outcomes (slide 9), why not RCTs (slide 12 — ITS/SDID).</a:t>
             </a:r>
+            <a:endParaRPr lang="en-US" dirty="0"/>
           </a:p>
         </p:txBody>
       </p:sp>
@@ -732,6 +956,7 @@
               <a:rPr lang="en-US" dirty="0"/>
               <a:t>90s. Anchor the gap in Bone et al., then the Uber experiment — the strongest evidence that acting without measuring can make things worse. End on the central claim; everything after is those two primitives.</a:t>
             </a:r>
+            <a:endParaRPr lang="en-US" dirty="0"/>
           </a:p>
         </p:txBody>
       </p:sp>
@@ -819,6 +1044,7 @@
               <a:rPr lang="en-US" dirty="0"/>
               <a:t>90s. Say why DSR: the question is 'what works by design', not 'what is'. Note H1–H8 map under these four RQs. Flag honestly that RQ4 data collection is in progress — protocol and instruments are complete and in the appendix.</a:t>
             </a:r>
+            <a:endParaRPr lang="en-US" dirty="0"/>
           </a:p>
         </p:txBody>
       </p:sp>
@@ -906,6 +1132,7 @@
               <a:rPr lang="en-US" dirty="0"/>
               <a:t>2 min. Walk the diagram left to right: sources → ingestion → enrich → synthesize → rules → the approval diamond → execute → measure → learn, with governance cross-cutting. Emphasise the architectural principle: bounded model, deterministic loop. Mention it exists in two builds; the evaluated build is CLARA (FastAPI + LangGraph).</a:t>
             </a:r>
+            <a:endParaRPr lang="en-US" dirty="0"/>
           </a:p>
         </p:txBody>
       </p:sp>
@@ -993,6 +1220,7 @@
               <a:rPr lang="en-US" dirty="0"/>
               <a:t>2 min. One sentence each; slow down on decay (the novelty boundary vs MemoryBank — examiners may probe novelty; we cite the prior art ourselves and position precisely) and on industry profiles (adaptation without retraining, demonstrated on three real sectors).</a:t>
             </a:r>
+            <a:endParaRPr lang="en-US" dirty="0"/>
           </a:p>
         </p:txBody>
       </p:sp>
@@ -1080,6 +1308,7 @@
               <a:rPr lang="en-US" dirty="0"/>
               <a:t>2 min. This is the RAI thesis heart. Two lines matter most: (1) the gate deliberately EXCEEDS Art 14 because awareness alone doesn't de-bias overseers; (2) the code review found declared-but-unenforced controls — and the governance instrumentation is what made that visible. Honesty as methodology.</a:t>
             </a:r>
+            <a:endParaRPr lang="en-US" dirty="0"/>
           </a:p>
         </p:txBody>
       </p:sp>
@@ -1167,6 +1396,7 @@
               <a:rPr lang="en-US" dirty="0"/>
               <a:t>90s. Stress the honesty features: real data only (synthetic excluded), star ratings as a NON-CIRCULAR sentiment gold, seed labels external to the artifact, every number written by a reproducible harness — no hand-typed metrics.</a:t>
             </a:r>
+            <a:endParaRPr lang="en-US" dirty="0"/>
           </a:p>
         </p:txBody>
       </p:sp>
@@ -1252,8 +1482,9 @@
           <a:p>
             <a:r>
               <a:rPr lang="en-US" dirty="0"/>
-              <a:t>2 min. The three-rung story. Be precise about gold standards: the 0.37/0.78 rows are the thesis harness (188 seed-labelled signals); the LLM numbers are the artifact's committed in-repo eval on a DIFFERENT 60-case golden set — convergent evidence, not the same table. If probed: exemplar A/B lift was NOT significant at n=60 (McNemar p≈1.0) — we report that ourselves.</a:t>
-            </a:r>
+              <a:t>2 min. The three-rung story. Be precise about gold standards: the 0.37/0.78 rows are the thesis harness (188 seed-labelled signals); the LLM numbers are the artifact's committed in-repo eval on a DIFFERENT 80-case bilingual golden set (20 authored German cases — disclosed) — convergent evidence, not the same table. If probed on exemplars: at n=60 the A/B was not significant (p≈1.0); at n=80, after adding German exemplars, the exact-tag-set lift IS significant (8.75%→28.75% per item, in-run paired McNemar p=0.001) while urgency stays underpowered (81.25%→86.25%, p=0.219) — we report both ourselves. The in-run paired A/B is the designed inference; the model is non-deterministic even at temperature 0.</a:t>
+            </a:r>
+            <a:endParaRPr lang="en-US" dirty="0"/>
           </a:p>
         </p:txBody>
       </p:sp>
@@ -1341,6 +1572,7 @@
               <a:rPr lang="en-US" dirty="0"/>
               <a:t>90s. This slide wins or loses trust. Lead with the number, land on the boundary: mechanism measured, benefit pending. Examiners reward the distinction — it's also written into the traceability matrix (next slide).</a:t>
             </a:r>
+            <a:endParaRPr lang="en-US" dirty="0"/>
           </a:p>
         </p:txBody>
       </p:sp>
@@ -1413,11 +1645,6 @@
 <file path=ppt/slideMasters/slideMaster1.xml><?xml version="1.0" encoding="utf-8"?>
 <p:sldMaster xmlns:a="http://schemas.openxmlformats.org/drawingml/2006/main" xmlns:r="http://schemas.openxmlformats.org/officeDocument/2006/relationships" xmlns:p="http://schemas.openxmlformats.org/presentationml/2006/main">
   <p:cSld>
-    <p:bg>
-      <p:bgRef idx="1001">
-        <a:schemeClr val="bg1"/>
-      </p:bgRef>
-    </p:bg>
     <p:spTree>
       <p:nvGrpSpPr>
         <p:cNvPr id="1" name=""/>
@@ -1700,7 +1927,6 @@
         <a:solidFill>
           <a:srgbClr val="1E2761"/>
         </a:solidFill>
-        <a:effectLst/>
       </p:bgPr>
     </p:bg>
     <p:spTree>
@@ -1738,7 +1964,7 @@
           <a:bodyPr wrap="square" rtlCol="0" anchor="ctr"/>
           <a:lstStyle/>
           <a:p>
-            <a:pPr marL="0" indent="0">
+            <a:pPr indent="0" marL="0">
               <a:buNone/>
             </a:pPr>
             <a:r>
@@ -1777,7 +2003,7 @@
           <a:bodyPr wrap="square" rtlCol="0" anchor="ctr"/>
           <a:lstStyle/>
           <a:p>
-            <a:pPr marL="0" indent="0">
+            <a:pPr indent="0" marL="0">
               <a:buNone/>
             </a:pPr>
             <a:r>
@@ -1794,7 +2020,7 @@
             <a:endParaRPr lang="en-US" sz="2000" dirty="0"/>
           </a:p>
           <a:p>
-            <a:pPr marL="0" indent="0">
+            <a:pPr indent="0" marL="0">
               <a:buNone/>
             </a:pPr>
             <a:r>
@@ -1831,13 +2057,6 @@
           </a:solidFill>
           <a:ln/>
         </p:spPr>
-        <p:txBody>
-          <a:bodyPr/>
-          <a:lstStyle/>
-          <a:p>
-            <a:endParaRPr lang="en-DE"/>
-          </a:p>
-        </p:txBody>
       </p:sp>
       <p:sp>
         <p:nvSpPr>
@@ -1860,7 +2079,7 @@
           <a:bodyPr wrap="square" lIns="0" tIns="0" rIns="0" bIns="0" rtlCol="0" anchor="ctr"/>
           <a:lstStyle/>
           <a:p>
-            <a:pPr marL="0" indent="0" algn="ctr">
+            <a:pPr algn="ctr" indent="0" marL="0">
               <a:buNone/>
             </a:pPr>
             <a:r>
@@ -1899,7 +2118,7 @@
           <a:bodyPr wrap="square" lIns="0" tIns="0" rIns="0" bIns="0" rtlCol="0" anchor="ctr"/>
           <a:lstStyle/>
           <a:p>
-            <a:pPr marL="0" indent="0">
+            <a:pPr indent="0" marL="0">
               <a:buNone/>
             </a:pPr>
             <a:r>
@@ -1938,7 +2157,7 @@
           <a:bodyPr wrap="square" lIns="0" tIns="0" rIns="0" bIns="0" rtlCol="0" anchor="ctr"/>
           <a:lstStyle/>
           <a:p>
-            <a:pPr marL="0" indent="0">
+            <a:pPr indent="0" marL="0">
               <a:buNone/>
             </a:pPr>
             <a:r>
@@ -1975,13 +2194,6 @@
           </a:solidFill>
           <a:ln/>
         </p:spPr>
-        <p:txBody>
-          <a:bodyPr/>
-          <a:lstStyle/>
-          <a:p>
-            <a:endParaRPr lang="en-DE"/>
-          </a:p>
-        </p:txBody>
       </p:sp>
       <p:sp>
         <p:nvSpPr>
@@ -2004,7 +2216,7 @@
           <a:bodyPr wrap="square" lIns="0" tIns="0" rIns="0" bIns="0" rtlCol="0" anchor="ctr"/>
           <a:lstStyle/>
           <a:p>
-            <a:pPr marL="0" indent="0" algn="ctr">
+            <a:pPr algn="ctr" indent="0" marL="0">
               <a:buNone/>
             </a:pPr>
             <a:r>
@@ -2043,7 +2255,7 @@
           <a:bodyPr wrap="square" lIns="0" tIns="0" rIns="0" bIns="0" rtlCol="0" anchor="ctr"/>
           <a:lstStyle/>
           <a:p>
-            <a:pPr marL="0" indent="0">
+            <a:pPr indent="0" marL="0">
               <a:buNone/>
             </a:pPr>
             <a:r>
@@ -2082,7 +2294,7 @@
           <a:bodyPr wrap="square" lIns="0" tIns="0" rIns="0" bIns="0" rtlCol="0" anchor="ctr"/>
           <a:lstStyle/>
           <a:p>
-            <a:pPr marL="0" indent="0">
+            <a:pPr indent="0" marL="0">
               <a:buNone/>
             </a:pPr>
             <a:r>
@@ -2119,13 +2331,6 @@
           </a:solidFill>
           <a:ln/>
         </p:spPr>
-        <p:txBody>
-          <a:bodyPr/>
-          <a:lstStyle/>
-          <a:p>
-            <a:endParaRPr lang="en-DE"/>
-          </a:p>
-        </p:txBody>
       </p:sp>
       <p:sp>
         <p:nvSpPr>
@@ -2148,7 +2353,7 @@
           <a:bodyPr wrap="square" lIns="0" tIns="0" rIns="0" bIns="0" rtlCol="0" anchor="ctr"/>
           <a:lstStyle/>
           <a:p>
-            <a:pPr marL="0" indent="0" algn="ctr">
+            <a:pPr algn="ctr" indent="0" marL="0">
               <a:buNone/>
             </a:pPr>
             <a:r>
@@ -2187,7 +2392,7 @@
           <a:bodyPr wrap="square" lIns="0" tIns="0" rIns="0" bIns="0" rtlCol="0" anchor="ctr"/>
           <a:lstStyle/>
           <a:p>
-            <a:pPr marL="0" indent="0">
+            <a:pPr indent="0" marL="0">
               <a:buNone/>
             </a:pPr>
             <a:r>
@@ -2226,7 +2431,7 @@
           <a:bodyPr wrap="square" lIns="0" tIns="0" rIns="0" bIns="0" rtlCol="0" anchor="ctr"/>
           <a:lstStyle/>
           <a:p>
-            <a:pPr marL="0" indent="0">
+            <a:pPr indent="0" marL="0">
               <a:buNone/>
             </a:pPr>
             <a:r>
@@ -2263,13 +2468,6 @@
           </a:solidFill>
           <a:ln/>
         </p:spPr>
-        <p:txBody>
-          <a:bodyPr/>
-          <a:lstStyle/>
-          <a:p>
-            <a:endParaRPr lang="en-DE"/>
-          </a:p>
-        </p:txBody>
       </p:sp>
       <p:sp>
         <p:nvSpPr>
@@ -2292,7 +2490,7 @@
           <a:bodyPr wrap="square" lIns="0" tIns="0" rIns="0" bIns="0" rtlCol="0" anchor="ctr"/>
           <a:lstStyle/>
           <a:p>
-            <a:pPr marL="0" indent="0" algn="ctr">
+            <a:pPr algn="ctr" indent="0" marL="0">
               <a:buNone/>
             </a:pPr>
             <a:r>
@@ -2331,7 +2529,7 @@
           <a:bodyPr wrap="square" lIns="0" tIns="0" rIns="0" bIns="0" rtlCol="0" anchor="ctr"/>
           <a:lstStyle/>
           <a:p>
-            <a:pPr marL="0" indent="0">
+            <a:pPr indent="0" marL="0">
               <a:buNone/>
             </a:pPr>
             <a:r>
@@ -2370,7 +2568,7 @@
           <a:bodyPr wrap="square" rtlCol="0" anchor="ctr"/>
           <a:lstStyle/>
           <a:p>
-            <a:pPr marL="0" indent="0">
+            <a:pPr indent="0" marL="0">
               <a:buNone/>
             </a:pPr>
             <a:r>
@@ -2434,7 +2632,7 @@
           <a:bodyPr wrap="square" rtlCol="0" anchor="ctr"/>
           <a:lstStyle/>
           <a:p>
-            <a:pPr marL="0" indent="0">
+            <a:pPr indent="0" marL="0">
               <a:buNone/>
             </a:pPr>
             <a:r>
@@ -2473,7 +2671,7 @@
           <a:bodyPr wrap="square" rtlCol="0" anchor="ctr"/>
           <a:lstStyle/>
           <a:p>
-            <a:pPr marL="0" indent="0">
+            <a:pPr indent="0" marL="0">
               <a:buNone/>
             </a:pPr>
             <a:r>
@@ -2510,13 +2708,6 @@
           </a:solidFill>
           <a:ln/>
         </p:spPr>
-        <p:txBody>
-          <a:bodyPr/>
-          <a:lstStyle/>
-          <a:p>
-            <a:endParaRPr lang="en-DE"/>
-          </a:p>
-        </p:txBody>
       </p:sp>
       <p:sp>
         <p:nvSpPr>
@@ -2539,7 +2730,7 @@
           <a:bodyPr wrap="square" lIns="0" tIns="0" rIns="0" bIns="0" rtlCol="0" anchor="ctr"/>
           <a:lstStyle/>
           <a:p>
-            <a:pPr marL="0" indent="0" algn="ctr">
+            <a:pPr algn="ctr" indent="0" marL="0">
               <a:buNone/>
             </a:pPr>
             <a:r>
@@ -2576,13 +2767,6 @@
           </a:solidFill>
           <a:ln/>
         </p:spPr>
-        <p:txBody>
-          <a:bodyPr/>
-          <a:lstStyle/>
-          <a:p>
-            <a:endParaRPr lang="en-DE"/>
-          </a:p>
-        </p:txBody>
       </p:sp>
       <p:sp>
         <p:nvSpPr>
@@ -2605,7 +2789,7 @@
           <a:bodyPr wrap="square" lIns="0" tIns="0" rIns="0" bIns="0" rtlCol="0" anchor="ctr"/>
           <a:lstStyle/>
           <a:p>
-            <a:pPr marL="0" indent="0" algn="ctr">
+            <a:pPr algn="ctr" indent="0" marL="0">
               <a:buNone/>
             </a:pPr>
             <a:r>
@@ -2642,13 +2826,6 @@
           </a:solidFill>
           <a:ln/>
         </p:spPr>
-        <p:txBody>
-          <a:bodyPr/>
-          <a:lstStyle/>
-          <a:p>
-            <a:endParaRPr lang="en-DE"/>
-          </a:p>
-        </p:txBody>
       </p:sp>
       <p:sp>
         <p:nvSpPr>
@@ -2671,7 +2848,7 @@
           <a:bodyPr wrap="square" lIns="0" tIns="0" rIns="0" bIns="0" rtlCol="0" anchor="ctr"/>
           <a:lstStyle/>
           <a:p>
-            <a:pPr marL="0" indent="0" algn="ctr">
+            <a:pPr algn="ctr" indent="0" marL="0">
               <a:buNone/>
             </a:pPr>
             <a:r>
@@ -2708,13 +2885,6 @@
           </a:solidFill>
           <a:ln/>
         </p:spPr>
-        <p:txBody>
-          <a:bodyPr/>
-          <a:lstStyle/>
-          <a:p>
-            <a:endParaRPr lang="en-DE"/>
-          </a:p>
-        </p:txBody>
       </p:sp>
       <p:sp>
         <p:nvSpPr>
@@ -2737,7 +2907,7 @@
           <a:bodyPr wrap="square" lIns="0" tIns="0" rIns="0" bIns="0" rtlCol="0" anchor="ctr"/>
           <a:lstStyle/>
           <a:p>
-            <a:pPr marL="0" indent="0" algn="ctr">
+            <a:pPr algn="ctr" indent="0" marL="0">
               <a:buNone/>
             </a:pPr>
             <a:r>
@@ -2757,7 +2927,7 @@
       </p:sp>
       <p:graphicFrame>
         <p:nvGraphicFramePr>
-          <p:cNvPr id="12" name="Table 0"/>
+          <p:cNvPr id="11" name="Table 0"/>
           <p:cNvGraphicFramePr>
             <a:graphicFrameLocks noGrp="1"/>
           </p:cNvGraphicFramePr>
@@ -2771,34 +2941,16 @@
         </p:nvGraphicFramePr>
         <p:xfrm>
           <a:off x="548640" y="1645920"/>
-          <a:ext cx="11064240" cy="3017520"/>
+          <a:ext cx="11064240" cy="914400"/>
         </p:xfrm>
         <a:graphic>
           <a:graphicData uri="http://schemas.openxmlformats.org/drawingml/2006/table">
             <a:tbl>
               <a:tblPr/>
               <a:tblGrid>
-                <a:gridCol w="4023360">
-                  <a:extLst>
-                    <a:ext uri="{9D8B030D-6E8A-4147-A177-3AD203B41FA5}">
-                      <a16:colId xmlns:a16="http://schemas.microsoft.com/office/drawing/2014/main" val="20000"/>
-                    </a:ext>
-                  </a:extLst>
-                </a:gridCol>
-                <a:gridCol w="2560320">
-                  <a:extLst>
-                    <a:ext uri="{9D8B030D-6E8A-4147-A177-3AD203B41FA5}">
-                      <a16:colId xmlns:a16="http://schemas.microsoft.com/office/drawing/2014/main" val="20001"/>
-                    </a:ext>
-                  </a:extLst>
-                </a:gridCol>
-                <a:gridCol w="4480560">
-                  <a:extLst>
-                    <a:ext uri="{9D8B030D-6E8A-4147-A177-3AD203B41FA5}">
-                      <a16:colId xmlns:a16="http://schemas.microsoft.com/office/drawing/2014/main" val="20002"/>
-                    </a:ext>
-                  </a:extLst>
-                </a:gridCol>
+                <a:gridCol w="4023360"/>
+                <a:gridCol w="2560320"/>
+                <a:gridCol w="4480560"/>
               </a:tblGrid>
               <a:tr h="502920">
                 <a:tc>
@@ -2806,7 +2958,7 @@
                     <a:bodyPr/>
                     <a:lstStyle/>
                     <a:p>
-                      <a:pPr marL="0" indent="0">
+                      <a:pPr indent="0" marL="0">
                         <a:buNone/>
                       </a:pPr>
                       <a:r>
@@ -2827,7 +2979,7 @@
                       </a:endParaRPr>
                     </a:p>
                   </a:txBody>
-                  <a:tcPr anchor="ctr">
+                  <a:tcPr marL="91440" marR="91440" marT="45720" marB="45720" anchor="ctr">
                     <a:lnL w="12700" cap="flat" cmpd="sng" algn="ctr">
                       <a:solidFill>
                         <a:srgbClr val="CADCFC"/>
@@ -2874,7 +3026,7 @@
                     <a:bodyPr/>
                     <a:lstStyle/>
                     <a:p>
-                      <a:pPr marL="0" indent="0">
+                      <a:pPr indent="0" marL="0">
                         <a:buNone/>
                       </a:pPr>
                       <a:r>
@@ -2895,7 +3047,7 @@
                       </a:endParaRPr>
                     </a:p>
                   </a:txBody>
-                  <a:tcPr anchor="ctr">
+                  <a:tcPr marL="91440" marR="91440" marT="45720" marB="45720" anchor="ctr">
                     <a:lnL w="12700" cap="flat" cmpd="sng" algn="ctr">
                       <a:solidFill>
                         <a:srgbClr val="CADCFC"/>
@@ -2942,7 +3094,7 @@
                     <a:bodyPr/>
                     <a:lstStyle/>
                     <a:p>
-                      <a:pPr marL="0" indent="0">
+                      <a:pPr indent="0" marL="0">
                         <a:buNone/>
                       </a:pPr>
                       <a:r>
@@ -2963,7 +3115,7 @@
                       </a:endParaRPr>
                     </a:p>
                   </a:txBody>
-                  <a:tcPr anchor="ctr">
+                  <a:tcPr marL="91440" marR="91440" marT="45720" marB="45720" anchor="ctr">
                     <a:lnL w="12700" cap="flat" cmpd="sng" algn="ctr">
                       <a:solidFill>
                         <a:srgbClr val="CADCFC"/>
@@ -3005,11 +3157,6 @@
                     </a:solidFill>
                   </a:tcPr>
                 </a:tc>
-                <a:extLst>
-                  <a:ext uri="{0D108BD9-81ED-4DB2-BD59-A6C34878D82A}">
-                    <a16:rowId xmlns:a16="http://schemas.microsoft.com/office/drawing/2014/main" val="10000"/>
-                  </a:ext>
-                </a:extLst>
               </a:tr>
               <a:tr h="502920">
                 <a:tc>
@@ -3017,7 +3164,7 @@
                     <a:bodyPr/>
                     <a:lstStyle/>
                     <a:p>
-                      <a:pPr marL="0" indent="0">
+                      <a:pPr indent="0" marL="0">
                         <a:buNone/>
                       </a:pPr>
                       <a:r>
@@ -3038,7 +3185,7 @@
                       </a:endParaRPr>
                     </a:p>
                   </a:txBody>
-                  <a:tcPr anchor="ctr">
+                  <a:tcPr marL="91440" marR="91440" marT="45720" marB="45720" anchor="ctr">
                     <a:lnL w="12700" cap="flat" cmpd="sng" algn="ctr">
                       <a:solidFill>
                         <a:srgbClr val="CADCFC"/>
@@ -3082,7 +3229,7 @@
                     <a:bodyPr/>
                     <a:lstStyle/>
                     <a:p>
-                      <a:pPr marL="0" indent="0">
+                      <a:pPr indent="0" marL="0">
                         <a:buNone/>
                       </a:pPr>
                       <a:r>
@@ -3103,7 +3250,7 @@
                       </a:endParaRPr>
                     </a:p>
                   </a:txBody>
-                  <a:tcPr anchor="ctr">
+                  <a:tcPr marL="91440" marR="91440" marT="45720" marB="45720" anchor="ctr">
                     <a:lnL w="12700" cap="flat" cmpd="sng" algn="ctr">
                       <a:solidFill>
                         <a:srgbClr val="CADCFC"/>
@@ -3147,7 +3294,7 @@
                     <a:bodyPr/>
                     <a:lstStyle/>
                     <a:p>
-                      <a:pPr marL="0" indent="0">
+                      <a:pPr indent="0" marL="0">
                         <a:buNone/>
                       </a:pPr>
                       <a:r>
@@ -3168,7 +3315,7 @@
                       </a:endParaRPr>
                     </a:p>
                   </a:txBody>
-                  <a:tcPr anchor="ctr">
+                  <a:tcPr marL="91440" marR="91440" marT="45720" marB="45720" anchor="ctr">
                     <a:lnL w="12700" cap="flat" cmpd="sng" algn="ctr">
                       <a:solidFill>
                         <a:srgbClr val="CADCFC"/>
@@ -3207,11 +3354,6 @@
                     </a:lnB>
                   </a:tcPr>
                 </a:tc>
-                <a:extLst>
-                  <a:ext uri="{0D108BD9-81ED-4DB2-BD59-A6C34878D82A}">
-                    <a16:rowId xmlns:a16="http://schemas.microsoft.com/office/drawing/2014/main" val="10001"/>
-                  </a:ext>
-                </a:extLst>
               </a:tr>
               <a:tr h="502920">
                 <a:tc>
@@ -3219,7 +3361,7 @@
                     <a:bodyPr/>
                     <a:lstStyle/>
                     <a:p>
-                      <a:pPr marL="0" indent="0">
+                      <a:pPr indent="0" marL="0">
                         <a:buNone/>
                       </a:pPr>
                       <a:r>
@@ -3240,7 +3382,7 @@
                       </a:endParaRPr>
                     </a:p>
                   </a:txBody>
-                  <a:tcPr anchor="ctr">
+                  <a:tcPr marL="91440" marR="91440" marT="45720" marB="45720" anchor="ctr">
                     <a:lnL w="12700" cap="flat" cmpd="sng" algn="ctr">
                       <a:solidFill>
                         <a:srgbClr val="CADCFC"/>
@@ -3284,7 +3426,7 @@
                     <a:bodyPr/>
                     <a:lstStyle/>
                     <a:p>
-                      <a:pPr marL="0" indent="0">
+                      <a:pPr indent="0" marL="0">
                         <a:buNone/>
                       </a:pPr>
                       <a:r>
@@ -3305,7 +3447,7 @@
                       </a:endParaRPr>
                     </a:p>
                   </a:txBody>
-                  <a:tcPr anchor="ctr">
+                  <a:tcPr marL="91440" marR="91440" marT="45720" marB="45720" anchor="ctr">
                     <a:lnL w="12700" cap="flat" cmpd="sng" algn="ctr">
                       <a:solidFill>
                         <a:srgbClr val="CADCFC"/>
@@ -3349,7 +3491,7 @@
                     <a:bodyPr/>
                     <a:lstStyle/>
                     <a:p>
-                      <a:pPr marL="0" indent="0">
+                      <a:pPr indent="0" marL="0">
                         <a:buNone/>
                       </a:pPr>
                       <a:r>
@@ -3370,7 +3512,7 @@
                       </a:endParaRPr>
                     </a:p>
                   </a:txBody>
-                  <a:tcPr anchor="ctr">
+                  <a:tcPr marL="91440" marR="91440" marT="45720" marB="45720" anchor="ctr">
                     <a:lnL w="12700" cap="flat" cmpd="sng" algn="ctr">
                       <a:solidFill>
                         <a:srgbClr val="CADCFC"/>
@@ -3409,11 +3551,6 @@
                     </a:lnB>
                   </a:tcPr>
                 </a:tc>
-                <a:extLst>
-                  <a:ext uri="{0D108BD9-81ED-4DB2-BD59-A6C34878D82A}">
-                    <a16:rowId xmlns:a16="http://schemas.microsoft.com/office/drawing/2014/main" val="10002"/>
-                  </a:ext>
-                </a:extLst>
               </a:tr>
               <a:tr h="502920">
                 <a:tc>
@@ -3421,7 +3558,7 @@
                     <a:bodyPr/>
                     <a:lstStyle/>
                     <a:p>
-                      <a:pPr marL="0" indent="0">
+                      <a:pPr indent="0" marL="0">
                         <a:buNone/>
                       </a:pPr>
                       <a:r>
@@ -3442,7 +3579,7 @@
                       </a:endParaRPr>
                     </a:p>
                   </a:txBody>
-                  <a:tcPr anchor="ctr">
+                  <a:tcPr marL="91440" marR="91440" marT="45720" marB="45720" anchor="ctr">
                     <a:lnL w="12700" cap="flat" cmpd="sng" algn="ctr">
                       <a:solidFill>
                         <a:srgbClr val="CADCFC"/>
@@ -3486,7 +3623,7 @@
                     <a:bodyPr/>
                     <a:lstStyle/>
                     <a:p>
-                      <a:pPr marL="0" indent="0">
+                      <a:pPr indent="0" marL="0">
                         <a:buNone/>
                       </a:pPr>
                       <a:r>
@@ -3507,7 +3644,7 @@
                       </a:endParaRPr>
                     </a:p>
                   </a:txBody>
-                  <a:tcPr anchor="ctr">
+                  <a:tcPr marL="91440" marR="91440" marT="45720" marB="45720" anchor="ctr">
                     <a:lnL w="12700" cap="flat" cmpd="sng" algn="ctr">
                       <a:solidFill>
                         <a:srgbClr val="CADCFC"/>
@@ -3551,7 +3688,7 @@
                     <a:bodyPr/>
                     <a:lstStyle/>
                     <a:p>
-                      <a:pPr marL="0" indent="0">
+                      <a:pPr indent="0" marL="0">
                         <a:buNone/>
                       </a:pPr>
                       <a:r>
@@ -3572,7 +3709,7 @@
                       </a:endParaRPr>
                     </a:p>
                   </a:txBody>
-                  <a:tcPr anchor="ctr">
+                  <a:tcPr marL="91440" marR="91440" marT="45720" marB="45720" anchor="ctr">
                     <a:lnL w="12700" cap="flat" cmpd="sng" algn="ctr">
                       <a:solidFill>
                         <a:srgbClr val="CADCFC"/>
@@ -3611,11 +3748,6 @@
                     </a:lnB>
                   </a:tcPr>
                 </a:tc>
-                <a:extLst>
-                  <a:ext uri="{0D108BD9-81ED-4DB2-BD59-A6C34878D82A}">
-                    <a16:rowId xmlns:a16="http://schemas.microsoft.com/office/drawing/2014/main" val="10003"/>
-                  </a:ext>
-                </a:extLst>
               </a:tr>
               <a:tr h="502920">
                 <a:tc>
@@ -3623,7 +3755,7 @@
                     <a:bodyPr/>
                     <a:lstStyle/>
                     <a:p>
-                      <a:pPr marL="0" indent="0">
+                      <a:pPr indent="0" marL="0">
                         <a:buNone/>
                       </a:pPr>
                       <a:r>
@@ -3644,7 +3776,7 @@
                       </a:endParaRPr>
                     </a:p>
                   </a:txBody>
-                  <a:tcPr anchor="ctr">
+                  <a:tcPr marL="91440" marR="91440" marT="45720" marB="45720" anchor="ctr">
                     <a:lnL w="12700" cap="flat" cmpd="sng" algn="ctr">
                       <a:solidFill>
                         <a:srgbClr val="CADCFC"/>
@@ -3688,7 +3820,7 @@
                     <a:bodyPr/>
                     <a:lstStyle/>
                     <a:p>
-                      <a:pPr marL="0" indent="0">
+                      <a:pPr indent="0" marL="0">
                         <a:buNone/>
                       </a:pPr>
                       <a:r>
@@ -3709,7 +3841,7 @@
                       </a:endParaRPr>
                     </a:p>
                   </a:txBody>
-                  <a:tcPr anchor="ctr">
+                  <a:tcPr marL="91440" marR="91440" marT="45720" marB="45720" anchor="ctr">
                     <a:lnL w="12700" cap="flat" cmpd="sng" algn="ctr">
                       <a:solidFill>
                         <a:srgbClr val="CADCFC"/>
@@ -3753,7 +3885,7 @@
                     <a:bodyPr/>
                     <a:lstStyle/>
                     <a:p>
-                      <a:pPr marL="0" indent="0">
+                      <a:pPr indent="0" marL="0">
                         <a:buNone/>
                       </a:pPr>
                       <a:r>
@@ -3774,7 +3906,7 @@
                       </a:endParaRPr>
                     </a:p>
                   </a:txBody>
-                  <a:tcPr anchor="ctr">
+                  <a:tcPr marL="91440" marR="91440" marT="45720" marB="45720" anchor="ctr">
                     <a:lnL w="12700" cap="flat" cmpd="sng" algn="ctr">
                       <a:solidFill>
                         <a:srgbClr val="CADCFC"/>
@@ -3813,11 +3945,6 @@
                     </a:lnB>
                   </a:tcPr>
                 </a:tc>
-                <a:extLst>
-                  <a:ext uri="{0D108BD9-81ED-4DB2-BD59-A6C34878D82A}">
-                    <a16:rowId xmlns:a16="http://schemas.microsoft.com/office/drawing/2014/main" val="10004"/>
-                  </a:ext>
-                </a:extLst>
               </a:tr>
               <a:tr h="502920">
                 <a:tc>
@@ -3825,7 +3952,7 @@
                     <a:bodyPr/>
                     <a:lstStyle/>
                     <a:p>
-                      <a:pPr marL="0" indent="0">
+                      <a:pPr indent="0" marL="0">
                         <a:buNone/>
                       </a:pPr>
                       <a:r>
@@ -3846,7 +3973,7 @@
                       </a:endParaRPr>
                     </a:p>
                   </a:txBody>
-                  <a:tcPr anchor="ctr">
+                  <a:tcPr marL="91440" marR="91440" marT="45720" marB="45720" anchor="ctr">
                     <a:lnL w="12700" cap="flat" cmpd="sng" algn="ctr">
                       <a:solidFill>
                         <a:srgbClr val="CADCFC"/>
@@ -3890,7 +4017,7 @@
                     <a:bodyPr/>
                     <a:lstStyle/>
                     <a:p>
-                      <a:pPr marL="0" indent="0">
+                      <a:pPr indent="0" marL="0">
                         <a:buNone/>
                       </a:pPr>
                       <a:r>
@@ -3911,7 +4038,7 @@
                       </a:endParaRPr>
                     </a:p>
                   </a:txBody>
-                  <a:tcPr anchor="ctr">
+                  <a:tcPr marL="91440" marR="91440" marT="45720" marB="45720" anchor="ctr">
                     <a:lnL w="12700" cap="flat" cmpd="sng" algn="ctr">
                       <a:solidFill>
                         <a:srgbClr val="CADCFC"/>
@@ -3955,7 +4082,7 @@
                     <a:bodyPr/>
                     <a:lstStyle/>
                     <a:p>
-                      <a:pPr marL="0" indent="0">
+                      <a:pPr indent="0" marL="0">
                         <a:buNone/>
                       </a:pPr>
                       <a:r>
@@ -3976,7 +4103,7 @@
                       </a:endParaRPr>
                     </a:p>
                   </a:txBody>
-                  <a:tcPr anchor="ctr">
+                  <a:tcPr marL="91440" marR="91440" marT="45720" marB="45720" anchor="ctr">
                     <a:lnL w="12700" cap="flat" cmpd="sng" algn="ctr">
                       <a:solidFill>
                         <a:srgbClr val="CADCFC"/>
@@ -4015,11 +4142,6 @@
                     </a:lnB>
                   </a:tcPr>
                 </a:tc>
-                <a:extLst>
-                  <a:ext uri="{0D108BD9-81ED-4DB2-BD59-A6C34878D82A}">
-                    <a16:rowId xmlns:a16="http://schemas.microsoft.com/office/drawing/2014/main" val="10005"/>
-                  </a:ext>
-                </a:extLst>
               </a:tr>
             </a:tbl>
           </a:graphicData>
@@ -4046,7 +4168,7 @@
           <a:bodyPr wrap="square" rtlCol="0" anchor="ctr"/>
           <a:lstStyle/>
           <a:p>
-            <a:pPr marL="0" indent="0">
+            <a:pPr indent="0" marL="0">
               <a:buNone/>
             </a:pPr>
             <a:r>
@@ -4110,7 +4232,7 @@
           <a:bodyPr wrap="square" rtlCol="0" anchor="ctr"/>
           <a:lstStyle/>
           <a:p>
-            <a:pPr marL="0" indent="0">
+            <a:pPr indent="0" marL="0">
               <a:buNone/>
             </a:pPr>
             <a:r>
@@ -4149,7 +4271,7 @@
           <a:bodyPr wrap="square" rtlCol="0" anchor="ctr"/>
           <a:lstStyle/>
           <a:p>
-            <a:pPr marL="0" indent="0">
+            <a:pPr indent="0" marL="0">
               <a:buNone/>
             </a:pPr>
             <a:r>
@@ -4186,13 +4308,6 @@
           </a:solidFill>
           <a:ln/>
         </p:spPr>
-        <p:txBody>
-          <a:bodyPr/>
-          <a:lstStyle/>
-          <a:p>
-            <a:endParaRPr lang="en-DE"/>
-          </a:p>
-        </p:txBody>
       </p:sp>
       <p:sp>
         <p:nvSpPr>
@@ -4215,7 +4330,7 @@
           <a:bodyPr wrap="square" lIns="0" tIns="0" rIns="0" bIns="0" rtlCol="0" anchor="ctr"/>
           <a:lstStyle/>
           <a:p>
-            <a:pPr marL="0" indent="0" algn="ctr">
+            <a:pPr algn="ctr" indent="0" marL="0">
               <a:buNone/>
             </a:pPr>
             <a:r>
@@ -4252,13 +4367,6 @@
           </a:solidFill>
           <a:ln/>
         </p:spPr>
-        <p:txBody>
-          <a:bodyPr/>
-          <a:lstStyle/>
-          <a:p>
-            <a:endParaRPr lang="en-DE"/>
-          </a:p>
-        </p:txBody>
       </p:sp>
       <p:sp>
         <p:nvSpPr>
@@ -4281,7 +4389,7 @@
           <a:bodyPr wrap="square" lIns="0" tIns="0" rIns="0" bIns="0" rtlCol="0" anchor="ctr"/>
           <a:lstStyle/>
           <a:p>
-            <a:pPr marL="0" indent="0" algn="ctr">
+            <a:pPr algn="ctr" indent="0" marL="0">
               <a:buNone/>
             </a:pPr>
             <a:r>
@@ -4318,13 +4426,6 @@
           </a:solidFill>
           <a:ln/>
         </p:spPr>
-        <p:txBody>
-          <a:bodyPr/>
-          <a:lstStyle/>
-          <a:p>
-            <a:endParaRPr lang="en-DE"/>
-          </a:p>
-        </p:txBody>
       </p:sp>
       <p:sp>
         <p:nvSpPr>
@@ -4347,7 +4448,7 @@
           <a:bodyPr wrap="square" lIns="0" tIns="0" rIns="0" bIns="0" rtlCol="0" anchor="ctr"/>
           <a:lstStyle/>
           <a:p>
-            <a:pPr marL="0" indent="0" algn="ctr">
+            <a:pPr algn="ctr" indent="0" marL="0">
               <a:buNone/>
             </a:pPr>
             <a:r>
@@ -4384,13 +4485,6 @@
           </a:solidFill>
           <a:ln/>
         </p:spPr>
-        <p:txBody>
-          <a:bodyPr/>
-          <a:lstStyle/>
-          <a:p>
-            <a:endParaRPr lang="en-DE"/>
-          </a:p>
-        </p:txBody>
       </p:sp>
       <p:sp>
         <p:nvSpPr>
@@ -4413,7 +4507,7 @@
           <a:bodyPr wrap="square" lIns="0" tIns="0" rIns="0" bIns="0" rtlCol="0" anchor="ctr"/>
           <a:lstStyle/>
           <a:p>
-            <a:pPr marL="0" indent="0" algn="ctr">
+            <a:pPr algn="ctr" indent="0" marL="0">
               <a:buNone/>
             </a:pPr>
             <a:r>
@@ -4457,13 +4551,6 @@
             <a:prstDash val="solid"/>
           </a:ln>
         </p:spPr>
-        <p:txBody>
-          <a:bodyPr/>
-          <a:lstStyle/>
-          <a:p>
-            <a:endParaRPr lang="en-DE"/>
-          </a:p>
-        </p:txBody>
       </p:sp>
       <p:sp>
         <p:nvSpPr>
@@ -4486,7 +4573,7 @@
           <a:bodyPr wrap="square" lIns="0" tIns="0" rIns="0" bIns="0" rtlCol="0" anchor="ctr"/>
           <a:lstStyle/>
           <a:p>
-            <a:pPr marL="0" indent="0">
+            <a:pPr indent="0" marL="0">
               <a:buNone/>
             </a:pPr>
             <a:r>
@@ -4525,7 +4612,7 @@
           <a:bodyPr wrap="square" lIns="0" tIns="0" rIns="0" bIns="0" rtlCol="0" anchor="ctr"/>
           <a:lstStyle/>
           <a:p>
-            <a:pPr marL="0" indent="0">
+            <a:pPr indent="0" marL="0">
               <a:buNone/>
             </a:pPr>
             <a:r>
@@ -4569,13 +4656,6 @@
             <a:prstDash val="solid"/>
           </a:ln>
         </p:spPr>
-        <p:txBody>
-          <a:bodyPr/>
-          <a:lstStyle/>
-          <a:p>
-            <a:endParaRPr lang="en-DE"/>
-          </a:p>
-        </p:txBody>
       </p:sp>
       <p:sp>
         <p:nvSpPr>
@@ -4598,7 +4678,7 @@
           <a:bodyPr wrap="square" lIns="0" tIns="0" rIns="0" bIns="0" rtlCol="0" anchor="ctr"/>
           <a:lstStyle/>
           <a:p>
-            <a:pPr marL="0" indent="0">
+            <a:pPr indent="0" marL="0">
               <a:buNone/>
             </a:pPr>
             <a:r>
@@ -4637,7 +4717,7 @@
           <a:bodyPr wrap="square" lIns="0" tIns="0" rIns="0" bIns="0" rtlCol="0" anchor="ctr"/>
           <a:lstStyle/>
           <a:p>
-            <a:pPr marL="0" indent="0">
+            <a:pPr indent="0" marL="0">
               <a:buNone/>
             </a:pPr>
             <a:r>
@@ -4681,13 +4761,6 @@
             <a:prstDash val="solid"/>
           </a:ln>
         </p:spPr>
-        <p:txBody>
-          <a:bodyPr/>
-          <a:lstStyle/>
-          <a:p>
-            <a:endParaRPr lang="en-DE"/>
-          </a:p>
-        </p:txBody>
       </p:sp>
       <p:sp>
         <p:nvSpPr>
@@ -4710,7 +4783,7 @@
           <a:bodyPr wrap="square" lIns="0" tIns="0" rIns="0" bIns="0" rtlCol="0" anchor="ctr"/>
           <a:lstStyle/>
           <a:p>
-            <a:pPr marL="0" indent="0">
+            <a:pPr indent="0" marL="0">
               <a:buNone/>
             </a:pPr>
             <a:r>
@@ -4749,7 +4822,7 @@
           <a:bodyPr wrap="square" lIns="0" tIns="0" rIns="0" bIns="0" rtlCol="0" anchor="ctr"/>
           <a:lstStyle/>
           <a:p>
-            <a:pPr marL="0" indent="0">
+            <a:pPr indent="0" marL="0">
               <a:buNone/>
             </a:pPr>
             <a:r>
@@ -4793,13 +4866,6 @@
             <a:prstDash val="solid"/>
           </a:ln>
         </p:spPr>
-        <p:txBody>
-          <a:bodyPr/>
-          <a:lstStyle/>
-          <a:p>
-            <a:endParaRPr lang="en-DE"/>
-          </a:p>
-        </p:txBody>
       </p:sp>
       <p:sp>
         <p:nvSpPr>
@@ -4822,7 +4888,7 @@
           <a:bodyPr wrap="square" lIns="0" tIns="0" rIns="0" bIns="0" rtlCol="0" anchor="ctr"/>
           <a:lstStyle/>
           <a:p>
-            <a:pPr marL="0" indent="0">
+            <a:pPr indent="0" marL="0">
               <a:buNone/>
             </a:pPr>
             <a:r>
@@ -4861,7 +4927,7 @@
           <a:bodyPr wrap="square" lIns="0" tIns="0" rIns="0" bIns="0" rtlCol="0" anchor="ctr"/>
           <a:lstStyle/>
           <a:p>
-            <a:pPr marL="0" indent="0">
+            <a:pPr indent="0" marL="0">
               <a:buNone/>
             </a:pPr>
             <a:r>
@@ -4900,13 +4966,6 @@
           </a:solidFill>
           <a:ln/>
         </p:spPr>
-        <p:txBody>
-          <a:bodyPr/>
-          <a:lstStyle/>
-          <a:p>
-            <a:endParaRPr lang="en-DE"/>
-          </a:p>
-        </p:txBody>
       </p:sp>
       <p:sp>
         <p:nvSpPr>
@@ -4929,7 +4988,7 @@
           <a:bodyPr wrap="square" lIns="0" tIns="0" rIns="0" bIns="0" rtlCol="0" anchor="ctr"/>
           <a:lstStyle/>
           <a:p>
-            <a:pPr marL="0" indent="0">
+            <a:pPr indent="0" marL="0">
               <a:buNone/>
             </a:pPr>
             <a:r>
@@ -4968,7 +5027,7 @@
           <a:bodyPr wrap="square" lIns="0" tIns="0" rIns="0" bIns="0" rtlCol="0" anchor="ctr"/>
           <a:lstStyle/>
           <a:p>
-            <a:pPr marL="0" indent="0">
+            <a:pPr indent="0" marL="0">
               <a:buNone/>
             </a:pPr>
             <a:r>
@@ -4985,7 +5044,7 @@
             <a:endParaRPr lang="en-US" sz="1450" dirty="0"/>
           </a:p>
           <a:p>
-            <a:pPr marL="0" indent="0">
+            <a:pPr indent="0" marL="0">
               <a:buNone/>
             </a:pPr>
             <a:r>
@@ -5002,7 +5061,7 @@
             <a:endParaRPr lang="en-US" sz="1450" dirty="0"/>
           </a:p>
           <a:p>
-            <a:pPr marL="0" indent="0">
+            <a:pPr indent="0" marL="0">
               <a:buNone/>
             </a:pPr>
             <a:r>
@@ -5019,7 +5078,7 @@
             <a:endParaRPr lang="en-US" sz="1450" dirty="0"/>
           </a:p>
           <a:p>
-            <a:pPr marL="0" indent="0">
+            <a:pPr indent="0" marL="0">
               <a:buNone/>
             </a:pPr>
             <a:r>
@@ -5036,7 +5095,7 @@
             <a:endParaRPr lang="en-US" sz="1450" dirty="0"/>
           </a:p>
           <a:p>
-            <a:pPr marL="0" indent="0">
+            <a:pPr indent="0" marL="0">
               <a:buNone/>
             </a:pPr>
             <a:r>
@@ -5080,13 +5139,6 @@
             <a:prstDash val="solid"/>
           </a:ln>
         </p:spPr>
-        <p:txBody>
-          <a:bodyPr/>
-          <a:lstStyle/>
-          <a:p>
-            <a:endParaRPr lang="en-DE"/>
-          </a:p>
-        </p:txBody>
       </p:sp>
       <p:sp>
         <p:nvSpPr>
@@ -5109,7 +5161,7 @@
           <a:bodyPr wrap="square" lIns="0" tIns="0" rIns="0" bIns="0" rtlCol="0" anchor="ctr"/>
           <a:lstStyle/>
           <a:p>
-            <a:pPr marL="0" indent="0">
+            <a:pPr indent="0" marL="0">
               <a:buNone/>
             </a:pPr>
             <a:r>
@@ -5148,7 +5200,7 @@
           <a:bodyPr wrap="square" rtlCol="0" anchor="ctr"/>
           <a:lstStyle/>
           <a:p>
-            <a:pPr marL="0" indent="0">
+            <a:pPr indent="0" marL="0">
               <a:buNone/>
             </a:pPr>
             <a:r>
@@ -5212,7 +5264,7 @@
           <a:bodyPr wrap="square" rtlCol="0" anchor="ctr"/>
           <a:lstStyle/>
           <a:p>
-            <a:pPr marL="0" indent="0">
+            <a:pPr indent="0" marL="0">
               <a:buNone/>
             </a:pPr>
             <a:r>
@@ -5251,7 +5303,7 @@
           <a:bodyPr wrap="square" rtlCol="0" anchor="ctr"/>
           <a:lstStyle/>
           <a:p>
-            <a:pPr marL="0" indent="0">
+            <a:pPr indent="0" marL="0">
               <a:buNone/>
             </a:pPr>
             <a:r>
@@ -5288,13 +5340,6 @@
           </a:solidFill>
           <a:ln/>
         </p:spPr>
-        <p:txBody>
-          <a:bodyPr/>
-          <a:lstStyle/>
-          <a:p>
-            <a:endParaRPr lang="en-DE"/>
-          </a:p>
-        </p:txBody>
       </p:sp>
       <p:sp>
         <p:nvSpPr>
@@ -5317,7 +5362,7 @@
           <a:bodyPr wrap="square" lIns="0" tIns="0" rIns="0" bIns="0" rtlCol="0" anchor="ctr"/>
           <a:lstStyle/>
           <a:p>
-            <a:pPr marL="0" indent="0" algn="ctr">
+            <a:pPr algn="ctr" indent="0" marL="0">
               <a:buNone/>
             </a:pPr>
             <a:r>
@@ -5354,13 +5399,6 @@
           </a:solidFill>
           <a:ln/>
         </p:spPr>
-        <p:txBody>
-          <a:bodyPr/>
-          <a:lstStyle/>
-          <a:p>
-            <a:endParaRPr lang="en-DE"/>
-          </a:p>
-        </p:txBody>
       </p:sp>
       <p:sp>
         <p:nvSpPr>
@@ -5383,7 +5421,7 @@
           <a:bodyPr wrap="square" lIns="0" tIns="0" rIns="0" bIns="0" rtlCol="0" anchor="ctr"/>
           <a:lstStyle/>
           <a:p>
-            <a:pPr marL="0" indent="0" algn="ctr">
+            <a:pPr algn="ctr" indent="0" marL="0">
               <a:buNone/>
             </a:pPr>
             <a:r>
@@ -5420,13 +5458,6 @@
           </a:solidFill>
           <a:ln/>
         </p:spPr>
-        <p:txBody>
-          <a:bodyPr/>
-          <a:lstStyle/>
-          <a:p>
-            <a:endParaRPr lang="en-DE"/>
-          </a:p>
-        </p:txBody>
       </p:sp>
       <p:sp>
         <p:nvSpPr>
@@ -5449,7 +5480,7 @@
           <a:bodyPr wrap="square" lIns="0" tIns="0" rIns="0" bIns="0" rtlCol="0" anchor="ctr"/>
           <a:lstStyle/>
           <a:p>
-            <a:pPr marL="0" indent="0" algn="ctr">
+            <a:pPr algn="ctr" indent="0" marL="0">
               <a:buNone/>
             </a:pPr>
             <a:r>
@@ -5486,13 +5517,6 @@
           </a:solidFill>
           <a:ln/>
         </p:spPr>
-        <p:txBody>
-          <a:bodyPr/>
-          <a:lstStyle/>
-          <a:p>
-            <a:endParaRPr lang="en-DE"/>
-          </a:p>
-        </p:txBody>
       </p:sp>
       <p:sp>
         <p:nvSpPr>
@@ -5515,7 +5539,7 @@
           <a:bodyPr wrap="square" lIns="0" tIns="0" rIns="0" bIns="0" rtlCol="0" anchor="ctr"/>
           <a:lstStyle/>
           <a:p>
-            <a:pPr marL="0" indent="0" algn="ctr">
+            <a:pPr algn="ctr" indent="0" marL="0">
               <a:buNone/>
             </a:pPr>
             <a:r>
@@ -5554,7 +5578,7 @@
           <a:bodyPr wrap="square" rtlCol="0" anchor="ctr"/>
           <a:lstStyle/>
           <a:p>
-            <a:pPr marL="0" indent="0">
+            <a:pPr indent="0" marL="0">
               <a:buNone/>
             </a:pPr>
             <a:r>
@@ -5720,7 +5744,7 @@
           <a:bodyPr wrap="square" rtlCol="0" anchor="ctr"/>
           <a:lstStyle/>
           <a:p>
-            <a:pPr marL="0" indent="0">
+            <a:pPr indent="0" marL="0">
               <a:buNone/>
             </a:pPr>
             <a:r>
@@ -5796,7 +5820,7 @@
                 <a:ea typeface="Calibri" pitchFamily="34" charset="-122"/>
                 <a:cs typeface="Calibri" pitchFamily="34" charset="-120"/>
               </a:rPr>
-              <a:t>② Unify the two LLM evidence streams on one gold standard; grow the golden set past significance</a:t>
+              <a:t>② Unify the two LLM evidence streams on one gold standard; golden set grown 60→80 bilingual (exact-tag lift now significant, p=0.001) — grow further for urgency power</a:t>
             </a:r>
             <a:endParaRPr lang="en-US" sz="1300" dirty="0"/>
           </a:p>
@@ -5860,7 +5884,6 @@
         <a:solidFill>
           <a:srgbClr val="1E2761"/>
         </a:solidFill>
-        <a:effectLst/>
       </p:bgPr>
     </p:bg>
     <p:spTree>
@@ -5898,7 +5921,7 @@
           <a:bodyPr wrap="square" rtlCol="0" anchor="ctr"/>
           <a:lstStyle/>
           <a:p>
-            <a:pPr marL="0" indent="0">
+            <a:pPr indent="0" marL="0">
               <a:buNone/>
             </a:pPr>
             <a:r>
@@ -5937,13 +5960,6 @@
           </a:solidFill>
           <a:ln/>
         </p:spPr>
-        <p:txBody>
-          <a:bodyPr/>
-          <a:lstStyle/>
-          <a:p>
-            <a:endParaRPr lang="en-DE"/>
-          </a:p>
-        </p:txBody>
       </p:sp>
       <p:sp>
         <p:nvSpPr>
@@ -5966,7 +5982,7 @@
           <a:bodyPr wrap="square" lIns="0" tIns="0" rIns="0" bIns="0" rtlCol="0" anchor="ctr"/>
           <a:lstStyle/>
           <a:p>
-            <a:pPr marL="0" indent="0">
+            <a:pPr indent="0" marL="0">
               <a:buNone/>
             </a:pPr>
             <a:r>
@@ -6005,7 +6021,7 @@
           <a:bodyPr wrap="square" lIns="0" tIns="0" rIns="0" bIns="0" rtlCol="0" anchor="ctr"/>
           <a:lstStyle/>
           <a:p>
-            <a:pPr marL="0" indent="0">
+            <a:pPr indent="0" marL="0">
               <a:buNone/>
             </a:pPr>
             <a:r>
@@ -6044,13 +6060,6 @@
           </a:solidFill>
           <a:ln/>
         </p:spPr>
-        <p:txBody>
-          <a:bodyPr/>
-          <a:lstStyle/>
-          <a:p>
-            <a:endParaRPr lang="en-DE"/>
-          </a:p>
-        </p:txBody>
       </p:sp>
       <p:sp>
         <p:nvSpPr>
@@ -6073,7 +6082,7 @@
           <a:bodyPr wrap="square" lIns="0" tIns="0" rIns="0" bIns="0" rtlCol="0" anchor="ctr"/>
           <a:lstStyle/>
           <a:p>
-            <a:pPr marL="0" indent="0">
+            <a:pPr indent="0" marL="0">
               <a:buNone/>
             </a:pPr>
             <a:r>
@@ -6112,7 +6121,7 @@
           <a:bodyPr wrap="square" lIns="0" tIns="0" rIns="0" bIns="0" rtlCol="0" anchor="ctr"/>
           <a:lstStyle/>
           <a:p>
-            <a:pPr marL="0" indent="0">
+            <a:pPr indent="0" marL="0">
               <a:buNone/>
             </a:pPr>
             <a:r>
@@ -6151,13 +6160,6 @@
           </a:solidFill>
           <a:ln/>
         </p:spPr>
-        <p:txBody>
-          <a:bodyPr/>
-          <a:lstStyle/>
-          <a:p>
-            <a:endParaRPr lang="en-DE"/>
-          </a:p>
-        </p:txBody>
       </p:sp>
       <p:sp>
         <p:nvSpPr>
@@ -6180,7 +6182,7 @@
           <a:bodyPr wrap="square" lIns="0" tIns="0" rIns="0" bIns="0" rtlCol="0" anchor="ctr"/>
           <a:lstStyle/>
           <a:p>
-            <a:pPr marL="0" indent="0">
+            <a:pPr indent="0" marL="0">
               <a:buNone/>
             </a:pPr>
             <a:r>
@@ -6219,7 +6221,7 @@
           <a:bodyPr wrap="square" lIns="0" tIns="0" rIns="0" bIns="0" rtlCol="0" anchor="ctr"/>
           <a:lstStyle/>
           <a:p>
-            <a:pPr marL="0" indent="0">
+            <a:pPr indent="0" marL="0">
               <a:buNone/>
             </a:pPr>
             <a:r>
@@ -6258,13 +6260,6 @@
           </a:solidFill>
           <a:ln/>
         </p:spPr>
-        <p:txBody>
-          <a:bodyPr/>
-          <a:lstStyle/>
-          <a:p>
-            <a:endParaRPr lang="en-DE"/>
-          </a:p>
-        </p:txBody>
       </p:sp>
       <p:sp>
         <p:nvSpPr>
@@ -6287,7 +6282,7 @@
           <a:bodyPr wrap="square" lIns="0" tIns="0" rIns="0" bIns="0" rtlCol="0" anchor="ctr"/>
           <a:lstStyle/>
           <a:p>
-            <a:pPr marL="0" indent="0">
+            <a:pPr indent="0" marL="0">
               <a:buNone/>
             </a:pPr>
             <a:r>
@@ -6326,7 +6321,7 @@
           <a:bodyPr wrap="square" lIns="0" tIns="0" rIns="0" bIns="0" rtlCol="0" anchor="ctr"/>
           <a:lstStyle/>
           <a:p>
-            <a:pPr marL="0" indent="0">
+            <a:pPr indent="0" marL="0">
               <a:buNone/>
             </a:pPr>
             <a:r>
@@ -6365,7 +6360,7 @@
           <a:bodyPr wrap="square" rtlCol="0" anchor="ctr"/>
           <a:lstStyle/>
           <a:p>
-            <a:pPr marL="0" indent="0">
+            <a:pPr indent="0" marL="0">
               <a:buNone/>
             </a:pPr>
             <a:r>
@@ -6404,7 +6399,7 @@
           <a:bodyPr wrap="square" rtlCol="0" anchor="ctr"/>
           <a:lstStyle/>
           <a:p>
-            <a:pPr marL="0" indent="0">
+            <a:pPr indent="0" marL="0">
               <a:buNone/>
             </a:pPr>
             <a:r>
@@ -6468,7 +6463,7 @@
           <a:bodyPr wrap="square" rtlCol="0" anchor="ctr"/>
           <a:lstStyle/>
           <a:p>
-            <a:pPr marL="0" indent="0">
+            <a:pPr indent="0" marL="0">
               <a:buNone/>
             </a:pPr>
             <a:r>
@@ -6507,7 +6502,7 @@
           <a:bodyPr wrap="square" rtlCol="0" anchor="ctr"/>
           <a:lstStyle/>
           <a:p>
-            <a:pPr marL="0" indent="0">
+            <a:pPr indent="0" marL="0">
               <a:buNone/>
             </a:pPr>
             <a:r>
@@ -6544,13 +6539,6 @@
           </a:solidFill>
           <a:ln/>
         </p:spPr>
-        <p:txBody>
-          <a:bodyPr/>
-          <a:lstStyle/>
-          <a:p>
-            <a:endParaRPr lang="en-DE"/>
-          </a:p>
-        </p:txBody>
       </p:sp>
       <p:sp>
         <p:nvSpPr>
@@ -6573,7 +6561,7 @@
           <a:bodyPr wrap="square" lIns="0" tIns="0" rIns="0" bIns="0" rtlCol="0" anchor="ctr"/>
           <a:lstStyle/>
           <a:p>
-            <a:pPr marL="0" indent="0" algn="ctr">
+            <a:pPr algn="ctr" indent="0" marL="0">
               <a:buNone/>
             </a:pPr>
             <a:r>
@@ -6610,13 +6598,6 @@
           </a:solidFill>
           <a:ln/>
         </p:spPr>
-        <p:txBody>
-          <a:bodyPr/>
-          <a:lstStyle/>
-          <a:p>
-            <a:endParaRPr lang="en-DE"/>
-          </a:p>
-        </p:txBody>
       </p:sp>
       <p:sp>
         <p:nvSpPr>
@@ -6639,7 +6620,7 @@
           <a:bodyPr wrap="square" lIns="0" tIns="0" rIns="0" bIns="0" rtlCol="0" anchor="ctr"/>
           <a:lstStyle/>
           <a:p>
-            <a:pPr marL="0" indent="0" algn="ctr">
+            <a:pPr algn="ctr" indent="0" marL="0">
               <a:buNone/>
             </a:pPr>
             <a:r>
@@ -6676,13 +6657,6 @@
           </a:solidFill>
           <a:ln/>
         </p:spPr>
-        <p:txBody>
-          <a:bodyPr/>
-          <a:lstStyle/>
-          <a:p>
-            <a:endParaRPr lang="en-DE"/>
-          </a:p>
-        </p:txBody>
       </p:sp>
       <p:sp>
         <p:nvSpPr>
@@ -6705,7 +6679,7 @@
           <a:bodyPr wrap="square" lIns="0" tIns="0" rIns="0" bIns="0" rtlCol="0" anchor="ctr"/>
           <a:lstStyle/>
           <a:p>
-            <a:pPr marL="0" indent="0" algn="ctr">
+            <a:pPr algn="ctr" indent="0" marL="0">
               <a:buNone/>
             </a:pPr>
             <a:r>
@@ -6742,13 +6716,6 @@
           </a:solidFill>
           <a:ln/>
         </p:spPr>
-        <p:txBody>
-          <a:bodyPr/>
-          <a:lstStyle/>
-          <a:p>
-            <a:endParaRPr lang="en-DE"/>
-          </a:p>
-        </p:txBody>
       </p:sp>
       <p:sp>
         <p:nvSpPr>
@@ -6771,7 +6738,7 @@
           <a:bodyPr wrap="square" lIns="0" tIns="0" rIns="0" bIns="0" rtlCol="0" anchor="ctr"/>
           <a:lstStyle/>
           <a:p>
-            <a:pPr marL="0" indent="0" algn="ctr">
+            <a:pPr algn="ctr" indent="0" marL="0">
               <a:buNone/>
             </a:pPr>
             <a:r>
@@ -6815,13 +6782,6 @@
             <a:prstDash val="solid"/>
           </a:ln>
         </p:spPr>
-        <p:txBody>
-          <a:bodyPr/>
-          <a:lstStyle/>
-          <a:p>
-            <a:endParaRPr lang="en-DE"/>
-          </a:p>
-        </p:txBody>
       </p:sp>
       <p:sp>
         <p:nvSpPr>
@@ -6844,7 +6804,7 @@
           <a:bodyPr wrap="square" lIns="0" tIns="0" rIns="0" bIns="0" rtlCol="0" anchor="ctr"/>
           <a:lstStyle/>
           <a:p>
-            <a:pPr marL="0" indent="0">
+            <a:pPr indent="0" marL="0">
               <a:buNone/>
             </a:pPr>
             <a:r>
@@ -6883,7 +6843,7 @@
           <a:bodyPr wrap="square" lIns="0" tIns="0" rIns="0" bIns="0" rtlCol="0" anchor="ctr"/>
           <a:lstStyle/>
           <a:p>
-            <a:pPr marL="0" indent="0">
+            <a:pPr indent="0" marL="0">
               <a:buNone/>
             </a:pPr>
             <a:r>
@@ -6927,13 +6887,6 @@
             <a:prstDash val="solid"/>
           </a:ln>
         </p:spPr>
-        <p:txBody>
-          <a:bodyPr/>
-          <a:lstStyle/>
-          <a:p>
-            <a:endParaRPr lang="en-DE"/>
-          </a:p>
-        </p:txBody>
       </p:sp>
       <p:sp>
         <p:nvSpPr>
@@ -6956,7 +6909,7 @@
           <a:bodyPr wrap="square" lIns="0" tIns="0" rIns="0" bIns="0" rtlCol="0" anchor="ctr"/>
           <a:lstStyle/>
           <a:p>
-            <a:pPr marL="0" indent="0">
+            <a:pPr indent="0" marL="0">
               <a:buNone/>
             </a:pPr>
             <a:r>
@@ -6995,7 +6948,7 @@
           <a:bodyPr wrap="square" lIns="0" tIns="0" rIns="0" bIns="0" rtlCol="0" anchor="ctr"/>
           <a:lstStyle/>
           <a:p>
-            <a:pPr marL="0" indent="0">
+            <a:pPr indent="0" marL="0">
               <a:buNone/>
             </a:pPr>
             <a:r>
@@ -7039,13 +6992,6 @@
             <a:prstDash val="solid"/>
           </a:ln>
         </p:spPr>
-        <p:txBody>
-          <a:bodyPr/>
-          <a:lstStyle/>
-          <a:p>
-            <a:endParaRPr lang="en-DE"/>
-          </a:p>
-        </p:txBody>
       </p:sp>
       <p:sp>
         <p:nvSpPr>
@@ -7068,7 +7014,7 @@
           <a:bodyPr wrap="square" lIns="0" tIns="0" rIns="0" bIns="0" rtlCol="0" anchor="ctr"/>
           <a:lstStyle/>
           <a:p>
-            <a:pPr marL="0" indent="0">
+            <a:pPr indent="0" marL="0">
               <a:buNone/>
             </a:pPr>
             <a:r>
@@ -7107,7 +7053,7 @@
           <a:bodyPr wrap="square" lIns="0" tIns="0" rIns="0" bIns="0" rtlCol="0" anchor="ctr"/>
           <a:lstStyle/>
           <a:p>
-            <a:pPr marL="0" indent="0">
+            <a:pPr indent="0" marL="0">
               <a:buNone/>
             </a:pPr>
             <a:r>
@@ -7146,7 +7092,7 @@
           <a:bodyPr wrap="square" rtlCol="0" anchor="ctr"/>
           <a:lstStyle/>
           <a:p>
-            <a:pPr marL="0" indent="0">
+            <a:pPr indent="0" marL="0">
               <a:buNone/>
             </a:pPr>
             <a:r>
@@ -7291,13 +7237,6 @@
           </a:solidFill>
           <a:ln/>
         </p:spPr>
-        <p:txBody>
-          <a:bodyPr/>
-          <a:lstStyle/>
-          <a:p>
-            <a:endParaRPr lang="en-DE"/>
-          </a:p>
-        </p:txBody>
       </p:sp>
       <p:sp>
         <p:nvSpPr>
@@ -7320,7 +7259,7 @@
           <a:bodyPr wrap="square" lIns="0" tIns="0" rIns="0" bIns="0" rtlCol="0" anchor="ctr"/>
           <a:lstStyle/>
           <a:p>
-            <a:pPr marL="0" indent="0">
+            <a:pPr indent="0" marL="0">
               <a:buNone/>
             </a:pPr>
             <a:r>
@@ -7359,7 +7298,7 @@
           <a:bodyPr wrap="square" lIns="0" tIns="0" rIns="0" bIns="0" rtlCol="0" anchor="ctr"/>
           <a:lstStyle/>
           <a:p>
-            <a:pPr marL="0" indent="0">
+            <a:pPr indent="0" marL="0">
               <a:buNone/>
             </a:pPr>
             <a:r>
@@ -7423,7 +7362,7 @@
           <a:bodyPr wrap="square" rtlCol="0" anchor="ctr"/>
           <a:lstStyle/>
           <a:p>
-            <a:pPr marL="0" indent="0">
+            <a:pPr indent="0" marL="0">
               <a:buNone/>
             </a:pPr>
             <a:r>
@@ -7462,7 +7401,7 @@
           <a:bodyPr wrap="square" rtlCol="0" anchor="ctr"/>
           <a:lstStyle/>
           <a:p>
-            <a:pPr marL="0" indent="0">
+            <a:pPr indent="0" marL="0">
               <a:buNone/>
             </a:pPr>
             <a:r>
@@ -7499,13 +7438,6 @@
           </a:solidFill>
           <a:ln/>
         </p:spPr>
-        <p:txBody>
-          <a:bodyPr/>
-          <a:lstStyle/>
-          <a:p>
-            <a:endParaRPr lang="en-DE"/>
-          </a:p>
-        </p:txBody>
       </p:sp>
       <p:sp>
         <p:nvSpPr>
@@ -7528,7 +7460,7 @@
           <a:bodyPr wrap="square" lIns="0" tIns="0" rIns="0" bIns="0" rtlCol="0" anchor="ctr"/>
           <a:lstStyle/>
           <a:p>
-            <a:pPr marL="0" indent="0" algn="ctr">
+            <a:pPr algn="ctr" indent="0" marL="0">
               <a:buNone/>
             </a:pPr>
             <a:r>
@@ -7565,13 +7497,6 @@
           </a:solidFill>
           <a:ln/>
         </p:spPr>
-        <p:txBody>
-          <a:bodyPr/>
-          <a:lstStyle/>
-          <a:p>
-            <a:endParaRPr lang="en-DE"/>
-          </a:p>
-        </p:txBody>
       </p:sp>
       <p:sp>
         <p:nvSpPr>
@@ -7594,7 +7519,7 @@
           <a:bodyPr wrap="square" lIns="0" tIns="0" rIns="0" bIns="0" rtlCol="0" anchor="ctr"/>
           <a:lstStyle/>
           <a:p>
-            <a:pPr marL="0" indent="0" algn="ctr">
+            <a:pPr algn="ctr" indent="0" marL="0">
               <a:buNone/>
             </a:pPr>
             <a:r>
@@ -7631,13 +7556,6 @@
           </a:solidFill>
           <a:ln/>
         </p:spPr>
-        <p:txBody>
-          <a:bodyPr/>
-          <a:lstStyle/>
-          <a:p>
-            <a:endParaRPr lang="en-DE"/>
-          </a:p>
-        </p:txBody>
       </p:sp>
       <p:sp>
         <p:nvSpPr>
@@ -7660,7 +7578,7 @@
           <a:bodyPr wrap="square" lIns="0" tIns="0" rIns="0" bIns="0" rtlCol="0" anchor="ctr"/>
           <a:lstStyle/>
           <a:p>
-            <a:pPr marL="0" indent="0" algn="ctr">
+            <a:pPr algn="ctr" indent="0" marL="0">
               <a:buNone/>
             </a:pPr>
             <a:r>
@@ -7697,13 +7615,6 @@
           </a:solidFill>
           <a:ln/>
         </p:spPr>
-        <p:txBody>
-          <a:bodyPr/>
-          <a:lstStyle/>
-          <a:p>
-            <a:endParaRPr lang="en-DE"/>
-          </a:p>
-        </p:txBody>
       </p:sp>
       <p:sp>
         <p:nvSpPr>
@@ -7726,7 +7637,7 @@
           <a:bodyPr wrap="square" lIns="0" tIns="0" rIns="0" bIns="0" rtlCol="0" anchor="ctr"/>
           <a:lstStyle/>
           <a:p>
-            <a:pPr marL="0" indent="0" algn="ctr">
+            <a:pPr algn="ctr" indent="0" marL="0">
               <a:buNone/>
             </a:pPr>
             <a:r>
@@ -7770,13 +7681,6 @@
             <a:prstDash val="solid"/>
           </a:ln>
         </p:spPr>
-        <p:txBody>
-          <a:bodyPr/>
-          <a:lstStyle/>
-          <a:p>
-            <a:endParaRPr lang="en-DE"/>
-          </a:p>
-        </p:txBody>
       </p:sp>
       <p:sp>
         <p:nvSpPr>
@@ -7799,7 +7703,7 @@
           <a:bodyPr wrap="square" lIns="0" tIns="0" rIns="0" bIns="0" rtlCol="0" anchor="ctr"/>
           <a:lstStyle/>
           <a:p>
-            <a:pPr marL="0" indent="0">
+            <a:pPr indent="0" marL="0">
               <a:buNone/>
             </a:pPr>
             <a:r>
@@ -7838,7 +7742,7 @@
           <a:bodyPr wrap="square" lIns="0" tIns="0" rIns="0" bIns="0" rtlCol="0" anchor="ctr"/>
           <a:lstStyle/>
           <a:p>
-            <a:pPr marL="0" indent="0">
+            <a:pPr indent="0" marL="0">
               <a:buNone/>
             </a:pPr>
             <a:r>
@@ -7882,13 +7786,6 @@
             <a:prstDash val="solid"/>
           </a:ln>
         </p:spPr>
-        <p:txBody>
-          <a:bodyPr/>
-          <a:lstStyle/>
-          <a:p>
-            <a:endParaRPr lang="en-DE"/>
-          </a:p>
-        </p:txBody>
       </p:sp>
       <p:sp>
         <p:nvSpPr>
@@ -7911,7 +7808,7 @@
           <a:bodyPr wrap="square" lIns="0" tIns="0" rIns="0" bIns="0" rtlCol="0" anchor="ctr"/>
           <a:lstStyle/>
           <a:p>
-            <a:pPr marL="0" indent="0">
+            <a:pPr indent="0" marL="0">
               <a:buNone/>
             </a:pPr>
             <a:r>
@@ -7950,7 +7847,7 @@
           <a:bodyPr wrap="square" lIns="0" tIns="0" rIns="0" bIns="0" rtlCol="0" anchor="ctr"/>
           <a:lstStyle/>
           <a:p>
-            <a:pPr marL="0" indent="0">
+            <a:pPr indent="0" marL="0">
               <a:buNone/>
             </a:pPr>
             <a:r>
@@ -7994,13 +7891,6 @@
             <a:prstDash val="solid"/>
           </a:ln>
         </p:spPr>
-        <p:txBody>
-          <a:bodyPr/>
-          <a:lstStyle/>
-          <a:p>
-            <a:endParaRPr lang="en-DE"/>
-          </a:p>
-        </p:txBody>
       </p:sp>
       <p:sp>
         <p:nvSpPr>
@@ -8023,7 +7913,7 @@
           <a:bodyPr wrap="square" lIns="0" tIns="0" rIns="0" bIns="0" rtlCol="0" anchor="ctr"/>
           <a:lstStyle/>
           <a:p>
-            <a:pPr marL="0" indent="0">
+            <a:pPr indent="0" marL="0">
               <a:buNone/>
             </a:pPr>
             <a:r>
@@ -8062,7 +7952,7 @@
           <a:bodyPr wrap="square" lIns="0" tIns="0" rIns="0" bIns="0" rtlCol="0" anchor="ctr"/>
           <a:lstStyle/>
           <a:p>
-            <a:pPr marL="0" indent="0">
+            <a:pPr indent="0" marL="0">
               <a:buNone/>
             </a:pPr>
             <a:r>
@@ -8106,13 +7996,6 @@
             <a:prstDash val="solid"/>
           </a:ln>
         </p:spPr>
-        <p:txBody>
-          <a:bodyPr/>
-          <a:lstStyle/>
-          <a:p>
-            <a:endParaRPr lang="en-DE"/>
-          </a:p>
-        </p:txBody>
       </p:sp>
       <p:sp>
         <p:nvSpPr>
@@ -8135,7 +8018,7 @@
           <a:bodyPr wrap="square" lIns="0" tIns="0" rIns="0" bIns="0" rtlCol="0" anchor="ctr"/>
           <a:lstStyle/>
           <a:p>
-            <a:pPr marL="0" indent="0">
+            <a:pPr indent="0" marL="0">
               <a:buNone/>
             </a:pPr>
             <a:r>
@@ -8174,7 +8057,7 @@
           <a:bodyPr wrap="square" lIns="0" tIns="0" rIns="0" bIns="0" rtlCol="0" anchor="ctr"/>
           <a:lstStyle/>
           <a:p>
-            <a:pPr marL="0" indent="0">
+            <a:pPr indent="0" marL="0">
               <a:buNone/>
             </a:pPr>
             <a:r>
@@ -8218,13 +8101,6 @@
             <a:prstDash val="solid"/>
           </a:ln>
         </p:spPr>
-        <p:txBody>
-          <a:bodyPr/>
-          <a:lstStyle/>
-          <a:p>
-            <a:endParaRPr lang="en-DE"/>
-          </a:p>
-        </p:txBody>
       </p:sp>
       <p:sp>
         <p:nvSpPr>
@@ -8247,7 +8123,7 @@
           <a:bodyPr wrap="square" lIns="0" tIns="0" rIns="0" bIns="0" rtlCol="0" anchor="ctr"/>
           <a:lstStyle/>
           <a:p>
-            <a:pPr marL="0" indent="0">
+            <a:pPr indent="0" marL="0">
               <a:buNone/>
             </a:pPr>
             <a:r>
@@ -8311,7 +8187,7 @@
           <a:bodyPr wrap="square" rtlCol="0" anchor="ctr"/>
           <a:lstStyle/>
           <a:p>
-            <a:pPr marL="0" indent="0">
+            <a:pPr indent="0" marL="0">
               <a:buNone/>
             </a:pPr>
             <a:r>
@@ -8350,7 +8226,7 @@
           <a:bodyPr wrap="square" rtlCol="0" anchor="ctr"/>
           <a:lstStyle/>
           <a:p>
-            <a:pPr marL="0" indent="0">
+            <a:pPr indent="0" marL="0">
               <a:buNone/>
             </a:pPr>
             <a:r>
@@ -8362,7 +8238,7 @@
                 <a:ea typeface="Calibri" pitchFamily="34" charset="-122"/>
                 <a:cs typeface="Calibri" pitchFamily="34" charset="-120"/>
               </a:rPr>
-              <a:t>CLARA — Capture, Listen, Analyze, Respond, Adapt (parallel build: Odradek)</a:t>
+              <a:t>CLARA — Capture, Listen, Analyze, Respond, Adapt</a:t>
             </a:r>
             <a:endParaRPr lang="en-US" sz="1400" dirty="0"/>
           </a:p>
@@ -8387,13 +8263,6 @@
           </a:solidFill>
           <a:ln/>
         </p:spPr>
-        <p:txBody>
-          <a:bodyPr/>
-          <a:lstStyle/>
-          <a:p>
-            <a:endParaRPr lang="en-DE"/>
-          </a:p>
-        </p:txBody>
       </p:sp>
       <p:sp>
         <p:nvSpPr>
@@ -8416,7 +8285,7 @@
           <a:bodyPr wrap="square" lIns="0" tIns="0" rIns="0" bIns="0" rtlCol="0" anchor="ctr"/>
           <a:lstStyle/>
           <a:p>
-            <a:pPr marL="0" indent="0" algn="ctr">
+            <a:pPr algn="ctr" indent="0" marL="0">
               <a:buNone/>
             </a:pPr>
             <a:r>
@@ -8453,13 +8322,6 @@
           </a:solidFill>
           <a:ln/>
         </p:spPr>
-        <p:txBody>
-          <a:bodyPr/>
-          <a:lstStyle/>
-          <a:p>
-            <a:endParaRPr lang="en-DE"/>
-          </a:p>
-        </p:txBody>
       </p:sp>
       <p:sp>
         <p:nvSpPr>
@@ -8482,7 +8344,7 @@
           <a:bodyPr wrap="square" lIns="0" tIns="0" rIns="0" bIns="0" rtlCol="0" anchor="ctr"/>
           <a:lstStyle/>
           <a:p>
-            <a:pPr marL="0" indent="0" algn="ctr">
+            <a:pPr algn="ctr" indent="0" marL="0">
               <a:buNone/>
             </a:pPr>
             <a:r>
@@ -8519,13 +8381,6 @@
           </a:solidFill>
           <a:ln/>
         </p:spPr>
-        <p:txBody>
-          <a:bodyPr/>
-          <a:lstStyle/>
-          <a:p>
-            <a:endParaRPr lang="en-DE"/>
-          </a:p>
-        </p:txBody>
       </p:sp>
       <p:sp>
         <p:nvSpPr>
@@ -8548,7 +8403,7 @@
           <a:bodyPr wrap="square" lIns="0" tIns="0" rIns="0" bIns="0" rtlCol="0" anchor="ctr"/>
           <a:lstStyle/>
           <a:p>
-            <a:pPr marL="0" indent="0" algn="ctr">
+            <a:pPr algn="ctr" indent="0" marL="0">
               <a:buNone/>
             </a:pPr>
             <a:r>
@@ -8585,13 +8440,6 @@
           </a:solidFill>
           <a:ln/>
         </p:spPr>
-        <p:txBody>
-          <a:bodyPr/>
-          <a:lstStyle/>
-          <a:p>
-            <a:endParaRPr lang="en-DE"/>
-          </a:p>
-        </p:txBody>
       </p:sp>
       <p:sp>
         <p:nvSpPr>
@@ -8614,7 +8462,7 @@
           <a:bodyPr wrap="square" lIns="0" tIns="0" rIns="0" bIns="0" rtlCol="0" anchor="ctr"/>
           <a:lstStyle/>
           <a:p>
-            <a:pPr marL="0" indent="0" algn="ctr">
+            <a:pPr algn="ctr" indent="0" marL="0">
               <a:buNone/>
             </a:pPr>
             <a:r>
@@ -8634,14 +8482,14 @@
       </p:sp>
       <p:pic>
         <p:nvPicPr>
-          <p:cNvPr id="12" name="Image 0" descr="/Users/olamakri/Documents/Thesis_writing/diagrams/rendered/01_architecture_logical.png"/>
+          <p:cNvPr id="12" name="Image 0" descr="/Users/olamakri/Documents/CLARA/.claude/worktrees/review-phase-a/thesis/diagrams/rendered/01_architecture_logical.png">    </p:cNvPr>
           <p:cNvPicPr>
             <a:picLocks noChangeAspect="1"/>
           </p:cNvPicPr>
           <p:nvPr/>
         </p:nvPicPr>
         <p:blipFill>
-          <a:blip r:embed="rId3"/>
+          <a:blip r:embed="rId1"/>
           <a:stretch>
             <a:fillRect/>
           </a:stretch>
@@ -8677,7 +8525,7 @@
           <a:bodyPr wrap="square" rtlCol="0" anchor="ctr"/>
           <a:lstStyle/>
           <a:p>
-            <a:pPr marL="0" indent="0">
+            <a:pPr indent="0" marL="0">
               <a:buNone/>
             </a:pPr>
             <a:r>
@@ -8741,7 +8589,7 @@
           <a:bodyPr wrap="square" rtlCol="0" anchor="ctr"/>
           <a:lstStyle/>
           <a:p>
-            <a:pPr marL="0" indent="0">
+            <a:pPr indent="0" marL="0">
               <a:buNone/>
             </a:pPr>
             <a:r>
@@ -8780,7 +8628,7 @@
           <a:bodyPr wrap="square" rtlCol="0" anchor="ctr"/>
           <a:lstStyle/>
           <a:p>
-            <a:pPr marL="0" indent="0">
+            <a:pPr indent="0" marL="0">
               <a:buNone/>
             </a:pPr>
             <a:r>
@@ -8817,13 +8665,6 @@
           </a:solidFill>
           <a:ln/>
         </p:spPr>
-        <p:txBody>
-          <a:bodyPr/>
-          <a:lstStyle/>
-          <a:p>
-            <a:endParaRPr lang="en-DE"/>
-          </a:p>
-        </p:txBody>
       </p:sp>
       <p:sp>
         <p:nvSpPr>
@@ -8846,7 +8687,7 @@
           <a:bodyPr wrap="square" lIns="0" tIns="0" rIns="0" bIns="0" rtlCol="0" anchor="ctr"/>
           <a:lstStyle/>
           <a:p>
-            <a:pPr marL="0" indent="0" algn="ctr">
+            <a:pPr algn="ctr" indent="0" marL="0">
               <a:buNone/>
             </a:pPr>
             <a:r>
@@ -8883,13 +8724,6 @@
           </a:solidFill>
           <a:ln/>
         </p:spPr>
-        <p:txBody>
-          <a:bodyPr/>
-          <a:lstStyle/>
-          <a:p>
-            <a:endParaRPr lang="en-DE"/>
-          </a:p>
-        </p:txBody>
       </p:sp>
       <p:sp>
         <p:nvSpPr>
@@ -8912,7 +8746,7 @@
           <a:bodyPr wrap="square" lIns="0" tIns="0" rIns="0" bIns="0" rtlCol="0" anchor="ctr"/>
           <a:lstStyle/>
           <a:p>
-            <a:pPr marL="0" indent="0" algn="ctr">
+            <a:pPr algn="ctr" indent="0" marL="0">
               <a:buNone/>
             </a:pPr>
             <a:r>
@@ -8949,13 +8783,6 @@
           </a:solidFill>
           <a:ln/>
         </p:spPr>
-        <p:txBody>
-          <a:bodyPr/>
-          <a:lstStyle/>
-          <a:p>
-            <a:endParaRPr lang="en-DE"/>
-          </a:p>
-        </p:txBody>
       </p:sp>
       <p:sp>
         <p:nvSpPr>
@@ -8978,7 +8805,7 @@
           <a:bodyPr wrap="square" lIns="0" tIns="0" rIns="0" bIns="0" rtlCol="0" anchor="ctr"/>
           <a:lstStyle/>
           <a:p>
-            <a:pPr marL="0" indent="0" algn="ctr">
+            <a:pPr algn="ctr" indent="0" marL="0">
               <a:buNone/>
             </a:pPr>
             <a:r>
@@ -9015,13 +8842,6 @@
           </a:solidFill>
           <a:ln/>
         </p:spPr>
-        <p:txBody>
-          <a:bodyPr/>
-          <a:lstStyle/>
-          <a:p>
-            <a:endParaRPr lang="en-DE"/>
-          </a:p>
-        </p:txBody>
       </p:sp>
       <p:sp>
         <p:nvSpPr>
@@ -9044,7 +8864,7 @@
           <a:bodyPr wrap="square" lIns="0" tIns="0" rIns="0" bIns="0" rtlCol="0" anchor="ctr"/>
           <a:lstStyle/>
           <a:p>
-            <a:pPr marL="0" indent="0" algn="ctr">
+            <a:pPr algn="ctr" indent="0" marL="0">
               <a:buNone/>
             </a:pPr>
             <a:r>
@@ -9088,13 +8908,6 @@
             <a:prstDash val="solid"/>
           </a:ln>
         </p:spPr>
-        <p:txBody>
-          <a:bodyPr/>
-          <a:lstStyle/>
-          <a:p>
-            <a:endParaRPr lang="en-DE"/>
-          </a:p>
-        </p:txBody>
       </p:sp>
       <p:sp>
         <p:nvSpPr>
@@ -9117,7 +8930,7 @@
           <a:bodyPr wrap="square" lIns="0" tIns="0" rIns="0" bIns="0" rtlCol="0" anchor="ctr"/>
           <a:lstStyle/>
           <a:p>
-            <a:pPr marL="0" indent="0">
+            <a:pPr indent="0" marL="0">
               <a:buNone/>
             </a:pPr>
             <a:r>
@@ -9156,7 +8969,7 @@
           <a:bodyPr wrap="square" lIns="0" tIns="0" rIns="0" bIns="0" rtlCol="0" anchor="ctr"/>
           <a:lstStyle/>
           <a:p>
-            <a:pPr marL="0" indent="0">
+            <a:pPr indent="0" marL="0">
               <a:buNone/>
             </a:pPr>
             <a:r>
@@ -9200,13 +9013,6 @@
             <a:prstDash val="solid"/>
           </a:ln>
         </p:spPr>
-        <p:txBody>
-          <a:bodyPr/>
-          <a:lstStyle/>
-          <a:p>
-            <a:endParaRPr lang="en-DE"/>
-          </a:p>
-        </p:txBody>
       </p:sp>
       <p:sp>
         <p:nvSpPr>
@@ -9229,7 +9035,7 @@
           <a:bodyPr wrap="square" lIns="0" tIns="0" rIns="0" bIns="0" rtlCol="0" anchor="ctr"/>
           <a:lstStyle/>
           <a:p>
-            <a:pPr marL="0" indent="0">
+            <a:pPr indent="0" marL="0">
               <a:buNone/>
             </a:pPr>
             <a:r>
@@ -9268,7 +9074,7 @@
           <a:bodyPr wrap="square" lIns="0" tIns="0" rIns="0" bIns="0" rtlCol="0" anchor="ctr"/>
           <a:lstStyle/>
           <a:p>
-            <a:pPr marL="0" indent="0">
+            <a:pPr indent="0" marL="0">
               <a:buNone/>
             </a:pPr>
             <a:r>
@@ -9312,13 +9118,6 @@
             <a:prstDash val="solid"/>
           </a:ln>
         </p:spPr>
-        <p:txBody>
-          <a:bodyPr/>
-          <a:lstStyle/>
-          <a:p>
-            <a:endParaRPr lang="en-DE"/>
-          </a:p>
-        </p:txBody>
       </p:sp>
       <p:sp>
         <p:nvSpPr>
@@ -9341,7 +9140,7 @@
           <a:bodyPr wrap="square" lIns="0" tIns="0" rIns="0" bIns="0" rtlCol="0" anchor="ctr"/>
           <a:lstStyle/>
           <a:p>
-            <a:pPr marL="0" indent="0">
+            <a:pPr indent="0" marL="0">
               <a:buNone/>
             </a:pPr>
             <a:r>
@@ -9380,7 +9179,7 @@
           <a:bodyPr wrap="square" lIns="0" tIns="0" rIns="0" bIns="0" rtlCol="0" anchor="ctr"/>
           <a:lstStyle/>
           <a:p>
-            <a:pPr marL="0" indent="0">
+            <a:pPr indent="0" marL="0">
               <a:buNone/>
             </a:pPr>
             <a:r>
@@ -9424,13 +9223,6 @@
             <a:prstDash val="solid"/>
           </a:ln>
         </p:spPr>
-        <p:txBody>
-          <a:bodyPr/>
-          <a:lstStyle/>
-          <a:p>
-            <a:endParaRPr lang="en-DE"/>
-          </a:p>
-        </p:txBody>
       </p:sp>
       <p:sp>
         <p:nvSpPr>
@@ -9453,7 +9245,7 @@
           <a:bodyPr wrap="square" lIns="0" tIns="0" rIns="0" bIns="0" rtlCol="0" anchor="ctr"/>
           <a:lstStyle/>
           <a:p>
-            <a:pPr marL="0" indent="0">
+            <a:pPr indent="0" marL="0">
               <a:buNone/>
             </a:pPr>
             <a:r>
@@ -9492,7 +9284,7 @@
           <a:bodyPr wrap="square" lIns="0" tIns="0" rIns="0" bIns="0" rtlCol="0" anchor="ctr"/>
           <a:lstStyle/>
           <a:p>
-            <a:pPr marL="0" indent="0">
+            <a:pPr indent="0" marL="0">
               <a:buNone/>
             </a:pPr>
             <a:r>
@@ -9536,13 +9328,6 @@
             <a:prstDash val="solid"/>
           </a:ln>
         </p:spPr>
-        <p:txBody>
-          <a:bodyPr/>
-          <a:lstStyle/>
-          <a:p>
-            <a:endParaRPr lang="en-DE"/>
-          </a:p>
-        </p:txBody>
       </p:sp>
       <p:sp>
         <p:nvSpPr>
@@ -9565,7 +9350,7 @@
           <a:bodyPr wrap="square" lIns="0" tIns="0" rIns="0" bIns="0" rtlCol="0" anchor="ctr"/>
           <a:lstStyle/>
           <a:p>
-            <a:pPr marL="0" indent="0">
+            <a:pPr indent="0" marL="0">
               <a:buNone/>
             </a:pPr>
             <a:r>
@@ -9604,7 +9389,7 @@
           <a:bodyPr wrap="square" lIns="0" tIns="0" rIns="0" bIns="0" rtlCol="0" anchor="ctr"/>
           <a:lstStyle/>
           <a:p>
-            <a:pPr marL="0" indent="0">
+            <a:pPr indent="0" marL="0">
               <a:buNone/>
             </a:pPr>
             <a:r>
@@ -9643,13 +9428,6 @@
           </a:solidFill>
           <a:ln/>
         </p:spPr>
-        <p:txBody>
-          <a:bodyPr/>
-          <a:lstStyle/>
-          <a:p>
-            <a:endParaRPr lang="en-DE"/>
-          </a:p>
-        </p:txBody>
       </p:sp>
       <p:sp>
         <p:nvSpPr>
@@ -9672,7 +9450,7 @@
           <a:bodyPr wrap="square" lIns="0" tIns="0" rIns="0" bIns="0" rtlCol="0" anchor="ctr"/>
           <a:lstStyle/>
           <a:p>
-            <a:pPr marL="0" indent="0">
+            <a:pPr indent="0" marL="0">
               <a:buNone/>
             </a:pPr>
             <a:r>
@@ -9711,7 +9489,7 @@
           <a:bodyPr wrap="square" lIns="0" tIns="0" rIns="0" bIns="0" rtlCol="0" anchor="ctr"/>
           <a:lstStyle/>
           <a:p>
-            <a:pPr marL="0" indent="0">
+            <a:pPr indent="0" marL="0">
               <a:buNone/>
             </a:pPr>
             <a:r>
@@ -9775,7 +9553,7 @@
           <a:bodyPr wrap="square" rtlCol="0" anchor="ctr"/>
           <a:lstStyle/>
           <a:p>
-            <a:pPr marL="0" indent="0">
+            <a:pPr indent="0" marL="0">
               <a:buNone/>
             </a:pPr>
             <a:r>
@@ -9814,7 +9592,7 @@
           <a:bodyPr wrap="square" rtlCol="0" anchor="ctr"/>
           <a:lstStyle/>
           <a:p>
-            <a:pPr marL="0" indent="0">
+            <a:pPr indent="0" marL="0">
               <a:buNone/>
             </a:pPr>
             <a:r>
@@ -9851,13 +9629,6 @@
           </a:solidFill>
           <a:ln/>
         </p:spPr>
-        <p:txBody>
-          <a:bodyPr/>
-          <a:lstStyle/>
-          <a:p>
-            <a:endParaRPr lang="en-DE"/>
-          </a:p>
-        </p:txBody>
       </p:sp>
       <p:sp>
         <p:nvSpPr>
@@ -9880,7 +9651,7 @@
           <a:bodyPr wrap="square" lIns="0" tIns="0" rIns="0" bIns="0" rtlCol="0" anchor="ctr"/>
           <a:lstStyle/>
           <a:p>
-            <a:pPr marL="0" indent="0" algn="ctr">
+            <a:pPr algn="ctr" indent="0" marL="0">
               <a:buNone/>
             </a:pPr>
             <a:r>
@@ -9917,13 +9688,6 @@
           </a:solidFill>
           <a:ln/>
         </p:spPr>
-        <p:txBody>
-          <a:bodyPr/>
-          <a:lstStyle/>
-          <a:p>
-            <a:endParaRPr lang="en-DE"/>
-          </a:p>
-        </p:txBody>
       </p:sp>
       <p:sp>
         <p:nvSpPr>
@@ -9946,7 +9710,7 @@
           <a:bodyPr wrap="square" lIns="0" tIns="0" rIns="0" bIns="0" rtlCol="0" anchor="ctr"/>
           <a:lstStyle/>
           <a:p>
-            <a:pPr marL="0" indent="0" algn="ctr">
+            <a:pPr algn="ctr" indent="0" marL="0">
               <a:buNone/>
             </a:pPr>
             <a:r>
@@ -9983,13 +9747,6 @@
           </a:solidFill>
           <a:ln/>
         </p:spPr>
-        <p:txBody>
-          <a:bodyPr/>
-          <a:lstStyle/>
-          <a:p>
-            <a:endParaRPr lang="en-DE"/>
-          </a:p>
-        </p:txBody>
       </p:sp>
       <p:sp>
         <p:nvSpPr>
@@ -10012,7 +9769,7 @@
           <a:bodyPr wrap="square" lIns="0" tIns="0" rIns="0" bIns="0" rtlCol="0" anchor="ctr"/>
           <a:lstStyle/>
           <a:p>
-            <a:pPr marL="0" indent="0" algn="ctr">
+            <a:pPr algn="ctr" indent="0" marL="0">
               <a:buNone/>
             </a:pPr>
             <a:r>
@@ -10049,13 +9806,6 @@
           </a:solidFill>
           <a:ln/>
         </p:spPr>
-        <p:txBody>
-          <a:bodyPr/>
-          <a:lstStyle/>
-          <a:p>
-            <a:endParaRPr lang="en-DE"/>
-          </a:p>
-        </p:txBody>
       </p:sp>
       <p:sp>
         <p:nvSpPr>
@@ -10078,7 +9828,7 @@
           <a:bodyPr wrap="square" lIns="0" tIns="0" rIns="0" bIns="0" rtlCol="0" anchor="ctr"/>
           <a:lstStyle/>
           <a:p>
-            <a:pPr marL="0" indent="0" algn="ctr">
+            <a:pPr algn="ctr" indent="0" marL="0">
               <a:buNone/>
             </a:pPr>
             <a:r>
@@ -10122,13 +9872,6 @@
             <a:prstDash val="solid"/>
           </a:ln>
         </p:spPr>
-        <p:txBody>
-          <a:bodyPr/>
-          <a:lstStyle/>
-          <a:p>
-            <a:endParaRPr lang="en-DE"/>
-          </a:p>
-        </p:txBody>
       </p:sp>
       <p:sp>
         <p:nvSpPr>
@@ -10151,7 +9894,7 @@
           <a:bodyPr wrap="square" lIns="0" tIns="0" rIns="0" bIns="0" rtlCol="0" anchor="ctr"/>
           <a:lstStyle/>
           <a:p>
-            <a:pPr marL="0" indent="0">
+            <a:pPr indent="0" marL="0">
               <a:buNone/>
             </a:pPr>
             <a:r>
@@ -10190,7 +9933,7 @@
           <a:bodyPr wrap="square" lIns="0" tIns="0" rIns="0" bIns="0" rtlCol="0" anchor="ctr"/>
           <a:lstStyle/>
           <a:p>
-            <a:pPr marL="0" indent="0">
+            <a:pPr indent="0" marL="0">
               <a:buNone/>
             </a:pPr>
             <a:r>
@@ -10234,13 +9977,6 @@
             <a:prstDash val="solid"/>
           </a:ln>
         </p:spPr>
-        <p:txBody>
-          <a:bodyPr/>
-          <a:lstStyle/>
-          <a:p>
-            <a:endParaRPr lang="en-DE"/>
-          </a:p>
-        </p:txBody>
       </p:sp>
       <p:sp>
         <p:nvSpPr>
@@ -10263,7 +9999,7 @@
           <a:bodyPr wrap="square" lIns="0" tIns="0" rIns="0" bIns="0" rtlCol="0" anchor="ctr"/>
           <a:lstStyle/>
           <a:p>
-            <a:pPr marL="0" indent="0">
+            <a:pPr indent="0" marL="0">
               <a:buNone/>
             </a:pPr>
             <a:r>
@@ -10302,7 +10038,7 @@
           <a:bodyPr wrap="square" lIns="0" tIns="0" rIns="0" bIns="0" rtlCol="0" anchor="ctr"/>
           <a:lstStyle/>
           <a:p>
-            <a:pPr marL="0" indent="0">
+            <a:pPr indent="0" marL="0">
               <a:buNone/>
             </a:pPr>
             <a:r>
@@ -10346,13 +10082,6 @@
             <a:prstDash val="solid"/>
           </a:ln>
         </p:spPr>
-        <p:txBody>
-          <a:bodyPr/>
-          <a:lstStyle/>
-          <a:p>
-            <a:endParaRPr lang="en-DE"/>
-          </a:p>
-        </p:txBody>
       </p:sp>
       <p:sp>
         <p:nvSpPr>
@@ -10375,7 +10104,7 @@
           <a:bodyPr wrap="square" lIns="0" tIns="0" rIns="0" bIns="0" rtlCol="0" anchor="ctr"/>
           <a:lstStyle/>
           <a:p>
-            <a:pPr marL="0" indent="0">
+            <a:pPr indent="0" marL="0">
               <a:buNone/>
             </a:pPr>
             <a:r>
@@ -10414,7 +10143,7 @@
           <a:bodyPr wrap="square" lIns="0" tIns="0" rIns="0" bIns="0" rtlCol="0" anchor="ctr"/>
           <a:lstStyle/>
           <a:p>
-            <a:pPr marL="0" indent="0">
+            <a:pPr indent="0" marL="0">
               <a:buNone/>
             </a:pPr>
             <a:r>
@@ -10458,13 +10187,6 @@
             <a:prstDash val="solid"/>
           </a:ln>
         </p:spPr>
-        <p:txBody>
-          <a:bodyPr/>
-          <a:lstStyle/>
-          <a:p>
-            <a:endParaRPr lang="en-DE"/>
-          </a:p>
-        </p:txBody>
       </p:sp>
       <p:sp>
         <p:nvSpPr>
@@ -10487,7 +10209,7 @@
           <a:bodyPr wrap="square" lIns="0" tIns="0" rIns="0" bIns="0" rtlCol="0" anchor="ctr"/>
           <a:lstStyle/>
           <a:p>
-            <a:pPr marL="0" indent="0">
+            <a:pPr indent="0" marL="0">
               <a:buNone/>
             </a:pPr>
             <a:r>
@@ -10526,7 +10248,7 @@
           <a:bodyPr wrap="square" lIns="0" tIns="0" rIns="0" bIns="0" rtlCol="0" anchor="ctr"/>
           <a:lstStyle/>
           <a:p>
-            <a:pPr marL="0" indent="0">
+            <a:pPr indent="0" marL="0">
               <a:buNone/>
             </a:pPr>
             <a:r>
@@ -10565,7 +10287,7 @@
           <a:bodyPr wrap="square" rtlCol="0" anchor="ctr"/>
           <a:lstStyle/>
           <a:p>
-            <a:pPr marL="0" indent="0">
+            <a:pPr indent="0" marL="0">
               <a:buNone/>
             </a:pPr>
             <a:r>
@@ -10629,7 +10351,7 @@
           <a:bodyPr wrap="square" rtlCol="0" anchor="ctr"/>
           <a:lstStyle/>
           <a:p>
-            <a:pPr marL="0" indent="0">
+            <a:pPr indent="0" marL="0">
               <a:buNone/>
             </a:pPr>
             <a:r>
@@ -10668,7 +10390,7 @@
           <a:bodyPr wrap="square" rtlCol="0" anchor="ctr"/>
           <a:lstStyle/>
           <a:p>
-            <a:pPr marL="0" indent="0">
+            <a:pPr indent="0" marL="0">
               <a:buNone/>
             </a:pPr>
             <a:r>
@@ -10705,13 +10427,6 @@
           </a:solidFill>
           <a:ln/>
         </p:spPr>
-        <p:txBody>
-          <a:bodyPr/>
-          <a:lstStyle/>
-          <a:p>
-            <a:endParaRPr lang="en-DE"/>
-          </a:p>
-        </p:txBody>
       </p:sp>
       <p:sp>
         <p:nvSpPr>
@@ -10734,7 +10449,7 @@
           <a:bodyPr wrap="square" lIns="0" tIns="0" rIns="0" bIns="0" rtlCol="0" anchor="ctr"/>
           <a:lstStyle/>
           <a:p>
-            <a:pPr marL="0" indent="0" algn="ctr">
+            <a:pPr algn="ctr" indent="0" marL="0">
               <a:buNone/>
             </a:pPr>
             <a:r>
@@ -10771,13 +10486,6 @@
           </a:solidFill>
           <a:ln/>
         </p:spPr>
-        <p:txBody>
-          <a:bodyPr/>
-          <a:lstStyle/>
-          <a:p>
-            <a:endParaRPr lang="en-DE"/>
-          </a:p>
-        </p:txBody>
       </p:sp>
       <p:sp>
         <p:nvSpPr>
@@ -10800,7 +10508,7 @@
           <a:bodyPr wrap="square" lIns="0" tIns="0" rIns="0" bIns="0" rtlCol="0" anchor="ctr"/>
           <a:lstStyle/>
           <a:p>
-            <a:pPr marL="0" indent="0" algn="ctr">
+            <a:pPr algn="ctr" indent="0" marL="0">
               <a:buNone/>
             </a:pPr>
             <a:r>
@@ -10837,13 +10545,6 @@
           </a:solidFill>
           <a:ln/>
         </p:spPr>
-        <p:txBody>
-          <a:bodyPr/>
-          <a:lstStyle/>
-          <a:p>
-            <a:endParaRPr lang="en-DE"/>
-          </a:p>
-        </p:txBody>
       </p:sp>
       <p:sp>
         <p:nvSpPr>
@@ -10866,7 +10567,7 @@
           <a:bodyPr wrap="square" lIns="0" tIns="0" rIns="0" bIns="0" rtlCol="0" anchor="ctr"/>
           <a:lstStyle/>
           <a:p>
-            <a:pPr marL="0" indent="0" algn="ctr">
+            <a:pPr algn="ctr" indent="0" marL="0">
               <a:buNone/>
             </a:pPr>
             <a:r>
@@ -10903,13 +10604,6 @@
           </a:solidFill>
           <a:ln/>
         </p:spPr>
-        <p:txBody>
-          <a:bodyPr/>
-          <a:lstStyle/>
-          <a:p>
-            <a:endParaRPr lang="en-DE"/>
-          </a:p>
-        </p:txBody>
       </p:sp>
       <p:sp>
         <p:nvSpPr>
@@ -10932,7 +10626,7 @@
           <a:bodyPr wrap="square" lIns="0" tIns="0" rIns="0" bIns="0" rtlCol="0" anchor="ctr"/>
           <a:lstStyle/>
           <a:p>
-            <a:pPr marL="0" indent="0" algn="ctr">
+            <a:pPr algn="ctr" indent="0" marL="0">
               <a:buNone/>
             </a:pPr>
             <a:r>
@@ -10952,14 +10646,14 @@
       </p:sp>
       <p:pic>
         <p:nvPicPr>
-          <p:cNvPr id="12" name="Image 0" descr="/Users/olamakri/Documents/Thesis_writing/diagrams/rendered/07_evaluation_pipeline.png"/>
+          <p:cNvPr id="12" name="Image 0" descr="/Users/olamakri/Documents/CLARA/.claude/worktrees/review-phase-a/thesis/diagrams/rendered/07_evaluation_pipeline.png">    </p:cNvPr>
           <p:cNvPicPr>
             <a:picLocks noChangeAspect="1"/>
           </p:cNvPicPr>
           <p:nvPr/>
         </p:nvPicPr>
         <p:blipFill>
-          <a:blip r:embed="rId3"/>
+          <a:blip r:embed="rId1"/>
           <a:stretch>
             <a:fillRect/>
           </a:stretch>
@@ -10995,7 +10689,7 @@
           <a:bodyPr wrap="square" rtlCol="0" anchor="ctr"/>
           <a:lstStyle/>
           <a:p>
-            <a:pPr marL="0" indent="0">
+            <a:pPr indent="0" marL="0">
               <a:buNone/>
             </a:pPr>
             <a:r>
@@ -11007,7 +10701,7 @@
                 <a:ea typeface="Calibri" pitchFamily="34" charset="-122"/>
                 <a:cs typeface="Calibri" pitchFamily="34" charset="-120"/>
               </a:rPr>
-              <a:t>188 real, public, paraphrased signals · 3 sectors (fintech / food delivery / B2B industrial) · EN+DE · human seed labels, authored independently of the artifact. Plus: the artifact's own committed in-repo evaluation (60-case golden set, live LLM) as convergent evidence.</a:t>
+              <a:t>188 real, public, paraphrased signals · 3 sectors (fintech / food delivery / B2B industrial) · EN+DE · human seed labels, authored independently of the artifact. Plus: the artifact's own committed in-repo evaluation (80-case bilingual golden set — 60 EN / 20 DE, live LLM) as convergent evidence.</a:t>
             </a:r>
             <a:endParaRPr lang="en-US" sz="1350" dirty="0"/>
           </a:p>
@@ -11059,7 +10753,7 @@
           <a:bodyPr wrap="square" rtlCol="0" anchor="ctr"/>
           <a:lstStyle/>
           <a:p>
-            <a:pPr marL="0" indent="0">
+            <a:pPr indent="0" marL="0">
               <a:buNone/>
             </a:pPr>
             <a:r>
@@ -11098,7 +10792,7 @@
           <a:bodyPr wrap="square" rtlCol="0" anchor="ctr"/>
           <a:lstStyle/>
           <a:p>
-            <a:pPr marL="0" indent="0">
+            <a:pPr indent="0" marL="0">
               <a:buNone/>
             </a:pPr>
             <a:r>
@@ -11135,13 +10829,6 @@
           </a:solidFill>
           <a:ln/>
         </p:spPr>
-        <p:txBody>
-          <a:bodyPr/>
-          <a:lstStyle/>
-          <a:p>
-            <a:endParaRPr lang="en-DE"/>
-          </a:p>
-        </p:txBody>
       </p:sp>
       <p:sp>
         <p:nvSpPr>
@@ -11164,7 +10851,7 @@
           <a:bodyPr wrap="square" lIns="0" tIns="0" rIns="0" bIns="0" rtlCol="0" anchor="ctr"/>
           <a:lstStyle/>
           <a:p>
-            <a:pPr marL="0" indent="0" algn="ctr">
+            <a:pPr algn="ctr" indent="0" marL="0">
               <a:buNone/>
             </a:pPr>
             <a:r>
@@ -11201,13 +10888,6 @@
           </a:solidFill>
           <a:ln/>
         </p:spPr>
-        <p:txBody>
-          <a:bodyPr/>
-          <a:lstStyle/>
-          <a:p>
-            <a:endParaRPr lang="en-DE"/>
-          </a:p>
-        </p:txBody>
       </p:sp>
       <p:sp>
         <p:nvSpPr>
@@ -11230,7 +10910,7 @@
           <a:bodyPr wrap="square" lIns="0" tIns="0" rIns="0" bIns="0" rtlCol="0" anchor="ctr"/>
           <a:lstStyle/>
           <a:p>
-            <a:pPr marL="0" indent="0" algn="ctr">
+            <a:pPr algn="ctr" indent="0" marL="0">
               <a:buNone/>
             </a:pPr>
             <a:r>
@@ -11267,13 +10947,6 @@
           </a:solidFill>
           <a:ln/>
         </p:spPr>
-        <p:txBody>
-          <a:bodyPr/>
-          <a:lstStyle/>
-          <a:p>
-            <a:endParaRPr lang="en-DE"/>
-          </a:p>
-        </p:txBody>
       </p:sp>
       <p:sp>
         <p:nvSpPr>
@@ -11296,7 +10969,7 @@
           <a:bodyPr wrap="square" lIns="0" tIns="0" rIns="0" bIns="0" rtlCol="0" anchor="ctr"/>
           <a:lstStyle/>
           <a:p>
-            <a:pPr marL="0" indent="0" algn="ctr">
+            <a:pPr algn="ctr" indent="0" marL="0">
               <a:buNone/>
             </a:pPr>
             <a:r>
@@ -11333,13 +11006,6 @@
           </a:solidFill>
           <a:ln/>
         </p:spPr>
-        <p:txBody>
-          <a:bodyPr/>
-          <a:lstStyle/>
-          <a:p>
-            <a:endParaRPr lang="en-DE"/>
-          </a:p>
-        </p:txBody>
       </p:sp>
       <p:sp>
         <p:nvSpPr>
@@ -11362,7 +11028,7 @@
           <a:bodyPr wrap="square" lIns="0" tIns="0" rIns="0" bIns="0" rtlCol="0" anchor="ctr"/>
           <a:lstStyle/>
           <a:p>
-            <a:pPr marL="0" indent="0" algn="ctr">
+            <a:pPr algn="ctr" indent="0" marL="0">
               <a:buNone/>
             </a:pPr>
             <a:r>
@@ -11382,7 +11048,7 @@
       </p:sp>
       <p:graphicFrame>
         <p:nvGraphicFramePr>
-          <p:cNvPr id="12" name="Table 0"/>
+          <p:cNvPr id="9" name="Table 0"/>
           <p:cNvGraphicFramePr>
             <a:graphicFrameLocks noGrp="1"/>
           </p:cNvGraphicFramePr>
@@ -11396,34 +11062,16 @@
         </p:nvGraphicFramePr>
         <p:xfrm>
           <a:off x="548640" y="1645920"/>
-          <a:ext cx="6675120" cy="1828800"/>
+          <a:ext cx="6675120" cy="914400"/>
         </p:xfrm>
         <a:graphic>
           <a:graphicData uri="http://schemas.openxmlformats.org/drawingml/2006/table">
             <a:tbl>
               <a:tblPr/>
               <a:tblGrid>
-                <a:gridCol w="3108960">
-                  <a:extLst>
-                    <a:ext uri="{9D8B030D-6E8A-4147-A177-3AD203B41FA5}">
-                      <a16:colId xmlns:a16="http://schemas.microsoft.com/office/drawing/2014/main" val="20000"/>
-                    </a:ext>
-                  </a:extLst>
-                </a:gridCol>
-                <a:gridCol w="1783080">
-                  <a:extLst>
-                    <a:ext uri="{9D8B030D-6E8A-4147-A177-3AD203B41FA5}">
-                      <a16:colId xmlns:a16="http://schemas.microsoft.com/office/drawing/2014/main" val="20001"/>
-                    </a:ext>
-                  </a:extLst>
-                </a:gridCol>
-                <a:gridCol w="1783080">
-                  <a:extLst>
-                    <a:ext uri="{9D8B030D-6E8A-4147-A177-3AD203B41FA5}">
-                      <a16:colId xmlns:a16="http://schemas.microsoft.com/office/drawing/2014/main" val="20002"/>
-                    </a:ext>
-                  </a:extLst>
-                </a:gridCol>
+                <a:gridCol w="3108960"/>
+                <a:gridCol w="1783080"/>
+                <a:gridCol w="1783080"/>
               </a:tblGrid>
               <a:tr h="457200">
                 <a:tc>
@@ -11431,7 +11079,7 @@
                     <a:bodyPr/>
                     <a:lstStyle/>
                     <a:p>
-                      <a:pPr marL="0" indent="0">
+                      <a:pPr indent="0" marL="0">
                         <a:buNone/>
                       </a:pPr>
                       <a:r>
@@ -11452,7 +11100,7 @@
                       </a:endParaRPr>
                     </a:p>
                   </a:txBody>
-                  <a:tcPr anchor="ctr">
+                  <a:tcPr marL="91440" marR="91440" marT="45720" marB="45720" anchor="ctr">
                     <a:lnL w="12700" cap="flat" cmpd="sng" algn="ctr">
                       <a:solidFill>
                         <a:srgbClr val="CADCFC"/>
@@ -11499,7 +11147,7 @@
                     <a:bodyPr/>
                     <a:lstStyle/>
                     <a:p>
-                      <a:pPr marL="0" indent="0">
+                      <a:pPr indent="0" marL="0">
                         <a:buNone/>
                       </a:pPr>
                       <a:r>
@@ -11520,7 +11168,7 @@
                       </a:endParaRPr>
                     </a:p>
                   </a:txBody>
-                  <a:tcPr anchor="ctr">
+                  <a:tcPr marL="91440" marR="91440" marT="45720" marB="45720" anchor="ctr">
                     <a:lnL w="12700" cap="flat" cmpd="sng" algn="ctr">
                       <a:solidFill>
                         <a:srgbClr val="CADCFC"/>
@@ -11567,7 +11215,7 @@
                     <a:bodyPr/>
                     <a:lstStyle/>
                     <a:p>
-                      <a:pPr marL="0" indent="0">
+                      <a:pPr indent="0" marL="0">
                         <a:buNone/>
                       </a:pPr>
                       <a:r>
@@ -11588,7 +11236,7 @@
                       </a:endParaRPr>
                     </a:p>
                   </a:txBody>
-                  <a:tcPr anchor="ctr">
+                  <a:tcPr marL="91440" marR="91440" marT="45720" marB="45720" anchor="ctr">
                     <a:lnL w="12700" cap="flat" cmpd="sng" algn="ctr">
                       <a:solidFill>
                         <a:srgbClr val="CADCFC"/>
@@ -11630,11 +11278,6 @@
                     </a:solidFill>
                   </a:tcPr>
                 </a:tc>
-                <a:extLst>
-                  <a:ext uri="{0D108BD9-81ED-4DB2-BD59-A6C34878D82A}">
-                    <a16:rowId xmlns:a16="http://schemas.microsoft.com/office/drawing/2014/main" val="10000"/>
-                  </a:ext>
-                </a:extLst>
               </a:tr>
               <a:tr h="457200">
                 <a:tc>
@@ -11642,7 +11285,7 @@
                     <a:bodyPr/>
                     <a:lstStyle/>
                     <a:p>
-                      <a:pPr marL="0" indent="0">
+                      <a:pPr indent="0" marL="0">
                         <a:buNone/>
                       </a:pPr>
                       <a:r>
@@ -11663,7 +11306,7 @@
                       </a:endParaRPr>
                     </a:p>
                   </a:txBody>
-                  <a:tcPr anchor="ctr">
+                  <a:tcPr marL="91440" marR="91440" marT="45720" marB="45720" anchor="ctr">
                     <a:lnL w="12700" cap="flat" cmpd="sng" algn="ctr">
                       <a:solidFill>
                         <a:srgbClr val="CADCFC"/>
@@ -11707,7 +11350,7 @@
                     <a:bodyPr/>
                     <a:lstStyle/>
                     <a:p>
-                      <a:pPr marL="0" indent="0">
+                      <a:pPr indent="0" marL="0">
                         <a:buNone/>
                       </a:pPr>
                       <a:r>
@@ -11728,7 +11371,7 @@
                       </a:endParaRPr>
                     </a:p>
                   </a:txBody>
-                  <a:tcPr anchor="ctr">
+                  <a:tcPr marL="91440" marR="91440" marT="45720" marB="45720" anchor="ctr">
                     <a:lnL w="12700" cap="flat" cmpd="sng" algn="ctr">
                       <a:solidFill>
                         <a:srgbClr val="CADCFC"/>
@@ -11772,7 +11415,7 @@
                     <a:bodyPr/>
                     <a:lstStyle/>
                     <a:p>
-                      <a:pPr marL="0" indent="0">
+                      <a:pPr indent="0" marL="0">
                         <a:buNone/>
                       </a:pPr>
                       <a:r>
@@ -11793,7 +11436,7 @@
                       </a:endParaRPr>
                     </a:p>
                   </a:txBody>
-                  <a:tcPr anchor="ctr">
+                  <a:tcPr marL="91440" marR="91440" marT="45720" marB="45720" anchor="ctr">
                     <a:lnL w="12700" cap="flat" cmpd="sng" algn="ctr">
                       <a:solidFill>
                         <a:srgbClr val="CADCFC"/>
@@ -11832,11 +11475,6 @@
                     </a:lnB>
                   </a:tcPr>
                 </a:tc>
-                <a:extLst>
-                  <a:ext uri="{0D108BD9-81ED-4DB2-BD59-A6C34878D82A}">
-                    <a16:rowId xmlns:a16="http://schemas.microsoft.com/office/drawing/2014/main" val="10001"/>
-                  </a:ext>
-                </a:extLst>
               </a:tr>
               <a:tr h="457200">
                 <a:tc>
@@ -11844,7 +11482,7 @@
                     <a:bodyPr/>
                     <a:lstStyle/>
                     <a:p>
-                      <a:pPr marL="0" indent="0">
+                      <a:pPr indent="0" marL="0">
                         <a:buNone/>
                       </a:pPr>
                       <a:r>
@@ -11865,7 +11503,7 @@
                       </a:endParaRPr>
                     </a:p>
                   </a:txBody>
-                  <a:tcPr anchor="ctr">
+                  <a:tcPr marL="91440" marR="91440" marT="45720" marB="45720" anchor="ctr">
                     <a:lnL w="12700" cap="flat" cmpd="sng" algn="ctr">
                       <a:solidFill>
                         <a:srgbClr val="CADCFC"/>
@@ -11909,7 +11547,7 @@
                     <a:bodyPr/>
                     <a:lstStyle/>
                     <a:p>
-                      <a:pPr marL="0" indent="0">
+                      <a:pPr indent="0" marL="0">
                         <a:buNone/>
                       </a:pPr>
                       <a:r>
@@ -11930,7 +11568,7 @@
                       </a:endParaRPr>
                     </a:p>
                   </a:txBody>
-                  <a:tcPr anchor="ctr">
+                  <a:tcPr marL="91440" marR="91440" marT="45720" marB="45720" anchor="ctr">
                     <a:lnL w="12700" cap="flat" cmpd="sng" algn="ctr">
                       <a:solidFill>
                         <a:srgbClr val="CADCFC"/>
@@ -11974,7 +11612,7 @@
                     <a:bodyPr/>
                     <a:lstStyle/>
                     <a:p>
-                      <a:pPr marL="0" indent="0">
+                      <a:pPr indent="0" marL="0">
                         <a:buNone/>
                       </a:pPr>
                       <a:r>
@@ -11995,7 +11633,7 @@
                       </a:endParaRPr>
                     </a:p>
                   </a:txBody>
-                  <a:tcPr anchor="ctr">
+                  <a:tcPr marL="91440" marR="91440" marT="45720" marB="45720" anchor="ctr">
                     <a:lnL w="12700" cap="flat" cmpd="sng" algn="ctr">
                       <a:solidFill>
                         <a:srgbClr val="CADCFC"/>
@@ -12034,11 +11672,6 @@
                     </a:lnB>
                   </a:tcPr>
                 </a:tc>
-                <a:extLst>
-                  <a:ext uri="{0D108BD9-81ED-4DB2-BD59-A6C34878D82A}">
-                    <a16:rowId xmlns:a16="http://schemas.microsoft.com/office/drawing/2014/main" val="10002"/>
-                  </a:ext>
-                </a:extLst>
               </a:tr>
               <a:tr h="457200">
                 <a:tc>
@@ -12046,7 +11679,7 @@
                     <a:bodyPr/>
                     <a:lstStyle/>
                     <a:p>
-                      <a:pPr marL="0" indent="0">
+                      <a:pPr indent="0" marL="0">
                         <a:buNone/>
                       </a:pPr>
                       <a:r>
@@ -12058,7 +11691,7 @@
                           <a:ea typeface="Calibri" pitchFamily="34" charset="-122"/>
                           <a:cs typeface="Calibri" pitchFamily="34" charset="-120"/>
                         </a:rPr>
-                        <a:t>LLM path (in-repo, 60-case golden set)</a:t>
+                        <a:t>LLM path (in-repo, 80-case bilingual golden set)</a:t>
                       </a:r>
                       <a:endParaRPr lang="en-US" sz="1300" dirty="0">
                         <a:latin typeface="Calibri" charset="0"/>
@@ -12067,7 +11700,7 @@
                       </a:endParaRPr>
                     </a:p>
                   </a:txBody>
-                  <a:tcPr anchor="ctr">
+                  <a:tcPr marL="91440" marR="91440" marT="45720" marB="45720" anchor="ctr">
                     <a:lnL w="12700" cap="flat" cmpd="sng" algn="ctr">
                       <a:solidFill>
                         <a:srgbClr val="CADCFC"/>
@@ -12111,7 +11744,7 @@
                     <a:bodyPr/>
                     <a:lstStyle/>
                     <a:p>
-                      <a:pPr marL="0" indent="0">
+                      <a:pPr indent="0" marL="0">
                         <a:buNone/>
                       </a:pPr>
                       <a:r>
@@ -12123,7 +11756,7 @@
                           <a:ea typeface="Calibri" pitchFamily="34" charset="-122"/>
                           <a:cs typeface="Calibri" pitchFamily="34" charset="-120"/>
                         </a:rPr>
-                        <a:t>0.97 (sentiment)</a:t>
+                        <a:t>0.975 (sentiment)</a:t>
                       </a:r>
                       <a:endParaRPr lang="en-US" sz="1300" dirty="0">
                         <a:latin typeface="Calibri" charset="0"/>
@@ -12132,7 +11765,7 @@
                       </a:endParaRPr>
                     </a:p>
                   </a:txBody>
-                  <a:tcPr anchor="ctr">
+                  <a:tcPr marL="91440" marR="91440" marT="45720" marB="45720" anchor="ctr">
                     <a:lnL w="12700" cap="flat" cmpd="sng" algn="ctr">
                       <a:solidFill>
                         <a:srgbClr val="CADCFC"/>
@@ -12176,7 +11809,7 @@
                     <a:bodyPr/>
                     <a:lstStyle/>
                     <a:p>
-                      <a:pPr marL="0" indent="0">
+                      <a:pPr indent="0" marL="0">
                         <a:buNone/>
                       </a:pPr>
                       <a:r>
@@ -12188,7 +11821,7 @@
                           <a:ea typeface="Calibri" pitchFamily="34" charset="-122"/>
                           <a:cs typeface="Calibri" pitchFamily="34" charset="-120"/>
                         </a:rPr>
-                        <a:t>0.82 (urgency)</a:t>
+                        <a:t>0.863 (urgency)</a:t>
                       </a:r>
                       <a:endParaRPr lang="en-US" sz="1300" dirty="0">
                         <a:latin typeface="Calibri" charset="0"/>
@@ -12197,7 +11830,7 @@
                       </a:endParaRPr>
                     </a:p>
                   </a:txBody>
-                  <a:tcPr anchor="ctr">
+                  <a:tcPr marL="91440" marR="91440" marT="45720" marB="45720" anchor="ctr">
                     <a:lnL w="12700" cap="flat" cmpd="sng" algn="ctr">
                       <a:solidFill>
                         <a:srgbClr val="CADCFC"/>
@@ -12236,11 +11869,6 @@
                     </a:lnB>
                   </a:tcPr>
                 </a:tc>
-                <a:extLst>
-                  <a:ext uri="{0D108BD9-81ED-4DB2-BD59-A6C34878D82A}">
-                    <a16:rowId xmlns:a16="http://schemas.microsoft.com/office/drawing/2014/main" val="10003"/>
-                  </a:ext>
-                </a:extLst>
               </a:tr>
             </a:tbl>
           </a:graphicData>
@@ -12267,7 +11895,7 @@
           <a:bodyPr wrap="square" rtlCol="0" anchor="ctr"/>
           <a:lstStyle/>
           <a:p>
-            <a:pPr marL="0" indent="0">
+            <a:pPr indent="0" marL="0">
               <a:buNone/>
             </a:pPr>
             <a:r>
@@ -12306,7 +11934,7 @@
           <a:bodyPr wrap="square" rtlCol="0" anchor="ctr"/>
           <a:lstStyle/>
           <a:p>
-            <a:pPr marL="0" indent="0">
+            <a:pPr indent="0" marL="0">
               <a:buNone/>
             </a:pPr>
             <a:r>
@@ -12318,7 +11946,7 @@
                 <a:ea typeface="Calibri" pitchFamily="34" charset="-122"/>
                 <a:cs typeface="Calibri" pitchFamily="34" charset="-120"/>
               </a:rPr>
-              <a:t>Convergent in-repo run (CLARA, GLM-5.2, 3 Jul 2026): sentiment 96.7% · urgency 81.7% · theme 80.8% by meaning vs 45.8% exact — semantic scoring vindicated. Real-data star-proxy: ≈90% across all three sectors, zero fine-tuning.</a:t>
+              <a:t>Convergent in-repo run (CLARA, GLM-5.2, 17 Jul 2026, n=80 incl. 20 DE): sentiment 97.5% (CI 94–100) · urgency 86.3% (CI 79–94) · tag F1 80.2% by meaning vs 55.5% exact-string — semantic scoring vindicated; DE within 1.7pp of EN on urgency. Real-data star-proxy: ≈90% across all three sectors, zero fine-tuning.</a:t>
             </a:r>
             <a:endParaRPr lang="en-US" sz="1300" dirty="0"/>
           </a:p>
@@ -12326,14 +11954,14 @@
       </p:sp>
       <p:pic>
         <p:nvPicPr>
-          <p:cNvPr id="15" name="Image 0" descr="/Users/olamakri/Documents/Thesis_writing/evaluation/results/risk_confusion.png"/>
+          <p:cNvPr id="15" name="Image 0" descr="/Users/olamakri/Documents/CLARA/.claude/worktrees/review-phase-a/thesis/evaluation/results/risk_confusion.png">    </p:cNvPr>
           <p:cNvPicPr>
             <a:picLocks noChangeAspect="1"/>
           </p:cNvPicPr>
           <p:nvPr/>
         </p:nvPicPr>
         <p:blipFill>
-          <a:blip r:embed="rId3"/>
+          <a:blip r:embed="rId1"/>
           <a:stretch>
             <a:fillRect/>
           </a:stretch>
@@ -12369,7 +11997,7 @@
           <a:bodyPr wrap="square" rtlCol="0" anchor="ctr"/>
           <a:lstStyle/>
           <a:p>
-            <a:pPr marL="0" indent="0">
+            <a:pPr indent="0" marL="0">
               <a:buNone/>
             </a:pPr>
             <a:r>
@@ -12433,7 +12061,7 @@
           <a:bodyPr wrap="square" rtlCol="0" anchor="ctr"/>
           <a:lstStyle/>
           <a:p>
-            <a:pPr marL="0" indent="0">
+            <a:pPr indent="0" marL="0">
               <a:buNone/>
             </a:pPr>
             <a:r>
@@ -12472,7 +12100,7 @@
           <a:bodyPr wrap="square" rtlCol="0" anchor="ctr"/>
           <a:lstStyle/>
           <a:p>
-            <a:pPr marL="0" indent="0">
+            <a:pPr indent="0" marL="0">
               <a:buNone/>
             </a:pPr>
             <a:r>
@@ -12509,13 +12137,6 @@
           </a:solidFill>
           <a:ln/>
         </p:spPr>
-        <p:txBody>
-          <a:bodyPr/>
-          <a:lstStyle/>
-          <a:p>
-            <a:endParaRPr lang="en-DE"/>
-          </a:p>
-        </p:txBody>
       </p:sp>
       <p:sp>
         <p:nvSpPr>
@@ -12538,7 +12159,7 @@
           <a:bodyPr wrap="square" lIns="0" tIns="0" rIns="0" bIns="0" rtlCol="0" anchor="ctr"/>
           <a:lstStyle/>
           <a:p>
-            <a:pPr marL="0" indent="0" algn="ctr">
+            <a:pPr algn="ctr" indent="0" marL="0">
               <a:buNone/>
             </a:pPr>
             <a:r>
@@ -12575,13 +12196,6 @@
           </a:solidFill>
           <a:ln/>
         </p:spPr>
-        <p:txBody>
-          <a:bodyPr/>
-          <a:lstStyle/>
-          <a:p>
-            <a:endParaRPr lang="en-DE"/>
-          </a:p>
-        </p:txBody>
       </p:sp>
       <p:sp>
         <p:nvSpPr>
@@ -12604,7 +12218,7 @@
           <a:bodyPr wrap="square" lIns="0" tIns="0" rIns="0" bIns="0" rtlCol="0" anchor="ctr"/>
           <a:lstStyle/>
           <a:p>
-            <a:pPr marL="0" indent="0" algn="ctr">
+            <a:pPr algn="ctr" indent="0" marL="0">
               <a:buNone/>
             </a:pPr>
             <a:r>
@@ -12641,13 +12255,6 @@
           </a:solidFill>
           <a:ln/>
         </p:spPr>
-        <p:txBody>
-          <a:bodyPr/>
-          <a:lstStyle/>
-          <a:p>
-            <a:endParaRPr lang="en-DE"/>
-          </a:p>
-        </p:txBody>
       </p:sp>
       <p:sp>
         <p:nvSpPr>
@@ -12670,7 +12277,7 @@
           <a:bodyPr wrap="square" lIns="0" tIns="0" rIns="0" bIns="0" rtlCol="0" anchor="ctr"/>
           <a:lstStyle/>
           <a:p>
-            <a:pPr marL="0" indent="0" algn="ctr">
+            <a:pPr algn="ctr" indent="0" marL="0">
               <a:buNone/>
             </a:pPr>
             <a:r>
@@ -12707,13 +12314,6 @@
           </a:solidFill>
           <a:ln/>
         </p:spPr>
-        <p:txBody>
-          <a:bodyPr/>
-          <a:lstStyle/>
-          <a:p>
-            <a:endParaRPr lang="en-DE"/>
-          </a:p>
-        </p:txBody>
       </p:sp>
       <p:sp>
         <p:nvSpPr>
@@ -12736,7 +12336,7 @@
           <a:bodyPr wrap="square" lIns="0" tIns="0" rIns="0" bIns="0" rtlCol="0" anchor="ctr"/>
           <a:lstStyle/>
           <a:p>
-            <a:pPr marL="0" indent="0" algn="ctr">
+            <a:pPr algn="ctr" indent="0" marL="0">
               <a:buNone/>
             </a:pPr>
             <a:r>
@@ -12763,7 +12363,7 @@
         <p:spPr>
           <a:xfrm>
             <a:off x="731520" y="2011680"/>
-            <a:ext cx="3875204" cy="822960"/>
+            <a:ext cx="3291840" cy="822960"/>
           </a:xfrm>
           <a:prstGeom prst="rect">
             <a:avLst/>
@@ -12775,7 +12375,7 @@
           <a:bodyPr wrap="square" lIns="0" tIns="0" rIns="0" bIns="0" rtlCol="0" anchor="ctr"/>
           <a:lstStyle/>
           <a:p>
-            <a:pPr marL="0" indent="0" algn="ctr">
+            <a:pPr algn="ctr" indent="0" marL="0">
               <a:buNone/>
             </a:pPr>
             <a:r>
@@ -12814,7 +12414,7 @@
           <a:bodyPr wrap="square" lIns="0" tIns="0" rIns="0" bIns="0" rtlCol="0" anchor="ctr"/>
           <a:lstStyle/>
           <a:p>
-            <a:pPr marL="0" indent="0" algn="ctr">
+            <a:pPr algn="ctr" indent="0" marL="0">
               <a:buNone/>
             </a:pPr>
             <a:r>
@@ -12853,7 +12453,7 @@
           <a:bodyPr wrap="square" lIns="0" tIns="0" rIns="0" bIns="0" rtlCol="0" anchor="ctr"/>
           <a:lstStyle/>
           <a:p>
-            <a:pPr marL="0" indent="0" algn="ctr">
+            <a:pPr algn="ctr" indent="0" marL="0">
               <a:buNone/>
             </a:pPr>
             <a:r>
@@ -12892,7 +12492,7 @@
           <a:bodyPr wrap="square" lIns="0" tIns="0" rIns="0" bIns="0" rtlCol="0" anchor="ctr"/>
           <a:lstStyle/>
           <a:p>
-            <a:pPr marL="0" indent="0" algn="ctr">
+            <a:pPr algn="ctr" indent="0" marL="0">
               <a:buNone/>
             </a:pPr>
             <a:r>
@@ -12931,7 +12531,7 @@
           <a:bodyPr wrap="square" lIns="0" tIns="0" rIns="0" bIns="0" rtlCol="0" anchor="ctr"/>
           <a:lstStyle/>
           <a:p>
-            <a:pPr marL="0" indent="0" algn="ctr">
+            <a:pPr algn="ctr" indent="0" marL="0">
               <a:buNone/>
             </a:pPr>
             <a:r>
@@ -12943,7 +12543,7 @@
                 <a:ea typeface="Cambria" pitchFamily="34" charset="-122"/>
                 <a:cs typeface="Cambria" pitchFamily="34" charset="-120"/>
               </a:rPr>
-              <a:t>0 / 6.7%</a:t>
+              <a:t>0 / 2.5%</a:t>
             </a:r>
             <a:endParaRPr lang="en-US" sz="5400" dirty="0"/>
           </a:p>
@@ -12970,7 +12570,7 @@
           <a:bodyPr wrap="square" lIns="0" tIns="0" rIns="0" bIns="0" rtlCol="0" anchor="ctr"/>
           <a:lstStyle/>
           <a:p>
-            <a:pPr marL="0" indent="0" algn="ctr">
+            <a:pPr algn="ctr" indent="0" marL="0">
               <a:buNone/>
             </a:pPr>
             <a:r>
@@ -12982,7 +12582,7 @@
                 <a:ea typeface="Calibri" pitchFamily="34" charset="-122"/>
                 <a:cs typeface="Calibri" pitchFamily="34" charset="-120"/>
               </a:rPr>
-              <a:t>PII leaks across ledger / hallucination rate, latest run</a:t>
+              <a:t>PII leaks across ledger / hallucination rate, latest run (hallucination check EN-scope by construction)</a:t>
             </a:r>
             <a:endParaRPr lang="en-US" sz="1250" dirty="0"/>
           </a:p>
@@ -13014,13 +12614,6 @@
             <a:prstDash val="solid"/>
           </a:ln>
         </p:spPr>
-        <p:txBody>
-          <a:bodyPr/>
-          <a:lstStyle/>
-          <a:p>
-            <a:endParaRPr lang="en-DE"/>
-          </a:p>
-        </p:txBody>
       </p:sp>
       <p:sp>
         <p:nvSpPr>
@@ -13043,7 +12636,7 @@
           <a:bodyPr wrap="square" lIns="0" tIns="0" rIns="0" bIns="0" rtlCol="0" anchor="ctr"/>
           <a:lstStyle/>
           <a:p>
-            <a:pPr marL="0" indent="0">
+            <a:pPr indent="0" marL="0">
               <a:buNone/>
             </a:pPr>
             <a:r>
@@ -13082,7 +12675,7 @@
           <a:bodyPr wrap="square" lIns="0" tIns="0" rIns="0" bIns="0" rtlCol="0" anchor="ctr"/>
           <a:lstStyle/>
           <a:p>
-            <a:pPr marL="0" indent="0">
+            <a:pPr indent="0" marL="0">
               <a:buNone/>
             </a:pPr>
             <a:r>
@@ -13401,319 +12994,4 @@
     </a:ext>
   </a:extLst>
 </a:theme>
-</file>
-
-<file path=ppt/theme/theme2.xml><?xml version="1.0" encoding="utf-8"?>
-<a:theme xmlns:a="http://schemas.openxmlformats.org/drawingml/2006/main" name="Office Theme">
-  <a:themeElements>
-    <a:clrScheme name="Office">
-      <a:dk1>
-        <a:sysClr val="windowText" lastClr="000000"/>
-      </a:dk1>
-      <a:lt1>
-        <a:sysClr val="window" lastClr="FFFFFF"/>
-      </a:lt1>
-      <a:dk2>
-        <a:srgbClr val="0E2841"/>
-      </a:dk2>
-      <a:lt2>
-        <a:srgbClr val="E8E8E8"/>
-      </a:lt2>
-      <a:accent1>
-        <a:srgbClr val="156082"/>
-      </a:accent1>
-      <a:accent2>
-        <a:srgbClr val="E97132"/>
-      </a:accent2>
-      <a:accent3>
-        <a:srgbClr val="196B24"/>
-      </a:accent3>
-      <a:accent4>
-        <a:srgbClr val="0F9ED5"/>
-      </a:accent4>
-      <a:accent5>
-        <a:srgbClr val="A02B93"/>
-      </a:accent5>
-      <a:accent6>
-        <a:srgbClr val="4EA72E"/>
-      </a:accent6>
-      <a:hlink>
-        <a:srgbClr val="467886"/>
-      </a:hlink>
-      <a:folHlink>
-        <a:srgbClr val="96607D"/>
-      </a:folHlink>
-    </a:clrScheme>
-    <a:fontScheme name="Office">
-      <a:majorFont>
-        <a:latin typeface="Aptos Display" panose="02110004020202020204"/>
-        <a:ea typeface=""/>
-        <a:cs typeface=""/>
-        <a:font script="Jpan" typeface="游ゴシック Light"/>
-        <a:font script="Hang" typeface="맑은 고딕"/>
-        <a:font script="Hans" typeface="等线 Light"/>
-        <a:font script="Hant" typeface="新細明體"/>
-        <a:font script="Arab" typeface="Times New Roman"/>
-        <a:font script="Hebr" typeface="Times New Roman"/>
-        <a:font script="Thai" typeface="Angsana New"/>
-        <a:font script="Ethi" typeface="Nyala"/>
-        <a:font script="Beng" typeface="Vrinda"/>
-        <a:font script="Gujr" typeface="Shruti"/>
-        <a:font script="Khmr" typeface="MoolBoran"/>
-        <a:font script="Knda" typeface="Tunga"/>
-        <a:font script="Guru" typeface="Raavi"/>
-        <a:font script="Cans" typeface="Euphemia"/>
-        <a:font script="Cher" typeface="Plantagenet Cherokee"/>
-        <a:font script="Yiii" typeface="Microsoft Yi Baiti"/>
-        <a:font script="Tibt" typeface="Microsoft Himalaya"/>
-        <a:font script="Thaa" typeface="MV Boli"/>
-        <a:font script="Deva" typeface="Mangal"/>
-        <a:font script="Telu" typeface="Gautami"/>
-        <a:font script="Taml" typeface="Latha"/>
-        <a:font script="Syrc" typeface="Estrangelo Edessa"/>
-        <a:font script="Orya" typeface="Kalinga"/>
-        <a:font script="Mlym" typeface="Kartika"/>
-        <a:font script="Laoo" typeface="DokChampa"/>
-        <a:font script="Sinh" typeface="Iskoola Pota"/>
-        <a:font script="Mong" typeface="Mongolian Baiti"/>
-        <a:font script="Viet" typeface="Times New Roman"/>
-        <a:font script="Uigh" typeface="Microsoft Uighur"/>
-        <a:font script="Geor" typeface="Sylfaen"/>
-        <a:font script="Armn" typeface="Arial"/>
-        <a:font script="Bugi" typeface="Leelawadee UI"/>
-        <a:font script="Bopo" typeface="Microsoft JhengHei"/>
-        <a:font script="Java" typeface="Javanese Text"/>
-        <a:font script="Lisu" typeface="Segoe UI"/>
-        <a:font script="Mymr" typeface="Myanmar Text"/>
-        <a:font script="Nkoo" typeface="Ebrima"/>
-        <a:font script="Olck" typeface="Nirmala UI"/>
-        <a:font script="Osma" typeface="Ebrima"/>
-        <a:font script="Phag" typeface="Phagspa"/>
-        <a:font script="Syrn" typeface="Estrangelo Edessa"/>
-        <a:font script="Syrj" typeface="Estrangelo Edessa"/>
-        <a:font script="Syre" typeface="Estrangelo Edessa"/>
-        <a:font script="Sora" typeface="Nirmala UI"/>
-        <a:font script="Tale" typeface="Microsoft Tai Le"/>
-        <a:font script="Talu" typeface="Microsoft New Tai Lue"/>
-        <a:font script="Tfng" typeface="Ebrima"/>
-      </a:majorFont>
-      <a:minorFont>
-        <a:latin typeface="Aptos" panose="02110004020202020204"/>
-        <a:ea typeface=""/>
-        <a:cs typeface=""/>
-        <a:font script="Jpan" typeface="游ゴシック"/>
-        <a:font script="Hang" typeface="맑은 고딕"/>
-        <a:font script="Hans" typeface="等线"/>
-        <a:font script="Hant" typeface="新細明體"/>
-        <a:font script="Arab" typeface="Arial"/>
-        <a:font script="Hebr" typeface="Arial"/>
-        <a:font script="Thai" typeface="Cordia New"/>
-        <a:font script="Ethi" typeface="Nyala"/>
-        <a:font script="Beng" typeface="Vrinda"/>
-        <a:font script="Gujr" typeface="Shruti"/>
-        <a:font script="Khmr" typeface="DaunPenh"/>
-        <a:font script="Knda" typeface="Tunga"/>
-        <a:font script="Guru" typeface="Raavi"/>
-        <a:font script="Cans" typeface="Euphemia"/>
-        <a:font script="Cher" typeface="Plantagenet Cherokee"/>
-        <a:font script="Yiii" typeface="Microsoft Yi Baiti"/>
-        <a:font script="Tibt" typeface="Microsoft Himalaya"/>
-        <a:font script="Thaa" typeface="MV Boli"/>
-        <a:font script="Deva" typeface="Mangal"/>
-        <a:font script="Telu" typeface="Gautami"/>
-        <a:font script="Taml" typeface="Latha"/>
-        <a:font script="Syrc" typeface="Estrangelo Edessa"/>
-        <a:font script="Orya" typeface="Kalinga"/>
-        <a:font script="Mlym" typeface="Kartika"/>
-        <a:font script="Laoo" typeface="DokChampa"/>
-        <a:font script="Sinh" typeface="Iskoola Pota"/>
-        <a:font script="Mong" typeface="Mongolian Baiti"/>
-        <a:font script="Viet" typeface="Arial"/>
-        <a:font script="Uigh" typeface="Microsoft Uighur"/>
-        <a:font script="Geor" typeface="Sylfaen"/>
-        <a:font script="Armn" typeface="Arial"/>
-        <a:font script="Bugi" typeface="Leelawadee UI"/>
-        <a:font script="Bopo" typeface="Microsoft JhengHei"/>
-        <a:font script="Java" typeface="Javanese Text"/>
-        <a:font script="Lisu" typeface="Segoe UI"/>
-        <a:font script="Mymr" typeface="Myanmar Text"/>
-        <a:font script="Nkoo" typeface="Ebrima"/>
-        <a:font script="Olck" typeface="Nirmala UI"/>
-        <a:font script="Osma" typeface="Ebrima"/>
-        <a:font script="Phag" typeface="Phagspa"/>
-        <a:font script="Syrn" typeface="Estrangelo Edessa"/>
-        <a:font script="Syrj" typeface="Estrangelo Edessa"/>
-        <a:font script="Syre" typeface="Estrangelo Edessa"/>
-        <a:font script="Sora" typeface="Nirmala UI"/>
-        <a:font script="Tale" typeface="Microsoft Tai Le"/>
-        <a:font script="Talu" typeface="Microsoft New Tai Lue"/>
-        <a:font script="Tfng" typeface="Ebrima"/>
-      </a:minorFont>
-    </a:fontScheme>
-    <a:fmtScheme name="Office">
-      <a:fillStyleLst>
-        <a:solidFill>
-          <a:schemeClr val="phClr"/>
-        </a:solidFill>
-        <a:gradFill rotWithShape="1">
-          <a:gsLst>
-            <a:gs pos="0">
-              <a:schemeClr val="phClr">
-                <a:lumMod val="110000"/>
-                <a:satMod val="105000"/>
-                <a:tint val="67000"/>
-              </a:schemeClr>
-            </a:gs>
-            <a:gs pos="50000">
-              <a:schemeClr val="phClr">
-                <a:lumMod val="105000"/>
-                <a:satMod val="103000"/>
-                <a:tint val="73000"/>
-              </a:schemeClr>
-            </a:gs>
-            <a:gs pos="100000">
-              <a:schemeClr val="phClr">
-                <a:lumMod val="105000"/>
-                <a:satMod val="109000"/>
-                <a:tint val="81000"/>
-              </a:schemeClr>
-            </a:gs>
-          </a:gsLst>
-          <a:lin ang="5400000" scaled="0"/>
-        </a:gradFill>
-        <a:gradFill rotWithShape="1">
-          <a:gsLst>
-            <a:gs pos="0">
-              <a:schemeClr val="phClr">
-                <a:satMod val="103000"/>
-                <a:lumMod val="102000"/>
-                <a:tint val="94000"/>
-              </a:schemeClr>
-            </a:gs>
-            <a:gs pos="50000">
-              <a:schemeClr val="phClr">
-                <a:satMod val="110000"/>
-                <a:lumMod val="100000"/>
-                <a:shade val="100000"/>
-              </a:schemeClr>
-            </a:gs>
-            <a:gs pos="100000">
-              <a:schemeClr val="phClr">
-                <a:lumMod val="99000"/>
-                <a:satMod val="120000"/>
-                <a:shade val="78000"/>
-              </a:schemeClr>
-            </a:gs>
-          </a:gsLst>
-          <a:lin ang="5400000" scaled="0"/>
-        </a:gradFill>
-      </a:fillStyleLst>
-      <a:lnStyleLst>
-        <a:ln w="12700" cap="flat" cmpd="sng" algn="ctr">
-          <a:solidFill>
-            <a:schemeClr val="phClr"/>
-          </a:solidFill>
-          <a:prstDash val="solid"/>
-          <a:miter lim="800000"/>
-        </a:ln>
-        <a:ln w="19050" cap="flat" cmpd="sng" algn="ctr">
-          <a:solidFill>
-            <a:schemeClr val="phClr"/>
-          </a:solidFill>
-          <a:prstDash val="solid"/>
-          <a:miter lim="800000"/>
-        </a:ln>
-        <a:ln w="25400" cap="flat" cmpd="sng" algn="ctr">
-          <a:solidFill>
-            <a:schemeClr val="phClr"/>
-          </a:solidFill>
-          <a:prstDash val="solid"/>
-          <a:miter lim="800000"/>
-        </a:ln>
-      </a:lnStyleLst>
-      <a:effectStyleLst>
-        <a:effectStyle>
-          <a:effectLst/>
-        </a:effectStyle>
-        <a:effectStyle>
-          <a:effectLst/>
-        </a:effectStyle>
-        <a:effectStyle>
-          <a:effectLst>
-            <a:outerShdw blurRad="57150" dist="19050" dir="5400000" algn="ctr" rotWithShape="0">
-              <a:srgbClr val="000000">
-                <a:alpha val="63000"/>
-              </a:srgbClr>
-            </a:outerShdw>
-          </a:effectLst>
-        </a:effectStyle>
-      </a:effectStyleLst>
-      <a:bgFillStyleLst>
-        <a:solidFill>
-          <a:schemeClr val="phClr"/>
-        </a:solidFill>
-        <a:solidFill>
-          <a:schemeClr val="phClr">
-            <a:tint val="95000"/>
-            <a:satMod val="170000"/>
-          </a:schemeClr>
-        </a:solidFill>
-        <a:gradFill rotWithShape="1">
-          <a:gsLst>
-            <a:gs pos="0">
-              <a:schemeClr val="phClr">
-                <a:tint val="93000"/>
-                <a:satMod val="150000"/>
-                <a:shade val="98000"/>
-                <a:lumMod val="102000"/>
-              </a:schemeClr>
-            </a:gs>
-            <a:gs pos="50000">
-              <a:schemeClr val="phClr">
-                <a:tint val="98000"/>
-                <a:satMod val="130000"/>
-                <a:shade val="90000"/>
-                <a:lumMod val="103000"/>
-              </a:schemeClr>
-            </a:gs>
-            <a:gs pos="100000">
-              <a:schemeClr val="phClr">
-                <a:shade val="63000"/>
-                <a:satMod val="120000"/>
-              </a:schemeClr>
-            </a:gs>
-          </a:gsLst>
-          <a:lin ang="5400000" scaled="0"/>
-        </a:gradFill>
-      </a:bgFillStyleLst>
-    </a:fmtScheme>
-  </a:themeElements>
-  <a:objectDefaults>
-    <a:lnDef>
-      <a:spPr/>
-      <a:bodyPr/>
-      <a:lstStyle/>
-      <a:style>
-        <a:lnRef idx="2">
-          <a:schemeClr val="accent1"/>
-        </a:lnRef>
-        <a:fillRef idx="0">
-          <a:schemeClr val="accent1"/>
-        </a:fillRef>
-        <a:effectRef idx="1">
-          <a:schemeClr val="accent1"/>
-        </a:effectRef>
-        <a:fontRef idx="minor">
-          <a:schemeClr val="tx1"/>
-        </a:fontRef>
-      </a:style>
-    </a:lnDef>
-  </a:objectDefaults>
-  <a:extraClrSchemeLst/>
-  <a:extLst>
-    <a:ext uri="{05A4C25C-085E-4340-85A3-A5531E510DB2}">
-      <thm15:themeFamily xmlns:thm15="http://schemas.microsoft.com/office/thememl/2012/main" name="Office Theme" id="{2E142A2C-CD16-42D6-873A-C26D2A0506FA}" vid="{1BDDFF52-6CD6-40A5-AB3C-68EB2F1E4D0A}"/>
-    </a:ext>
-  </a:extLst>
-</a:theme>
 </file>
--- a/thesis/defense/defense_deck.pptx
+++ b/thesis/defense/defense_deck.pptx
@@ -18,9 +18,14 @@
     <p:sldId id="266" r:id="rId12"/>
     <p:sldId id="267" r:id="rId13"/>
     <p:sldId id="268" r:id="rId14"/>
+    <p:sldId id="269" r:id="rId15"/>
+    <p:sldId id="270" r:id="rId16"/>
+    <p:sldId id="271" r:id="rId17"/>
+    <p:sldId id="272" r:id="rId18"/>
+    <p:sldId id="273" r:id="rId19"/>
   </p:sldIdLst>
   <p:notesMasterIdLst>
-    <p:notesMasterId r:id="rId15"/>
+    <p:notesMasterId r:id="rId20"/>
   </p:notesMasterIdLst>
   <p:sldSz cx="12192000" cy="6858000"/>
   <p:notesSz cx="6858000" cy="12192000"/>
@@ -514,7 +519,7 @@
           <a:p>
             <a:r>
               <a:rPr lang="en-US" dirty="0"/>
-              <a:t>60–90s. Frame in one breath: organisations collect more feedback than ever, yet fewer than a third systematically close the loop. This thesis designs, builds and evaluates a platform where the loop is not just closed but GOVERNED and MEASURED — and where what worked becomes organisational memory. One system, studied through Design Science Research.</a:t>
+              <a:t>60–90s. Frame in one breath: organisations collect more feedback than ever, yet fewer than a third systematically close the loop. This thesis designs, builds and evaluates a platform where the loop is not just closed but GOVERNED and MEASURED — and where what worked becomes organisational memory. One system, studied through Design Science Research. TODAY: progress review, not the defense — lead with the architecture slides and the progress-since-mid-July section.</a:t>
             </a:r>
             <a:endParaRPr lang="en-US" dirty="0"/>
           </a:p>
@@ -602,7 +607,7 @@
           <a:p>
             <a:r>
               <a:rPr lang="en-US" dirty="0"/>
-              <a:t>90s. Pre-empt the researcher-as-founder question here: externally-labelled gold sets, standardised instruments, reproducible harness, and this matrix. Conflict of interest is declared in the front matter and managed by method, not denial. If asked about the July external reviews (§5A.8): two independent LLM strategic reviews, 45 claims adversarially verified (27 confirmed / 13 partial / 2 refuted), 20 hardening PRs, 17/17 live production checks — and the refuted claims are themselves a finding: unsurfaced capability reads as absent.</a:t>
+              <a:t>90s. One line per item, do not read the slide. Hashes for the advisor: MFA 4200672 · cookie sessions a012298 · rate limiting 9b75195, hardened + auth fail-closed 350dc37 · secrets-at-rest &amp; four-eyes eb15bcc · JWT-bound reviewer 967c7d1 · founder-owner bootstrap 1b0ab07 · uptime monitor 49013f8 · tamper evidence b065e4a · guardrail measurement e13105d · trust page 405a630 · pricing ec6bba6.</a:t>
             </a:r>
             <a:endParaRPr lang="en-US" dirty="0"/>
           </a:p>
@@ -690,7 +695,7 @@
           <a:p>
             <a:r>
               <a:rPr lang="en-US" dirty="0"/>
-              <a:t>90s. Category has moved TOWARD the thesis: analysts declared the insight half commoditised. Each rival owns a fragment; nobody verifiably holds the combination — and we apply the same verification standard to ourselves (previous slide).</a:t>
+              <a:t>90s. Hashes for the advisor: golden set 80→100 + churn-musing exemplar 58504f3 · two-tag DE rubric + published n=100 run 5d250fb · per-language metrics + model card 8a258f8 · German exemplars e454898 · tag canonicalization e8af0e5 (claim revised to measured reality in c43062e) · per-item persistence + entity rollup 6412810 · tags persisted on signals 9dcc282 · churn routing df8d042 · App Store hardening 816f0f2 · MCP productization 1eb6c91 · feature catalog ab14a58. Landed improvements from the catalog: #2 #3 #6 #7 #8 #11.</a:t>
             </a:r>
             <a:endParaRPr lang="en-US" dirty="0"/>
           </a:p>
@@ -778,7 +783,7 @@
           <a:p>
             <a:r>
               <a:rPr lang="en-US" dirty="0"/>
-              <a:t>90s. Say number ① slowly: the single most important next artifact — a real action, a real metric, a contract, a window, a verdict. The method is already specified (ITS, then SDID). Everything else is engineering.</a:t>
+              <a:t>90s. Stress the honesty features: real data only (synthetic excluded), star ratings as a NON-CIRCULAR sentiment gold, seed labels external to the artifact, every number written by a reproducible harness — no hand-typed metrics.</a:t>
             </a:r>
             <a:endParaRPr lang="en-US" dirty="0"/>
           </a:p>
@@ -866,7 +871,7 @@
           <a:p>
             <a:r>
               <a:rPr lang="en-US" dirty="0"/>
-              <a:t>60s. Read the four contributions crisply, end on the one-liner, invite questions. Likely probes: novelty vs MemoryBank (answered on slide 5), founder COI (slide 10), simulated outcomes (slide 9), why not RCTs (slide 12 — ITS/SDID).</a:t>
+              <a:t>2 min. The three-rung story. Be precise about gold standards: the 0.37/0.78 rows are the thesis harness (188 seed-labelled signals); the LLM numbers are the artifact's committed in-repo eval on a DIFFERENT 100-case bilingual golden set (28 authored German cases — disclosed) — convergent evidence, not the same table. If probed on exemplars: at n=60 the A/B was not significant (p≈1.0); at n=80, after adding German exemplars, the exact-tag-set lift became significant (8.75%→28.75% per item, in-run paired McNemar p=0.001) while urgency stayed underpowered (81.25%→86.25%, p=0.219); at n=100, after the churn-musing calibration exemplar, the urgency lift is significant too (83%→90%, p=0.039, third consecutive significant run) — we report the whole trajectory ourselves. Tag metrics at n=100 are not comparable to the n=80 snapshot (new adversarial items + completed two-tag DE gold — disclosed). The in-run paired A/B is the designed inference; the model is non-deterministic even at temperature 0.</a:t>
             </a:r>
             <a:endParaRPr lang="en-US" dirty="0"/>
           </a:p>
@@ -890,6 +895,446 @@
             <a:fld id="{F7021451-1387-4CA6-816F-3879F97B5CBC}" type="slidenum">
               <a:rPr lang="en-US"/>
               <a:t>13</a:t>
+            </a:fld>
+            <a:endParaRPr lang="en-US"/>
+          </a:p>
+        </p:txBody>
+      </p:sp>
+    </p:spTree>
+    <p:extLst>
+      <p:ext uri="{BB962C8B-B14F-4D97-AF65-F5344CB8AC3E}">
+        <p14:creationId xmlns:p14="http://schemas.microsoft.com/office/powerpoint/2010/main" val="1024086991"/>
+      </p:ext>
+    </p:extLst>
+  </p:cSld>
+  <p:clrMapOvr>
+    <a:masterClrMapping/>
+  </p:clrMapOvr>
+</p:notes>
+</file>
+
+<file path=ppt/notesSlides/notesSlide14.xml><?xml version="1.0" encoding="utf-8"?>
+<p:notes xmlns:a="http://schemas.openxmlformats.org/drawingml/2006/main" xmlns:r="http://schemas.openxmlformats.org/officeDocument/2006/relationships" xmlns:p="http://schemas.openxmlformats.org/presentationml/2006/main">
+  <p:cSld>
+    <p:spTree>
+      <p:nvGrpSpPr>
+        <p:cNvPr id="1" name=""/>
+        <p:cNvGrpSpPr/>
+        <p:nvPr/>
+      </p:nvGrpSpPr>
+      <p:grpSpPr>
+        <a:xfrm>
+          <a:off x="0" y="0"/>
+          <a:ext cx="0" cy="0"/>
+          <a:chOff x="0" y="0"/>
+          <a:chExt cx="0" cy="0"/>
+        </a:xfrm>
+      </p:grpSpPr>
+      <p:sp>
+        <p:nvSpPr>
+          <p:cNvPr id="2" name="Slide Image Placeholder 1"/>
+          <p:cNvSpPr>
+            <a:spLocks noGrp="1" noRot="1" noChangeAspect="1"/>
+          </p:cNvSpPr>
+          <p:nvPr>
+            <p:ph type="sldImg"/>
+          </p:nvPr>
+        </p:nvSpPr>
+        <p:spPr/>
+      </p:sp>
+      <p:sp>
+        <p:nvSpPr>
+          <p:cNvPr id="3" name="Notes Placeholder 2"/>
+          <p:cNvSpPr>
+            <a:spLocks noGrp="1"/>
+          </p:cNvSpPr>
+          <p:nvPr>
+            <p:ph type="body" idx="1"/>
+          </p:nvPr>
+        </p:nvSpPr>
+        <p:spPr/>
+        <p:txBody>
+          <a:bodyPr/>
+          <a:lstStyle/>
+          <a:p>
+            <a:r>
+              <a:rPr lang="en-US" dirty="0"/>
+              <a:t>90s. This slide wins or loses trust. Lead with the number, land on the boundary: mechanism measured, benefit pending. Examiners reward the distinction — it's also written into the traceability matrix (next slide).</a:t>
+            </a:r>
+            <a:endParaRPr lang="en-US" dirty="0"/>
+          </a:p>
+        </p:txBody>
+      </p:sp>
+      <p:sp>
+        <p:nvSpPr>
+          <p:cNvPr id="4" name="Slide Number Placeholder 3"/>
+          <p:cNvSpPr>
+            <a:spLocks noGrp="1"/>
+          </p:cNvSpPr>
+          <p:nvPr>
+            <p:ph type="sldNum" sz="quarter" idx="10"/>
+          </p:nvPr>
+        </p:nvSpPr>
+        <p:spPr/>
+        <p:txBody>
+          <a:bodyPr/>
+          <a:lstStyle/>
+          <a:p>
+            <a:fld id="{F7021451-1387-4CA6-816F-3879F97B5CBC}" type="slidenum">
+              <a:rPr lang="en-US"/>
+              <a:t>14</a:t>
+            </a:fld>
+            <a:endParaRPr lang="en-US"/>
+          </a:p>
+        </p:txBody>
+      </p:sp>
+    </p:spTree>
+    <p:extLst>
+      <p:ext uri="{BB962C8B-B14F-4D97-AF65-F5344CB8AC3E}">
+        <p14:creationId xmlns:p14="http://schemas.microsoft.com/office/powerpoint/2010/main" val="1024086991"/>
+      </p:ext>
+    </p:extLst>
+  </p:cSld>
+  <p:clrMapOvr>
+    <a:masterClrMapping/>
+  </p:clrMapOvr>
+</p:notes>
+</file>
+
+<file path=ppt/notesSlides/notesSlide15.xml><?xml version="1.0" encoding="utf-8"?>
+<p:notes xmlns:a="http://schemas.openxmlformats.org/drawingml/2006/main" xmlns:r="http://schemas.openxmlformats.org/officeDocument/2006/relationships" xmlns:p="http://schemas.openxmlformats.org/presentationml/2006/main">
+  <p:cSld>
+    <p:spTree>
+      <p:nvGrpSpPr>
+        <p:cNvPr id="1" name=""/>
+        <p:cNvGrpSpPr/>
+        <p:nvPr/>
+      </p:nvGrpSpPr>
+      <p:grpSpPr>
+        <a:xfrm>
+          <a:off x="0" y="0"/>
+          <a:ext cx="0" cy="0"/>
+          <a:chOff x="0" y="0"/>
+          <a:chExt cx="0" cy="0"/>
+        </a:xfrm>
+      </p:grpSpPr>
+      <p:sp>
+        <p:nvSpPr>
+          <p:cNvPr id="2" name="Slide Image Placeholder 1"/>
+          <p:cNvSpPr>
+            <a:spLocks noGrp="1" noRot="1" noChangeAspect="1"/>
+          </p:cNvSpPr>
+          <p:nvPr>
+            <p:ph type="sldImg"/>
+          </p:nvPr>
+        </p:nvSpPr>
+        <p:spPr/>
+      </p:sp>
+      <p:sp>
+        <p:nvSpPr>
+          <p:cNvPr id="3" name="Notes Placeholder 2"/>
+          <p:cNvSpPr>
+            <a:spLocks noGrp="1"/>
+          </p:cNvSpPr>
+          <p:nvPr>
+            <p:ph type="body" idx="1"/>
+          </p:nvPr>
+        </p:nvSpPr>
+        <p:spPr/>
+        <p:txBody>
+          <a:bodyPr/>
+          <a:lstStyle/>
+          <a:p>
+            <a:r>
+              <a:rPr lang="en-US" dirty="0"/>
+              <a:t>90s. Pre-empt the researcher-as-founder question here: externally-labelled gold sets, standardised instruments, reproducible harness, and this matrix. Conflict of interest is declared in the front matter and managed by method, not denial. If asked about the July external reviews (§5A.8): two independent LLM strategic reviews, 45 claims adversarially verified (27 confirmed / 13 partial / 2 refuted), 20 hardening PRs, 17/17 live production checks — and the refuted claims are themselves a finding: unsurfaced capability reads as absent.</a:t>
+            </a:r>
+            <a:endParaRPr lang="en-US" dirty="0"/>
+          </a:p>
+        </p:txBody>
+      </p:sp>
+      <p:sp>
+        <p:nvSpPr>
+          <p:cNvPr id="4" name="Slide Number Placeholder 3"/>
+          <p:cNvSpPr>
+            <a:spLocks noGrp="1"/>
+          </p:cNvSpPr>
+          <p:nvPr>
+            <p:ph type="sldNum" sz="quarter" idx="10"/>
+          </p:nvPr>
+        </p:nvSpPr>
+        <p:spPr/>
+        <p:txBody>
+          <a:bodyPr/>
+          <a:lstStyle/>
+          <a:p>
+            <a:fld id="{F7021451-1387-4CA6-816F-3879F97B5CBC}" type="slidenum">
+              <a:rPr lang="en-US"/>
+              <a:t>15</a:t>
+            </a:fld>
+            <a:endParaRPr lang="en-US"/>
+          </a:p>
+        </p:txBody>
+      </p:sp>
+    </p:spTree>
+    <p:extLst>
+      <p:ext uri="{BB962C8B-B14F-4D97-AF65-F5344CB8AC3E}">
+        <p14:creationId xmlns:p14="http://schemas.microsoft.com/office/powerpoint/2010/main" val="1024086991"/>
+      </p:ext>
+    </p:extLst>
+  </p:cSld>
+  <p:clrMapOvr>
+    <a:masterClrMapping/>
+  </p:clrMapOvr>
+</p:notes>
+</file>
+
+<file path=ppt/notesSlides/notesSlide16.xml><?xml version="1.0" encoding="utf-8"?>
+<p:notes xmlns:a="http://schemas.openxmlformats.org/drawingml/2006/main" xmlns:r="http://schemas.openxmlformats.org/officeDocument/2006/relationships" xmlns:p="http://schemas.openxmlformats.org/presentationml/2006/main">
+  <p:cSld>
+    <p:spTree>
+      <p:nvGrpSpPr>
+        <p:cNvPr id="1" name=""/>
+        <p:cNvGrpSpPr/>
+        <p:nvPr/>
+      </p:nvGrpSpPr>
+      <p:grpSpPr>
+        <a:xfrm>
+          <a:off x="0" y="0"/>
+          <a:ext cx="0" cy="0"/>
+          <a:chOff x="0" y="0"/>
+          <a:chExt cx="0" cy="0"/>
+        </a:xfrm>
+      </p:grpSpPr>
+      <p:sp>
+        <p:nvSpPr>
+          <p:cNvPr id="2" name="Slide Image Placeholder 1"/>
+          <p:cNvSpPr>
+            <a:spLocks noGrp="1" noRot="1" noChangeAspect="1"/>
+          </p:cNvSpPr>
+          <p:nvPr>
+            <p:ph type="sldImg"/>
+          </p:nvPr>
+        </p:nvSpPr>
+        <p:spPr/>
+      </p:sp>
+      <p:sp>
+        <p:nvSpPr>
+          <p:cNvPr id="3" name="Notes Placeholder 2"/>
+          <p:cNvSpPr>
+            <a:spLocks noGrp="1"/>
+          </p:cNvSpPr>
+          <p:nvPr>
+            <p:ph type="body" idx="1"/>
+          </p:nvPr>
+        </p:nvSpPr>
+        <p:spPr/>
+        <p:txBody>
+          <a:bodyPr/>
+          <a:lstStyle/>
+          <a:p>
+            <a:r>
+              <a:rPr lang="en-US" dirty="0"/>
+              <a:t>90s. Category has moved TOWARD the thesis: analysts declared the insight half commoditised. Each rival owns a fragment; nobody verifiably holds the combination — and we apply the same verification standard to ourselves (previous slide).</a:t>
+            </a:r>
+            <a:endParaRPr lang="en-US" dirty="0"/>
+          </a:p>
+        </p:txBody>
+      </p:sp>
+      <p:sp>
+        <p:nvSpPr>
+          <p:cNvPr id="4" name="Slide Number Placeholder 3"/>
+          <p:cNvSpPr>
+            <a:spLocks noGrp="1"/>
+          </p:cNvSpPr>
+          <p:nvPr>
+            <p:ph type="sldNum" sz="quarter" idx="10"/>
+          </p:nvPr>
+        </p:nvSpPr>
+        <p:spPr/>
+        <p:txBody>
+          <a:bodyPr/>
+          <a:lstStyle/>
+          <a:p>
+            <a:fld id="{F7021451-1387-4CA6-816F-3879F97B5CBC}" type="slidenum">
+              <a:rPr lang="en-US"/>
+              <a:t>16</a:t>
+            </a:fld>
+            <a:endParaRPr lang="en-US"/>
+          </a:p>
+        </p:txBody>
+      </p:sp>
+    </p:spTree>
+    <p:extLst>
+      <p:ext uri="{BB962C8B-B14F-4D97-AF65-F5344CB8AC3E}">
+        <p14:creationId xmlns:p14="http://schemas.microsoft.com/office/powerpoint/2010/main" val="1024086991"/>
+      </p:ext>
+    </p:extLst>
+  </p:cSld>
+  <p:clrMapOvr>
+    <a:masterClrMapping/>
+  </p:clrMapOvr>
+</p:notes>
+</file>
+
+<file path=ppt/notesSlides/notesSlide17.xml><?xml version="1.0" encoding="utf-8"?>
+<p:notes xmlns:a="http://schemas.openxmlformats.org/drawingml/2006/main" xmlns:r="http://schemas.openxmlformats.org/officeDocument/2006/relationships" xmlns:p="http://schemas.openxmlformats.org/presentationml/2006/main">
+  <p:cSld>
+    <p:spTree>
+      <p:nvGrpSpPr>
+        <p:cNvPr id="1" name=""/>
+        <p:cNvGrpSpPr/>
+        <p:nvPr/>
+      </p:nvGrpSpPr>
+      <p:grpSpPr>
+        <a:xfrm>
+          <a:off x="0" y="0"/>
+          <a:ext cx="0" cy="0"/>
+          <a:chOff x="0" y="0"/>
+          <a:chExt cx="0" cy="0"/>
+        </a:xfrm>
+      </p:grpSpPr>
+      <p:sp>
+        <p:nvSpPr>
+          <p:cNvPr id="2" name="Slide Image Placeholder 1"/>
+          <p:cNvSpPr>
+            <a:spLocks noGrp="1" noRot="1" noChangeAspect="1"/>
+          </p:cNvSpPr>
+          <p:nvPr>
+            <p:ph type="sldImg"/>
+          </p:nvPr>
+        </p:nvSpPr>
+        <p:spPr/>
+      </p:sp>
+      <p:sp>
+        <p:nvSpPr>
+          <p:cNvPr id="3" name="Notes Placeholder 2"/>
+          <p:cNvSpPr>
+            <a:spLocks noGrp="1"/>
+          </p:cNvSpPr>
+          <p:nvPr>
+            <p:ph type="body" idx="1"/>
+          </p:nvPr>
+        </p:nvSpPr>
+        <p:spPr/>
+        <p:txBody>
+          <a:bodyPr/>
+          <a:lstStyle/>
+          <a:p>
+            <a:r>
+              <a:rPr lang="en-US" dirty="0"/>
+              <a:t>90s. Say number ① slowly: the single most important next artifact — a real action, a real metric, a contract, a window, a verdict. The method is already specified (ITS, then SDID). Everything else is engineering.</a:t>
+            </a:r>
+            <a:endParaRPr lang="en-US" dirty="0"/>
+          </a:p>
+        </p:txBody>
+      </p:sp>
+      <p:sp>
+        <p:nvSpPr>
+          <p:cNvPr id="4" name="Slide Number Placeholder 3"/>
+          <p:cNvSpPr>
+            <a:spLocks noGrp="1"/>
+          </p:cNvSpPr>
+          <p:nvPr>
+            <p:ph type="sldNum" sz="quarter" idx="10"/>
+          </p:nvPr>
+        </p:nvSpPr>
+        <p:spPr/>
+        <p:txBody>
+          <a:bodyPr/>
+          <a:lstStyle/>
+          <a:p>
+            <a:fld id="{F7021451-1387-4CA6-816F-3879F97B5CBC}" type="slidenum">
+              <a:rPr lang="en-US"/>
+              <a:t>17</a:t>
+            </a:fld>
+            <a:endParaRPr lang="en-US"/>
+          </a:p>
+        </p:txBody>
+      </p:sp>
+    </p:spTree>
+    <p:extLst>
+      <p:ext uri="{BB962C8B-B14F-4D97-AF65-F5344CB8AC3E}">
+        <p14:creationId xmlns:p14="http://schemas.microsoft.com/office/powerpoint/2010/main" val="1024086991"/>
+      </p:ext>
+    </p:extLst>
+  </p:cSld>
+  <p:clrMapOvr>
+    <a:masterClrMapping/>
+  </p:clrMapOvr>
+</p:notes>
+</file>
+
+<file path=ppt/notesSlides/notesSlide18.xml><?xml version="1.0" encoding="utf-8"?>
+<p:notes xmlns:a="http://schemas.openxmlformats.org/drawingml/2006/main" xmlns:r="http://schemas.openxmlformats.org/officeDocument/2006/relationships" xmlns:p="http://schemas.openxmlformats.org/presentationml/2006/main">
+  <p:cSld>
+    <p:spTree>
+      <p:nvGrpSpPr>
+        <p:cNvPr id="1" name=""/>
+        <p:cNvGrpSpPr/>
+        <p:nvPr/>
+      </p:nvGrpSpPr>
+      <p:grpSpPr>
+        <a:xfrm>
+          <a:off x="0" y="0"/>
+          <a:ext cx="0" cy="0"/>
+          <a:chOff x="0" y="0"/>
+          <a:chExt cx="0" cy="0"/>
+        </a:xfrm>
+      </p:grpSpPr>
+      <p:sp>
+        <p:nvSpPr>
+          <p:cNvPr id="2" name="Slide Image Placeholder 1"/>
+          <p:cNvSpPr>
+            <a:spLocks noGrp="1" noRot="1" noChangeAspect="1"/>
+          </p:cNvSpPr>
+          <p:nvPr>
+            <p:ph type="sldImg"/>
+          </p:nvPr>
+        </p:nvSpPr>
+        <p:spPr/>
+      </p:sp>
+      <p:sp>
+        <p:nvSpPr>
+          <p:cNvPr id="3" name="Notes Placeholder 2"/>
+          <p:cNvSpPr>
+            <a:spLocks noGrp="1"/>
+          </p:cNvSpPr>
+          <p:nvPr>
+            <p:ph type="body" idx="1"/>
+          </p:nvPr>
+        </p:nvSpPr>
+        <p:spPr/>
+        <p:txBody>
+          <a:bodyPr/>
+          <a:lstStyle/>
+          <a:p>
+            <a:r>
+              <a:rPr lang="en-US" dirty="0"/>
+              <a:t>60s. Read the four contributions crisply, end on the one-liner, invite questions. Likely probes: novelty vs MemoryBank (answered on slide 5), founder COI (slide 10), simulated outcomes (slide 9), why not RCTs (slide 12 — ITS/SDID).</a:t>
+            </a:r>
+            <a:endParaRPr lang="en-US" dirty="0"/>
+          </a:p>
+        </p:txBody>
+      </p:sp>
+      <p:sp>
+        <p:nvSpPr>
+          <p:cNvPr id="4" name="Slide Number Placeholder 3"/>
+          <p:cNvSpPr>
+            <a:spLocks noGrp="1"/>
+          </p:cNvSpPr>
+          <p:nvPr>
+            <p:ph type="sldNum" sz="quarter" idx="10"/>
+          </p:nvPr>
+        </p:nvSpPr>
+        <p:spPr/>
+        <p:txBody>
+          <a:bodyPr/>
+          <a:lstStyle/>
+          <a:p>
+            <a:fld id="{F7021451-1387-4CA6-816F-3879F97B5CBC}" type="slidenum">
+              <a:rPr lang="en-US"/>
+              <a:t>18</a:t>
             </a:fld>
             <a:endParaRPr lang="en-US"/>
           </a:p>
@@ -1130,7 +1575,7 @@
           <a:p>
             <a:r>
               <a:rPr lang="en-US" dirty="0"/>
-              <a:t>2 min. Walk the diagram left to right: sources → ingestion → enrich → synthesize → rules → the approval diamond → execute → measure → learn, with governance cross-cutting. Emphasise the architectural principle: bounded model, deterministic loop. Mention it exists in two builds; the evaluated build is CLARA (FastAPI + LangGraph).</a:t>
+              <a:t>2 min. Walk the diagram left to right: sources → ingestion → enrich → synthesize → rules → the approval diamond → execute → measure → learn, with governance cross-cutting. Emphasise the architectural principle: bounded model, deterministic loop. Single build: CLARA (FastAPI + LangGraph), in production — the earlier prototype is acknowledged once as the first design cycle and archived.</a:t>
             </a:r>
             <a:endParaRPr lang="en-US" dirty="0"/>
           </a:p>
@@ -1218,7 +1663,7 @@
           <a:p>
             <a:r>
               <a:rPr lang="en-US" dirty="0"/>
-              <a:t>2 min. One sentence each; slow down on decay (the novelty boundary vs MemoryBank — examiners may probe novelty; we cite the prior art ourselves and position precisely) and on industry profiles (adaptation without retraining, demonstrated on three real sectors).</a:t>
+              <a:t>90s. New slide for this meeting. Walk top-down: UI → FastAPI (~43 REST endpoints) → the LangGraph nodes; approval is a graph interrupt, not a UI convention. Deployment reality matches the diagram: Docker on a Hetzner EU VPS behind Caddy, Vercel frontend, Supabase Postgres with RLS. The provider-agnostic model layer is the EU-sovereignty wedge.</a:t>
             </a:r>
             <a:endParaRPr lang="en-US" dirty="0"/>
           </a:p>
@@ -1306,7 +1751,7 @@
           <a:p>
             <a:r>
               <a:rPr lang="en-US" dirty="0"/>
-              <a:t>2 min. This is the RAI thesis heart. Two lines matter most: (1) the gate deliberately EXCEEDS Art 14 because awareness alone doesn't de-bias overseers; (2) the code review found declared-but-unenforced controls — and the governance instrumentation is what made that visible. Honesty as methodology.</a:t>
+              <a:t>90s. Two views of one loop. Left: stress the two red governance nodes (approval queue, audit write) and the retrieval back-edge — the memory sits IN the control flow, not in a side store. Right: the contract is fixed before the action executes, so there is no post-hoc metric shopping.</a:t>
             </a:r>
             <a:endParaRPr lang="en-US" dirty="0"/>
           </a:p>
@@ -1394,7 +1839,7 @@
           <a:p>
             <a:r>
               <a:rPr lang="en-US" dirty="0"/>
-              <a:t>90s. Stress the honesty features: real data only (synthetic excluded), star ratings as a NON-CIRCULAR sentiment gold, seed labels external to the artifact, every number written by a reproducible harness — no hand-typed metrics.</a:t>
+              <a:t>60–90s. For an architecture audience the schema is the argument: the thesis's two primitives (outcome contract, perishable learning) are tables with foreign keys, not prose. RLS puts tenant isolation in the database where an application bug cannot bypass it — honest boundary: not warranted for adversarial co-tenants; pilots run single-workspace.</a:t>
             </a:r>
             <a:endParaRPr lang="en-US" dirty="0"/>
           </a:p>
@@ -1482,7 +1927,7 @@
           <a:p>
             <a:r>
               <a:rPr lang="en-US" dirty="0"/>
-              <a:t>2 min. The three-rung story. Be precise about gold standards: the 0.37/0.78 rows are the thesis harness (188 seed-labelled signals); the LLM numbers are the artifact's committed in-repo eval on a DIFFERENT 80-case bilingual golden set (20 authored German cases — disclosed) — convergent evidence, not the same table. If probed on exemplars: at n=60 the A/B was not significant (p≈1.0); at n=80, after adding German exemplars, the exact-tag-set lift IS significant (8.75%→28.75% per item, in-run paired McNemar p=0.001) while urgency stays underpowered (81.25%→86.25%, p=0.219) — we report both ourselves. The in-run paired A/B is the designed inference; the model is non-deterministic even at temperature 0.</a:t>
+              <a:t>2 min. One sentence each; slow down on decay (the novelty boundary vs MemoryBank — examiners may probe novelty; we cite the prior art ourselves and position precisely) and on industry profiles (adaptation without retraining, demonstrated on three real sectors).</a:t>
             </a:r>
             <a:endParaRPr lang="en-US" dirty="0"/>
           </a:p>
@@ -1570,7 +2015,7 @@
           <a:p>
             <a:r>
               <a:rPr lang="en-US" dirty="0"/>
-              <a:t>90s. This slide wins or loses trust. Lead with the number, land on the boundary: mechanism measured, benefit pending. Examiners reward the distinction — it's also written into the traceability matrix (next slide).</a:t>
+              <a:t>2 min. This is the RAI thesis heart. Two lines matter most: (1) the gate deliberately EXCEEDS Art 14 because awareness alone doesn't de-bias overseers; (2) the code review found declared-but-unenforced controls — and the governance instrumentation is what made that visible. Honesty as methodology.</a:t>
             </a:r>
             <a:endParaRPr lang="en-US" dirty="0"/>
           </a:p>
@@ -2586,6 +3031,45 @@
           </a:p>
         </p:txBody>
       </p:sp>
+      <p:sp>
+        <p:nvSpPr>
+          <p:cNvPr id="20" name="Text 18"/>
+          <p:cNvSpPr/>
+          <p:nvPr/>
+        </p:nvSpPr>
+        <p:spPr>
+          <a:xfrm>
+            <a:off x="822960" y="6355080"/>
+            <a:ext cx="10515600" cy="320040"/>
+          </a:xfrm>
+          <a:prstGeom prst="rect">
+            <a:avLst/>
+          </a:prstGeom>
+          <a:noFill/>
+          <a:ln/>
+        </p:spPr>
+        <p:txBody>
+          <a:bodyPr wrap="square" rtlCol="0" anchor="ctr"/>
+          <a:lstStyle/>
+          <a:p>
+            <a:pPr indent="0" marL="0">
+              <a:buNone/>
+            </a:pPr>
+            <a:r>
+              <a:rPr lang="en-US" sz="1200" i="1" dirty="0">
+                <a:solidFill>
+                  <a:srgbClr val="02C39A"/>
+                </a:solidFill>
+                <a:latin typeface="Calibri" pitchFamily="34" charset="0"/>
+                <a:ea typeface="Calibri" pitchFamily="34" charset="-122"/>
+                <a:cs typeface="Calibri" pitchFamily="34" charset="-120"/>
+              </a:rPr>
+              <a:t>Progress review · 1 August 2026 — updated architecture + the July engineering log</a:t>
+            </a:r>
+            <a:endParaRPr lang="en-US" sz="1200" dirty="0"/>
+          </a:p>
+        </p:txBody>
+      </p:sp>
     </p:spTree>
   </p:cSld>
   <p:clrMapOvr>
@@ -2644,7 +3128,7 @@
                 <a:ea typeface="Cambria" pitchFamily="34" charset="-122"/>
                 <a:cs typeface="Cambria" pitchFamily="34" charset="-120"/>
               </a:rPr>
-              <a:t>What is proven, demonstrated, and pending</a:t>
+              <a:t>Progress since mid-July (1/2): security, sessions, governance</a:t>
             </a:r>
             <a:endParaRPr lang="en-US" sz="3200" dirty="0"/>
           </a:p>
@@ -2683,7 +3167,7 @@
                 <a:ea typeface="Calibri" pitchFamily="34" charset="-122"/>
                 <a:cs typeface="Calibri" pitchFamily="34" charset="-120"/>
               </a:rPr>
-              <a:t>The traceability matrix — the thesis's honesty map (Appendix D)</a:t>
+              <a:t>The 17–19 Jul hardening sprint — all merged to main; commit hashes in the notes</a:t>
             </a:r>
             <a:endParaRPr lang="en-US" sz="1400" dirty="0"/>
           </a:p>
@@ -2822,6 +3306,65 @@
             <a:avLst/>
           </a:prstGeom>
           <a:solidFill>
+            <a:srgbClr val="1E2761"/>
+          </a:solidFill>
+          <a:ln/>
+        </p:spPr>
+      </p:sp>
+      <p:sp>
+        <p:nvSpPr>
+          <p:cNvPr id="9" name="Text 7"/>
+          <p:cNvSpPr/>
+          <p:nvPr/>
+        </p:nvSpPr>
+        <p:spPr>
+          <a:xfrm>
+            <a:off x="11192256" y="395935"/>
+            <a:ext cx="292608" cy="310896"/>
+          </a:xfrm>
+          <a:prstGeom prst="rect">
+            <a:avLst/>
+          </a:prstGeom>
+          <a:noFill/>
+          <a:ln/>
+        </p:spPr>
+        <p:txBody>
+          <a:bodyPr wrap="square" lIns="0" tIns="0" rIns="0" bIns="0" rtlCol="0" anchor="ctr"/>
+          <a:lstStyle/>
+          <a:p>
+            <a:pPr algn="ctr" indent="0" marL="0">
+              <a:buNone/>
+            </a:pPr>
+            <a:r>
+              <a:rPr lang="en-US" sz="1100" b="1" dirty="0">
+                <a:solidFill>
+                  <a:srgbClr val="FFFFFF"/>
+                </a:solidFill>
+                <a:latin typeface="Calibri" pitchFamily="34" charset="0"/>
+                <a:ea typeface="Calibri" pitchFamily="34" charset="-122"/>
+                <a:cs typeface="Calibri" pitchFamily="34" charset="-120"/>
+              </a:rPr>
+              <a:t>A</a:t>
+            </a:r>
+            <a:endParaRPr lang="en-US" sz="1100" dirty="0"/>
+          </a:p>
+        </p:txBody>
+      </p:sp>
+      <p:sp>
+        <p:nvSpPr>
+          <p:cNvPr id="10" name="Shape 8"/>
+          <p:cNvSpPr/>
+          <p:nvPr/>
+        </p:nvSpPr>
+        <p:spPr>
+          <a:xfrm>
+            <a:off x="11576304" y="411480"/>
+            <a:ext cx="292608" cy="292608"/>
+          </a:xfrm>
+          <a:prstGeom prst="ellipse">
+            <a:avLst/>
+          </a:prstGeom>
+          <a:solidFill>
             <a:srgbClr val="CADCFC"/>
           </a:solidFill>
           <a:ln/>
@@ -2829,13 +3372,13 @@
       </p:sp>
       <p:sp>
         <p:nvSpPr>
-          <p:cNvPr id="9" name="Text 7"/>
-          <p:cNvSpPr/>
-          <p:nvPr/>
-        </p:nvSpPr>
-        <p:spPr>
-          <a:xfrm>
-            <a:off x="11192256" y="395935"/>
+          <p:cNvPr id="11" name="Text 9"/>
+          <p:cNvSpPr/>
+          <p:nvPr/>
+        </p:nvSpPr>
+        <p:spPr>
+          <a:xfrm>
+            <a:off x="11576304" y="395935"/>
             <a:ext cx="292608" cy="310896"/>
           </a:xfrm>
           <a:prstGeom prst="rect">
@@ -2860,7 +3403,7 @@
                 <a:ea typeface="Calibri" pitchFamily="34" charset="-122"/>
                 <a:cs typeface="Calibri" pitchFamily="34" charset="-120"/>
               </a:rPr>
-              <a:t>A</a:t>
+              <a:t>L</a:t>
             </a:r>
             <a:endParaRPr lang="en-US" sz="1100" dirty="0"/>
           </a:p>
@@ -2868,17 +3411,330 @@
       </p:sp>
       <p:sp>
         <p:nvSpPr>
-          <p:cNvPr id="10" name="Shape 8"/>
-          <p:cNvSpPr/>
-          <p:nvPr/>
-        </p:nvSpPr>
-        <p:spPr>
-          <a:xfrm>
-            <a:off x="11576304" y="411480"/>
-            <a:ext cx="292608" cy="292608"/>
-          </a:xfrm>
-          <a:prstGeom prst="ellipse">
-            <a:avLst/>
+          <p:cNvPr id="12" name="Text 10"/>
+          <p:cNvSpPr/>
+          <p:nvPr/>
+        </p:nvSpPr>
+        <p:spPr>
+          <a:xfrm>
+            <a:off x="548640" y="1417320"/>
+            <a:ext cx="5486400" cy="347472"/>
+          </a:xfrm>
+          <a:prstGeom prst="rect">
+            <a:avLst/>
+          </a:prstGeom>
+          <a:noFill/>
+          <a:ln/>
+        </p:spPr>
+        <p:txBody>
+          <a:bodyPr wrap="square" rtlCol="0" anchor="ctr"/>
+          <a:lstStyle/>
+          <a:p>
+            <a:pPr indent="0" marL="0">
+              <a:buNone/>
+            </a:pPr>
+            <a:r>
+              <a:rPr lang="en-US" sz="1600" b="1" dirty="0">
+                <a:solidFill>
+                  <a:srgbClr val="1E2761"/>
+                </a:solidFill>
+                <a:latin typeface="Cambria" pitchFamily="34" charset="0"/>
+                <a:ea typeface="Cambria" pitchFamily="34" charset="-122"/>
+                <a:cs typeface="Cambria" pitchFamily="34" charset="-120"/>
+              </a:rPr>
+              <a:t>Security &amp; sessions</a:t>
+            </a:r>
+            <a:endParaRPr lang="en-US" sz="1600" dirty="0"/>
+          </a:p>
+        </p:txBody>
+      </p:sp>
+      <p:sp>
+        <p:nvSpPr>
+          <p:cNvPr id="13" name="Text 11"/>
+          <p:cNvSpPr/>
+          <p:nvPr/>
+        </p:nvSpPr>
+        <p:spPr>
+          <a:xfrm>
+            <a:off x="731520" y="1810512"/>
+            <a:ext cx="5303520" cy="3566160"/>
+          </a:xfrm>
+          <a:prstGeom prst="rect">
+            <a:avLst/>
+          </a:prstGeom>
+          <a:noFill/>
+          <a:ln/>
+        </p:spPr>
+        <p:txBody>
+          <a:bodyPr wrap="square" rtlCol="0" anchor="ctr"/>
+          <a:lstStyle/>
+          <a:p>
+            <a:pPr marL="342900" indent="-342900">
+              <a:spcAft>
+                <a:spcPts val="600"/>
+              </a:spcAft>
+              <a:buSzPct val="100000"/>
+              <a:buChar char="•"/>
+            </a:pPr>
+            <a:r>
+              <a:rPr lang="en-US" sz="1150" dirty="0">
+                <a:solidFill>
+                  <a:srgbClr val="1A1A2E"/>
+                </a:solidFill>
+                <a:latin typeface="Calibri" pitchFamily="34" charset="0"/>
+                <a:ea typeface="Calibri" pitchFamily="34" charset="-122"/>
+                <a:cs typeface="Calibri" pitchFamily="34" charset="-120"/>
+              </a:rPr>
+              <a:t>TOTP MFA + HttpOnly cookie sessions — login challenge on the cookie-auth routes; tokens out of localStorage; AAL2 enforcement flag ready</a:t>
+            </a:r>
+            <a:endParaRPr lang="en-US" sz="1150" dirty="0"/>
+          </a:p>
+          <a:p>
+            <a:pPr marL="342900" indent="-342900">
+              <a:spcAft>
+                <a:spcPts val="600"/>
+              </a:spcAft>
+              <a:buSzPct val="100000"/>
+              <a:buChar char="•"/>
+            </a:pPr>
+            <a:r>
+              <a:rPr lang="en-US" sz="1150" dirty="0">
+                <a:solidFill>
+                  <a:srgbClr val="1A1A2E"/>
+                </a:solidFill>
+                <a:latin typeface="Calibri" pitchFamily="34" charset="0"/>
+                <a:ea typeface="Calibri" pitchFamily="34" charset="-122"/>
+                <a:cs typeface="Calibri" pitchFamily="34" charset="-120"/>
+              </a:rPr>
+              <a:t>Opt-in per-client rate limiting, hardened after two adversarial audits — keyed on network address behind the trusted proxy (client headers can't mint fresh buckets); memory-bounded; auth dependency now fails closed by default</a:t>
+            </a:r>
+            <a:endParaRPr lang="en-US" sz="1150" dirty="0"/>
+          </a:p>
+          <a:p>
+            <a:pPr marL="342900" indent="-342900">
+              <a:spcAft>
+                <a:spcPts val="600"/>
+              </a:spcAft>
+              <a:buSzPct val="100000"/>
+              <a:buChar char="•"/>
+            </a:pPr>
+            <a:r>
+              <a:rPr lang="en-US" sz="1150" dirty="0">
+                <a:solidFill>
+                  <a:srgbClr val="1A1A2E"/>
+                </a:solidFill>
+                <a:latin typeface="Calibri" pitchFamily="34" charset="0"/>
+                <a:ea typeface="Calibri" pitchFamily="34" charset="-122"/>
+                <a:cs typeface="Calibri" pitchFamily="34" charset="-120"/>
+              </a:rPr>
+              <a:t>Connector secrets encrypted at rest — Fernet envelope (enc:v1), loud failure if the key is absent</a:t>
+            </a:r>
+            <a:endParaRPr lang="en-US" sz="1150" dirty="0"/>
+          </a:p>
+          <a:p>
+            <a:pPr marL="342900" indent="-342900">
+              <a:spcAft>
+                <a:spcPts val="600"/>
+              </a:spcAft>
+              <a:buSzPct val="100000"/>
+              <a:buChar char="•"/>
+            </a:pPr>
+            <a:r>
+              <a:rPr lang="en-US" sz="1150" dirty="0">
+                <a:solidFill>
+                  <a:srgbClr val="1A1A2E"/>
+                </a:solidFill>
+                <a:latin typeface="Calibri" pitchFamily="34" charset="0"/>
+                <a:ea typeface="Calibri" pitchFamily="34" charset="-122"/>
+                <a:cs typeface="Calibri" pitchFamily="34" charset="-120"/>
+              </a:rPr>
+              <a:t>Founder-owner bootstrap fix — the operator can no longer be locked out of their own workspace</a:t>
+            </a:r>
+            <a:endParaRPr lang="en-US" sz="1150" dirty="0"/>
+          </a:p>
+          <a:p>
+            <a:pPr marL="342900" indent="-342900">
+              <a:spcAft>
+                <a:spcPts val="600"/>
+              </a:spcAft>
+              <a:buSzPct val="100000"/>
+              <a:buChar char="•"/>
+            </a:pPr>
+            <a:r>
+              <a:rPr lang="en-US" sz="1150" dirty="0">
+                <a:solidFill>
+                  <a:srgbClr val="1A1A2E"/>
+                </a:solidFill>
+                <a:latin typeface="Calibri" pitchFamily="34" charset="0"/>
+                <a:ea typeface="Calibri" pitchFamily="34" charset="-122"/>
+                <a:cs typeface="Calibri" pitchFamily="34" charset="-120"/>
+              </a:rPr>
+              <a:t>Scheduled uptime monitor — GitHub Actions re-runs the 17-check live smoke every 30 min; two consecutive failures open an issue, auto-closed on recovery</a:t>
+            </a:r>
+            <a:endParaRPr lang="en-US" sz="1150" dirty="0"/>
+          </a:p>
+        </p:txBody>
+      </p:sp>
+      <p:sp>
+        <p:nvSpPr>
+          <p:cNvPr id="14" name="Text 12"/>
+          <p:cNvSpPr/>
+          <p:nvPr/>
+        </p:nvSpPr>
+        <p:spPr>
+          <a:xfrm>
+            <a:off x="6400800" y="1417320"/>
+            <a:ext cx="5212080" cy="347472"/>
+          </a:xfrm>
+          <a:prstGeom prst="rect">
+            <a:avLst/>
+          </a:prstGeom>
+          <a:noFill/>
+          <a:ln/>
+        </p:spPr>
+        <p:txBody>
+          <a:bodyPr wrap="square" rtlCol="0" anchor="ctr"/>
+          <a:lstStyle/>
+          <a:p>
+            <a:pPr indent="0" marL="0">
+              <a:buNone/>
+            </a:pPr>
+            <a:r>
+              <a:rPr lang="en-US" sz="1600" b="1" dirty="0">
+                <a:solidFill>
+                  <a:srgbClr val="1E2761"/>
+                </a:solidFill>
+                <a:latin typeface="Cambria" pitchFamily="34" charset="0"/>
+                <a:ea typeface="Cambria" pitchFamily="34" charset="-122"/>
+                <a:cs typeface="Cambria" pitchFamily="34" charset="-120"/>
+              </a:rPr>
+              <a:t>Governance &amp; audit</a:t>
+            </a:r>
+            <a:endParaRPr lang="en-US" sz="1600" dirty="0"/>
+          </a:p>
+        </p:txBody>
+      </p:sp>
+      <p:sp>
+        <p:nvSpPr>
+          <p:cNvPr id="15" name="Text 13"/>
+          <p:cNvSpPr/>
+          <p:nvPr/>
+        </p:nvSpPr>
+        <p:spPr>
+          <a:xfrm>
+            <a:off x="6583680" y="1810512"/>
+            <a:ext cx="5029200" cy="3566160"/>
+          </a:xfrm>
+          <a:prstGeom prst="rect">
+            <a:avLst/>
+          </a:prstGeom>
+          <a:noFill/>
+          <a:ln/>
+        </p:spPr>
+        <p:txBody>
+          <a:bodyPr wrap="square" rtlCol="0" anchor="ctr"/>
+          <a:lstStyle/>
+          <a:p>
+            <a:pPr marL="342900" indent="-342900">
+              <a:spcAft>
+                <a:spcPts val="600"/>
+              </a:spcAft>
+              <a:buSzPct val="100000"/>
+              <a:buChar char="•"/>
+            </a:pPr>
+            <a:r>
+              <a:rPr lang="en-US" sz="1150" dirty="0">
+                <a:solidFill>
+                  <a:srgbClr val="1A1A2E"/>
+                </a:solidFill>
+                <a:latin typeface="Calibri" pitchFamily="34" charset="0"/>
+                <a:ea typeface="Calibri" pitchFamily="34" charset="-122"/>
+                <a:cs typeface="Calibri" pitchFamily="34" charset="-120"/>
+              </a:rPr>
+              <a:t>Four-eyes approvals (opt-in) — two distinct approvers, self-confirmation rejected; reviewer identity JWT-bound, never client-supplied</a:t>
+            </a:r>
+            <a:endParaRPr lang="en-US" sz="1150" dirty="0"/>
+          </a:p>
+          <a:p>
+            <a:pPr marL="342900" indent="-342900">
+              <a:spcAft>
+                <a:spcPts val="600"/>
+              </a:spcAft>
+              <a:buSzPct val="100000"/>
+              <a:buChar char="•"/>
+            </a:pPr>
+            <a:r>
+              <a:rPr lang="en-US" sz="1150" dirty="0">
+                <a:solidFill>
+                  <a:srgbClr val="1A1A2E"/>
+                </a:solidFill>
+                <a:latin typeface="Calibri" pitchFamily="34" charset="0"/>
+                <a:ea typeface="Calibri" pitchFamily="34" charset="-122"/>
+                <a:cs typeface="Calibri" pitchFamily="34" charset="-120"/>
+              </a:rPr>
+              <a:t>Evidence-pack tamper evidence — canonical sha256 stamped onto the ApprovalRecord at decision time; changed evidence is provable</a:t>
+            </a:r>
+            <a:endParaRPr lang="en-US" sz="1150" dirty="0"/>
+          </a:p>
+          <a:p>
+            <a:pPr marL="342900" indent="-342900">
+              <a:spcAft>
+                <a:spcPts val="600"/>
+              </a:spcAft>
+              <a:buSzPct val="100000"/>
+              <a:buChar char="•"/>
+            </a:pPr>
+            <a:r>
+              <a:rPr lang="en-US" sz="1150" dirty="0">
+                <a:solidFill>
+                  <a:srgbClr val="1A1A2E"/>
+                </a:solidFill>
+                <a:latin typeface="Calibri" pitchFamily="34" charset="0"/>
+                <a:ea typeface="Calibri" pitchFamily="34" charset="-122"/>
+                <a:cs typeface="Calibri" pitchFamily="34" charset="-120"/>
+              </a:rPr>
+              <a:t>Guardrail measurement — declared guardrails are now measured at every checkpoint; unmeasurable ones surface an explicit 'no data source' marker</a:t>
+            </a:r>
+            <a:endParaRPr lang="en-US" sz="1150" dirty="0"/>
+          </a:p>
+          <a:p>
+            <a:pPr marL="342900" indent="-342900">
+              <a:spcAft>
+                <a:spcPts val="600"/>
+              </a:spcAft>
+              <a:buSzPct val="100000"/>
+              <a:buChar char="•"/>
+            </a:pPr>
+            <a:r>
+              <a:rPr lang="en-US" sz="1150" dirty="0">
+                <a:solidFill>
+                  <a:srgbClr val="1A1A2E"/>
+                </a:solidFill>
+                <a:latin typeface="Calibri" pitchFamily="34" charset="0"/>
+                <a:ea typeface="Calibri" pitchFamily="34" charset="-122"/>
+                <a:cs typeface="Calibri" pitchFamily="34" charset="-120"/>
+              </a:rPr>
+              <a:t>Public trust surface — Security &amp; Trust page live; /pricing + legal pages staged behind fail-closed launch flags</a:t>
+            </a:r>
+            <a:endParaRPr lang="en-US" sz="1150" dirty="0"/>
+          </a:p>
+        </p:txBody>
+      </p:sp>
+      <p:sp>
+        <p:nvSpPr>
+          <p:cNvPr id="16" name="Shape 14"/>
+          <p:cNvSpPr/>
+          <p:nvPr/>
+        </p:nvSpPr>
+        <p:spPr>
+          <a:xfrm>
+            <a:off x="548640" y="5532120"/>
+            <a:ext cx="11064240" cy="868680"/>
+          </a:xfrm>
+          <a:prstGeom prst="roundRect">
+            <a:avLst>
+              <a:gd name="adj" fmla="val 6316"/>
+            </a:avLst>
           </a:prstGeom>
           <a:solidFill>
             <a:srgbClr val="1E2761"/>
@@ -2888,6 +3744,345 @@
       </p:sp>
       <p:sp>
         <p:nvSpPr>
+          <p:cNvPr id="17" name="Text 15"/>
+          <p:cNvSpPr/>
+          <p:nvPr/>
+        </p:nvSpPr>
+        <p:spPr>
+          <a:xfrm>
+            <a:off x="777240" y="5641848"/>
+            <a:ext cx="10607040" cy="685800"/>
+          </a:xfrm>
+          <a:prstGeom prst="rect">
+            <a:avLst/>
+          </a:prstGeom>
+          <a:noFill/>
+          <a:ln/>
+        </p:spPr>
+        <p:txBody>
+          <a:bodyPr wrap="square" lIns="0" tIns="0" rIns="0" bIns="0" rtlCol="0" anchor="ctr"/>
+          <a:lstStyle/>
+          <a:p>
+            <a:pPr indent="0" marL="0">
+              <a:buNone/>
+            </a:pPr>
+            <a:r>
+              <a:rPr lang="en-US" sz="1250" dirty="0">
+                <a:solidFill>
+                  <a:srgbClr val="FFFFFF"/>
+                </a:solidFill>
+                <a:latin typeface="Calibri" pitchFamily="34" charset="0"/>
+                <a:ea typeface="Calibri" pitchFamily="34" charset="-122"/>
+                <a:cs typeface="Calibri" pitchFamily="34" charset="-120"/>
+              </a:rPr>
+              <a:t>Pattern: review-then-harden. Two independent adversarial audits of the July merges produced the rate-limiter and fail-closed fixes — declared controls ≠ enforced controls until verified.</a:t>
+            </a:r>
+            <a:endParaRPr lang="en-US" sz="1250" dirty="0"/>
+          </a:p>
+        </p:txBody>
+      </p:sp>
+    </p:spTree>
+  </p:cSld>
+  <p:clrMapOvr>
+    <a:masterClrMapping/>
+  </p:clrMapOvr>
+</p:sld>
+</file>
+
+<file path=ppt/slides/slide11.xml><?xml version="1.0" encoding="utf-8"?>
+<p:sld xmlns:a="http://schemas.openxmlformats.org/drawingml/2006/main" xmlns:r="http://schemas.openxmlformats.org/officeDocument/2006/relationships" xmlns:p="http://schemas.openxmlformats.org/presentationml/2006/main">
+  <p:cSld name="Slide 11">
+    <p:spTree>
+      <p:nvGrpSpPr>
+        <p:cNvPr id="1" name=""/>
+        <p:cNvGrpSpPr/>
+        <p:nvPr/>
+      </p:nvGrpSpPr>
+      <p:grpSpPr>
+        <a:xfrm>
+          <a:off x="0" y="0"/>
+          <a:ext cx="0" cy="0"/>
+          <a:chOff x="0" y="0"/>
+          <a:chExt cx="0" cy="0"/>
+        </a:xfrm>
+      </p:grpSpPr>
+      <p:sp>
+        <p:nvSpPr>
+          <p:cNvPr id="2" name="Text 0"/>
+          <p:cNvSpPr/>
+          <p:nvPr/>
+        </p:nvSpPr>
+        <p:spPr>
+          <a:xfrm>
+            <a:off x="548640" y="320040"/>
+            <a:ext cx="11064240" cy="777240"/>
+          </a:xfrm>
+          <a:prstGeom prst="rect">
+            <a:avLst/>
+          </a:prstGeom>
+          <a:noFill/>
+          <a:ln/>
+        </p:spPr>
+        <p:txBody>
+          <a:bodyPr wrap="square" rtlCol="0" anchor="ctr"/>
+          <a:lstStyle/>
+          <a:p>
+            <a:pPr indent="0" marL="0">
+              <a:buNone/>
+            </a:pPr>
+            <a:r>
+              <a:rPr lang="en-US" sz="3200" b="1" dirty="0">
+                <a:solidFill>
+                  <a:srgbClr val="1A1A2E"/>
+                </a:solidFill>
+                <a:latin typeface="Cambria" pitchFamily="34" charset="0"/>
+                <a:ea typeface="Cambria" pitchFamily="34" charset="-122"/>
+                <a:cs typeface="Cambria" pitchFamily="34" charset="-120"/>
+              </a:rPr>
+              <a:t>Progress since mid-July (2/2): evaluation &amp; platform</a:t>
+            </a:r>
+            <a:endParaRPr lang="en-US" sz="3200" dirty="0"/>
+          </a:p>
+        </p:txBody>
+      </p:sp>
+      <p:sp>
+        <p:nvSpPr>
+          <p:cNvPr id="3" name="Text 1"/>
+          <p:cNvSpPr/>
+          <p:nvPr/>
+        </p:nvSpPr>
+        <p:spPr>
+          <a:xfrm>
+            <a:off x="548640" y="987552"/>
+            <a:ext cx="11064240" cy="365760"/>
+          </a:xfrm>
+          <a:prstGeom prst="rect">
+            <a:avLst/>
+          </a:prstGeom>
+          <a:noFill/>
+          <a:ln/>
+        </p:spPr>
+        <p:txBody>
+          <a:bodyPr wrap="square" rtlCol="0" anchor="ctr"/>
+          <a:lstStyle/>
+          <a:p>
+            <a:pPr indent="0" marL="0">
+              <a:buNone/>
+            </a:pPr>
+            <a:r>
+              <a:rPr lang="en-US" sz="1400" i="1" dirty="0">
+                <a:solidFill>
+                  <a:srgbClr val="5A6478"/>
+                </a:solidFill>
+                <a:latin typeface="Calibri" pitchFamily="34" charset="0"/>
+                <a:ea typeface="Calibri" pitchFamily="34" charset="-122"/>
+                <a:cs typeface="Calibri" pitchFamily="34" charset="-120"/>
+              </a:rPr>
+              <a:t>Eval-improve iterations measured on the committed golden set; platform work aimed at pilots</a:t>
+            </a:r>
+            <a:endParaRPr lang="en-US" sz="1400" dirty="0"/>
+          </a:p>
+        </p:txBody>
+      </p:sp>
+      <p:sp>
+        <p:nvSpPr>
+          <p:cNvPr id="4" name="Shape 2"/>
+          <p:cNvSpPr/>
+          <p:nvPr/>
+        </p:nvSpPr>
+        <p:spPr>
+          <a:xfrm>
+            <a:off x="10424160" y="411480"/>
+            <a:ext cx="292608" cy="292608"/>
+          </a:xfrm>
+          <a:prstGeom prst="ellipse">
+            <a:avLst/>
+          </a:prstGeom>
+          <a:solidFill>
+            <a:srgbClr val="CADCFC"/>
+          </a:solidFill>
+          <a:ln/>
+        </p:spPr>
+      </p:sp>
+      <p:sp>
+        <p:nvSpPr>
+          <p:cNvPr id="5" name="Text 3"/>
+          <p:cNvSpPr/>
+          <p:nvPr/>
+        </p:nvSpPr>
+        <p:spPr>
+          <a:xfrm>
+            <a:off x="10424160" y="395935"/>
+            <a:ext cx="292608" cy="310896"/>
+          </a:xfrm>
+          <a:prstGeom prst="rect">
+            <a:avLst/>
+          </a:prstGeom>
+          <a:noFill/>
+          <a:ln/>
+        </p:spPr>
+        <p:txBody>
+          <a:bodyPr wrap="square" lIns="0" tIns="0" rIns="0" bIns="0" rtlCol="0" anchor="ctr"/>
+          <a:lstStyle/>
+          <a:p>
+            <a:pPr algn="ctr" indent="0" marL="0">
+              <a:buNone/>
+            </a:pPr>
+            <a:r>
+              <a:rPr lang="en-US" sz="1100" b="1" dirty="0">
+                <a:solidFill>
+                  <a:srgbClr val="1E2761"/>
+                </a:solidFill>
+                <a:latin typeface="Calibri" pitchFamily="34" charset="0"/>
+                <a:ea typeface="Calibri" pitchFamily="34" charset="-122"/>
+                <a:cs typeface="Calibri" pitchFamily="34" charset="-120"/>
+              </a:rPr>
+              <a:t>S</a:t>
+            </a:r>
+            <a:endParaRPr lang="en-US" sz="1100" dirty="0"/>
+          </a:p>
+        </p:txBody>
+      </p:sp>
+      <p:sp>
+        <p:nvSpPr>
+          <p:cNvPr id="6" name="Shape 4"/>
+          <p:cNvSpPr/>
+          <p:nvPr/>
+        </p:nvSpPr>
+        <p:spPr>
+          <a:xfrm>
+            <a:off x="10808208" y="411480"/>
+            <a:ext cx="292608" cy="292608"/>
+          </a:xfrm>
+          <a:prstGeom prst="ellipse">
+            <a:avLst/>
+          </a:prstGeom>
+          <a:solidFill>
+            <a:srgbClr val="CADCFC"/>
+          </a:solidFill>
+          <a:ln/>
+        </p:spPr>
+      </p:sp>
+      <p:sp>
+        <p:nvSpPr>
+          <p:cNvPr id="7" name="Text 5"/>
+          <p:cNvSpPr/>
+          <p:nvPr/>
+        </p:nvSpPr>
+        <p:spPr>
+          <a:xfrm>
+            <a:off x="10808208" y="395935"/>
+            <a:ext cx="292608" cy="310896"/>
+          </a:xfrm>
+          <a:prstGeom prst="rect">
+            <a:avLst/>
+          </a:prstGeom>
+          <a:noFill/>
+          <a:ln/>
+        </p:spPr>
+        <p:txBody>
+          <a:bodyPr wrap="square" lIns="0" tIns="0" rIns="0" bIns="0" rtlCol="0" anchor="ctr"/>
+          <a:lstStyle/>
+          <a:p>
+            <a:pPr algn="ctr" indent="0" marL="0">
+              <a:buNone/>
+            </a:pPr>
+            <a:r>
+              <a:rPr lang="en-US" sz="1100" b="1" dirty="0">
+                <a:solidFill>
+                  <a:srgbClr val="1E2761"/>
+                </a:solidFill>
+                <a:latin typeface="Calibri" pitchFamily="34" charset="0"/>
+                <a:ea typeface="Calibri" pitchFamily="34" charset="-122"/>
+                <a:cs typeface="Calibri" pitchFamily="34" charset="-120"/>
+              </a:rPr>
+              <a:t>I</a:t>
+            </a:r>
+            <a:endParaRPr lang="en-US" sz="1100" dirty="0"/>
+          </a:p>
+        </p:txBody>
+      </p:sp>
+      <p:sp>
+        <p:nvSpPr>
+          <p:cNvPr id="8" name="Shape 6"/>
+          <p:cNvSpPr/>
+          <p:nvPr/>
+        </p:nvSpPr>
+        <p:spPr>
+          <a:xfrm>
+            <a:off x="11192256" y="411480"/>
+            <a:ext cx="292608" cy="292608"/>
+          </a:xfrm>
+          <a:prstGeom prst="ellipse">
+            <a:avLst/>
+          </a:prstGeom>
+          <a:solidFill>
+            <a:srgbClr val="CADCFC"/>
+          </a:solidFill>
+          <a:ln/>
+        </p:spPr>
+      </p:sp>
+      <p:sp>
+        <p:nvSpPr>
+          <p:cNvPr id="9" name="Text 7"/>
+          <p:cNvSpPr/>
+          <p:nvPr/>
+        </p:nvSpPr>
+        <p:spPr>
+          <a:xfrm>
+            <a:off x="11192256" y="395935"/>
+            <a:ext cx="292608" cy="310896"/>
+          </a:xfrm>
+          <a:prstGeom prst="rect">
+            <a:avLst/>
+          </a:prstGeom>
+          <a:noFill/>
+          <a:ln/>
+        </p:spPr>
+        <p:txBody>
+          <a:bodyPr wrap="square" lIns="0" tIns="0" rIns="0" bIns="0" rtlCol="0" anchor="ctr"/>
+          <a:lstStyle/>
+          <a:p>
+            <a:pPr algn="ctr" indent="0" marL="0">
+              <a:buNone/>
+            </a:pPr>
+            <a:r>
+              <a:rPr lang="en-US" sz="1100" b="1" dirty="0">
+                <a:solidFill>
+                  <a:srgbClr val="1E2761"/>
+                </a:solidFill>
+                <a:latin typeface="Calibri" pitchFamily="34" charset="0"/>
+                <a:ea typeface="Calibri" pitchFamily="34" charset="-122"/>
+                <a:cs typeface="Calibri" pitchFamily="34" charset="-120"/>
+              </a:rPr>
+              <a:t>A</a:t>
+            </a:r>
+            <a:endParaRPr lang="en-US" sz="1100" dirty="0"/>
+          </a:p>
+        </p:txBody>
+      </p:sp>
+      <p:sp>
+        <p:nvSpPr>
+          <p:cNvPr id="10" name="Shape 8"/>
+          <p:cNvSpPr/>
+          <p:nvPr/>
+        </p:nvSpPr>
+        <p:spPr>
+          <a:xfrm>
+            <a:off x="11576304" y="411480"/>
+            <a:ext cx="292608" cy="292608"/>
+          </a:xfrm>
+          <a:prstGeom prst="ellipse">
+            <a:avLst/>
+          </a:prstGeom>
+          <a:solidFill>
+            <a:srgbClr val="1E2761"/>
+          </a:solidFill>
+          <a:ln/>
+        </p:spPr>
+      </p:sp>
+      <p:sp>
+        <p:nvSpPr>
           <p:cNvPr id="11" name="Text 9"/>
           <p:cNvSpPr/>
           <p:nvPr/>
@@ -2925,9 +4120,3134 @@
           </a:p>
         </p:txBody>
       </p:sp>
+      <p:sp>
+        <p:nvSpPr>
+          <p:cNvPr id="12" name="Text 10"/>
+          <p:cNvSpPr/>
+          <p:nvPr/>
+        </p:nvSpPr>
+        <p:spPr>
+          <a:xfrm>
+            <a:off x="548640" y="1417320"/>
+            <a:ext cx="5486400" cy="347472"/>
+          </a:xfrm>
+          <a:prstGeom prst="rect">
+            <a:avLst/>
+          </a:prstGeom>
+          <a:noFill/>
+          <a:ln/>
+        </p:spPr>
+        <p:txBody>
+          <a:bodyPr wrap="square" rtlCol="0" anchor="ctr"/>
+          <a:lstStyle/>
+          <a:p>
+            <a:pPr indent="0" marL="0">
+              <a:buNone/>
+            </a:pPr>
+            <a:r>
+              <a:rPr lang="en-US" sz="1600" b="1" dirty="0">
+                <a:solidFill>
+                  <a:srgbClr val="1E2761"/>
+                </a:solidFill>
+                <a:latin typeface="Cambria" pitchFamily="34" charset="0"/>
+                <a:ea typeface="Cambria" pitchFamily="34" charset="-122"/>
+                <a:cs typeface="Cambria" pitchFamily="34" charset="-120"/>
+              </a:rPr>
+              <a:t>Evaluation</a:t>
+            </a:r>
+            <a:endParaRPr lang="en-US" sz="1600" dirty="0"/>
+          </a:p>
+        </p:txBody>
+      </p:sp>
+      <p:sp>
+        <p:nvSpPr>
+          <p:cNvPr id="13" name="Text 11"/>
+          <p:cNvSpPr/>
+          <p:nvPr/>
+        </p:nvSpPr>
+        <p:spPr>
+          <a:xfrm>
+            <a:off x="731520" y="1810512"/>
+            <a:ext cx="5303520" cy="3566160"/>
+          </a:xfrm>
+          <a:prstGeom prst="rect">
+            <a:avLst/>
+          </a:prstGeom>
+          <a:noFill/>
+          <a:ln/>
+        </p:spPr>
+        <p:txBody>
+          <a:bodyPr wrap="square" rtlCol="0" anchor="ctr"/>
+          <a:lstStyle/>
+          <a:p>
+            <a:pPr marL="342900" indent="-342900">
+              <a:spcAft>
+                <a:spcPts val="600"/>
+              </a:spcAft>
+              <a:buSzPct val="100000"/>
+              <a:buChar char="•"/>
+            </a:pPr>
+            <a:r>
+              <a:rPr lang="en-US" sz="1150" dirty="0">
+                <a:solidFill>
+                  <a:srgbClr val="1A1A2E"/>
+                </a:solidFill>
+                <a:latin typeface="Calibri" pitchFamily="34" charset="0"/>
+                <a:ea typeface="Calibri" pitchFamily="34" charset="-122"/>
+                <a:cs typeface="Calibri" pitchFamily="34" charset="-120"/>
+              </a:rPr>
+              <a:t>Golden set 80 → 100 bilingual (72 EN / 28 DE); DE gold completed to the two-tag rubric; the n=100 run published to the model card</a:t>
+            </a:r>
+            <a:endParaRPr lang="en-US" sz="1150" dirty="0"/>
+          </a:p>
+          <a:p>
+            <a:pPr marL="342900" indent="-342900">
+              <a:spcAft>
+                <a:spcPts val="600"/>
+              </a:spcAft>
+              <a:buSzPct val="100000"/>
+              <a:buChar char="•"/>
+            </a:pPr>
+            <a:r>
+              <a:rPr lang="en-US" sz="1150" dirty="0">
+                <a:solidFill>
+                  <a:srgbClr val="1A1A2E"/>
+                </a:solidFill>
+                <a:latin typeface="Calibri" pitchFamily="34" charset="0"/>
+                <a:ea typeface="Calibri" pitchFamily="34" charset="-122"/>
+                <a:cs typeface="Calibri" pitchFamily="34" charset="-120"/>
+              </a:rPr>
+              <a:t>Published: sentiment 97% (CI 93–100) · urgency 90% (CI 84–95) · tag F1 by meaning 82.7%; DE within ~1pp of EN on urgency (89.3 vs 90.3)</a:t>
+            </a:r>
+            <a:endParaRPr lang="en-US" sz="1150" dirty="0"/>
+          </a:p>
+          <a:p>
+            <a:pPr marL="342900" indent="-342900">
+              <a:spcAft>
+                <a:spcPts val="600"/>
+              </a:spcAft>
+              <a:buSzPct val="100000"/>
+              <a:buChar char="•"/>
+            </a:pPr>
+            <a:r>
+              <a:rPr lang="en-US" sz="1150" dirty="0">
+                <a:solidFill>
+                  <a:srgbClr val="1A1A2E"/>
+                </a:solidFill>
+                <a:latin typeface="Calibri" pitchFamily="34" charset="0"/>
+                <a:ea typeface="Calibri" pitchFamily="34" charset="-122"/>
+                <a:cs typeface="Calibri" pitchFamily="34" charset="-120"/>
+              </a:rPr>
+              <a:t>Urgency exemplar effect now significant — 83%→90%, in-run paired McNemar p=0.039 (was p=0.219 at n=80), after a churn-musing calibration exemplar</a:t>
+            </a:r>
+            <a:endParaRPr lang="en-US" sz="1150" dirty="0"/>
+          </a:p>
+          <a:p>
+            <a:pPr marL="342900" indent="-342900">
+              <a:spcAft>
+                <a:spcPts val="600"/>
+              </a:spcAft>
+              <a:buSzPct val="100000"/>
+              <a:buChar char="•"/>
+            </a:pPr>
+            <a:r>
+              <a:rPr lang="en-US" sz="1150" dirty="0">
+                <a:solidFill>
+                  <a:srgbClr val="1A1A2E"/>
+                </a:solidFill>
+                <a:latin typeface="Calibri" pitchFamily="34" charset="0"/>
+                <a:ea typeface="Calibri" pitchFamily="34" charset="-122"/>
+                <a:cs typeface="Calibri" pitchFamily="34" charset="-120"/>
+              </a:rPr>
+              <a:t>German few-shot exemplars (leakage-free) + lexical tag canonicalization at enrichment — measured: 2/80 items touched, both toward gold, zero regressions</a:t>
+            </a:r>
+            <a:endParaRPr lang="en-US" sz="1150" dirty="0"/>
+          </a:p>
+          <a:p>
+            <a:pPr marL="342900" indent="-342900">
+              <a:spcAft>
+                <a:spcPts val="600"/>
+              </a:spcAft>
+              <a:buSzPct val="100000"/>
+              <a:buChar char="•"/>
+            </a:pPr>
+            <a:r>
+              <a:rPr lang="en-US" sz="1150" dirty="0">
+                <a:solidFill>
+                  <a:srgbClr val="1A1A2E"/>
+                </a:solidFill>
+                <a:latin typeface="Calibri" pitchFamily="34" charset="0"/>
+                <a:ea typeface="Calibri" pitchFamily="34" charset="-122"/>
+                <a:cs typeface="Calibri" pitchFamily="34" charset="-120"/>
+              </a:rPr>
+              <a:t>Per-item eval persistence — full per-item predictions kept per run, so future model-score calibration can pool dated runs</a:t>
+            </a:r>
+            <a:endParaRPr lang="en-US" sz="1150" dirty="0"/>
+          </a:p>
+        </p:txBody>
+      </p:sp>
+      <p:sp>
+        <p:nvSpPr>
+          <p:cNvPr id="14" name="Text 12"/>
+          <p:cNvSpPr/>
+          <p:nvPr/>
+        </p:nvSpPr>
+        <p:spPr>
+          <a:xfrm>
+            <a:off x="6400800" y="1417320"/>
+            <a:ext cx="5212080" cy="347472"/>
+          </a:xfrm>
+          <a:prstGeom prst="rect">
+            <a:avLst/>
+          </a:prstGeom>
+          <a:noFill/>
+          <a:ln/>
+        </p:spPr>
+        <p:txBody>
+          <a:bodyPr wrap="square" rtlCol="0" anchor="ctr"/>
+          <a:lstStyle/>
+          <a:p>
+            <a:pPr indent="0" marL="0">
+              <a:buNone/>
+            </a:pPr>
+            <a:r>
+              <a:rPr lang="en-US" sz="1600" b="1" dirty="0">
+                <a:solidFill>
+                  <a:srgbClr val="1E2761"/>
+                </a:solidFill>
+                <a:latin typeface="Cambria" pitchFamily="34" charset="0"/>
+                <a:ea typeface="Cambria" pitchFamily="34" charset="-122"/>
+                <a:cs typeface="Cambria" pitchFamily="34" charset="-120"/>
+              </a:rPr>
+              <a:t>Platform &amp; connectors</a:t>
+            </a:r>
+            <a:endParaRPr lang="en-US" sz="1600" dirty="0"/>
+          </a:p>
+        </p:txBody>
+      </p:sp>
+      <p:sp>
+        <p:nvSpPr>
+          <p:cNvPr id="15" name="Text 13"/>
+          <p:cNvSpPr/>
+          <p:nvPr/>
+        </p:nvSpPr>
+        <p:spPr>
+          <a:xfrm>
+            <a:off x="6583680" y="1810512"/>
+            <a:ext cx="5029200" cy="3566160"/>
+          </a:xfrm>
+          <a:prstGeom prst="rect">
+            <a:avLst/>
+          </a:prstGeom>
+          <a:noFill/>
+          <a:ln/>
+        </p:spPr>
+        <p:txBody>
+          <a:bodyPr wrap="square" rtlCol="0" anchor="ctr"/>
+          <a:lstStyle/>
+          <a:p>
+            <a:pPr marL="342900" indent="-342900">
+              <a:spcAft>
+                <a:spcPts val="600"/>
+              </a:spcAft>
+              <a:buSzPct val="100000"/>
+              <a:buChar char="•"/>
+            </a:pPr>
+            <a:r>
+              <a:rPr lang="en-US" sz="1150" dirty="0">
+                <a:solidFill>
+                  <a:srgbClr val="1A1A2E"/>
+                </a:solidFill>
+                <a:latin typeface="Calibri" pitchFamily="34" charset="0"/>
+                <a:ea typeface="Calibri" pitchFamily="34" charset="-122"/>
+                <a:cs typeface="Calibri" pitchFamily="34" charset="-120"/>
+              </a:rPr>
+              <a:t>Enrichment tags persisted on signal records + per-entity top_tags and rollup — supplier/product scorecards without a CDP</a:t>
+            </a:r>
+            <a:endParaRPr lang="en-US" sz="1150" dirty="0"/>
+          </a:p>
+          <a:p>
+            <a:pPr marL="342900" indent="-342900">
+              <a:spcAft>
+                <a:spcPts val="600"/>
+              </a:spcAft>
+              <a:buSzPct val="100000"/>
+              <a:buChar char="•"/>
+            </a:pPr>
+            <a:r>
+              <a:rPr lang="en-US" sz="1150" dirty="0">
+                <a:solidFill>
+                  <a:srgbClr val="1A1A2E"/>
+                </a:solidFill>
+                <a:latin typeface="Calibri" pitchFamily="34" charset="0"/>
+                <a:ea typeface="Calibri" pitchFamily="34" charset="-122"/>
+                <a:cs typeface="Calibri" pitchFamily="34" charset="-120"/>
+              </a:rPr>
+              <a:t>Deterministic churn save-desk routing — leaving-intent tags at high/critical urgency always carry a customer_recovery proposal, inserted by code (auditable), still through the approval gate</a:t>
+            </a:r>
+            <a:endParaRPr lang="en-US" sz="1150" dirty="0"/>
+          </a:p>
+          <a:p>
+            <a:pPr marL="342900" indent="-342900">
+              <a:spcAft>
+                <a:spcPts val="600"/>
+              </a:spcAft>
+              <a:buSzPct val="100000"/>
+              <a:buChar char="•"/>
+            </a:pPr>
+            <a:r>
+              <a:rPr lang="en-US" sz="1150" dirty="0">
+                <a:solidFill>
+                  <a:srgbClr val="1A1A2E"/>
+                </a:solidFill>
+                <a:latin typeface="Calibri" pitchFamily="34" charset="0"/>
+                <a:ea typeface="Calibri" pitchFamily="34" charset="-122"/>
+                <a:cs typeface="Calibri" pitchFamily="34" charset="-120"/>
+              </a:rPr>
+              <a:t>App Store connector hardened against live-feed quirks — per-page retries with backoff, empty-first-page retry, 404-as-end-of-feed, de/at/ch storefront defaults</a:t>
+            </a:r>
+            <a:endParaRPr lang="en-US" sz="1150" dirty="0"/>
+          </a:p>
+          <a:p>
+            <a:pPr marL="342900" indent="-342900">
+              <a:spcAft>
+                <a:spcPts val="600"/>
+              </a:spcAft>
+              <a:buSzPct val="100000"/>
+              <a:buChar char="•"/>
+            </a:pPr>
+            <a:r>
+              <a:rPr lang="en-US" sz="1150" dirty="0">
+                <a:solidFill>
+                  <a:srgbClr val="1A1A2E"/>
+                </a:solidFill>
+                <a:latin typeface="Calibri" pitchFamily="34" charset="0"/>
+                <a:ea typeface="Calibri" pitchFamily="34" charset="-122"/>
+                <a:cs typeface="Calibri" pitchFamily="34" charset="-120"/>
+              </a:rPr>
+              <a:t>MCP server productized — 8 read-only tools under API-key auth, + model card &amp; evidence pack; write actions deliberately excluded</a:t>
+            </a:r>
+            <a:endParaRPr lang="en-US" sz="1150" dirty="0"/>
+          </a:p>
+          <a:p>
+            <a:pPr marL="342900" indent="-342900">
+              <a:spcAft>
+                <a:spcPts val="600"/>
+              </a:spcAft>
+              <a:buSzPct val="100000"/>
+              <a:buChar char="•"/>
+            </a:pPr>
+            <a:r>
+              <a:rPr lang="en-US" sz="1150" dirty="0">
+                <a:solidFill>
+                  <a:srgbClr val="1A1A2E"/>
+                </a:solidFill>
+                <a:latin typeface="Calibri" pitchFamily="34" charset="0"/>
+                <a:ea typeface="Calibri" pitchFamily="34" charset="-122"/>
+                <a:cs typeface="Calibri" pitchFamily="34" charset="-120"/>
+              </a:rPr>
+              <a:t>Feature catalog — 35 features + 12 prioritized improvements with design rationale vs alternatives (docs/features.md); six improvements already landed</a:t>
+            </a:r>
+            <a:endParaRPr lang="en-US" sz="1150" dirty="0"/>
+          </a:p>
+        </p:txBody>
+      </p:sp>
+      <p:sp>
+        <p:nvSpPr>
+          <p:cNvPr id="16" name="Shape 14"/>
+          <p:cNvSpPr/>
+          <p:nvPr/>
+        </p:nvSpPr>
+        <p:spPr>
+          <a:xfrm>
+            <a:off x="548640" y="5532120"/>
+            <a:ext cx="11064240" cy="868680"/>
+          </a:xfrm>
+          <a:prstGeom prst="roundRect">
+            <a:avLst>
+              <a:gd name="adj" fmla="val 6316"/>
+            </a:avLst>
+          </a:prstGeom>
+          <a:solidFill>
+            <a:srgbClr val="F4F7FC"/>
+          </a:solidFill>
+          <a:ln w="12700">
+            <a:solidFill>
+              <a:srgbClr val="CADCFC"/>
+            </a:solidFill>
+            <a:prstDash val="solid"/>
+          </a:ln>
+        </p:spPr>
+      </p:sp>
+      <p:sp>
+        <p:nvSpPr>
+          <p:cNvPr id="17" name="Text 15"/>
+          <p:cNvSpPr/>
+          <p:nvPr/>
+        </p:nvSpPr>
+        <p:spPr>
+          <a:xfrm>
+            <a:off x="777240" y="5641848"/>
+            <a:ext cx="10607040" cy="685800"/>
+          </a:xfrm>
+          <a:prstGeom prst="rect">
+            <a:avLst/>
+          </a:prstGeom>
+          <a:noFill/>
+          <a:ln/>
+        </p:spPr>
+        <p:txBody>
+          <a:bodyPr wrap="square" lIns="0" tIns="0" rIns="0" bIns="0" rtlCol="0" anchor="ctr"/>
+          <a:lstStyle/>
+          <a:p>
+            <a:pPr indent="0" marL="0">
+              <a:buNone/>
+            </a:pPr>
+            <a:r>
+              <a:rPr lang="en-US" sz="1250" dirty="0">
+                <a:solidFill>
+                  <a:srgbClr val="1A1A2E"/>
+                </a:solidFill>
+                <a:latin typeface="Calibri" pitchFamily="34" charset="0"/>
+                <a:ea typeface="Calibri" pitchFamily="34" charset="-122"/>
+                <a:cs typeface="Calibri" pitchFamily="34" charset="-120"/>
+              </a:rPr>
+              <a:t>Method note: every evaluation change above shipped as one measured iteration — gap → root cause → intervention → in-run paired A/B — with the negative result (p=0.219 at n=80) reported, not re-rolled.</a:t>
+            </a:r>
+            <a:endParaRPr lang="en-US" sz="1250" dirty="0"/>
+          </a:p>
+        </p:txBody>
+      </p:sp>
+    </p:spTree>
+  </p:cSld>
+  <p:clrMapOvr>
+    <a:masterClrMapping/>
+  </p:clrMapOvr>
+</p:sld>
+</file>
+
+<file path=ppt/slides/slide12.xml><?xml version="1.0" encoding="utf-8"?>
+<p:sld xmlns:a="http://schemas.openxmlformats.org/drawingml/2006/main" xmlns:r="http://schemas.openxmlformats.org/officeDocument/2006/relationships" xmlns:p="http://schemas.openxmlformats.org/presentationml/2006/main">
+  <p:cSld name="Slide 12">
+    <p:spTree>
+      <p:nvGrpSpPr>
+        <p:cNvPr id="1" name=""/>
+        <p:cNvGrpSpPr/>
+        <p:nvPr/>
+      </p:nvGrpSpPr>
+      <p:grpSpPr>
+        <a:xfrm>
+          <a:off x="0" y="0"/>
+          <a:ext cx="0" cy="0"/>
+          <a:chOff x="0" y="0"/>
+          <a:chExt cx="0" cy="0"/>
+        </a:xfrm>
+      </p:grpSpPr>
+      <p:sp>
+        <p:nvSpPr>
+          <p:cNvPr id="2" name="Text 0"/>
+          <p:cNvSpPr/>
+          <p:nvPr/>
+        </p:nvSpPr>
+        <p:spPr>
+          <a:xfrm>
+            <a:off x="548640" y="320040"/>
+            <a:ext cx="11064240" cy="777240"/>
+          </a:xfrm>
+          <a:prstGeom prst="rect">
+            <a:avLst/>
+          </a:prstGeom>
+          <a:noFill/>
+          <a:ln/>
+        </p:spPr>
+        <p:txBody>
+          <a:bodyPr wrap="square" rtlCol="0" anchor="ctr"/>
+          <a:lstStyle/>
+          <a:p>
+            <a:pPr indent="0" marL="0">
+              <a:buNone/>
+            </a:pPr>
+            <a:r>
+              <a:rPr lang="en-US" sz="3200" b="1" dirty="0">
+                <a:solidFill>
+                  <a:srgbClr val="1A1A2E"/>
+                </a:solidFill>
+                <a:latin typeface="Cambria" pitchFamily="34" charset="0"/>
+                <a:ea typeface="Cambria" pitchFamily="34" charset="-122"/>
+                <a:cs typeface="Cambria" pitchFamily="34" charset="-120"/>
+              </a:rPr>
+              <a:t>Evaluation: two independent streams</a:t>
+            </a:r>
+            <a:endParaRPr lang="en-US" sz="3200" dirty="0"/>
+          </a:p>
+        </p:txBody>
+      </p:sp>
+      <p:sp>
+        <p:nvSpPr>
+          <p:cNvPr id="3" name="Text 1"/>
+          <p:cNvSpPr/>
+          <p:nvPr/>
+        </p:nvSpPr>
+        <p:spPr>
+          <a:xfrm>
+            <a:off x="548640" y="987552"/>
+            <a:ext cx="11064240" cy="365760"/>
+          </a:xfrm>
+          <a:prstGeom prst="rect">
+            <a:avLst/>
+          </a:prstGeom>
+          <a:noFill/>
+          <a:ln/>
+        </p:spPr>
+        <p:txBody>
+          <a:bodyPr wrap="square" rtlCol="0" anchor="ctr"/>
+          <a:lstStyle/>
+          <a:p>
+            <a:pPr indent="0" marL="0">
+              <a:buNone/>
+            </a:pPr>
+            <a:r>
+              <a:rPr lang="en-US" sz="1400" i="1" dirty="0">
+                <a:solidFill>
+                  <a:srgbClr val="5A6478"/>
+                </a:solidFill>
+                <a:latin typeface="Calibri" pitchFamily="34" charset="0"/>
+                <a:ea typeface="Calibri" pitchFamily="34" charset="-122"/>
+                <a:cs typeface="Calibri" pitchFamily="34" charset="-120"/>
+              </a:rPr>
+              <a:t>Objective accuracy × practitioner judgement — neither alone suffices</a:t>
+            </a:r>
+            <a:endParaRPr lang="en-US" sz="1400" dirty="0"/>
+          </a:p>
+        </p:txBody>
+      </p:sp>
+      <p:sp>
+        <p:nvSpPr>
+          <p:cNvPr id="4" name="Shape 2"/>
+          <p:cNvSpPr/>
+          <p:nvPr/>
+        </p:nvSpPr>
+        <p:spPr>
+          <a:xfrm>
+            <a:off x="10424160" y="411480"/>
+            <a:ext cx="292608" cy="292608"/>
+          </a:xfrm>
+          <a:prstGeom prst="ellipse">
+            <a:avLst/>
+          </a:prstGeom>
+          <a:solidFill>
+            <a:srgbClr val="CADCFC"/>
+          </a:solidFill>
+          <a:ln/>
+        </p:spPr>
+      </p:sp>
+      <p:sp>
+        <p:nvSpPr>
+          <p:cNvPr id="5" name="Text 3"/>
+          <p:cNvSpPr/>
+          <p:nvPr/>
+        </p:nvSpPr>
+        <p:spPr>
+          <a:xfrm>
+            <a:off x="10424160" y="395935"/>
+            <a:ext cx="292608" cy="310896"/>
+          </a:xfrm>
+          <a:prstGeom prst="rect">
+            <a:avLst/>
+          </a:prstGeom>
+          <a:noFill/>
+          <a:ln/>
+        </p:spPr>
+        <p:txBody>
+          <a:bodyPr wrap="square" lIns="0" tIns="0" rIns="0" bIns="0" rtlCol="0" anchor="ctr"/>
+          <a:lstStyle/>
+          <a:p>
+            <a:pPr algn="ctr" indent="0" marL="0">
+              <a:buNone/>
+            </a:pPr>
+            <a:r>
+              <a:rPr lang="en-US" sz="1100" b="1" dirty="0">
+                <a:solidFill>
+                  <a:srgbClr val="1E2761"/>
+                </a:solidFill>
+                <a:latin typeface="Calibri" pitchFamily="34" charset="0"/>
+                <a:ea typeface="Calibri" pitchFamily="34" charset="-122"/>
+                <a:cs typeface="Calibri" pitchFamily="34" charset="-120"/>
+              </a:rPr>
+              <a:t>S</a:t>
+            </a:r>
+            <a:endParaRPr lang="en-US" sz="1100" dirty="0"/>
+          </a:p>
+        </p:txBody>
+      </p:sp>
+      <p:sp>
+        <p:nvSpPr>
+          <p:cNvPr id="6" name="Shape 4"/>
+          <p:cNvSpPr/>
+          <p:nvPr/>
+        </p:nvSpPr>
+        <p:spPr>
+          <a:xfrm>
+            <a:off x="10808208" y="411480"/>
+            <a:ext cx="292608" cy="292608"/>
+          </a:xfrm>
+          <a:prstGeom prst="ellipse">
+            <a:avLst/>
+          </a:prstGeom>
+          <a:solidFill>
+            <a:srgbClr val="CADCFC"/>
+          </a:solidFill>
+          <a:ln/>
+        </p:spPr>
+      </p:sp>
+      <p:sp>
+        <p:nvSpPr>
+          <p:cNvPr id="7" name="Text 5"/>
+          <p:cNvSpPr/>
+          <p:nvPr/>
+        </p:nvSpPr>
+        <p:spPr>
+          <a:xfrm>
+            <a:off x="10808208" y="395935"/>
+            <a:ext cx="292608" cy="310896"/>
+          </a:xfrm>
+          <a:prstGeom prst="rect">
+            <a:avLst/>
+          </a:prstGeom>
+          <a:noFill/>
+          <a:ln/>
+        </p:spPr>
+        <p:txBody>
+          <a:bodyPr wrap="square" lIns="0" tIns="0" rIns="0" bIns="0" rtlCol="0" anchor="ctr"/>
+          <a:lstStyle/>
+          <a:p>
+            <a:pPr algn="ctr" indent="0" marL="0">
+              <a:buNone/>
+            </a:pPr>
+            <a:r>
+              <a:rPr lang="en-US" sz="1100" b="1" dirty="0">
+                <a:solidFill>
+                  <a:srgbClr val="1E2761"/>
+                </a:solidFill>
+                <a:latin typeface="Calibri" pitchFamily="34" charset="0"/>
+                <a:ea typeface="Calibri" pitchFamily="34" charset="-122"/>
+                <a:cs typeface="Calibri" pitchFamily="34" charset="-120"/>
+              </a:rPr>
+              <a:t>I</a:t>
+            </a:r>
+            <a:endParaRPr lang="en-US" sz="1100" dirty="0"/>
+          </a:p>
+        </p:txBody>
+      </p:sp>
+      <p:sp>
+        <p:nvSpPr>
+          <p:cNvPr id="8" name="Shape 6"/>
+          <p:cNvSpPr/>
+          <p:nvPr/>
+        </p:nvSpPr>
+        <p:spPr>
+          <a:xfrm>
+            <a:off x="11192256" y="411480"/>
+            <a:ext cx="292608" cy="292608"/>
+          </a:xfrm>
+          <a:prstGeom prst="ellipse">
+            <a:avLst/>
+          </a:prstGeom>
+          <a:solidFill>
+            <a:srgbClr val="CADCFC"/>
+          </a:solidFill>
+          <a:ln/>
+        </p:spPr>
+      </p:sp>
+      <p:sp>
+        <p:nvSpPr>
+          <p:cNvPr id="9" name="Text 7"/>
+          <p:cNvSpPr/>
+          <p:nvPr/>
+        </p:nvSpPr>
+        <p:spPr>
+          <a:xfrm>
+            <a:off x="11192256" y="395935"/>
+            <a:ext cx="292608" cy="310896"/>
+          </a:xfrm>
+          <a:prstGeom prst="rect">
+            <a:avLst/>
+          </a:prstGeom>
+          <a:noFill/>
+          <a:ln/>
+        </p:spPr>
+        <p:txBody>
+          <a:bodyPr wrap="square" lIns="0" tIns="0" rIns="0" bIns="0" rtlCol="0" anchor="ctr"/>
+          <a:lstStyle/>
+          <a:p>
+            <a:pPr algn="ctr" indent="0" marL="0">
+              <a:buNone/>
+            </a:pPr>
+            <a:r>
+              <a:rPr lang="en-US" sz="1100" b="1" dirty="0">
+                <a:solidFill>
+                  <a:srgbClr val="1E2761"/>
+                </a:solidFill>
+                <a:latin typeface="Calibri" pitchFamily="34" charset="0"/>
+                <a:ea typeface="Calibri" pitchFamily="34" charset="-122"/>
+                <a:cs typeface="Calibri" pitchFamily="34" charset="-120"/>
+              </a:rPr>
+              <a:t>A</a:t>
+            </a:r>
+            <a:endParaRPr lang="en-US" sz="1100" dirty="0"/>
+          </a:p>
+        </p:txBody>
+      </p:sp>
+      <p:sp>
+        <p:nvSpPr>
+          <p:cNvPr id="10" name="Shape 8"/>
+          <p:cNvSpPr/>
+          <p:nvPr/>
+        </p:nvSpPr>
+        <p:spPr>
+          <a:xfrm>
+            <a:off x="11576304" y="411480"/>
+            <a:ext cx="292608" cy="292608"/>
+          </a:xfrm>
+          <a:prstGeom prst="ellipse">
+            <a:avLst/>
+          </a:prstGeom>
+          <a:solidFill>
+            <a:srgbClr val="1E2761"/>
+          </a:solidFill>
+          <a:ln/>
+        </p:spPr>
+      </p:sp>
+      <p:sp>
+        <p:nvSpPr>
+          <p:cNvPr id="11" name="Text 9"/>
+          <p:cNvSpPr/>
+          <p:nvPr/>
+        </p:nvSpPr>
+        <p:spPr>
+          <a:xfrm>
+            <a:off x="11576304" y="395935"/>
+            <a:ext cx="292608" cy="310896"/>
+          </a:xfrm>
+          <a:prstGeom prst="rect">
+            <a:avLst/>
+          </a:prstGeom>
+          <a:noFill/>
+          <a:ln/>
+        </p:spPr>
+        <p:txBody>
+          <a:bodyPr wrap="square" lIns="0" tIns="0" rIns="0" bIns="0" rtlCol="0" anchor="ctr"/>
+          <a:lstStyle/>
+          <a:p>
+            <a:pPr algn="ctr" indent="0" marL="0">
+              <a:buNone/>
+            </a:pPr>
+            <a:r>
+              <a:rPr lang="en-US" sz="1100" b="1" dirty="0">
+                <a:solidFill>
+                  <a:srgbClr val="FFFFFF"/>
+                </a:solidFill>
+                <a:latin typeface="Calibri" pitchFamily="34" charset="0"/>
+                <a:ea typeface="Calibri" pitchFamily="34" charset="-122"/>
+                <a:cs typeface="Calibri" pitchFamily="34" charset="-120"/>
+              </a:rPr>
+              <a:t>L</a:t>
+            </a:r>
+            <a:endParaRPr lang="en-US" sz="1100" dirty="0"/>
+          </a:p>
+        </p:txBody>
+      </p:sp>
+      <p:pic>
+        <p:nvPicPr>
+          <p:cNvPr id="12" name="Image 0" descr="/Users/olamakri/Documents/CLARA/thesis/diagrams/rendered/07_evaluation_pipeline.png">    </p:cNvPr>
+          <p:cNvPicPr>
+            <a:picLocks noChangeAspect="1"/>
+          </p:cNvPicPr>
+          <p:nvPr/>
+        </p:nvPicPr>
+        <p:blipFill>
+          <a:blip r:embed="rId1"/>
+          <a:stretch>
+            <a:fillRect/>
+          </a:stretch>
+        </p:blipFill>
+        <p:spPr>
+          <a:xfrm>
+            <a:off x="548640" y="1600200"/>
+            <a:ext cx="9509760" cy="3703320"/>
+          </a:xfrm>
+          <a:prstGeom prst="rect">
+            <a:avLst/>
+          </a:prstGeom>
+        </p:spPr>
+      </p:pic>
+      <p:sp>
+        <p:nvSpPr>
+          <p:cNvPr id="13" name="Text 10"/>
+          <p:cNvSpPr/>
+          <p:nvPr/>
+        </p:nvSpPr>
+        <p:spPr>
+          <a:xfrm>
+            <a:off x="548640" y="5486400"/>
+            <a:ext cx="11064240" cy="777240"/>
+          </a:xfrm>
+          <a:prstGeom prst="rect">
+            <a:avLst/>
+          </a:prstGeom>
+          <a:noFill/>
+          <a:ln/>
+        </p:spPr>
+        <p:txBody>
+          <a:bodyPr wrap="square" rtlCol="0" anchor="ctr"/>
+          <a:lstStyle/>
+          <a:p>
+            <a:pPr indent="0" marL="0">
+              <a:buNone/>
+            </a:pPr>
+            <a:r>
+              <a:rPr lang="en-US" sz="1350" dirty="0">
+                <a:solidFill>
+                  <a:srgbClr val="5A6478"/>
+                </a:solidFill>
+                <a:latin typeface="Calibri" pitchFamily="34" charset="0"/>
+                <a:ea typeface="Calibri" pitchFamily="34" charset="-122"/>
+                <a:cs typeface="Calibri" pitchFamily="34" charset="-120"/>
+              </a:rPr>
+              <a:t>188 real, public, paraphrased signals · 3 sectors (fintech / food delivery / B2B industrial) · EN+DE · human seed labels, authored independently of the artifact. Plus: the artifact's own committed in-repo evaluation (100-case bilingual golden set — 72 EN / 28 DE, live LLM, published metrics) as convergent evidence.</a:t>
+            </a:r>
+            <a:endParaRPr lang="en-US" sz="1350" dirty="0"/>
+          </a:p>
+        </p:txBody>
+      </p:sp>
+    </p:spTree>
+  </p:cSld>
+  <p:clrMapOvr>
+    <a:masterClrMapping/>
+  </p:clrMapOvr>
+</p:sld>
+</file>
+
+<file path=ppt/slides/slide13.xml><?xml version="1.0" encoding="utf-8"?>
+<p:sld xmlns:a="http://schemas.openxmlformats.org/drawingml/2006/main" xmlns:r="http://schemas.openxmlformats.org/officeDocument/2006/relationships" xmlns:p="http://schemas.openxmlformats.org/presentationml/2006/main">
+  <p:cSld name="Slide 13">
+    <p:spTree>
+      <p:nvGrpSpPr>
+        <p:cNvPr id="1" name=""/>
+        <p:cNvGrpSpPr/>
+        <p:nvPr/>
+      </p:nvGrpSpPr>
+      <p:grpSpPr>
+        <a:xfrm>
+          <a:off x="0" y="0"/>
+          <a:ext cx="0" cy="0"/>
+          <a:chOff x="0" y="0"/>
+          <a:chExt cx="0" cy="0"/>
+        </a:xfrm>
+      </p:grpSpPr>
+      <p:sp>
+        <p:nvSpPr>
+          <p:cNvPr id="2" name="Text 0"/>
+          <p:cNvSpPr/>
+          <p:nvPr/>
+        </p:nvSpPr>
+        <p:spPr>
+          <a:xfrm>
+            <a:off x="548640" y="320040"/>
+            <a:ext cx="11064240" cy="777240"/>
+          </a:xfrm>
+          <a:prstGeom prst="rect">
+            <a:avLst/>
+          </a:prstGeom>
+          <a:noFill/>
+          <a:ln/>
+        </p:spPr>
+        <p:txBody>
+          <a:bodyPr wrap="square" rtlCol="0" anchor="ctr"/>
+          <a:lstStyle/>
+          <a:p>
+            <a:pPr indent="0" marL="0">
+              <a:buNone/>
+            </a:pPr>
+            <a:r>
+              <a:rPr lang="en-US" sz="3200" b="1" dirty="0">
+                <a:solidFill>
+                  <a:srgbClr val="1A1A2E"/>
+                </a:solidFill>
+                <a:latin typeface="Cambria" pitchFamily="34" charset="0"/>
+                <a:ea typeface="Cambria" pitchFamily="34" charset="-122"/>
+                <a:cs typeface="Cambria" pitchFamily="34" charset="-120"/>
+              </a:rPr>
+              <a:t>Result 1: triage accuracy is method-dependent</a:t>
+            </a:r>
+            <a:endParaRPr lang="en-US" sz="3200" dirty="0"/>
+          </a:p>
+        </p:txBody>
+      </p:sp>
+      <p:sp>
+        <p:nvSpPr>
+          <p:cNvPr id="3" name="Text 1"/>
+          <p:cNvSpPr/>
+          <p:nvPr/>
+        </p:nvSpPr>
+        <p:spPr>
+          <a:xfrm>
+            <a:off x="548640" y="987552"/>
+            <a:ext cx="11064240" cy="365760"/>
+          </a:xfrm>
+          <a:prstGeom prst="rect">
+            <a:avLst/>
+          </a:prstGeom>
+          <a:noFill/>
+          <a:ln/>
+        </p:spPr>
+        <p:txBody>
+          <a:bodyPr wrap="square" rtlCol="0" anchor="ctr"/>
+          <a:lstStyle/>
+          <a:p>
+            <a:pPr indent="0" marL="0">
+              <a:buNone/>
+            </a:pPr>
+            <a:r>
+              <a:rPr lang="en-US" sz="1400" i="1" dirty="0">
+                <a:solidFill>
+                  <a:srgbClr val="5A6478"/>
+                </a:solidFill>
+                <a:latin typeface="Calibri" pitchFamily="34" charset="0"/>
+                <a:ea typeface="Calibri" pitchFamily="34" charset="-122"/>
+                <a:cs typeface="Calibri" pitchFamily="34" charset="-120"/>
+              </a:rPr>
+              <a:t>Naive methods fail on real multilingual feedback; learned models are necessary</a:t>
+            </a:r>
+            <a:endParaRPr lang="en-US" sz="1400" dirty="0"/>
+          </a:p>
+        </p:txBody>
+      </p:sp>
+      <p:sp>
+        <p:nvSpPr>
+          <p:cNvPr id="4" name="Shape 2"/>
+          <p:cNvSpPr/>
+          <p:nvPr/>
+        </p:nvSpPr>
+        <p:spPr>
+          <a:xfrm>
+            <a:off x="10424160" y="411480"/>
+            <a:ext cx="292608" cy="292608"/>
+          </a:xfrm>
+          <a:prstGeom prst="ellipse">
+            <a:avLst/>
+          </a:prstGeom>
+          <a:solidFill>
+            <a:srgbClr val="CADCFC"/>
+          </a:solidFill>
+          <a:ln/>
+        </p:spPr>
+      </p:sp>
+      <p:sp>
+        <p:nvSpPr>
+          <p:cNvPr id="5" name="Text 3"/>
+          <p:cNvSpPr/>
+          <p:nvPr/>
+        </p:nvSpPr>
+        <p:spPr>
+          <a:xfrm>
+            <a:off x="10424160" y="395935"/>
+            <a:ext cx="292608" cy="310896"/>
+          </a:xfrm>
+          <a:prstGeom prst="rect">
+            <a:avLst/>
+          </a:prstGeom>
+          <a:noFill/>
+          <a:ln/>
+        </p:spPr>
+        <p:txBody>
+          <a:bodyPr wrap="square" lIns="0" tIns="0" rIns="0" bIns="0" rtlCol="0" anchor="ctr"/>
+          <a:lstStyle/>
+          <a:p>
+            <a:pPr algn="ctr" indent="0" marL="0">
+              <a:buNone/>
+            </a:pPr>
+            <a:r>
+              <a:rPr lang="en-US" sz="1100" b="1" dirty="0">
+                <a:solidFill>
+                  <a:srgbClr val="1E2761"/>
+                </a:solidFill>
+                <a:latin typeface="Calibri" pitchFamily="34" charset="0"/>
+                <a:ea typeface="Calibri" pitchFamily="34" charset="-122"/>
+                <a:cs typeface="Calibri" pitchFamily="34" charset="-120"/>
+              </a:rPr>
+              <a:t>S</a:t>
+            </a:r>
+            <a:endParaRPr lang="en-US" sz="1100" dirty="0"/>
+          </a:p>
+        </p:txBody>
+      </p:sp>
+      <p:sp>
+        <p:nvSpPr>
+          <p:cNvPr id="6" name="Shape 4"/>
+          <p:cNvSpPr/>
+          <p:nvPr/>
+        </p:nvSpPr>
+        <p:spPr>
+          <a:xfrm>
+            <a:off x="10808208" y="411480"/>
+            <a:ext cx="292608" cy="292608"/>
+          </a:xfrm>
+          <a:prstGeom prst="ellipse">
+            <a:avLst/>
+          </a:prstGeom>
+          <a:solidFill>
+            <a:srgbClr val="CADCFC"/>
+          </a:solidFill>
+          <a:ln/>
+        </p:spPr>
+      </p:sp>
+      <p:sp>
+        <p:nvSpPr>
+          <p:cNvPr id="7" name="Text 5"/>
+          <p:cNvSpPr/>
+          <p:nvPr/>
+        </p:nvSpPr>
+        <p:spPr>
+          <a:xfrm>
+            <a:off x="10808208" y="395935"/>
+            <a:ext cx="292608" cy="310896"/>
+          </a:xfrm>
+          <a:prstGeom prst="rect">
+            <a:avLst/>
+          </a:prstGeom>
+          <a:noFill/>
+          <a:ln/>
+        </p:spPr>
+        <p:txBody>
+          <a:bodyPr wrap="square" lIns="0" tIns="0" rIns="0" bIns="0" rtlCol="0" anchor="ctr"/>
+          <a:lstStyle/>
+          <a:p>
+            <a:pPr algn="ctr" indent="0" marL="0">
+              <a:buNone/>
+            </a:pPr>
+            <a:r>
+              <a:rPr lang="en-US" sz="1100" b="1" dirty="0">
+                <a:solidFill>
+                  <a:srgbClr val="1E2761"/>
+                </a:solidFill>
+                <a:latin typeface="Calibri" pitchFamily="34" charset="0"/>
+                <a:ea typeface="Calibri" pitchFamily="34" charset="-122"/>
+                <a:cs typeface="Calibri" pitchFamily="34" charset="-120"/>
+              </a:rPr>
+              <a:t>I</a:t>
+            </a:r>
+            <a:endParaRPr lang="en-US" sz="1100" dirty="0"/>
+          </a:p>
+        </p:txBody>
+      </p:sp>
+      <p:sp>
+        <p:nvSpPr>
+          <p:cNvPr id="8" name="Shape 6"/>
+          <p:cNvSpPr/>
+          <p:nvPr/>
+        </p:nvSpPr>
+        <p:spPr>
+          <a:xfrm>
+            <a:off x="11192256" y="411480"/>
+            <a:ext cx="292608" cy="292608"/>
+          </a:xfrm>
+          <a:prstGeom prst="ellipse">
+            <a:avLst/>
+          </a:prstGeom>
+          <a:solidFill>
+            <a:srgbClr val="CADCFC"/>
+          </a:solidFill>
+          <a:ln/>
+        </p:spPr>
+      </p:sp>
+      <p:sp>
+        <p:nvSpPr>
+          <p:cNvPr id="9" name="Text 7"/>
+          <p:cNvSpPr/>
+          <p:nvPr/>
+        </p:nvSpPr>
+        <p:spPr>
+          <a:xfrm>
+            <a:off x="11192256" y="395935"/>
+            <a:ext cx="292608" cy="310896"/>
+          </a:xfrm>
+          <a:prstGeom prst="rect">
+            <a:avLst/>
+          </a:prstGeom>
+          <a:noFill/>
+          <a:ln/>
+        </p:spPr>
+        <p:txBody>
+          <a:bodyPr wrap="square" lIns="0" tIns="0" rIns="0" bIns="0" rtlCol="0" anchor="ctr"/>
+          <a:lstStyle/>
+          <a:p>
+            <a:pPr algn="ctr" indent="0" marL="0">
+              <a:buNone/>
+            </a:pPr>
+            <a:r>
+              <a:rPr lang="en-US" sz="1100" b="1" dirty="0">
+                <a:solidFill>
+                  <a:srgbClr val="1E2761"/>
+                </a:solidFill>
+                <a:latin typeface="Calibri" pitchFamily="34" charset="0"/>
+                <a:ea typeface="Calibri" pitchFamily="34" charset="-122"/>
+                <a:cs typeface="Calibri" pitchFamily="34" charset="-120"/>
+              </a:rPr>
+              <a:t>A</a:t>
+            </a:r>
+            <a:endParaRPr lang="en-US" sz="1100" dirty="0"/>
+          </a:p>
+        </p:txBody>
+      </p:sp>
+      <p:sp>
+        <p:nvSpPr>
+          <p:cNvPr id="10" name="Shape 8"/>
+          <p:cNvSpPr/>
+          <p:nvPr/>
+        </p:nvSpPr>
+        <p:spPr>
+          <a:xfrm>
+            <a:off x="11576304" y="411480"/>
+            <a:ext cx="292608" cy="292608"/>
+          </a:xfrm>
+          <a:prstGeom prst="ellipse">
+            <a:avLst/>
+          </a:prstGeom>
+          <a:solidFill>
+            <a:srgbClr val="1E2761"/>
+          </a:solidFill>
+          <a:ln/>
+        </p:spPr>
+      </p:sp>
+      <p:sp>
+        <p:nvSpPr>
+          <p:cNvPr id="11" name="Text 9"/>
+          <p:cNvSpPr/>
+          <p:nvPr/>
+        </p:nvSpPr>
+        <p:spPr>
+          <a:xfrm>
+            <a:off x="11576304" y="395935"/>
+            <a:ext cx="292608" cy="310896"/>
+          </a:xfrm>
+          <a:prstGeom prst="rect">
+            <a:avLst/>
+          </a:prstGeom>
+          <a:noFill/>
+          <a:ln/>
+        </p:spPr>
+        <p:txBody>
+          <a:bodyPr wrap="square" lIns="0" tIns="0" rIns="0" bIns="0" rtlCol="0" anchor="ctr"/>
+          <a:lstStyle/>
+          <a:p>
+            <a:pPr algn="ctr" indent="0" marL="0">
+              <a:buNone/>
+            </a:pPr>
+            <a:r>
+              <a:rPr lang="en-US" sz="1100" b="1" dirty="0">
+                <a:solidFill>
+                  <a:srgbClr val="FFFFFF"/>
+                </a:solidFill>
+                <a:latin typeface="Calibri" pitchFamily="34" charset="0"/>
+                <a:ea typeface="Calibri" pitchFamily="34" charset="-122"/>
+                <a:cs typeface="Calibri" pitchFamily="34" charset="-120"/>
+              </a:rPr>
+              <a:t>L</a:t>
+            </a:r>
+            <a:endParaRPr lang="en-US" sz="1100" dirty="0"/>
+          </a:p>
+        </p:txBody>
+      </p:sp>
       <p:graphicFrame>
         <p:nvGraphicFramePr>
-          <p:cNvPr id="11" name="Table 0"/>
+          <p:cNvPr id="14" name="Table 0"/>
+          <p:cNvGraphicFramePr>
+            <a:graphicFrameLocks noGrp="1"/>
+          </p:cNvGraphicFramePr>
+          <p:nvPr>
+            <p:extLst>
+              <p:ext uri="{D42A27DB-BD31-4B8C-83A1-F6EECF244321}">
+                <p14:modId xmlns:p14="http://schemas.microsoft.com/office/powerpoint/2010/main" val="1579011935"/>
+              </p:ext>
+            </p:extLst>
+          </p:nvPr>
+        </p:nvGraphicFramePr>
+        <p:xfrm>
+          <a:off x="548640" y="1645920"/>
+          <a:ext cx="6675120" cy="914400"/>
+        </p:xfrm>
+        <a:graphic>
+          <a:graphicData uri="http://schemas.openxmlformats.org/drawingml/2006/table">
+            <a:tbl>
+              <a:tblPr/>
+              <a:tblGrid>
+                <a:gridCol w="3108960"/>
+                <a:gridCol w="1783080"/>
+                <a:gridCol w="1783080"/>
+              </a:tblGrid>
+              <a:tr h="457200">
+                <a:tc>
+                  <a:txBody>
+                    <a:bodyPr/>
+                    <a:lstStyle/>
+                    <a:p>
+                      <a:pPr indent="0" marL="0">
+                        <a:buNone/>
+                      </a:pPr>
+                      <a:r>
+                        <a:rPr lang="en-US" sz="1300" b="1" dirty="0">
+                          <a:solidFill>
+                            <a:srgbClr val="FFFFFF"/>
+                          </a:solidFill>
+                          <a:latin typeface="Calibri" pitchFamily="34" charset="0"/>
+                          <a:ea typeface="Calibri" pitchFamily="34" charset="-122"/>
+                          <a:cs typeface="Calibri" pitchFamily="34" charset="-120"/>
+                        </a:rPr>
+                        <a:t>Predictor</a:t>
+                      </a:r>
+                      <a:endParaRPr lang="en-US" sz="1300" dirty="0">
+                        <a:latin typeface="Calibri" charset="0"/>
+                        <a:ea typeface="Calibri" charset="0"/>
+                        <a:cs typeface="Calibri" charset="0"/>
+                      </a:endParaRPr>
+                    </a:p>
+                  </a:txBody>
+                  <a:tcPr marL="91440" marR="91440" marT="45720" marB="45720" anchor="ctr">
+                    <a:lnL w="12700" cap="flat" cmpd="sng" algn="ctr">
+                      <a:solidFill>
+                        <a:srgbClr val="CADCFC"/>
+                      </a:solidFill>
+                      <a:prstDash val="solid"/>
+                      <a:round/>
+                      <a:headEnd type="none" w="med" len="med"/>
+                      <a:tailEnd type="none" w="med" len="med"/>
+                    </a:lnL>
+                    <a:lnR w="12700" cap="flat" cmpd="sng" algn="ctr">
+                      <a:solidFill>
+                        <a:srgbClr val="CADCFC"/>
+                      </a:solidFill>
+                      <a:prstDash val="solid"/>
+                      <a:round/>
+                      <a:headEnd type="none" w="med" len="med"/>
+                      <a:tailEnd type="none" w="med" len="med"/>
+                    </a:lnR>
+                    <a:lnT w="12700" cap="flat" cmpd="sng" algn="ctr">
+                      <a:solidFill>
+                        <a:srgbClr val="CADCFC"/>
+                      </a:solidFill>
+                      <a:prstDash val="solid"/>
+                      <a:round/>
+                      <a:headEnd type="none" w="med" len="med"/>
+                      <a:tailEnd type="none" w="med" len="med"/>
+                    </a:lnT>
+                    <a:lnB w="12700" cap="flat" cmpd="sng" algn="ctr">
+                      <a:solidFill>
+                        <a:srgbClr val="CADCFC"/>
+                      </a:solidFill>
+                      <a:prstDash val="solid"/>
+                      <a:round/>
+                      <a:headEnd type="none" w="med" len="med"/>
+                      <a:tailEnd type="none" w="med" len="med"/>
+                    </a:lnB>
+                    <a:solidFill>
+                      <a:srgbClr val="1E2761"/>
+                    </a:solidFill>
+                  </a:tcPr>
+                </a:tc>
+                <a:tc>
+                  <a:txBody>
+                    <a:bodyPr/>
+                    <a:lstStyle/>
+                    <a:p>
+                      <a:pPr indent="0" marL="0">
+                        <a:buNone/>
+                      </a:pPr>
+                      <a:r>
+                        <a:rPr lang="en-US" sz="1300" b="1" dirty="0">
+                          <a:solidFill>
+                            <a:srgbClr val="FFFFFF"/>
+                          </a:solidFill>
+                          <a:latin typeface="Calibri" pitchFamily="34" charset="0"/>
+                          <a:ea typeface="Calibri" pitchFamily="34" charset="-122"/>
+                          <a:cs typeface="Calibri" pitchFamily="34" charset="-120"/>
+                        </a:rPr>
+                        <a:t>Sentiment acc (n=153)</a:t>
+                      </a:r>
+                      <a:endParaRPr lang="en-US" sz="1300" dirty="0">
+                        <a:latin typeface="Calibri" charset="0"/>
+                        <a:ea typeface="Calibri" charset="0"/>
+                        <a:cs typeface="Calibri" charset="0"/>
+                      </a:endParaRPr>
+                    </a:p>
+                  </a:txBody>
+                  <a:tcPr marL="91440" marR="91440" marT="45720" marB="45720" anchor="ctr">
+                    <a:lnL w="12700" cap="flat" cmpd="sng" algn="ctr">
+                      <a:solidFill>
+                        <a:srgbClr val="CADCFC"/>
+                      </a:solidFill>
+                      <a:prstDash val="solid"/>
+                      <a:round/>
+                      <a:headEnd type="none" w="med" len="med"/>
+                      <a:tailEnd type="none" w="med" len="med"/>
+                    </a:lnL>
+                    <a:lnR w="12700" cap="flat" cmpd="sng" algn="ctr">
+                      <a:solidFill>
+                        <a:srgbClr val="CADCFC"/>
+                      </a:solidFill>
+                      <a:prstDash val="solid"/>
+                      <a:round/>
+                      <a:headEnd type="none" w="med" len="med"/>
+                      <a:tailEnd type="none" w="med" len="med"/>
+                    </a:lnR>
+                    <a:lnT w="12700" cap="flat" cmpd="sng" algn="ctr">
+                      <a:solidFill>
+                        <a:srgbClr val="CADCFC"/>
+                      </a:solidFill>
+                      <a:prstDash val="solid"/>
+                      <a:round/>
+                      <a:headEnd type="none" w="med" len="med"/>
+                      <a:tailEnd type="none" w="med" len="med"/>
+                    </a:lnT>
+                    <a:lnB w="12700" cap="flat" cmpd="sng" algn="ctr">
+                      <a:solidFill>
+                        <a:srgbClr val="CADCFC"/>
+                      </a:solidFill>
+                      <a:prstDash val="solid"/>
+                      <a:round/>
+                      <a:headEnd type="none" w="med" len="med"/>
+                      <a:tailEnd type="none" w="med" len="med"/>
+                    </a:lnB>
+                    <a:solidFill>
+                      <a:srgbClr val="1E2761"/>
+                    </a:solidFill>
+                  </a:tcPr>
+                </a:tc>
+                <a:tc>
+                  <a:txBody>
+                    <a:bodyPr/>
+                    <a:lstStyle/>
+                    <a:p>
+                      <a:pPr indent="0" marL="0">
+                        <a:buNone/>
+                      </a:pPr>
+                      <a:r>
+                        <a:rPr lang="en-US" sz="1300" b="1" dirty="0">
+                          <a:solidFill>
+                            <a:srgbClr val="FFFFFF"/>
+                          </a:solidFill>
+                          <a:latin typeface="Calibri" pitchFamily="34" charset="0"/>
+                          <a:ea typeface="Calibri" pitchFamily="34" charset="-122"/>
+                          <a:cs typeface="Calibri" pitchFamily="34" charset="-120"/>
+                        </a:rPr>
+                        <a:t>Risk macro-F1 (n=106)</a:t>
+                      </a:r>
+                      <a:endParaRPr lang="en-US" sz="1300" dirty="0">
+                        <a:latin typeface="Calibri" charset="0"/>
+                        <a:ea typeface="Calibri" charset="0"/>
+                        <a:cs typeface="Calibri" charset="0"/>
+                      </a:endParaRPr>
+                    </a:p>
+                  </a:txBody>
+                  <a:tcPr marL="91440" marR="91440" marT="45720" marB="45720" anchor="ctr">
+                    <a:lnL w="12700" cap="flat" cmpd="sng" algn="ctr">
+                      <a:solidFill>
+                        <a:srgbClr val="CADCFC"/>
+                      </a:solidFill>
+                      <a:prstDash val="solid"/>
+                      <a:round/>
+                      <a:headEnd type="none" w="med" len="med"/>
+                      <a:tailEnd type="none" w="med" len="med"/>
+                    </a:lnL>
+                    <a:lnR w="12700" cap="flat" cmpd="sng" algn="ctr">
+                      <a:solidFill>
+                        <a:srgbClr val="CADCFC"/>
+                      </a:solidFill>
+                      <a:prstDash val="solid"/>
+                      <a:round/>
+                      <a:headEnd type="none" w="med" len="med"/>
+                      <a:tailEnd type="none" w="med" len="med"/>
+                    </a:lnR>
+                    <a:lnT w="12700" cap="flat" cmpd="sng" algn="ctr">
+                      <a:solidFill>
+                        <a:srgbClr val="CADCFC"/>
+                      </a:solidFill>
+                      <a:prstDash val="solid"/>
+                      <a:round/>
+                      <a:headEnd type="none" w="med" len="med"/>
+                      <a:tailEnd type="none" w="med" len="med"/>
+                    </a:lnT>
+                    <a:lnB w="12700" cap="flat" cmpd="sng" algn="ctr">
+                      <a:solidFill>
+                        <a:srgbClr val="CADCFC"/>
+                      </a:solidFill>
+                      <a:prstDash val="solid"/>
+                      <a:round/>
+                      <a:headEnd type="none" w="med" len="med"/>
+                      <a:tailEnd type="none" w="med" len="med"/>
+                    </a:lnB>
+                    <a:solidFill>
+                      <a:srgbClr val="1E2761"/>
+                    </a:solidFill>
+                  </a:tcPr>
+                </a:tc>
+              </a:tr>
+              <a:tr h="457200">
+                <a:tc>
+                  <a:txBody>
+                    <a:bodyPr/>
+                    <a:lstStyle/>
+                    <a:p>
+                      <a:pPr indent="0" marL="0">
+                        <a:buNone/>
+                      </a:pPr>
+                      <a:r>
+                        <a:rPr lang="en-US" sz="1300" dirty="0">
+                          <a:solidFill>
+                            <a:srgbClr val="000000"/>
+                          </a:solidFill>
+                          <a:latin typeface="Calibri" pitchFamily="34" charset="0"/>
+                          <a:ea typeface="Calibri" pitchFamily="34" charset="-122"/>
+                          <a:cs typeface="Calibri" pitchFamily="34" charset="-120"/>
+                        </a:rPr>
+                        <a:t>Lexicon / keyword floor</a:t>
+                      </a:r>
+                      <a:endParaRPr lang="en-US" sz="1300" dirty="0">
+                        <a:latin typeface="Calibri" charset="0"/>
+                        <a:ea typeface="Calibri" charset="0"/>
+                        <a:cs typeface="Calibri" charset="0"/>
+                      </a:endParaRPr>
+                    </a:p>
+                  </a:txBody>
+                  <a:tcPr marL="91440" marR="91440" marT="45720" marB="45720" anchor="ctr">
+                    <a:lnL w="12700" cap="flat" cmpd="sng" algn="ctr">
+                      <a:solidFill>
+                        <a:srgbClr val="CADCFC"/>
+                      </a:solidFill>
+                      <a:prstDash val="solid"/>
+                      <a:round/>
+                      <a:headEnd type="none" w="med" len="med"/>
+                      <a:tailEnd type="none" w="med" len="med"/>
+                    </a:lnL>
+                    <a:lnR w="12700" cap="flat" cmpd="sng" algn="ctr">
+                      <a:solidFill>
+                        <a:srgbClr val="CADCFC"/>
+                      </a:solidFill>
+                      <a:prstDash val="solid"/>
+                      <a:round/>
+                      <a:headEnd type="none" w="med" len="med"/>
+                      <a:tailEnd type="none" w="med" len="med"/>
+                    </a:lnR>
+                    <a:lnT w="12700" cap="flat" cmpd="sng" algn="ctr">
+                      <a:solidFill>
+                        <a:srgbClr val="CADCFC"/>
+                      </a:solidFill>
+                      <a:prstDash val="solid"/>
+                      <a:round/>
+                      <a:headEnd type="none" w="med" len="med"/>
+                      <a:tailEnd type="none" w="med" len="med"/>
+                    </a:lnT>
+                    <a:lnB w="12700" cap="flat" cmpd="sng" algn="ctr">
+                      <a:solidFill>
+                        <a:srgbClr val="CADCFC"/>
+                      </a:solidFill>
+                      <a:prstDash val="solid"/>
+                      <a:round/>
+                      <a:headEnd type="none" w="med" len="med"/>
+                      <a:tailEnd type="none" w="med" len="med"/>
+                    </a:lnB>
+                  </a:tcPr>
+                </a:tc>
+                <a:tc>
+                  <a:txBody>
+                    <a:bodyPr/>
+                    <a:lstStyle/>
+                    <a:p>
+                      <a:pPr indent="0" marL="0">
+                        <a:buNone/>
+                      </a:pPr>
+                      <a:r>
+                        <a:rPr lang="en-US" sz="1300" dirty="0">
+                          <a:solidFill>
+                            <a:srgbClr val="000000"/>
+                          </a:solidFill>
+                          <a:latin typeface="Calibri" pitchFamily="34" charset="0"/>
+                          <a:ea typeface="Calibri" pitchFamily="34" charset="-122"/>
+                          <a:cs typeface="Calibri" pitchFamily="34" charset="-120"/>
+                        </a:rPr>
+                        <a:t>0.37</a:t>
+                      </a:r>
+                      <a:endParaRPr lang="en-US" sz="1300" dirty="0">
+                        <a:latin typeface="Calibri" charset="0"/>
+                        <a:ea typeface="Calibri" charset="0"/>
+                        <a:cs typeface="Calibri" charset="0"/>
+                      </a:endParaRPr>
+                    </a:p>
+                  </a:txBody>
+                  <a:tcPr marL="91440" marR="91440" marT="45720" marB="45720" anchor="ctr">
+                    <a:lnL w="12700" cap="flat" cmpd="sng" algn="ctr">
+                      <a:solidFill>
+                        <a:srgbClr val="CADCFC"/>
+                      </a:solidFill>
+                      <a:prstDash val="solid"/>
+                      <a:round/>
+                      <a:headEnd type="none" w="med" len="med"/>
+                      <a:tailEnd type="none" w="med" len="med"/>
+                    </a:lnL>
+                    <a:lnR w="12700" cap="flat" cmpd="sng" algn="ctr">
+                      <a:solidFill>
+                        <a:srgbClr val="CADCFC"/>
+                      </a:solidFill>
+                      <a:prstDash val="solid"/>
+                      <a:round/>
+                      <a:headEnd type="none" w="med" len="med"/>
+                      <a:tailEnd type="none" w="med" len="med"/>
+                    </a:lnR>
+                    <a:lnT w="12700" cap="flat" cmpd="sng" algn="ctr">
+                      <a:solidFill>
+                        <a:srgbClr val="CADCFC"/>
+                      </a:solidFill>
+                      <a:prstDash val="solid"/>
+                      <a:round/>
+                      <a:headEnd type="none" w="med" len="med"/>
+                      <a:tailEnd type="none" w="med" len="med"/>
+                    </a:lnT>
+                    <a:lnB w="12700" cap="flat" cmpd="sng" algn="ctr">
+                      <a:solidFill>
+                        <a:srgbClr val="CADCFC"/>
+                      </a:solidFill>
+                      <a:prstDash val="solid"/>
+                      <a:round/>
+                      <a:headEnd type="none" w="med" len="med"/>
+                      <a:tailEnd type="none" w="med" len="med"/>
+                    </a:lnB>
+                  </a:tcPr>
+                </a:tc>
+                <a:tc>
+                  <a:txBody>
+                    <a:bodyPr/>
+                    <a:lstStyle/>
+                    <a:p>
+                      <a:pPr indent="0" marL="0">
+                        <a:buNone/>
+                      </a:pPr>
+                      <a:r>
+                        <a:rPr lang="en-US" sz="1300" dirty="0">
+                          <a:solidFill>
+                            <a:srgbClr val="000000"/>
+                          </a:solidFill>
+                          <a:latin typeface="Calibri" pitchFamily="34" charset="0"/>
+                          <a:ea typeface="Calibri" pitchFamily="34" charset="-122"/>
+                          <a:cs typeface="Calibri" pitchFamily="34" charset="-120"/>
+                        </a:rPr>
+                        <a:t>0.26</a:t>
+                      </a:r>
+                      <a:endParaRPr lang="en-US" sz="1300" dirty="0">
+                        <a:latin typeface="Calibri" charset="0"/>
+                        <a:ea typeface="Calibri" charset="0"/>
+                        <a:cs typeface="Calibri" charset="0"/>
+                      </a:endParaRPr>
+                    </a:p>
+                  </a:txBody>
+                  <a:tcPr marL="91440" marR="91440" marT="45720" marB="45720" anchor="ctr">
+                    <a:lnL w="12700" cap="flat" cmpd="sng" algn="ctr">
+                      <a:solidFill>
+                        <a:srgbClr val="CADCFC"/>
+                      </a:solidFill>
+                      <a:prstDash val="solid"/>
+                      <a:round/>
+                      <a:headEnd type="none" w="med" len="med"/>
+                      <a:tailEnd type="none" w="med" len="med"/>
+                    </a:lnL>
+                    <a:lnR w="12700" cap="flat" cmpd="sng" algn="ctr">
+                      <a:solidFill>
+                        <a:srgbClr val="CADCFC"/>
+                      </a:solidFill>
+                      <a:prstDash val="solid"/>
+                      <a:round/>
+                      <a:headEnd type="none" w="med" len="med"/>
+                      <a:tailEnd type="none" w="med" len="med"/>
+                    </a:lnR>
+                    <a:lnT w="12700" cap="flat" cmpd="sng" algn="ctr">
+                      <a:solidFill>
+                        <a:srgbClr val="CADCFC"/>
+                      </a:solidFill>
+                      <a:prstDash val="solid"/>
+                      <a:round/>
+                      <a:headEnd type="none" w="med" len="med"/>
+                      <a:tailEnd type="none" w="med" len="med"/>
+                    </a:lnT>
+                    <a:lnB w="12700" cap="flat" cmpd="sng" algn="ctr">
+                      <a:solidFill>
+                        <a:srgbClr val="CADCFC"/>
+                      </a:solidFill>
+                      <a:prstDash val="solid"/>
+                      <a:round/>
+                      <a:headEnd type="none" w="med" len="med"/>
+                      <a:tailEnd type="none" w="med" len="med"/>
+                    </a:lnB>
+                  </a:tcPr>
+                </a:tc>
+              </a:tr>
+              <a:tr h="457200">
+                <a:tc>
+                  <a:txBody>
+                    <a:bodyPr/>
+                    <a:lstStyle/>
+                    <a:p>
+                      <a:pPr indent="0" marL="0">
+                        <a:buNone/>
+                      </a:pPr>
+                      <a:r>
+                        <a:rPr lang="en-US" sz="1300" dirty="0">
+                          <a:solidFill>
+                            <a:srgbClr val="000000"/>
+                          </a:solidFill>
+                          <a:latin typeface="Calibri" pitchFamily="34" charset="0"/>
+                          <a:ea typeface="Calibri" pitchFamily="34" charset="-122"/>
+                          <a:cs typeface="Calibri" pitchFamily="34" charset="-120"/>
+                        </a:rPr>
+                        <a:t>TF-IDF + LogReg (5-fold CV)</a:t>
+                      </a:r>
+                      <a:endParaRPr lang="en-US" sz="1300" dirty="0">
+                        <a:latin typeface="Calibri" charset="0"/>
+                        <a:ea typeface="Calibri" charset="0"/>
+                        <a:cs typeface="Calibri" charset="0"/>
+                      </a:endParaRPr>
+                    </a:p>
+                  </a:txBody>
+                  <a:tcPr marL="91440" marR="91440" marT="45720" marB="45720" anchor="ctr">
+                    <a:lnL w="12700" cap="flat" cmpd="sng" algn="ctr">
+                      <a:solidFill>
+                        <a:srgbClr val="CADCFC"/>
+                      </a:solidFill>
+                      <a:prstDash val="solid"/>
+                      <a:round/>
+                      <a:headEnd type="none" w="med" len="med"/>
+                      <a:tailEnd type="none" w="med" len="med"/>
+                    </a:lnL>
+                    <a:lnR w="12700" cap="flat" cmpd="sng" algn="ctr">
+                      <a:solidFill>
+                        <a:srgbClr val="CADCFC"/>
+                      </a:solidFill>
+                      <a:prstDash val="solid"/>
+                      <a:round/>
+                      <a:headEnd type="none" w="med" len="med"/>
+                      <a:tailEnd type="none" w="med" len="med"/>
+                    </a:lnR>
+                    <a:lnT w="12700" cap="flat" cmpd="sng" algn="ctr">
+                      <a:solidFill>
+                        <a:srgbClr val="CADCFC"/>
+                      </a:solidFill>
+                      <a:prstDash val="solid"/>
+                      <a:round/>
+                      <a:headEnd type="none" w="med" len="med"/>
+                      <a:tailEnd type="none" w="med" len="med"/>
+                    </a:lnT>
+                    <a:lnB w="12700" cap="flat" cmpd="sng" algn="ctr">
+                      <a:solidFill>
+                        <a:srgbClr val="CADCFC"/>
+                      </a:solidFill>
+                      <a:prstDash val="solid"/>
+                      <a:round/>
+                      <a:headEnd type="none" w="med" len="med"/>
+                      <a:tailEnd type="none" w="med" len="med"/>
+                    </a:lnB>
+                  </a:tcPr>
+                </a:tc>
+                <a:tc>
+                  <a:txBody>
+                    <a:bodyPr/>
+                    <a:lstStyle/>
+                    <a:p>
+                      <a:pPr indent="0" marL="0">
+                        <a:buNone/>
+                      </a:pPr>
+                      <a:r>
+                        <a:rPr lang="en-US" sz="1300" dirty="0">
+                          <a:solidFill>
+                            <a:srgbClr val="000000"/>
+                          </a:solidFill>
+                          <a:latin typeface="Calibri" pitchFamily="34" charset="0"/>
+                          <a:ea typeface="Calibri" pitchFamily="34" charset="-122"/>
+                          <a:cs typeface="Calibri" pitchFamily="34" charset="-120"/>
+                        </a:rPr>
+                        <a:t>0.78</a:t>
+                      </a:r>
+                      <a:endParaRPr lang="en-US" sz="1300" dirty="0">
+                        <a:latin typeface="Calibri" charset="0"/>
+                        <a:ea typeface="Calibri" charset="0"/>
+                        <a:cs typeface="Calibri" charset="0"/>
+                      </a:endParaRPr>
+                    </a:p>
+                  </a:txBody>
+                  <a:tcPr marL="91440" marR="91440" marT="45720" marB="45720" anchor="ctr">
+                    <a:lnL w="12700" cap="flat" cmpd="sng" algn="ctr">
+                      <a:solidFill>
+                        <a:srgbClr val="CADCFC"/>
+                      </a:solidFill>
+                      <a:prstDash val="solid"/>
+                      <a:round/>
+                      <a:headEnd type="none" w="med" len="med"/>
+                      <a:tailEnd type="none" w="med" len="med"/>
+                    </a:lnL>
+                    <a:lnR w="12700" cap="flat" cmpd="sng" algn="ctr">
+                      <a:solidFill>
+                        <a:srgbClr val="CADCFC"/>
+                      </a:solidFill>
+                      <a:prstDash val="solid"/>
+                      <a:round/>
+                      <a:headEnd type="none" w="med" len="med"/>
+                      <a:tailEnd type="none" w="med" len="med"/>
+                    </a:lnR>
+                    <a:lnT w="12700" cap="flat" cmpd="sng" algn="ctr">
+                      <a:solidFill>
+                        <a:srgbClr val="CADCFC"/>
+                      </a:solidFill>
+                      <a:prstDash val="solid"/>
+                      <a:round/>
+                      <a:headEnd type="none" w="med" len="med"/>
+                      <a:tailEnd type="none" w="med" len="med"/>
+                    </a:lnT>
+                    <a:lnB w="12700" cap="flat" cmpd="sng" algn="ctr">
+                      <a:solidFill>
+                        <a:srgbClr val="CADCFC"/>
+                      </a:solidFill>
+                      <a:prstDash val="solid"/>
+                      <a:round/>
+                      <a:headEnd type="none" w="med" len="med"/>
+                      <a:tailEnd type="none" w="med" len="med"/>
+                    </a:lnB>
+                  </a:tcPr>
+                </a:tc>
+                <a:tc>
+                  <a:txBody>
+                    <a:bodyPr/>
+                    <a:lstStyle/>
+                    <a:p>
+                      <a:pPr indent="0" marL="0">
+                        <a:buNone/>
+                      </a:pPr>
+                      <a:r>
+                        <a:rPr lang="en-US" sz="1300" dirty="0">
+                          <a:solidFill>
+                            <a:srgbClr val="000000"/>
+                          </a:solidFill>
+                          <a:latin typeface="Calibri" pitchFamily="34" charset="0"/>
+                          <a:ea typeface="Calibri" pitchFamily="34" charset="-122"/>
+                          <a:cs typeface="Calibri" pitchFamily="34" charset="-120"/>
+                        </a:rPr>
+                        <a:t>0.65</a:t>
+                      </a:r>
+                      <a:endParaRPr lang="en-US" sz="1300" dirty="0">
+                        <a:latin typeface="Calibri" charset="0"/>
+                        <a:ea typeface="Calibri" charset="0"/>
+                        <a:cs typeface="Calibri" charset="0"/>
+                      </a:endParaRPr>
+                    </a:p>
+                  </a:txBody>
+                  <a:tcPr marL="91440" marR="91440" marT="45720" marB="45720" anchor="ctr">
+                    <a:lnL w="12700" cap="flat" cmpd="sng" algn="ctr">
+                      <a:solidFill>
+                        <a:srgbClr val="CADCFC"/>
+                      </a:solidFill>
+                      <a:prstDash val="solid"/>
+                      <a:round/>
+                      <a:headEnd type="none" w="med" len="med"/>
+                      <a:tailEnd type="none" w="med" len="med"/>
+                    </a:lnL>
+                    <a:lnR w="12700" cap="flat" cmpd="sng" algn="ctr">
+                      <a:solidFill>
+                        <a:srgbClr val="CADCFC"/>
+                      </a:solidFill>
+                      <a:prstDash val="solid"/>
+                      <a:round/>
+                      <a:headEnd type="none" w="med" len="med"/>
+                      <a:tailEnd type="none" w="med" len="med"/>
+                    </a:lnR>
+                    <a:lnT w="12700" cap="flat" cmpd="sng" algn="ctr">
+                      <a:solidFill>
+                        <a:srgbClr val="CADCFC"/>
+                      </a:solidFill>
+                      <a:prstDash val="solid"/>
+                      <a:round/>
+                      <a:headEnd type="none" w="med" len="med"/>
+                      <a:tailEnd type="none" w="med" len="med"/>
+                    </a:lnT>
+                    <a:lnB w="12700" cap="flat" cmpd="sng" algn="ctr">
+                      <a:solidFill>
+                        <a:srgbClr val="CADCFC"/>
+                      </a:solidFill>
+                      <a:prstDash val="solid"/>
+                      <a:round/>
+                      <a:headEnd type="none" w="med" len="med"/>
+                      <a:tailEnd type="none" w="med" len="med"/>
+                    </a:lnB>
+                  </a:tcPr>
+                </a:tc>
+              </a:tr>
+              <a:tr h="457200">
+                <a:tc>
+                  <a:txBody>
+                    <a:bodyPr/>
+                    <a:lstStyle/>
+                    <a:p>
+                      <a:pPr indent="0" marL="0">
+                        <a:buNone/>
+                      </a:pPr>
+                      <a:r>
+                        <a:rPr lang="en-US" sz="1300" dirty="0">
+                          <a:solidFill>
+                            <a:srgbClr val="000000"/>
+                          </a:solidFill>
+                          <a:latin typeface="Calibri" pitchFamily="34" charset="0"/>
+                          <a:ea typeface="Calibri" pitchFamily="34" charset="-122"/>
+                          <a:cs typeface="Calibri" pitchFamily="34" charset="-120"/>
+                        </a:rPr>
+                        <a:t>LLM path (in-repo, 100-case bilingual golden set)</a:t>
+                      </a:r>
+                      <a:endParaRPr lang="en-US" sz="1300" dirty="0">
+                        <a:latin typeface="Calibri" charset="0"/>
+                        <a:ea typeface="Calibri" charset="0"/>
+                        <a:cs typeface="Calibri" charset="0"/>
+                      </a:endParaRPr>
+                    </a:p>
+                  </a:txBody>
+                  <a:tcPr marL="91440" marR="91440" marT="45720" marB="45720" anchor="ctr">
+                    <a:lnL w="12700" cap="flat" cmpd="sng" algn="ctr">
+                      <a:solidFill>
+                        <a:srgbClr val="CADCFC"/>
+                      </a:solidFill>
+                      <a:prstDash val="solid"/>
+                      <a:round/>
+                      <a:headEnd type="none" w="med" len="med"/>
+                      <a:tailEnd type="none" w="med" len="med"/>
+                    </a:lnL>
+                    <a:lnR w="12700" cap="flat" cmpd="sng" algn="ctr">
+                      <a:solidFill>
+                        <a:srgbClr val="CADCFC"/>
+                      </a:solidFill>
+                      <a:prstDash val="solid"/>
+                      <a:round/>
+                      <a:headEnd type="none" w="med" len="med"/>
+                      <a:tailEnd type="none" w="med" len="med"/>
+                    </a:lnR>
+                    <a:lnT w="12700" cap="flat" cmpd="sng" algn="ctr">
+                      <a:solidFill>
+                        <a:srgbClr val="CADCFC"/>
+                      </a:solidFill>
+                      <a:prstDash val="solid"/>
+                      <a:round/>
+                      <a:headEnd type="none" w="med" len="med"/>
+                      <a:tailEnd type="none" w="med" len="med"/>
+                    </a:lnT>
+                    <a:lnB w="12700" cap="flat" cmpd="sng" algn="ctr">
+                      <a:solidFill>
+                        <a:srgbClr val="CADCFC"/>
+                      </a:solidFill>
+                      <a:prstDash val="solid"/>
+                      <a:round/>
+                      <a:headEnd type="none" w="med" len="med"/>
+                      <a:tailEnd type="none" w="med" len="med"/>
+                    </a:lnB>
+                  </a:tcPr>
+                </a:tc>
+                <a:tc>
+                  <a:txBody>
+                    <a:bodyPr/>
+                    <a:lstStyle/>
+                    <a:p>
+                      <a:pPr indent="0" marL="0">
+                        <a:buNone/>
+                      </a:pPr>
+                      <a:r>
+                        <a:rPr lang="en-US" sz="1300" dirty="0">
+                          <a:solidFill>
+                            <a:srgbClr val="000000"/>
+                          </a:solidFill>
+                          <a:latin typeface="Calibri" pitchFamily="34" charset="0"/>
+                          <a:ea typeface="Calibri" pitchFamily="34" charset="-122"/>
+                          <a:cs typeface="Calibri" pitchFamily="34" charset="-120"/>
+                        </a:rPr>
+                        <a:t>0.97 (sentiment)</a:t>
+                      </a:r>
+                      <a:endParaRPr lang="en-US" sz="1300" dirty="0">
+                        <a:latin typeface="Calibri" charset="0"/>
+                        <a:ea typeface="Calibri" charset="0"/>
+                        <a:cs typeface="Calibri" charset="0"/>
+                      </a:endParaRPr>
+                    </a:p>
+                  </a:txBody>
+                  <a:tcPr marL="91440" marR="91440" marT="45720" marB="45720" anchor="ctr">
+                    <a:lnL w="12700" cap="flat" cmpd="sng" algn="ctr">
+                      <a:solidFill>
+                        <a:srgbClr val="CADCFC"/>
+                      </a:solidFill>
+                      <a:prstDash val="solid"/>
+                      <a:round/>
+                      <a:headEnd type="none" w="med" len="med"/>
+                      <a:tailEnd type="none" w="med" len="med"/>
+                    </a:lnL>
+                    <a:lnR w="12700" cap="flat" cmpd="sng" algn="ctr">
+                      <a:solidFill>
+                        <a:srgbClr val="CADCFC"/>
+                      </a:solidFill>
+                      <a:prstDash val="solid"/>
+                      <a:round/>
+                      <a:headEnd type="none" w="med" len="med"/>
+                      <a:tailEnd type="none" w="med" len="med"/>
+                    </a:lnR>
+                    <a:lnT w="12700" cap="flat" cmpd="sng" algn="ctr">
+                      <a:solidFill>
+                        <a:srgbClr val="CADCFC"/>
+                      </a:solidFill>
+                      <a:prstDash val="solid"/>
+                      <a:round/>
+                      <a:headEnd type="none" w="med" len="med"/>
+                      <a:tailEnd type="none" w="med" len="med"/>
+                    </a:lnT>
+                    <a:lnB w="12700" cap="flat" cmpd="sng" algn="ctr">
+                      <a:solidFill>
+                        <a:srgbClr val="CADCFC"/>
+                      </a:solidFill>
+                      <a:prstDash val="solid"/>
+                      <a:round/>
+                      <a:headEnd type="none" w="med" len="med"/>
+                      <a:tailEnd type="none" w="med" len="med"/>
+                    </a:lnB>
+                  </a:tcPr>
+                </a:tc>
+                <a:tc>
+                  <a:txBody>
+                    <a:bodyPr/>
+                    <a:lstStyle/>
+                    <a:p>
+                      <a:pPr indent="0" marL="0">
+                        <a:buNone/>
+                      </a:pPr>
+                      <a:r>
+                        <a:rPr lang="en-US" sz="1300" dirty="0">
+                          <a:solidFill>
+                            <a:srgbClr val="000000"/>
+                          </a:solidFill>
+                          <a:latin typeface="Calibri" pitchFamily="34" charset="0"/>
+                          <a:ea typeface="Calibri" pitchFamily="34" charset="-122"/>
+                          <a:cs typeface="Calibri" pitchFamily="34" charset="-120"/>
+                        </a:rPr>
+                        <a:t>0.90 (urgency)</a:t>
+                      </a:r>
+                      <a:endParaRPr lang="en-US" sz="1300" dirty="0">
+                        <a:latin typeface="Calibri" charset="0"/>
+                        <a:ea typeface="Calibri" charset="0"/>
+                        <a:cs typeface="Calibri" charset="0"/>
+                      </a:endParaRPr>
+                    </a:p>
+                  </a:txBody>
+                  <a:tcPr marL="91440" marR="91440" marT="45720" marB="45720" anchor="ctr">
+                    <a:lnL w="12700" cap="flat" cmpd="sng" algn="ctr">
+                      <a:solidFill>
+                        <a:srgbClr val="CADCFC"/>
+                      </a:solidFill>
+                      <a:prstDash val="solid"/>
+                      <a:round/>
+                      <a:headEnd type="none" w="med" len="med"/>
+                      <a:tailEnd type="none" w="med" len="med"/>
+                    </a:lnL>
+                    <a:lnR w="12700" cap="flat" cmpd="sng" algn="ctr">
+                      <a:solidFill>
+                        <a:srgbClr val="CADCFC"/>
+                      </a:solidFill>
+                      <a:prstDash val="solid"/>
+                      <a:round/>
+                      <a:headEnd type="none" w="med" len="med"/>
+                      <a:tailEnd type="none" w="med" len="med"/>
+                    </a:lnR>
+                    <a:lnT w="12700" cap="flat" cmpd="sng" algn="ctr">
+                      <a:solidFill>
+                        <a:srgbClr val="CADCFC"/>
+                      </a:solidFill>
+                      <a:prstDash val="solid"/>
+                      <a:round/>
+                      <a:headEnd type="none" w="med" len="med"/>
+                      <a:tailEnd type="none" w="med" len="med"/>
+                    </a:lnT>
+                    <a:lnB w="12700" cap="flat" cmpd="sng" algn="ctr">
+                      <a:solidFill>
+                        <a:srgbClr val="CADCFC"/>
+                      </a:solidFill>
+                      <a:prstDash val="solid"/>
+                      <a:round/>
+                      <a:headEnd type="none" w="med" len="med"/>
+                      <a:tailEnd type="none" w="med" len="med"/>
+                    </a:lnB>
+                  </a:tcPr>
+                </a:tc>
+              </a:tr>
+            </a:tbl>
+          </a:graphicData>
+        </a:graphic>
+      </p:graphicFrame>
+      <p:sp>
+        <p:nvSpPr>
+          <p:cNvPr id="13" name="Text 10"/>
+          <p:cNvSpPr/>
+          <p:nvPr/>
+        </p:nvSpPr>
+        <p:spPr>
+          <a:xfrm>
+            <a:off x="548640" y="3794760"/>
+            <a:ext cx="6675120" cy="1005840"/>
+          </a:xfrm>
+          <a:prstGeom prst="rect">
+            <a:avLst/>
+          </a:prstGeom>
+          <a:noFill/>
+          <a:ln/>
+        </p:spPr>
+        <p:txBody>
+          <a:bodyPr wrap="square" rtlCol="0" anchor="ctr"/>
+          <a:lstStyle/>
+          <a:p>
+            <a:pPr indent="0" marL="0">
+              <a:buNone/>
+            </a:pPr>
+            <a:r>
+              <a:rPr lang="en-US" sz="1300" dirty="0">
+                <a:solidFill>
+                  <a:srgbClr val="1A1A2E"/>
+                </a:solidFill>
+                <a:latin typeface="Calibri" pitchFamily="34" charset="0"/>
+                <a:ea typeface="Calibri" pitchFamily="34" charset="-122"/>
+                <a:cs typeface="Calibri" pitchFamily="34" charset="-120"/>
+              </a:rPr>
+              <a:t>Why the floor fails: paraphrased operational complaints ("transaction history cannot be exported…") carry no sentiment words — 58 of 94 negatives misread as neutral. Substantive finding, not a strawman.</a:t>
+            </a:r>
+            <a:endParaRPr lang="en-US" sz="1300" dirty="0"/>
+          </a:p>
+        </p:txBody>
+      </p:sp>
+      <p:sp>
+        <p:nvSpPr>
+          <p:cNvPr id="14" name="Text 11"/>
+          <p:cNvSpPr/>
+          <p:nvPr/>
+        </p:nvSpPr>
+        <p:spPr>
+          <a:xfrm>
+            <a:off x="548640" y="4846320"/>
+            <a:ext cx="6675120" cy="1234440"/>
+          </a:xfrm>
+          <a:prstGeom prst="rect">
+            <a:avLst/>
+          </a:prstGeom>
+          <a:noFill/>
+          <a:ln/>
+        </p:spPr>
+        <p:txBody>
+          <a:bodyPr wrap="square" rtlCol="0" anchor="ctr"/>
+          <a:lstStyle/>
+          <a:p>
+            <a:pPr indent="0" marL="0">
+              <a:buNone/>
+            </a:pPr>
+            <a:r>
+              <a:rPr lang="en-US" sz="1300" dirty="0">
+                <a:solidFill>
+                  <a:srgbClr val="1E2761"/>
+                </a:solidFill>
+                <a:latin typeface="Calibri" pitchFamily="34" charset="0"/>
+                <a:ea typeface="Calibri" pitchFamily="34" charset="-122"/>
+                <a:cs typeface="Calibri" pitchFamily="34" charset="-120"/>
+              </a:rPr>
+              <a:t>Published in-repo run (CLARA, GLM-5.2, 18 Jul 2026, n=100 incl. 28 DE): sentiment 97.0% (CI 93–100) · urgency 90.0% (CI 84–95) · tag F1 82.7% by meaning vs 21–28% exact-set — semantic scoring vindicated; DE within ~1pp of EN on urgency. Real-data star-proxy: ≈90% across all three sectors, zero fine-tuning.</a:t>
+            </a:r>
+            <a:endParaRPr lang="en-US" sz="1300" dirty="0"/>
+          </a:p>
+        </p:txBody>
+      </p:sp>
+      <p:pic>
+        <p:nvPicPr>
+          <p:cNvPr id="15" name="Image 0" descr="/Users/olamakri/Documents/CLARA/thesis/evaluation/results/risk_confusion.png">    </p:cNvPr>
+          <p:cNvPicPr>
+            <a:picLocks noChangeAspect="1"/>
+          </p:cNvPicPr>
+          <p:nvPr/>
+        </p:nvPicPr>
+        <p:blipFill>
+          <a:blip r:embed="rId1"/>
+          <a:stretch>
+            <a:fillRect/>
+          </a:stretch>
+        </p:blipFill>
+        <p:spPr>
+          <a:xfrm>
+            <a:off x="7635240" y="1645920"/>
+            <a:ext cx="3931920" cy="3493008"/>
+          </a:xfrm>
+          <a:prstGeom prst="rect">
+            <a:avLst/>
+          </a:prstGeom>
+        </p:spPr>
+      </p:pic>
+      <p:sp>
+        <p:nvSpPr>
+          <p:cNvPr id="16" name="Text 12"/>
+          <p:cNvSpPr/>
+          <p:nvPr/>
+        </p:nvSpPr>
+        <p:spPr>
+          <a:xfrm>
+            <a:off x="7635240" y="5257800"/>
+            <a:ext cx="3931920" cy="731520"/>
+          </a:xfrm>
+          <a:prstGeom prst="rect">
+            <a:avLst/>
+          </a:prstGeom>
+          <a:noFill/>
+          <a:ln/>
+        </p:spPr>
+        <p:txBody>
+          <a:bodyPr wrap="square" rtlCol="0" anchor="ctr"/>
+          <a:lstStyle/>
+          <a:p>
+            <a:pPr indent="0" marL="0">
+              <a:buNone/>
+            </a:pPr>
+            <a:r>
+              <a:rPr lang="en-US" sz="1150" i="1" dirty="0">
+                <a:solidFill>
+                  <a:srgbClr val="5A6478"/>
+                </a:solidFill>
+                <a:latin typeface="Calibri" pitchFamily="34" charset="0"/>
+                <a:ea typeface="Calibri" pitchFamily="34" charset="-122"/>
+                <a:cs typeface="Calibri" pitchFamily="34" charset="-120"/>
+              </a:rPr>
+              <a:t>Keyword floor collapses risk to "low" — 19 of 27 critical signals missed.</a:t>
+            </a:r>
+            <a:endParaRPr lang="en-US" sz="1150" dirty="0"/>
+          </a:p>
+        </p:txBody>
+      </p:sp>
+    </p:spTree>
+  </p:cSld>
+  <p:clrMapOvr>
+    <a:masterClrMapping/>
+  </p:clrMapOvr>
+</p:sld>
+</file>
+
+<file path=ppt/slides/slide14.xml><?xml version="1.0" encoding="utf-8"?>
+<p:sld xmlns:a="http://schemas.openxmlformats.org/drawingml/2006/main" xmlns:r="http://schemas.openxmlformats.org/officeDocument/2006/relationships" xmlns:p="http://schemas.openxmlformats.org/presentationml/2006/main">
+  <p:cSld name="Slide 14">
+    <p:spTree>
+      <p:nvGrpSpPr>
+        <p:cNvPr id="1" name=""/>
+        <p:cNvGrpSpPr/>
+        <p:nvPr/>
+      </p:nvGrpSpPr>
+      <p:grpSpPr>
+        <a:xfrm>
+          <a:off x="0" y="0"/>
+          <a:ext cx="0" cy="0"/>
+          <a:chOff x="0" y="0"/>
+          <a:chExt cx="0" cy="0"/>
+        </a:xfrm>
+      </p:grpSpPr>
+      <p:sp>
+        <p:nvSpPr>
+          <p:cNvPr id="2" name="Text 0"/>
+          <p:cNvSpPr/>
+          <p:nvPr/>
+        </p:nvSpPr>
+        <p:spPr>
+          <a:xfrm>
+            <a:off x="548640" y="320040"/>
+            <a:ext cx="11064240" cy="777240"/>
+          </a:xfrm>
+          <a:prstGeom prst="rect">
+            <a:avLst/>
+          </a:prstGeom>
+          <a:noFill/>
+          <a:ln/>
+        </p:spPr>
+        <p:txBody>
+          <a:bodyPr wrap="square" rtlCol="0" anchor="ctr"/>
+          <a:lstStyle/>
+          <a:p>
+            <a:pPr indent="0" marL="0">
+              <a:buNone/>
+            </a:pPr>
+            <a:r>
+              <a:rPr lang="en-US" sz="3200" b="1" dirty="0">
+                <a:solidFill>
+                  <a:srgbClr val="1A1A2E"/>
+                </a:solidFill>
+                <a:latin typeface="Cambria" pitchFamily="34" charset="0"/>
+                <a:ea typeface="Cambria" pitchFamily="34" charset="-122"/>
+                <a:cs typeface="Cambria" pitchFamily="34" charset="-120"/>
+              </a:rPr>
+              <a:t>Result 2: the memory steers, honestly bounded</a:t>
+            </a:r>
+            <a:endParaRPr lang="en-US" sz="3200" dirty="0"/>
+          </a:p>
+        </p:txBody>
+      </p:sp>
+      <p:sp>
+        <p:nvSpPr>
+          <p:cNvPr id="3" name="Text 1"/>
+          <p:cNvSpPr/>
+          <p:nvPr/>
+        </p:nvSpPr>
+        <p:spPr>
+          <a:xfrm>
+            <a:off x="548640" y="987552"/>
+            <a:ext cx="11064240" cy="365760"/>
+          </a:xfrm>
+          <a:prstGeom prst="rect">
+            <a:avLst/>
+          </a:prstGeom>
+          <a:noFill/>
+          <a:ln/>
+        </p:spPr>
+        <p:txBody>
+          <a:bodyPr wrap="square" rtlCol="0" anchor="ctr"/>
+          <a:lstStyle/>
+          <a:p>
+            <a:pPr indent="0" marL="0">
+              <a:buNone/>
+            </a:pPr>
+            <a:r>
+              <a:rPr lang="en-US" sz="1400" i="1" dirty="0">
+                <a:solidFill>
+                  <a:srgbClr val="5A6478"/>
+                </a:solidFill>
+                <a:latin typeface="Calibri" pitchFamily="34" charset="0"/>
+                <a:ea typeface="Calibri" pitchFamily="34" charset="-122"/>
+                <a:cs typeface="Calibri" pitchFamily="34" charset="-120"/>
+              </a:rPr>
+              <a:t>The perishable-learning mechanism, instrumented</a:t>
+            </a:r>
+            <a:endParaRPr lang="en-US" sz="1400" dirty="0"/>
+          </a:p>
+        </p:txBody>
+      </p:sp>
+      <p:sp>
+        <p:nvSpPr>
+          <p:cNvPr id="4" name="Shape 2"/>
+          <p:cNvSpPr/>
+          <p:nvPr/>
+        </p:nvSpPr>
+        <p:spPr>
+          <a:xfrm>
+            <a:off x="10424160" y="411480"/>
+            <a:ext cx="292608" cy="292608"/>
+          </a:xfrm>
+          <a:prstGeom prst="ellipse">
+            <a:avLst/>
+          </a:prstGeom>
+          <a:solidFill>
+            <a:srgbClr val="CADCFC"/>
+          </a:solidFill>
+          <a:ln/>
+        </p:spPr>
+      </p:sp>
+      <p:sp>
+        <p:nvSpPr>
+          <p:cNvPr id="5" name="Text 3"/>
+          <p:cNvSpPr/>
+          <p:nvPr/>
+        </p:nvSpPr>
+        <p:spPr>
+          <a:xfrm>
+            <a:off x="10424160" y="395935"/>
+            <a:ext cx="292608" cy="310896"/>
+          </a:xfrm>
+          <a:prstGeom prst="rect">
+            <a:avLst/>
+          </a:prstGeom>
+          <a:noFill/>
+          <a:ln/>
+        </p:spPr>
+        <p:txBody>
+          <a:bodyPr wrap="square" lIns="0" tIns="0" rIns="0" bIns="0" rtlCol="0" anchor="ctr"/>
+          <a:lstStyle/>
+          <a:p>
+            <a:pPr algn="ctr" indent="0" marL="0">
+              <a:buNone/>
+            </a:pPr>
+            <a:r>
+              <a:rPr lang="en-US" sz="1100" b="1" dirty="0">
+                <a:solidFill>
+                  <a:srgbClr val="1E2761"/>
+                </a:solidFill>
+                <a:latin typeface="Calibri" pitchFamily="34" charset="0"/>
+                <a:ea typeface="Calibri" pitchFamily="34" charset="-122"/>
+                <a:cs typeface="Calibri" pitchFamily="34" charset="-120"/>
+              </a:rPr>
+              <a:t>S</a:t>
+            </a:r>
+            <a:endParaRPr lang="en-US" sz="1100" dirty="0"/>
+          </a:p>
+        </p:txBody>
+      </p:sp>
+      <p:sp>
+        <p:nvSpPr>
+          <p:cNvPr id="6" name="Shape 4"/>
+          <p:cNvSpPr/>
+          <p:nvPr/>
+        </p:nvSpPr>
+        <p:spPr>
+          <a:xfrm>
+            <a:off x="10808208" y="411480"/>
+            <a:ext cx="292608" cy="292608"/>
+          </a:xfrm>
+          <a:prstGeom prst="ellipse">
+            <a:avLst/>
+          </a:prstGeom>
+          <a:solidFill>
+            <a:srgbClr val="CADCFC"/>
+          </a:solidFill>
+          <a:ln/>
+        </p:spPr>
+      </p:sp>
+      <p:sp>
+        <p:nvSpPr>
+          <p:cNvPr id="7" name="Text 5"/>
+          <p:cNvSpPr/>
+          <p:nvPr/>
+        </p:nvSpPr>
+        <p:spPr>
+          <a:xfrm>
+            <a:off x="10808208" y="395935"/>
+            <a:ext cx="292608" cy="310896"/>
+          </a:xfrm>
+          <a:prstGeom prst="rect">
+            <a:avLst/>
+          </a:prstGeom>
+          <a:noFill/>
+          <a:ln/>
+        </p:spPr>
+        <p:txBody>
+          <a:bodyPr wrap="square" lIns="0" tIns="0" rIns="0" bIns="0" rtlCol="0" anchor="ctr"/>
+          <a:lstStyle/>
+          <a:p>
+            <a:pPr algn="ctr" indent="0" marL="0">
+              <a:buNone/>
+            </a:pPr>
+            <a:r>
+              <a:rPr lang="en-US" sz="1100" b="1" dirty="0">
+                <a:solidFill>
+                  <a:srgbClr val="1E2761"/>
+                </a:solidFill>
+                <a:latin typeface="Calibri" pitchFamily="34" charset="0"/>
+                <a:ea typeface="Calibri" pitchFamily="34" charset="-122"/>
+                <a:cs typeface="Calibri" pitchFamily="34" charset="-120"/>
+              </a:rPr>
+              <a:t>I</a:t>
+            </a:r>
+            <a:endParaRPr lang="en-US" sz="1100" dirty="0"/>
+          </a:p>
+        </p:txBody>
+      </p:sp>
+      <p:sp>
+        <p:nvSpPr>
+          <p:cNvPr id="8" name="Shape 6"/>
+          <p:cNvSpPr/>
+          <p:nvPr/>
+        </p:nvSpPr>
+        <p:spPr>
+          <a:xfrm>
+            <a:off x="11192256" y="411480"/>
+            <a:ext cx="292608" cy="292608"/>
+          </a:xfrm>
+          <a:prstGeom prst="ellipse">
+            <a:avLst/>
+          </a:prstGeom>
+          <a:solidFill>
+            <a:srgbClr val="CADCFC"/>
+          </a:solidFill>
+          <a:ln/>
+        </p:spPr>
+      </p:sp>
+      <p:sp>
+        <p:nvSpPr>
+          <p:cNvPr id="9" name="Text 7"/>
+          <p:cNvSpPr/>
+          <p:nvPr/>
+        </p:nvSpPr>
+        <p:spPr>
+          <a:xfrm>
+            <a:off x="11192256" y="395935"/>
+            <a:ext cx="292608" cy="310896"/>
+          </a:xfrm>
+          <a:prstGeom prst="rect">
+            <a:avLst/>
+          </a:prstGeom>
+          <a:noFill/>
+          <a:ln/>
+        </p:spPr>
+        <p:txBody>
+          <a:bodyPr wrap="square" lIns="0" tIns="0" rIns="0" bIns="0" rtlCol="0" anchor="ctr"/>
+          <a:lstStyle/>
+          <a:p>
+            <a:pPr algn="ctr" indent="0" marL="0">
+              <a:buNone/>
+            </a:pPr>
+            <a:r>
+              <a:rPr lang="en-US" sz="1100" b="1" dirty="0">
+                <a:solidFill>
+                  <a:srgbClr val="1E2761"/>
+                </a:solidFill>
+                <a:latin typeface="Calibri" pitchFamily="34" charset="0"/>
+                <a:ea typeface="Calibri" pitchFamily="34" charset="-122"/>
+                <a:cs typeface="Calibri" pitchFamily="34" charset="-120"/>
+              </a:rPr>
+              <a:t>A</a:t>
+            </a:r>
+            <a:endParaRPr lang="en-US" sz="1100" dirty="0"/>
+          </a:p>
+        </p:txBody>
+      </p:sp>
+      <p:sp>
+        <p:nvSpPr>
+          <p:cNvPr id="10" name="Shape 8"/>
+          <p:cNvSpPr/>
+          <p:nvPr/>
+        </p:nvSpPr>
+        <p:spPr>
+          <a:xfrm>
+            <a:off x="11576304" y="411480"/>
+            <a:ext cx="292608" cy="292608"/>
+          </a:xfrm>
+          <a:prstGeom prst="ellipse">
+            <a:avLst/>
+          </a:prstGeom>
+          <a:solidFill>
+            <a:srgbClr val="1E2761"/>
+          </a:solidFill>
+          <a:ln/>
+        </p:spPr>
+      </p:sp>
+      <p:sp>
+        <p:nvSpPr>
+          <p:cNvPr id="11" name="Text 9"/>
+          <p:cNvSpPr/>
+          <p:nvPr/>
+        </p:nvSpPr>
+        <p:spPr>
+          <a:xfrm>
+            <a:off x="11576304" y="395935"/>
+            <a:ext cx="292608" cy="310896"/>
+          </a:xfrm>
+          <a:prstGeom prst="rect">
+            <a:avLst/>
+          </a:prstGeom>
+          <a:noFill/>
+          <a:ln/>
+        </p:spPr>
+        <p:txBody>
+          <a:bodyPr wrap="square" lIns="0" tIns="0" rIns="0" bIns="0" rtlCol="0" anchor="ctr"/>
+          <a:lstStyle/>
+          <a:p>
+            <a:pPr algn="ctr" indent="0" marL="0">
+              <a:buNone/>
+            </a:pPr>
+            <a:r>
+              <a:rPr lang="en-US" sz="1100" b="1" dirty="0">
+                <a:solidFill>
+                  <a:srgbClr val="FFFFFF"/>
+                </a:solidFill>
+                <a:latin typeface="Calibri" pitchFamily="34" charset="0"/>
+                <a:ea typeface="Calibri" pitchFamily="34" charset="-122"/>
+                <a:cs typeface="Calibri" pitchFamily="34" charset="-120"/>
+              </a:rPr>
+              <a:t>L</a:t>
+            </a:r>
+            <a:endParaRPr lang="en-US" sz="1100" dirty="0"/>
+          </a:p>
+        </p:txBody>
+      </p:sp>
+      <p:sp>
+        <p:nvSpPr>
+          <p:cNvPr id="12" name="Text 10"/>
+          <p:cNvSpPr/>
+          <p:nvPr/>
+        </p:nvSpPr>
+        <p:spPr>
+          <a:xfrm>
+            <a:off x="731520" y="2011680"/>
+            <a:ext cx="3291840" cy="822960"/>
+          </a:xfrm>
+          <a:prstGeom prst="rect">
+            <a:avLst/>
+          </a:prstGeom>
+          <a:noFill/>
+          <a:ln/>
+        </p:spPr>
+        <p:txBody>
+          <a:bodyPr wrap="square" lIns="0" tIns="0" rIns="0" bIns="0" rtlCol="0" anchor="ctr"/>
+          <a:lstStyle/>
+          <a:p>
+            <a:pPr algn="ctr" indent="0" marL="0">
+              <a:buNone/>
+            </a:pPr>
+            <a:r>
+              <a:rPr lang="en-US" sz="5400" b="1" dirty="0">
+                <a:solidFill>
+                  <a:srgbClr val="1E2761"/>
+                </a:solidFill>
+                <a:latin typeface="Cambria" pitchFamily="34" charset="0"/>
+                <a:ea typeface="Cambria" pitchFamily="34" charset="-122"/>
+                <a:cs typeface="Cambria" pitchFamily="34" charset="-120"/>
+              </a:rPr>
+              <a:t>21% → 71%</a:t>
+            </a:r>
+            <a:endParaRPr lang="en-US" sz="5400" dirty="0"/>
+          </a:p>
+        </p:txBody>
+      </p:sp>
+      <p:sp>
+        <p:nvSpPr>
+          <p:cNvPr id="13" name="Text 11"/>
+          <p:cNvSpPr/>
+          <p:nvPr/>
+        </p:nvSpPr>
+        <p:spPr>
+          <a:xfrm>
+            <a:off x="731520" y="2852928"/>
+            <a:ext cx="3291840" cy="594360"/>
+          </a:xfrm>
+          <a:prstGeom prst="rect">
+            <a:avLst/>
+          </a:prstGeom>
+          <a:noFill/>
+          <a:ln/>
+        </p:spPr>
+        <p:txBody>
+          <a:bodyPr wrap="square" lIns="0" tIns="0" rIns="0" bIns="0" rtlCol="0" anchor="ctr"/>
+          <a:lstStyle/>
+          <a:p>
+            <a:pPr algn="ctr" indent="0" marL="0">
+              <a:buNone/>
+            </a:pPr>
+            <a:r>
+              <a:rPr lang="en-US" sz="1250" dirty="0">
+                <a:solidFill>
+                  <a:srgbClr val="5A6478"/>
+                </a:solidFill>
+                <a:latin typeface="Calibri" pitchFamily="34" charset="0"/>
+                <a:ea typeface="Calibri" pitchFamily="34" charset="-122"/>
+                <a:cs typeface="Calibri" pitchFamily="34" charset="-120"/>
+              </a:rPr>
+              <a:t>share of a past remedy appearing in the new recommendation when retrieval is ON (66.7% adoption)</a:t>
+            </a:r>
+            <a:endParaRPr lang="en-US" sz="1250" dirty="0"/>
+          </a:p>
+        </p:txBody>
+      </p:sp>
+      <p:sp>
+        <p:nvSpPr>
+          <p:cNvPr id="14" name="Text 12"/>
+          <p:cNvSpPr/>
+          <p:nvPr/>
+        </p:nvSpPr>
+        <p:spPr>
+          <a:xfrm>
+            <a:off x="4434840" y="2011680"/>
+            <a:ext cx="3291840" cy="822960"/>
+          </a:xfrm>
+          <a:prstGeom prst="rect">
+            <a:avLst/>
+          </a:prstGeom>
+          <a:noFill/>
+          <a:ln/>
+        </p:spPr>
+        <p:txBody>
+          <a:bodyPr wrap="square" lIns="0" tIns="0" rIns="0" bIns="0" rtlCol="0" anchor="ctr"/>
+          <a:lstStyle/>
+          <a:p>
+            <a:pPr algn="ctr" indent="0" marL="0">
+              <a:buNone/>
+            </a:pPr>
+            <a:r>
+              <a:rPr lang="en-US" sz="5400" b="1" dirty="0">
+                <a:solidFill>
+                  <a:srgbClr val="2C5F2D"/>
+                </a:solidFill>
+                <a:latin typeface="Cambria" pitchFamily="34" charset="0"/>
+                <a:ea typeface="Cambria" pitchFamily="34" charset="-122"/>
+                <a:cs typeface="Cambria" pitchFamily="34" charset="-120"/>
+              </a:rPr>
+              <a:t>0.503</a:t>
+            </a:r>
+            <a:endParaRPr lang="en-US" sz="5400" dirty="0"/>
+          </a:p>
+        </p:txBody>
+      </p:sp>
+      <p:sp>
+        <p:nvSpPr>
+          <p:cNvPr id="15" name="Text 13"/>
+          <p:cNvSpPr/>
+          <p:nvPr/>
+        </p:nvSpPr>
+        <p:spPr>
+          <a:xfrm>
+            <a:off x="4434840" y="2852928"/>
+            <a:ext cx="3291840" cy="594360"/>
+          </a:xfrm>
+          <a:prstGeom prst="rect">
+            <a:avLst/>
+          </a:prstGeom>
+          <a:noFill/>
+          <a:ln/>
+        </p:spPr>
+        <p:txBody>
+          <a:bodyPr wrap="square" lIns="0" tIns="0" rIns="0" bIns="0" rtlCol="0" anchor="ctr"/>
+          <a:lstStyle/>
+          <a:p>
+            <a:pPr algn="ctr" indent="0" marL="0">
+              <a:buNone/>
+            </a:pPr>
+            <a:r>
+              <a:rPr lang="en-US" sz="1250" dirty="0">
+                <a:solidFill>
+                  <a:srgbClr val="5A6478"/>
+                </a:solidFill>
+                <a:latin typeface="Calibri" pitchFamily="34" charset="0"/>
+                <a:ea typeface="Calibri" pitchFamily="34" charset="-122"/>
+                <a:cs typeface="Calibri" pitchFamily="34" charset="-120"/>
+              </a:rPr>
+              <a:t>alignment lift vs a same-run noise floor that absorbs model jitter</a:t>
+            </a:r>
+            <a:endParaRPr lang="en-US" sz="1250" dirty="0"/>
+          </a:p>
+        </p:txBody>
+      </p:sp>
+      <p:sp>
+        <p:nvSpPr>
+          <p:cNvPr id="16" name="Text 14"/>
+          <p:cNvSpPr/>
+          <p:nvPr/>
+        </p:nvSpPr>
+        <p:spPr>
+          <a:xfrm>
+            <a:off x="8138160" y="2011680"/>
+            <a:ext cx="3291840" cy="822960"/>
+          </a:xfrm>
+          <a:prstGeom prst="rect">
+            <a:avLst/>
+          </a:prstGeom>
+          <a:noFill/>
+          <a:ln/>
+        </p:spPr>
+        <p:txBody>
+          <a:bodyPr wrap="square" lIns="0" tIns="0" rIns="0" bIns="0" rtlCol="0" anchor="ctr"/>
+          <a:lstStyle/>
+          <a:p>
+            <a:pPr algn="ctr" indent="0" marL="0">
+              <a:buNone/>
+            </a:pPr>
+            <a:r>
+              <a:rPr lang="en-US" sz="5400" b="1" dirty="0">
+                <a:solidFill>
+                  <a:srgbClr val="1E2761"/>
+                </a:solidFill>
+                <a:latin typeface="Cambria" pitchFamily="34" charset="0"/>
+                <a:ea typeface="Cambria" pitchFamily="34" charset="-122"/>
+                <a:cs typeface="Cambria" pitchFamily="34" charset="-120"/>
+              </a:rPr>
+              <a:t>0 / 2.5%</a:t>
+            </a:r>
+            <a:endParaRPr lang="en-US" sz="5400" dirty="0"/>
+          </a:p>
+        </p:txBody>
+      </p:sp>
+      <p:sp>
+        <p:nvSpPr>
+          <p:cNvPr id="17" name="Text 15"/>
+          <p:cNvSpPr/>
+          <p:nvPr/>
+        </p:nvSpPr>
+        <p:spPr>
+          <a:xfrm>
+            <a:off x="8138160" y="2852928"/>
+            <a:ext cx="3291840" cy="594360"/>
+          </a:xfrm>
+          <a:prstGeom prst="rect">
+            <a:avLst/>
+          </a:prstGeom>
+          <a:noFill/>
+          <a:ln/>
+        </p:spPr>
+        <p:txBody>
+          <a:bodyPr wrap="square" lIns="0" tIns="0" rIns="0" bIns="0" rtlCol="0" anchor="ctr"/>
+          <a:lstStyle/>
+          <a:p>
+            <a:pPr algn="ctr" indent="0" marL="0">
+              <a:buNone/>
+            </a:pPr>
+            <a:r>
+              <a:rPr lang="en-US" sz="1250" dirty="0">
+                <a:solidFill>
+                  <a:srgbClr val="5A6478"/>
+                </a:solidFill>
+                <a:latin typeface="Calibri" pitchFamily="34" charset="0"/>
+                <a:ea typeface="Calibri" pitchFamily="34" charset="-122"/>
+                <a:cs typeface="Calibri" pitchFamily="34" charset="-120"/>
+              </a:rPr>
+              <a:t>PII leaks across ledger / hallucination rate, 17-Jul published snapshot (hallucination check EN-scope by construction)</a:t>
+            </a:r>
+            <a:endParaRPr lang="en-US" sz="1250" dirty="0"/>
+          </a:p>
+        </p:txBody>
+      </p:sp>
+      <p:sp>
+        <p:nvSpPr>
+          <p:cNvPr id="18" name="Shape 16"/>
+          <p:cNvSpPr/>
+          <p:nvPr/>
+        </p:nvSpPr>
+        <p:spPr>
+          <a:xfrm>
+            <a:off x="731520" y="4206240"/>
+            <a:ext cx="10698480" cy="1828800"/>
+          </a:xfrm>
+          <a:prstGeom prst="roundRect">
+            <a:avLst>
+              <a:gd name="adj" fmla="val 3000"/>
+            </a:avLst>
+          </a:prstGeom>
+          <a:solidFill>
+            <a:srgbClr val="FDF3F3"/>
+          </a:solidFill>
+          <a:ln w="12700">
+            <a:solidFill>
+              <a:srgbClr val="990011"/>
+            </a:solidFill>
+            <a:prstDash val="solid"/>
+          </a:ln>
+        </p:spPr>
+      </p:sp>
+      <p:sp>
+        <p:nvSpPr>
+          <p:cNvPr id="19" name="Text 17"/>
+          <p:cNvSpPr/>
+          <p:nvPr/>
+        </p:nvSpPr>
+        <p:spPr>
+          <a:xfrm>
+            <a:off x="960120" y="4343400"/>
+            <a:ext cx="10241280" cy="320040"/>
+          </a:xfrm>
+          <a:prstGeom prst="rect">
+            <a:avLst/>
+          </a:prstGeom>
+          <a:noFill/>
+          <a:ln/>
+        </p:spPr>
+        <p:txBody>
+          <a:bodyPr wrap="square" lIns="0" tIns="0" rIns="0" bIns="0" rtlCol="0" anchor="ctr"/>
+          <a:lstStyle/>
+          <a:p>
+            <a:pPr indent="0" marL="0">
+              <a:buNone/>
+            </a:pPr>
+            <a:r>
+              <a:rPr lang="en-US" sz="1400" b="1" dirty="0">
+                <a:solidFill>
+                  <a:srgbClr val="990011"/>
+                </a:solidFill>
+                <a:latin typeface="Calibri" pitchFamily="34" charset="0"/>
+                <a:ea typeface="Calibri" pitchFamily="34" charset="-122"/>
+                <a:cs typeface="Calibri" pitchFamily="34" charset="-120"/>
+              </a:rPr>
+              <a:t>The honest boundary</a:t>
+            </a:r>
+            <a:endParaRPr lang="en-US" sz="1400" dirty="0"/>
+          </a:p>
+        </p:txBody>
+      </p:sp>
+      <p:sp>
+        <p:nvSpPr>
+          <p:cNvPr id="20" name="Text 18"/>
+          <p:cNvSpPr/>
+          <p:nvPr/>
+        </p:nvSpPr>
+        <p:spPr>
+          <a:xfrm>
+            <a:off x="960120" y="4681728"/>
+            <a:ext cx="10241280" cy="1234440"/>
+          </a:xfrm>
+          <a:prstGeom prst="rect">
+            <a:avLst/>
+          </a:prstGeom>
+          <a:noFill/>
+          <a:ln/>
+        </p:spPr>
+        <p:txBody>
+          <a:bodyPr wrap="square" lIns="0" tIns="0" rIns="0" bIns="0" rtlCol="0" anchor="ctr"/>
+          <a:lstStyle/>
+          <a:p>
+            <a:pPr indent="0" marL="0">
+              <a:buNone/>
+            </a:pPr>
+            <a:r>
+              <a:rPr lang="en-US" sz="1400" dirty="0">
+                <a:solidFill>
+                  <a:srgbClr val="1A1A2E"/>
+                </a:solidFill>
+                <a:latin typeface="Calibri" pitchFamily="34" charset="0"/>
+                <a:ea typeface="Calibri" pitchFamily="34" charset="-122"/>
+                <a:cs typeface="Calibri" pitchFamily="34" charset="-120"/>
+              </a:rPr>
+              <a:t>Outcome data behind these learnings is still SIMULATED. Adoption shows the loop steers recommendations; whether the steered remedy is BETTER requires a live outcome contract on real data — the single most important open step. We claim mechanism, not benefit.</a:t>
+            </a:r>
+            <a:endParaRPr lang="en-US" sz="1400" dirty="0"/>
+          </a:p>
+        </p:txBody>
+      </p:sp>
+    </p:spTree>
+  </p:cSld>
+  <p:clrMapOvr>
+    <a:masterClrMapping/>
+  </p:clrMapOvr>
+</p:sld>
+</file>
+
+<file path=ppt/slides/slide15.xml><?xml version="1.0" encoding="utf-8"?>
+<p:sld xmlns:a="http://schemas.openxmlformats.org/drawingml/2006/main" xmlns:r="http://schemas.openxmlformats.org/officeDocument/2006/relationships" xmlns:p="http://schemas.openxmlformats.org/presentationml/2006/main">
+  <p:cSld name="Slide 15">
+    <p:spTree>
+      <p:nvGrpSpPr>
+        <p:cNvPr id="1" name=""/>
+        <p:cNvGrpSpPr/>
+        <p:nvPr/>
+      </p:nvGrpSpPr>
+      <p:grpSpPr>
+        <a:xfrm>
+          <a:off x="0" y="0"/>
+          <a:ext cx="0" cy="0"/>
+          <a:chOff x="0" y="0"/>
+          <a:chExt cx="0" cy="0"/>
+        </a:xfrm>
+      </p:grpSpPr>
+      <p:sp>
+        <p:nvSpPr>
+          <p:cNvPr id="2" name="Text 0"/>
+          <p:cNvSpPr/>
+          <p:nvPr/>
+        </p:nvSpPr>
+        <p:spPr>
+          <a:xfrm>
+            <a:off x="548640" y="320040"/>
+            <a:ext cx="11064240" cy="777240"/>
+          </a:xfrm>
+          <a:prstGeom prst="rect">
+            <a:avLst/>
+          </a:prstGeom>
+          <a:noFill/>
+          <a:ln/>
+        </p:spPr>
+        <p:txBody>
+          <a:bodyPr wrap="square" rtlCol="0" anchor="ctr"/>
+          <a:lstStyle/>
+          <a:p>
+            <a:pPr indent="0" marL="0">
+              <a:buNone/>
+            </a:pPr>
+            <a:r>
+              <a:rPr lang="en-US" sz="3200" b="1" dirty="0">
+                <a:solidFill>
+                  <a:srgbClr val="1A1A2E"/>
+                </a:solidFill>
+                <a:latin typeface="Cambria" pitchFamily="34" charset="0"/>
+                <a:ea typeface="Cambria" pitchFamily="34" charset="-122"/>
+                <a:cs typeface="Cambria" pitchFamily="34" charset="-120"/>
+              </a:rPr>
+              <a:t>What is proven, demonstrated, and pending</a:t>
+            </a:r>
+            <a:endParaRPr lang="en-US" sz="3200" dirty="0"/>
+          </a:p>
+        </p:txBody>
+      </p:sp>
+      <p:sp>
+        <p:nvSpPr>
+          <p:cNvPr id="3" name="Text 1"/>
+          <p:cNvSpPr/>
+          <p:nvPr/>
+        </p:nvSpPr>
+        <p:spPr>
+          <a:xfrm>
+            <a:off x="548640" y="987552"/>
+            <a:ext cx="11064240" cy="365760"/>
+          </a:xfrm>
+          <a:prstGeom prst="rect">
+            <a:avLst/>
+          </a:prstGeom>
+          <a:noFill/>
+          <a:ln/>
+        </p:spPr>
+        <p:txBody>
+          <a:bodyPr wrap="square" rtlCol="0" anchor="ctr"/>
+          <a:lstStyle/>
+          <a:p>
+            <a:pPr indent="0" marL="0">
+              <a:buNone/>
+            </a:pPr>
+            <a:r>
+              <a:rPr lang="en-US" sz="1400" i="1" dirty="0">
+                <a:solidFill>
+                  <a:srgbClr val="5A6478"/>
+                </a:solidFill>
+                <a:latin typeface="Calibri" pitchFamily="34" charset="0"/>
+                <a:ea typeface="Calibri" pitchFamily="34" charset="-122"/>
+                <a:cs typeface="Calibri" pitchFamily="34" charset="-120"/>
+              </a:rPr>
+              <a:t>The traceability matrix — the thesis's honesty map (Appendix D)</a:t>
+            </a:r>
+            <a:endParaRPr lang="en-US" sz="1400" dirty="0"/>
+          </a:p>
+        </p:txBody>
+      </p:sp>
+      <p:sp>
+        <p:nvSpPr>
+          <p:cNvPr id="4" name="Shape 2"/>
+          <p:cNvSpPr/>
+          <p:nvPr/>
+        </p:nvSpPr>
+        <p:spPr>
+          <a:xfrm>
+            <a:off x="10424160" y="411480"/>
+            <a:ext cx="292608" cy="292608"/>
+          </a:xfrm>
+          <a:prstGeom prst="ellipse">
+            <a:avLst/>
+          </a:prstGeom>
+          <a:solidFill>
+            <a:srgbClr val="CADCFC"/>
+          </a:solidFill>
+          <a:ln/>
+        </p:spPr>
+      </p:sp>
+      <p:sp>
+        <p:nvSpPr>
+          <p:cNvPr id="5" name="Text 3"/>
+          <p:cNvSpPr/>
+          <p:nvPr/>
+        </p:nvSpPr>
+        <p:spPr>
+          <a:xfrm>
+            <a:off x="10424160" y="395935"/>
+            <a:ext cx="292608" cy="310896"/>
+          </a:xfrm>
+          <a:prstGeom prst="rect">
+            <a:avLst/>
+          </a:prstGeom>
+          <a:noFill/>
+          <a:ln/>
+        </p:spPr>
+        <p:txBody>
+          <a:bodyPr wrap="square" lIns="0" tIns="0" rIns="0" bIns="0" rtlCol="0" anchor="ctr"/>
+          <a:lstStyle/>
+          <a:p>
+            <a:pPr algn="ctr" indent="0" marL="0">
+              <a:buNone/>
+            </a:pPr>
+            <a:r>
+              <a:rPr lang="en-US" sz="1100" b="1" dirty="0">
+                <a:solidFill>
+                  <a:srgbClr val="1E2761"/>
+                </a:solidFill>
+                <a:latin typeface="Calibri" pitchFamily="34" charset="0"/>
+                <a:ea typeface="Calibri" pitchFamily="34" charset="-122"/>
+                <a:cs typeface="Calibri" pitchFamily="34" charset="-120"/>
+              </a:rPr>
+              <a:t>S</a:t>
+            </a:r>
+            <a:endParaRPr lang="en-US" sz="1100" dirty="0"/>
+          </a:p>
+        </p:txBody>
+      </p:sp>
+      <p:sp>
+        <p:nvSpPr>
+          <p:cNvPr id="6" name="Shape 4"/>
+          <p:cNvSpPr/>
+          <p:nvPr/>
+        </p:nvSpPr>
+        <p:spPr>
+          <a:xfrm>
+            <a:off x="10808208" y="411480"/>
+            <a:ext cx="292608" cy="292608"/>
+          </a:xfrm>
+          <a:prstGeom prst="ellipse">
+            <a:avLst/>
+          </a:prstGeom>
+          <a:solidFill>
+            <a:srgbClr val="CADCFC"/>
+          </a:solidFill>
+          <a:ln/>
+        </p:spPr>
+      </p:sp>
+      <p:sp>
+        <p:nvSpPr>
+          <p:cNvPr id="7" name="Text 5"/>
+          <p:cNvSpPr/>
+          <p:nvPr/>
+        </p:nvSpPr>
+        <p:spPr>
+          <a:xfrm>
+            <a:off x="10808208" y="395935"/>
+            <a:ext cx="292608" cy="310896"/>
+          </a:xfrm>
+          <a:prstGeom prst="rect">
+            <a:avLst/>
+          </a:prstGeom>
+          <a:noFill/>
+          <a:ln/>
+        </p:spPr>
+        <p:txBody>
+          <a:bodyPr wrap="square" lIns="0" tIns="0" rIns="0" bIns="0" rtlCol="0" anchor="ctr"/>
+          <a:lstStyle/>
+          <a:p>
+            <a:pPr algn="ctr" indent="0" marL="0">
+              <a:buNone/>
+            </a:pPr>
+            <a:r>
+              <a:rPr lang="en-US" sz="1100" b="1" dirty="0">
+                <a:solidFill>
+                  <a:srgbClr val="1E2761"/>
+                </a:solidFill>
+                <a:latin typeface="Calibri" pitchFamily="34" charset="0"/>
+                <a:ea typeface="Calibri" pitchFamily="34" charset="-122"/>
+                <a:cs typeface="Calibri" pitchFamily="34" charset="-120"/>
+              </a:rPr>
+              <a:t>I</a:t>
+            </a:r>
+            <a:endParaRPr lang="en-US" sz="1100" dirty="0"/>
+          </a:p>
+        </p:txBody>
+      </p:sp>
+      <p:sp>
+        <p:nvSpPr>
+          <p:cNvPr id="8" name="Shape 6"/>
+          <p:cNvSpPr/>
+          <p:nvPr/>
+        </p:nvSpPr>
+        <p:spPr>
+          <a:xfrm>
+            <a:off x="11192256" y="411480"/>
+            <a:ext cx="292608" cy="292608"/>
+          </a:xfrm>
+          <a:prstGeom prst="ellipse">
+            <a:avLst/>
+          </a:prstGeom>
+          <a:solidFill>
+            <a:srgbClr val="CADCFC"/>
+          </a:solidFill>
+          <a:ln/>
+        </p:spPr>
+      </p:sp>
+      <p:sp>
+        <p:nvSpPr>
+          <p:cNvPr id="9" name="Text 7"/>
+          <p:cNvSpPr/>
+          <p:nvPr/>
+        </p:nvSpPr>
+        <p:spPr>
+          <a:xfrm>
+            <a:off x="11192256" y="395935"/>
+            <a:ext cx="292608" cy="310896"/>
+          </a:xfrm>
+          <a:prstGeom prst="rect">
+            <a:avLst/>
+          </a:prstGeom>
+          <a:noFill/>
+          <a:ln/>
+        </p:spPr>
+        <p:txBody>
+          <a:bodyPr wrap="square" lIns="0" tIns="0" rIns="0" bIns="0" rtlCol="0" anchor="ctr"/>
+          <a:lstStyle/>
+          <a:p>
+            <a:pPr algn="ctr" indent="0" marL="0">
+              <a:buNone/>
+            </a:pPr>
+            <a:r>
+              <a:rPr lang="en-US" sz="1100" b="1" dirty="0">
+                <a:solidFill>
+                  <a:srgbClr val="1E2761"/>
+                </a:solidFill>
+                <a:latin typeface="Calibri" pitchFamily="34" charset="0"/>
+                <a:ea typeface="Calibri" pitchFamily="34" charset="-122"/>
+                <a:cs typeface="Calibri" pitchFamily="34" charset="-120"/>
+              </a:rPr>
+              <a:t>A</a:t>
+            </a:r>
+            <a:endParaRPr lang="en-US" sz="1100" dirty="0"/>
+          </a:p>
+        </p:txBody>
+      </p:sp>
+      <p:sp>
+        <p:nvSpPr>
+          <p:cNvPr id="10" name="Shape 8"/>
+          <p:cNvSpPr/>
+          <p:nvPr/>
+        </p:nvSpPr>
+        <p:spPr>
+          <a:xfrm>
+            <a:off x="11576304" y="411480"/>
+            <a:ext cx="292608" cy="292608"/>
+          </a:xfrm>
+          <a:prstGeom prst="ellipse">
+            <a:avLst/>
+          </a:prstGeom>
+          <a:solidFill>
+            <a:srgbClr val="1E2761"/>
+          </a:solidFill>
+          <a:ln/>
+        </p:spPr>
+      </p:sp>
+      <p:sp>
+        <p:nvSpPr>
+          <p:cNvPr id="11" name="Text 9"/>
+          <p:cNvSpPr/>
+          <p:nvPr/>
+        </p:nvSpPr>
+        <p:spPr>
+          <a:xfrm>
+            <a:off x="11576304" y="395935"/>
+            <a:ext cx="292608" cy="310896"/>
+          </a:xfrm>
+          <a:prstGeom prst="rect">
+            <a:avLst/>
+          </a:prstGeom>
+          <a:noFill/>
+          <a:ln/>
+        </p:spPr>
+        <p:txBody>
+          <a:bodyPr wrap="square" lIns="0" tIns="0" rIns="0" bIns="0" rtlCol="0" anchor="ctr"/>
+          <a:lstStyle/>
+          <a:p>
+            <a:pPr algn="ctr" indent="0" marL="0">
+              <a:buNone/>
+            </a:pPr>
+            <a:r>
+              <a:rPr lang="en-US" sz="1100" b="1" dirty="0">
+                <a:solidFill>
+                  <a:srgbClr val="FFFFFF"/>
+                </a:solidFill>
+                <a:latin typeface="Calibri" pitchFamily="34" charset="0"/>
+                <a:ea typeface="Calibri" pitchFamily="34" charset="-122"/>
+                <a:cs typeface="Calibri" pitchFamily="34" charset="-120"/>
+              </a:rPr>
+              <a:t>L</a:t>
+            </a:r>
+            <a:endParaRPr lang="en-US" sz="1100" dirty="0"/>
+          </a:p>
+        </p:txBody>
+      </p:sp>
+      <p:graphicFrame>
+        <p:nvGraphicFramePr>
+          <p:cNvPr id="16" name="Table 0"/>
           <p:cNvGraphicFramePr>
             <a:graphicFrameLocks noGrp="1"/>
           </p:cNvGraphicFramePr>
@@ -4194,9 +8514,9 @@
 </p:sld>
 </file>
 
-<file path=ppt/slides/slide11.xml><?xml version="1.0" encoding="utf-8"?>
+<file path=ppt/slides/slide16.xml><?xml version="1.0" encoding="utf-8"?>
 <p:sld xmlns:a="http://schemas.openxmlformats.org/drawingml/2006/main" xmlns:r="http://schemas.openxmlformats.org/officeDocument/2006/relationships" xmlns:p="http://schemas.openxmlformats.org/presentationml/2006/main">
-  <p:cSld name="Slide 11">
+  <p:cSld name="Slide 16">
     <p:spTree>
       <p:nvGrpSpPr>
         <p:cNvPr id="1" name=""/>
@@ -5226,9 +9546,9 @@
 </p:sld>
 </file>
 
-<file path=ppt/slides/slide12.xml><?xml version="1.0" encoding="utf-8"?>
+<file path=ppt/slides/slide17.xml><?xml version="1.0" encoding="utf-8"?>
 <p:sld xmlns:a="http://schemas.openxmlformats.org/drawingml/2006/main" xmlns:r="http://schemas.openxmlformats.org/officeDocument/2006/relationships" xmlns:p="http://schemas.openxmlformats.org/presentationml/2006/main">
-  <p:cSld name="Slide 12">
+  <p:cSld name="Slide 17">
     <p:spTree>
       <p:nvGrpSpPr>
         <p:cNvPr id="1" name=""/>
@@ -5820,7 +10140,7 @@
                 <a:ea typeface="Calibri" pitchFamily="34" charset="-122"/>
                 <a:cs typeface="Calibri" pitchFamily="34" charset="-120"/>
               </a:rPr>
-              <a:t>② Unify the two LLM evidence streams on one gold standard; golden set grown 60→80 bilingual (exact-tag lift now significant, p=0.001) — grow further for urgency power</a:t>
+              <a:t>② Unify the two LLM evidence streams on one gold standard; golden set grown 60→100 bilingual — exemplar lift now significant on exact-tags (p=0.001, n=80) AND urgency (83%→90%, p=0.039, n=100); next: model-score calibration + FR/ES/IT strata</a:t>
             </a:r>
             <a:endParaRPr lang="en-US" sz="1300" dirty="0"/>
           </a:p>
@@ -5876,9 +10196,9 @@
 </p:sld>
 </file>
 
-<file path=ppt/slides/slide13.xml><?xml version="1.0" encoding="utf-8"?>
+<file path=ppt/slides/slide18.xml><?xml version="1.0" encoding="utf-8"?>
 <p:sld xmlns:a="http://schemas.openxmlformats.org/drawingml/2006/main" xmlns:r="http://schemas.openxmlformats.org/officeDocument/2006/relationships" xmlns:p="http://schemas.openxmlformats.org/presentationml/2006/main">
-  <p:cSld name="Slide 13">
+  <p:cSld name="Slide 18">
     <p:bg>
       <p:bgPr>
         <a:solidFill>
@@ -8482,7 +12802,7 @@
       </p:sp>
       <p:pic>
         <p:nvPicPr>
-          <p:cNvPr id="12" name="Image 0" descr="/Users/olamakri/Documents/CLARA/.claude/worktrees/review-phase-a/thesis/diagrams/rendered/01_architecture_logical.png">    </p:cNvPr>
+          <p:cNvPr id="12" name="Image 0" descr="/Users/olamakri/Documents/CLARA/thesis/diagrams/rendered/01_architecture_logical.png">    </p:cNvPr>
           <p:cNvPicPr>
             <a:picLocks noChangeAspect="1"/>
           </p:cNvPicPr>
@@ -8601,7 +12921,7 @@
                 <a:ea typeface="Cambria" pitchFamily="34" charset="-122"/>
                 <a:cs typeface="Cambria" pitchFamily="34" charset="-120"/>
               </a:rPr>
-              <a:t>Five design decisions the literature doesn't resolve</a:t>
+              <a:t>Inside the build: CLARA system architecture</a:t>
             </a:r>
             <a:endParaRPr lang="en-US" sz="3200" dirty="0"/>
           </a:p>
@@ -8640,7 +12960,7 @@
                 <a:ea typeface="Calibri" pitchFamily="34" charset="-122"/>
                 <a:cs typeface="Calibri" pitchFamily="34" charset="-120"/>
               </a:rPr>
-              <a:t>Each implemented, grounded, and stated with its cost</a:t>
+              <a:t>Next.js (Vercel) → FastAPI + LangGraph (Docker on a Hetzner EU VPS, behind Caddy) → Supabase Postgres</a:t>
             </a:r>
             <a:endParaRPr lang="en-US" sz="1400" dirty="0"/>
           </a:p>
@@ -8882,20 +13202,44 @@
           </a:p>
         </p:txBody>
       </p:sp>
-      <p:sp>
-        <p:nvSpPr>
-          <p:cNvPr id="12" name="Shape 10"/>
-          <p:cNvSpPr/>
-          <p:nvPr/>
-        </p:nvSpPr>
-        <p:spPr>
-          <a:xfrm>
-            <a:off x="548640" y="1600200"/>
-            <a:ext cx="3593592" cy="1965960"/>
+      <p:pic>
+        <p:nvPicPr>
+          <p:cNvPr id="12" name="Image 0" descr="/Users/olamakri/Documents/CLARA/thesis/diagrams/rendered/03_architecture_clara.png">    </p:cNvPr>
+          <p:cNvPicPr>
+            <a:picLocks noChangeAspect="1"/>
+          </p:cNvPicPr>
+          <p:nvPr/>
+        </p:nvPicPr>
+        <p:blipFill>
+          <a:blip r:embed="rId1"/>
+          <a:stretch>
+            <a:fillRect/>
+          </a:stretch>
+        </p:blipFill>
+        <p:spPr>
+          <a:xfrm>
+            <a:off x="548640" y="1417320"/>
+            <a:ext cx="5687568" cy="4754880"/>
+          </a:xfrm>
+          <a:prstGeom prst="rect">
+            <a:avLst/>
+          </a:prstGeom>
+        </p:spPr>
+      </p:pic>
+      <p:sp>
+        <p:nvSpPr>
+          <p:cNvPr id="13" name="Shape 10"/>
+          <p:cNvSpPr/>
+          <p:nvPr/>
+        </p:nvSpPr>
+        <p:spPr>
+          <a:xfrm>
+            <a:off x="6446520" y="1463040"/>
+            <a:ext cx="5166360" cy="1481328"/>
           </a:xfrm>
           <a:prstGeom prst="roundRect">
             <a:avLst>
-              <a:gd name="adj" fmla="val 2791"/>
+              <a:gd name="adj" fmla="val 3704"/>
             </a:avLst>
           </a:prstGeom>
           <a:solidFill>
@@ -8911,14 +13255,14 @@
       </p:sp>
       <p:sp>
         <p:nvSpPr>
-          <p:cNvPr id="13" name="Text 11"/>
-          <p:cNvSpPr/>
-          <p:nvPr/>
-        </p:nvSpPr>
-        <p:spPr>
-          <a:xfrm>
-            <a:off x="685800" y="1691640"/>
-            <a:ext cx="3319272" cy="292608"/>
+          <p:cNvPr id="14" name="Text 11"/>
+          <p:cNvSpPr/>
+          <p:nvPr/>
+        </p:nvSpPr>
+        <p:spPr>
+          <a:xfrm>
+            <a:off x="6583680" y="1554480"/>
+            <a:ext cx="4892040" cy="292608"/>
           </a:xfrm>
           <a:prstGeom prst="rect">
             <a:avLst/>
@@ -8942,7 +13286,7 @@
                 <a:ea typeface="Calibri" pitchFamily="34" charset="-122"/>
                 <a:cs typeface="Calibri" pitchFamily="34" charset="-120"/>
               </a:rPr>
-              <a:t>1 · Rule conflict resolution</a:t>
+              <a:t>LangGraph runtime</a:t>
             </a:r>
             <a:endParaRPr lang="en-US" sz="1350" dirty="0"/>
           </a:p>
@@ -8950,14 +13294,14 @@
       </p:sp>
       <p:sp>
         <p:nvSpPr>
-          <p:cNvPr id="14" name="Text 12"/>
-          <p:cNvSpPr/>
-          <p:nvPr/>
-        </p:nvSpPr>
-        <p:spPr>
-          <a:xfrm>
-            <a:off x="685800" y="1984248"/>
-            <a:ext cx="3319272" cy="1490472"/>
+          <p:cNvPr id="15" name="Text 12"/>
+          <p:cNvSpPr/>
+          <p:nvPr/>
+        </p:nvSpPr>
+        <p:spPr>
+          <a:xfrm>
+            <a:off x="6583680" y="1847088"/>
+            <a:ext cx="4892040" cy="1005840"/>
           </a:xfrm>
           <a:prstGeom prst="rect">
             <a:avLst/>
@@ -8981,7 +13325,7 @@
                 <a:ea typeface="Calibri" pitchFamily="34" charset="-122"/>
                 <a:cs typeface="Calibri" pitchFamily="34" charset="-120"/>
               </a:rPr>
-              <a:t>Priority → specificity → action-type dedupe; superseded rules logged. Cost: config debt — entrenches a wrong rule as faithfully as a right one.</a:t>
+              <a:t>One typed graph: enrich → synthesize → evaluate-rules → interrupt (human approval) → execute → measure → learn. The interrupt IS the Art 14 gate — there is no code path to an external effect that bypasses it.</a:t>
             </a:r>
             <a:endParaRPr lang="en-US" sz="1150" dirty="0"/>
           </a:p>
@@ -8989,18 +13333,18 @@
       </p:sp>
       <p:sp>
         <p:nvSpPr>
-          <p:cNvPr id="15" name="Shape 13"/>
-          <p:cNvSpPr/>
-          <p:nvPr/>
-        </p:nvSpPr>
-        <p:spPr>
-          <a:xfrm>
-            <a:off x="4325112" y="1600200"/>
-            <a:ext cx="3593592" cy="1965960"/>
+          <p:cNvPr id="16" name="Shape 13"/>
+          <p:cNvSpPr/>
+          <p:nvPr/>
+        </p:nvSpPr>
+        <p:spPr>
+          <a:xfrm>
+            <a:off x="6446520" y="3081528"/>
+            <a:ext cx="5166360" cy="1481328"/>
           </a:xfrm>
           <a:prstGeom prst="roundRect">
             <a:avLst>
-              <a:gd name="adj" fmla="val 2791"/>
+              <a:gd name="adj" fmla="val 3704"/>
             </a:avLst>
           </a:prstGeom>
           <a:solidFill>
@@ -9016,14 +13360,14 @@
       </p:sp>
       <p:sp>
         <p:nvSpPr>
-          <p:cNvPr id="16" name="Text 14"/>
-          <p:cNvSpPr/>
-          <p:nvPr/>
-        </p:nvSpPr>
-        <p:spPr>
-          <a:xfrm>
-            <a:off x="4462272" y="1691640"/>
-            <a:ext cx="3319272" cy="292608"/>
+          <p:cNvPr id="17" name="Text 14"/>
+          <p:cNvSpPr/>
+          <p:nvPr/>
+        </p:nvSpPr>
+        <p:spPr>
+          <a:xfrm>
+            <a:off x="6583680" y="3172968"/>
+            <a:ext cx="4892040" cy="292608"/>
           </a:xfrm>
           <a:prstGeom prst="rect">
             <a:avLst/>
@@ -9047,7 +13391,7 @@
                 <a:ea typeface="Calibri" pitchFamily="34" charset="-122"/>
                 <a:cs typeface="Calibri" pitchFamily="34" charset="-120"/>
               </a:rPr>
-              <a:t>2 · Confidence decay in learnings</a:t>
+              <a:t>Deployment (production)</a:t>
             </a:r>
             <a:endParaRPr lang="en-US" sz="1350" dirty="0"/>
           </a:p>
@@ -9055,14 +13399,14 @@
       </p:sp>
       <p:sp>
         <p:nvSpPr>
-          <p:cNvPr id="17" name="Text 15"/>
-          <p:cNvSpPr/>
-          <p:nvPr/>
-        </p:nvSpPr>
-        <p:spPr>
-          <a:xfrm>
-            <a:off x="4462272" y="1984248"/>
-            <a:ext cx="3319272" cy="1490472"/>
+          <p:cNvPr id="18" name="Text 15"/>
+          <p:cNvSpPr/>
+          <p:nvPr/>
+        </p:nvSpPr>
+        <p:spPr>
+          <a:xfrm>
+            <a:off x="6583680" y="3465576"/>
+            <a:ext cx="4892040" cy="1005840"/>
           </a:xfrm>
           <a:prstGeom prst="rect">
             <a:avLst/>
@@ -9086,7 +13430,7 @@
                 <a:ea typeface="Calibri" pitchFamily="34" charset="-122"/>
                 <a:cs typeface="Calibri" pitchFamily="34" charset="-120"/>
               </a:rPr>
-              <a:t>Memory as perishable: base × 0.5^(age/half-life). Prior art bounded: MemoryBank decays chat memory; ours decays ACTION-OUTCOME evidence. Cost: the half-life is a guess.</a:t>
+              <a:t>API in Docker on a Hetzner EU VPS behind Caddy · frontend on Vercel · Supabase Postgres + pgvector, RLS tenant isolation · uptime: GitHub Actions re-runs the 17-check live smoke every 30 min.</a:t>
             </a:r>
             <a:endParaRPr lang="en-US" sz="1150" dirty="0"/>
           </a:p>
@@ -9094,18 +13438,18 @@
       </p:sp>
       <p:sp>
         <p:nvSpPr>
-          <p:cNvPr id="18" name="Shape 16"/>
-          <p:cNvSpPr/>
-          <p:nvPr/>
-        </p:nvSpPr>
-        <p:spPr>
-          <a:xfrm>
-            <a:off x="8101584" y="1600200"/>
-            <a:ext cx="3593592" cy="1965960"/>
+          <p:cNvPr id="19" name="Shape 16"/>
+          <p:cNvSpPr/>
+          <p:nvPr/>
+        </p:nvSpPr>
+        <p:spPr>
+          <a:xfrm>
+            <a:off x="6446520" y="4700016"/>
+            <a:ext cx="5166360" cy="1481328"/>
           </a:xfrm>
           <a:prstGeom prst="roundRect">
             <a:avLst>
-              <a:gd name="adj" fmla="val 2791"/>
+              <a:gd name="adj" fmla="val 3704"/>
             </a:avLst>
           </a:prstGeom>
           <a:solidFill>
@@ -9121,14 +13465,14 @@
       </p:sp>
       <p:sp>
         <p:nvSpPr>
-          <p:cNvPr id="19" name="Text 17"/>
-          <p:cNvSpPr/>
-          <p:nvPr/>
-        </p:nvSpPr>
-        <p:spPr>
-          <a:xfrm>
-            <a:off x="8238744" y="1691640"/>
-            <a:ext cx="3319272" cy="292608"/>
+          <p:cNvPr id="20" name="Text 17"/>
+          <p:cNvSpPr/>
+          <p:nvPr/>
+        </p:nvSpPr>
+        <p:spPr>
+          <a:xfrm>
+            <a:off x="6583680" y="4791456"/>
+            <a:ext cx="4892040" cy="292608"/>
           </a:xfrm>
           <a:prstGeom prst="rect">
             <a:avLst/>
@@ -9152,7 +13496,7 @@
                 <a:ea typeface="Calibri" pitchFamily="34" charset="-122"/>
                 <a:cs typeface="Calibri" pitchFamily="34" charset="-120"/>
               </a:rPr>
-              <a:t>3 · Cross-signal severity</a:t>
+              <a:t>Model &amp; observability</a:t>
             </a:r>
             <a:endParaRPr lang="en-US" sz="1350" dirty="0"/>
           </a:p>
@@ -9160,14 +13504,14 @@
       </p:sp>
       <p:sp>
         <p:nvSpPr>
-          <p:cNvPr id="20" name="Text 18"/>
-          <p:cNvSpPr/>
-          <p:nvPr/>
-        </p:nvSpPr>
-        <p:spPr>
-          <a:xfrm>
-            <a:off x="8238744" y="1984248"/>
-            <a:ext cx="3319272" cy="1490472"/>
+          <p:cNvPr id="21" name="Text 18"/>
+          <p:cNvSpPr/>
+          <p:nvPr/>
+        </p:nvSpPr>
+        <p:spPr>
+          <a:xfrm>
+            <a:off x="6583680" y="5084064"/>
+            <a:ext cx="4892040" cy="1005840"/>
           </a:xfrm>
           <a:prstGeom prst="rect">
             <a:avLst/>
@@ -9191,319 +13535,9 @@
                 <a:ea typeface="Calibri" pitchFamily="34" charset="-122"/>
                 <a:cs typeface="Calibri" pitchFamily="34" charset="-120"/>
               </a:rPr>
-              <a:t>Severity from the corroborating SET (urgency, volume, sentiment), not the loudest voice. Cost: can bury the rare catastrophic single signal — needs an override.</a:t>
+              <a:t>Provider-agnostic LLM layer speaking the OpenAI protocol — hosted, EU gateway, or self-hosted (Ollama/vLLM). Langfuse tracing on the LLM stages; severity stays deterministic code.</a:t>
             </a:r>
             <a:endParaRPr lang="en-US" sz="1150" dirty="0"/>
-          </a:p>
-        </p:txBody>
-      </p:sp>
-      <p:sp>
-        <p:nvSpPr>
-          <p:cNvPr id="21" name="Shape 19"/>
-          <p:cNvSpPr/>
-          <p:nvPr/>
-        </p:nvSpPr>
-        <p:spPr>
-          <a:xfrm>
-            <a:off x="548640" y="3749040"/>
-            <a:ext cx="3593592" cy="1965960"/>
-          </a:xfrm>
-          <a:prstGeom prst="roundRect">
-            <a:avLst>
-              <a:gd name="adj" fmla="val 2791"/>
-            </a:avLst>
-          </a:prstGeom>
-          <a:solidFill>
-            <a:srgbClr val="F4F7FC"/>
-          </a:solidFill>
-          <a:ln w="12700">
-            <a:solidFill>
-              <a:srgbClr val="CADCFC"/>
-            </a:solidFill>
-            <a:prstDash val="solid"/>
-          </a:ln>
-        </p:spPr>
-      </p:sp>
-      <p:sp>
-        <p:nvSpPr>
-          <p:cNvPr id="22" name="Text 20"/>
-          <p:cNvSpPr/>
-          <p:nvPr/>
-        </p:nvSpPr>
-        <p:spPr>
-          <a:xfrm>
-            <a:off x="685800" y="3840480"/>
-            <a:ext cx="3319272" cy="292608"/>
-          </a:xfrm>
-          <a:prstGeom prst="rect">
-            <a:avLst/>
-          </a:prstGeom>
-          <a:noFill/>
-          <a:ln/>
-        </p:spPr>
-        <p:txBody>
-          <a:bodyPr wrap="square" lIns="0" tIns="0" rIns="0" bIns="0" rtlCol="0" anchor="ctr"/>
-          <a:lstStyle/>
-          <a:p>
-            <a:pPr indent="0" marL="0">
-              <a:buNone/>
-            </a:pPr>
-            <a:r>
-              <a:rPr lang="en-US" sz="1350" b="1" dirty="0">
-                <a:solidFill>
-                  <a:srgbClr val="1E2761"/>
-                </a:solidFill>
-                <a:latin typeface="Calibri" pitchFamily="34" charset="0"/>
-                <a:ea typeface="Calibri" pitchFamily="34" charset="-122"/>
-                <a:cs typeface="Calibri" pitchFamily="34" charset="-120"/>
-              </a:rPr>
-              <a:t>4 · Past-learnings retrieval</a:t>
-            </a:r>
-            <a:endParaRPr lang="en-US" sz="1350" dirty="0"/>
-          </a:p>
-        </p:txBody>
-      </p:sp>
-      <p:sp>
-        <p:nvSpPr>
-          <p:cNvPr id="23" name="Text 21"/>
-          <p:cNvSpPr/>
-          <p:nvPr/>
-        </p:nvSpPr>
-        <p:spPr>
-          <a:xfrm>
-            <a:off x="685800" y="4133088"/>
-            <a:ext cx="3319272" cy="1490472"/>
-          </a:xfrm>
-          <a:prstGeom prst="rect">
-            <a:avLst/>
-          </a:prstGeom>
-          <a:noFill/>
-          <a:ln/>
-        </p:spPr>
-        <p:txBody>
-          <a:bodyPr wrap="square" lIns="0" tIns="0" rIns="0" bIns="0" rtlCol="0" anchor="ctr"/>
-          <a:lstStyle/>
-          <a:p>
-            <a:pPr indent="0" marL="0">
-              <a:buNone/>
-            </a:pPr>
-            <a:r>
-              <a:rPr lang="en-US" sz="1150" dirty="0">
-                <a:solidFill>
-                  <a:srgbClr val="1A1A2E"/>
-                </a:solidFill>
-                <a:latin typeface="Calibri" pitchFamily="34" charset="0"/>
-                <a:ea typeface="Calibri" pitchFamily="34" charset="-122"/>
-                <a:cs typeface="Calibri" pitchFamily="34" charset="-120"/>
-              </a:rPr>
-              <a:t>Decayed-confidence retrieval into new decisions (CBR lineage). Cost: retrieval quality gates usefulness.</a:t>
-            </a:r>
-            <a:endParaRPr lang="en-US" sz="1150" dirty="0"/>
-          </a:p>
-        </p:txBody>
-      </p:sp>
-      <p:sp>
-        <p:nvSpPr>
-          <p:cNvPr id="24" name="Shape 22"/>
-          <p:cNvSpPr/>
-          <p:nvPr/>
-        </p:nvSpPr>
-        <p:spPr>
-          <a:xfrm>
-            <a:off x="4325112" y="3749040"/>
-            <a:ext cx="3593592" cy="1965960"/>
-          </a:xfrm>
-          <a:prstGeom prst="roundRect">
-            <a:avLst>
-              <a:gd name="adj" fmla="val 2791"/>
-            </a:avLst>
-          </a:prstGeom>
-          <a:solidFill>
-            <a:srgbClr val="F4F7FC"/>
-          </a:solidFill>
-          <a:ln w="12700">
-            <a:solidFill>
-              <a:srgbClr val="CADCFC"/>
-            </a:solidFill>
-            <a:prstDash val="solid"/>
-          </a:ln>
-        </p:spPr>
-      </p:sp>
-      <p:sp>
-        <p:nvSpPr>
-          <p:cNvPr id="25" name="Text 23"/>
-          <p:cNvSpPr/>
-          <p:nvPr/>
-        </p:nvSpPr>
-        <p:spPr>
-          <a:xfrm>
-            <a:off x="4462272" y="3840480"/>
-            <a:ext cx="3319272" cy="292608"/>
-          </a:xfrm>
-          <a:prstGeom prst="rect">
-            <a:avLst/>
-          </a:prstGeom>
-          <a:noFill/>
-          <a:ln/>
-        </p:spPr>
-        <p:txBody>
-          <a:bodyPr wrap="square" lIns="0" tIns="0" rIns="0" bIns="0" rtlCol="0" anchor="ctr"/>
-          <a:lstStyle/>
-          <a:p>
-            <a:pPr indent="0" marL="0">
-              <a:buNone/>
-            </a:pPr>
-            <a:r>
-              <a:rPr lang="en-US" sz="1350" b="1" dirty="0">
-                <a:solidFill>
-                  <a:srgbClr val="1E2761"/>
-                </a:solidFill>
-                <a:latin typeface="Calibri" pitchFamily="34" charset="0"/>
-                <a:ea typeface="Calibri" pitchFamily="34" charset="-122"/>
-                <a:cs typeface="Calibri" pitchFamily="34" charset="-120"/>
-              </a:rPr>
-              <a:t>5 · Per-industry profiles</a:t>
-            </a:r>
-            <a:endParaRPr lang="en-US" sz="1350" dirty="0"/>
-          </a:p>
-        </p:txBody>
-      </p:sp>
-      <p:sp>
-        <p:nvSpPr>
-          <p:cNvPr id="26" name="Text 24"/>
-          <p:cNvSpPr/>
-          <p:nvPr/>
-        </p:nvSpPr>
-        <p:spPr>
-          <a:xfrm>
-            <a:off x="4462272" y="4133088"/>
-            <a:ext cx="3319272" cy="1490472"/>
-          </a:xfrm>
-          <a:prstGeom prst="rect">
-            <a:avLst/>
-          </a:prstGeom>
-          <a:noFill/>
-          <a:ln/>
-        </p:spPr>
-        <p:txBody>
-          <a:bodyPr wrap="square" lIns="0" tIns="0" rIns="0" bIns="0" rtlCol="0" anchor="ctr"/>
-          <a:lstStyle/>
-          <a:p>
-            <a:pPr indent="0" marL="0">
-              <a:buNone/>
-            </a:pPr>
-            <a:r>
-              <a:rPr lang="en-US" sz="1150" dirty="0">
-                <a:solidFill>
-                  <a:srgbClr val="1A1A2E"/>
-                </a:solidFill>
-                <a:latin typeface="Calibri" pitchFamily="34" charset="0"/>
-                <a:ea typeface="Calibri" pitchFamily="34" charset="-122"/>
-                <a:cs typeface="Calibri" pitchFamily="34" charset="-120"/>
-              </a:rPr>
-              <a:t>Adaptation by configuration, not fine-tuning: weight overlays per sector. Cost: authored priors can encode stereotypes; inspectability is the safeguard.</a:t>
-            </a:r>
-            <a:endParaRPr lang="en-US" sz="1150" dirty="0"/>
-          </a:p>
-        </p:txBody>
-      </p:sp>
-      <p:sp>
-        <p:nvSpPr>
-          <p:cNvPr id="27" name="Shape 25"/>
-          <p:cNvSpPr/>
-          <p:nvPr/>
-        </p:nvSpPr>
-        <p:spPr>
-          <a:xfrm>
-            <a:off x="8101584" y="3749040"/>
-            <a:ext cx="3538728" cy="1965960"/>
-          </a:xfrm>
-          <a:prstGeom prst="roundRect">
-            <a:avLst>
-              <a:gd name="adj" fmla="val 2791"/>
-            </a:avLst>
-          </a:prstGeom>
-          <a:solidFill>
-            <a:srgbClr val="1E2761"/>
-          </a:solidFill>
-          <a:ln/>
-        </p:spPr>
-      </p:sp>
-      <p:sp>
-        <p:nvSpPr>
-          <p:cNvPr id="28" name="Text 26"/>
-          <p:cNvSpPr/>
-          <p:nvPr/>
-        </p:nvSpPr>
-        <p:spPr>
-          <a:xfrm>
-            <a:off x="8275320" y="3886200"/>
-            <a:ext cx="3200400" cy="320040"/>
-          </a:xfrm>
-          <a:prstGeom prst="rect">
-            <a:avLst/>
-          </a:prstGeom>
-          <a:noFill/>
-          <a:ln/>
-        </p:spPr>
-        <p:txBody>
-          <a:bodyPr wrap="square" lIns="0" tIns="0" rIns="0" bIns="0" rtlCol="0" anchor="ctr"/>
-          <a:lstStyle/>
-          <a:p>
-            <a:pPr indent="0" marL="0">
-              <a:buNone/>
-            </a:pPr>
-            <a:r>
-              <a:rPr lang="en-US" sz="1300" b="1" dirty="0">
-                <a:solidFill>
-                  <a:srgbClr val="CADCFC"/>
-                </a:solidFill>
-                <a:latin typeface="Calibri" pitchFamily="34" charset="0"/>
-                <a:ea typeface="Calibri" pitchFamily="34" charset="-122"/>
-                <a:cs typeface="Calibri" pitchFamily="34" charset="-120"/>
-              </a:rPr>
-              <a:t>Why costs?</a:t>
-            </a:r>
-            <a:endParaRPr lang="en-US" sz="1300" dirty="0"/>
-          </a:p>
-        </p:txBody>
-      </p:sp>
-      <p:sp>
-        <p:nvSpPr>
-          <p:cNvPr id="29" name="Text 27"/>
-          <p:cNvSpPr/>
-          <p:nvPr/>
-        </p:nvSpPr>
-        <p:spPr>
-          <a:xfrm>
-            <a:off x="8275320" y="4224528"/>
-            <a:ext cx="3200400" cy="1371600"/>
-          </a:xfrm>
-          <a:prstGeom prst="rect">
-            <a:avLst/>
-          </a:prstGeom>
-          <a:noFill/>
-          <a:ln/>
-        </p:spPr>
-        <p:txBody>
-          <a:bodyPr wrap="square" lIns="0" tIns="0" rIns="0" bIns="0" rtlCol="0" anchor="ctr"/>
-          <a:lstStyle/>
-          <a:p>
-            <a:pPr indent="0" marL="0">
-              <a:buNone/>
-            </a:pPr>
-            <a:r>
-              <a:rPr lang="en-US" sz="1250" dirty="0">
-                <a:solidFill>
-                  <a:srgbClr val="FFFFFF"/>
-                </a:solidFill>
-                <a:latin typeface="Calibri" pitchFamily="34" charset="0"/>
-                <a:ea typeface="Calibri" pitchFamily="34" charset="-122"/>
-                <a:cs typeface="Calibri" pitchFamily="34" charset="-120"/>
-              </a:rPr>
-              <a:t>A design principle that buys something for nothing is a platitude. Stating the cost is what makes each decision defensible.</a:t>
-            </a:r>
-            <a:endParaRPr lang="en-US" sz="1250" dirty="0"/>
           </a:p>
         </p:txBody>
       </p:sp>
@@ -9565,7 +13599,7 @@
                 <a:ea typeface="Cambria" pitchFamily="34" charset="-122"/>
                 <a:cs typeface="Cambria" pitchFamily="34" charset="-120"/>
               </a:rPr>
-              <a:t>Responsible AI as a property of the loop</a:t>
+              <a:t>The loop in motion: pipeline and approval sequence</a:t>
             </a:r>
             <a:endParaRPr lang="en-US" sz="3200" dirty="0"/>
           </a:p>
@@ -9604,7 +13638,7 @@
                 <a:ea typeface="Calibri" pitchFamily="34" charset="-122"/>
                 <a:cs typeface="Calibri" pitchFamily="34" charset="-120"/>
               </a:rPr>
-              <a:t>Not a compliance module — the loop itself is the control surface</a:t>
+              <a:t>Bounded LLM stages (blue) inside deterministic gates; governance touchpoints in red</a:t>
             </a:r>
             <a:endParaRPr lang="en-US" sz="1400" dirty="0"/>
           </a:p>
@@ -9846,462 +13880,90 @@
           </a:p>
         </p:txBody>
       </p:sp>
-      <p:sp>
-        <p:nvSpPr>
-          <p:cNvPr id="12" name="Shape 10"/>
-          <p:cNvSpPr/>
-          <p:nvPr/>
-        </p:nvSpPr>
-        <p:spPr>
-          <a:xfrm>
-            <a:off x="548640" y="1600200"/>
-            <a:ext cx="5440680" cy="1965960"/>
-          </a:xfrm>
-          <a:prstGeom prst="roundRect">
-            <a:avLst>
-              <a:gd name="adj" fmla="val 2791"/>
-            </a:avLst>
-          </a:prstGeom>
-          <a:solidFill>
-            <a:srgbClr val="F4F7FC"/>
-          </a:solidFill>
-          <a:ln w="12700">
-            <a:solidFill>
-              <a:srgbClr val="CADCFC"/>
-            </a:solidFill>
-            <a:prstDash val="solid"/>
-          </a:ln>
-        </p:spPr>
-      </p:sp>
-      <p:sp>
-        <p:nvSpPr>
-          <p:cNvPr id="13" name="Text 11"/>
-          <p:cNvSpPr/>
-          <p:nvPr/>
-        </p:nvSpPr>
-        <p:spPr>
-          <a:xfrm>
-            <a:off x="685800" y="1691640"/>
-            <a:ext cx="5166360" cy="292608"/>
-          </a:xfrm>
-          <a:prstGeom prst="rect">
-            <a:avLst/>
-          </a:prstGeom>
-          <a:noFill/>
-          <a:ln/>
-        </p:spPr>
-        <p:txBody>
-          <a:bodyPr wrap="square" lIns="0" tIns="0" rIns="0" bIns="0" rtlCol="0" anchor="ctr"/>
+      <p:pic>
+        <p:nvPicPr>
+          <p:cNvPr id="12" name="Image 0" descr="/Users/olamakri/Documents/CLARA/thesis/diagrams/rendered/04_pipeline_flow.png">    </p:cNvPr>
+          <p:cNvPicPr>
+            <a:picLocks noChangeAspect="1"/>
+          </p:cNvPicPr>
+          <p:nvPr/>
+        </p:nvPicPr>
+        <p:blipFill>
+          <a:blip r:embed="rId1"/>
+          <a:stretch>
+            <a:fillRect/>
+          </a:stretch>
+        </p:blipFill>
+        <p:spPr>
+          <a:xfrm>
+            <a:off x="640080" y="1463040"/>
+            <a:ext cx="1874520" cy="4709160"/>
+          </a:xfrm>
+          <a:prstGeom prst="rect">
+            <a:avLst/>
+          </a:prstGeom>
+        </p:spPr>
+      </p:pic>
+      <p:pic>
+        <p:nvPicPr>
+          <p:cNvPr id="13" name="Image 1" descr="/Users/olamakri/Documents/CLARA/thesis/diagrams/rendered/05_sequence_hitl.png">    </p:cNvPr>
+          <p:cNvPicPr>
+            <a:picLocks noChangeAspect="1"/>
+          </p:cNvPicPr>
+          <p:nvPr/>
+        </p:nvPicPr>
+        <p:blipFill>
+          <a:blip r:embed="rId2"/>
+          <a:stretch>
+            <a:fillRect/>
+          </a:stretch>
+        </p:blipFill>
+        <p:spPr>
+          <a:xfrm>
+            <a:off x="2788920" y="1600200"/>
+            <a:ext cx="8732520" cy="3785616"/>
+          </a:xfrm>
+          <a:prstGeom prst="rect">
+            <a:avLst/>
+          </a:prstGeom>
+        </p:spPr>
+      </p:pic>
+      <p:sp>
+        <p:nvSpPr>
+          <p:cNvPr id="14" name="Text 10"/>
+          <p:cNvSpPr/>
+          <p:nvPr/>
+        </p:nvSpPr>
+        <p:spPr>
+          <a:xfrm>
+            <a:off x="2788920" y="5486400"/>
+            <a:ext cx="8732520" cy="914400"/>
+          </a:xfrm>
+          <a:prstGeom prst="rect">
+            <a:avLst/>
+          </a:prstGeom>
+          <a:noFill/>
+          <a:ln/>
+        </p:spPr>
+        <p:txBody>
+          <a:bodyPr wrap="square" rtlCol="0" anchor="ctr"/>
           <a:lstStyle/>
           <a:p>
             <a:pPr indent="0" marL="0">
               <a:buNone/>
             </a:pPr>
             <a:r>
-              <a:rPr lang="en-US" sz="1350" b="1" dirty="0">
-                <a:solidFill>
-                  <a:srgbClr val="1E2761"/>
-                </a:solidFill>
-                <a:latin typeface="Calibri" pitchFamily="34" charset="0"/>
-                <a:ea typeface="Calibri" pitchFamily="34" charset="-122"/>
-                <a:cs typeface="Calibri" pitchFamily="34" charset="-120"/>
-              </a:rPr>
-              <a:t>Human approval · Art 14+</a:t>
-            </a:r>
-            <a:endParaRPr lang="en-US" sz="1350" dirty="0"/>
-          </a:p>
-        </p:txBody>
-      </p:sp>
-      <p:sp>
-        <p:nvSpPr>
-          <p:cNvPr id="14" name="Text 12"/>
-          <p:cNvSpPr/>
-          <p:nvPr/>
-        </p:nvSpPr>
-        <p:spPr>
-          <a:xfrm>
-            <a:off x="685800" y="1984248"/>
-            <a:ext cx="5166360" cy="1490472"/>
-          </a:xfrm>
-          <a:prstGeom prst="rect">
-            <a:avLst/>
-          </a:prstGeom>
-          <a:noFill/>
-          <a:ln/>
-        </p:spPr>
-        <p:txBody>
-          <a:bodyPr wrap="square" lIns="0" tIns="0" rIns="0" bIns="0" rtlCol="0" anchor="ctr"/>
-          <a:lstStyle/>
-          <a:p>
-            <a:pPr indent="0" marL="0">
-              <a:buNone/>
-            </a:pPr>
-            <a:r>
               <a:rPr lang="en-US" sz="1150" dirty="0">
                 <a:solidFill>
-                  <a:srgbClr val="1A1A2E"/>
-                </a:solidFill>
-                <a:latin typeface="Calibri" pitchFamily="34" charset="0"/>
-                <a:ea typeface="Calibri" pitchFamily="34" charset="-122"/>
-                <a:cs typeface="Calibri" pitchFamily="34" charset="-120"/>
-              </a:rPr>
-              <a:t>auto_execute=false ⇒ pending approval. Designed BEYOND Art 14: friction, evidence &amp; confidence shown, per-decision attribution (meaningful human control — Siebert 2023; automation-bias critique — Laux &amp; Ruschemeier 2025).</a:t>
+                  <a:srgbClr val="5A6478"/>
+                </a:solidFill>
+                <a:latin typeface="Calibri" pitchFamily="34" charset="0"/>
+                <a:ea typeface="Calibri" pitchFamily="34" charset="-122"/>
+                <a:cs typeface="Calibri" pitchFamily="34" charset="-120"/>
+              </a:rPr>
+              <a:t>Left: the pipeline as implemented — risk gate (auto_execute), approval queue, audit write, outcome measurement, decayed-confidence retrieval feeding rule matching. Right: the same lifecycle as a sequence — approval interrupt, audit record, outcome contract set BEFORE measurement, re-measure after the window, codify learning, retrieve on the next similar decision.</a:t>
             </a:r>
             <a:endParaRPr lang="en-US" sz="1150" dirty="0"/>
-          </a:p>
-        </p:txBody>
-      </p:sp>
-      <p:sp>
-        <p:nvSpPr>
-          <p:cNvPr id="15" name="Shape 13"/>
-          <p:cNvSpPr/>
-          <p:nvPr/>
-        </p:nvSpPr>
-        <p:spPr>
-          <a:xfrm>
-            <a:off x="6172200" y="1600200"/>
-            <a:ext cx="5440680" cy="1965960"/>
-          </a:xfrm>
-          <a:prstGeom prst="roundRect">
-            <a:avLst>
-              <a:gd name="adj" fmla="val 2791"/>
-            </a:avLst>
-          </a:prstGeom>
-          <a:solidFill>
-            <a:srgbClr val="F4F7FC"/>
-          </a:solidFill>
-          <a:ln w="12700">
-            <a:solidFill>
-              <a:srgbClr val="CADCFC"/>
-            </a:solidFill>
-            <a:prstDash val="solid"/>
-          </a:ln>
-        </p:spPr>
-      </p:sp>
-      <p:sp>
-        <p:nvSpPr>
-          <p:cNvPr id="16" name="Text 14"/>
-          <p:cNvSpPr/>
-          <p:nvPr/>
-        </p:nvSpPr>
-        <p:spPr>
-          <a:xfrm>
-            <a:off x="6309360" y="1691640"/>
-            <a:ext cx="5166360" cy="292608"/>
-          </a:xfrm>
-          <a:prstGeom prst="rect">
-            <a:avLst/>
-          </a:prstGeom>
-          <a:noFill/>
-          <a:ln/>
-        </p:spPr>
-        <p:txBody>
-          <a:bodyPr wrap="square" lIns="0" tIns="0" rIns="0" bIns="0" rtlCol="0" anchor="ctr"/>
-          <a:lstStyle/>
-          <a:p>
-            <a:pPr indent="0" marL="0">
-              <a:buNone/>
-            </a:pPr>
-            <a:r>
-              <a:rPr lang="en-US" sz="1350" b="1" dirty="0">
-                <a:solidFill>
-                  <a:srgbClr val="1E2761"/>
-                </a:solidFill>
-                <a:latin typeface="Calibri" pitchFamily="34" charset="0"/>
-                <a:ea typeface="Calibri" pitchFamily="34" charset="-122"/>
-                <a:cs typeface="Calibri" pitchFamily="34" charset="-120"/>
-              </a:rPr>
-              <a:t>Audit trail · Art 12</a:t>
-            </a:r>
-            <a:endParaRPr lang="en-US" sz="1350" dirty="0"/>
-          </a:p>
-        </p:txBody>
-      </p:sp>
-      <p:sp>
-        <p:nvSpPr>
-          <p:cNvPr id="17" name="Text 15"/>
-          <p:cNvSpPr/>
-          <p:nvPr/>
-        </p:nvSpPr>
-        <p:spPr>
-          <a:xfrm>
-            <a:off x="6309360" y="1984248"/>
-            <a:ext cx="5166360" cy="1490472"/>
-          </a:xfrm>
-          <a:prstGeom prst="rect">
-            <a:avLst/>
-          </a:prstGeom>
-          <a:noFill/>
-          <a:ln/>
-        </p:spPr>
-        <p:txBody>
-          <a:bodyPr wrap="square" lIns="0" tIns="0" rIns="0" bIns="0" rtlCol="0" anchor="ctr"/>
-          <a:lstStyle/>
-          <a:p>
-            <a:pPr indent="0" marL="0">
-              <a:buNone/>
-            </a:pPr>
-            <a:r>
-              <a:rPr lang="en-US" sz="1150" dirty="0">
-                <a:solidFill>
-                  <a:srgbClr val="1A1A2E"/>
-                </a:solidFill>
-                <a:latin typeface="Calibri" pitchFamily="34" charset="0"/>
-                <a:ea typeface="Calibri" pitchFamily="34" charset="-122"/>
-                <a:cs typeface="Calibri" pitchFamily="34" charset="-120"/>
-              </a:rPr>
-              <a:t>Every action: rule, params, executor, result. Review-then-harden finding: declared controls ≠ enforced controls until adversarially verified.</a:t>
-            </a:r>
-            <a:endParaRPr lang="en-US" sz="1150" dirty="0"/>
-          </a:p>
-        </p:txBody>
-      </p:sp>
-      <p:sp>
-        <p:nvSpPr>
-          <p:cNvPr id="18" name="Shape 16"/>
-          <p:cNvSpPr/>
-          <p:nvPr/>
-        </p:nvSpPr>
-        <p:spPr>
-          <a:xfrm>
-            <a:off x="548640" y="3749040"/>
-            <a:ext cx="5440680" cy="1965960"/>
-          </a:xfrm>
-          <a:prstGeom prst="roundRect">
-            <a:avLst>
-              <a:gd name="adj" fmla="val 2791"/>
-            </a:avLst>
-          </a:prstGeom>
-          <a:solidFill>
-            <a:srgbClr val="F4F7FC"/>
-          </a:solidFill>
-          <a:ln w="12700">
-            <a:solidFill>
-              <a:srgbClr val="CADCFC"/>
-            </a:solidFill>
-            <a:prstDash val="solid"/>
-          </a:ln>
-        </p:spPr>
-      </p:sp>
-      <p:sp>
-        <p:nvSpPr>
-          <p:cNvPr id="19" name="Text 17"/>
-          <p:cNvSpPr/>
-          <p:nvPr/>
-        </p:nvSpPr>
-        <p:spPr>
-          <a:xfrm>
-            <a:off x="685800" y="3840480"/>
-            <a:ext cx="5166360" cy="292608"/>
-          </a:xfrm>
-          <a:prstGeom prst="rect">
-            <a:avLst/>
-          </a:prstGeom>
-          <a:noFill/>
-          <a:ln/>
-        </p:spPr>
-        <p:txBody>
-          <a:bodyPr wrap="square" lIns="0" tIns="0" rIns="0" bIns="0" rtlCol="0" anchor="ctr"/>
-          <a:lstStyle/>
-          <a:p>
-            <a:pPr indent="0" marL="0">
-              <a:buNone/>
-            </a:pPr>
-            <a:r>
-              <a:rPr lang="en-US" sz="1350" b="1" dirty="0">
-                <a:solidFill>
-                  <a:srgbClr val="1E2761"/>
-                </a:solidFill>
-                <a:latin typeface="Calibri" pitchFamily="34" charset="0"/>
-                <a:ea typeface="Calibri" pitchFamily="34" charset="-122"/>
-                <a:cs typeface="Calibri" pitchFamily="34" charset="-120"/>
-              </a:rPr>
-              <a:t>Transparency · Art 50</a:t>
-            </a:r>
-            <a:endParaRPr lang="en-US" sz="1350" dirty="0"/>
-          </a:p>
-        </p:txBody>
-      </p:sp>
-      <p:sp>
-        <p:nvSpPr>
-          <p:cNvPr id="20" name="Text 18"/>
-          <p:cNvSpPr/>
-          <p:nvPr/>
-        </p:nvSpPr>
-        <p:spPr>
-          <a:xfrm>
-            <a:off x="685800" y="4133088"/>
-            <a:ext cx="5166360" cy="1490472"/>
-          </a:xfrm>
-          <a:prstGeom prst="rect">
-            <a:avLst/>
-          </a:prstGeom>
-          <a:noFill/>
-          <a:ln/>
-        </p:spPr>
-        <p:txBody>
-          <a:bodyPr wrap="square" lIns="0" tIns="0" rIns="0" bIns="0" rtlCol="0" anchor="ctr"/>
-          <a:lstStyle/>
-          <a:p>
-            <a:pPr indent="0" marL="0">
-              <a:buNone/>
-            </a:pPr>
-            <a:r>
-              <a:rPr lang="en-US" sz="1150" dirty="0">
-                <a:solidFill>
-                  <a:srgbClr val="1A1A2E"/>
-                </a:solidFill>
-                <a:latin typeface="Calibri" pitchFamily="34" charset="0"/>
-                <a:ea typeface="Calibri" pitchFamily="34" charset="-122"/>
-                <a:cs typeface="Calibri" pitchFamily="34" charset="-120"/>
-              </a:rPr>
-              <a:t>AI outputs labelled with provenance. Human editorial review = the Art 50(4) exemption mechanism — the approval gate IS the compliance artifact.</a:t>
-            </a:r>
-            <a:endParaRPr lang="en-US" sz="1150" dirty="0"/>
-          </a:p>
-        </p:txBody>
-      </p:sp>
-      <p:sp>
-        <p:nvSpPr>
-          <p:cNvPr id="21" name="Shape 19"/>
-          <p:cNvSpPr/>
-          <p:nvPr/>
-        </p:nvSpPr>
-        <p:spPr>
-          <a:xfrm>
-            <a:off x="6172200" y="3749040"/>
-            <a:ext cx="5440680" cy="1965960"/>
-          </a:xfrm>
-          <a:prstGeom prst="roundRect">
-            <a:avLst>
-              <a:gd name="adj" fmla="val 2791"/>
-            </a:avLst>
-          </a:prstGeom>
-          <a:solidFill>
-            <a:srgbClr val="F4F7FC"/>
-          </a:solidFill>
-          <a:ln w="12700">
-            <a:solidFill>
-              <a:srgbClr val="CADCFC"/>
-            </a:solidFill>
-            <a:prstDash val="solid"/>
-          </a:ln>
-        </p:spPr>
-      </p:sp>
-      <p:sp>
-        <p:nvSpPr>
-          <p:cNvPr id="22" name="Text 20"/>
-          <p:cNvSpPr/>
-          <p:nvPr/>
-        </p:nvSpPr>
-        <p:spPr>
-          <a:xfrm>
-            <a:off x="6309360" y="3840480"/>
-            <a:ext cx="5166360" cy="292608"/>
-          </a:xfrm>
-          <a:prstGeom prst="rect">
-            <a:avLst/>
-          </a:prstGeom>
-          <a:noFill/>
-          <a:ln/>
-        </p:spPr>
-        <p:txBody>
-          <a:bodyPr wrap="square" lIns="0" tIns="0" rIns="0" bIns="0" rtlCol="0" anchor="ctr"/>
-          <a:lstStyle/>
-          <a:p>
-            <a:pPr indent="0" marL="0">
-              <a:buNone/>
-            </a:pPr>
-            <a:r>
-              <a:rPr lang="en-US" sz="1350" b="1" dirty="0">
-                <a:solidFill>
-                  <a:srgbClr val="1E2761"/>
-                </a:solidFill>
-                <a:latin typeface="Calibri" pitchFamily="34" charset="0"/>
-                <a:ea typeface="Calibri" pitchFamily="34" charset="-122"/>
-                <a:cs typeface="Calibri" pitchFamily="34" charset="-120"/>
-              </a:rPr>
-              <a:t>Sovereignty &amp; GDPR</a:t>
-            </a:r>
-            <a:endParaRPr lang="en-US" sz="1350" dirty="0"/>
-          </a:p>
-        </p:txBody>
-      </p:sp>
-      <p:sp>
-        <p:nvSpPr>
-          <p:cNvPr id="23" name="Text 21"/>
-          <p:cNvSpPr/>
-          <p:nvPr/>
-        </p:nvSpPr>
-        <p:spPr>
-          <a:xfrm>
-            <a:off x="6309360" y="4133088"/>
-            <a:ext cx="5166360" cy="1490472"/>
-          </a:xfrm>
-          <a:prstGeom prst="rect">
-            <a:avLst/>
-          </a:prstGeom>
-          <a:noFill/>
-          <a:ln/>
-        </p:spPr>
-        <p:txBody>
-          <a:bodyPr wrap="square" lIns="0" tIns="0" rIns="0" bIns="0" rtlCol="0" anchor="ctr"/>
-          <a:lstStyle/>
-          <a:p>
-            <a:pPr indent="0" marL="0">
-              <a:buNone/>
-            </a:pPr>
-            <a:r>
-              <a:rPr lang="en-US" sz="1150" dirty="0">
-                <a:solidFill>
-                  <a:srgbClr val="1A1A2E"/>
-                </a:solidFill>
-                <a:latin typeface="Calibri" pitchFamily="34" charset="0"/>
-                <a:ea typeface="Calibri" pitchFamily="34" charset="-122"/>
-                <a:cs typeface="Calibri" pitchFamily="34" charset="-120"/>
-              </a:rPr>
-              <a:t>Provider-agnostic LLM — self-hostable, EU-resident. PII masking, retention limits, workspace RLS. Sentiment on text is NOT 'emotion recognition' (Art 3(39): biometric only).</a:t>
-            </a:r>
-            <a:endParaRPr lang="en-US" sz="1150" dirty="0"/>
-          </a:p>
-        </p:txBody>
-      </p:sp>
-      <p:sp>
-        <p:nvSpPr>
-          <p:cNvPr id="24" name="Text 22"/>
-          <p:cNvSpPr/>
-          <p:nvPr/>
-        </p:nvSpPr>
-        <p:spPr>
-          <a:xfrm>
-            <a:off x="548640" y="5897880"/>
-            <a:ext cx="11064240" cy="548640"/>
-          </a:xfrm>
-          <a:prstGeom prst="rect">
-            <a:avLst/>
-          </a:prstGeom>
-          <a:noFill/>
-          <a:ln/>
-        </p:spPr>
-        <p:txBody>
-          <a:bodyPr wrap="square" rtlCol="0" anchor="ctr"/>
-          <a:lstStyle/>
-          <a:p>
-            <a:pPr indent="0" marL="0">
-              <a:buNone/>
-            </a:pPr>
-            <a:r>
-              <a:rPr lang="en-US" sz="1350" i="1" dirty="0">
-                <a:solidFill>
-                  <a:srgbClr val="5A6478"/>
-                </a:solidFill>
-                <a:latin typeface="Calibri" pitchFamily="34" charset="0"/>
-                <a:ea typeface="Calibri" pitchFamily="34" charset="-122"/>
-                <a:cs typeface="Calibri" pitchFamily="34" charset="-120"/>
-              </a:rPr>
-              <a:t>Measured closure has three levels: operational (ticket done) → customer (reporter notified) → outcome (metric moved). "Closed" means the third.</a:t>
-            </a:r>
-            <a:endParaRPr lang="en-US" sz="1350" dirty="0"/>
           </a:p>
         </p:txBody>
       </p:sp>
@@ -10363,7 +14025,7 @@
                 <a:ea typeface="Cambria" pitchFamily="34" charset="-122"/>
                 <a:cs typeface="Cambria" pitchFamily="34" charset="-120"/>
               </a:rPr>
-              <a:t>Evaluation: two independent streams</a:t>
+              <a:t>Data model: the loop is a schema, not a convention</a:t>
             </a:r>
             <a:endParaRPr lang="en-US" sz="3200" dirty="0"/>
           </a:p>
@@ -10402,7 +14064,7 @@
                 <a:ea typeface="Calibri" pitchFamily="34" charset="-122"/>
                 <a:cs typeface="Calibri" pitchFamily="34" charset="-120"/>
               </a:rPr>
-              <a:t>Objective accuracy × practitioner judgement — neither alone suffices</a:t>
+              <a:t>ER view (runnable DDL in diagrams/schema.sql) — contracts and learnings are first-class tables</a:t>
             </a:r>
             <a:endParaRPr lang="en-US" sz="1400" dirty="0"/>
           </a:p>
@@ -10541,6 +14203,65 @@
             <a:avLst/>
           </a:prstGeom>
           <a:solidFill>
+            <a:srgbClr val="1E2761"/>
+          </a:solidFill>
+          <a:ln/>
+        </p:spPr>
+      </p:sp>
+      <p:sp>
+        <p:nvSpPr>
+          <p:cNvPr id="9" name="Text 7"/>
+          <p:cNvSpPr/>
+          <p:nvPr/>
+        </p:nvSpPr>
+        <p:spPr>
+          <a:xfrm>
+            <a:off x="11192256" y="395935"/>
+            <a:ext cx="292608" cy="310896"/>
+          </a:xfrm>
+          <a:prstGeom prst="rect">
+            <a:avLst/>
+          </a:prstGeom>
+          <a:noFill/>
+          <a:ln/>
+        </p:spPr>
+        <p:txBody>
+          <a:bodyPr wrap="square" lIns="0" tIns="0" rIns="0" bIns="0" rtlCol="0" anchor="ctr"/>
+          <a:lstStyle/>
+          <a:p>
+            <a:pPr algn="ctr" indent="0" marL="0">
+              <a:buNone/>
+            </a:pPr>
+            <a:r>
+              <a:rPr lang="en-US" sz="1100" b="1" dirty="0">
+                <a:solidFill>
+                  <a:srgbClr val="FFFFFF"/>
+                </a:solidFill>
+                <a:latin typeface="Calibri" pitchFamily="34" charset="0"/>
+                <a:ea typeface="Calibri" pitchFamily="34" charset="-122"/>
+                <a:cs typeface="Calibri" pitchFamily="34" charset="-120"/>
+              </a:rPr>
+              <a:t>A</a:t>
+            </a:r>
+            <a:endParaRPr lang="en-US" sz="1100" dirty="0"/>
+          </a:p>
+        </p:txBody>
+      </p:sp>
+      <p:sp>
+        <p:nvSpPr>
+          <p:cNvPr id="10" name="Shape 8"/>
+          <p:cNvSpPr/>
+          <p:nvPr/>
+        </p:nvSpPr>
+        <p:spPr>
+          <a:xfrm>
+            <a:off x="11576304" y="411480"/>
+            <a:ext cx="292608" cy="292608"/>
+          </a:xfrm>
+          <a:prstGeom prst="ellipse">
+            <a:avLst/>
+          </a:prstGeom>
+          <a:solidFill>
             <a:srgbClr val="CADCFC"/>
           </a:solidFill>
           <a:ln/>
@@ -10548,65 +14269,6 @@
       </p:sp>
       <p:sp>
         <p:nvSpPr>
-          <p:cNvPr id="9" name="Text 7"/>
-          <p:cNvSpPr/>
-          <p:nvPr/>
-        </p:nvSpPr>
-        <p:spPr>
-          <a:xfrm>
-            <a:off x="11192256" y="395935"/>
-            <a:ext cx="292608" cy="310896"/>
-          </a:xfrm>
-          <a:prstGeom prst="rect">
-            <a:avLst/>
-          </a:prstGeom>
-          <a:noFill/>
-          <a:ln/>
-        </p:spPr>
-        <p:txBody>
-          <a:bodyPr wrap="square" lIns="0" tIns="0" rIns="0" bIns="0" rtlCol="0" anchor="ctr"/>
-          <a:lstStyle/>
-          <a:p>
-            <a:pPr algn="ctr" indent="0" marL="0">
-              <a:buNone/>
-            </a:pPr>
-            <a:r>
-              <a:rPr lang="en-US" sz="1100" b="1" dirty="0">
-                <a:solidFill>
-                  <a:srgbClr val="1E2761"/>
-                </a:solidFill>
-                <a:latin typeface="Calibri" pitchFamily="34" charset="0"/>
-                <a:ea typeface="Calibri" pitchFamily="34" charset="-122"/>
-                <a:cs typeface="Calibri" pitchFamily="34" charset="-120"/>
-              </a:rPr>
-              <a:t>A</a:t>
-            </a:r>
-            <a:endParaRPr lang="en-US" sz="1100" dirty="0"/>
-          </a:p>
-        </p:txBody>
-      </p:sp>
-      <p:sp>
-        <p:nvSpPr>
-          <p:cNvPr id="10" name="Shape 8"/>
-          <p:cNvSpPr/>
-          <p:nvPr/>
-        </p:nvSpPr>
-        <p:spPr>
-          <a:xfrm>
-            <a:off x="11576304" y="411480"/>
-            <a:ext cx="292608" cy="292608"/>
-          </a:xfrm>
-          <a:prstGeom prst="ellipse">
-            <a:avLst/>
-          </a:prstGeom>
-          <a:solidFill>
-            <a:srgbClr val="1E2761"/>
-          </a:solidFill>
-          <a:ln/>
-        </p:spPr>
-      </p:sp>
-      <p:sp>
-        <p:nvSpPr>
           <p:cNvPr id="11" name="Text 9"/>
           <p:cNvSpPr/>
           <p:nvPr/>
@@ -10632,7 +14294,7 @@
             <a:r>
               <a:rPr lang="en-US" sz="1100" b="1" dirty="0">
                 <a:solidFill>
-                  <a:srgbClr val="FFFFFF"/>
+                  <a:srgbClr val="1E2761"/>
                 </a:solidFill>
                 <a:latin typeface="Calibri" pitchFamily="34" charset="0"/>
                 <a:ea typeface="Calibri" pitchFamily="34" charset="-122"/>
@@ -10646,7 +14308,7 @@
       </p:sp>
       <p:pic>
         <p:nvPicPr>
-          <p:cNvPr id="12" name="Image 0" descr="/Users/olamakri/Documents/CLARA/.claude/worktrees/review-phase-a/thesis/diagrams/rendered/07_evaluation_pipeline.png">    </p:cNvPr>
+          <p:cNvPr id="12" name="Image 0" descr="/Users/olamakri/Documents/CLARA/thesis/diagrams/rendered/06_data_model_er.png">    </p:cNvPr>
           <p:cNvPicPr>
             <a:picLocks noChangeAspect="1"/>
           </p:cNvPicPr>
@@ -10660,8 +14322,8 @@
         </p:blipFill>
         <p:spPr>
           <a:xfrm>
-            <a:off x="548640" y="1600200"/>
-            <a:ext cx="9509760" cy="3703320"/>
+            <a:off x="685800" y="1371600"/>
+            <a:ext cx="2340864" cy="4892040"/>
           </a:xfrm>
           <a:prstGeom prst="rect">
             <a:avLst/>
@@ -10670,40 +14332,316 @@
       </p:pic>
       <p:sp>
         <p:nvSpPr>
-          <p:cNvPr id="13" name="Text 10"/>
-          <p:cNvSpPr/>
-          <p:nvPr/>
-        </p:nvSpPr>
-        <p:spPr>
-          <a:xfrm>
-            <a:off x="548640" y="5486400"/>
-            <a:ext cx="11064240" cy="777240"/>
-          </a:xfrm>
-          <a:prstGeom prst="rect">
-            <a:avLst/>
-          </a:prstGeom>
-          <a:noFill/>
-          <a:ln/>
-        </p:spPr>
-        <p:txBody>
-          <a:bodyPr wrap="square" rtlCol="0" anchor="ctr"/>
+          <p:cNvPr id="13" name="Shape 10"/>
+          <p:cNvSpPr/>
+          <p:nvPr/>
+        </p:nvSpPr>
+        <p:spPr>
+          <a:xfrm>
+            <a:off x="3429000" y="1554480"/>
+            <a:ext cx="8138160" cy="1371600"/>
+          </a:xfrm>
+          <a:prstGeom prst="roundRect">
+            <a:avLst>
+              <a:gd name="adj" fmla="val 4000"/>
+            </a:avLst>
+          </a:prstGeom>
+          <a:solidFill>
+            <a:srgbClr val="F4F7FC"/>
+          </a:solidFill>
+          <a:ln w="12700">
+            <a:solidFill>
+              <a:srgbClr val="CADCFC"/>
+            </a:solidFill>
+            <a:prstDash val="solid"/>
+          </a:ln>
+        </p:spPr>
+      </p:sp>
+      <p:sp>
+        <p:nvSpPr>
+          <p:cNvPr id="14" name="Text 11"/>
+          <p:cNvSpPr/>
+          <p:nvPr/>
+        </p:nvSpPr>
+        <p:spPr>
+          <a:xfrm>
+            <a:off x="3566160" y="1645920"/>
+            <a:ext cx="7863840" cy="292608"/>
+          </a:xfrm>
+          <a:prstGeom prst="rect">
+            <a:avLst/>
+          </a:prstGeom>
+          <a:noFill/>
+          <a:ln/>
+        </p:spPr>
+        <p:txBody>
+          <a:bodyPr wrap="square" lIns="0" tIns="0" rIns="0" bIns="0" rtlCol="0" anchor="ctr"/>
           <a:lstStyle/>
           <a:p>
             <a:pPr indent="0" marL="0">
               <a:buNone/>
             </a:pPr>
             <a:r>
-              <a:rPr lang="en-US" sz="1350" dirty="0">
-                <a:solidFill>
-                  <a:srgbClr val="5A6478"/>
-                </a:solidFill>
-                <a:latin typeface="Calibri" pitchFamily="34" charset="0"/>
-                <a:ea typeface="Calibri" pitchFamily="34" charset="-122"/>
-                <a:cs typeface="Calibri" pitchFamily="34" charset="-120"/>
-              </a:rPr>
-              <a:t>188 real, public, paraphrased signals · 3 sectors (fintech / food delivery / B2B industrial) · EN+DE · human seed labels, authored independently of the artifact. Plus: the artifact's own committed in-repo evaluation (80-case bilingual golden set — 60 EN / 20 DE, live LLM) as convergent evidence.</a:t>
+              <a:rPr lang="en-US" sz="1350" b="1" dirty="0">
+                <a:solidFill>
+                  <a:srgbClr val="1E2761"/>
+                </a:solidFill>
+                <a:latin typeface="Calibri" pitchFamily="34" charset="0"/>
+                <a:ea typeface="Calibri" pitchFamily="34" charset="-122"/>
+                <a:cs typeface="Calibri" pitchFamily="34" charset="-120"/>
+              </a:rPr>
+              <a:t>Closure as referential integrity</a:t>
             </a:r>
             <a:endParaRPr lang="en-US" sz="1350" dirty="0"/>
+          </a:p>
+        </p:txBody>
+      </p:sp>
+      <p:sp>
+        <p:nvSpPr>
+          <p:cNvPr id="15" name="Text 12"/>
+          <p:cNvSpPr/>
+          <p:nvPr/>
+        </p:nvSpPr>
+        <p:spPr>
+          <a:xfrm>
+            <a:off x="3566160" y="1938528"/>
+            <a:ext cx="7863840" cy="896112"/>
+          </a:xfrm>
+          <a:prstGeom prst="rect">
+            <a:avLst/>
+          </a:prstGeom>
+          <a:noFill/>
+          <a:ln/>
+        </p:spPr>
+        <p:txBody>
+          <a:bodyPr wrap="square" lIns="0" tIns="0" rIns="0" bIns="0" rtlCol="0" anchor="ctr"/>
+          <a:lstStyle/>
+          <a:p>
+            <a:pPr indent="0" marL="0">
+              <a:buNone/>
+            </a:pPr>
+            <a:r>
+              <a:rPr lang="en-US" sz="1150" dirty="0">
+                <a:solidFill>
+                  <a:srgbClr val="1A1A2E"/>
+                </a:solidFill>
+                <a:latin typeface="Calibri" pitchFamily="34" charset="0"/>
+                <a:ea typeface="Calibri" pitchFamily="34" charset="-122"/>
+                <a:cs typeface="Calibri" pitchFamily="34" charset="-120"/>
+              </a:rPr>
+              <a:t>actions_log binds 1:1 to outcome_contracts AT CREATION; outcome_measurements grade closure (operational → customer → outcome). "Closed" is a row with evidence, not a status flag.</a:t>
+            </a:r>
+            <a:endParaRPr lang="en-US" sz="1150" dirty="0"/>
+          </a:p>
+        </p:txBody>
+      </p:sp>
+      <p:sp>
+        <p:nvSpPr>
+          <p:cNvPr id="16" name="Shape 13"/>
+          <p:cNvSpPr/>
+          <p:nvPr/>
+        </p:nvSpPr>
+        <p:spPr>
+          <a:xfrm>
+            <a:off x="3429000" y="3063240"/>
+            <a:ext cx="8138160" cy="1371600"/>
+          </a:xfrm>
+          <a:prstGeom prst="roundRect">
+            <a:avLst>
+              <a:gd name="adj" fmla="val 4000"/>
+            </a:avLst>
+          </a:prstGeom>
+          <a:solidFill>
+            <a:srgbClr val="F4F7FC"/>
+          </a:solidFill>
+          <a:ln w="12700">
+            <a:solidFill>
+              <a:srgbClr val="CADCFC"/>
+            </a:solidFill>
+            <a:prstDash val="solid"/>
+          </a:ln>
+        </p:spPr>
+      </p:sp>
+      <p:sp>
+        <p:nvSpPr>
+          <p:cNvPr id="17" name="Text 14"/>
+          <p:cNvSpPr/>
+          <p:nvPr/>
+        </p:nvSpPr>
+        <p:spPr>
+          <a:xfrm>
+            <a:off x="3566160" y="3154680"/>
+            <a:ext cx="7863840" cy="292608"/>
+          </a:xfrm>
+          <a:prstGeom prst="rect">
+            <a:avLst/>
+          </a:prstGeom>
+          <a:noFill/>
+          <a:ln/>
+        </p:spPr>
+        <p:txBody>
+          <a:bodyPr wrap="square" lIns="0" tIns="0" rIns="0" bIns="0" rtlCol="0" anchor="ctr"/>
+          <a:lstStyle/>
+          <a:p>
+            <a:pPr indent="0" marL="0">
+              <a:buNone/>
+            </a:pPr>
+            <a:r>
+              <a:rPr lang="en-US" sz="1350" b="1" dirty="0">
+                <a:solidFill>
+                  <a:srgbClr val="1E2761"/>
+                </a:solidFill>
+                <a:latin typeface="Calibri" pitchFamily="34" charset="0"/>
+                <a:ea typeface="Calibri" pitchFamily="34" charset="-122"/>
+                <a:cs typeface="Calibri" pitchFamily="34" charset="-120"/>
+              </a:rPr>
+              <a:t>Memory as data</a:t>
+            </a:r>
+            <a:endParaRPr lang="en-US" sz="1350" dirty="0"/>
+          </a:p>
+        </p:txBody>
+      </p:sp>
+      <p:sp>
+        <p:nvSpPr>
+          <p:cNvPr id="18" name="Text 15"/>
+          <p:cNvSpPr/>
+          <p:nvPr/>
+        </p:nvSpPr>
+        <p:spPr>
+          <a:xfrm>
+            <a:off x="3566160" y="3447288"/>
+            <a:ext cx="7863840" cy="896112"/>
+          </a:xfrm>
+          <a:prstGeom prst="rect">
+            <a:avLst/>
+          </a:prstGeom>
+          <a:noFill/>
+          <a:ln/>
+        </p:spPr>
+        <p:txBody>
+          <a:bodyPr wrap="square" lIns="0" tIns="0" rIns="0" bIns="0" rtlCol="0" anchor="ctr"/>
+          <a:lstStyle/>
+          <a:p>
+            <a:pPr indent="0" marL="0">
+              <a:buNone/>
+            </a:pPr>
+            <a:r>
+              <a:rPr lang="en-US" sz="1150" dirty="0">
+                <a:solidFill>
+                  <a:srgbClr val="1A1A2E"/>
+                </a:solidFill>
+                <a:latin typeface="Calibri" pitchFamily="34" charset="0"/>
+                <a:ea typeface="Calibri" pitchFamily="34" charset="-122"/>
+                <a:cs typeface="Calibri" pitchFamily="34" charset="-120"/>
+              </a:rPr>
+              <a:t>ab_learnings carry base_confidence + half_life_days — decay is computed from columns, auditable by query. Taxonomy nodes carry the same decay fields for theme drift.</a:t>
+            </a:r>
+            <a:endParaRPr lang="en-US" sz="1150" dirty="0"/>
+          </a:p>
+        </p:txBody>
+      </p:sp>
+      <p:sp>
+        <p:nvSpPr>
+          <p:cNvPr id="19" name="Shape 16"/>
+          <p:cNvSpPr/>
+          <p:nvPr/>
+        </p:nvSpPr>
+        <p:spPr>
+          <a:xfrm>
+            <a:off x="3429000" y="4572000"/>
+            <a:ext cx="8138160" cy="1371600"/>
+          </a:xfrm>
+          <a:prstGeom prst="roundRect">
+            <a:avLst>
+              <a:gd name="adj" fmla="val 4000"/>
+            </a:avLst>
+          </a:prstGeom>
+          <a:solidFill>
+            <a:srgbClr val="F4F7FC"/>
+          </a:solidFill>
+          <a:ln w="12700">
+            <a:solidFill>
+              <a:srgbClr val="CADCFC"/>
+            </a:solidFill>
+            <a:prstDash val="solid"/>
+          </a:ln>
+        </p:spPr>
+      </p:sp>
+      <p:sp>
+        <p:nvSpPr>
+          <p:cNvPr id="20" name="Text 17"/>
+          <p:cNvSpPr/>
+          <p:nvPr/>
+        </p:nvSpPr>
+        <p:spPr>
+          <a:xfrm>
+            <a:off x="3566160" y="4663440"/>
+            <a:ext cx="7863840" cy="292608"/>
+          </a:xfrm>
+          <a:prstGeom prst="rect">
+            <a:avLst/>
+          </a:prstGeom>
+          <a:noFill/>
+          <a:ln/>
+        </p:spPr>
+        <p:txBody>
+          <a:bodyPr wrap="square" lIns="0" tIns="0" rIns="0" bIns="0" rtlCol="0" anchor="ctr"/>
+          <a:lstStyle/>
+          <a:p>
+            <a:pPr indent="0" marL="0">
+              <a:buNone/>
+            </a:pPr>
+            <a:r>
+              <a:rPr lang="en-US" sz="1350" b="1" dirty="0">
+                <a:solidFill>
+                  <a:srgbClr val="1E2761"/>
+                </a:solidFill>
+                <a:latin typeface="Calibri" pitchFamily="34" charset="0"/>
+                <a:ea typeface="Calibri" pitchFamily="34" charset="-122"/>
+                <a:cs typeface="Calibri" pitchFamily="34" charset="-120"/>
+              </a:rPr>
+              <a:t>Tenancy &amp; evolution</a:t>
+            </a:r>
+            <a:endParaRPr lang="en-US" sz="1350" dirty="0"/>
+          </a:p>
+        </p:txBody>
+      </p:sp>
+      <p:sp>
+        <p:nvSpPr>
+          <p:cNvPr id="21" name="Text 18"/>
+          <p:cNvSpPr/>
+          <p:nvPr/>
+        </p:nvSpPr>
+        <p:spPr>
+          <a:xfrm>
+            <a:off x="3566160" y="4956048"/>
+            <a:ext cx="7863840" cy="896112"/>
+          </a:xfrm>
+          <a:prstGeom prst="rect">
+            <a:avLst/>
+          </a:prstGeom>
+          <a:noFill/>
+          <a:ln/>
+        </p:spPr>
+        <p:txBody>
+          <a:bodyPr wrap="square" lIns="0" tIns="0" rIns="0" bIns="0" rtlCol="0" anchor="ctr"/>
+          <a:lstStyle/>
+          <a:p>
+            <a:pPr indent="0" marL="0">
+              <a:buNone/>
+            </a:pPr>
+            <a:r>
+              <a:rPr lang="en-US" sz="1150" dirty="0">
+                <a:solidFill>
+                  <a:srgbClr val="1A1A2E"/>
+                </a:solidFill>
+                <a:latin typeface="Calibri" pitchFamily="34" charset="0"/>
+                <a:ea typeface="Calibri" pitchFamily="34" charset="-122"/>
+                <a:cs typeface="Calibri" pitchFamily="34" charset="-120"/>
+              </a:rPr>
+              <a:t>Every table workspace-scoped, enforced by Postgres RLS below the app layer. Domain objects as jsonb payloads + promoted columns — one store contract across SQLite (dev), in-memory (tests), Postgres (prod).</a:t>
+            </a:r>
+            <a:endParaRPr lang="en-US" sz="1150" dirty="0"/>
           </a:p>
         </p:txBody>
       </p:sp>
@@ -10765,7 +14703,7 @@
                 <a:ea typeface="Cambria" pitchFamily="34" charset="-122"/>
                 <a:cs typeface="Cambria" pitchFamily="34" charset="-120"/>
               </a:rPr>
-              <a:t>Result 1: triage accuracy is method-dependent</a:t>
+              <a:t>Five design decisions the literature doesn't resolve</a:t>
             </a:r>
             <a:endParaRPr lang="en-US" sz="3200" dirty="0"/>
           </a:p>
@@ -10804,7 +14742,7 @@
                 <a:ea typeface="Calibri" pitchFamily="34" charset="-122"/>
                 <a:cs typeface="Calibri" pitchFamily="34" charset="-120"/>
               </a:rPr>
-              <a:t>Naive methods fail on real multilingual feedback; learned models are necessary</a:t>
+              <a:t>Each implemented, grounded, and stated with its cost</a:t>
             </a:r>
             <a:endParaRPr lang="en-US" sz="1400" dirty="0"/>
           </a:p>
@@ -10943,6 +14881,65 @@
             <a:avLst/>
           </a:prstGeom>
           <a:solidFill>
+            <a:srgbClr val="1E2761"/>
+          </a:solidFill>
+          <a:ln/>
+        </p:spPr>
+      </p:sp>
+      <p:sp>
+        <p:nvSpPr>
+          <p:cNvPr id="9" name="Text 7"/>
+          <p:cNvSpPr/>
+          <p:nvPr/>
+        </p:nvSpPr>
+        <p:spPr>
+          <a:xfrm>
+            <a:off x="11192256" y="395935"/>
+            <a:ext cx="292608" cy="310896"/>
+          </a:xfrm>
+          <a:prstGeom prst="rect">
+            <a:avLst/>
+          </a:prstGeom>
+          <a:noFill/>
+          <a:ln/>
+        </p:spPr>
+        <p:txBody>
+          <a:bodyPr wrap="square" lIns="0" tIns="0" rIns="0" bIns="0" rtlCol="0" anchor="ctr"/>
+          <a:lstStyle/>
+          <a:p>
+            <a:pPr algn="ctr" indent="0" marL="0">
+              <a:buNone/>
+            </a:pPr>
+            <a:r>
+              <a:rPr lang="en-US" sz="1100" b="1" dirty="0">
+                <a:solidFill>
+                  <a:srgbClr val="FFFFFF"/>
+                </a:solidFill>
+                <a:latin typeface="Calibri" pitchFamily="34" charset="0"/>
+                <a:ea typeface="Calibri" pitchFamily="34" charset="-122"/>
+                <a:cs typeface="Calibri" pitchFamily="34" charset="-120"/>
+              </a:rPr>
+              <a:t>A</a:t>
+            </a:r>
+            <a:endParaRPr lang="en-US" sz="1100" dirty="0"/>
+          </a:p>
+        </p:txBody>
+      </p:sp>
+      <p:sp>
+        <p:nvSpPr>
+          <p:cNvPr id="10" name="Shape 8"/>
+          <p:cNvSpPr/>
+          <p:nvPr/>
+        </p:nvSpPr>
+        <p:spPr>
+          <a:xfrm>
+            <a:off x="11576304" y="411480"/>
+            <a:ext cx="292608" cy="292608"/>
+          </a:xfrm>
+          <a:prstGeom prst="ellipse">
+            <a:avLst/>
+          </a:prstGeom>
+          <a:solidFill>
             <a:srgbClr val="CADCFC"/>
           </a:solidFill>
           <a:ln/>
@@ -10950,13 +14947,13 @@
       </p:sp>
       <p:sp>
         <p:nvSpPr>
-          <p:cNvPr id="9" name="Text 7"/>
-          <p:cNvSpPr/>
-          <p:nvPr/>
-        </p:nvSpPr>
-        <p:spPr>
-          <a:xfrm>
-            <a:off x="11192256" y="395935"/>
+          <p:cNvPr id="11" name="Text 9"/>
+          <p:cNvSpPr/>
+          <p:nvPr/>
+        </p:nvSpPr>
+        <p:spPr>
+          <a:xfrm>
+            <a:off x="11576304" y="395935"/>
             <a:ext cx="292608" cy="310896"/>
           </a:xfrm>
           <a:prstGeom prst="rect">
@@ -10981,7 +14978,7 @@
                 <a:ea typeface="Calibri" pitchFamily="34" charset="-122"/>
                 <a:cs typeface="Calibri" pitchFamily="34" charset="-120"/>
               </a:rPr>
-              <a:t>A</a:t>
+              <a:t>L</a:t>
             </a:r>
             <a:endParaRPr lang="en-US" sz="1100" dirty="0"/>
           </a:p>
@@ -10989,17 +14986,544 @@
       </p:sp>
       <p:sp>
         <p:nvSpPr>
-          <p:cNvPr id="10" name="Shape 8"/>
-          <p:cNvSpPr/>
-          <p:nvPr/>
-        </p:nvSpPr>
-        <p:spPr>
-          <a:xfrm>
-            <a:off x="11576304" y="411480"/>
-            <a:ext cx="292608" cy="292608"/>
-          </a:xfrm>
-          <a:prstGeom prst="ellipse">
-            <a:avLst/>
+          <p:cNvPr id="12" name="Shape 10"/>
+          <p:cNvSpPr/>
+          <p:nvPr/>
+        </p:nvSpPr>
+        <p:spPr>
+          <a:xfrm>
+            <a:off x="548640" y="1600200"/>
+            <a:ext cx="3593592" cy="1965960"/>
+          </a:xfrm>
+          <a:prstGeom prst="roundRect">
+            <a:avLst>
+              <a:gd name="adj" fmla="val 2791"/>
+            </a:avLst>
+          </a:prstGeom>
+          <a:solidFill>
+            <a:srgbClr val="F4F7FC"/>
+          </a:solidFill>
+          <a:ln w="12700">
+            <a:solidFill>
+              <a:srgbClr val="CADCFC"/>
+            </a:solidFill>
+            <a:prstDash val="solid"/>
+          </a:ln>
+        </p:spPr>
+      </p:sp>
+      <p:sp>
+        <p:nvSpPr>
+          <p:cNvPr id="13" name="Text 11"/>
+          <p:cNvSpPr/>
+          <p:nvPr/>
+        </p:nvSpPr>
+        <p:spPr>
+          <a:xfrm>
+            <a:off x="685800" y="1691640"/>
+            <a:ext cx="3319272" cy="292608"/>
+          </a:xfrm>
+          <a:prstGeom prst="rect">
+            <a:avLst/>
+          </a:prstGeom>
+          <a:noFill/>
+          <a:ln/>
+        </p:spPr>
+        <p:txBody>
+          <a:bodyPr wrap="square" lIns="0" tIns="0" rIns="0" bIns="0" rtlCol="0" anchor="ctr"/>
+          <a:lstStyle/>
+          <a:p>
+            <a:pPr indent="0" marL="0">
+              <a:buNone/>
+            </a:pPr>
+            <a:r>
+              <a:rPr lang="en-US" sz="1350" b="1" dirty="0">
+                <a:solidFill>
+                  <a:srgbClr val="1E2761"/>
+                </a:solidFill>
+                <a:latin typeface="Calibri" pitchFamily="34" charset="0"/>
+                <a:ea typeface="Calibri" pitchFamily="34" charset="-122"/>
+                <a:cs typeface="Calibri" pitchFamily="34" charset="-120"/>
+              </a:rPr>
+              <a:t>1 · Rule conflict resolution</a:t>
+            </a:r>
+            <a:endParaRPr lang="en-US" sz="1350" dirty="0"/>
+          </a:p>
+        </p:txBody>
+      </p:sp>
+      <p:sp>
+        <p:nvSpPr>
+          <p:cNvPr id="14" name="Text 12"/>
+          <p:cNvSpPr/>
+          <p:nvPr/>
+        </p:nvSpPr>
+        <p:spPr>
+          <a:xfrm>
+            <a:off x="685800" y="1984248"/>
+            <a:ext cx="3319272" cy="1490472"/>
+          </a:xfrm>
+          <a:prstGeom prst="rect">
+            <a:avLst/>
+          </a:prstGeom>
+          <a:noFill/>
+          <a:ln/>
+        </p:spPr>
+        <p:txBody>
+          <a:bodyPr wrap="square" lIns="0" tIns="0" rIns="0" bIns="0" rtlCol="0" anchor="ctr"/>
+          <a:lstStyle/>
+          <a:p>
+            <a:pPr indent="0" marL="0">
+              <a:buNone/>
+            </a:pPr>
+            <a:r>
+              <a:rPr lang="en-US" sz="1150" dirty="0">
+                <a:solidFill>
+                  <a:srgbClr val="1A1A2E"/>
+                </a:solidFill>
+                <a:latin typeface="Calibri" pitchFamily="34" charset="0"/>
+                <a:ea typeface="Calibri" pitchFamily="34" charset="-122"/>
+                <a:cs typeface="Calibri" pitchFamily="34" charset="-120"/>
+              </a:rPr>
+              <a:t>Priority → specificity → action-type dedupe; superseded rules logged. Cost: config debt — entrenches a wrong rule as faithfully as a right one.</a:t>
+            </a:r>
+            <a:endParaRPr lang="en-US" sz="1150" dirty="0"/>
+          </a:p>
+        </p:txBody>
+      </p:sp>
+      <p:sp>
+        <p:nvSpPr>
+          <p:cNvPr id="15" name="Shape 13"/>
+          <p:cNvSpPr/>
+          <p:nvPr/>
+        </p:nvSpPr>
+        <p:spPr>
+          <a:xfrm>
+            <a:off x="4325112" y="1600200"/>
+            <a:ext cx="3593592" cy="1965960"/>
+          </a:xfrm>
+          <a:prstGeom prst="roundRect">
+            <a:avLst>
+              <a:gd name="adj" fmla="val 2791"/>
+            </a:avLst>
+          </a:prstGeom>
+          <a:solidFill>
+            <a:srgbClr val="F4F7FC"/>
+          </a:solidFill>
+          <a:ln w="12700">
+            <a:solidFill>
+              <a:srgbClr val="CADCFC"/>
+            </a:solidFill>
+            <a:prstDash val="solid"/>
+          </a:ln>
+        </p:spPr>
+      </p:sp>
+      <p:sp>
+        <p:nvSpPr>
+          <p:cNvPr id="16" name="Text 14"/>
+          <p:cNvSpPr/>
+          <p:nvPr/>
+        </p:nvSpPr>
+        <p:spPr>
+          <a:xfrm>
+            <a:off x="4462272" y="1691640"/>
+            <a:ext cx="3319272" cy="292608"/>
+          </a:xfrm>
+          <a:prstGeom prst="rect">
+            <a:avLst/>
+          </a:prstGeom>
+          <a:noFill/>
+          <a:ln/>
+        </p:spPr>
+        <p:txBody>
+          <a:bodyPr wrap="square" lIns="0" tIns="0" rIns="0" bIns="0" rtlCol="0" anchor="ctr"/>
+          <a:lstStyle/>
+          <a:p>
+            <a:pPr indent="0" marL="0">
+              <a:buNone/>
+            </a:pPr>
+            <a:r>
+              <a:rPr lang="en-US" sz="1350" b="1" dirty="0">
+                <a:solidFill>
+                  <a:srgbClr val="1E2761"/>
+                </a:solidFill>
+                <a:latin typeface="Calibri" pitchFamily="34" charset="0"/>
+                <a:ea typeface="Calibri" pitchFamily="34" charset="-122"/>
+                <a:cs typeface="Calibri" pitchFamily="34" charset="-120"/>
+              </a:rPr>
+              <a:t>2 · Confidence decay in learnings</a:t>
+            </a:r>
+            <a:endParaRPr lang="en-US" sz="1350" dirty="0"/>
+          </a:p>
+        </p:txBody>
+      </p:sp>
+      <p:sp>
+        <p:nvSpPr>
+          <p:cNvPr id="17" name="Text 15"/>
+          <p:cNvSpPr/>
+          <p:nvPr/>
+        </p:nvSpPr>
+        <p:spPr>
+          <a:xfrm>
+            <a:off x="4462272" y="1984248"/>
+            <a:ext cx="3319272" cy="1490472"/>
+          </a:xfrm>
+          <a:prstGeom prst="rect">
+            <a:avLst/>
+          </a:prstGeom>
+          <a:noFill/>
+          <a:ln/>
+        </p:spPr>
+        <p:txBody>
+          <a:bodyPr wrap="square" lIns="0" tIns="0" rIns="0" bIns="0" rtlCol="0" anchor="ctr"/>
+          <a:lstStyle/>
+          <a:p>
+            <a:pPr indent="0" marL="0">
+              <a:buNone/>
+            </a:pPr>
+            <a:r>
+              <a:rPr lang="en-US" sz="1150" dirty="0">
+                <a:solidFill>
+                  <a:srgbClr val="1A1A2E"/>
+                </a:solidFill>
+                <a:latin typeface="Calibri" pitchFamily="34" charset="0"/>
+                <a:ea typeface="Calibri" pitchFamily="34" charset="-122"/>
+                <a:cs typeface="Calibri" pitchFamily="34" charset="-120"/>
+              </a:rPr>
+              <a:t>Memory as perishable: base × 0.5^(age/half-life). Prior art bounded: MemoryBank decays chat memory; ours decays ACTION-OUTCOME evidence. Cost: the half-life is a guess.</a:t>
+            </a:r>
+            <a:endParaRPr lang="en-US" sz="1150" dirty="0"/>
+          </a:p>
+        </p:txBody>
+      </p:sp>
+      <p:sp>
+        <p:nvSpPr>
+          <p:cNvPr id="18" name="Shape 16"/>
+          <p:cNvSpPr/>
+          <p:nvPr/>
+        </p:nvSpPr>
+        <p:spPr>
+          <a:xfrm>
+            <a:off x="8101584" y="1600200"/>
+            <a:ext cx="3593592" cy="1965960"/>
+          </a:xfrm>
+          <a:prstGeom prst="roundRect">
+            <a:avLst>
+              <a:gd name="adj" fmla="val 2791"/>
+            </a:avLst>
+          </a:prstGeom>
+          <a:solidFill>
+            <a:srgbClr val="F4F7FC"/>
+          </a:solidFill>
+          <a:ln w="12700">
+            <a:solidFill>
+              <a:srgbClr val="CADCFC"/>
+            </a:solidFill>
+            <a:prstDash val="solid"/>
+          </a:ln>
+        </p:spPr>
+      </p:sp>
+      <p:sp>
+        <p:nvSpPr>
+          <p:cNvPr id="19" name="Text 17"/>
+          <p:cNvSpPr/>
+          <p:nvPr/>
+        </p:nvSpPr>
+        <p:spPr>
+          <a:xfrm>
+            <a:off x="8238744" y="1691640"/>
+            <a:ext cx="3319272" cy="292608"/>
+          </a:xfrm>
+          <a:prstGeom prst="rect">
+            <a:avLst/>
+          </a:prstGeom>
+          <a:noFill/>
+          <a:ln/>
+        </p:spPr>
+        <p:txBody>
+          <a:bodyPr wrap="square" lIns="0" tIns="0" rIns="0" bIns="0" rtlCol="0" anchor="ctr"/>
+          <a:lstStyle/>
+          <a:p>
+            <a:pPr indent="0" marL="0">
+              <a:buNone/>
+            </a:pPr>
+            <a:r>
+              <a:rPr lang="en-US" sz="1350" b="1" dirty="0">
+                <a:solidFill>
+                  <a:srgbClr val="1E2761"/>
+                </a:solidFill>
+                <a:latin typeface="Calibri" pitchFamily="34" charset="0"/>
+                <a:ea typeface="Calibri" pitchFamily="34" charset="-122"/>
+                <a:cs typeface="Calibri" pitchFamily="34" charset="-120"/>
+              </a:rPr>
+              <a:t>3 · Cross-signal severity</a:t>
+            </a:r>
+            <a:endParaRPr lang="en-US" sz="1350" dirty="0"/>
+          </a:p>
+        </p:txBody>
+      </p:sp>
+      <p:sp>
+        <p:nvSpPr>
+          <p:cNvPr id="20" name="Text 18"/>
+          <p:cNvSpPr/>
+          <p:nvPr/>
+        </p:nvSpPr>
+        <p:spPr>
+          <a:xfrm>
+            <a:off x="8238744" y="1984248"/>
+            <a:ext cx="3319272" cy="1490472"/>
+          </a:xfrm>
+          <a:prstGeom prst="rect">
+            <a:avLst/>
+          </a:prstGeom>
+          <a:noFill/>
+          <a:ln/>
+        </p:spPr>
+        <p:txBody>
+          <a:bodyPr wrap="square" lIns="0" tIns="0" rIns="0" bIns="0" rtlCol="0" anchor="ctr"/>
+          <a:lstStyle/>
+          <a:p>
+            <a:pPr indent="0" marL="0">
+              <a:buNone/>
+            </a:pPr>
+            <a:r>
+              <a:rPr lang="en-US" sz="1150" dirty="0">
+                <a:solidFill>
+                  <a:srgbClr val="1A1A2E"/>
+                </a:solidFill>
+                <a:latin typeface="Calibri" pitchFamily="34" charset="0"/>
+                <a:ea typeface="Calibri" pitchFamily="34" charset="-122"/>
+                <a:cs typeface="Calibri" pitchFamily="34" charset="-120"/>
+              </a:rPr>
+              <a:t>Severity from the corroborating SET (urgency, volume, sentiment), not the loudest voice. Cost: can bury the rare catastrophic single signal — needs an override.</a:t>
+            </a:r>
+            <a:endParaRPr lang="en-US" sz="1150" dirty="0"/>
+          </a:p>
+        </p:txBody>
+      </p:sp>
+      <p:sp>
+        <p:nvSpPr>
+          <p:cNvPr id="21" name="Shape 19"/>
+          <p:cNvSpPr/>
+          <p:nvPr/>
+        </p:nvSpPr>
+        <p:spPr>
+          <a:xfrm>
+            <a:off x="548640" y="3749040"/>
+            <a:ext cx="3593592" cy="1965960"/>
+          </a:xfrm>
+          <a:prstGeom prst="roundRect">
+            <a:avLst>
+              <a:gd name="adj" fmla="val 2791"/>
+            </a:avLst>
+          </a:prstGeom>
+          <a:solidFill>
+            <a:srgbClr val="F4F7FC"/>
+          </a:solidFill>
+          <a:ln w="12700">
+            <a:solidFill>
+              <a:srgbClr val="CADCFC"/>
+            </a:solidFill>
+            <a:prstDash val="solid"/>
+          </a:ln>
+        </p:spPr>
+      </p:sp>
+      <p:sp>
+        <p:nvSpPr>
+          <p:cNvPr id="22" name="Text 20"/>
+          <p:cNvSpPr/>
+          <p:nvPr/>
+        </p:nvSpPr>
+        <p:spPr>
+          <a:xfrm>
+            <a:off x="685800" y="3840480"/>
+            <a:ext cx="3319272" cy="292608"/>
+          </a:xfrm>
+          <a:prstGeom prst="rect">
+            <a:avLst/>
+          </a:prstGeom>
+          <a:noFill/>
+          <a:ln/>
+        </p:spPr>
+        <p:txBody>
+          <a:bodyPr wrap="square" lIns="0" tIns="0" rIns="0" bIns="0" rtlCol="0" anchor="ctr"/>
+          <a:lstStyle/>
+          <a:p>
+            <a:pPr indent="0" marL="0">
+              <a:buNone/>
+            </a:pPr>
+            <a:r>
+              <a:rPr lang="en-US" sz="1350" b="1" dirty="0">
+                <a:solidFill>
+                  <a:srgbClr val="1E2761"/>
+                </a:solidFill>
+                <a:latin typeface="Calibri" pitchFamily="34" charset="0"/>
+                <a:ea typeface="Calibri" pitchFamily="34" charset="-122"/>
+                <a:cs typeface="Calibri" pitchFamily="34" charset="-120"/>
+              </a:rPr>
+              <a:t>4 · Past-learnings retrieval</a:t>
+            </a:r>
+            <a:endParaRPr lang="en-US" sz="1350" dirty="0"/>
+          </a:p>
+        </p:txBody>
+      </p:sp>
+      <p:sp>
+        <p:nvSpPr>
+          <p:cNvPr id="23" name="Text 21"/>
+          <p:cNvSpPr/>
+          <p:nvPr/>
+        </p:nvSpPr>
+        <p:spPr>
+          <a:xfrm>
+            <a:off x="685800" y="4133088"/>
+            <a:ext cx="3319272" cy="1490472"/>
+          </a:xfrm>
+          <a:prstGeom prst="rect">
+            <a:avLst/>
+          </a:prstGeom>
+          <a:noFill/>
+          <a:ln/>
+        </p:spPr>
+        <p:txBody>
+          <a:bodyPr wrap="square" lIns="0" tIns="0" rIns="0" bIns="0" rtlCol="0" anchor="ctr"/>
+          <a:lstStyle/>
+          <a:p>
+            <a:pPr indent="0" marL="0">
+              <a:buNone/>
+            </a:pPr>
+            <a:r>
+              <a:rPr lang="en-US" sz="1150" dirty="0">
+                <a:solidFill>
+                  <a:srgbClr val="1A1A2E"/>
+                </a:solidFill>
+                <a:latin typeface="Calibri" pitchFamily="34" charset="0"/>
+                <a:ea typeface="Calibri" pitchFamily="34" charset="-122"/>
+                <a:cs typeface="Calibri" pitchFamily="34" charset="-120"/>
+              </a:rPr>
+              <a:t>Decayed-confidence retrieval into new decisions (CBR lineage). Cost: retrieval quality gates usefulness.</a:t>
+            </a:r>
+            <a:endParaRPr lang="en-US" sz="1150" dirty="0"/>
+          </a:p>
+        </p:txBody>
+      </p:sp>
+      <p:sp>
+        <p:nvSpPr>
+          <p:cNvPr id="24" name="Shape 22"/>
+          <p:cNvSpPr/>
+          <p:nvPr/>
+        </p:nvSpPr>
+        <p:spPr>
+          <a:xfrm>
+            <a:off x="4325112" y="3749040"/>
+            <a:ext cx="3593592" cy="1965960"/>
+          </a:xfrm>
+          <a:prstGeom prst="roundRect">
+            <a:avLst>
+              <a:gd name="adj" fmla="val 2791"/>
+            </a:avLst>
+          </a:prstGeom>
+          <a:solidFill>
+            <a:srgbClr val="F4F7FC"/>
+          </a:solidFill>
+          <a:ln w="12700">
+            <a:solidFill>
+              <a:srgbClr val="CADCFC"/>
+            </a:solidFill>
+            <a:prstDash val="solid"/>
+          </a:ln>
+        </p:spPr>
+      </p:sp>
+      <p:sp>
+        <p:nvSpPr>
+          <p:cNvPr id="25" name="Text 23"/>
+          <p:cNvSpPr/>
+          <p:nvPr/>
+        </p:nvSpPr>
+        <p:spPr>
+          <a:xfrm>
+            <a:off x="4462272" y="3840480"/>
+            <a:ext cx="3319272" cy="292608"/>
+          </a:xfrm>
+          <a:prstGeom prst="rect">
+            <a:avLst/>
+          </a:prstGeom>
+          <a:noFill/>
+          <a:ln/>
+        </p:spPr>
+        <p:txBody>
+          <a:bodyPr wrap="square" lIns="0" tIns="0" rIns="0" bIns="0" rtlCol="0" anchor="ctr"/>
+          <a:lstStyle/>
+          <a:p>
+            <a:pPr indent="0" marL="0">
+              <a:buNone/>
+            </a:pPr>
+            <a:r>
+              <a:rPr lang="en-US" sz="1350" b="1" dirty="0">
+                <a:solidFill>
+                  <a:srgbClr val="1E2761"/>
+                </a:solidFill>
+                <a:latin typeface="Calibri" pitchFamily="34" charset="0"/>
+                <a:ea typeface="Calibri" pitchFamily="34" charset="-122"/>
+                <a:cs typeface="Calibri" pitchFamily="34" charset="-120"/>
+              </a:rPr>
+              <a:t>5 · Per-industry profiles</a:t>
+            </a:r>
+            <a:endParaRPr lang="en-US" sz="1350" dirty="0"/>
+          </a:p>
+        </p:txBody>
+      </p:sp>
+      <p:sp>
+        <p:nvSpPr>
+          <p:cNvPr id="26" name="Text 24"/>
+          <p:cNvSpPr/>
+          <p:nvPr/>
+        </p:nvSpPr>
+        <p:spPr>
+          <a:xfrm>
+            <a:off x="4462272" y="4133088"/>
+            <a:ext cx="3319272" cy="1490472"/>
+          </a:xfrm>
+          <a:prstGeom prst="rect">
+            <a:avLst/>
+          </a:prstGeom>
+          <a:noFill/>
+          <a:ln/>
+        </p:spPr>
+        <p:txBody>
+          <a:bodyPr wrap="square" lIns="0" tIns="0" rIns="0" bIns="0" rtlCol="0" anchor="ctr"/>
+          <a:lstStyle/>
+          <a:p>
+            <a:pPr indent="0" marL="0">
+              <a:buNone/>
+            </a:pPr>
+            <a:r>
+              <a:rPr lang="en-US" sz="1150" dirty="0">
+                <a:solidFill>
+                  <a:srgbClr val="1A1A2E"/>
+                </a:solidFill>
+                <a:latin typeface="Calibri" pitchFamily="34" charset="0"/>
+                <a:ea typeface="Calibri" pitchFamily="34" charset="-122"/>
+                <a:cs typeface="Calibri" pitchFamily="34" charset="-120"/>
+              </a:rPr>
+              <a:t>Adaptation by configuration, not fine-tuning: weight overlays per sector. Cost: authored priors can encode stereotypes; inspectability is the safeguard.</a:t>
+            </a:r>
+            <a:endParaRPr lang="en-US" sz="1150" dirty="0"/>
+          </a:p>
+        </p:txBody>
+      </p:sp>
+      <p:sp>
+        <p:nvSpPr>
+          <p:cNvPr id="27" name="Shape 25"/>
+          <p:cNvSpPr/>
+          <p:nvPr/>
+        </p:nvSpPr>
+        <p:spPr>
+          <a:xfrm>
+            <a:off x="8101584" y="3749040"/>
+            <a:ext cx="3538728" cy="1965960"/>
+          </a:xfrm>
+          <a:prstGeom prst="roundRect">
+            <a:avLst>
+              <a:gd name="adj" fmla="val 2791"/>
+            </a:avLst>
           </a:prstGeom>
           <a:solidFill>
             <a:srgbClr val="1E2761"/>
@@ -11009,14 +15533,14 @@
       </p:sp>
       <p:sp>
         <p:nvSpPr>
-          <p:cNvPr id="11" name="Text 9"/>
-          <p:cNvSpPr/>
-          <p:nvPr/>
-        </p:nvSpPr>
-        <p:spPr>
-          <a:xfrm>
-            <a:off x="11576304" y="395935"/>
-            <a:ext cx="292608" cy="310896"/>
+          <p:cNvPr id="28" name="Text 26"/>
+          <p:cNvSpPr/>
+          <p:nvPr/>
+        </p:nvSpPr>
+        <p:spPr>
+          <a:xfrm>
+            <a:off x="8275320" y="3886200"/>
+            <a:ext cx="3200400" cy="320040"/>
           </a:xfrm>
           <a:prstGeom prst="rect">
             <a:avLst/>
@@ -11028,11 +15552,50 @@
           <a:bodyPr wrap="square" lIns="0" tIns="0" rIns="0" bIns="0" rtlCol="0" anchor="ctr"/>
           <a:lstStyle/>
           <a:p>
-            <a:pPr algn="ctr" indent="0" marL="0">
-              <a:buNone/>
-            </a:pPr>
-            <a:r>
-              <a:rPr lang="en-US" sz="1100" b="1" dirty="0">
+            <a:pPr indent="0" marL="0">
+              <a:buNone/>
+            </a:pPr>
+            <a:r>
+              <a:rPr lang="en-US" sz="1300" b="1" dirty="0">
+                <a:solidFill>
+                  <a:srgbClr val="CADCFC"/>
+                </a:solidFill>
+                <a:latin typeface="Calibri" pitchFamily="34" charset="0"/>
+                <a:ea typeface="Calibri" pitchFamily="34" charset="-122"/>
+                <a:cs typeface="Calibri" pitchFamily="34" charset="-120"/>
+              </a:rPr>
+              <a:t>Why costs?</a:t>
+            </a:r>
+            <a:endParaRPr lang="en-US" sz="1300" dirty="0"/>
+          </a:p>
+        </p:txBody>
+      </p:sp>
+      <p:sp>
+        <p:nvSpPr>
+          <p:cNvPr id="29" name="Text 27"/>
+          <p:cNvSpPr/>
+          <p:nvPr/>
+        </p:nvSpPr>
+        <p:spPr>
+          <a:xfrm>
+            <a:off x="8275320" y="4224528"/>
+            <a:ext cx="3200400" cy="1371600"/>
+          </a:xfrm>
+          <a:prstGeom prst="rect">
+            <a:avLst/>
+          </a:prstGeom>
+          <a:noFill/>
+          <a:ln/>
+        </p:spPr>
+        <p:txBody>
+          <a:bodyPr wrap="square" lIns="0" tIns="0" rIns="0" bIns="0" rtlCol="0" anchor="ctr"/>
+          <a:lstStyle/>
+          <a:p>
+            <a:pPr indent="0" marL="0">
+              <a:buNone/>
+            </a:pPr>
+            <a:r>
+              <a:rPr lang="en-US" sz="1250" dirty="0">
                 <a:solidFill>
                   <a:srgbClr val="FFFFFF"/>
                 </a:solidFill>
@@ -11040,978 +15603,9 @@
                 <a:ea typeface="Calibri" pitchFamily="34" charset="-122"/>
                 <a:cs typeface="Calibri" pitchFamily="34" charset="-120"/>
               </a:rPr>
-              <a:t>L</a:t>
-            </a:r>
-            <a:endParaRPr lang="en-US" sz="1100" dirty="0"/>
-          </a:p>
-        </p:txBody>
-      </p:sp>
-      <p:graphicFrame>
-        <p:nvGraphicFramePr>
-          <p:cNvPr id="9" name="Table 0"/>
-          <p:cNvGraphicFramePr>
-            <a:graphicFrameLocks noGrp="1"/>
-          </p:cNvGraphicFramePr>
-          <p:nvPr>
-            <p:extLst>
-              <p:ext uri="{D42A27DB-BD31-4B8C-83A1-F6EECF244321}">
-                <p14:modId xmlns:p14="http://schemas.microsoft.com/office/powerpoint/2010/main" val="1579011935"/>
-              </p:ext>
-            </p:extLst>
-          </p:nvPr>
-        </p:nvGraphicFramePr>
-        <p:xfrm>
-          <a:off x="548640" y="1645920"/>
-          <a:ext cx="6675120" cy="914400"/>
-        </p:xfrm>
-        <a:graphic>
-          <a:graphicData uri="http://schemas.openxmlformats.org/drawingml/2006/table">
-            <a:tbl>
-              <a:tblPr/>
-              <a:tblGrid>
-                <a:gridCol w="3108960"/>
-                <a:gridCol w="1783080"/>
-                <a:gridCol w="1783080"/>
-              </a:tblGrid>
-              <a:tr h="457200">
-                <a:tc>
-                  <a:txBody>
-                    <a:bodyPr/>
-                    <a:lstStyle/>
-                    <a:p>
-                      <a:pPr indent="0" marL="0">
-                        <a:buNone/>
-                      </a:pPr>
-                      <a:r>
-                        <a:rPr lang="en-US" sz="1300" b="1" dirty="0">
-                          <a:solidFill>
-                            <a:srgbClr val="FFFFFF"/>
-                          </a:solidFill>
-                          <a:latin typeface="Calibri" pitchFamily="34" charset="0"/>
-                          <a:ea typeface="Calibri" pitchFamily="34" charset="-122"/>
-                          <a:cs typeface="Calibri" pitchFamily="34" charset="-120"/>
-                        </a:rPr>
-                        <a:t>Predictor</a:t>
-                      </a:r>
-                      <a:endParaRPr lang="en-US" sz="1300" dirty="0">
-                        <a:latin typeface="Calibri" charset="0"/>
-                        <a:ea typeface="Calibri" charset="0"/>
-                        <a:cs typeface="Calibri" charset="0"/>
-                      </a:endParaRPr>
-                    </a:p>
-                  </a:txBody>
-                  <a:tcPr marL="91440" marR="91440" marT="45720" marB="45720" anchor="ctr">
-                    <a:lnL w="12700" cap="flat" cmpd="sng" algn="ctr">
-                      <a:solidFill>
-                        <a:srgbClr val="CADCFC"/>
-                      </a:solidFill>
-                      <a:prstDash val="solid"/>
-                      <a:round/>
-                      <a:headEnd type="none" w="med" len="med"/>
-                      <a:tailEnd type="none" w="med" len="med"/>
-                    </a:lnL>
-                    <a:lnR w="12700" cap="flat" cmpd="sng" algn="ctr">
-                      <a:solidFill>
-                        <a:srgbClr val="CADCFC"/>
-                      </a:solidFill>
-                      <a:prstDash val="solid"/>
-                      <a:round/>
-                      <a:headEnd type="none" w="med" len="med"/>
-                      <a:tailEnd type="none" w="med" len="med"/>
-                    </a:lnR>
-                    <a:lnT w="12700" cap="flat" cmpd="sng" algn="ctr">
-                      <a:solidFill>
-                        <a:srgbClr val="CADCFC"/>
-                      </a:solidFill>
-                      <a:prstDash val="solid"/>
-                      <a:round/>
-                      <a:headEnd type="none" w="med" len="med"/>
-                      <a:tailEnd type="none" w="med" len="med"/>
-                    </a:lnT>
-                    <a:lnB w="12700" cap="flat" cmpd="sng" algn="ctr">
-                      <a:solidFill>
-                        <a:srgbClr val="CADCFC"/>
-                      </a:solidFill>
-                      <a:prstDash val="solid"/>
-                      <a:round/>
-                      <a:headEnd type="none" w="med" len="med"/>
-                      <a:tailEnd type="none" w="med" len="med"/>
-                    </a:lnB>
-                    <a:solidFill>
-                      <a:srgbClr val="1E2761"/>
-                    </a:solidFill>
-                  </a:tcPr>
-                </a:tc>
-                <a:tc>
-                  <a:txBody>
-                    <a:bodyPr/>
-                    <a:lstStyle/>
-                    <a:p>
-                      <a:pPr indent="0" marL="0">
-                        <a:buNone/>
-                      </a:pPr>
-                      <a:r>
-                        <a:rPr lang="en-US" sz="1300" b="1" dirty="0">
-                          <a:solidFill>
-                            <a:srgbClr val="FFFFFF"/>
-                          </a:solidFill>
-                          <a:latin typeface="Calibri" pitchFamily="34" charset="0"/>
-                          <a:ea typeface="Calibri" pitchFamily="34" charset="-122"/>
-                          <a:cs typeface="Calibri" pitchFamily="34" charset="-120"/>
-                        </a:rPr>
-                        <a:t>Sentiment acc (n=153)</a:t>
-                      </a:r>
-                      <a:endParaRPr lang="en-US" sz="1300" dirty="0">
-                        <a:latin typeface="Calibri" charset="0"/>
-                        <a:ea typeface="Calibri" charset="0"/>
-                        <a:cs typeface="Calibri" charset="0"/>
-                      </a:endParaRPr>
-                    </a:p>
-                  </a:txBody>
-                  <a:tcPr marL="91440" marR="91440" marT="45720" marB="45720" anchor="ctr">
-                    <a:lnL w="12700" cap="flat" cmpd="sng" algn="ctr">
-                      <a:solidFill>
-                        <a:srgbClr val="CADCFC"/>
-                      </a:solidFill>
-                      <a:prstDash val="solid"/>
-                      <a:round/>
-                      <a:headEnd type="none" w="med" len="med"/>
-                      <a:tailEnd type="none" w="med" len="med"/>
-                    </a:lnL>
-                    <a:lnR w="12700" cap="flat" cmpd="sng" algn="ctr">
-                      <a:solidFill>
-                        <a:srgbClr val="CADCFC"/>
-                      </a:solidFill>
-                      <a:prstDash val="solid"/>
-                      <a:round/>
-                      <a:headEnd type="none" w="med" len="med"/>
-                      <a:tailEnd type="none" w="med" len="med"/>
-                    </a:lnR>
-                    <a:lnT w="12700" cap="flat" cmpd="sng" algn="ctr">
-                      <a:solidFill>
-                        <a:srgbClr val="CADCFC"/>
-                      </a:solidFill>
-                      <a:prstDash val="solid"/>
-                      <a:round/>
-                      <a:headEnd type="none" w="med" len="med"/>
-                      <a:tailEnd type="none" w="med" len="med"/>
-                    </a:lnT>
-                    <a:lnB w="12700" cap="flat" cmpd="sng" algn="ctr">
-                      <a:solidFill>
-                        <a:srgbClr val="CADCFC"/>
-                      </a:solidFill>
-                      <a:prstDash val="solid"/>
-                      <a:round/>
-                      <a:headEnd type="none" w="med" len="med"/>
-                      <a:tailEnd type="none" w="med" len="med"/>
-                    </a:lnB>
-                    <a:solidFill>
-                      <a:srgbClr val="1E2761"/>
-                    </a:solidFill>
-                  </a:tcPr>
-                </a:tc>
-                <a:tc>
-                  <a:txBody>
-                    <a:bodyPr/>
-                    <a:lstStyle/>
-                    <a:p>
-                      <a:pPr indent="0" marL="0">
-                        <a:buNone/>
-                      </a:pPr>
-                      <a:r>
-                        <a:rPr lang="en-US" sz="1300" b="1" dirty="0">
-                          <a:solidFill>
-                            <a:srgbClr val="FFFFFF"/>
-                          </a:solidFill>
-                          <a:latin typeface="Calibri" pitchFamily="34" charset="0"/>
-                          <a:ea typeface="Calibri" pitchFamily="34" charset="-122"/>
-                          <a:cs typeface="Calibri" pitchFamily="34" charset="-120"/>
-                        </a:rPr>
-                        <a:t>Risk macro-F1 (n=106)</a:t>
-                      </a:r>
-                      <a:endParaRPr lang="en-US" sz="1300" dirty="0">
-                        <a:latin typeface="Calibri" charset="0"/>
-                        <a:ea typeface="Calibri" charset="0"/>
-                        <a:cs typeface="Calibri" charset="0"/>
-                      </a:endParaRPr>
-                    </a:p>
-                  </a:txBody>
-                  <a:tcPr marL="91440" marR="91440" marT="45720" marB="45720" anchor="ctr">
-                    <a:lnL w="12700" cap="flat" cmpd="sng" algn="ctr">
-                      <a:solidFill>
-                        <a:srgbClr val="CADCFC"/>
-                      </a:solidFill>
-                      <a:prstDash val="solid"/>
-                      <a:round/>
-                      <a:headEnd type="none" w="med" len="med"/>
-                      <a:tailEnd type="none" w="med" len="med"/>
-                    </a:lnL>
-                    <a:lnR w="12700" cap="flat" cmpd="sng" algn="ctr">
-                      <a:solidFill>
-                        <a:srgbClr val="CADCFC"/>
-                      </a:solidFill>
-                      <a:prstDash val="solid"/>
-                      <a:round/>
-                      <a:headEnd type="none" w="med" len="med"/>
-                      <a:tailEnd type="none" w="med" len="med"/>
-                    </a:lnR>
-                    <a:lnT w="12700" cap="flat" cmpd="sng" algn="ctr">
-                      <a:solidFill>
-                        <a:srgbClr val="CADCFC"/>
-                      </a:solidFill>
-                      <a:prstDash val="solid"/>
-                      <a:round/>
-                      <a:headEnd type="none" w="med" len="med"/>
-                      <a:tailEnd type="none" w="med" len="med"/>
-                    </a:lnT>
-                    <a:lnB w="12700" cap="flat" cmpd="sng" algn="ctr">
-                      <a:solidFill>
-                        <a:srgbClr val="CADCFC"/>
-                      </a:solidFill>
-                      <a:prstDash val="solid"/>
-                      <a:round/>
-                      <a:headEnd type="none" w="med" len="med"/>
-                      <a:tailEnd type="none" w="med" len="med"/>
-                    </a:lnB>
-                    <a:solidFill>
-                      <a:srgbClr val="1E2761"/>
-                    </a:solidFill>
-                  </a:tcPr>
-                </a:tc>
-              </a:tr>
-              <a:tr h="457200">
-                <a:tc>
-                  <a:txBody>
-                    <a:bodyPr/>
-                    <a:lstStyle/>
-                    <a:p>
-                      <a:pPr indent="0" marL="0">
-                        <a:buNone/>
-                      </a:pPr>
-                      <a:r>
-                        <a:rPr lang="en-US" sz="1300" dirty="0">
-                          <a:solidFill>
-                            <a:srgbClr val="000000"/>
-                          </a:solidFill>
-                          <a:latin typeface="Calibri" pitchFamily="34" charset="0"/>
-                          <a:ea typeface="Calibri" pitchFamily="34" charset="-122"/>
-                          <a:cs typeface="Calibri" pitchFamily="34" charset="-120"/>
-                        </a:rPr>
-                        <a:t>Lexicon / keyword floor</a:t>
-                      </a:r>
-                      <a:endParaRPr lang="en-US" sz="1300" dirty="0">
-                        <a:latin typeface="Calibri" charset="0"/>
-                        <a:ea typeface="Calibri" charset="0"/>
-                        <a:cs typeface="Calibri" charset="0"/>
-                      </a:endParaRPr>
-                    </a:p>
-                  </a:txBody>
-                  <a:tcPr marL="91440" marR="91440" marT="45720" marB="45720" anchor="ctr">
-                    <a:lnL w="12700" cap="flat" cmpd="sng" algn="ctr">
-                      <a:solidFill>
-                        <a:srgbClr val="CADCFC"/>
-                      </a:solidFill>
-                      <a:prstDash val="solid"/>
-                      <a:round/>
-                      <a:headEnd type="none" w="med" len="med"/>
-                      <a:tailEnd type="none" w="med" len="med"/>
-                    </a:lnL>
-                    <a:lnR w="12700" cap="flat" cmpd="sng" algn="ctr">
-                      <a:solidFill>
-                        <a:srgbClr val="CADCFC"/>
-                      </a:solidFill>
-                      <a:prstDash val="solid"/>
-                      <a:round/>
-                      <a:headEnd type="none" w="med" len="med"/>
-                      <a:tailEnd type="none" w="med" len="med"/>
-                    </a:lnR>
-                    <a:lnT w="12700" cap="flat" cmpd="sng" algn="ctr">
-                      <a:solidFill>
-                        <a:srgbClr val="CADCFC"/>
-                      </a:solidFill>
-                      <a:prstDash val="solid"/>
-                      <a:round/>
-                      <a:headEnd type="none" w="med" len="med"/>
-                      <a:tailEnd type="none" w="med" len="med"/>
-                    </a:lnT>
-                    <a:lnB w="12700" cap="flat" cmpd="sng" algn="ctr">
-                      <a:solidFill>
-                        <a:srgbClr val="CADCFC"/>
-                      </a:solidFill>
-                      <a:prstDash val="solid"/>
-                      <a:round/>
-                      <a:headEnd type="none" w="med" len="med"/>
-                      <a:tailEnd type="none" w="med" len="med"/>
-                    </a:lnB>
-                  </a:tcPr>
-                </a:tc>
-                <a:tc>
-                  <a:txBody>
-                    <a:bodyPr/>
-                    <a:lstStyle/>
-                    <a:p>
-                      <a:pPr indent="0" marL="0">
-                        <a:buNone/>
-                      </a:pPr>
-                      <a:r>
-                        <a:rPr lang="en-US" sz="1300" dirty="0">
-                          <a:solidFill>
-                            <a:srgbClr val="000000"/>
-                          </a:solidFill>
-                          <a:latin typeface="Calibri" pitchFamily="34" charset="0"/>
-                          <a:ea typeface="Calibri" pitchFamily="34" charset="-122"/>
-                          <a:cs typeface="Calibri" pitchFamily="34" charset="-120"/>
-                        </a:rPr>
-                        <a:t>0.37</a:t>
-                      </a:r>
-                      <a:endParaRPr lang="en-US" sz="1300" dirty="0">
-                        <a:latin typeface="Calibri" charset="0"/>
-                        <a:ea typeface="Calibri" charset="0"/>
-                        <a:cs typeface="Calibri" charset="0"/>
-                      </a:endParaRPr>
-                    </a:p>
-                  </a:txBody>
-                  <a:tcPr marL="91440" marR="91440" marT="45720" marB="45720" anchor="ctr">
-                    <a:lnL w="12700" cap="flat" cmpd="sng" algn="ctr">
-                      <a:solidFill>
-                        <a:srgbClr val="CADCFC"/>
-                      </a:solidFill>
-                      <a:prstDash val="solid"/>
-                      <a:round/>
-                      <a:headEnd type="none" w="med" len="med"/>
-                      <a:tailEnd type="none" w="med" len="med"/>
-                    </a:lnL>
-                    <a:lnR w="12700" cap="flat" cmpd="sng" algn="ctr">
-                      <a:solidFill>
-                        <a:srgbClr val="CADCFC"/>
-                      </a:solidFill>
-                      <a:prstDash val="solid"/>
-                      <a:round/>
-                      <a:headEnd type="none" w="med" len="med"/>
-                      <a:tailEnd type="none" w="med" len="med"/>
-                    </a:lnR>
-                    <a:lnT w="12700" cap="flat" cmpd="sng" algn="ctr">
-                      <a:solidFill>
-                        <a:srgbClr val="CADCFC"/>
-                      </a:solidFill>
-                      <a:prstDash val="solid"/>
-                      <a:round/>
-                      <a:headEnd type="none" w="med" len="med"/>
-                      <a:tailEnd type="none" w="med" len="med"/>
-                    </a:lnT>
-                    <a:lnB w="12700" cap="flat" cmpd="sng" algn="ctr">
-                      <a:solidFill>
-                        <a:srgbClr val="CADCFC"/>
-                      </a:solidFill>
-                      <a:prstDash val="solid"/>
-                      <a:round/>
-                      <a:headEnd type="none" w="med" len="med"/>
-                      <a:tailEnd type="none" w="med" len="med"/>
-                    </a:lnB>
-                  </a:tcPr>
-                </a:tc>
-                <a:tc>
-                  <a:txBody>
-                    <a:bodyPr/>
-                    <a:lstStyle/>
-                    <a:p>
-                      <a:pPr indent="0" marL="0">
-                        <a:buNone/>
-                      </a:pPr>
-                      <a:r>
-                        <a:rPr lang="en-US" sz="1300" dirty="0">
-                          <a:solidFill>
-                            <a:srgbClr val="000000"/>
-                          </a:solidFill>
-                          <a:latin typeface="Calibri" pitchFamily="34" charset="0"/>
-                          <a:ea typeface="Calibri" pitchFamily="34" charset="-122"/>
-                          <a:cs typeface="Calibri" pitchFamily="34" charset="-120"/>
-                        </a:rPr>
-                        <a:t>0.26</a:t>
-                      </a:r>
-                      <a:endParaRPr lang="en-US" sz="1300" dirty="0">
-                        <a:latin typeface="Calibri" charset="0"/>
-                        <a:ea typeface="Calibri" charset="0"/>
-                        <a:cs typeface="Calibri" charset="0"/>
-                      </a:endParaRPr>
-                    </a:p>
-                  </a:txBody>
-                  <a:tcPr marL="91440" marR="91440" marT="45720" marB="45720" anchor="ctr">
-                    <a:lnL w="12700" cap="flat" cmpd="sng" algn="ctr">
-                      <a:solidFill>
-                        <a:srgbClr val="CADCFC"/>
-                      </a:solidFill>
-                      <a:prstDash val="solid"/>
-                      <a:round/>
-                      <a:headEnd type="none" w="med" len="med"/>
-                      <a:tailEnd type="none" w="med" len="med"/>
-                    </a:lnL>
-                    <a:lnR w="12700" cap="flat" cmpd="sng" algn="ctr">
-                      <a:solidFill>
-                        <a:srgbClr val="CADCFC"/>
-                      </a:solidFill>
-                      <a:prstDash val="solid"/>
-                      <a:round/>
-                      <a:headEnd type="none" w="med" len="med"/>
-                      <a:tailEnd type="none" w="med" len="med"/>
-                    </a:lnR>
-                    <a:lnT w="12700" cap="flat" cmpd="sng" algn="ctr">
-                      <a:solidFill>
-                        <a:srgbClr val="CADCFC"/>
-                      </a:solidFill>
-                      <a:prstDash val="solid"/>
-                      <a:round/>
-                      <a:headEnd type="none" w="med" len="med"/>
-                      <a:tailEnd type="none" w="med" len="med"/>
-                    </a:lnT>
-                    <a:lnB w="12700" cap="flat" cmpd="sng" algn="ctr">
-                      <a:solidFill>
-                        <a:srgbClr val="CADCFC"/>
-                      </a:solidFill>
-                      <a:prstDash val="solid"/>
-                      <a:round/>
-                      <a:headEnd type="none" w="med" len="med"/>
-                      <a:tailEnd type="none" w="med" len="med"/>
-                    </a:lnB>
-                  </a:tcPr>
-                </a:tc>
-              </a:tr>
-              <a:tr h="457200">
-                <a:tc>
-                  <a:txBody>
-                    <a:bodyPr/>
-                    <a:lstStyle/>
-                    <a:p>
-                      <a:pPr indent="0" marL="0">
-                        <a:buNone/>
-                      </a:pPr>
-                      <a:r>
-                        <a:rPr lang="en-US" sz="1300" dirty="0">
-                          <a:solidFill>
-                            <a:srgbClr val="000000"/>
-                          </a:solidFill>
-                          <a:latin typeface="Calibri" pitchFamily="34" charset="0"/>
-                          <a:ea typeface="Calibri" pitchFamily="34" charset="-122"/>
-                          <a:cs typeface="Calibri" pitchFamily="34" charset="-120"/>
-                        </a:rPr>
-                        <a:t>TF-IDF + LogReg (5-fold CV)</a:t>
-                      </a:r>
-                      <a:endParaRPr lang="en-US" sz="1300" dirty="0">
-                        <a:latin typeface="Calibri" charset="0"/>
-                        <a:ea typeface="Calibri" charset="0"/>
-                        <a:cs typeface="Calibri" charset="0"/>
-                      </a:endParaRPr>
-                    </a:p>
-                  </a:txBody>
-                  <a:tcPr marL="91440" marR="91440" marT="45720" marB="45720" anchor="ctr">
-                    <a:lnL w="12700" cap="flat" cmpd="sng" algn="ctr">
-                      <a:solidFill>
-                        <a:srgbClr val="CADCFC"/>
-                      </a:solidFill>
-                      <a:prstDash val="solid"/>
-                      <a:round/>
-                      <a:headEnd type="none" w="med" len="med"/>
-                      <a:tailEnd type="none" w="med" len="med"/>
-                    </a:lnL>
-                    <a:lnR w="12700" cap="flat" cmpd="sng" algn="ctr">
-                      <a:solidFill>
-                        <a:srgbClr val="CADCFC"/>
-                      </a:solidFill>
-                      <a:prstDash val="solid"/>
-                      <a:round/>
-                      <a:headEnd type="none" w="med" len="med"/>
-                      <a:tailEnd type="none" w="med" len="med"/>
-                    </a:lnR>
-                    <a:lnT w="12700" cap="flat" cmpd="sng" algn="ctr">
-                      <a:solidFill>
-                        <a:srgbClr val="CADCFC"/>
-                      </a:solidFill>
-                      <a:prstDash val="solid"/>
-                      <a:round/>
-                      <a:headEnd type="none" w="med" len="med"/>
-                      <a:tailEnd type="none" w="med" len="med"/>
-                    </a:lnT>
-                    <a:lnB w="12700" cap="flat" cmpd="sng" algn="ctr">
-                      <a:solidFill>
-                        <a:srgbClr val="CADCFC"/>
-                      </a:solidFill>
-                      <a:prstDash val="solid"/>
-                      <a:round/>
-                      <a:headEnd type="none" w="med" len="med"/>
-                      <a:tailEnd type="none" w="med" len="med"/>
-                    </a:lnB>
-                  </a:tcPr>
-                </a:tc>
-                <a:tc>
-                  <a:txBody>
-                    <a:bodyPr/>
-                    <a:lstStyle/>
-                    <a:p>
-                      <a:pPr indent="0" marL="0">
-                        <a:buNone/>
-                      </a:pPr>
-                      <a:r>
-                        <a:rPr lang="en-US" sz="1300" dirty="0">
-                          <a:solidFill>
-                            <a:srgbClr val="000000"/>
-                          </a:solidFill>
-                          <a:latin typeface="Calibri" pitchFamily="34" charset="0"/>
-                          <a:ea typeface="Calibri" pitchFamily="34" charset="-122"/>
-                          <a:cs typeface="Calibri" pitchFamily="34" charset="-120"/>
-                        </a:rPr>
-                        <a:t>0.78</a:t>
-                      </a:r>
-                      <a:endParaRPr lang="en-US" sz="1300" dirty="0">
-                        <a:latin typeface="Calibri" charset="0"/>
-                        <a:ea typeface="Calibri" charset="0"/>
-                        <a:cs typeface="Calibri" charset="0"/>
-                      </a:endParaRPr>
-                    </a:p>
-                  </a:txBody>
-                  <a:tcPr marL="91440" marR="91440" marT="45720" marB="45720" anchor="ctr">
-                    <a:lnL w="12700" cap="flat" cmpd="sng" algn="ctr">
-                      <a:solidFill>
-                        <a:srgbClr val="CADCFC"/>
-                      </a:solidFill>
-                      <a:prstDash val="solid"/>
-                      <a:round/>
-                      <a:headEnd type="none" w="med" len="med"/>
-                      <a:tailEnd type="none" w="med" len="med"/>
-                    </a:lnL>
-                    <a:lnR w="12700" cap="flat" cmpd="sng" algn="ctr">
-                      <a:solidFill>
-                        <a:srgbClr val="CADCFC"/>
-                      </a:solidFill>
-                      <a:prstDash val="solid"/>
-                      <a:round/>
-                      <a:headEnd type="none" w="med" len="med"/>
-                      <a:tailEnd type="none" w="med" len="med"/>
-                    </a:lnR>
-                    <a:lnT w="12700" cap="flat" cmpd="sng" algn="ctr">
-                      <a:solidFill>
-                        <a:srgbClr val="CADCFC"/>
-                      </a:solidFill>
-                      <a:prstDash val="solid"/>
-                      <a:round/>
-                      <a:headEnd type="none" w="med" len="med"/>
-                      <a:tailEnd type="none" w="med" len="med"/>
-                    </a:lnT>
-                    <a:lnB w="12700" cap="flat" cmpd="sng" algn="ctr">
-                      <a:solidFill>
-                        <a:srgbClr val="CADCFC"/>
-                      </a:solidFill>
-                      <a:prstDash val="solid"/>
-                      <a:round/>
-                      <a:headEnd type="none" w="med" len="med"/>
-                      <a:tailEnd type="none" w="med" len="med"/>
-                    </a:lnB>
-                  </a:tcPr>
-                </a:tc>
-                <a:tc>
-                  <a:txBody>
-                    <a:bodyPr/>
-                    <a:lstStyle/>
-                    <a:p>
-                      <a:pPr indent="0" marL="0">
-                        <a:buNone/>
-                      </a:pPr>
-                      <a:r>
-                        <a:rPr lang="en-US" sz="1300" dirty="0">
-                          <a:solidFill>
-                            <a:srgbClr val="000000"/>
-                          </a:solidFill>
-                          <a:latin typeface="Calibri" pitchFamily="34" charset="0"/>
-                          <a:ea typeface="Calibri" pitchFamily="34" charset="-122"/>
-                          <a:cs typeface="Calibri" pitchFamily="34" charset="-120"/>
-                        </a:rPr>
-                        <a:t>0.65</a:t>
-                      </a:r>
-                      <a:endParaRPr lang="en-US" sz="1300" dirty="0">
-                        <a:latin typeface="Calibri" charset="0"/>
-                        <a:ea typeface="Calibri" charset="0"/>
-                        <a:cs typeface="Calibri" charset="0"/>
-                      </a:endParaRPr>
-                    </a:p>
-                  </a:txBody>
-                  <a:tcPr marL="91440" marR="91440" marT="45720" marB="45720" anchor="ctr">
-                    <a:lnL w="12700" cap="flat" cmpd="sng" algn="ctr">
-                      <a:solidFill>
-                        <a:srgbClr val="CADCFC"/>
-                      </a:solidFill>
-                      <a:prstDash val="solid"/>
-                      <a:round/>
-                      <a:headEnd type="none" w="med" len="med"/>
-                      <a:tailEnd type="none" w="med" len="med"/>
-                    </a:lnL>
-                    <a:lnR w="12700" cap="flat" cmpd="sng" algn="ctr">
-                      <a:solidFill>
-                        <a:srgbClr val="CADCFC"/>
-                      </a:solidFill>
-                      <a:prstDash val="solid"/>
-                      <a:round/>
-                      <a:headEnd type="none" w="med" len="med"/>
-                      <a:tailEnd type="none" w="med" len="med"/>
-                    </a:lnR>
-                    <a:lnT w="12700" cap="flat" cmpd="sng" algn="ctr">
-                      <a:solidFill>
-                        <a:srgbClr val="CADCFC"/>
-                      </a:solidFill>
-                      <a:prstDash val="solid"/>
-                      <a:round/>
-                      <a:headEnd type="none" w="med" len="med"/>
-                      <a:tailEnd type="none" w="med" len="med"/>
-                    </a:lnT>
-                    <a:lnB w="12700" cap="flat" cmpd="sng" algn="ctr">
-                      <a:solidFill>
-                        <a:srgbClr val="CADCFC"/>
-                      </a:solidFill>
-                      <a:prstDash val="solid"/>
-                      <a:round/>
-                      <a:headEnd type="none" w="med" len="med"/>
-                      <a:tailEnd type="none" w="med" len="med"/>
-                    </a:lnB>
-                  </a:tcPr>
-                </a:tc>
-              </a:tr>
-              <a:tr h="457200">
-                <a:tc>
-                  <a:txBody>
-                    <a:bodyPr/>
-                    <a:lstStyle/>
-                    <a:p>
-                      <a:pPr indent="0" marL="0">
-                        <a:buNone/>
-                      </a:pPr>
-                      <a:r>
-                        <a:rPr lang="en-US" sz="1300" dirty="0">
-                          <a:solidFill>
-                            <a:srgbClr val="000000"/>
-                          </a:solidFill>
-                          <a:latin typeface="Calibri" pitchFamily="34" charset="0"/>
-                          <a:ea typeface="Calibri" pitchFamily="34" charset="-122"/>
-                          <a:cs typeface="Calibri" pitchFamily="34" charset="-120"/>
-                        </a:rPr>
-                        <a:t>LLM path (in-repo, 80-case bilingual golden set)</a:t>
-                      </a:r>
-                      <a:endParaRPr lang="en-US" sz="1300" dirty="0">
-                        <a:latin typeface="Calibri" charset="0"/>
-                        <a:ea typeface="Calibri" charset="0"/>
-                        <a:cs typeface="Calibri" charset="0"/>
-                      </a:endParaRPr>
-                    </a:p>
-                  </a:txBody>
-                  <a:tcPr marL="91440" marR="91440" marT="45720" marB="45720" anchor="ctr">
-                    <a:lnL w="12700" cap="flat" cmpd="sng" algn="ctr">
-                      <a:solidFill>
-                        <a:srgbClr val="CADCFC"/>
-                      </a:solidFill>
-                      <a:prstDash val="solid"/>
-                      <a:round/>
-                      <a:headEnd type="none" w="med" len="med"/>
-                      <a:tailEnd type="none" w="med" len="med"/>
-                    </a:lnL>
-                    <a:lnR w="12700" cap="flat" cmpd="sng" algn="ctr">
-                      <a:solidFill>
-                        <a:srgbClr val="CADCFC"/>
-                      </a:solidFill>
-                      <a:prstDash val="solid"/>
-                      <a:round/>
-                      <a:headEnd type="none" w="med" len="med"/>
-                      <a:tailEnd type="none" w="med" len="med"/>
-                    </a:lnR>
-                    <a:lnT w="12700" cap="flat" cmpd="sng" algn="ctr">
-                      <a:solidFill>
-                        <a:srgbClr val="CADCFC"/>
-                      </a:solidFill>
-                      <a:prstDash val="solid"/>
-                      <a:round/>
-                      <a:headEnd type="none" w="med" len="med"/>
-                      <a:tailEnd type="none" w="med" len="med"/>
-                    </a:lnT>
-                    <a:lnB w="12700" cap="flat" cmpd="sng" algn="ctr">
-                      <a:solidFill>
-                        <a:srgbClr val="CADCFC"/>
-                      </a:solidFill>
-                      <a:prstDash val="solid"/>
-                      <a:round/>
-                      <a:headEnd type="none" w="med" len="med"/>
-                      <a:tailEnd type="none" w="med" len="med"/>
-                    </a:lnB>
-                  </a:tcPr>
-                </a:tc>
-                <a:tc>
-                  <a:txBody>
-                    <a:bodyPr/>
-                    <a:lstStyle/>
-                    <a:p>
-                      <a:pPr indent="0" marL="0">
-                        <a:buNone/>
-                      </a:pPr>
-                      <a:r>
-                        <a:rPr lang="en-US" sz="1300" dirty="0">
-                          <a:solidFill>
-                            <a:srgbClr val="000000"/>
-                          </a:solidFill>
-                          <a:latin typeface="Calibri" pitchFamily="34" charset="0"/>
-                          <a:ea typeface="Calibri" pitchFamily="34" charset="-122"/>
-                          <a:cs typeface="Calibri" pitchFamily="34" charset="-120"/>
-                        </a:rPr>
-                        <a:t>0.975 (sentiment)</a:t>
-                      </a:r>
-                      <a:endParaRPr lang="en-US" sz="1300" dirty="0">
-                        <a:latin typeface="Calibri" charset="0"/>
-                        <a:ea typeface="Calibri" charset="0"/>
-                        <a:cs typeface="Calibri" charset="0"/>
-                      </a:endParaRPr>
-                    </a:p>
-                  </a:txBody>
-                  <a:tcPr marL="91440" marR="91440" marT="45720" marB="45720" anchor="ctr">
-                    <a:lnL w="12700" cap="flat" cmpd="sng" algn="ctr">
-                      <a:solidFill>
-                        <a:srgbClr val="CADCFC"/>
-                      </a:solidFill>
-                      <a:prstDash val="solid"/>
-                      <a:round/>
-                      <a:headEnd type="none" w="med" len="med"/>
-                      <a:tailEnd type="none" w="med" len="med"/>
-                    </a:lnL>
-                    <a:lnR w="12700" cap="flat" cmpd="sng" algn="ctr">
-                      <a:solidFill>
-                        <a:srgbClr val="CADCFC"/>
-                      </a:solidFill>
-                      <a:prstDash val="solid"/>
-                      <a:round/>
-                      <a:headEnd type="none" w="med" len="med"/>
-                      <a:tailEnd type="none" w="med" len="med"/>
-                    </a:lnR>
-                    <a:lnT w="12700" cap="flat" cmpd="sng" algn="ctr">
-                      <a:solidFill>
-                        <a:srgbClr val="CADCFC"/>
-                      </a:solidFill>
-                      <a:prstDash val="solid"/>
-                      <a:round/>
-                      <a:headEnd type="none" w="med" len="med"/>
-                      <a:tailEnd type="none" w="med" len="med"/>
-                    </a:lnT>
-                    <a:lnB w="12700" cap="flat" cmpd="sng" algn="ctr">
-                      <a:solidFill>
-                        <a:srgbClr val="CADCFC"/>
-                      </a:solidFill>
-                      <a:prstDash val="solid"/>
-                      <a:round/>
-                      <a:headEnd type="none" w="med" len="med"/>
-                      <a:tailEnd type="none" w="med" len="med"/>
-                    </a:lnB>
-                  </a:tcPr>
-                </a:tc>
-                <a:tc>
-                  <a:txBody>
-                    <a:bodyPr/>
-                    <a:lstStyle/>
-                    <a:p>
-                      <a:pPr indent="0" marL="0">
-                        <a:buNone/>
-                      </a:pPr>
-                      <a:r>
-                        <a:rPr lang="en-US" sz="1300" dirty="0">
-                          <a:solidFill>
-                            <a:srgbClr val="000000"/>
-                          </a:solidFill>
-                          <a:latin typeface="Calibri" pitchFamily="34" charset="0"/>
-                          <a:ea typeface="Calibri" pitchFamily="34" charset="-122"/>
-                          <a:cs typeface="Calibri" pitchFamily="34" charset="-120"/>
-                        </a:rPr>
-                        <a:t>0.863 (urgency)</a:t>
-                      </a:r>
-                      <a:endParaRPr lang="en-US" sz="1300" dirty="0">
-                        <a:latin typeface="Calibri" charset="0"/>
-                        <a:ea typeface="Calibri" charset="0"/>
-                        <a:cs typeface="Calibri" charset="0"/>
-                      </a:endParaRPr>
-                    </a:p>
-                  </a:txBody>
-                  <a:tcPr marL="91440" marR="91440" marT="45720" marB="45720" anchor="ctr">
-                    <a:lnL w="12700" cap="flat" cmpd="sng" algn="ctr">
-                      <a:solidFill>
-                        <a:srgbClr val="CADCFC"/>
-                      </a:solidFill>
-                      <a:prstDash val="solid"/>
-                      <a:round/>
-                      <a:headEnd type="none" w="med" len="med"/>
-                      <a:tailEnd type="none" w="med" len="med"/>
-                    </a:lnL>
-                    <a:lnR w="12700" cap="flat" cmpd="sng" algn="ctr">
-                      <a:solidFill>
-                        <a:srgbClr val="CADCFC"/>
-                      </a:solidFill>
-                      <a:prstDash val="solid"/>
-                      <a:round/>
-                      <a:headEnd type="none" w="med" len="med"/>
-                      <a:tailEnd type="none" w="med" len="med"/>
-                    </a:lnR>
-                    <a:lnT w="12700" cap="flat" cmpd="sng" algn="ctr">
-                      <a:solidFill>
-                        <a:srgbClr val="CADCFC"/>
-                      </a:solidFill>
-                      <a:prstDash val="solid"/>
-                      <a:round/>
-                      <a:headEnd type="none" w="med" len="med"/>
-                      <a:tailEnd type="none" w="med" len="med"/>
-                    </a:lnT>
-                    <a:lnB w="12700" cap="flat" cmpd="sng" algn="ctr">
-                      <a:solidFill>
-                        <a:srgbClr val="CADCFC"/>
-                      </a:solidFill>
-                      <a:prstDash val="solid"/>
-                      <a:round/>
-                      <a:headEnd type="none" w="med" len="med"/>
-                      <a:tailEnd type="none" w="med" len="med"/>
-                    </a:lnB>
-                  </a:tcPr>
-                </a:tc>
-              </a:tr>
-            </a:tbl>
-          </a:graphicData>
-        </a:graphic>
-      </p:graphicFrame>
-      <p:sp>
-        <p:nvSpPr>
-          <p:cNvPr id="13" name="Text 10"/>
-          <p:cNvSpPr/>
-          <p:nvPr/>
-        </p:nvSpPr>
-        <p:spPr>
-          <a:xfrm>
-            <a:off x="548640" y="3794760"/>
-            <a:ext cx="6675120" cy="1005840"/>
-          </a:xfrm>
-          <a:prstGeom prst="rect">
-            <a:avLst/>
-          </a:prstGeom>
-          <a:noFill/>
-          <a:ln/>
-        </p:spPr>
-        <p:txBody>
-          <a:bodyPr wrap="square" rtlCol="0" anchor="ctr"/>
-          <a:lstStyle/>
-          <a:p>
-            <a:pPr indent="0" marL="0">
-              <a:buNone/>
-            </a:pPr>
-            <a:r>
-              <a:rPr lang="en-US" sz="1300" dirty="0">
-                <a:solidFill>
-                  <a:srgbClr val="1A1A2E"/>
-                </a:solidFill>
-                <a:latin typeface="Calibri" pitchFamily="34" charset="0"/>
-                <a:ea typeface="Calibri" pitchFamily="34" charset="-122"/>
-                <a:cs typeface="Calibri" pitchFamily="34" charset="-120"/>
-              </a:rPr>
-              <a:t>Why the floor fails: paraphrased operational complaints ("transaction history cannot be exported…") carry no sentiment words — 58 of 94 negatives misread as neutral. Substantive finding, not a strawman.</a:t>
-            </a:r>
-            <a:endParaRPr lang="en-US" sz="1300" dirty="0"/>
-          </a:p>
-        </p:txBody>
-      </p:sp>
-      <p:sp>
-        <p:nvSpPr>
-          <p:cNvPr id="14" name="Text 11"/>
-          <p:cNvSpPr/>
-          <p:nvPr/>
-        </p:nvSpPr>
-        <p:spPr>
-          <a:xfrm>
-            <a:off x="548640" y="4846320"/>
-            <a:ext cx="6675120" cy="1234440"/>
-          </a:xfrm>
-          <a:prstGeom prst="rect">
-            <a:avLst/>
-          </a:prstGeom>
-          <a:noFill/>
-          <a:ln/>
-        </p:spPr>
-        <p:txBody>
-          <a:bodyPr wrap="square" rtlCol="0" anchor="ctr"/>
-          <a:lstStyle/>
-          <a:p>
-            <a:pPr indent="0" marL="0">
-              <a:buNone/>
-            </a:pPr>
-            <a:r>
-              <a:rPr lang="en-US" sz="1300" dirty="0">
-                <a:solidFill>
-                  <a:srgbClr val="1E2761"/>
-                </a:solidFill>
-                <a:latin typeface="Calibri" pitchFamily="34" charset="0"/>
-                <a:ea typeface="Calibri" pitchFamily="34" charset="-122"/>
-                <a:cs typeface="Calibri" pitchFamily="34" charset="-120"/>
-              </a:rPr>
-              <a:t>Convergent in-repo run (CLARA, GLM-5.2, 17 Jul 2026, n=80 incl. 20 DE): sentiment 97.5% (CI 94–100) · urgency 86.3% (CI 79–94) · tag F1 80.2% by meaning vs 55.5% exact-string — semantic scoring vindicated; DE within 1.7pp of EN on urgency. Real-data star-proxy: ≈90% across all three sectors, zero fine-tuning.</a:t>
-            </a:r>
-            <a:endParaRPr lang="en-US" sz="1300" dirty="0"/>
-          </a:p>
-        </p:txBody>
-      </p:sp>
-      <p:pic>
-        <p:nvPicPr>
-          <p:cNvPr id="15" name="Image 0" descr="/Users/olamakri/Documents/CLARA/.claude/worktrees/review-phase-a/thesis/evaluation/results/risk_confusion.png">    </p:cNvPr>
-          <p:cNvPicPr>
-            <a:picLocks noChangeAspect="1"/>
-          </p:cNvPicPr>
-          <p:nvPr/>
-        </p:nvPicPr>
-        <p:blipFill>
-          <a:blip r:embed="rId1"/>
-          <a:stretch>
-            <a:fillRect/>
-          </a:stretch>
-        </p:blipFill>
-        <p:spPr>
-          <a:xfrm>
-            <a:off x="7635240" y="1645920"/>
-            <a:ext cx="3931920" cy="3493008"/>
-          </a:xfrm>
-          <a:prstGeom prst="rect">
-            <a:avLst/>
-          </a:prstGeom>
-        </p:spPr>
-      </p:pic>
-      <p:sp>
-        <p:nvSpPr>
-          <p:cNvPr id="16" name="Text 12"/>
-          <p:cNvSpPr/>
-          <p:nvPr/>
-        </p:nvSpPr>
-        <p:spPr>
-          <a:xfrm>
-            <a:off x="7635240" y="5257800"/>
-            <a:ext cx="3931920" cy="731520"/>
-          </a:xfrm>
-          <a:prstGeom prst="rect">
-            <a:avLst/>
-          </a:prstGeom>
-          <a:noFill/>
-          <a:ln/>
-        </p:spPr>
-        <p:txBody>
-          <a:bodyPr wrap="square" rtlCol="0" anchor="ctr"/>
-          <a:lstStyle/>
-          <a:p>
-            <a:pPr indent="0" marL="0">
-              <a:buNone/>
-            </a:pPr>
-            <a:r>
-              <a:rPr lang="en-US" sz="1150" i="1" dirty="0">
-                <a:solidFill>
-                  <a:srgbClr val="5A6478"/>
-                </a:solidFill>
-                <a:latin typeface="Calibri" pitchFamily="34" charset="0"/>
-                <a:ea typeface="Calibri" pitchFamily="34" charset="-122"/>
-                <a:cs typeface="Calibri" pitchFamily="34" charset="-120"/>
-              </a:rPr>
-              <a:t>Keyword floor collapses risk to "low" — 19 of 27 critical signals missed.</a:t>
-            </a:r>
-            <a:endParaRPr lang="en-US" sz="1150" dirty="0"/>
+              <a:t>A design principle that buys something for nothing is a platitude. Stating the cost is what makes each decision defensible.</a:t>
+            </a:r>
+            <a:endParaRPr lang="en-US" sz="1250" dirty="0"/>
           </a:p>
         </p:txBody>
       </p:sp>
@@ -12073,7 +15667,7 @@
                 <a:ea typeface="Cambria" pitchFamily="34" charset="-122"/>
                 <a:cs typeface="Cambria" pitchFamily="34" charset="-120"/>
               </a:rPr>
-              <a:t>Result 2: the memory steers, honestly bounded</a:t>
+              <a:t>Responsible AI as a property of the loop</a:t>
             </a:r>
             <a:endParaRPr lang="en-US" sz="3200" dirty="0"/>
           </a:p>
@@ -12112,7 +15706,7 @@
                 <a:ea typeface="Calibri" pitchFamily="34" charset="-122"/>
                 <a:cs typeface="Calibri" pitchFamily="34" charset="-120"/>
               </a:rPr>
-              <a:t>The perishable-learning mechanism, instrumented</a:t>
+              <a:t>Not a compliance module — the loop itself is the control surface</a:t>
             </a:r>
             <a:endParaRPr lang="en-US" sz="1400" dirty="0"/>
           </a:p>
@@ -12251,6 +15845,65 @@
             <a:avLst/>
           </a:prstGeom>
           <a:solidFill>
+            <a:srgbClr val="1E2761"/>
+          </a:solidFill>
+          <a:ln/>
+        </p:spPr>
+      </p:sp>
+      <p:sp>
+        <p:nvSpPr>
+          <p:cNvPr id="9" name="Text 7"/>
+          <p:cNvSpPr/>
+          <p:nvPr/>
+        </p:nvSpPr>
+        <p:spPr>
+          <a:xfrm>
+            <a:off x="11192256" y="395935"/>
+            <a:ext cx="292608" cy="310896"/>
+          </a:xfrm>
+          <a:prstGeom prst="rect">
+            <a:avLst/>
+          </a:prstGeom>
+          <a:noFill/>
+          <a:ln/>
+        </p:spPr>
+        <p:txBody>
+          <a:bodyPr wrap="square" lIns="0" tIns="0" rIns="0" bIns="0" rtlCol="0" anchor="ctr"/>
+          <a:lstStyle/>
+          <a:p>
+            <a:pPr algn="ctr" indent="0" marL="0">
+              <a:buNone/>
+            </a:pPr>
+            <a:r>
+              <a:rPr lang="en-US" sz="1100" b="1" dirty="0">
+                <a:solidFill>
+                  <a:srgbClr val="FFFFFF"/>
+                </a:solidFill>
+                <a:latin typeface="Calibri" pitchFamily="34" charset="0"/>
+                <a:ea typeface="Calibri" pitchFamily="34" charset="-122"/>
+                <a:cs typeface="Calibri" pitchFamily="34" charset="-120"/>
+              </a:rPr>
+              <a:t>A</a:t>
+            </a:r>
+            <a:endParaRPr lang="en-US" sz="1100" dirty="0"/>
+          </a:p>
+        </p:txBody>
+      </p:sp>
+      <p:sp>
+        <p:nvSpPr>
+          <p:cNvPr id="10" name="Shape 8"/>
+          <p:cNvSpPr/>
+          <p:nvPr/>
+        </p:nvSpPr>
+        <p:spPr>
+          <a:xfrm>
+            <a:off x="11576304" y="411480"/>
+            <a:ext cx="292608" cy="292608"/>
+          </a:xfrm>
+          <a:prstGeom prst="ellipse">
+            <a:avLst/>
+          </a:prstGeom>
+          <a:solidFill>
             <a:srgbClr val="CADCFC"/>
           </a:solidFill>
           <a:ln/>
@@ -12258,65 +15911,6 @@
       </p:sp>
       <p:sp>
         <p:nvSpPr>
-          <p:cNvPr id="9" name="Text 7"/>
-          <p:cNvSpPr/>
-          <p:nvPr/>
-        </p:nvSpPr>
-        <p:spPr>
-          <a:xfrm>
-            <a:off x="11192256" y="395935"/>
-            <a:ext cx="292608" cy="310896"/>
-          </a:xfrm>
-          <a:prstGeom prst="rect">
-            <a:avLst/>
-          </a:prstGeom>
-          <a:noFill/>
-          <a:ln/>
-        </p:spPr>
-        <p:txBody>
-          <a:bodyPr wrap="square" lIns="0" tIns="0" rIns="0" bIns="0" rtlCol="0" anchor="ctr"/>
-          <a:lstStyle/>
-          <a:p>
-            <a:pPr algn="ctr" indent="0" marL="0">
-              <a:buNone/>
-            </a:pPr>
-            <a:r>
-              <a:rPr lang="en-US" sz="1100" b="1" dirty="0">
-                <a:solidFill>
-                  <a:srgbClr val="1E2761"/>
-                </a:solidFill>
-                <a:latin typeface="Calibri" pitchFamily="34" charset="0"/>
-                <a:ea typeface="Calibri" pitchFamily="34" charset="-122"/>
-                <a:cs typeface="Calibri" pitchFamily="34" charset="-120"/>
-              </a:rPr>
-              <a:t>A</a:t>
-            </a:r>
-            <a:endParaRPr lang="en-US" sz="1100" dirty="0"/>
-          </a:p>
-        </p:txBody>
-      </p:sp>
-      <p:sp>
-        <p:nvSpPr>
-          <p:cNvPr id="10" name="Shape 8"/>
-          <p:cNvSpPr/>
-          <p:nvPr/>
-        </p:nvSpPr>
-        <p:spPr>
-          <a:xfrm>
-            <a:off x="11576304" y="411480"/>
-            <a:ext cx="292608" cy="292608"/>
-          </a:xfrm>
-          <a:prstGeom prst="ellipse">
-            <a:avLst/>
-          </a:prstGeom>
-          <a:solidFill>
-            <a:srgbClr val="1E2761"/>
-          </a:solidFill>
-          <a:ln/>
-        </p:spPr>
-      </p:sp>
-      <p:sp>
-        <p:nvSpPr>
           <p:cNvPr id="11" name="Text 9"/>
           <p:cNvSpPr/>
           <p:nvPr/>
@@ -12342,7 +15936,7 @@
             <a:r>
               <a:rPr lang="en-US" sz="1100" b="1" dirty="0">
                 <a:solidFill>
-                  <a:srgbClr val="FFFFFF"/>
+                  <a:srgbClr val="1E2761"/>
                 </a:solidFill>
                 <a:latin typeface="Calibri" pitchFamily="34" charset="0"/>
                 <a:ea typeface="Calibri" pitchFamily="34" charset="-122"/>
@@ -12356,260 +15950,26 @@
       </p:sp>
       <p:sp>
         <p:nvSpPr>
-          <p:cNvPr id="12" name="Text 10"/>
-          <p:cNvSpPr/>
-          <p:nvPr/>
-        </p:nvSpPr>
-        <p:spPr>
-          <a:xfrm>
-            <a:off x="731520" y="2011680"/>
-            <a:ext cx="3291840" cy="822960"/>
-          </a:xfrm>
-          <a:prstGeom prst="rect">
-            <a:avLst/>
-          </a:prstGeom>
-          <a:noFill/>
-          <a:ln/>
-        </p:spPr>
-        <p:txBody>
-          <a:bodyPr wrap="square" lIns="0" tIns="0" rIns="0" bIns="0" rtlCol="0" anchor="ctr"/>
-          <a:lstStyle/>
-          <a:p>
-            <a:pPr algn="ctr" indent="0" marL="0">
-              <a:buNone/>
-            </a:pPr>
-            <a:r>
-              <a:rPr lang="en-US" sz="5400" b="1" dirty="0">
-                <a:solidFill>
-                  <a:srgbClr val="1E2761"/>
-                </a:solidFill>
-                <a:latin typeface="Cambria" pitchFamily="34" charset="0"/>
-                <a:ea typeface="Cambria" pitchFamily="34" charset="-122"/>
-                <a:cs typeface="Cambria" pitchFamily="34" charset="-120"/>
-              </a:rPr>
-              <a:t>21% → 71%</a:t>
-            </a:r>
-            <a:endParaRPr lang="en-US" sz="5400" dirty="0"/>
-          </a:p>
-        </p:txBody>
-      </p:sp>
-      <p:sp>
-        <p:nvSpPr>
-          <p:cNvPr id="13" name="Text 11"/>
-          <p:cNvSpPr/>
-          <p:nvPr/>
-        </p:nvSpPr>
-        <p:spPr>
-          <a:xfrm>
-            <a:off x="731520" y="2852928"/>
-            <a:ext cx="3291840" cy="594360"/>
-          </a:xfrm>
-          <a:prstGeom prst="rect">
-            <a:avLst/>
-          </a:prstGeom>
-          <a:noFill/>
-          <a:ln/>
-        </p:spPr>
-        <p:txBody>
-          <a:bodyPr wrap="square" lIns="0" tIns="0" rIns="0" bIns="0" rtlCol="0" anchor="ctr"/>
-          <a:lstStyle/>
-          <a:p>
-            <a:pPr algn="ctr" indent="0" marL="0">
-              <a:buNone/>
-            </a:pPr>
-            <a:r>
-              <a:rPr lang="en-US" sz="1250" dirty="0">
-                <a:solidFill>
-                  <a:srgbClr val="5A6478"/>
-                </a:solidFill>
-                <a:latin typeface="Calibri" pitchFamily="34" charset="0"/>
-                <a:ea typeface="Calibri" pitchFamily="34" charset="-122"/>
-                <a:cs typeface="Calibri" pitchFamily="34" charset="-120"/>
-              </a:rPr>
-              <a:t>share of a past remedy appearing in the new recommendation when retrieval is ON (66.7% adoption)</a:t>
-            </a:r>
-            <a:endParaRPr lang="en-US" sz="1250" dirty="0"/>
-          </a:p>
-        </p:txBody>
-      </p:sp>
-      <p:sp>
-        <p:nvSpPr>
-          <p:cNvPr id="14" name="Text 12"/>
-          <p:cNvSpPr/>
-          <p:nvPr/>
-        </p:nvSpPr>
-        <p:spPr>
-          <a:xfrm>
-            <a:off x="4434840" y="2011680"/>
-            <a:ext cx="3291840" cy="822960"/>
-          </a:xfrm>
-          <a:prstGeom prst="rect">
-            <a:avLst/>
-          </a:prstGeom>
-          <a:noFill/>
-          <a:ln/>
-        </p:spPr>
-        <p:txBody>
-          <a:bodyPr wrap="square" lIns="0" tIns="0" rIns="0" bIns="0" rtlCol="0" anchor="ctr"/>
-          <a:lstStyle/>
-          <a:p>
-            <a:pPr algn="ctr" indent="0" marL="0">
-              <a:buNone/>
-            </a:pPr>
-            <a:r>
-              <a:rPr lang="en-US" sz="5400" b="1" dirty="0">
-                <a:solidFill>
-                  <a:srgbClr val="2C5F2D"/>
-                </a:solidFill>
-                <a:latin typeface="Cambria" pitchFamily="34" charset="0"/>
-                <a:ea typeface="Cambria" pitchFamily="34" charset="-122"/>
-                <a:cs typeface="Cambria" pitchFamily="34" charset="-120"/>
-              </a:rPr>
-              <a:t>0.503</a:t>
-            </a:r>
-            <a:endParaRPr lang="en-US" sz="5400" dirty="0"/>
-          </a:p>
-        </p:txBody>
-      </p:sp>
-      <p:sp>
-        <p:nvSpPr>
-          <p:cNvPr id="15" name="Text 13"/>
-          <p:cNvSpPr/>
-          <p:nvPr/>
-        </p:nvSpPr>
-        <p:spPr>
-          <a:xfrm>
-            <a:off x="4434840" y="2852928"/>
-            <a:ext cx="3291840" cy="594360"/>
-          </a:xfrm>
-          <a:prstGeom prst="rect">
-            <a:avLst/>
-          </a:prstGeom>
-          <a:noFill/>
-          <a:ln/>
-        </p:spPr>
-        <p:txBody>
-          <a:bodyPr wrap="square" lIns="0" tIns="0" rIns="0" bIns="0" rtlCol="0" anchor="ctr"/>
-          <a:lstStyle/>
-          <a:p>
-            <a:pPr algn="ctr" indent="0" marL="0">
-              <a:buNone/>
-            </a:pPr>
-            <a:r>
-              <a:rPr lang="en-US" sz="1250" dirty="0">
-                <a:solidFill>
-                  <a:srgbClr val="5A6478"/>
-                </a:solidFill>
-                <a:latin typeface="Calibri" pitchFamily="34" charset="0"/>
-                <a:ea typeface="Calibri" pitchFamily="34" charset="-122"/>
-                <a:cs typeface="Calibri" pitchFamily="34" charset="-120"/>
-              </a:rPr>
-              <a:t>alignment lift vs a same-run noise floor that absorbs model jitter</a:t>
-            </a:r>
-            <a:endParaRPr lang="en-US" sz="1250" dirty="0"/>
-          </a:p>
-        </p:txBody>
-      </p:sp>
-      <p:sp>
-        <p:nvSpPr>
-          <p:cNvPr id="16" name="Text 14"/>
-          <p:cNvSpPr/>
-          <p:nvPr/>
-        </p:nvSpPr>
-        <p:spPr>
-          <a:xfrm>
-            <a:off x="8138160" y="2011680"/>
-            <a:ext cx="3291840" cy="822960"/>
-          </a:xfrm>
-          <a:prstGeom prst="rect">
-            <a:avLst/>
-          </a:prstGeom>
-          <a:noFill/>
-          <a:ln/>
-        </p:spPr>
-        <p:txBody>
-          <a:bodyPr wrap="square" lIns="0" tIns="0" rIns="0" bIns="0" rtlCol="0" anchor="ctr"/>
-          <a:lstStyle/>
-          <a:p>
-            <a:pPr algn="ctr" indent="0" marL="0">
-              <a:buNone/>
-            </a:pPr>
-            <a:r>
-              <a:rPr lang="en-US" sz="5400" b="1" dirty="0">
-                <a:solidFill>
-                  <a:srgbClr val="1E2761"/>
-                </a:solidFill>
-                <a:latin typeface="Cambria" pitchFamily="34" charset="0"/>
-                <a:ea typeface="Cambria" pitchFamily="34" charset="-122"/>
-                <a:cs typeface="Cambria" pitchFamily="34" charset="-120"/>
-              </a:rPr>
-              <a:t>0 / 2.5%</a:t>
-            </a:r>
-            <a:endParaRPr lang="en-US" sz="5400" dirty="0"/>
-          </a:p>
-        </p:txBody>
-      </p:sp>
-      <p:sp>
-        <p:nvSpPr>
-          <p:cNvPr id="17" name="Text 15"/>
-          <p:cNvSpPr/>
-          <p:nvPr/>
-        </p:nvSpPr>
-        <p:spPr>
-          <a:xfrm>
-            <a:off x="8138160" y="2852928"/>
-            <a:ext cx="3291840" cy="594360"/>
-          </a:xfrm>
-          <a:prstGeom prst="rect">
-            <a:avLst/>
-          </a:prstGeom>
-          <a:noFill/>
-          <a:ln/>
-        </p:spPr>
-        <p:txBody>
-          <a:bodyPr wrap="square" lIns="0" tIns="0" rIns="0" bIns="0" rtlCol="0" anchor="ctr"/>
-          <a:lstStyle/>
-          <a:p>
-            <a:pPr algn="ctr" indent="0" marL="0">
-              <a:buNone/>
-            </a:pPr>
-            <a:r>
-              <a:rPr lang="en-US" sz="1250" dirty="0">
-                <a:solidFill>
-                  <a:srgbClr val="5A6478"/>
-                </a:solidFill>
-                <a:latin typeface="Calibri" pitchFamily="34" charset="0"/>
-                <a:ea typeface="Calibri" pitchFamily="34" charset="-122"/>
-                <a:cs typeface="Calibri" pitchFamily="34" charset="-120"/>
-              </a:rPr>
-              <a:t>PII leaks across ledger / hallucination rate, latest run (hallucination check EN-scope by construction)</a:t>
-            </a:r>
-            <a:endParaRPr lang="en-US" sz="1250" dirty="0"/>
-          </a:p>
-        </p:txBody>
-      </p:sp>
-      <p:sp>
-        <p:nvSpPr>
-          <p:cNvPr id="18" name="Shape 16"/>
-          <p:cNvSpPr/>
-          <p:nvPr/>
-        </p:nvSpPr>
-        <p:spPr>
-          <a:xfrm>
-            <a:off x="731520" y="4206240"/>
-            <a:ext cx="10698480" cy="1828800"/>
+          <p:cNvPr id="12" name="Shape 10"/>
+          <p:cNvSpPr/>
+          <p:nvPr/>
+        </p:nvSpPr>
+        <p:spPr>
+          <a:xfrm>
+            <a:off x="548640" y="1600200"/>
+            <a:ext cx="5440680" cy="1965960"/>
           </a:xfrm>
           <a:prstGeom prst="roundRect">
             <a:avLst>
-              <a:gd name="adj" fmla="val 3000"/>
+              <a:gd name="adj" fmla="val 2791"/>
             </a:avLst>
           </a:prstGeom>
           <a:solidFill>
-            <a:srgbClr val="FDF3F3"/>
+            <a:srgbClr val="F4F7FC"/>
           </a:solidFill>
           <a:ln w="12700">
             <a:solidFill>
-              <a:srgbClr val="990011"/>
+              <a:srgbClr val="CADCFC"/>
             </a:solidFill>
             <a:prstDash val="solid"/>
           </a:ln>
@@ -12617,14 +15977,224 @@
       </p:sp>
       <p:sp>
         <p:nvSpPr>
+          <p:cNvPr id="13" name="Text 11"/>
+          <p:cNvSpPr/>
+          <p:nvPr/>
+        </p:nvSpPr>
+        <p:spPr>
+          <a:xfrm>
+            <a:off x="685800" y="1691640"/>
+            <a:ext cx="5166360" cy="292608"/>
+          </a:xfrm>
+          <a:prstGeom prst="rect">
+            <a:avLst/>
+          </a:prstGeom>
+          <a:noFill/>
+          <a:ln/>
+        </p:spPr>
+        <p:txBody>
+          <a:bodyPr wrap="square" lIns="0" tIns="0" rIns="0" bIns="0" rtlCol="0" anchor="ctr"/>
+          <a:lstStyle/>
+          <a:p>
+            <a:pPr indent="0" marL="0">
+              <a:buNone/>
+            </a:pPr>
+            <a:r>
+              <a:rPr lang="en-US" sz="1350" b="1" dirty="0">
+                <a:solidFill>
+                  <a:srgbClr val="1E2761"/>
+                </a:solidFill>
+                <a:latin typeface="Calibri" pitchFamily="34" charset="0"/>
+                <a:ea typeface="Calibri" pitchFamily="34" charset="-122"/>
+                <a:cs typeface="Calibri" pitchFamily="34" charset="-120"/>
+              </a:rPr>
+              <a:t>Human approval · Art 14+</a:t>
+            </a:r>
+            <a:endParaRPr lang="en-US" sz="1350" dirty="0"/>
+          </a:p>
+        </p:txBody>
+      </p:sp>
+      <p:sp>
+        <p:nvSpPr>
+          <p:cNvPr id="14" name="Text 12"/>
+          <p:cNvSpPr/>
+          <p:nvPr/>
+        </p:nvSpPr>
+        <p:spPr>
+          <a:xfrm>
+            <a:off x="685800" y="1984248"/>
+            <a:ext cx="5166360" cy="1490472"/>
+          </a:xfrm>
+          <a:prstGeom prst="rect">
+            <a:avLst/>
+          </a:prstGeom>
+          <a:noFill/>
+          <a:ln/>
+        </p:spPr>
+        <p:txBody>
+          <a:bodyPr wrap="square" lIns="0" tIns="0" rIns="0" bIns="0" rtlCol="0" anchor="ctr"/>
+          <a:lstStyle/>
+          <a:p>
+            <a:pPr indent="0" marL="0">
+              <a:buNone/>
+            </a:pPr>
+            <a:r>
+              <a:rPr lang="en-US" sz="1150" dirty="0">
+                <a:solidFill>
+                  <a:srgbClr val="1A1A2E"/>
+                </a:solidFill>
+                <a:latin typeface="Calibri" pitchFamily="34" charset="0"/>
+                <a:ea typeface="Calibri" pitchFamily="34" charset="-122"/>
+                <a:cs typeface="Calibri" pitchFamily="34" charset="-120"/>
+              </a:rPr>
+              <a:t>auto_execute=false ⇒ pending approval. Designed BEYOND Art 14: friction, evidence &amp; confidence shown, per-decision attribution (meaningful human control — Siebert 2023; automation-bias critique — Laux &amp; Ruschemeier 2025).</a:t>
+            </a:r>
+            <a:endParaRPr lang="en-US" sz="1150" dirty="0"/>
+          </a:p>
+        </p:txBody>
+      </p:sp>
+      <p:sp>
+        <p:nvSpPr>
+          <p:cNvPr id="15" name="Shape 13"/>
+          <p:cNvSpPr/>
+          <p:nvPr/>
+        </p:nvSpPr>
+        <p:spPr>
+          <a:xfrm>
+            <a:off x="6172200" y="1600200"/>
+            <a:ext cx="5440680" cy="1965960"/>
+          </a:xfrm>
+          <a:prstGeom prst="roundRect">
+            <a:avLst>
+              <a:gd name="adj" fmla="val 2791"/>
+            </a:avLst>
+          </a:prstGeom>
+          <a:solidFill>
+            <a:srgbClr val="F4F7FC"/>
+          </a:solidFill>
+          <a:ln w="12700">
+            <a:solidFill>
+              <a:srgbClr val="CADCFC"/>
+            </a:solidFill>
+            <a:prstDash val="solid"/>
+          </a:ln>
+        </p:spPr>
+      </p:sp>
+      <p:sp>
+        <p:nvSpPr>
+          <p:cNvPr id="16" name="Text 14"/>
+          <p:cNvSpPr/>
+          <p:nvPr/>
+        </p:nvSpPr>
+        <p:spPr>
+          <a:xfrm>
+            <a:off x="6309360" y="1691640"/>
+            <a:ext cx="5166360" cy="292608"/>
+          </a:xfrm>
+          <a:prstGeom prst="rect">
+            <a:avLst/>
+          </a:prstGeom>
+          <a:noFill/>
+          <a:ln/>
+        </p:spPr>
+        <p:txBody>
+          <a:bodyPr wrap="square" lIns="0" tIns="0" rIns="0" bIns="0" rtlCol="0" anchor="ctr"/>
+          <a:lstStyle/>
+          <a:p>
+            <a:pPr indent="0" marL="0">
+              <a:buNone/>
+            </a:pPr>
+            <a:r>
+              <a:rPr lang="en-US" sz="1350" b="1" dirty="0">
+                <a:solidFill>
+                  <a:srgbClr val="1E2761"/>
+                </a:solidFill>
+                <a:latin typeface="Calibri" pitchFamily="34" charset="0"/>
+                <a:ea typeface="Calibri" pitchFamily="34" charset="-122"/>
+                <a:cs typeface="Calibri" pitchFamily="34" charset="-120"/>
+              </a:rPr>
+              <a:t>Audit trail · Art 12</a:t>
+            </a:r>
+            <a:endParaRPr lang="en-US" sz="1350" dirty="0"/>
+          </a:p>
+        </p:txBody>
+      </p:sp>
+      <p:sp>
+        <p:nvSpPr>
+          <p:cNvPr id="17" name="Text 15"/>
+          <p:cNvSpPr/>
+          <p:nvPr/>
+        </p:nvSpPr>
+        <p:spPr>
+          <a:xfrm>
+            <a:off x="6309360" y="1984248"/>
+            <a:ext cx="5166360" cy="1490472"/>
+          </a:xfrm>
+          <a:prstGeom prst="rect">
+            <a:avLst/>
+          </a:prstGeom>
+          <a:noFill/>
+          <a:ln/>
+        </p:spPr>
+        <p:txBody>
+          <a:bodyPr wrap="square" lIns="0" tIns="0" rIns="0" bIns="0" rtlCol="0" anchor="ctr"/>
+          <a:lstStyle/>
+          <a:p>
+            <a:pPr indent="0" marL="0">
+              <a:buNone/>
+            </a:pPr>
+            <a:r>
+              <a:rPr lang="en-US" sz="1150" dirty="0">
+                <a:solidFill>
+                  <a:srgbClr val="1A1A2E"/>
+                </a:solidFill>
+                <a:latin typeface="Calibri" pitchFamily="34" charset="0"/>
+                <a:ea typeface="Calibri" pitchFamily="34" charset="-122"/>
+                <a:cs typeface="Calibri" pitchFamily="34" charset="-120"/>
+              </a:rPr>
+              <a:t>Every action: rule, params, executor, result. Review-then-harden finding: declared controls ≠ enforced controls until adversarially verified.</a:t>
+            </a:r>
+            <a:endParaRPr lang="en-US" sz="1150" dirty="0"/>
+          </a:p>
+        </p:txBody>
+      </p:sp>
+      <p:sp>
+        <p:nvSpPr>
+          <p:cNvPr id="18" name="Shape 16"/>
+          <p:cNvSpPr/>
+          <p:nvPr/>
+        </p:nvSpPr>
+        <p:spPr>
+          <a:xfrm>
+            <a:off x="548640" y="3749040"/>
+            <a:ext cx="5440680" cy="1965960"/>
+          </a:xfrm>
+          <a:prstGeom prst="roundRect">
+            <a:avLst>
+              <a:gd name="adj" fmla="val 2791"/>
+            </a:avLst>
+          </a:prstGeom>
+          <a:solidFill>
+            <a:srgbClr val="F4F7FC"/>
+          </a:solidFill>
+          <a:ln w="12700">
+            <a:solidFill>
+              <a:srgbClr val="CADCFC"/>
+            </a:solidFill>
+            <a:prstDash val="solid"/>
+          </a:ln>
+        </p:spPr>
+      </p:sp>
+      <p:sp>
+        <p:nvSpPr>
           <p:cNvPr id="19" name="Text 17"/>
           <p:cNvSpPr/>
           <p:nvPr/>
         </p:nvSpPr>
         <p:spPr>
           <a:xfrm>
-            <a:off x="960120" y="4343400"/>
-            <a:ext cx="10241280" cy="320040"/>
+            <a:off x="685800" y="3840480"/>
+            <a:ext cx="5166360" cy="292608"/>
           </a:xfrm>
           <a:prstGeom prst="rect">
             <a:avLst/>
@@ -12640,17 +16210,17 @@
               <a:buNone/>
             </a:pPr>
             <a:r>
-              <a:rPr lang="en-US" sz="1400" b="1" dirty="0">
-                <a:solidFill>
-                  <a:srgbClr val="990011"/>
-                </a:solidFill>
-                <a:latin typeface="Calibri" pitchFamily="34" charset="0"/>
-                <a:ea typeface="Calibri" pitchFamily="34" charset="-122"/>
-                <a:cs typeface="Calibri" pitchFamily="34" charset="-120"/>
-              </a:rPr>
-              <a:t>The honest boundary</a:t>
-            </a:r>
-            <a:endParaRPr lang="en-US" sz="1400" dirty="0"/>
+              <a:rPr lang="en-US" sz="1350" b="1" dirty="0">
+                <a:solidFill>
+                  <a:srgbClr val="1E2761"/>
+                </a:solidFill>
+                <a:latin typeface="Calibri" pitchFamily="34" charset="0"/>
+                <a:ea typeface="Calibri" pitchFamily="34" charset="-122"/>
+                <a:cs typeface="Calibri" pitchFamily="34" charset="-120"/>
+              </a:rPr>
+              <a:t>Transparency · Art 50</a:t>
+            </a:r>
+            <a:endParaRPr lang="en-US" sz="1350" dirty="0"/>
           </a:p>
         </p:txBody>
       </p:sp>
@@ -12662,8 +16232,8 @@
         </p:nvSpPr>
         <p:spPr>
           <a:xfrm>
-            <a:off x="960120" y="4681728"/>
-            <a:ext cx="10241280" cy="1234440"/>
+            <a:off x="685800" y="4133088"/>
+            <a:ext cx="5166360" cy="1490472"/>
           </a:xfrm>
           <a:prstGeom prst="rect">
             <a:avLst/>
@@ -12679,7 +16249,7 @@
               <a:buNone/>
             </a:pPr>
             <a:r>
-              <a:rPr lang="en-US" sz="1400" dirty="0">
+              <a:rPr lang="en-US" sz="1150" dirty="0">
                 <a:solidFill>
                   <a:srgbClr val="1A1A2E"/>
                 </a:solidFill>
@@ -12687,9 +16257,153 @@
                 <a:ea typeface="Calibri" pitchFamily="34" charset="-122"/>
                 <a:cs typeface="Calibri" pitchFamily="34" charset="-120"/>
               </a:rPr>
-              <a:t>Outcome data behind these learnings is still SIMULATED. Adoption shows the loop steers recommendations; whether the steered remedy is BETTER requires a live outcome contract on real data — the single most important open step. We claim mechanism, not benefit.</a:t>
-            </a:r>
-            <a:endParaRPr lang="en-US" sz="1400" dirty="0"/>
+              <a:t>AI outputs labelled with provenance. Human editorial review = the Art 50(4) exemption mechanism — the approval gate IS the compliance artifact.</a:t>
+            </a:r>
+            <a:endParaRPr lang="en-US" sz="1150" dirty="0"/>
+          </a:p>
+        </p:txBody>
+      </p:sp>
+      <p:sp>
+        <p:nvSpPr>
+          <p:cNvPr id="21" name="Shape 19"/>
+          <p:cNvSpPr/>
+          <p:nvPr/>
+        </p:nvSpPr>
+        <p:spPr>
+          <a:xfrm>
+            <a:off x="6172200" y="3749040"/>
+            <a:ext cx="5440680" cy="1965960"/>
+          </a:xfrm>
+          <a:prstGeom prst="roundRect">
+            <a:avLst>
+              <a:gd name="adj" fmla="val 2791"/>
+            </a:avLst>
+          </a:prstGeom>
+          <a:solidFill>
+            <a:srgbClr val="F4F7FC"/>
+          </a:solidFill>
+          <a:ln w="12700">
+            <a:solidFill>
+              <a:srgbClr val="CADCFC"/>
+            </a:solidFill>
+            <a:prstDash val="solid"/>
+          </a:ln>
+        </p:spPr>
+      </p:sp>
+      <p:sp>
+        <p:nvSpPr>
+          <p:cNvPr id="22" name="Text 20"/>
+          <p:cNvSpPr/>
+          <p:nvPr/>
+        </p:nvSpPr>
+        <p:spPr>
+          <a:xfrm>
+            <a:off x="6309360" y="3840480"/>
+            <a:ext cx="5166360" cy="292608"/>
+          </a:xfrm>
+          <a:prstGeom prst="rect">
+            <a:avLst/>
+          </a:prstGeom>
+          <a:noFill/>
+          <a:ln/>
+        </p:spPr>
+        <p:txBody>
+          <a:bodyPr wrap="square" lIns="0" tIns="0" rIns="0" bIns="0" rtlCol="0" anchor="ctr"/>
+          <a:lstStyle/>
+          <a:p>
+            <a:pPr indent="0" marL="0">
+              <a:buNone/>
+            </a:pPr>
+            <a:r>
+              <a:rPr lang="en-US" sz="1350" b="1" dirty="0">
+                <a:solidFill>
+                  <a:srgbClr val="1E2761"/>
+                </a:solidFill>
+                <a:latin typeface="Calibri" pitchFamily="34" charset="0"/>
+                <a:ea typeface="Calibri" pitchFamily="34" charset="-122"/>
+                <a:cs typeface="Calibri" pitchFamily="34" charset="-120"/>
+              </a:rPr>
+              <a:t>Sovereignty &amp; GDPR</a:t>
+            </a:r>
+            <a:endParaRPr lang="en-US" sz="1350" dirty="0"/>
+          </a:p>
+        </p:txBody>
+      </p:sp>
+      <p:sp>
+        <p:nvSpPr>
+          <p:cNvPr id="23" name="Text 21"/>
+          <p:cNvSpPr/>
+          <p:nvPr/>
+        </p:nvSpPr>
+        <p:spPr>
+          <a:xfrm>
+            <a:off x="6309360" y="4133088"/>
+            <a:ext cx="5166360" cy="1490472"/>
+          </a:xfrm>
+          <a:prstGeom prst="rect">
+            <a:avLst/>
+          </a:prstGeom>
+          <a:noFill/>
+          <a:ln/>
+        </p:spPr>
+        <p:txBody>
+          <a:bodyPr wrap="square" lIns="0" tIns="0" rIns="0" bIns="0" rtlCol="0" anchor="ctr"/>
+          <a:lstStyle/>
+          <a:p>
+            <a:pPr indent="0" marL="0">
+              <a:buNone/>
+            </a:pPr>
+            <a:r>
+              <a:rPr lang="en-US" sz="1150" dirty="0">
+                <a:solidFill>
+                  <a:srgbClr val="1A1A2E"/>
+                </a:solidFill>
+                <a:latin typeface="Calibri" pitchFamily="34" charset="0"/>
+                <a:ea typeface="Calibri" pitchFamily="34" charset="-122"/>
+                <a:cs typeface="Calibri" pitchFamily="34" charset="-120"/>
+              </a:rPr>
+              <a:t>Provider-agnostic LLM — self-hostable, EU-resident. PII masking, retention limits, workspace RLS. Sentiment on text is NOT 'emotion recognition' (Art 3(39): biometric only).</a:t>
+            </a:r>
+            <a:endParaRPr lang="en-US" sz="1150" dirty="0"/>
+          </a:p>
+        </p:txBody>
+      </p:sp>
+      <p:sp>
+        <p:nvSpPr>
+          <p:cNvPr id="24" name="Text 22"/>
+          <p:cNvSpPr/>
+          <p:nvPr/>
+        </p:nvSpPr>
+        <p:spPr>
+          <a:xfrm>
+            <a:off x="548640" y="5897880"/>
+            <a:ext cx="11064240" cy="548640"/>
+          </a:xfrm>
+          <a:prstGeom prst="rect">
+            <a:avLst/>
+          </a:prstGeom>
+          <a:noFill/>
+          <a:ln/>
+        </p:spPr>
+        <p:txBody>
+          <a:bodyPr wrap="square" rtlCol="0" anchor="ctr"/>
+          <a:lstStyle/>
+          <a:p>
+            <a:pPr indent="0" marL="0">
+              <a:buNone/>
+            </a:pPr>
+            <a:r>
+              <a:rPr lang="en-US" sz="1350" i="1" dirty="0">
+                <a:solidFill>
+                  <a:srgbClr val="5A6478"/>
+                </a:solidFill>
+                <a:latin typeface="Calibri" pitchFamily="34" charset="0"/>
+                <a:ea typeface="Calibri" pitchFamily="34" charset="-122"/>
+                <a:cs typeface="Calibri" pitchFamily="34" charset="-120"/>
+              </a:rPr>
+              <a:t>Measured closure has three levels: operational (ticket done) → customer (reporter notified) → outcome (metric moved). "Closed" means the third.</a:t>
+            </a:r>
+            <a:endParaRPr lang="en-US" sz="1350" dirty="0"/>
           </a:p>
         </p:txBody>
       </p:sp>

--- a/thesis/defense/defense_deck.pptx
+++ b/thesis/defense/defense_deck.pptx
@@ -23,9 +23,11 @@
     <p:sldId id="271" r:id="rId17"/>
     <p:sldId id="272" r:id="rId18"/>
     <p:sldId id="273" r:id="rId19"/>
+    <p:sldId id="274" r:id="rId20"/>
+    <p:sldId id="275" r:id="rId21"/>
   </p:sldIdLst>
   <p:notesMasterIdLst>
-    <p:notesMasterId r:id="rId20"/>
+    <p:notesMasterId r:id="rId22"/>
   </p:notesMasterIdLst>
   <p:sldSz cx="12192000" cy="6858000"/>
   <p:notesSz cx="6858000" cy="12192000"/>
@@ -519,7 +521,7 @@
           <a:p>
             <a:r>
               <a:rPr lang="en-US" dirty="0"/>
-              <a:t>60–90s. Frame in one breath: organisations collect more feedback than ever, yet fewer than a third systematically close the loop. This thesis designs, builds and evaluates a platform where the loop is not just closed but GOVERNED and MEASURED — and where what worked becomes organisational memory. One system, studied through Design Science Research. TODAY: progress review, not the defense — lead with the architecture slides and the progress-since-mid-July section.</a:t>
+              <a:t>60–90s. Frame in one breath: organisations collect more feedback than ever, yet fewer than a third systematically close the loop. This thesis designs, builds and evaluates a platform where the loop is not just closed but GOVERNED and MEASURED — and where what worked becomes organisational memory. One system, studied through Design Science Research. TODAY: progress review, not the defense. The headline is that the LLM row of the results table is no longer pending — it ran on 4 August, and it changed two things: RQ3 split into accuracy (RQ3a) and equity (RQ3b), and one fairness claim had to be retracted. Lead with the 'since your last look' section, then the three results slides.</a:t>
             </a:r>
             <a:endParaRPr lang="en-US" dirty="0"/>
           </a:p>
@@ -607,7 +609,7 @@
           <a:p>
             <a:r>
               <a:rPr lang="en-US" dirty="0"/>
-              <a:t>90s. One line per item, do not read the slide. Hashes for the advisor: MFA 4200672 · cookie sessions a012298 · rate limiting 9b75195, hardened + auth fail-closed 350dc37 · secrets-at-rest &amp; four-eyes eb15bcc · JWT-bound reviewer 967c7d1 · founder-owner bootstrap 1b0ab07 · uptime monitor 49013f8 · tamper evidence b065e4a · guardrail measurement e13105d · trust page 405a630 · pricing ec6bba6.</a:t>
+              <a:t>90s. One line per item, do not read the slide. July hashes: MFA 4200672 · cookie sessions a012298 · rate limiting 9b75195, hardened + auth fail-closed 350dc37 · secrets-at-rest &amp; four-eyes eb15bcc · JWT-bound reviewer 967c7d1 · founder-owner bootstrap 1b0ab07 · uptime monitor 49013f8 · tamper evidence b065e4a · guardrail measurement e13105d · trust page 405a630 · pricing ec6bba6. August hashes: App Store empty-feed 9c87bd9 · AI failure names the knob 9f35374 · migration 012 embeddings vector(1024) 03f9120 · split embed provider f73f5ad · dashboard stale-bearer 401 bb6ce59/353c519. If she asks about uptime: production was verified 17/17 green by hand on 7 Aug; GitHub's scheduler dropped the cron for about a day on 6-7 Aug, which is a monitoring gap, not an outage — and worth saying plainly rather than letting the slide imply unbroken coverage.</a:t>
             </a:r>
             <a:endParaRPr lang="en-US" dirty="0"/>
           </a:p>
@@ -695,7 +697,7 @@
           <a:p>
             <a:r>
               <a:rPr lang="en-US" dirty="0"/>
-              <a:t>90s. Hashes for the advisor: golden set 80→100 + churn-musing exemplar 58504f3 · two-tag DE rubric + published n=100 run 5d250fb · per-language metrics + model card 8a258f8 · German exemplars e454898 · tag canonicalization e8af0e5 (claim revised to measured reality in c43062e) · per-item persistence + entity rollup 6412810 · tags persisted on signals 9dcc282 · churn routing df8d042 · App Store hardening 816f0f2 · MCP productization 1eb6c91 · feature catalog ab14a58. Landed improvements from the catalog: #2 #3 #6 #7 #8 #11.</a:t>
+              <a:t>2 min — this is the slide that earns the meeting. Do not soften the right-hand failure story: a script that exits 0 on an empty output is exactly the failure mode this thesis warns about elsewhere (declared controls are not enforced controls), and it happened in my own harness. The fix was a User-Agent header plus a loud failure on an empty result set. Then land the three consequences in order — the third matters most methodologically, because retracting a claim I had already written is the same discipline as withholding the urgency claim at n=80. Hashes: golden set 80→100 + churn-musing exemplar 58504f3 · two-tag DE rubric + published n=100 run 5d250fb · per-language metrics + model card 8a258f8 · German exemplars e454898 · tag canonicalization e8af0e5 (claim revised to measured reality in c43062e) · per-item persistence + entity rollup 6412810. August: unblock the LLM path 26bf75d · first completed run e032d16 · results into Ch5 eeebbad · retract the confounded fairness claim d3059c9 · RQ3a/RQ3b restatement 79b80ab · journey+owner scoring b75ed6b.</a:t>
             </a:r>
             <a:endParaRPr lang="en-US" dirty="0"/>
           </a:p>
@@ -783,7 +785,7 @@
           <a:p>
             <a:r>
               <a:rPr lang="en-US" dirty="0"/>
-              <a:t>90s. Stress the honesty features: real data only (synthetic excluded), star ratings as a NON-CIRCULAR sentiment gold, seed labels external to the artifact, every number written by a reproducible harness — no hand-typed metrics.</a:t>
+              <a:t>90s. Stress the honesty features: real data only (synthetic excluded), star ratings as a NON-CIRCULAR sentiment gold, seed labels external to the artifact, every number written by a reproducible harness — no hand-typed metrics. New since you last saw this: the third predictor row is filled in, so the next three slides compare like with like.</a:t>
             </a:r>
             <a:endParaRPr lang="en-US" dirty="0"/>
           </a:p>
@@ -871,7 +873,7 @@
           <a:p>
             <a:r>
               <a:rPr lang="en-US" dirty="0"/>
-              <a:t>2 min. The three-rung story. Be precise about gold standards: the 0.37/0.78 rows are the thesis harness (188 seed-labelled signals); the LLM numbers are the artifact's committed in-repo eval on a DIFFERENT 100-case bilingual golden set (28 authored German cases — disclosed) — convergent evidence, not the same table. If probed on exemplars: at n=60 the A/B was not significant (p≈1.0); at n=80, after adding German exemplars, the exact-tag-set lift became significant (8.75%→28.75% per item, in-run paired McNemar p=0.001) while urgency stayed underpowered (81.25%→86.25%, p=0.219); at n=100, after the churn-musing calibration exemplar, the urgency lift is significant too (83%→90%, p=0.039, third consecutive significant run) — we report the whole trajectory ourselves. Tag metrics at n=100 are not comparable to the n=80 snapshot (new adversarial items + completed two-tag DE gold — disclosed). The in-run paired A/B is the designed inference; the model is non-deterministic even at temperature 0.</a:t>
+              <a:t>2 min. The three-rung story — and note what changed since you last saw this slide: the bottom row used to be borrowed from a different gold standard because the LLM had never run on this harness. It has now, so the table is finally like-for-like, and the borrowed numbers moved down into the grey box where they are labelled as a separate standard. If probed on exemplars: at n=60 the A/B was not significant (p≈1.0); at n=80, after adding German exemplars, the exact-tag-set lift became significant (8.75%→28.75%, in-run paired McNemar p=0.001) while urgency stayed underpowered (81.25%→86.25%, p=0.219); at n=100, after the churn-musing calibration exemplar, urgency is significant too (83%→90%, p=0.039, third consecutive run) — the whole trajectory is reported, including the stages where nothing could be claimed. Tag metrics at n=100 are not comparable to the n=80 snapshot (new adversarial items + completed two-tag DE gold — disclosed, and it improves DE tags partly by construction). The in-run paired A/B is the designed inference; the model is non-deterministic even at temperature 0.</a:t>
             </a:r>
             <a:endParaRPr lang="en-US" dirty="0"/>
           </a:p>
@@ -959,7 +961,7 @@
           <a:p>
             <a:r>
               <a:rPr lang="en-US" dirty="0"/>
-              <a:t>90s. This slide wins or loses trust. Lead with the number, land on the boundary: mechanism measured, benefit pending. Examiners reward the distinction — it's also written into the traceability matrix (next slide).</a:t>
+              <a:t>2 min — for an RAI thesis this is the most important results slide, and it did not exist before August. Say the 0-of-8 slowly and let it sit. The argument: everywhere else in this deck fairness is a design commitment; here it is a measured consequence of an engineering choice. Then volunteer the bounds before she asks — eight signals is a small stratum and language is confounded with sector, which is exactly why the aggregate 'German vs English accuracy' comparison was RETRACTED rather than defended (§5A.5). Equal opportunity survives that retraction because it conditions on the gold label. If she pushes on whether this generalises: it does not, and the thesis says so — it is a claim about this corpus and about method choice, which is still the actionable claim for a deployer.</a:t>
             </a:r>
             <a:endParaRPr lang="en-US" dirty="0"/>
           </a:p>
@@ -1047,7 +1049,7 @@
           <a:p>
             <a:r>
               <a:rPr lang="en-US" dirty="0"/>
-              <a:t>90s. Pre-empt the researcher-as-founder question here: externally-labelled gold sets, standardised instruments, reproducible harness, and this matrix. Conflict of interest is declared in the front matter and managed by method, not denial. If asked about the July external reviews (§5A.8): two independent LLM strategic reviews, 45 claims adversarially verified (27 confirmed / 13 partial / 2 refuted), 20 hardening PRs, 17/17 live production checks — and the refuted claims are themselves a finding: unsurfaced capability reads as absent.</a:t>
+              <a:t>90s. This slide is deliberately unflattering to the pipeline and that is the point — it is the strongest available answer to 'why not just let the agent route it?'. Expect the examiner question 'so your routing is only 40% accurate?' and answer it here rather than in the defense: yes, over 51 classes against a 15% floor, under a supplied inventory, and that is precisely the argument for human approval. Note this configuration mirrors deployment — a real workspace configures its owner list rather than inventing labels per signal — but it is still reported separately from the production-config numbers on the previous slides, never merged.</a:t>
             </a:r>
             <a:endParaRPr lang="en-US" dirty="0"/>
           </a:p>
@@ -1135,7 +1137,7 @@
           <a:p>
             <a:r>
               <a:rPr lang="en-US" dirty="0"/>
-              <a:t>90s. Category has moved TOWARD the thesis: analysts declared the insight half commoditised. Each rival owns a fragment; nobody verifiably holds the combination — and we apply the same verification standard to ourselves (previous slide).</a:t>
+              <a:t>90s. This slide wins or loses trust. Lead with the number, land on the boundary: mechanism measured, benefit pending. Examiners reward the distinction — it's also written into the traceability matrix (next slide).</a:t>
             </a:r>
             <a:endParaRPr lang="en-US" dirty="0"/>
           </a:p>
@@ -1223,7 +1225,7 @@
           <a:p>
             <a:r>
               <a:rPr lang="en-US" dirty="0"/>
-              <a:t>90s. Say number ① slowly: the single most important next artifact — a real action, a real metric, a contract, a window, a verdict. The method is already specified (ITS, then SDID). Everything else is engineering.</a:t>
+              <a:t>90s. Pre-empt the researcher-as-founder question here: externally-labelled gold sets, standardised instruments, reproducible harness, and this matrix. Conflict of interest is declared in the front matter and managed by method, not denial. If asked about the July external reviews (§5A.8): two independent LLM strategic reviews, 45 claims adversarially verified (27 confirmed / 13 partial / 2 refuted), 20 hardening PRs, 17/17 live production checks — and the refuted claims are themselves a finding: unsurfaced capability reads as absent.</a:t>
             </a:r>
             <a:endParaRPr lang="en-US" dirty="0"/>
           </a:p>
@@ -1311,7 +1313,7 @@
           <a:p>
             <a:r>
               <a:rPr lang="en-US" dirty="0"/>
-              <a:t>60s. Read the four contributions crisply, end on the one-liner, invite questions. Likely probes: novelty vs MemoryBank (answered on slide 5), founder COI (slide 10), simulated outcomes (slide 9), why not RCTs (slide 12 — ITS/SDID).</a:t>
+              <a:t>90s. Category has moved TOWARD the thesis: analysts declared the insight half commoditised. Each rival owns a fragment; nobody verifiably holds the combination — and we apply the same verification standard to ourselves (previous slide).</a:t>
             </a:r>
             <a:endParaRPr lang="en-US" dirty="0"/>
           </a:p>
@@ -1335,6 +1337,94 @@
             <a:fld id="{F7021451-1387-4CA6-816F-3879F97B5CBC}" type="slidenum">
               <a:rPr lang="en-US"/>
               <a:t>18</a:t>
+            </a:fld>
+            <a:endParaRPr lang="en-US"/>
+          </a:p>
+        </p:txBody>
+      </p:sp>
+    </p:spTree>
+    <p:extLst>
+      <p:ext uri="{BB962C8B-B14F-4D97-AF65-F5344CB8AC3E}">
+        <p14:creationId xmlns:p14="http://schemas.microsoft.com/office/powerpoint/2010/main" val="1024086991"/>
+      </p:ext>
+    </p:extLst>
+  </p:cSld>
+  <p:clrMapOvr>
+    <a:masterClrMapping/>
+  </p:clrMapOvr>
+</p:notes>
+</file>
+
+<file path=ppt/notesSlides/notesSlide19.xml><?xml version="1.0" encoding="utf-8"?>
+<p:notes xmlns:a="http://schemas.openxmlformats.org/drawingml/2006/main" xmlns:r="http://schemas.openxmlformats.org/officeDocument/2006/relationships" xmlns:p="http://schemas.openxmlformats.org/presentationml/2006/main">
+  <p:cSld>
+    <p:spTree>
+      <p:nvGrpSpPr>
+        <p:cNvPr id="1" name=""/>
+        <p:cNvGrpSpPr/>
+        <p:nvPr/>
+      </p:nvGrpSpPr>
+      <p:grpSpPr>
+        <a:xfrm>
+          <a:off x="0" y="0"/>
+          <a:ext cx="0" cy="0"/>
+          <a:chOff x="0" y="0"/>
+          <a:chExt cx="0" cy="0"/>
+        </a:xfrm>
+      </p:grpSpPr>
+      <p:sp>
+        <p:nvSpPr>
+          <p:cNvPr id="2" name="Slide Image Placeholder 1"/>
+          <p:cNvSpPr>
+            <a:spLocks noGrp="1" noRot="1" noChangeAspect="1"/>
+          </p:cNvSpPr>
+          <p:nvPr>
+            <p:ph type="sldImg"/>
+          </p:nvPr>
+        </p:nvSpPr>
+        <p:spPr/>
+      </p:sp>
+      <p:sp>
+        <p:nvSpPr>
+          <p:cNvPr id="3" name="Notes Placeholder 2"/>
+          <p:cNvSpPr>
+            <a:spLocks noGrp="1"/>
+          </p:cNvSpPr>
+          <p:nvPr>
+            <p:ph type="body" idx="1"/>
+          </p:nvPr>
+        </p:nvSpPr>
+        <p:spPr/>
+        <p:txBody>
+          <a:bodyPr/>
+          <a:lstStyle/>
+          <a:p>
+            <a:r>
+              <a:rPr lang="en-US" dirty="0"/>
+              <a:t>90s. Say number ① slowly: the single most important next artifact — a real action, a real metric, a contract, a window, a verdict. The method is already specified (ITS, then SDID). Everything else is engineering.</a:t>
+            </a:r>
+            <a:endParaRPr lang="en-US" dirty="0"/>
+          </a:p>
+        </p:txBody>
+      </p:sp>
+      <p:sp>
+        <p:nvSpPr>
+          <p:cNvPr id="4" name="Slide Number Placeholder 3"/>
+          <p:cNvSpPr>
+            <a:spLocks noGrp="1"/>
+          </p:cNvSpPr>
+          <p:nvPr>
+            <p:ph type="sldNum" sz="quarter" idx="10"/>
+          </p:nvPr>
+        </p:nvSpPr>
+        <p:spPr/>
+        <p:txBody>
+          <a:bodyPr/>
+          <a:lstStyle/>
+          <a:p>
+            <a:fld id="{F7021451-1387-4CA6-816F-3879F97B5CBC}" type="slidenum">
+              <a:rPr lang="en-US"/>
+              <a:t>19</a:t>
             </a:fld>
             <a:endParaRPr lang="en-US"/>
           </a:p>
@@ -1441,6 +1531,94 @@
 </p:notes>
 </file>
 
+<file path=ppt/notesSlides/notesSlide20.xml><?xml version="1.0" encoding="utf-8"?>
+<p:notes xmlns:a="http://schemas.openxmlformats.org/drawingml/2006/main" xmlns:r="http://schemas.openxmlformats.org/officeDocument/2006/relationships" xmlns:p="http://schemas.openxmlformats.org/presentationml/2006/main">
+  <p:cSld>
+    <p:spTree>
+      <p:nvGrpSpPr>
+        <p:cNvPr id="1" name=""/>
+        <p:cNvGrpSpPr/>
+        <p:nvPr/>
+      </p:nvGrpSpPr>
+      <p:grpSpPr>
+        <a:xfrm>
+          <a:off x="0" y="0"/>
+          <a:ext cx="0" cy="0"/>
+          <a:chOff x="0" y="0"/>
+          <a:chExt cx="0" cy="0"/>
+        </a:xfrm>
+      </p:grpSpPr>
+      <p:sp>
+        <p:nvSpPr>
+          <p:cNvPr id="2" name="Slide Image Placeholder 1"/>
+          <p:cNvSpPr>
+            <a:spLocks noGrp="1" noRot="1" noChangeAspect="1"/>
+          </p:cNvSpPr>
+          <p:nvPr>
+            <p:ph type="sldImg"/>
+          </p:nvPr>
+        </p:nvSpPr>
+        <p:spPr/>
+      </p:sp>
+      <p:sp>
+        <p:nvSpPr>
+          <p:cNvPr id="3" name="Notes Placeholder 2"/>
+          <p:cNvSpPr>
+            <a:spLocks noGrp="1"/>
+          </p:cNvSpPr>
+          <p:nvPr>
+            <p:ph type="body" idx="1"/>
+          </p:nvPr>
+        </p:nvSpPr>
+        <p:spPr/>
+        <p:txBody>
+          <a:bodyPr/>
+          <a:lstStyle/>
+          <a:p>
+            <a:r>
+              <a:rPr lang="en-US" dirty="0"/>
+              <a:t>60s. Read the four contributions crisply, end on the one-liner, invite questions. Likely probes: novelty vs MemoryBank (answered on slide 5), founder COI (slide 10), simulated outcomes (slide 9), why not RCTs (slide 12 — ITS/SDID).</a:t>
+            </a:r>
+            <a:endParaRPr lang="en-US" dirty="0"/>
+          </a:p>
+        </p:txBody>
+      </p:sp>
+      <p:sp>
+        <p:nvSpPr>
+          <p:cNvPr id="4" name="Slide Number Placeholder 3"/>
+          <p:cNvSpPr>
+            <a:spLocks noGrp="1"/>
+          </p:cNvSpPr>
+          <p:nvPr>
+            <p:ph type="sldNum" sz="quarter" idx="10"/>
+          </p:nvPr>
+        </p:nvSpPr>
+        <p:spPr/>
+        <p:txBody>
+          <a:bodyPr/>
+          <a:lstStyle/>
+          <a:p>
+            <a:fld id="{F7021451-1387-4CA6-816F-3879F97B5CBC}" type="slidenum">
+              <a:rPr lang="en-US"/>
+              <a:t>20</a:t>
+            </a:fld>
+            <a:endParaRPr lang="en-US"/>
+          </a:p>
+        </p:txBody>
+      </p:sp>
+    </p:spTree>
+    <p:extLst>
+      <p:ext uri="{BB962C8B-B14F-4D97-AF65-F5344CB8AC3E}">
+        <p14:creationId xmlns:p14="http://schemas.microsoft.com/office/powerpoint/2010/main" val="1024086991"/>
+      </p:ext>
+    </p:extLst>
+  </p:cSld>
+  <p:clrMapOvr>
+    <a:masterClrMapping/>
+  </p:clrMapOvr>
+</p:notes>
+</file>
+
 <file path=ppt/notesSlides/notesSlide3.xml><?xml version="1.0" encoding="utf-8"?>
 <p:notes xmlns:a="http://schemas.openxmlformats.org/drawingml/2006/main" xmlns:r="http://schemas.openxmlformats.org/officeDocument/2006/relationships" xmlns:p="http://schemas.openxmlformats.org/presentationml/2006/main">
   <p:cSld>
@@ -1487,7 +1665,7 @@
           <a:p>
             <a:r>
               <a:rPr lang="en-US" dirty="0"/>
-              <a:t>90s. Say why DSR: the question is 'what works by design', not 'what is'. Note H1–H8 map under these four RQs. Flag honestly that RQ4 data collection is in progress — protocol and instruments are complete and in the appendix.</a:t>
+              <a:t>90s. Say why DSR: the question is 'what works by design', not 'what is'. The change since you last saw this: RQ3 has become RQ3a (accuracy) and RQ3b (equity). That is not cosmetic — the August run showed the equity result is the substantive one for a Responsible-AI thesis, and it needed its own question rather than living as a sub-clause. H1–H8 map under these five. Flag honestly that RQ4 has not started: it is the critical path and it is ask #2 today.</a:t>
             </a:r>
             <a:endParaRPr lang="en-US" dirty="0"/>
           </a:p>
@@ -3064,7 +3242,7 @@
                 <a:ea typeface="Calibri" pitchFamily="34" charset="-122"/>
                 <a:cs typeface="Calibri" pitchFamily="34" charset="-120"/>
               </a:rPr>
-              <a:t>Progress review · 1 August 2026 — updated architecture + the July engineering log</a:t>
+              <a:t>Progress review · 8 August 2026 — the evaluation is complete: all three predictors, one gold standard</a:t>
             </a:r>
             <a:endParaRPr lang="en-US" sz="1200" dirty="0"/>
           </a:p>
@@ -3128,7 +3306,7 @@
                 <a:ea typeface="Cambria" pitchFamily="34" charset="-122"/>
                 <a:cs typeface="Cambria" pitchFamily="34" charset="-120"/>
               </a:rPr>
-              <a:t>Progress since mid-July (1/2): security, sessions, governance</a:t>
+              <a:t>Since your last look (1/2): platform, security, governance</a:t>
             </a:r>
             <a:endParaRPr lang="en-US" sz="3200" dirty="0"/>
           </a:p>
@@ -3167,7 +3345,7 @@
                 <a:ea typeface="Calibri" pitchFamily="34" charset="-122"/>
                 <a:cs typeface="Calibri" pitchFamily="34" charset="-120"/>
               </a:rPr>
-              <a:t>The 17–19 Jul hardening sprint — all merged to main; commit hashes in the notes</a:t>
+              <a:t>17 Jul → 7 Aug — none of this has been in front of you; all merged to main, commit hashes in the notes</a:t>
             </a:r>
             <a:endParaRPr lang="en-US" sz="1400" dirty="0"/>
           </a:p>
@@ -3457,7 +3635,7 @@
         <p:spPr>
           <a:xfrm>
             <a:off x="731520" y="1810512"/>
-            <a:ext cx="5303520" cy="3566160"/>
+            <a:ext cx="5303520" cy="3200400"/>
           </a:xfrm>
           <a:prstGeom prst="rect">
             <a:avLst/>
@@ -3569,7 +3747,7 @@
                 <a:ea typeface="Calibri" pitchFamily="34" charset="-122"/>
                 <a:cs typeface="Calibri" pitchFamily="34" charset="-120"/>
               </a:rPr>
-              <a:t>Scheduled uptime monitor — GitHub Actions re-runs the 17-check live smoke every 30 min; two consecutive failures open an issue, auto-closed on recovery</a:t>
+              <a:t>Scheduled uptime monitor — GitHub Actions re-runs the 17-check live smoke on a schedule; two consecutive failures open an issue, auto-closed on recovery</a:t>
             </a:r>
             <a:endParaRPr lang="en-US" sz="1150" dirty="0"/>
           </a:p>
@@ -3623,7 +3801,7 @@
         <p:spPr>
           <a:xfrm>
             <a:off x="6583680" y="1810512"/>
-            <a:ext cx="5029200" cy="3566160"/>
+            <a:ext cx="5029200" cy="3200400"/>
           </a:xfrm>
           <a:prstGeom prst="rect">
             <a:avLst/>
@@ -3728,12 +3906,12 @@
         </p:nvSpPr>
         <p:spPr>
           <a:xfrm>
-            <a:off x="548640" y="5532120"/>
-            <a:ext cx="11064240" cy="868680"/>
+            <a:off x="548640" y="5074920"/>
+            <a:ext cx="11064240" cy="1325880"/>
           </a:xfrm>
           <a:prstGeom prst="roundRect">
             <a:avLst>
-              <a:gd name="adj" fmla="val 6316"/>
+              <a:gd name="adj" fmla="val 4138"/>
             </a:avLst>
           </a:prstGeom>
           <a:solidFill>
@@ -3750,8 +3928,8 @@
         </p:nvSpPr>
         <p:spPr>
           <a:xfrm>
-            <a:off x="777240" y="5641848"/>
-            <a:ext cx="10607040" cy="685800"/>
+            <a:off x="777240" y="5166360"/>
+            <a:ext cx="10607040" cy="274320"/>
           </a:xfrm>
           <a:prstGeom prst="rect">
             <a:avLst/>
@@ -3767,7 +3945,46 @@
               <a:buNone/>
             </a:pPr>
             <a:r>
-              <a:rPr lang="en-US" sz="1250" dirty="0">
+              <a:rPr lang="en-US" sz="1250" b="1" dirty="0">
+                <a:solidFill>
+                  <a:srgbClr val="02C39A"/>
+                </a:solidFill>
+                <a:latin typeface="Calibri" pitchFamily="34" charset="0"/>
+                <a:ea typeface="Calibri" pitchFamily="34" charset="-122"/>
+                <a:cs typeface="Calibri" pitchFamily="34" charset="-120"/>
+              </a:rPr>
+              <a:t>August: making model sovereignty real, not just declared</a:t>
+            </a:r>
+            <a:endParaRPr lang="en-US" sz="1250" dirty="0"/>
+          </a:p>
+        </p:txBody>
+      </p:sp>
+      <p:sp>
+        <p:nvSpPr>
+          <p:cNvPr id="18" name="Text 16"/>
+          <p:cNvSpPr/>
+          <p:nvPr/>
+        </p:nvSpPr>
+        <p:spPr>
+          <a:xfrm>
+            <a:off x="777240" y="5440680"/>
+            <a:ext cx="10607040" cy="914400"/>
+          </a:xfrm>
+          <a:prstGeom prst="rect">
+            <a:avLst/>
+          </a:prstGeom>
+          <a:noFill/>
+          <a:ln/>
+        </p:spPr>
+        <p:txBody>
+          <a:bodyPr wrap="square" lIns="0" tIns="0" rIns="0" bIns="0" rtlCol="0" anchor="ctr"/>
+          <a:lstStyle/>
+          <a:p>
+            <a:pPr indent="0" marL="0">
+              <a:buNone/>
+            </a:pPr>
+            <a:r>
+              <a:rPr lang="en-US" sz="1150" dirty="0">
                 <a:solidFill>
                   <a:srgbClr val="FFFFFF"/>
                 </a:solidFill>
@@ -3775,9 +3992,9 @@
                 <a:ea typeface="Calibri" pitchFamily="34" charset="-122"/>
                 <a:cs typeface="Calibri" pitchFamily="34" charset="-120"/>
               </a:rPr>
-              <a:t>Pattern: review-then-harden. Two independent adversarial audits of the July merges produced the rate-limiter and fail-closed fixes — declared controls ≠ enforced controls until verified.</a:t>
-            </a:r>
-            <a:endParaRPr lang="en-US" sz="1250" dirty="0"/>
+              <a:t>Embeddings can now point at a different provider than chat (migration 012 retargets taxonomy embeddings to vector(1024)) — so an EU embedding provider is a config change, not a rewrite. Provider errors now name the knob that actually failed instead of guessing from host equality. App Store connector reports an empty feed instead of a contented zero.  ·  Pattern throughout: review-then-harden — declared controls are not enforced controls until verified.</a:t>
+            </a:r>
+            <a:endParaRPr lang="en-US" sz="1150" dirty="0"/>
           </a:p>
         </p:txBody>
       </p:sp>
@@ -3839,7 +4056,7 @@
                 <a:ea typeface="Cambria" pitchFamily="34" charset="-122"/>
                 <a:cs typeface="Cambria" pitchFamily="34" charset="-120"/>
               </a:rPr>
-              <a:t>Progress since mid-July (2/2): evaluation &amp; platform</a:t>
+              <a:t>Since your last look (2/2): the evaluation finally completed</a:t>
             </a:r>
             <a:endParaRPr lang="en-US" sz="3200" dirty="0"/>
           </a:p>
@@ -3878,7 +4095,7 @@
                 <a:ea typeface="Calibri" pitchFamily="34" charset="-122"/>
                 <a:cs typeface="Calibri" pitchFamily="34" charset="-120"/>
               </a:rPr>
-              <a:t>Eval-improve iterations measured on the committed golden set; platform work aimed at pilots</a:t>
+              <a:t>The LLM row of the results table stopped saying "pending" on 4 August — and changed three things</a:t>
             </a:r>
             <a:endParaRPr lang="en-US" sz="1400" dirty="0"/>
           </a:p>
@@ -4153,7 +4370,7 @@
                 <a:ea typeface="Cambria" pitchFamily="34" charset="-122"/>
                 <a:cs typeface="Cambria" pitchFamily="34" charset="-120"/>
               </a:rPr>
-              <a:t>Evaluation</a:t>
+              <a:t>The in-repo golden set</a:t>
             </a:r>
             <a:endParaRPr lang="en-US" sz="1600" dirty="0"/>
           </a:p>
@@ -4313,13 +4530,13 @@
             <a:r>
               <a:rPr lang="en-US" sz="1600" b="1" dirty="0">
                 <a:solidFill>
-                  <a:srgbClr val="1E2761"/>
+                  <a:srgbClr val="990011"/>
                 </a:solidFill>
                 <a:latin typeface="Cambria" pitchFamily="34" charset="0"/>
                 <a:ea typeface="Cambria" pitchFamily="34" charset="-122"/>
                 <a:cs typeface="Cambria" pitchFamily="34" charset="-120"/>
               </a:rPr>
-              <a:t>Platform &amp; connectors</a:t>
+              <a:t>The 188-signal run — completed 4 Aug</a:t>
             </a:r>
             <a:endParaRPr lang="en-US" sz="1600" dirty="0"/>
           </a:p>
@@ -4334,7 +4551,7 @@
         <p:spPr>
           <a:xfrm>
             <a:off x="6583680" y="1810512"/>
-            <a:ext cx="5029200" cy="3566160"/>
+            <a:ext cx="5029200" cy="3657600"/>
           </a:xfrm>
           <a:prstGeom prst="rect">
             <a:avLst/>
@@ -4348,13 +4565,13 @@
           <a:p>
             <a:pPr marL="342900" indent="-342900">
               <a:spcAft>
-                <a:spcPts val="600"/>
+                <a:spcPts val="500"/>
               </a:spcAft>
               <a:buSzPct val="100000"/>
               <a:buChar char="•"/>
             </a:pPr>
             <a:r>
-              <a:rPr lang="en-US" sz="1150" dirty="0">
+              <a:rPr lang="en-US" sz="1100" dirty="0">
                 <a:solidFill>
                   <a:srgbClr val="1A1A2E"/>
                 </a:solidFill>
@@ -4362,20 +4579,20 @@
                 <a:ea typeface="Calibri" pitchFamily="34" charset="-122"/>
                 <a:cs typeface="Calibri" pitchFamily="34" charset="-120"/>
               </a:rPr>
-              <a:t>Enrichment tags persisted on signal records + per-entity top_tags and rollup — supplier/product scorecards without a CDP</a:t>
-            </a:r>
-            <a:endParaRPr lang="en-US" sz="1150" dirty="0"/>
+              <a:t>It had never been un-run — it had been SILENTLY BROKEN. The gateway 403s Python-urllib's default User-Agent, and the script exited 0 after writing an empty file. A green exit code on an empty result, for weeks</a:t>
+            </a:r>
+            <a:endParaRPr lang="en-US" sz="1100" dirty="0"/>
           </a:p>
           <a:p>
             <a:pPr marL="342900" indent="-342900">
               <a:spcAft>
-                <a:spcPts val="600"/>
+                <a:spcPts val="500"/>
               </a:spcAft>
               <a:buSzPct val="100000"/>
               <a:buChar char="•"/>
             </a:pPr>
             <a:r>
-              <a:rPr lang="en-US" sz="1150" dirty="0">
+              <a:rPr lang="en-US" sz="1100" dirty="0">
                 <a:solidFill>
                   <a:srgbClr val="1A1A2E"/>
                 </a:solidFill>
@@ -4383,20 +4600,20 @@
                 <a:ea typeface="Calibri" pitchFamily="34" charset="-122"/>
                 <a:cs typeface="Calibri" pitchFamily="34" charset="-120"/>
               </a:rPr>
-              <a:t>Deterministic churn save-desk routing — leaving-intent tags at high/critical urgency always carry a customer_recovery proposal, inserted by code (auditable), still through the approval gate</a:t>
-            </a:r>
-            <a:endParaRPr lang="en-US" sz="1150" dirty="0"/>
+              <a:t>Now: 188/188 signals enriched — the pending cells in §5A.3–5A.5 are closed and all three predictors sit on ONE gold standard</a:t>
+            </a:r>
+            <a:endParaRPr lang="en-US" sz="1100" dirty="0"/>
           </a:p>
           <a:p>
             <a:pPr marL="342900" indent="-342900">
               <a:spcAft>
-                <a:spcPts val="600"/>
+                <a:spcPts val="500"/>
               </a:spcAft>
               <a:buSzPct val="100000"/>
               <a:buChar char="•"/>
             </a:pPr>
             <a:r>
-              <a:rPr lang="en-US" sz="1150" dirty="0">
+              <a:rPr lang="en-US" sz="1100" dirty="0">
                 <a:solidFill>
                   <a:srgbClr val="1A1A2E"/>
                 </a:solidFill>
@@ -4404,20 +4621,20 @@
                 <a:ea typeface="Calibri" pitchFamily="34" charset="-122"/>
                 <a:cs typeface="Calibri" pitchFamily="34" charset="-120"/>
               </a:rPr>
-              <a:t>App Store connector hardened against live-feed quirks — per-page retries with backoff, empty-first-page retry, 404-as-end-of-feed, de/at/ch storefront defaults</a:t>
-            </a:r>
-            <a:endParaRPr lang="en-US" sz="1150" dirty="0"/>
+              <a:t>Changed #1 — RQ3 split into RQ3a (accuracy) and RQ3b (equity): the equity result turned out to be the substantive one</a:t>
+            </a:r>
+            <a:endParaRPr lang="en-US" sz="1100" dirty="0"/>
           </a:p>
           <a:p>
             <a:pPr marL="342900" indent="-342900">
               <a:spcAft>
-                <a:spcPts val="600"/>
+                <a:spcPts val="500"/>
               </a:spcAft>
               <a:buSzPct val="100000"/>
               <a:buChar char="•"/>
             </a:pPr>
             <a:r>
-              <a:rPr lang="en-US" sz="1150" dirty="0">
+              <a:rPr lang="en-US" sz="1100" dirty="0">
                 <a:solidFill>
                   <a:srgbClr val="1A1A2E"/>
                 </a:solidFill>
@@ -4425,20 +4642,20 @@
                 <a:ea typeface="Calibri" pitchFamily="34" charset="-122"/>
                 <a:cs typeface="Calibri" pitchFamily="34" charset="-120"/>
               </a:rPr>
-              <a:t>MCP server productized — 8 read-only tools under API-key auth, + model card &amp; evidence pack; write actions deliberately excluded</a:t>
-            </a:r>
-            <a:endParaRPr lang="en-US" sz="1150" dirty="0"/>
+              <a:t>Changed #2 — journey stage + owner now scored under a supplied inventory (§5A.4.1); they were "labelled but not scored" in every prior draft</a:t>
+            </a:r>
+            <a:endParaRPr lang="en-US" sz="1100" dirty="0"/>
           </a:p>
           <a:p>
             <a:pPr marL="342900" indent="-342900">
               <a:spcAft>
-                <a:spcPts val="600"/>
+                <a:spcPts val="500"/>
               </a:spcAft>
               <a:buSzPct val="100000"/>
               <a:buChar char="•"/>
             </a:pPr>
             <a:r>
-              <a:rPr lang="en-US" sz="1150" dirty="0">
+              <a:rPr lang="en-US" sz="1100" dirty="0">
                 <a:solidFill>
                   <a:srgbClr val="1A1A2E"/>
                 </a:solidFill>
@@ -4446,9 +4663,9 @@
                 <a:ea typeface="Calibri" pitchFamily="34" charset="-122"/>
                 <a:cs typeface="Calibri" pitchFamily="34" charset="-120"/>
               </a:rPr>
-              <a:t>Feature catalog — 35 features + 12 prioritized improvements with design rationale vs alternatives (docs/features.md); six improvements already landed</a:t>
-            </a:r>
-            <a:endParaRPr lang="en-US" sz="1150" dirty="0"/>
+              <a:t>Changed #3 — a cross-language fairness claim was RETRACTED: language is confounded with sector here, so the aggregate DE-vs-EN comparison would restate sector composition</a:t>
+            </a:r>
+            <a:endParaRPr lang="en-US" sz="1100" dirty="0"/>
           </a:p>
         </p:txBody>
       </p:sp>
@@ -4460,12 +4677,12 @@
         </p:nvSpPr>
         <p:spPr>
           <a:xfrm>
-            <a:off x="548640" y="5532120"/>
-            <a:ext cx="11064240" cy="868680"/>
+            <a:off x="548640" y="5623560"/>
+            <a:ext cx="5852160" cy="777240"/>
           </a:xfrm>
           <a:prstGeom prst="roundRect">
             <a:avLst>
-              <a:gd name="adj" fmla="val 6316"/>
+              <a:gd name="adj" fmla="val 7059"/>
             </a:avLst>
           </a:prstGeom>
           <a:solidFill>
@@ -4487,8 +4704,8 @@
         </p:nvSpPr>
         <p:spPr>
           <a:xfrm>
-            <a:off x="777240" y="5641848"/>
-            <a:ext cx="10607040" cy="685800"/>
+            <a:off x="731520" y="5705856"/>
+            <a:ext cx="5486400" cy="640080"/>
           </a:xfrm>
           <a:prstGeom prst="rect">
             <a:avLst/>
@@ -4504,7 +4721,7 @@
               <a:buNone/>
             </a:pPr>
             <a:r>
-              <a:rPr lang="en-US" sz="1250" dirty="0">
+              <a:rPr lang="en-US" sz="1050" dirty="0">
                 <a:solidFill>
                   <a:srgbClr val="1A1A2E"/>
                 </a:solidFill>
@@ -4512,9 +4729,9 @@
                 <a:ea typeface="Calibri" pitchFamily="34" charset="-122"/>
                 <a:cs typeface="Calibri" pitchFamily="34" charset="-120"/>
               </a:rPr>
-              <a:t>Method note: every evaluation change above shipped as one measured iteration — gap → root cause → intervention → in-run paired A/B — with the negative result (p=0.219 at n=80) reported, not re-rolled.</a:t>
-            </a:r>
-            <a:endParaRPr lang="en-US" sz="1250" dirty="0"/>
+              <a:t>Method note: each evaluation change ships as one measured iteration — gap → root cause → intervention → in-run paired A/B — with the negative result (p=0.219 at n=80) reported, not re-rolled.</a:t>
+            </a:r>
+            <a:endParaRPr lang="en-US" sz="1050" dirty="0"/>
           </a:p>
         </p:txBody>
       </p:sp>
@@ -4889,8 +5106,8 @@
         </p:nvSpPr>
         <p:spPr>
           <a:xfrm>
-            <a:off x="548640" y="5486400"/>
-            <a:ext cx="11064240" cy="777240"/>
+            <a:off x="548640" y="5440680"/>
+            <a:ext cx="11064240" cy="868680"/>
           </a:xfrm>
           <a:prstGeom prst="rect">
             <a:avLst/>
@@ -4906,7 +5123,7 @@
               <a:buNone/>
             </a:pPr>
             <a:r>
-              <a:rPr lang="en-US" sz="1350" dirty="0">
+              <a:rPr lang="en-US" sz="1300" dirty="0">
                 <a:solidFill>
                   <a:srgbClr val="5A6478"/>
                 </a:solidFill>
@@ -4914,9 +5131,9 @@
                 <a:ea typeface="Calibri" pitchFamily="34" charset="-122"/>
                 <a:cs typeface="Calibri" pitchFamily="34" charset="-120"/>
               </a:rPr>
-              <a:t>188 real, public, paraphrased signals · 3 sectors (fintech / food delivery / B2B industrial) · EN+DE · human seed labels, authored independently of the artifact. Plus: the artifact's own committed in-repo evaluation (100-case bilingual golden set — 72 EN / 28 DE, live LLM, published metrics) as convergent evidence.</a:t>
-            </a:r>
-            <a:endParaRPr lang="en-US" sz="1350" dirty="0"/>
+              <a:t>188 real, public, paraphrased signals · 3 sectors (fintech / food delivery / B2B industrial) · EN+DE · human seed labels, authored independently of the artifact. All three predictors — lexicon floor, classical ML, LLM path — have now been scored against this gold (the LLM row completed 4 Aug). Separately: the artifact's own committed in-repo evaluation (100-case bilingual golden set — 72 EN / 28 DE, live LLM, published metrics) as convergent evidence on a different gold.</a:t>
+            </a:r>
+            <a:endParaRPr lang="en-US" sz="1300" dirty="0"/>
           </a:p>
         </p:txBody>
       </p:sp>
@@ -5896,7 +6113,7 @@
                         <a:buNone/>
                       </a:pPr>
                       <a:r>
-                        <a:rPr lang="en-US" sz="1300" dirty="0">
+                        <a:rPr lang="en-US" sz="1300" b="1" dirty="0">
                           <a:solidFill>
                             <a:srgbClr val="000000"/>
                           </a:solidFill>
@@ -5904,7 +6121,7 @@
                           <a:ea typeface="Calibri" pitchFamily="34" charset="-122"/>
                           <a:cs typeface="Calibri" pitchFamily="34" charset="-120"/>
                         </a:rPr>
-                        <a:t>LLM path (in-repo, 100-case bilingual golden set)</a:t>
+                        <a:t>LLM enrichment path</a:t>
                       </a:r>
                       <a:endParaRPr lang="en-US" sz="1300" dirty="0">
                         <a:latin typeface="Calibri" charset="0"/>
@@ -5961,7 +6178,7 @@
                         <a:buNone/>
                       </a:pPr>
                       <a:r>
-                        <a:rPr lang="en-US" sz="1300" dirty="0">
+                        <a:rPr lang="en-US" sz="1300" b="1" dirty="0">
                           <a:solidFill>
                             <a:srgbClr val="000000"/>
                           </a:solidFill>
@@ -5969,7 +6186,7 @@
                           <a:ea typeface="Calibri" pitchFamily="34" charset="-122"/>
                           <a:cs typeface="Calibri" pitchFamily="34" charset="-120"/>
                         </a:rPr>
-                        <a:t>0.97 (sentiment)</a:t>
+                        <a:t>0.86</a:t>
                       </a:r>
                       <a:endParaRPr lang="en-US" sz="1300" dirty="0">
                         <a:latin typeface="Calibri" charset="0"/>
@@ -6026,7 +6243,7 @@
                         <a:buNone/>
                       </a:pPr>
                       <a:r>
-                        <a:rPr lang="en-US" sz="1300" dirty="0">
+                        <a:rPr lang="en-US" sz="1300" b="1" dirty="0">
                           <a:solidFill>
                             <a:srgbClr val="000000"/>
                           </a:solidFill>
@@ -6034,7 +6251,7 @@
                           <a:ea typeface="Calibri" pitchFamily="34" charset="-122"/>
                           <a:cs typeface="Calibri" pitchFamily="34" charset="-120"/>
                         </a:rPr>
-                        <a:t>0.90 (urgency)</a:t>
+                        <a:t>0.68</a:t>
                       </a:r>
                       <a:endParaRPr lang="en-US" sz="1300" dirty="0">
                         <a:latin typeface="Calibri" charset="0"/>
@@ -6095,8 +6312,8 @@
         </p:nvSpPr>
         <p:spPr>
           <a:xfrm>
-            <a:off x="548640" y="3794760"/>
-            <a:ext cx="6675120" cy="1005840"/>
+            <a:off x="548640" y="3520440"/>
+            <a:ext cx="6675120" cy="457200"/>
           </a:xfrm>
           <a:prstGeom prst="rect">
             <a:avLst/>
@@ -6112,7 +6329,46 @@
               <a:buNone/>
             </a:pPr>
             <a:r>
-              <a:rPr lang="en-US" sz="1300" dirty="0">
+              <a:rPr lang="en-US" sz="1150" i="1" dirty="0">
+                <a:solidFill>
+                  <a:srgbClr val="5A6478"/>
+                </a:solidFill>
+                <a:latin typeface="Calibri" pitchFamily="34" charset="0"/>
+                <a:ea typeface="Calibri" pitchFamily="34" charset="-122"/>
+                <a:cs typeface="Calibri" pitchFamily="34" charset="-120"/>
+              </a:rPr>
+              <a:t>One gold standard, all three rows — the 188 externally seed-labelled signals. Sentiment is scored against the 1–5 star rating, which is independent of the text the classifier reads.</a:t>
+            </a:r>
+            <a:endParaRPr lang="en-US" sz="1150" dirty="0"/>
+          </a:p>
+        </p:txBody>
+      </p:sp>
+      <p:sp>
+        <p:nvSpPr>
+          <p:cNvPr id="14" name="Text 11"/>
+          <p:cNvSpPr/>
+          <p:nvPr/>
+        </p:nvSpPr>
+        <p:spPr>
+          <a:xfrm>
+            <a:off x="548640" y="4023360"/>
+            <a:ext cx="6675120" cy="1188720"/>
+          </a:xfrm>
+          <a:prstGeom prst="rect">
+            <a:avLst/>
+          </a:prstGeom>
+          <a:noFill/>
+          <a:ln/>
+        </p:spPr>
+        <p:txBody>
+          <a:bodyPr wrap="square" rtlCol="0" anchor="ctr"/>
+          <a:lstStyle/>
+          <a:p>
+            <a:pPr indent="0" marL="0">
+              <a:buNone/>
+            </a:pPr>
+            <a:r>
+              <a:rPr lang="en-US" sz="1250" dirty="0">
                 <a:solidFill>
                   <a:srgbClr val="1A1A2E"/>
                 </a:solidFill>
@@ -6120,38 +6376,65 @@
                 <a:ea typeface="Calibri" pitchFamily="34" charset="-122"/>
                 <a:cs typeface="Calibri" pitchFamily="34" charset="-120"/>
               </a:rPr>
-              <a:t>Why the floor fails: paraphrased operational complaints ("transaction history cannot be exported…") carry no sentiment words — 58 of 94 negatives misread as neutral. Substantive finding, not a strawman.</a:t>
-            </a:r>
-            <a:endParaRPr lang="en-US" sz="1300" dirty="0"/>
-          </a:p>
-        </p:txBody>
-      </p:sp>
-      <p:sp>
-        <p:nvSpPr>
-          <p:cNvPr id="14" name="Text 11"/>
-          <p:cNvSpPr/>
-          <p:nvPr/>
-        </p:nvSpPr>
-        <p:spPr>
-          <a:xfrm>
-            <a:off x="548640" y="4846320"/>
-            <a:ext cx="6675120" cy="1234440"/>
-          </a:xfrm>
-          <a:prstGeom prst="rect">
-            <a:avLst/>
-          </a:prstGeom>
-          <a:noFill/>
-          <a:ln/>
-        </p:spPr>
-        <p:txBody>
-          <a:bodyPr wrap="square" rtlCol="0" anchor="ctr"/>
+              <a:t>The gain is NOT uniform — and the shape is the finding. Contextual reasoning buys a lot on sentiment (macro-F1 0.52 → 0.67) and little on severity (0.65 → 0.68): severity is carried by lexical markers that n-grams already learn. So the loop's precondition is satisfiable by more than one method, and a deployer weighing cost, latency and sovereignty gets a real decision rather than an instruction.</a:t>
+            </a:r>
+            <a:endParaRPr lang="en-US" sz="1250" dirty="0"/>
+          </a:p>
+        </p:txBody>
+      </p:sp>
+      <p:sp>
+        <p:nvSpPr>
+          <p:cNvPr id="15" name="Shape 12"/>
+          <p:cNvSpPr/>
+          <p:nvPr/>
+        </p:nvSpPr>
+        <p:spPr>
+          <a:xfrm>
+            <a:off x="548640" y="5230368"/>
+            <a:ext cx="6675120" cy="1097280"/>
+          </a:xfrm>
+          <a:prstGeom prst="roundRect">
+            <a:avLst>
+              <a:gd name="adj" fmla="val 5000"/>
+            </a:avLst>
+          </a:prstGeom>
+          <a:solidFill>
+            <a:srgbClr val="F4F7FC"/>
+          </a:solidFill>
+          <a:ln w="12700">
+            <a:solidFill>
+              <a:srgbClr val="CADCFC"/>
+            </a:solidFill>
+            <a:prstDash val="solid"/>
+          </a:ln>
+        </p:spPr>
+      </p:sp>
+      <p:sp>
+        <p:nvSpPr>
+          <p:cNvPr id="16" name="Text 13"/>
+          <p:cNvSpPr/>
+          <p:nvPr/>
+        </p:nvSpPr>
+        <p:spPr>
+          <a:xfrm>
+            <a:off x="731520" y="5321808"/>
+            <a:ext cx="6309360" cy="960120"/>
+          </a:xfrm>
+          <a:prstGeom prst="rect">
+            <a:avLst/>
+          </a:prstGeom>
+          <a:noFill/>
+          <a:ln/>
+        </p:spPr>
+        <p:txBody>
+          <a:bodyPr wrap="square" lIns="0" tIns="0" rIns="0" bIns="0" rtlCol="0" anchor="ctr"/>
           <a:lstStyle/>
           <a:p>
             <a:pPr indent="0" marL="0">
               <a:buNone/>
             </a:pPr>
             <a:r>
-              <a:rPr lang="en-US" sz="1300" dirty="0">
+              <a:rPr lang="en-US" sz="1150" dirty="0">
                 <a:solidFill>
                   <a:srgbClr val="1E2761"/>
                 </a:solidFill>
@@ -6159,15 +6442,15 @@
                 <a:ea typeface="Calibri" pitchFamily="34" charset="-122"/>
                 <a:cs typeface="Calibri" pitchFamily="34" charset="-120"/>
               </a:rPr>
-              <a:t>Published in-repo run (CLARA, GLM-5.2, 18 Jul 2026, n=100 incl. 28 DE): sentiment 97.0% (CI 93–100) · urgency 90.0% (CI 84–95) · tag F1 82.7% by meaning vs 21–28% exact-set — semantic scoring vindicated; DE within ~1pp of EN on urgency. Real-data star-proxy: ≈90% across all three sectors, zero fine-tuning.</a:t>
-            </a:r>
-            <a:endParaRPr lang="en-US" sz="1300" dirty="0"/>
+              <a:t>Convergent — a DIFFERENT gold standard, never merged into the table: on the artifact's own curated 100-case set (18 Jul, 72 EN / 28 DE) the same path scores 0.97 sentiment / 0.90 urgency. The divergence from 0.86 is expected — curated sets select for label clarity — and 0.86 is the figure the thesis quotes.</a:t>
+            </a:r>
+            <a:endParaRPr lang="en-US" sz="1150" dirty="0"/>
           </a:p>
         </p:txBody>
       </p:sp>
       <p:pic>
         <p:nvPicPr>
-          <p:cNvPr id="15" name="Image 0" descr="/Users/olamakri/Documents/CLARA/thesis/evaluation/results/risk_confusion.png">    </p:cNvPr>
+          <p:cNvPr id="17" name="Image 0" descr="/Users/olamakri/Documents/CLARA/thesis/evaluation/results/risk_confusion.png">    </p:cNvPr>
           <p:cNvPicPr>
             <a:picLocks noChangeAspect="1"/>
           </p:cNvPicPr>
@@ -6191,14 +6474,14 @@
       </p:pic>
       <p:sp>
         <p:nvSpPr>
-          <p:cNvPr id="16" name="Text 12"/>
-          <p:cNvSpPr/>
-          <p:nvPr/>
-        </p:nvSpPr>
-        <p:spPr>
-          <a:xfrm>
-            <a:off x="7635240" y="5257800"/>
-            <a:ext cx="3931920" cy="731520"/>
+          <p:cNvPr id="18" name="Text 14"/>
+          <p:cNvSpPr/>
+          <p:nvPr/>
+        </p:nvSpPr>
+        <p:spPr>
+          <a:xfrm>
+            <a:off x="7635240" y="5230368"/>
+            <a:ext cx="3931920" cy="1097280"/>
           </a:xfrm>
           <a:prstGeom prst="rect">
             <a:avLst/>
@@ -6214,7 +6497,7 @@
               <a:buNone/>
             </a:pPr>
             <a:r>
-              <a:rPr lang="en-US" sz="1150" i="1" dirty="0">
+              <a:rPr lang="en-US" sz="1100" i="1" dirty="0">
                 <a:solidFill>
                   <a:srgbClr val="5A6478"/>
                 </a:solidFill>
@@ -6222,9 +6505,9 @@
                 <a:ea typeface="Calibri" pitchFamily="34" charset="-122"/>
                 <a:cs typeface="Calibri" pitchFamily="34" charset="-120"/>
               </a:rPr>
-              <a:t>Keyword floor collapses risk to "low" — 19 of 27 critical signals missed.</a:t>
-            </a:r>
-            <a:endParaRPr lang="en-US" sz="1150" dirty="0"/>
+              <a:t>Keyword floor collapses risk to "low" — 19 of 27 critical signals missed. On sentiment the floor fails the same way: paraphrased operational complaints ("transaction history cannot be exported…") carry no sentiment words, so 58 of 94 negatives are misread as neutral. A substantive finding, not a strawman.</a:t>
+            </a:r>
+            <a:endParaRPr lang="en-US" sz="1100" dirty="0"/>
           </a:p>
         </p:txBody>
       </p:sp>
@@ -6286,7 +6569,7 @@
                 <a:ea typeface="Cambria" pitchFamily="34" charset="-122"/>
                 <a:cs typeface="Cambria" pitchFamily="34" charset="-120"/>
               </a:rPr>
-              <a:t>Result 2: the memory steers, honestly bounded</a:t>
+              <a:t>Result 2: whose problems reach a human at all</a:t>
             </a:r>
             <a:endParaRPr lang="en-US" sz="3200" dirty="0"/>
           </a:p>
@@ -6325,7 +6608,7 @@
                 <a:ea typeface="Calibri" pitchFamily="34" charset="-122"/>
                 <a:cs typeface="Calibri" pitchFamily="34" charset="-120"/>
               </a:rPr>
-              <a:t>The perishable-learning mechanism, instrumented</a:t>
+              <a:t>RQ3b — equal opportunity: recall on the signals whose gold label warrants escalation</a:t>
             </a:r>
             <a:endParaRPr lang="en-US" sz="1400" dirty="0"/>
           </a:p>
@@ -6575,7 +6858,7 @@
         </p:nvSpPr>
         <p:spPr>
           <a:xfrm>
-            <a:off x="731520" y="2011680"/>
+            <a:off x="731520" y="1645920"/>
             <a:ext cx="3291840" cy="822960"/>
           </a:xfrm>
           <a:prstGeom prst="rect">
@@ -6594,13 +6877,13 @@
             <a:r>
               <a:rPr lang="en-US" sz="5400" b="1" dirty="0">
                 <a:solidFill>
-                  <a:srgbClr val="1E2761"/>
+                  <a:srgbClr val="990011"/>
                 </a:solidFill>
                 <a:latin typeface="Cambria" pitchFamily="34" charset="0"/>
                 <a:ea typeface="Cambria" pitchFamily="34" charset="-122"/>
                 <a:cs typeface="Cambria" pitchFamily="34" charset="-120"/>
               </a:rPr>
-              <a:t>21% → 71%</a:t>
+              <a:t>0 of 8</a:t>
             </a:r>
             <a:endParaRPr lang="en-US" sz="5400" dirty="0"/>
           </a:p>
@@ -6614,7 +6897,7 @@
         </p:nvSpPr>
         <p:spPr>
           <a:xfrm>
-            <a:off x="731520" y="2852928"/>
+            <a:off x="731520" y="2487168"/>
             <a:ext cx="3291840" cy="594360"/>
           </a:xfrm>
           <a:prstGeom prst="rect">
@@ -6639,7 +6922,7 @@
                 <a:ea typeface="Calibri" pitchFamily="34" charset="-122"/>
                 <a:cs typeface="Calibri" pitchFamily="34" charset="-120"/>
               </a:rPr>
-              <a:t>share of a past remedy appearing in the new recommendation when retrieval is ON (66.7% adoption)</a:t>
+              <a:t>critical German signals escalated by the keyword floor — none</a:t>
             </a:r>
             <a:endParaRPr lang="en-US" sz="1250" dirty="0"/>
           </a:p>
@@ -6653,7 +6936,7 @@
         </p:nvSpPr>
         <p:spPr>
           <a:xfrm>
-            <a:off x="4434840" y="2011680"/>
+            <a:off x="4434840" y="1645920"/>
             <a:ext cx="3291840" cy="822960"/>
           </a:xfrm>
           <a:prstGeom prst="rect">
@@ -6678,7 +6961,7 @@
                 <a:ea typeface="Cambria" pitchFamily="34" charset="-122"/>
                 <a:cs typeface="Cambria" pitchFamily="34" charset="-120"/>
               </a:rPr>
-              <a:t>0.503</a:t>
+              <a:t>87.5 / 87.8</a:t>
             </a:r>
             <a:endParaRPr lang="en-US" sz="5400" dirty="0"/>
           </a:p>
@@ -6692,7 +6975,7 @@
         </p:nvSpPr>
         <p:spPr>
           <a:xfrm>
-            <a:off x="4434840" y="2852928"/>
+            <a:off x="4434840" y="2487168"/>
             <a:ext cx="3291840" cy="594360"/>
           </a:xfrm>
           <a:prstGeom prst="rect">
@@ -6717,7 +7000,7 @@
                 <a:ea typeface="Calibri" pitchFamily="34" charset="-122"/>
                 <a:cs typeface="Calibri" pitchFamily="34" charset="-120"/>
               </a:rPr>
-              <a:t>alignment lift vs a same-run noise floor that absorbs model jitter</a:t>
+              <a:t>German / English escalation recall on the LLM path — near-parity</a:t>
             </a:r>
             <a:endParaRPr lang="en-US" sz="1250" dirty="0"/>
           </a:p>
@@ -6725,104 +7008,26 @@
       </p:sp>
       <p:sp>
         <p:nvSpPr>
-          <p:cNvPr id="16" name="Text 14"/>
-          <p:cNvSpPr/>
-          <p:nvPr/>
-        </p:nvSpPr>
-        <p:spPr>
-          <a:xfrm>
-            <a:off x="8138160" y="2011680"/>
-            <a:ext cx="3291840" cy="822960"/>
-          </a:xfrm>
-          <a:prstGeom prst="rect">
-            <a:avLst/>
-          </a:prstGeom>
-          <a:noFill/>
-          <a:ln/>
-        </p:spPr>
-        <p:txBody>
-          <a:bodyPr wrap="square" lIns="0" tIns="0" rIns="0" bIns="0" rtlCol="0" anchor="ctr"/>
-          <a:lstStyle/>
-          <a:p>
-            <a:pPr algn="ctr" indent="0" marL="0">
-              <a:buNone/>
-            </a:pPr>
-            <a:r>
-              <a:rPr lang="en-US" sz="5400" b="1" dirty="0">
-                <a:solidFill>
-                  <a:srgbClr val="1E2761"/>
-                </a:solidFill>
-                <a:latin typeface="Cambria" pitchFamily="34" charset="0"/>
-                <a:ea typeface="Cambria" pitchFamily="34" charset="-122"/>
-                <a:cs typeface="Cambria" pitchFamily="34" charset="-120"/>
-              </a:rPr>
-              <a:t>0 / 2.5%</a:t>
-            </a:r>
-            <a:endParaRPr lang="en-US" sz="5400" dirty="0"/>
-          </a:p>
-        </p:txBody>
-      </p:sp>
-      <p:sp>
-        <p:nvSpPr>
-          <p:cNvPr id="17" name="Text 15"/>
-          <p:cNvSpPr/>
-          <p:nvPr/>
-        </p:nvSpPr>
-        <p:spPr>
-          <a:xfrm>
-            <a:off x="8138160" y="2852928"/>
-            <a:ext cx="3291840" cy="594360"/>
-          </a:xfrm>
-          <a:prstGeom prst="rect">
-            <a:avLst/>
-          </a:prstGeom>
-          <a:noFill/>
-          <a:ln/>
-        </p:spPr>
-        <p:txBody>
-          <a:bodyPr wrap="square" lIns="0" tIns="0" rIns="0" bIns="0" rtlCol="0" anchor="ctr"/>
-          <a:lstStyle/>
-          <a:p>
-            <a:pPr algn="ctr" indent="0" marL="0">
-              <a:buNone/>
-            </a:pPr>
-            <a:r>
-              <a:rPr lang="en-US" sz="1250" dirty="0">
-                <a:solidFill>
-                  <a:srgbClr val="5A6478"/>
-                </a:solidFill>
-                <a:latin typeface="Calibri" pitchFamily="34" charset="0"/>
-                <a:ea typeface="Calibri" pitchFamily="34" charset="-122"/>
-                <a:cs typeface="Calibri" pitchFamily="34" charset="-120"/>
-              </a:rPr>
-              <a:t>PII leaks across ledger / hallucination rate, 17-Jul published snapshot (hallucination check EN-scope by construction)</a:t>
-            </a:r>
-            <a:endParaRPr lang="en-US" sz="1250" dirty="0"/>
-          </a:p>
-        </p:txBody>
-      </p:sp>
-      <p:sp>
-        <p:nvSpPr>
-          <p:cNvPr id="18" name="Shape 16"/>
-          <p:cNvSpPr/>
-          <p:nvPr/>
-        </p:nvSpPr>
-        <p:spPr>
-          <a:xfrm>
-            <a:off x="731520" y="4206240"/>
-            <a:ext cx="10698480" cy="1828800"/>
+          <p:cNvPr id="16" name="Shape 14"/>
+          <p:cNvSpPr/>
+          <p:nvPr/>
+        </p:nvSpPr>
+        <p:spPr>
+          <a:xfrm>
+            <a:off x="8138160" y="1645920"/>
+            <a:ext cx="3474720" cy="3017520"/>
           </a:xfrm>
           <a:prstGeom prst="roundRect">
             <a:avLst>
-              <a:gd name="adj" fmla="val 3000"/>
+              <a:gd name="adj" fmla="val 1818"/>
             </a:avLst>
           </a:prstGeom>
           <a:solidFill>
-            <a:srgbClr val="FDF3F3"/>
+            <a:srgbClr val="F4F7FC"/>
           </a:solidFill>
           <a:ln w="12700">
             <a:solidFill>
-              <a:srgbClr val="990011"/>
+              <a:srgbClr val="CADCFC"/>
             </a:solidFill>
             <a:prstDash val="solid"/>
           </a:ln>
@@ -6830,14 +7035,14 @@
       </p:sp>
       <p:sp>
         <p:nvSpPr>
-          <p:cNvPr id="19" name="Text 17"/>
-          <p:cNvSpPr/>
-          <p:nvPr/>
-        </p:nvSpPr>
-        <p:spPr>
-          <a:xfrm>
-            <a:off x="960120" y="4343400"/>
-            <a:ext cx="10241280" cy="320040"/>
+          <p:cNvPr id="17" name="Text 15"/>
+          <p:cNvSpPr/>
+          <p:nvPr/>
+        </p:nvSpPr>
+        <p:spPr>
+          <a:xfrm>
+            <a:off x="8275320" y="1737360"/>
+            <a:ext cx="3200400" cy="292608"/>
           </a:xfrm>
           <a:prstGeom prst="rect">
             <a:avLst/>
@@ -6853,30 +7058,30 @@
               <a:buNone/>
             </a:pPr>
             <a:r>
-              <a:rPr lang="en-US" sz="1400" b="1" dirty="0">
-                <a:solidFill>
-                  <a:srgbClr val="990011"/>
-                </a:solidFill>
-                <a:latin typeface="Calibri" pitchFamily="34" charset="0"/>
-                <a:ea typeface="Calibri" pitchFamily="34" charset="-122"/>
-                <a:cs typeface="Calibri" pitchFamily="34" charset="-120"/>
-              </a:rPr>
-              <a:t>The honest boundary</a:t>
-            </a:r>
-            <a:endParaRPr lang="en-US" sz="1400" dirty="0"/>
-          </a:p>
-        </p:txBody>
-      </p:sp>
-      <p:sp>
-        <p:nvSpPr>
-          <p:cNvPr id="20" name="Text 18"/>
-          <p:cNvSpPr/>
-          <p:nvPr/>
-        </p:nvSpPr>
-        <p:spPr>
-          <a:xfrm>
-            <a:off x="960120" y="4681728"/>
-            <a:ext cx="10241280" cy="1234440"/>
+              <a:rPr lang="en-US" sz="1350" b="1" dirty="0">
+                <a:solidFill>
+                  <a:srgbClr val="1E2761"/>
+                </a:solidFill>
+                <a:latin typeface="Calibri" pitchFamily="34" charset="0"/>
+                <a:ea typeface="Calibri" pitchFamily="34" charset="-122"/>
+                <a:cs typeface="Calibri" pitchFamily="34" charset="-120"/>
+              </a:rPr>
+              <a:t>What bounds this</a:t>
+            </a:r>
+            <a:endParaRPr lang="en-US" sz="1350" dirty="0"/>
+          </a:p>
+        </p:txBody>
+      </p:sp>
+      <p:sp>
+        <p:nvSpPr>
+          <p:cNvPr id="18" name="Text 16"/>
+          <p:cNvSpPr/>
+          <p:nvPr/>
+        </p:nvSpPr>
+        <p:spPr>
+          <a:xfrm>
+            <a:off x="8275320" y="2029968"/>
+            <a:ext cx="3200400" cy="2542032"/>
           </a:xfrm>
           <a:prstGeom prst="rect">
             <a:avLst/>
@@ -6892,15 +7097,968 @@
               <a:buNone/>
             </a:pPr>
             <a:r>
+              <a:rPr lang="en-US" sz="1150" dirty="0">
+                <a:solidFill>
+                  <a:srgbClr val="1A1A2E"/>
+                </a:solidFill>
+                <a:latin typeface="Calibri" pitchFamily="34" charset="0"/>
+                <a:ea typeface="Calibri" pitchFamily="34" charset="-122"/>
+                <a:cs typeface="Calibri" pitchFamily="34" charset="-120"/>
+              </a:rPr>
+              <a:t>The German gold-escalate stratum is EIGHT signals — a 95% interval on 7 of 8 spans roughly 47–100%. Language is also confounded with sector here. So the claim is that METHOD CHOICE GOVERNS ESCALATION EQUITY ON THIS CORPUS — not that parity is established in general.</a:t>
+            </a:r>
+            <a:endParaRPr lang="en-US" sz="1150" dirty="0"/>
+          </a:p>
+          <a:p>
+            <a:pPr indent="0" marL="0">
+              <a:buNone/>
+            </a:pPr>
+            <a:endParaRPr lang="en-US" sz="1150" dirty="0"/>
+          </a:p>
+          <a:p>
+            <a:pPr indent="0" marL="0">
+              <a:buNone/>
+            </a:pPr>
+            <a:r>
+              <a:rPr lang="en-US" sz="1150" dirty="0">
+                <a:solidFill>
+                  <a:srgbClr val="1A1A2E"/>
+                </a:solidFill>
+                <a:latin typeface="Calibri" pitchFamily="34" charset="0"/>
+                <a:ea typeface="Calibri" pitchFamily="34" charset="-122"/>
+                <a:cs typeface="Calibri" pitchFamily="34" charset="-120"/>
+              </a:rPr>
+              <a:t>Equal opportunity is the right criterion precisely because it conditions on the gold label, so it is not distorted by very different base rates (DE 17.8%, EN 69.5%).</a:t>
+            </a:r>
+            <a:endParaRPr lang="en-US" sz="1150" dirty="0"/>
+          </a:p>
+        </p:txBody>
+      </p:sp>
+      <p:graphicFrame>
+        <p:nvGraphicFramePr>
+          <p:cNvPr id="15" name="Table 0"/>
+          <p:cNvGraphicFramePr>
+            <a:graphicFrameLocks noGrp="1"/>
+          </p:cNvGraphicFramePr>
+          <p:nvPr>
+            <p:extLst>
+              <p:ext uri="{D42A27DB-BD31-4B8C-83A1-F6EECF244321}">
+                <p14:modId xmlns:p14="http://schemas.microsoft.com/office/powerpoint/2010/main" val="1579011935"/>
+              </p:ext>
+            </p:extLst>
+          </p:nvPr>
+        </p:nvGraphicFramePr>
+        <p:xfrm>
+          <a:off x="731520" y="3246120"/>
+          <a:ext cx="6949440" cy="914400"/>
+        </p:xfrm>
+        <a:graphic>
+          <a:graphicData uri="http://schemas.openxmlformats.org/drawingml/2006/table">
+            <a:tbl>
+              <a:tblPr/>
+              <a:tblGrid>
+                <a:gridCol w="3108960"/>
+                <a:gridCol w="640080"/>
+                <a:gridCol w="1600200"/>
+                <a:gridCol w="1600200"/>
+              </a:tblGrid>
+              <a:tr h="457200">
+                <a:tc>
+                  <a:txBody>
+                    <a:bodyPr/>
+                    <a:lstStyle/>
+                    <a:p>
+                      <a:pPr indent="0" marL="0">
+                        <a:buNone/>
+                      </a:pPr>
+                      <a:r>
+                        <a:rPr lang="en-US" sz="1300" b="1" dirty="0">
+                          <a:solidFill>
+                            <a:srgbClr val="FFFFFF"/>
+                          </a:solidFill>
+                          <a:latin typeface="Calibri" pitchFamily="34" charset="0"/>
+                          <a:ea typeface="Calibri" pitchFamily="34" charset="-122"/>
+                          <a:cs typeface="Calibri" pitchFamily="34" charset="-120"/>
+                        </a:rPr>
+                        <a:t>Escalation recall (gold-escalate signals)</a:t>
+                      </a:r>
+                      <a:endParaRPr lang="en-US" sz="1300" dirty="0">
+                        <a:latin typeface="Calibri" charset="0"/>
+                        <a:ea typeface="Calibri" charset="0"/>
+                        <a:cs typeface="Calibri" charset="0"/>
+                      </a:endParaRPr>
+                    </a:p>
+                  </a:txBody>
+                  <a:tcPr marL="91440" marR="91440" marT="45720" marB="45720" anchor="ctr">
+                    <a:lnL w="12700" cap="flat" cmpd="sng" algn="ctr">
+                      <a:solidFill>
+                        <a:srgbClr val="CADCFC"/>
+                      </a:solidFill>
+                      <a:prstDash val="solid"/>
+                      <a:round/>
+                      <a:headEnd type="none" w="med" len="med"/>
+                      <a:tailEnd type="none" w="med" len="med"/>
+                    </a:lnL>
+                    <a:lnR w="12700" cap="flat" cmpd="sng" algn="ctr">
+                      <a:solidFill>
+                        <a:srgbClr val="CADCFC"/>
+                      </a:solidFill>
+                      <a:prstDash val="solid"/>
+                      <a:round/>
+                      <a:headEnd type="none" w="med" len="med"/>
+                      <a:tailEnd type="none" w="med" len="med"/>
+                    </a:lnR>
+                    <a:lnT w="12700" cap="flat" cmpd="sng" algn="ctr">
+                      <a:solidFill>
+                        <a:srgbClr val="CADCFC"/>
+                      </a:solidFill>
+                      <a:prstDash val="solid"/>
+                      <a:round/>
+                      <a:headEnd type="none" w="med" len="med"/>
+                      <a:tailEnd type="none" w="med" len="med"/>
+                    </a:lnT>
+                    <a:lnB w="12700" cap="flat" cmpd="sng" algn="ctr">
+                      <a:solidFill>
+                        <a:srgbClr val="CADCFC"/>
+                      </a:solidFill>
+                      <a:prstDash val="solid"/>
+                      <a:round/>
+                      <a:headEnd type="none" w="med" len="med"/>
+                      <a:tailEnd type="none" w="med" len="med"/>
+                    </a:lnB>
+                    <a:solidFill>
+                      <a:srgbClr val="1E2761"/>
+                    </a:solidFill>
+                  </a:tcPr>
+                </a:tc>
+                <a:tc>
+                  <a:txBody>
+                    <a:bodyPr/>
+                    <a:lstStyle/>
+                    <a:p>
+                      <a:pPr indent="0" marL="0">
+                        <a:buNone/>
+                      </a:pPr>
+                      <a:r>
+                        <a:rPr lang="en-US" sz="1300" b="1" dirty="0">
+                          <a:solidFill>
+                            <a:srgbClr val="FFFFFF"/>
+                          </a:solidFill>
+                          <a:latin typeface="Calibri" pitchFamily="34" charset="0"/>
+                          <a:ea typeface="Calibri" pitchFamily="34" charset="-122"/>
+                          <a:cs typeface="Calibri" pitchFamily="34" charset="-120"/>
+                        </a:rPr>
+                        <a:t>n</a:t>
+                      </a:r>
+                      <a:endParaRPr lang="en-US" sz="1300" dirty="0">
+                        <a:latin typeface="Calibri" charset="0"/>
+                        <a:ea typeface="Calibri" charset="0"/>
+                        <a:cs typeface="Calibri" charset="0"/>
+                      </a:endParaRPr>
+                    </a:p>
+                  </a:txBody>
+                  <a:tcPr marL="91440" marR="91440" marT="45720" marB="45720" anchor="ctr">
+                    <a:lnL w="12700" cap="flat" cmpd="sng" algn="ctr">
+                      <a:solidFill>
+                        <a:srgbClr val="CADCFC"/>
+                      </a:solidFill>
+                      <a:prstDash val="solid"/>
+                      <a:round/>
+                      <a:headEnd type="none" w="med" len="med"/>
+                      <a:tailEnd type="none" w="med" len="med"/>
+                    </a:lnL>
+                    <a:lnR w="12700" cap="flat" cmpd="sng" algn="ctr">
+                      <a:solidFill>
+                        <a:srgbClr val="CADCFC"/>
+                      </a:solidFill>
+                      <a:prstDash val="solid"/>
+                      <a:round/>
+                      <a:headEnd type="none" w="med" len="med"/>
+                      <a:tailEnd type="none" w="med" len="med"/>
+                    </a:lnR>
+                    <a:lnT w="12700" cap="flat" cmpd="sng" algn="ctr">
+                      <a:solidFill>
+                        <a:srgbClr val="CADCFC"/>
+                      </a:solidFill>
+                      <a:prstDash val="solid"/>
+                      <a:round/>
+                      <a:headEnd type="none" w="med" len="med"/>
+                      <a:tailEnd type="none" w="med" len="med"/>
+                    </a:lnT>
+                    <a:lnB w="12700" cap="flat" cmpd="sng" algn="ctr">
+                      <a:solidFill>
+                        <a:srgbClr val="CADCFC"/>
+                      </a:solidFill>
+                      <a:prstDash val="solid"/>
+                      <a:round/>
+                      <a:headEnd type="none" w="med" len="med"/>
+                      <a:tailEnd type="none" w="med" len="med"/>
+                    </a:lnB>
+                    <a:solidFill>
+                      <a:srgbClr val="1E2761"/>
+                    </a:solidFill>
+                  </a:tcPr>
+                </a:tc>
+                <a:tc>
+                  <a:txBody>
+                    <a:bodyPr/>
+                    <a:lstStyle/>
+                    <a:p>
+                      <a:pPr indent="0" marL="0">
+                        <a:buNone/>
+                      </a:pPr>
+                      <a:r>
+                        <a:rPr lang="en-US" sz="1300" b="1" dirty="0">
+                          <a:solidFill>
+                            <a:srgbClr val="FFFFFF"/>
+                          </a:solidFill>
+                          <a:latin typeface="Calibri" pitchFamily="34" charset="0"/>
+                          <a:ea typeface="Calibri" pitchFamily="34" charset="-122"/>
+                          <a:cs typeface="Calibri" pitchFamily="34" charset="-120"/>
+                        </a:rPr>
+                        <a:t>Keyword floor</a:t>
+                      </a:r>
+                      <a:endParaRPr lang="en-US" sz="1300" dirty="0">
+                        <a:latin typeface="Calibri" charset="0"/>
+                        <a:ea typeface="Calibri" charset="0"/>
+                        <a:cs typeface="Calibri" charset="0"/>
+                      </a:endParaRPr>
+                    </a:p>
+                  </a:txBody>
+                  <a:tcPr marL="91440" marR="91440" marT="45720" marB="45720" anchor="ctr">
+                    <a:lnL w="12700" cap="flat" cmpd="sng" algn="ctr">
+                      <a:solidFill>
+                        <a:srgbClr val="CADCFC"/>
+                      </a:solidFill>
+                      <a:prstDash val="solid"/>
+                      <a:round/>
+                      <a:headEnd type="none" w="med" len="med"/>
+                      <a:tailEnd type="none" w="med" len="med"/>
+                    </a:lnL>
+                    <a:lnR w="12700" cap="flat" cmpd="sng" algn="ctr">
+                      <a:solidFill>
+                        <a:srgbClr val="CADCFC"/>
+                      </a:solidFill>
+                      <a:prstDash val="solid"/>
+                      <a:round/>
+                      <a:headEnd type="none" w="med" len="med"/>
+                      <a:tailEnd type="none" w="med" len="med"/>
+                    </a:lnR>
+                    <a:lnT w="12700" cap="flat" cmpd="sng" algn="ctr">
+                      <a:solidFill>
+                        <a:srgbClr val="CADCFC"/>
+                      </a:solidFill>
+                      <a:prstDash val="solid"/>
+                      <a:round/>
+                      <a:headEnd type="none" w="med" len="med"/>
+                      <a:tailEnd type="none" w="med" len="med"/>
+                    </a:lnT>
+                    <a:lnB w="12700" cap="flat" cmpd="sng" algn="ctr">
+                      <a:solidFill>
+                        <a:srgbClr val="CADCFC"/>
+                      </a:solidFill>
+                      <a:prstDash val="solid"/>
+                      <a:round/>
+                      <a:headEnd type="none" w="med" len="med"/>
+                      <a:tailEnd type="none" w="med" len="med"/>
+                    </a:lnB>
+                    <a:solidFill>
+                      <a:srgbClr val="1E2761"/>
+                    </a:solidFill>
+                  </a:tcPr>
+                </a:tc>
+                <a:tc>
+                  <a:txBody>
+                    <a:bodyPr/>
+                    <a:lstStyle/>
+                    <a:p>
+                      <a:pPr indent="0" marL="0">
+                        <a:buNone/>
+                      </a:pPr>
+                      <a:r>
+                        <a:rPr lang="en-US" sz="1300" b="1" dirty="0">
+                          <a:solidFill>
+                            <a:srgbClr val="FFFFFF"/>
+                          </a:solidFill>
+                          <a:latin typeface="Calibri" pitchFamily="34" charset="0"/>
+                          <a:ea typeface="Calibri" pitchFamily="34" charset="-122"/>
+                          <a:cs typeface="Calibri" pitchFamily="34" charset="-120"/>
+                        </a:rPr>
+                        <a:t>LLM path</a:t>
+                      </a:r>
+                      <a:endParaRPr lang="en-US" sz="1300" dirty="0">
+                        <a:latin typeface="Calibri" charset="0"/>
+                        <a:ea typeface="Calibri" charset="0"/>
+                        <a:cs typeface="Calibri" charset="0"/>
+                      </a:endParaRPr>
+                    </a:p>
+                  </a:txBody>
+                  <a:tcPr marL="91440" marR="91440" marT="45720" marB="45720" anchor="ctr">
+                    <a:lnL w="12700" cap="flat" cmpd="sng" algn="ctr">
+                      <a:solidFill>
+                        <a:srgbClr val="CADCFC"/>
+                      </a:solidFill>
+                      <a:prstDash val="solid"/>
+                      <a:round/>
+                      <a:headEnd type="none" w="med" len="med"/>
+                      <a:tailEnd type="none" w="med" len="med"/>
+                    </a:lnL>
+                    <a:lnR w="12700" cap="flat" cmpd="sng" algn="ctr">
+                      <a:solidFill>
+                        <a:srgbClr val="CADCFC"/>
+                      </a:solidFill>
+                      <a:prstDash val="solid"/>
+                      <a:round/>
+                      <a:headEnd type="none" w="med" len="med"/>
+                      <a:tailEnd type="none" w="med" len="med"/>
+                    </a:lnR>
+                    <a:lnT w="12700" cap="flat" cmpd="sng" algn="ctr">
+                      <a:solidFill>
+                        <a:srgbClr val="CADCFC"/>
+                      </a:solidFill>
+                      <a:prstDash val="solid"/>
+                      <a:round/>
+                      <a:headEnd type="none" w="med" len="med"/>
+                      <a:tailEnd type="none" w="med" len="med"/>
+                    </a:lnT>
+                    <a:lnB w="12700" cap="flat" cmpd="sng" algn="ctr">
+                      <a:solidFill>
+                        <a:srgbClr val="CADCFC"/>
+                      </a:solidFill>
+                      <a:prstDash val="solid"/>
+                      <a:round/>
+                      <a:headEnd type="none" w="med" len="med"/>
+                      <a:tailEnd type="none" w="med" len="med"/>
+                    </a:lnB>
+                    <a:solidFill>
+                      <a:srgbClr val="1E2761"/>
+                    </a:solidFill>
+                  </a:tcPr>
+                </a:tc>
+              </a:tr>
+              <a:tr h="457200">
+                <a:tc>
+                  <a:txBody>
+                    <a:bodyPr/>
+                    <a:lstStyle/>
+                    <a:p>
+                      <a:pPr indent="0" marL="0">
+                        <a:buNone/>
+                      </a:pPr>
+                      <a:r>
+                        <a:rPr lang="en-US" sz="1300" dirty="0">
+                          <a:solidFill>
+                            <a:srgbClr val="000000"/>
+                          </a:solidFill>
+                          <a:latin typeface="Calibri" pitchFamily="34" charset="0"/>
+                          <a:ea typeface="Calibri" pitchFamily="34" charset="-122"/>
+                          <a:cs typeface="Calibri" pitchFamily="34" charset="-120"/>
+                        </a:rPr>
+                        <a:t>German</a:t>
+                      </a:r>
+                      <a:endParaRPr lang="en-US" sz="1300" dirty="0">
+                        <a:latin typeface="Calibri" charset="0"/>
+                        <a:ea typeface="Calibri" charset="0"/>
+                        <a:cs typeface="Calibri" charset="0"/>
+                      </a:endParaRPr>
+                    </a:p>
+                  </a:txBody>
+                  <a:tcPr marL="91440" marR="91440" marT="45720" marB="45720" anchor="ctr">
+                    <a:lnL w="12700" cap="flat" cmpd="sng" algn="ctr">
+                      <a:solidFill>
+                        <a:srgbClr val="CADCFC"/>
+                      </a:solidFill>
+                      <a:prstDash val="solid"/>
+                      <a:round/>
+                      <a:headEnd type="none" w="med" len="med"/>
+                      <a:tailEnd type="none" w="med" len="med"/>
+                    </a:lnL>
+                    <a:lnR w="12700" cap="flat" cmpd="sng" algn="ctr">
+                      <a:solidFill>
+                        <a:srgbClr val="CADCFC"/>
+                      </a:solidFill>
+                      <a:prstDash val="solid"/>
+                      <a:round/>
+                      <a:headEnd type="none" w="med" len="med"/>
+                      <a:tailEnd type="none" w="med" len="med"/>
+                    </a:lnR>
+                    <a:lnT w="12700" cap="flat" cmpd="sng" algn="ctr">
+                      <a:solidFill>
+                        <a:srgbClr val="CADCFC"/>
+                      </a:solidFill>
+                      <a:prstDash val="solid"/>
+                      <a:round/>
+                      <a:headEnd type="none" w="med" len="med"/>
+                      <a:tailEnd type="none" w="med" len="med"/>
+                    </a:lnT>
+                    <a:lnB w="12700" cap="flat" cmpd="sng" algn="ctr">
+                      <a:solidFill>
+                        <a:srgbClr val="CADCFC"/>
+                      </a:solidFill>
+                      <a:prstDash val="solid"/>
+                      <a:round/>
+                      <a:headEnd type="none" w="med" len="med"/>
+                      <a:tailEnd type="none" w="med" len="med"/>
+                    </a:lnB>
+                  </a:tcPr>
+                </a:tc>
+                <a:tc>
+                  <a:txBody>
+                    <a:bodyPr/>
+                    <a:lstStyle/>
+                    <a:p>
+                      <a:pPr indent="0" marL="0">
+                        <a:buNone/>
+                      </a:pPr>
+                      <a:r>
+                        <a:rPr lang="en-US" sz="1300" dirty="0">
+                          <a:solidFill>
+                            <a:srgbClr val="000000"/>
+                          </a:solidFill>
+                          <a:latin typeface="Calibri" pitchFamily="34" charset="0"/>
+                          <a:ea typeface="Calibri" pitchFamily="34" charset="-122"/>
+                          <a:cs typeface="Calibri" pitchFamily="34" charset="-120"/>
+                        </a:rPr>
+                        <a:t>8</a:t>
+                      </a:r>
+                      <a:endParaRPr lang="en-US" sz="1300" dirty="0">
+                        <a:latin typeface="Calibri" charset="0"/>
+                        <a:ea typeface="Calibri" charset="0"/>
+                        <a:cs typeface="Calibri" charset="0"/>
+                      </a:endParaRPr>
+                    </a:p>
+                  </a:txBody>
+                  <a:tcPr marL="91440" marR="91440" marT="45720" marB="45720" anchor="ctr">
+                    <a:lnL w="12700" cap="flat" cmpd="sng" algn="ctr">
+                      <a:solidFill>
+                        <a:srgbClr val="CADCFC"/>
+                      </a:solidFill>
+                      <a:prstDash val="solid"/>
+                      <a:round/>
+                      <a:headEnd type="none" w="med" len="med"/>
+                      <a:tailEnd type="none" w="med" len="med"/>
+                    </a:lnL>
+                    <a:lnR w="12700" cap="flat" cmpd="sng" algn="ctr">
+                      <a:solidFill>
+                        <a:srgbClr val="CADCFC"/>
+                      </a:solidFill>
+                      <a:prstDash val="solid"/>
+                      <a:round/>
+                      <a:headEnd type="none" w="med" len="med"/>
+                      <a:tailEnd type="none" w="med" len="med"/>
+                    </a:lnR>
+                    <a:lnT w="12700" cap="flat" cmpd="sng" algn="ctr">
+                      <a:solidFill>
+                        <a:srgbClr val="CADCFC"/>
+                      </a:solidFill>
+                      <a:prstDash val="solid"/>
+                      <a:round/>
+                      <a:headEnd type="none" w="med" len="med"/>
+                      <a:tailEnd type="none" w="med" len="med"/>
+                    </a:lnT>
+                    <a:lnB w="12700" cap="flat" cmpd="sng" algn="ctr">
+                      <a:solidFill>
+                        <a:srgbClr val="CADCFC"/>
+                      </a:solidFill>
+                      <a:prstDash val="solid"/>
+                      <a:round/>
+                      <a:headEnd type="none" w="med" len="med"/>
+                      <a:tailEnd type="none" w="med" len="med"/>
+                    </a:lnB>
+                  </a:tcPr>
+                </a:tc>
+                <a:tc>
+                  <a:txBody>
+                    <a:bodyPr/>
+                    <a:lstStyle/>
+                    <a:p>
+                      <a:pPr indent="0" marL="0">
+                        <a:buNone/>
+                      </a:pPr>
+                      <a:r>
+                        <a:rPr lang="en-US" sz="1300" b="1" dirty="0">
+                          <a:solidFill>
+                            <a:srgbClr val="990011"/>
+                          </a:solidFill>
+                          <a:latin typeface="Calibri" pitchFamily="34" charset="0"/>
+                          <a:ea typeface="Calibri" pitchFamily="34" charset="-122"/>
+                          <a:cs typeface="Calibri" pitchFamily="34" charset="-120"/>
+                        </a:rPr>
+                        <a:t>0.0%</a:t>
+                      </a:r>
+                      <a:endParaRPr lang="en-US" sz="1300" dirty="0">
+                        <a:latin typeface="Calibri" charset="0"/>
+                        <a:ea typeface="Calibri" charset="0"/>
+                        <a:cs typeface="Calibri" charset="0"/>
+                      </a:endParaRPr>
+                    </a:p>
+                  </a:txBody>
+                  <a:tcPr marL="91440" marR="91440" marT="45720" marB="45720" anchor="ctr">
+                    <a:lnL w="12700" cap="flat" cmpd="sng" algn="ctr">
+                      <a:solidFill>
+                        <a:srgbClr val="CADCFC"/>
+                      </a:solidFill>
+                      <a:prstDash val="solid"/>
+                      <a:round/>
+                      <a:headEnd type="none" w="med" len="med"/>
+                      <a:tailEnd type="none" w="med" len="med"/>
+                    </a:lnL>
+                    <a:lnR w="12700" cap="flat" cmpd="sng" algn="ctr">
+                      <a:solidFill>
+                        <a:srgbClr val="CADCFC"/>
+                      </a:solidFill>
+                      <a:prstDash val="solid"/>
+                      <a:round/>
+                      <a:headEnd type="none" w="med" len="med"/>
+                      <a:tailEnd type="none" w="med" len="med"/>
+                    </a:lnR>
+                    <a:lnT w="12700" cap="flat" cmpd="sng" algn="ctr">
+                      <a:solidFill>
+                        <a:srgbClr val="CADCFC"/>
+                      </a:solidFill>
+                      <a:prstDash val="solid"/>
+                      <a:round/>
+                      <a:headEnd type="none" w="med" len="med"/>
+                      <a:tailEnd type="none" w="med" len="med"/>
+                    </a:lnT>
+                    <a:lnB w="12700" cap="flat" cmpd="sng" algn="ctr">
+                      <a:solidFill>
+                        <a:srgbClr val="CADCFC"/>
+                      </a:solidFill>
+                      <a:prstDash val="solid"/>
+                      <a:round/>
+                      <a:headEnd type="none" w="med" len="med"/>
+                      <a:tailEnd type="none" w="med" len="med"/>
+                    </a:lnB>
+                  </a:tcPr>
+                </a:tc>
+                <a:tc>
+                  <a:txBody>
+                    <a:bodyPr/>
+                    <a:lstStyle/>
+                    <a:p>
+                      <a:pPr indent="0" marL="0">
+                        <a:buNone/>
+                      </a:pPr>
+                      <a:r>
+                        <a:rPr lang="en-US" sz="1300" dirty="0">
+                          <a:solidFill>
+                            <a:srgbClr val="000000"/>
+                          </a:solidFill>
+                          <a:latin typeface="Calibri" pitchFamily="34" charset="0"/>
+                          <a:ea typeface="Calibri" pitchFamily="34" charset="-122"/>
+                          <a:cs typeface="Calibri" pitchFamily="34" charset="-120"/>
+                        </a:rPr>
+                        <a:t>87.5%</a:t>
+                      </a:r>
+                      <a:endParaRPr lang="en-US" sz="1300" dirty="0">
+                        <a:latin typeface="Calibri" charset="0"/>
+                        <a:ea typeface="Calibri" charset="0"/>
+                        <a:cs typeface="Calibri" charset="0"/>
+                      </a:endParaRPr>
+                    </a:p>
+                  </a:txBody>
+                  <a:tcPr marL="91440" marR="91440" marT="45720" marB="45720" anchor="ctr">
+                    <a:lnL w="12700" cap="flat" cmpd="sng" algn="ctr">
+                      <a:solidFill>
+                        <a:srgbClr val="CADCFC"/>
+                      </a:solidFill>
+                      <a:prstDash val="solid"/>
+                      <a:round/>
+                      <a:headEnd type="none" w="med" len="med"/>
+                      <a:tailEnd type="none" w="med" len="med"/>
+                    </a:lnL>
+                    <a:lnR w="12700" cap="flat" cmpd="sng" algn="ctr">
+                      <a:solidFill>
+                        <a:srgbClr val="CADCFC"/>
+                      </a:solidFill>
+                      <a:prstDash val="solid"/>
+                      <a:round/>
+                      <a:headEnd type="none" w="med" len="med"/>
+                      <a:tailEnd type="none" w="med" len="med"/>
+                    </a:lnR>
+                    <a:lnT w="12700" cap="flat" cmpd="sng" algn="ctr">
+                      <a:solidFill>
+                        <a:srgbClr val="CADCFC"/>
+                      </a:solidFill>
+                      <a:prstDash val="solid"/>
+                      <a:round/>
+                      <a:headEnd type="none" w="med" len="med"/>
+                      <a:tailEnd type="none" w="med" len="med"/>
+                    </a:lnT>
+                    <a:lnB w="12700" cap="flat" cmpd="sng" algn="ctr">
+                      <a:solidFill>
+                        <a:srgbClr val="CADCFC"/>
+                      </a:solidFill>
+                      <a:prstDash val="solid"/>
+                      <a:round/>
+                      <a:headEnd type="none" w="med" len="med"/>
+                      <a:tailEnd type="none" w="med" len="med"/>
+                    </a:lnB>
+                  </a:tcPr>
+                </a:tc>
+              </a:tr>
+              <a:tr h="457200">
+                <a:tc>
+                  <a:txBody>
+                    <a:bodyPr/>
+                    <a:lstStyle/>
+                    <a:p>
+                      <a:pPr indent="0" marL="0">
+                        <a:buNone/>
+                      </a:pPr>
+                      <a:r>
+                        <a:rPr lang="en-US" sz="1300" dirty="0">
+                          <a:solidFill>
+                            <a:srgbClr val="000000"/>
+                          </a:solidFill>
+                          <a:latin typeface="Calibri" pitchFamily="34" charset="0"/>
+                          <a:ea typeface="Calibri" pitchFamily="34" charset="-122"/>
+                          <a:cs typeface="Calibri" pitchFamily="34" charset="-120"/>
+                        </a:rPr>
+                        <a:t>English</a:t>
+                      </a:r>
+                      <a:endParaRPr lang="en-US" sz="1300" dirty="0">
+                        <a:latin typeface="Calibri" charset="0"/>
+                        <a:ea typeface="Calibri" charset="0"/>
+                        <a:cs typeface="Calibri" charset="0"/>
+                      </a:endParaRPr>
+                    </a:p>
+                  </a:txBody>
+                  <a:tcPr marL="91440" marR="91440" marT="45720" marB="45720" anchor="ctr">
+                    <a:lnL w="12700" cap="flat" cmpd="sng" algn="ctr">
+                      <a:solidFill>
+                        <a:srgbClr val="CADCFC"/>
+                      </a:solidFill>
+                      <a:prstDash val="solid"/>
+                      <a:round/>
+                      <a:headEnd type="none" w="med" len="med"/>
+                      <a:tailEnd type="none" w="med" len="med"/>
+                    </a:lnL>
+                    <a:lnR w="12700" cap="flat" cmpd="sng" algn="ctr">
+                      <a:solidFill>
+                        <a:srgbClr val="CADCFC"/>
+                      </a:solidFill>
+                      <a:prstDash val="solid"/>
+                      <a:round/>
+                      <a:headEnd type="none" w="med" len="med"/>
+                      <a:tailEnd type="none" w="med" len="med"/>
+                    </a:lnR>
+                    <a:lnT w="12700" cap="flat" cmpd="sng" algn="ctr">
+                      <a:solidFill>
+                        <a:srgbClr val="CADCFC"/>
+                      </a:solidFill>
+                      <a:prstDash val="solid"/>
+                      <a:round/>
+                      <a:headEnd type="none" w="med" len="med"/>
+                      <a:tailEnd type="none" w="med" len="med"/>
+                    </a:lnT>
+                    <a:lnB w="12700" cap="flat" cmpd="sng" algn="ctr">
+                      <a:solidFill>
+                        <a:srgbClr val="CADCFC"/>
+                      </a:solidFill>
+                      <a:prstDash val="solid"/>
+                      <a:round/>
+                      <a:headEnd type="none" w="med" len="med"/>
+                      <a:tailEnd type="none" w="med" len="med"/>
+                    </a:lnB>
+                  </a:tcPr>
+                </a:tc>
+                <a:tc>
+                  <a:txBody>
+                    <a:bodyPr/>
+                    <a:lstStyle/>
+                    <a:p>
+                      <a:pPr indent="0" marL="0">
+                        <a:buNone/>
+                      </a:pPr>
+                      <a:r>
+                        <a:rPr lang="en-US" sz="1300" dirty="0">
+                          <a:solidFill>
+                            <a:srgbClr val="000000"/>
+                          </a:solidFill>
+                          <a:latin typeface="Calibri" pitchFamily="34" charset="0"/>
+                          <a:ea typeface="Calibri" pitchFamily="34" charset="-122"/>
+                          <a:cs typeface="Calibri" pitchFamily="34" charset="-120"/>
+                        </a:rPr>
+                        <a:t>41</a:t>
+                      </a:r>
+                      <a:endParaRPr lang="en-US" sz="1300" dirty="0">
+                        <a:latin typeface="Calibri" charset="0"/>
+                        <a:ea typeface="Calibri" charset="0"/>
+                        <a:cs typeface="Calibri" charset="0"/>
+                      </a:endParaRPr>
+                    </a:p>
+                  </a:txBody>
+                  <a:tcPr marL="91440" marR="91440" marT="45720" marB="45720" anchor="ctr">
+                    <a:lnL w="12700" cap="flat" cmpd="sng" algn="ctr">
+                      <a:solidFill>
+                        <a:srgbClr val="CADCFC"/>
+                      </a:solidFill>
+                      <a:prstDash val="solid"/>
+                      <a:round/>
+                      <a:headEnd type="none" w="med" len="med"/>
+                      <a:tailEnd type="none" w="med" len="med"/>
+                    </a:lnL>
+                    <a:lnR w="12700" cap="flat" cmpd="sng" algn="ctr">
+                      <a:solidFill>
+                        <a:srgbClr val="CADCFC"/>
+                      </a:solidFill>
+                      <a:prstDash val="solid"/>
+                      <a:round/>
+                      <a:headEnd type="none" w="med" len="med"/>
+                      <a:tailEnd type="none" w="med" len="med"/>
+                    </a:lnR>
+                    <a:lnT w="12700" cap="flat" cmpd="sng" algn="ctr">
+                      <a:solidFill>
+                        <a:srgbClr val="CADCFC"/>
+                      </a:solidFill>
+                      <a:prstDash val="solid"/>
+                      <a:round/>
+                      <a:headEnd type="none" w="med" len="med"/>
+                      <a:tailEnd type="none" w="med" len="med"/>
+                    </a:lnT>
+                    <a:lnB w="12700" cap="flat" cmpd="sng" algn="ctr">
+                      <a:solidFill>
+                        <a:srgbClr val="CADCFC"/>
+                      </a:solidFill>
+                      <a:prstDash val="solid"/>
+                      <a:round/>
+                      <a:headEnd type="none" w="med" len="med"/>
+                      <a:tailEnd type="none" w="med" len="med"/>
+                    </a:lnB>
+                  </a:tcPr>
+                </a:tc>
+                <a:tc>
+                  <a:txBody>
+                    <a:bodyPr/>
+                    <a:lstStyle/>
+                    <a:p>
+                      <a:pPr indent="0" marL="0">
+                        <a:buNone/>
+                      </a:pPr>
+                      <a:r>
+                        <a:rPr lang="en-US" sz="1300" dirty="0">
+                          <a:solidFill>
+                            <a:srgbClr val="000000"/>
+                          </a:solidFill>
+                          <a:latin typeface="Calibri" pitchFamily="34" charset="0"/>
+                          <a:ea typeface="Calibri" pitchFamily="34" charset="-122"/>
+                          <a:cs typeface="Calibri" pitchFamily="34" charset="-120"/>
+                        </a:rPr>
+                        <a:t>19.5%</a:t>
+                      </a:r>
+                      <a:endParaRPr lang="en-US" sz="1300" dirty="0">
+                        <a:latin typeface="Calibri" charset="0"/>
+                        <a:ea typeface="Calibri" charset="0"/>
+                        <a:cs typeface="Calibri" charset="0"/>
+                      </a:endParaRPr>
+                    </a:p>
+                  </a:txBody>
+                  <a:tcPr marL="91440" marR="91440" marT="45720" marB="45720" anchor="ctr">
+                    <a:lnL w="12700" cap="flat" cmpd="sng" algn="ctr">
+                      <a:solidFill>
+                        <a:srgbClr val="CADCFC"/>
+                      </a:solidFill>
+                      <a:prstDash val="solid"/>
+                      <a:round/>
+                      <a:headEnd type="none" w="med" len="med"/>
+                      <a:tailEnd type="none" w="med" len="med"/>
+                    </a:lnL>
+                    <a:lnR w="12700" cap="flat" cmpd="sng" algn="ctr">
+                      <a:solidFill>
+                        <a:srgbClr val="CADCFC"/>
+                      </a:solidFill>
+                      <a:prstDash val="solid"/>
+                      <a:round/>
+                      <a:headEnd type="none" w="med" len="med"/>
+                      <a:tailEnd type="none" w="med" len="med"/>
+                    </a:lnR>
+                    <a:lnT w="12700" cap="flat" cmpd="sng" algn="ctr">
+                      <a:solidFill>
+                        <a:srgbClr val="CADCFC"/>
+                      </a:solidFill>
+                      <a:prstDash val="solid"/>
+                      <a:round/>
+                      <a:headEnd type="none" w="med" len="med"/>
+                      <a:tailEnd type="none" w="med" len="med"/>
+                    </a:lnT>
+                    <a:lnB w="12700" cap="flat" cmpd="sng" algn="ctr">
+                      <a:solidFill>
+                        <a:srgbClr val="CADCFC"/>
+                      </a:solidFill>
+                      <a:prstDash val="solid"/>
+                      <a:round/>
+                      <a:headEnd type="none" w="med" len="med"/>
+                      <a:tailEnd type="none" w="med" len="med"/>
+                    </a:lnB>
+                  </a:tcPr>
+                </a:tc>
+                <a:tc>
+                  <a:txBody>
+                    <a:bodyPr/>
+                    <a:lstStyle/>
+                    <a:p>
+                      <a:pPr indent="0" marL="0">
+                        <a:buNone/>
+                      </a:pPr>
+                      <a:r>
+                        <a:rPr lang="en-US" sz="1300" dirty="0">
+                          <a:solidFill>
+                            <a:srgbClr val="000000"/>
+                          </a:solidFill>
+                          <a:latin typeface="Calibri" pitchFamily="34" charset="0"/>
+                          <a:ea typeface="Calibri" pitchFamily="34" charset="-122"/>
+                          <a:cs typeface="Calibri" pitchFamily="34" charset="-120"/>
+                        </a:rPr>
+                        <a:t>87.8%</a:t>
+                      </a:r>
+                      <a:endParaRPr lang="en-US" sz="1300" dirty="0">
+                        <a:latin typeface="Calibri" charset="0"/>
+                        <a:ea typeface="Calibri" charset="0"/>
+                        <a:cs typeface="Calibri" charset="0"/>
+                      </a:endParaRPr>
+                    </a:p>
+                  </a:txBody>
+                  <a:tcPr marL="91440" marR="91440" marT="45720" marB="45720" anchor="ctr">
+                    <a:lnL w="12700" cap="flat" cmpd="sng" algn="ctr">
+                      <a:solidFill>
+                        <a:srgbClr val="CADCFC"/>
+                      </a:solidFill>
+                      <a:prstDash val="solid"/>
+                      <a:round/>
+                      <a:headEnd type="none" w="med" len="med"/>
+                      <a:tailEnd type="none" w="med" len="med"/>
+                    </a:lnL>
+                    <a:lnR w="12700" cap="flat" cmpd="sng" algn="ctr">
+                      <a:solidFill>
+                        <a:srgbClr val="CADCFC"/>
+                      </a:solidFill>
+                      <a:prstDash val="solid"/>
+                      <a:round/>
+                      <a:headEnd type="none" w="med" len="med"/>
+                      <a:tailEnd type="none" w="med" len="med"/>
+                    </a:lnR>
+                    <a:lnT w="12700" cap="flat" cmpd="sng" algn="ctr">
+                      <a:solidFill>
+                        <a:srgbClr val="CADCFC"/>
+                      </a:solidFill>
+                      <a:prstDash val="solid"/>
+                      <a:round/>
+                      <a:headEnd type="none" w="med" len="med"/>
+                      <a:tailEnd type="none" w="med" len="med"/>
+                    </a:lnT>
+                    <a:lnB w="12700" cap="flat" cmpd="sng" algn="ctr">
+                      <a:solidFill>
+                        <a:srgbClr val="CADCFC"/>
+                      </a:solidFill>
+                      <a:prstDash val="solid"/>
+                      <a:round/>
+                      <a:headEnd type="none" w="med" len="med"/>
+                      <a:tailEnd type="none" w="med" len="med"/>
+                    </a:lnB>
+                  </a:tcPr>
+                </a:tc>
+              </a:tr>
+            </a:tbl>
+          </a:graphicData>
+        </a:graphic>
+      </p:graphicFrame>
+      <p:sp>
+        <p:nvSpPr>
+          <p:cNvPr id="20" name="Shape 17"/>
+          <p:cNvSpPr/>
+          <p:nvPr/>
+        </p:nvSpPr>
+        <p:spPr>
+          <a:xfrm>
+            <a:off x="731520" y="4892040"/>
+            <a:ext cx="10881360" cy="1371600"/>
+          </a:xfrm>
+          <a:prstGeom prst="roundRect">
+            <a:avLst>
+              <a:gd name="adj" fmla="val 4000"/>
+            </a:avLst>
+          </a:prstGeom>
+          <a:solidFill>
+            <a:srgbClr val="1E2761"/>
+          </a:solidFill>
+          <a:ln/>
+        </p:spPr>
+      </p:sp>
+      <p:sp>
+        <p:nvSpPr>
+          <p:cNvPr id="21" name="Text 18"/>
+          <p:cNvSpPr/>
+          <p:nvPr/>
+        </p:nvSpPr>
+        <p:spPr>
+          <a:xfrm>
+            <a:off x="960120" y="5001768"/>
+            <a:ext cx="10424160" cy="292608"/>
+          </a:xfrm>
+          <a:prstGeom prst="rect">
+            <a:avLst/>
+          </a:prstGeom>
+          <a:noFill/>
+          <a:ln/>
+        </p:spPr>
+        <p:txBody>
+          <a:bodyPr wrap="square" lIns="0" tIns="0" rIns="0" bIns="0" rtlCol="0" anchor="ctr"/>
+          <a:lstStyle/>
+          <a:p>
+            <a:pPr indent="0" marL="0">
+              <a:buNone/>
+            </a:pPr>
+            <a:r>
+              <a:rPr lang="en-US" sz="1300" b="1" dirty="0">
+                <a:solidFill>
+                  <a:srgbClr val="CADCFC"/>
+                </a:solidFill>
+                <a:latin typeface="Calibri" pitchFamily="34" charset="0"/>
+                <a:ea typeface="Calibri" pitchFamily="34" charset="-122"/>
+                <a:cs typeface="Calibri" pitchFamily="34" charset="-120"/>
+              </a:rPr>
+              <a:t>The substantive Responsible-AI finding</a:t>
+            </a:r>
+            <a:endParaRPr lang="en-US" sz="1300" dirty="0"/>
+          </a:p>
+        </p:txBody>
+      </p:sp>
+      <p:sp>
+        <p:nvSpPr>
+          <p:cNvPr id="22" name="Text 19"/>
+          <p:cNvSpPr/>
+          <p:nvPr/>
+        </p:nvSpPr>
+        <p:spPr>
+          <a:xfrm>
+            <a:off x="960120" y="5321808"/>
+            <a:ext cx="10424160" cy="868680"/>
+          </a:xfrm>
+          <a:prstGeom prst="rect">
+            <a:avLst/>
+          </a:prstGeom>
+          <a:noFill/>
+          <a:ln/>
+        </p:spPr>
+        <p:txBody>
+          <a:bodyPr wrap="square" lIns="0" tIns="0" rIns="0" bIns="0" rtlCol="0" anchor="ctr"/>
+          <a:lstStyle/>
+          <a:p>
+            <a:pPr indent="0" marL="0">
+              <a:buNone/>
+            </a:pPr>
+            <a:r>
               <a:rPr lang="en-US" sz="1400" dirty="0">
                 <a:solidFill>
-                  <a:srgbClr val="1A1A2E"/>
-                </a:solidFill>
-                <a:latin typeface="Calibri" pitchFamily="34" charset="0"/>
-                <a:ea typeface="Calibri" pitchFamily="34" charset="-122"/>
-                <a:cs typeface="Calibri" pitchFamily="34" charset="-120"/>
-              </a:rPr>
-              <a:t>Outcome data behind these learnings is still SIMULATED. Adoption shows the loop steers recommendations; whether the steered remedy is BETTER requires a live outcome contract on real data — the single most important open step. We claim mechanism, not benefit.</a:t>
+                  <a:srgbClr val="FFFFFF"/>
+                </a:solidFill>
+                <a:latin typeface="Calibri" pitchFamily="34" charset="0"/>
+                <a:ea typeface="Calibri" pitchFamily="34" charset="-122"/>
+                <a:cs typeface="Calibri" pitchFamily="34" charset="-120"/>
+              </a:rPr>
+              <a:t>An uneven triage layer does not merely score worse — it means some customers' problems are systematically less likely to reach a human at all. That is a fairness property of the LOOP, not of a classifier, and the choice of triage method largely determines it.</a:t>
             </a:r>
             <a:endParaRPr lang="en-US" sz="1400" dirty="0"/>
           </a:p>
@@ -6964,7 +8122,7 @@
                 <a:ea typeface="Cambria" pitchFamily="34" charset="-122"/>
                 <a:cs typeface="Cambria" pitchFamily="34" charset="-120"/>
               </a:rPr>
-              <a:t>What is proven, demonstrated, and pending</a:t>
+              <a:t>Result 3: the numbers that justify the approval gate</a:t>
             </a:r>
             <a:endParaRPr lang="en-US" sz="3200" dirty="0"/>
           </a:p>
@@ -7003,7 +8161,7 @@
                 <a:ea typeface="Calibri" pitchFamily="34" charset="-122"/>
                 <a:cs typeface="Calibri" pitchFamily="34" charset="-120"/>
               </a:rPr>
-              <a:t>The traceability matrix — the thesis's honesty map (Appendix D)</a:t>
+              <a:t>Journey stage and owner, scored under a supplied inventory — clears the floor, nowhere near autonomous</a:t>
             </a:r>
             <a:endParaRPr lang="en-US" sz="1400" dirty="0"/>
           </a:p>
@@ -7142,6 +8300,65 @@
             <a:avLst/>
           </a:prstGeom>
           <a:solidFill>
+            <a:srgbClr val="1E2761"/>
+          </a:solidFill>
+          <a:ln/>
+        </p:spPr>
+      </p:sp>
+      <p:sp>
+        <p:nvSpPr>
+          <p:cNvPr id="9" name="Text 7"/>
+          <p:cNvSpPr/>
+          <p:nvPr/>
+        </p:nvSpPr>
+        <p:spPr>
+          <a:xfrm>
+            <a:off x="11192256" y="395935"/>
+            <a:ext cx="292608" cy="310896"/>
+          </a:xfrm>
+          <a:prstGeom prst="rect">
+            <a:avLst/>
+          </a:prstGeom>
+          <a:noFill/>
+          <a:ln/>
+        </p:spPr>
+        <p:txBody>
+          <a:bodyPr wrap="square" lIns="0" tIns="0" rIns="0" bIns="0" rtlCol="0" anchor="ctr"/>
+          <a:lstStyle/>
+          <a:p>
+            <a:pPr algn="ctr" indent="0" marL="0">
+              <a:buNone/>
+            </a:pPr>
+            <a:r>
+              <a:rPr lang="en-US" sz="1100" b="1" dirty="0">
+                <a:solidFill>
+                  <a:srgbClr val="FFFFFF"/>
+                </a:solidFill>
+                <a:latin typeface="Calibri" pitchFamily="34" charset="0"/>
+                <a:ea typeface="Calibri" pitchFamily="34" charset="-122"/>
+                <a:cs typeface="Calibri" pitchFamily="34" charset="-120"/>
+              </a:rPr>
+              <a:t>A</a:t>
+            </a:r>
+            <a:endParaRPr lang="en-US" sz="1100" dirty="0"/>
+          </a:p>
+        </p:txBody>
+      </p:sp>
+      <p:sp>
+        <p:nvSpPr>
+          <p:cNvPr id="10" name="Shape 8"/>
+          <p:cNvSpPr/>
+          <p:nvPr/>
+        </p:nvSpPr>
+        <p:spPr>
+          <a:xfrm>
+            <a:off x="11576304" y="411480"/>
+            <a:ext cx="292608" cy="292608"/>
+          </a:xfrm>
+          <a:prstGeom prst="ellipse">
+            <a:avLst/>
+          </a:prstGeom>
+          <a:solidFill>
             <a:srgbClr val="CADCFC"/>
           </a:solidFill>
           <a:ln/>
@@ -7149,65 +8366,6 @@
       </p:sp>
       <p:sp>
         <p:nvSpPr>
-          <p:cNvPr id="9" name="Text 7"/>
-          <p:cNvSpPr/>
-          <p:nvPr/>
-        </p:nvSpPr>
-        <p:spPr>
-          <a:xfrm>
-            <a:off x="11192256" y="395935"/>
-            <a:ext cx="292608" cy="310896"/>
-          </a:xfrm>
-          <a:prstGeom prst="rect">
-            <a:avLst/>
-          </a:prstGeom>
-          <a:noFill/>
-          <a:ln/>
-        </p:spPr>
-        <p:txBody>
-          <a:bodyPr wrap="square" lIns="0" tIns="0" rIns="0" bIns="0" rtlCol="0" anchor="ctr"/>
-          <a:lstStyle/>
-          <a:p>
-            <a:pPr algn="ctr" indent="0" marL="0">
-              <a:buNone/>
-            </a:pPr>
-            <a:r>
-              <a:rPr lang="en-US" sz="1100" b="1" dirty="0">
-                <a:solidFill>
-                  <a:srgbClr val="1E2761"/>
-                </a:solidFill>
-                <a:latin typeface="Calibri" pitchFamily="34" charset="0"/>
-                <a:ea typeface="Calibri" pitchFamily="34" charset="-122"/>
-                <a:cs typeface="Calibri" pitchFamily="34" charset="-120"/>
-              </a:rPr>
-              <a:t>A</a:t>
-            </a:r>
-            <a:endParaRPr lang="en-US" sz="1100" dirty="0"/>
-          </a:p>
-        </p:txBody>
-      </p:sp>
-      <p:sp>
-        <p:nvSpPr>
-          <p:cNvPr id="10" name="Shape 8"/>
-          <p:cNvSpPr/>
-          <p:nvPr/>
-        </p:nvSpPr>
-        <p:spPr>
-          <a:xfrm>
-            <a:off x="11576304" y="411480"/>
-            <a:ext cx="292608" cy="292608"/>
-          </a:xfrm>
-          <a:prstGeom prst="ellipse">
-            <a:avLst/>
-          </a:prstGeom>
-          <a:solidFill>
-            <a:srgbClr val="1E2761"/>
-          </a:solidFill>
-          <a:ln/>
-        </p:spPr>
-      </p:sp>
-      <p:sp>
-        <p:nvSpPr>
           <p:cNvPr id="11" name="Text 9"/>
           <p:cNvSpPr/>
           <p:nvPr/>
@@ -7233,7 +8391,7 @@
             <a:r>
               <a:rPr lang="en-US" sz="1100" b="1" dirty="0">
                 <a:solidFill>
-                  <a:srgbClr val="FFFFFF"/>
+                  <a:srgbClr val="1E2761"/>
                 </a:solidFill>
                 <a:latin typeface="Calibri" pitchFamily="34" charset="0"/>
                 <a:ea typeface="Calibri" pitchFamily="34" charset="-122"/>
@@ -7261,18 +8419,19 @@
         </p:nvGraphicFramePr>
         <p:xfrm>
           <a:off x="548640" y="1645920"/>
-          <a:ext cx="11064240" cy="914400"/>
+          <a:ext cx="6858000" cy="914400"/>
         </p:xfrm>
         <a:graphic>
           <a:graphicData uri="http://schemas.openxmlformats.org/drawingml/2006/table">
             <a:tbl>
               <a:tblPr/>
               <a:tblGrid>
-                <a:gridCol w="4023360"/>
-                <a:gridCol w="2560320"/>
-                <a:gridCol w="4480560"/>
+                <a:gridCol w="2286000"/>
+                <a:gridCol w="914400"/>
+                <a:gridCol w="1828800"/>
+                <a:gridCol w="1828800"/>
               </a:tblGrid>
-              <a:tr h="502920">
+              <a:tr h="457200">
                 <a:tc>
                   <a:txBody>
                     <a:bodyPr/>
@@ -7282,7 +8441,7 @@
                         <a:buNone/>
                       </a:pPr>
                       <a:r>
-                        <a:rPr lang="en-US" sz="1350" b="1" dirty="0">
+                        <a:rPr lang="en-US" sz="1300" b="1" dirty="0">
                           <a:solidFill>
                             <a:srgbClr val="FFFFFF"/>
                           </a:solidFill>
@@ -7290,9 +8449,9 @@
                           <a:ea typeface="Calibri" pitchFamily="34" charset="-122"/>
                           <a:cs typeface="Calibri" pitchFamily="34" charset="-120"/>
                         </a:rPr>
-                        <a:t>Claim</a:t>
+                        <a:t>Routing field</a:t>
                       </a:r>
-                      <a:endParaRPr lang="en-US" sz="1350" dirty="0">
+                      <a:endParaRPr lang="en-US" sz="1300" dirty="0">
                         <a:latin typeface="Calibri" charset="0"/>
                         <a:ea typeface="Calibri" charset="0"/>
                         <a:cs typeface="Calibri" charset="0"/>
@@ -7350,7 +8509,7 @@
                         <a:buNone/>
                       </a:pPr>
                       <a:r>
-                        <a:rPr lang="en-US" sz="1350" b="1" dirty="0">
+                        <a:rPr lang="en-US" sz="1300" b="1" dirty="0">
                           <a:solidFill>
                             <a:srgbClr val="FFFFFF"/>
                           </a:solidFill>
@@ -7358,9 +8517,9 @@
                           <a:ea typeface="Calibri" pitchFamily="34" charset="-122"/>
                           <a:cs typeface="Calibri" pitchFamily="34" charset="-120"/>
                         </a:rPr>
-                        <a:t>Status</a:t>
+                        <a:t>Classes</a:t>
                       </a:r>
-                      <a:endParaRPr lang="en-US" sz="1350" dirty="0">
+                      <a:endParaRPr lang="en-US" sz="1300" dirty="0">
                         <a:latin typeface="Calibri" charset="0"/>
                         <a:ea typeface="Calibri" charset="0"/>
                         <a:cs typeface="Calibri" charset="0"/>
@@ -7418,7 +8577,7 @@
                         <a:buNone/>
                       </a:pPr>
                       <a:r>
-                        <a:rPr lang="en-US" sz="1350" b="1" dirty="0">
+                        <a:rPr lang="en-US" sz="1300" b="1" dirty="0">
                           <a:solidFill>
                             <a:srgbClr val="FFFFFF"/>
                           </a:solidFill>
@@ -7426,9 +8585,9 @@
                           <a:ea typeface="Calibri" pitchFamily="34" charset="-122"/>
                           <a:cs typeface="Calibri" pitchFamily="34" charset="-120"/>
                         </a:rPr>
-                        <a:t>Evidence</a:t>
+                        <a:t>Majority-class floor</a:t>
                       </a:r>
-                      <a:endParaRPr lang="en-US" sz="1350" dirty="0">
+                      <a:endParaRPr lang="en-US" sz="1300" dirty="0">
                         <a:latin typeface="Calibri" charset="0"/>
                         <a:ea typeface="Calibri" charset="0"/>
                         <a:cs typeface="Calibri" charset="0"/>
@@ -7477,8 +8636,6 @@
                     </a:solidFill>
                   </a:tcPr>
                 </a:tc>
-              </a:tr>
-              <a:tr h="502920">
                 <a:tc>
                   <a:txBody>
                     <a:bodyPr/>
@@ -7488,7 +8645,77 @@
                         <a:buNone/>
                       </a:pPr>
                       <a:r>
-                        <a:rPr lang="en-US" sz="1350" dirty="0">
+                        <a:rPr lang="en-US" sz="1300" b="1" dirty="0">
+                          <a:solidFill>
+                            <a:srgbClr val="FFFFFF"/>
+                          </a:solidFill>
+                          <a:latin typeface="Calibri" pitchFamily="34" charset="0"/>
+                          <a:ea typeface="Calibri" pitchFamily="34" charset="-122"/>
+                          <a:cs typeface="Calibri" pitchFamily="34" charset="-120"/>
+                        </a:rPr>
+                        <a:t>LLM (inventory supplied)</a:t>
+                      </a:r>
+                      <a:endParaRPr lang="en-US" sz="1300" dirty="0">
+                        <a:latin typeface="Calibri" charset="0"/>
+                        <a:ea typeface="Calibri" charset="0"/>
+                        <a:cs typeface="Calibri" charset="0"/>
+                      </a:endParaRPr>
+                    </a:p>
+                  </a:txBody>
+                  <a:tcPr marL="91440" marR="91440" marT="45720" marB="45720" anchor="ctr">
+                    <a:lnL w="12700" cap="flat" cmpd="sng" algn="ctr">
+                      <a:solidFill>
+                        <a:srgbClr val="CADCFC"/>
+                      </a:solidFill>
+                      <a:prstDash val="solid"/>
+                      <a:round/>
+                      <a:headEnd type="none" w="med" len="med"/>
+                      <a:tailEnd type="none" w="med" len="med"/>
+                    </a:lnL>
+                    <a:lnR w="12700" cap="flat" cmpd="sng" algn="ctr">
+                      <a:solidFill>
+                        <a:srgbClr val="CADCFC"/>
+                      </a:solidFill>
+                      <a:prstDash val="solid"/>
+                      <a:round/>
+                      <a:headEnd type="none" w="med" len="med"/>
+                      <a:tailEnd type="none" w="med" len="med"/>
+                    </a:lnR>
+                    <a:lnT w="12700" cap="flat" cmpd="sng" algn="ctr">
+                      <a:solidFill>
+                        <a:srgbClr val="CADCFC"/>
+                      </a:solidFill>
+                      <a:prstDash val="solid"/>
+                      <a:round/>
+                      <a:headEnd type="none" w="med" len="med"/>
+                      <a:tailEnd type="none" w="med" len="med"/>
+                    </a:lnT>
+                    <a:lnB w="12700" cap="flat" cmpd="sng" algn="ctr">
+                      <a:solidFill>
+                        <a:srgbClr val="CADCFC"/>
+                      </a:solidFill>
+                      <a:prstDash val="solid"/>
+                      <a:round/>
+                      <a:headEnd type="none" w="med" len="med"/>
+                      <a:tailEnd type="none" w="med" len="med"/>
+                    </a:lnB>
+                    <a:solidFill>
+                      <a:srgbClr val="1E2761"/>
+                    </a:solidFill>
+                  </a:tcPr>
+                </a:tc>
+              </a:tr>
+              <a:tr h="457200">
+                <a:tc>
+                  <a:txBody>
+                    <a:bodyPr/>
+                    <a:lstStyle/>
+                    <a:p>
+                      <a:pPr indent="0" marL="0">
+                        <a:buNone/>
+                      </a:pPr>
+                      <a:r>
+                        <a:rPr lang="en-US" sz="1300" dirty="0">
                           <a:solidFill>
                             <a:srgbClr val="000000"/>
                           </a:solidFill>
@@ -7496,9 +8723,9 @@
                           <a:ea typeface="Calibri" pitchFamily="34" charset="-122"/>
                           <a:cs typeface="Calibri" pitchFamily="34" charset="-120"/>
                         </a:rPr>
-                        <a:t>Triage quality (H3, RQ3)</a:t>
+                        <a:t>Journey stage</a:t>
                       </a:r>
-                      <a:endParaRPr lang="en-US" sz="1350" dirty="0">
+                      <a:endParaRPr lang="en-US" sz="1300" dirty="0">
                         <a:latin typeface="Calibri" charset="0"/>
                         <a:ea typeface="Calibri" charset="0"/>
                         <a:cs typeface="Calibri" charset="0"/>
@@ -7553,7 +8780,7 @@
                         <a:buNone/>
                       </a:pPr>
                       <a:r>
-                        <a:rPr lang="en-US" sz="1350" dirty="0">
+                        <a:rPr lang="en-US" sz="1300" dirty="0">
                           <a:solidFill>
                             <a:srgbClr val="000000"/>
                           </a:solidFill>
@@ -7561,9 +8788,9 @@
                           <a:ea typeface="Calibri" pitchFamily="34" charset="-122"/>
                           <a:cs typeface="Calibri" pitchFamily="34" charset="-120"/>
                         </a:rPr>
-                        <a:t>MEASURED</a:t>
+                        <a:t>27</a:t>
                       </a:r>
-                      <a:endParaRPr lang="en-US" sz="1350" dirty="0">
+                      <a:endParaRPr lang="en-US" sz="1300" dirty="0">
                         <a:latin typeface="Calibri" charset="0"/>
                         <a:ea typeface="Calibri" charset="0"/>
                         <a:cs typeface="Calibri" charset="0"/>
@@ -7618,7 +8845,7 @@
                         <a:buNone/>
                       </a:pPr>
                       <a:r>
-                        <a:rPr lang="en-US" sz="1350" dirty="0">
+                        <a:rPr lang="en-US" sz="1300" dirty="0">
                           <a:solidFill>
                             <a:srgbClr val="000000"/>
                           </a:solidFill>
@@ -7626,76 +8853,9 @@
                           <a:ea typeface="Calibri" pitchFamily="34" charset="-122"/>
                           <a:cs typeface="Calibri" pitchFamily="34" charset="-120"/>
                         </a:rPr>
-                        <a:t>two independent gold standards (§5A + in-repo)</a:t>
+                        <a:t>0.20</a:t>
                       </a:r>
-                      <a:endParaRPr lang="en-US" sz="1350" dirty="0">
-                        <a:latin typeface="Calibri" charset="0"/>
-                        <a:ea typeface="Calibri" charset="0"/>
-                        <a:cs typeface="Calibri" charset="0"/>
-                      </a:endParaRPr>
-                    </a:p>
-                  </a:txBody>
-                  <a:tcPr marL="91440" marR="91440" marT="45720" marB="45720" anchor="ctr">
-                    <a:lnL w="12700" cap="flat" cmpd="sng" algn="ctr">
-                      <a:solidFill>
-                        <a:srgbClr val="CADCFC"/>
-                      </a:solidFill>
-                      <a:prstDash val="solid"/>
-                      <a:round/>
-                      <a:headEnd type="none" w="med" len="med"/>
-                      <a:tailEnd type="none" w="med" len="med"/>
-                    </a:lnL>
-                    <a:lnR w="12700" cap="flat" cmpd="sng" algn="ctr">
-                      <a:solidFill>
-                        <a:srgbClr val="CADCFC"/>
-                      </a:solidFill>
-                      <a:prstDash val="solid"/>
-                      <a:round/>
-                      <a:headEnd type="none" w="med" len="med"/>
-                      <a:tailEnd type="none" w="med" len="med"/>
-                    </a:lnR>
-                    <a:lnT w="12700" cap="flat" cmpd="sng" algn="ctr">
-                      <a:solidFill>
-                        <a:srgbClr val="CADCFC"/>
-                      </a:solidFill>
-                      <a:prstDash val="solid"/>
-                      <a:round/>
-                      <a:headEnd type="none" w="med" len="med"/>
-                      <a:tailEnd type="none" w="med" len="med"/>
-                    </a:lnT>
-                    <a:lnB w="12700" cap="flat" cmpd="sng" algn="ctr">
-                      <a:solidFill>
-                        <a:srgbClr val="CADCFC"/>
-                      </a:solidFill>
-                      <a:prstDash val="solid"/>
-                      <a:round/>
-                      <a:headEnd type="none" w="med" len="med"/>
-                      <a:tailEnd type="none" w="med" len="med"/>
-                    </a:lnB>
-                  </a:tcPr>
-                </a:tc>
-              </a:tr>
-              <a:tr h="502920">
-                <a:tc>
-                  <a:txBody>
-                    <a:bodyPr/>
-                    <a:lstStyle/>
-                    <a:p>
-                      <a:pPr indent="0" marL="0">
-                        <a:buNone/>
-                      </a:pPr>
-                      <a:r>
-                        <a:rPr lang="en-US" sz="1350" dirty="0">
-                          <a:solidFill>
-                            <a:srgbClr val="000000"/>
-                          </a:solidFill>
-                          <a:latin typeface="Calibri" pitchFamily="34" charset="0"/>
-                          <a:ea typeface="Calibri" pitchFamily="34" charset="-122"/>
-                          <a:cs typeface="Calibri" pitchFamily="34" charset="-120"/>
-                        </a:rPr>
-                        <a:t>DP2 memory influence</a:t>
-                      </a:r>
-                      <a:endParaRPr lang="en-US" sz="1350" dirty="0">
+                      <a:endParaRPr lang="en-US" sz="1300" dirty="0">
                         <a:latin typeface="Calibri" charset="0"/>
                         <a:ea typeface="Calibri" charset="0"/>
                         <a:cs typeface="Calibri" charset="0"/>
@@ -7750,7 +8910,7 @@
                         <a:buNone/>
                       </a:pPr>
                       <a:r>
-                        <a:rPr lang="en-US" sz="1350" dirty="0">
+                        <a:rPr lang="en-US" sz="1300" b="1" dirty="0">
                           <a:solidFill>
                             <a:srgbClr val="000000"/>
                           </a:solidFill>
@@ -7758,9 +8918,76 @@
                           <a:ea typeface="Calibri" pitchFamily="34" charset="-122"/>
                           <a:cs typeface="Calibri" pitchFamily="34" charset="-120"/>
                         </a:rPr>
-                        <a:t>PARTIALLY MEASURED</a:t>
+                        <a:t>0.59</a:t>
                       </a:r>
-                      <a:endParaRPr lang="en-US" sz="1350" dirty="0">
+                      <a:endParaRPr lang="en-US" sz="1300" dirty="0">
+                        <a:latin typeface="Calibri" charset="0"/>
+                        <a:ea typeface="Calibri" charset="0"/>
+                        <a:cs typeface="Calibri" charset="0"/>
+                      </a:endParaRPr>
+                    </a:p>
+                  </a:txBody>
+                  <a:tcPr marL="91440" marR="91440" marT="45720" marB="45720" anchor="ctr">
+                    <a:lnL w="12700" cap="flat" cmpd="sng" algn="ctr">
+                      <a:solidFill>
+                        <a:srgbClr val="CADCFC"/>
+                      </a:solidFill>
+                      <a:prstDash val="solid"/>
+                      <a:round/>
+                      <a:headEnd type="none" w="med" len="med"/>
+                      <a:tailEnd type="none" w="med" len="med"/>
+                    </a:lnL>
+                    <a:lnR w="12700" cap="flat" cmpd="sng" algn="ctr">
+                      <a:solidFill>
+                        <a:srgbClr val="CADCFC"/>
+                      </a:solidFill>
+                      <a:prstDash val="solid"/>
+                      <a:round/>
+                      <a:headEnd type="none" w="med" len="med"/>
+                      <a:tailEnd type="none" w="med" len="med"/>
+                    </a:lnR>
+                    <a:lnT w="12700" cap="flat" cmpd="sng" algn="ctr">
+                      <a:solidFill>
+                        <a:srgbClr val="CADCFC"/>
+                      </a:solidFill>
+                      <a:prstDash val="solid"/>
+                      <a:round/>
+                      <a:headEnd type="none" w="med" len="med"/>
+                      <a:tailEnd type="none" w="med" len="med"/>
+                    </a:lnT>
+                    <a:lnB w="12700" cap="flat" cmpd="sng" algn="ctr">
+                      <a:solidFill>
+                        <a:srgbClr val="CADCFC"/>
+                      </a:solidFill>
+                      <a:prstDash val="solid"/>
+                      <a:round/>
+                      <a:headEnd type="none" w="med" len="med"/>
+                      <a:tailEnd type="none" w="med" len="med"/>
+                    </a:lnB>
+                  </a:tcPr>
+                </a:tc>
+              </a:tr>
+              <a:tr h="457200">
+                <a:tc>
+                  <a:txBody>
+                    <a:bodyPr/>
+                    <a:lstStyle/>
+                    <a:p>
+                      <a:pPr indent="0" marL="0">
+                        <a:buNone/>
+                      </a:pPr>
+                      <a:r>
+                        <a:rPr lang="en-US" sz="1300" dirty="0">
+                          <a:solidFill>
+                            <a:srgbClr val="000000"/>
+                          </a:solidFill>
+                          <a:latin typeface="Calibri" pitchFamily="34" charset="0"/>
+                          <a:ea typeface="Calibri" pitchFamily="34" charset="-122"/>
+                          <a:cs typeface="Calibri" pitchFamily="34" charset="-120"/>
+                        </a:rPr>
+                        <a:t>Recommended owner</a:t>
+                      </a:r>
+                      <a:endParaRPr lang="en-US" sz="1300" dirty="0">
                         <a:latin typeface="Calibri" charset="0"/>
                         <a:ea typeface="Calibri" charset="0"/>
                         <a:cs typeface="Calibri" charset="0"/>
@@ -7815,7 +9042,7 @@
                         <a:buNone/>
                       </a:pPr>
                       <a:r>
-                        <a:rPr lang="en-US" sz="1350" dirty="0">
+                        <a:rPr lang="en-US" sz="1300" dirty="0">
                           <a:solidFill>
                             <a:srgbClr val="000000"/>
                           </a:solidFill>
@@ -7823,76 +9050,9 @@
                           <a:ea typeface="Calibri" pitchFamily="34" charset="-122"/>
                           <a:cs typeface="Calibri" pitchFamily="34" charset="-120"/>
                         </a:rPr>
-                        <a:t>adoption 21→71%; outcomes simulated</a:t>
+                        <a:t>51</a:t>
                       </a:r>
-                      <a:endParaRPr lang="en-US" sz="1350" dirty="0">
-                        <a:latin typeface="Calibri" charset="0"/>
-                        <a:ea typeface="Calibri" charset="0"/>
-                        <a:cs typeface="Calibri" charset="0"/>
-                      </a:endParaRPr>
-                    </a:p>
-                  </a:txBody>
-                  <a:tcPr marL="91440" marR="91440" marT="45720" marB="45720" anchor="ctr">
-                    <a:lnL w="12700" cap="flat" cmpd="sng" algn="ctr">
-                      <a:solidFill>
-                        <a:srgbClr val="CADCFC"/>
-                      </a:solidFill>
-                      <a:prstDash val="solid"/>
-                      <a:round/>
-                      <a:headEnd type="none" w="med" len="med"/>
-                      <a:tailEnd type="none" w="med" len="med"/>
-                    </a:lnL>
-                    <a:lnR w="12700" cap="flat" cmpd="sng" algn="ctr">
-                      <a:solidFill>
-                        <a:srgbClr val="CADCFC"/>
-                      </a:solidFill>
-                      <a:prstDash val="solid"/>
-                      <a:round/>
-                      <a:headEnd type="none" w="med" len="med"/>
-                      <a:tailEnd type="none" w="med" len="med"/>
-                    </a:lnR>
-                    <a:lnT w="12700" cap="flat" cmpd="sng" algn="ctr">
-                      <a:solidFill>
-                        <a:srgbClr val="CADCFC"/>
-                      </a:solidFill>
-                      <a:prstDash val="solid"/>
-                      <a:round/>
-                      <a:headEnd type="none" w="med" len="med"/>
-                      <a:tailEnd type="none" w="med" len="med"/>
-                    </a:lnT>
-                    <a:lnB w="12700" cap="flat" cmpd="sng" algn="ctr">
-                      <a:solidFill>
-                        <a:srgbClr val="CADCFC"/>
-                      </a:solidFill>
-                      <a:prstDash val="solid"/>
-                      <a:round/>
-                      <a:headEnd type="none" w="med" len="med"/>
-                      <a:tailEnd type="none" w="med" len="med"/>
-                    </a:lnB>
-                  </a:tcPr>
-                </a:tc>
-              </a:tr>
-              <a:tr h="502920">
-                <a:tc>
-                  <a:txBody>
-                    <a:bodyPr/>
-                    <a:lstStyle/>
-                    <a:p>
-                      <a:pPr indent="0" marL="0">
-                        <a:buNone/>
-                      </a:pPr>
-                      <a:r>
-                        <a:rPr lang="en-US" sz="1350" dirty="0">
-                          <a:solidFill>
-                            <a:srgbClr val="000000"/>
-                          </a:solidFill>
-                          <a:latin typeface="Calibri" pitchFamily="34" charset="0"/>
-                          <a:ea typeface="Calibri" pitchFamily="34" charset="-122"/>
-                          <a:cs typeface="Calibri" pitchFamily="34" charset="-120"/>
-                        </a:rPr>
-                        <a:t>DP1 outcome contracts</a:t>
-                      </a:r>
-                      <a:endParaRPr lang="en-US" sz="1350" dirty="0">
+                      <a:endParaRPr lang="en-US" sz="1300" dirty="0">
                         <a:latin typeface="Calibri" charset="0"/>
                         <a:ea typeface="Calibri" charset="0"/>
                         <a:cs typeface="Calibri" charset="0"/>
@@ -7947,7 +9107,7 @@
                         <a:buNone/>
                       </a:pPr>
                       <a:r>
-                        <a:rPr lang="en-US" sz="1350" dirty="0">
+                        <a:rPr lang="en-US" sz="1300" dirty="0">
                           <a:solidFill>
                             <a:srgbClr val="000000"/>
                           </a:solidFill>
@@ -7955,9 +9115,9 @@
                           <a:ea typeface="Calibri" pitchFamily="34" charset="-122"/>
                           <a:cs typeface="Calibri" pitchFamily="34" charset="-120"/>
                         </a:rPr>
-                        <a:t>DEMONSTRATED</a:t>
+                        <a:t>0.15</a:t>
                       </a:r>
-                      <a:endParaRPr lang="en-US" sz="1350" dirty="0">
+                      <a:endParaRPr lang="en-US" sz="1300" dirty="0">
                         <a:latin typeface="Calibri" charset="0"/>
                         <a:ea typeface="Calibri" charset="0"/>
                         <a:cs typeface="Calibri" charset="0"/>
@@ -8012,7 +9172,7 @@
                         <a:buNone/>
                       </a:pPr>
                       <a:r>
-                        <a:rPr lang="en-US" sz="1350" dirty="0">
+                        <a:rPr lang="en-US" sz="1300" b="1" dirty="0">
                           <a:solidFill>
                             <a:srgbClr val="000000"/>
                           </a:solidFill>
@@ -8020,9 +9180,9 @@
                           <a:ea typeface="Calibri" pitchFamily="34" charset="-122"/>
                           <a:cs typeface="Calibri" pitchFamily="34" charset="-120"/>
                         </a:rPr>
-                        <a:t>designed + instrumented; live contract pending</a:t>
+                        <a:t>0.40</a:t>
                       </a:r>
-                      <a:endParaRPr lang="en-US" sz="1350" dirty="0">
+                      <a:endParaRPr lang="en-US" sz="1300" dirty="0">
                         <a:latin typeface="Calibri" charset="0"/>
                         <a:ea typeface="Calibri" charset="0"/>
                         <a:cs typeface="Calibri" charset="0"/>
@@ -8069,400 +9229,6 @@
                   </a:tcPr>
                 </a:tc>
               </a:tr>
-              <a:tr h="502920">
-                <a:tc>
-                  <a:txBody>
-                    <a:bodyPr/>
-                    <a:lstStyle/>
-                    <a:p>
-                      <a:pPr indent="0" marL="0">
-                        <a:buNone/>
-                      </a:pPr>
-                      <a:r>
-                        <a:rPr lang="en-US" sz="1350" dirty="0">
-                          <a:solidFill>
-                            <a:srgbClr val="000000"/>
-                          </a:solidFill>
-                          <a:latin typeface="Calibri" pitchFamily="34" charset="0"/>
-                          <a:ea typeface="Calibri" pitchFamily="34" charset="-122"/>
-                          <a:cs typeface="Calibri" pitchFamily="34" charset="-120"/>
-                        </a:rPr>
-                        <a:t>Loop end-to-end in production</a:t>
-                      </a:r>
-                      <a:endParaRPr lang="en-US" sz="1350" dirty="0">
-                        <a:latin typeface="Calibri" charset="0"/>
-                        <a:ea typeface="Calibri" charset="0"/>
-                        <a:cs typeface="Calibri" charset="0"/>
-                      </a:endParaRPr>
-                    </a:p>
-                  </a:txBody>
-                  <a:tcPr marL="91440" marR="91440" marT="45720" marB="45720" anchor="ctr">
-                    <a:lnL w="12700" cap="flat" cmpd="sng" algn="ctr">
-                      <a:solidFill>
-                        <a:srgbClr val="CADCFC"/>
-                      </a:solidFill>
-                      <a:prstDash val="solid"/>
-                      <a:round/>
-                      <a:headEnd type="none" w="med" len="med"/>
-                      <a:tailEnd type="none" w="med" len="med"/>
-                    </a:lnL>
-                    <a:lnR w="12700" cap="flat" cmpd="sng" algn="ctr">
-                      <a:solidFill>
-                        <a:srgbClr val="CADCFC"/>
-                      </a:solidFill>
-                      <a:prstDash val="solid"/>
-                      <a:round/>
-                      <a:headEnd type="none" w="med" len="med"/>
-                      <a:tailEnd type="none" w="med" len="med"/>
-                    </a:lnR>
-                    <a:lnT w="12700" cap="flat" cmpd="sng" algn="ctr">
-                      <a:solidFill>
-                        <a:srgbClr val="CADCFC"/>
-                      </a:solidFill>
-                      <a:prstDash val="solid"/>
-                      <a:round/>
-                      <a:headEnd type="none" w="med" len="med"/>
-                      <a:tailEnd type="none" w="med" len="med"/>
-                    </a:lnT>
-                    <a:lnB w="12700" cap="flat" cmpd="sng" algn="ctr">
-                      <a:solidFill>
-                        <a:srgbClr val="CADCFC"/>
-                      </a:solidFill>
-                      <a:prstDash val="solid"/>
-                      <a:round/>
-                      <a:headEnd type="none" w="med" len="med"/>
-                      <a:tailEnd type="none" w="med" len="med"/>
-                    </a:lnB>
-                  </a:tcPr>
-                </a:tc>
-                <a:tc>
-                  <a:txBody>
-                    <a:bodyPr/>
-                    <a:lstStyle/>
-                    <a:p>
-                      <a:pPr indent="0" marL="0">
-                        <a:buNone/>
-                      </a:pPr>
-                      <a:r>
-                        <a:rPr lang="en-US" sz="1350" dirty="0">
-                          <a:solidFill>
-                            <a:srgbClr val="000000"/>
-                          </a:solidFill>
-                          <a:latin typeface="Calibri" pitchFamily="34" charset="0"/>
-                          <a:ea typeface="Calibri" pitchFamily="34" charset="-122"/>
-                          <a:cs typeface="Calibri" pitchFamily="34" charset="-120"/>
-                        </a:rPr>
-                        <a:t>DEMONSTRATED</a:t>
-                      </a:r>
-                      <a:endParaRPr lang="en-US" sz="1350" dirty="0">
-                        <a:latin typeface="Calibri" charset="0"/>
-                        <a:ea typeface="Calibri" charset="0"/>
-                        <a:cs typeface="Calibri" charset="0"/>
-                      </a:endParaRPr>
-                    </a:p>
-                  </a:txBody>
-                  <a:tcPr marL="91440" marR="91440" marT="45720" marB="45720" anchor="ctr">
-                    <a:lnL w="12700" cap="flat" cmpd="sng" algn="ctr">
-                      <a:solidFill>
-                        <a:srgbClr val="CADCFC"/>
-                      </a:solidFill>
-                      <a:prstDash val="solid"/>
-                      <a:round/>
-                      <a:headEnd type="none" w="med" len="med"/>
-                      <a:tailEnd type="none" w="med" len="med"/>
-                    </a:lnL>
-                    <a:lnR w="12700" cap="flat" cmpd="sng" algn="ctr">
-                      <a:solidFill>
-                        <a:srgbClr val="CADCFC"/>
-                      </a:solidFill>
-                      <a:prstDash val="solid"/>
-                      <a:round/>
-                      <a:headEnd type="none" w="med" len="med"/>
-                      <a:tailEnd type="none" w="med" len="med"/>
-                    </a:lnR>
-                    <a:lnT w="12700" cap="flat" cmpd="sng" algn="ctr">
-                      <a:solidFill>
-                        <a:srgbClr val="CADCFC"/>
-                      </a:solidFill>
-                      <a:prstDash val="solid"/>
-                      <a:round/>
-                      <a:headEnd type="none" w="med" len="med"/>
-                      <a:tailEnd type="none" w="med" len="med"/>
-                    </a:lnT>
-                    <a:lnB w="12700" cap="flat" cmpd="sng" algn="ctr">
-                      <a:solidFill>
-                        <a:srgbClr val="CADCFC"/>
-                      </a:solidFill>
-                      <a:prstDash val="solid"/>
-                      <a:round/>
-                      <a:headEnd type="none" w="med" len="med"/>
-                      <a:tailEnd type="none" w="med" len="med"/>
-                    </a:lnB>
-                  </a:tcPr>
-                </a:tc>
-                <a:tc>
-                  <a:txBody>
-                    <a:bodyPr/>
-                    <a:lstStyle/>
-                    <a:p>
-                      <a:pPr indent="0" marL="0">
-                        <a:buNone/>
-                      </a:pPr>
-                      <a:r>
-                        <a:rPr lang="en-US" sz="1350" dirty="0">
-                          <a:solidFill>
-                            <a:srgbClr val="000000"/>
-                          </a:solidFill>
-                          <a:latin typeface="Calibri" pitchFamily="34" charset="0"/>
-                          <a:ea typeface="Calibri" pitchFamily="34" charset="-122"/>
-                          <a:cs typeface="Calibri" pitchFamily="34" charset="-120"/>
-                        </a:rPr>
-                        <a:t>real Jira/Slack push; interrupt fix verified</a:t>
-                      </a:r>
-                      <a:endParaRPr lang="en-US" sz="1350" dirty="0">
-                        <a:latin typeface="Calibri" charset="0"/>
-                        <a:ea typeface="Calibri" charset="0"/>
-                        <a:cs typeface="Calibri" charset="0"/>
-                      </a:endParaRPr>
-                    </a:p>
-                  </a:txBody>
-                  <a:tcPr marL="91440" marR="91440" marT="45720" marB="45720" anchor="ctr">
-                    <a:lnL w="12700" cap="flat" cmpd="sng" algn="ctr">
-                      <a:solidFill>
-                        <a:srgbClr val="CADCFC"/>
-                      </a:solidFill>
-                      <a:prstDash val="solid"/>
-                      <a:round/>
-                      <a:headEnd type="none" w="med" len="med"/>
-                      <a:tailEnd type="none" w="med" len="med"/>
-                    </a:lnL>
-                    <a:lnR w="12700" cap="flat" cmpd="sng" algn="ctr">
-                      <a:solidFill>
-                        <a:srgbClr val="CADCFC"/>
-                      </a:solidFill>
-                      <a:prstDash val="solid"/>
-                      <a:round/>
-                      <a:headEnd type="none" w="med" len="med"/>
-                      <a:tailEnd type="none" w="med" len="med"/>
-                    </a:lnR>
-                    <a:lnT w="12700" cap="flat" cmpd="sng" algn="ctr">
-                      <a:solidFill>
-                        <a:srgbClr val="CADCFC"/>
-                      </a:solidFill>
-                      <a:prstDash val="solid"/>
-                      <a:round/>
-                      <a:headEnd type="none" w="med" len="med"/>
-                      <a:tailEnd type="none" w="med" len="med"/>
-                    </a:lnT>
-                    <a:lnB w="12700" cap="flat" cmpd="sng" algn="ctr">
-                      <a:solidFill>
-                        <a:srgbClr val="CADCFC"/>
-                      </a:solidFill>
-                      <a:prstDash val="solid"/>
-                      <a:round/>
-                      <a:headEnd type="none" w="med" len="med"/>
-                      <a:tailEnd type="none" w="med" len="med"/>
-                    </a:lnB>
-                  </a:tcPr>
-                </a:tc>
-              </a:tr>
-              <a:tr h="502920">
-                <a:tc>
-                  <a:txBody>
-                    <a:bodyPr/>
-                    <a:lstStyle/>
-                    <a:p>
-                      <a:pPr indent="0" marL="0">
-                        <a:buNone/>
-                      </a:pPr>
-                      <a:r>
-                        <a:rPr lang="en-US" sz="1350" dirty="0">
-                          <a:solidFill>
-                            <a:srgbClr val="000000"/>
-                          </a:solidFill>
-                          <a:latin typeface="Calibri" pitchFamily="34" charset="0"/>
-                          <a:ea typeface="Calibri" pitchFamily="34" charset="-122"/>
-                          <a:cs typeface="Calibri" pitchFamily="34" charset="-120"/>
-                        </a:rPr>
-                        <a:t>Practitioner value (RQ4)</a:t>
-                      </a:r>
-                      <a:endParaRPr lang="en-US" sz="1350" dirty="0">
-                        <a:latin typeface="Calibri" charset="0"/>
-                        <a:ea typeface="Calibri" charset="0"/>
-                        <a:cs typeface="Calibri" charset="0"/>
-                      </a:endParaRPr>
-                    </a:p>
-                  </a:txBody>
-                  <a:tcPr marL="91440" marR="91440" marT="45720" marB="45720" anchor="ctr">
-                    <a:lnL w="12700" cap="flat" cmpd="sng" algn="ctr">
-                      <a:solidFill>
-                        <a:srgbClr val="CADCFC"/>
-                      </a:solidFill>
-                      <a:prstDash val="solid"/>
-                      <a:round/>
-                      <a:headEnd type="none" w="med" len="med"/>
-                      <a:tailEnd type="none" w="med" len="med"/>
-                    </a:lnL>
-                    <a:lnR w="12700" cap="flat" cmpd="sng" algn="ctr">
-                      <a:solidFill>
-                        <a:srgbClr val="CADCFC"/>
-                      </a:solidFill>
-                      <a:prstDash val="solid"/>
-                      <a:round/>
-                      <a:headEnd type="none" w="med" len="med"/>
-                      <a:tailEnd type="none" w="med" len="med"/>
-                    </a:lnR>
-                    <a:lnT w="12700" cap="flat" cmpd="sng" algn="ctr">
-                      <a:solidFill>
-                        <a:srgbClr val="CADCFC"/>
-                      </a:solidFill>
-                      <a:prstDash val="solid"/>
-                      <a:round/>
-                      <a:headEnd type="none" w="med" len="med"/>
-                      <a:tailEnd type="none" w="med" len="med"/>
-                    </a:lnT>
-                    <a:lnB w="12700" cap="flat" cmpd="sng" algn="ctr">
-                      <a:solidFill>
-                        <a:srgbClr val="CADCFC"/>
-                      </a:solidFill>
-                      <a:prstDash val="solid"/>
-                      <a:round/>
-                      <a:headEnd type="none" w="med" len="med"/>
-                      <a:tailEnd type="none" w="med" len="med"/>
-                    </a:lnB>
-                  </a:tcPr>
-                </a:tc>
-                <a:tc>
-                  <a:txBody>
-                    <a:bodyPr/>
-                    <a:lstStyle/>
-                    <a:p>
-                      <a:pPr indent="0" marL="0">
-                        <a:buNone/>
-                      </a:pPr>
-                      <a:r>
-                        <a:rPr lang="en-US" sz="1350" dirty="0">
-                          <a:solidFill>
-                            <a:srgbClr val="000000"/>
-                          </a:solidFill>
-                          <a:latin typeface="Calibri" pitchFamily="34" charset="0"/>
-                          <a:ea typeface="Calibri" pitchFamily="34" charset="-122"/>
-                          <a:cs typeface="Calibri" pitchFamily="34" charset="-120"/>
-                        </a:rPr>
-                        <a:t>PENDING</a:t>
-                      </a:r>
-                      <a:endParaRPr lang="en-US" sz="1350" dirty="0">
-                        <a:latin typeface="Calibri" charset="0"/>
-                        <a:ea typeface="Calibri" charset="0"/>
-                        <a:cs typeface="Calibri" charset="0"/>
-                      </a:endParaRPr>
-                    </a:p>
-                  </a:txBody>
-                  <a:tcPr marL="91440" marR="91440" marT="45720" marB="45720" anchor="ctr">
-                    <a:lnL w="12700" cap="flat" cmpd="sng" algn="ctr">
-                      <a:solidFill>
-                        <a:srgbClr val="CADCFC"/>
-                      </a:solidFill>
-                      <a:prstDash val="solid"/>
-                      <a:round/>
-                      <a:headEnd type="none" w="med" len="med"/>
-                      <a:tailEnd type="none" w="med" len="med"/>
-                    </a:lnL>
-                    <a:lnR w="12700" cap="flat" cmpd="sng" algn="ctr">
-                      <a:solidFill>
-                        <a:srgbClr val="CADCFC"/>
-                      </a:solidFill>
-                      <a:prstDash val="solid"/>
-                      <a:round/>
-                      <a:headEnd type="none" w="med" len="med"/>
-                      <a:tailEnd type="none" w="med" len="med"/>
-                    </a:lnR>
-                    <a:lnT w="12700" cap="flat" cmpd="sng" algn="ctr">
-                      <a:solidFill>
-                        <a:srgbClr val="CADCFC"/>
-                      </a:solidFill>
-                      <a:prstDash val="solid"/>
-                      <a:round/>
-                      <a:headEnd type="none" w="med" len="med"/>
-                      <a:tailEnd type="none" w="med" len="med"/>
-                    </a:lnT>
-                    <a:lnB w="12700" cap="flat" cmpd="sng" algn="ctr">
-                      <a:solidFill>
-                        <a:srgbClr val="CADCFC"/>
-                      </a:solidFill>
-                      <a:prstDash val="solid"/>
-                      <a:round/>
-                      <a:headEnd type="none" w="med" len="med"/>
-                      <a:tailEnd type="none" w="med" len="med"/>
-                    </a:lnB>
-                  </a:tcPr>
-                </a:tc>
-                <a:tc>
-                  <a:txBody>
-                    <a:bodyPr/>
-                    <a:lstStyle/>
-                    <a:p>
-                      <a:pPr indent="0" marL="0">
-                        <a:buNone/>
-                      </a:pPr>
-                      <a:r>
-                        <a:rPr lang="en-US" sz="1350" dirty="0">
-                          <a:solidFill>
-                            <a:srgbClr val="000000"/>
-                          </a:solidFill>
-                          <a:latin typeface="Calibri" pitchFamily="34" charset="0"/>
-                          <a:ea typeface="Calibri" pitchFamily="34" charset="-122"/>
-                          <a:cs typeface="Calibri" pitchFamily="34" charset="-120"/>
-                        </a:rPr>
-                        <a:t>instruments ready; interviews in progress</a:t>
-                      </a:r>
-                      <a:endParaRPr lang="en-US" sz="1350" dirty="0">
-                        <a:latin typeface="Calibri" charset="0"/>
-                        <a:ea typeface="Calibri" charset="0"/>
-                        <a:cs typeface="Calibri" charset="0"/>
-                      </a:endParaRPr>
-                    </a:p>
-                  </a:txBody>
-                  <a:tcPr marL="91440" marR="91440" marT="45720" marB="45720" anchor="ctr">
-                    <a:lnL w="12700" cap="flat" cmpd="sng" algn="ctr">
-                      <a:solidFill>
-                        <a:srgbClr val="CADCFC"/>
-                      </a:solidFill>
-                      <a:prstDash val="solid"/>
-                      <a:round/>
-                      <a:headEnd type="none" w="med" len="med"/>
-                      <a:tailEnd type="none" w="med" len="med"/>
-                    </a:lnL>
-                    <a:lnR w="12700" cap="flat" cmpd="sng" algn="ctr">
-                      <a:solidFill>
-                        <a:srgbClr val="CADCFC"/>
-                      </a:solidFill>
-                      <a:prstDash val="solid"/>
-                      <a:round/>
-                      <a:headEnd type="none" w="med" len="med"/>
-                      <a:tailEnd type="none" w="med" len="med"/>
-                    </a:lnR>
-                    <a:lnT w="12700" cap="flat" cmpd="sng" algn="ctr">
-                      <a:solidFill>
-                        <a:srgbClr val="CADCFC"/>
-                      </a:solidFill>
-                      <a:prstDash val="solid"/>
-                      <a:round/>
-                      <a:headEnd type="none" w="med" len="med"/>
-                      <a:tailEnd type="none" w="med" len="med"/>
-                    </a:lnT>
-                    <a:lnB w="12700" cap="flat" cmpd="sng" algn="ctr">
-                      <a:solidFill>
-                        <a:srgbClr val="CADCFC"/>
-                      </a:solidFill>
-                      <a:prstDash val="solid"/>
-                      <a:round/>
-                      <a:headEnd type="none" w="med" len="med"/>
-                      <a:tailEnd type="none" w="med" len="med"/>
-                    </a:lnB>
-                  </a:tcPr>
-                </a:tc>
-              </a:tr>
             </a:tbl>
           </a:graphicData>
         </a:graphic>
@@ -8475,8 +9241,8 @@
         </p:nvSpPr>
         <p:spPr>
           <a:xfrm>
-            <a:off x="548640" y="5029200"/>
-            <a:ext cx="11064240" cy="731520"/>
+            <a:off x="548640" y="3200400"/>
+            <a:ext cx="6858000" cy="1280160"/>
           </a:xfrm>
           <a:prstGeom prst="rect">
             <a:avLst/>
@@ -8492,17 +9258,222 @@
               <a:buNone/>
             </a:pPr>
             <a:r>
-              <a:rPr lang="en-US" sz="1400" i="1" dirty="0">
-                <a:solidFill>
-                  <a:srgbClr val="5A6478"/>
-                </a:solidFill>
-                <a:latin typeface="Calibri" pitchFamily="34" charset="0"/>
-                <a:ea typeface="Calibri" pitchFamily="34" charset="-122"/>
-                <a:cs typeface="Calibri" pitchFamily="34" charset="-120"/>
-              </a:rPr>
-              <a:t>A claim's status is stated once, in one place, and the chapters must agree with it. This is the discipline that keeps a design-science thesis honest when the artifact is also a company.</a:t>
-            </a:r>
-            <a:endParaRPr lang="en-US" sz="1400" dirty="0"/>
+              <a:rPr lang="en-US" sz="1250" dirty="0">
+                <a:solidFill>
+                  <a:srgbClr val="1A1A2E"/>
+                </a:solidFill>
+                <a:latin typeface="Calibri" pitchFamily="34" charset="0"/>
+                <a:ea typeface="Calibri" pitchFamily="34" charset="-122"/>
+                <a:cs typeface="Calibri" pitchFamily="34" charset="-120"/>
+              </a:rPr>
+              <a:t>Both clear their floor by a wide margin — journey by ~3×, owner by ~2.5× — so the pipeline extracts real routing signal rather than guessing the modal class. And neither is remotely good enough to route unattended: an owner assignment correct two times in five would misroute the majority of problems.</a:t>
+            </a:r>
+            <a:endParaRPr lang="en-US" sz="1250" dirty="0"/>
+          </a:p>
+        </p:txBody>
+      </p:sp>
+      <p:sp>
+        <p:nvSpPr>
+          <p:cNvPr id="14" name="Shape 11"/>
+          <p:cNvSpPr/>
+          <p:nvPr/>
+        </p:nvSpPr>
+        <p:spPr>
+          <a:xfrm>
+            <a:off x="7680960" y="1645920"/>
+            <a:ext cx="3931920" cy="2788920"/>
+          </a:xfrm>
+          <a:prstGeom prst="roundRect">
+            <a:avLst>
+              <a:gd name="adj" fmla="val 1967"/>
+            </a:avLst>
+          </a:prstGeom>
+          <a:solidFill>
+            <a:srgbClr val="F4F7FC"/>
+          </a:solidFill>
+          <a:ln w="12700">
+            <a:solidFill>
+              <a:srgbClr val="CADCFC"/>
+            </a:solidFill>
+            <a:prstDash val="solid"/>
+          </a:ln>
+        </p:spPr>
+      </p:sp>
+      <p:sp>
+        <p:nvSpPr>
+          <p:cNvPr id="15" name="Text 12"/>
+          <p:cNvSpPr/>
+          <p:nvPr/>
+        </p:nvSpPr>
+        <p:spPr>
+          <a:xfrm>
+            <a:off x="7818120" y="1737360"/>
+            <a:ext cx="3657600" cy="292608"/>
+          </a:xfrm>
+          <a:prstGeom prst="rect">
+            <a:avLst/>
+          </a:prstGeom>
+          <a:noFill/>
+          <a:ln/>
+        </p:spPr>
+        <p:txBody>
+          <a:bodyPr wrap="square" lIns="0" tIns="0" rIns="0" bIns="0" rtlCol="0" anchor="ctr"/>
+          <a:lstStyle/>
+          <a:p>
+            <a:pPr indent="0" marL="0">
+              <a:buNone/>
+            </a:pPr>
+            <a:r>
+              <a:rPr lang="en-US" sz="1350" b="1" dirty="0">
+                <a:solidFill>
+                  <a:srgbClr val="1E2761"/>
+                </a:solidFill>
+                <a:latin typeface="Calibri" pitchFamily="34" charset="0"/>
+                <a:ea typeface="Calibri" pitchFamily="34" charset="-122"/>
+                <a:cs typeface="Calibri" pitchFamily="34" charset="-120"/>
+              </a:rPr>
+              <a:t>What bounds this</a:t>
+            </a:r>
+            <a:endParaRPr lang="en-US" sz="1350" dirty="0"/>
+          </a:p>
+        </p:txBody>
+      </p:sp>
+      <p:sp>
+        <p:nvSpPr>
+          <p:cNvPr id="16" name="Text 13"/>
+          <p:cNvSpPr/>
+          <p:nvPr/>
+        </p:nvSpPr>
+        <p:spPr>
+          <a:xfrm>
+            <a:off x="7818120" y="2029968"/>
+            <a:ext cx="3657600" cy="2313432"/>
+          </a:xfrm>
+          <a:prstGeom prst="rect">
+            <a:avLst/>
+          </a:prstGeom>
+          <a:noFill/>
+          <a:ln/>
+        </p:spPr>
+        <p:txBody>
+          <a:bodyPr wrap="square" lIns="0" tIns="0" rIns="0" bIns="0" rtlCol="0" anchor="ctr"/>
+          <a:lstStyle/>
+          <a:p>
+            <a:pPr indent="0" marL="0">
+              <a:buNone/>
+            </a:pPr>
+            <a:r>
+              <a:rPr lang="en-US" sz="1150" dirty="0">
+                <a:solidFill>
+                  <a:srgbClr val="1A1A2E"/>
+                </a:solidFill>
+                <a:latin typeface="Calibri" pitchFamily="34" charset="0"/>
+                <a:ea typeface="Calibri" pitchFamily="34" charset="-122"/>
+                <a:cs typeface="Calibri" pitchFamily="34" charset="-120"/>
+              </a:rPr>
+              <a:t>Supplied-inventory scoring is EASIER than production free-form generation, so 0.59 / 0.40 are an UPPER bound, not an estimate. n = 182 (six signals lost to endpoint errors). Macro-F1 across all classes is inflated by rare labels predicted correctly; restricted to classes with ≥5 gold examples it falls to 0.28 and 0.18 — the more conservative figures.</a:t>
+            </a:r>
+            <a:endParaRPr lang="en-US" sz="1150" dirty="0"/>
+          </a:p>
+        </p:txBody>
+      </p:sp>
+      <p:sp>
+        <p:nvSpPr>
+          <p:cNvPr id="17" name="Shape 14"/>
+          <p:cNvSpPr/>
+          <p:nvPr/>
+        </p:nvSpPr>
+        <p:spPr>
+          <a:xfrm>
+            <a:off x="548640" y="4617720"/>
+            <a:ext cx="11064240" cy="1645920"/>
+          </a:xfrm>
+          <a:prstGeom prst="roundRect">
+            <a:avLst>
+              <a:gd name="adj" fmla="val 3333"/>
+            </a:avLst>
+          </a:prstGeom>
+          <a:solidFill>
+            <a:srgbClr val="1E2761"/>
+          </a:solidFill>
+          <a:ln/>
+        </p:spPr>
+      </p:sp>
+      <p:sp>
+        <p:nvSpPr>
+          <p:cNvPr id="18" name="Text 15"/>
+          <p:cNvSpPr/>
+          <p:nvPr/>
+        </p:nvSpPr>
+        <p:spPr>
+          <a:xfrm>
+            <a:off x="777240" y="4736592"/>
+            <a:ext cx="10607040" cy="292608"/>
+          </a:xfrm>
+          <a:prstGeom prst="rect">
+            <a:avLst/>
+          </a:prstGeom>
+          <a:noFill/>
+          <a:ln/>
+        </p:spPr>
+        <p:txBody>
+          <a:bodyPr wrap="square" lIns="0" tIns="0" rIns="0" bIns="0" rtlCol="0" anchor="ctr"/>
+          <a:lstStyle/>
+          <a:p>
+            <a:pPr indent="0" marL="0">
+              <a:buNone/>
+            </a:pPr>
+            <a:r>
+              <a:rPr lang="en-US" sz="1300" b="1" dirty="0">
+                <a:solidFill>
+                  <a:srgbClr val="CADCFC"/>
+                </a:solidFill>
+                <a:latin typeface="Calibri" pitchFamily="34" charset="0"/>
+                <a:ea typeface="Calibri" pitchFamily="34" charset="-122"/>
+                <a:cs typeface="Calibri" pitchFamily="34" charset="-120"/>
+              </a:rPr>
+              <a:t>Why this strengthens the design rather than weakening it</a:t>
+            </a:r>
+            <a:endParaRPr lang="en-US" sz="1300" dirty="0"/>
+          </a:p>
+        </p:txBody>
+      </p:sp>
+      <p:sp>
+        <p:nvSpPr>
+          <p:cNvPr id="19" name="Text 16"/>
+          <p:cNvSpPr/>
+          <p:nvPr/>
+        </p:nvSpPr>
+        <p:spPr>
+          <a:xfrm>
+            <a:off x="777240" y="5047488"/>
+            <a:ext cx="10607040" cy="1143000"/>
+          </a:xfrm>
+          <a:prstGeom prst="rect">
+            <a:avLst/>
+          </a:prstGeom>
+          <a:noFill/>
+          <a:ln/>
+        </p:spPr>
+        <p:txBody>
+          <a:bodyPr wrap="square" lIns="0" tIns="0" rIns="0" bIns="0" rtlCol="0" anchor="ctr"/>
+          <a:lstStyle/>
+          <a:p>
+            <a:pPr indent="0" marL="0">
+              <a:buNone/>
+            </a:pPr>
+            <a:r>
+              <a:rPr lang="en-US" sz="1350" dirty="0">
+                <a:solidFill>
+                  <a:srgbClr val="FFFFFF"/>
+                </a:solidFill>
+                <a:latin typeface="Calibri" pitchFamily="34" charset="0"/>
+                <a:ea typeface="Calibri" pitchFamily="34" charset="-122"/>
+                <a:cs typeface="Calibri" pitchFamily="34" charset="-120"/>
+              </a:rPr>
+              <a:t>The mandatory approval gate (DP4) is not friction added to an otherwise-reliable pipeline — it is the control that makes a pipeline of THIS accuracy safe to deploy at all. A system that routed on these numbers unattended would fail quietly and often. The honest reading: these fields are useful as a draft a human accepts or corrects, and useless as an unattended decision. The numbers force that reading; they were not chosen to support it.</a:t>
+            </a:r>
+            <a:endParaRPr lang="en-US" sz="1350" dirty="0"/>
           </a:p>
         </p:txBody>
       </p:sp>
@@ -8564,7 +9535,7 @@
                 <a:ea typeface="Cambria" pitchFamily="34" charset="-122"/>
                 <a:cs typeface="Cambria" pitchFamily="34" charset="-120"/>
               </a:rPr>
-              <a:t>Where this sits (July 2026)</a:t>
+              <a:t>Result 4: the memory steers, honestly bounded</a:t>
             </a:r>
             <a:endParaRPr lang="en-US" sz="3200" dirty="0"/>
           </a:p>
@@ -8603,7 +9574,7 @@
                 <a:ea typeface="Calibri" pitchFamily="34" charset="-122"/>
                 <a:cs typeface="Calibri" pitchFamily="34" charset="-120"/>
               </a:rPr>
-              <a:t>No single differentiator survives — the contribution is the combination</a:t>
+              <a:t>The perishable-learning mechanism, instrumented</a:t>
             </a:r>
             <a:endParaRPr lang="en-US" sz="1400" dirty="0"/>
           </a:p>
@@ -8742,6 +9713,65 @@
             <a:avLst/>
           </a:prstGeom>
           <a:solidFill>
+            <a:srgbClr val="CADCFC"/>
+          </a:solidFill>
+          <a:ln/>
+        </p:spPr>
+      </p:sp>
+      <p:sp>
+        <p:nvSpPr>
+          <p:cNvPr id="9" name="Text 7"/>
+          <p:cNvSpPr/>
+          <p:nvPr/>
+        </p:nvSpPr>
+        <p:spPr>
+          <a:xfrm>
+            <a:off x="11192256" y="395935"/>
+            <a:ext cx="292608" cy="310896"/>
+          </a:xfrm>
+          <a:prstGeom prst="rect">
+            <a:avLst/>
+          </a:prstGeom>
+          <a:noFill/>
+          <a:ln/>
+        </p:spPr>
+        <p:txBody>
+          <a:bodyPr wrap="square" lIns="0" tIns="0" rIns="0" bIns="0" rtlCol="0" anchor="ctr"/>
+          <a:lstStyle/>
+          <a:p>
+            <a:pPr algn="ctr" indent="0" marL="0">
+              <a:buNone/>
+            </a:pPr>
+            <a:r>
+              <a:rPr lang="en-US" sz="1100" b="1" dirty="0">
+                <a:solidFill>
+                  <a:srgbClr val="1E2761"/>
+                </a:solidFill>
+                <a:latin typeface="Calibri" pitchFamily="34" charset="0"/>
+                <a:ea typeface="Calibri" pitchFamily="34" charset="-122"/>
+                <a:cs typeface="Calibri" pitchFamily="34" charset="-120"/>
+              </a:rPr>
+              <a:t>A</a:t>
+            </a:r>
+            <a:endParaRPr lang="en-US" sz="1100" dirty="0"/>
+          </a:p>
+        </p:txBody>
+      </p:sp>
+      <p:sp>
+        <p:nvSpPr>
+          <p:cNvPr id="10" name="Shape 8"/>
+          <p:cNvSpPr/>
+          <p:nvPr/>
+        </p:nvSpPr>
+        <p:spPr>
+          <a:xfrm>
+            <a:off x="11576304" y="411480"/>
+            <a:ext cx="292608" cy="292608"/>
+          </a:xfrm>
+          <a:prstGeom prst="ellipse">
+            <a:avLst/>
+          </a:prstGeom>
+          <a:solidFill>
             <a:srgbClr val="1E2761"/>
           </a:solidFill>
           <a:ln/>
@@ -8749,65 +9779,6 @@
       </p:sp>
       <p:sp>
         <p:nvSpPr>
-          <p:cNvPr id="9" name="Text 7"/>
-          <p:cNvSpPr/>
-          <p:nvPr/>
-        </p:nvSpPr>
-        <p:spPr>
-          <a:xfrm>
-            <a:off x="11192256" y="395935"/>
-            <a:ext cx="292608" cy="310896"/>
-          </a:xfrm>
-          <a:prstGeom prst="rect">
-            <a:avLst/>
-          </a:prstGeom>
-          <a:noFill/>
-          <a:ln/>
-        </p:spPr>
-        <p:txBody>
-          <a:bodyPr wrap="square" lIns="0" tIns="0" rIns="0" bIns="0" rtlCol="0" anchor="ctr"/>
-          <a:lstStyle/>
-          <a:p>
-            <a:pPr algn="ctr" indent="0" marL="0">
-              <a:buNone/>
-            </a:pPr>
-            <a:r>
-              <a:rPr lang="en-US" sz="1100" b="1" dirty="0">
-                <a:solidFill>
-                  <a:srgbClr val="FFFFFF"/>
-                </a:solidFill>
-                <a:latin typeface="Calibri" pitchFamily="34" charset="0"/>
-                <a:ea typeface="Calibri" pitchFamily="34" charset="-122"/>
-                <a:cs typeface="Calibri" pitchFamily="34" charset="-120"/>
-              </a:rPr>
-              <a:t>A</a:t>
-            </a:r>
-            <a:endParaRPr lang="en-US" sz="1100" dirty="0"/>
-          </a:p>
-        </p:txBody>
-      </p:sp>
-      <p:sp>
-        <p:nvSpPr>
-          <p:cNvPr id="10" name="Shape 8"/>
-          <p:cNvSpPr/>
-          <p:nvPr/>
-        </p:nvSpPr>
-        <p:spPr>
-          <a:xfrm>
-            <a:off x="11576304" y="411480"/>
-            <a:ext cx="292608" cy="292608"/>
-          </a:xfrm>
-          <a:prstGeom prst="ellipse">
-            <a:avLst/>
-          </a:prstGeom>
-          <a:solidFill>
-            <a:srgbClr val="CADCFC"/>
-          </a:solidFill>
-          <a:ln/>
-        </p:spPr>
-      </p:sp>
-      <p:sp>
-        <p:nvSpPr>
           <p:cNvPr id="11" name="Text 9"/>
           <p:cNvSpPr/>
           <p:nvPr/>
@@ -8833,40 +9804,274 @@
             <a:r>
               <a:rPr lang="en-US" sz="1100" b="1" dirty="0">
                 <a:solidFill>
+                  <a:srgbClr val="FFFFFF"/>
+                </a:solidFill>
+                <a:latin typeface="Calibri" pitchFamily="34" charset="0"/>
+                <a:ea typeface="Calibri" pitchFamily="34" charset="-122"/>
+                <a:cs typeface="Calibri" pitchFamily="34" charset="-120"/>
+              </a:rPr>
+              <a:t>L</a:t>
+            </a:r>
+            <a:endParaRPr lang="en-US" sz="1100" dirty="0"/>
+          </a:p>
+        </p:txBody>
+      </p:sp>
+      <p:sp>
+        <p:nvSpPr>
+          <p:cNvPr id="12" name="Text 10"/>
+          <p:cNvSpPr/>
+          <p:nvPr/>
+        </p:nvSpPr>
+        <p:spPr>
+          <a:xfrm>
+            <a:off x="731520" y="2011680"/>
+            <a:ext cx="3291840" cy="822960"/>
+          </a:xfrm>
+          <a:prstGeom prst="rect">
+            <a:avLst/>
+          </a:prstGeom>
+          <a:noFill/>
+          <a:ln/>
+        </p:spPr>
+        <p:txBody>
+          <a:bodyPr wrap="square" lIns="0" tIns="0" rIns="0" bIns="0" rtlCol="0" anchor="ctr"/>
+          <a:lstStyle/>
+          <a:p>
+            <a:pPr algn="ctr" indent="0" marL="0">
+              <a:buNone/>
+            </a:pPr>
+            <a:r>
+              <a:rPr lang="en-US" sz="5400" b="1" dirty="0">
+                <a:solidFill>
                   <a:srgbClr val="1E2761"/>
                 </a:solidFill>
-                <a:latin typeface="Calibri" pitchFamily="34" charset="0"/>
-                <a:ea typeface="Calibri" pitchFamily="34" charset="-122"/>
-                <a:cs typeface="Calibri" pitchFamily="34" charset="-120"/>
-              </a:rPr>
-              <a:t>L</a:t>
-            </a:r>
-            <a:endParaRPr lang="en-US" sz="1100" dirty="0"/>
-          </a:p>
-        </p:txBody>
-      </p:sp>
-      <p:sp>
-        <p:nvSpPr>
-          <p:cNvPr id="12" name="Shape 10"/>
-          <p:cNvSpPr/>
-          <p:nvPr/>
-        </p:nvSpPr>
-        <p:spPr>
-          <a:xfrm>
-            <a:off x="548640" y="1600200"/>
-            <a:ext cx="6035040" cy="987552"/>
+                <a:latin typeface="Cambria" pitchFamily="34" charset="0"/>
+                <a:ea typeface="Cambria" pitchFamily="34" charset="-122"/>
+                <a:cs typeface="Cambria" pitchFamily="34" charset="-120"/>
+              </a:rPr>
+              <a:t>21% → 71%</a:t>
+            </a:r>
+            <a:endParaRPr lang="en-US" sz="5400" dirty="0"/>
+          </a:p>
+        </p:txBody>
+      </p:sp>
+      <p:sp>
+        <p:nvSpPr>
+          <p:cNvPr id="13" name="Text 11"/>
+          <p:cNvSpPr/>
+          <p:nvPr/>
+        </p:nvSpPr>
+        <p:spPr>
+          <a:xfrm>
+            <a:off x="731520" y="2852928"/>
+            <a:ext cx="3291840" cy="594360"/>
+          </a:xfrm>
+          <a:prstGeom prst="rect">
+            <a:avLst/>
+          </a:prstGeom>
+          <a:noFill/>
+          <a:ln/>
+        </p:spPr>
+        <p:txBody>
+          <a:bodyPr wrap="square" lIns="0" tIns="0" rIns="0" bIns="0" rtlCol="0" anchor="ctr"/>
+          <a:lstStyle/>
+          <a:p>
+            <a:pPr algn="ctr" indent="0" marL="0">
+              <a:buNone/>
+            </a:pPr>
+            <a:r>
+              <a:rPr lang="en-US" sz="1250" dirty="0">
+                <a:solidFill>
+                  <a:srgbClr val="5A6478"/>
+                </a:solidFill>
+                <a:latin typeface="Calibri" pitchFamily="34" charset="0"/>
+                <a:ea typeface="Calibri" pitchFamily="34" charset="-122"/>
+                <a:cs typeface="Calibri" pitchFamily="34" charset="-120"/>
+              </a:rPr>
+              <a:t>share of a past remedy appearing in the new recommendation when retrieval is ON (66.7% adoption)</a:t>
+            </a:r>
+            <a:endParaRPr lang="en-US" sz="1250" dirty="0"/>
+          </a:p>
+        </p:txBody>
+      </p:sp>
+      <p:sp>
+        <p:nvSpPr>
+          <p:cNvPr id="14" name="Text 12"/>
+          <p:cNvSpPr/>
+          <p:nvPr/>
+        </p:nvSpPr>
+        <p:spPr>
+          <a:xfrm>
+            <a:off x="4434840" y="2011680"/>
+            <a:ext cx="3291840" cy="822960"/>
+          </a:xfrm>
+          <a:prstGeom prst="rect">
+            <a:avLst/>
+          </a:prstGeom>
+          <a:noFill/>
+          <a:ln/>
+        </p:spPr>
+        <p:txBody>
+          <a:bodyPr wrap="square" lIns="0" tIns="0" rIns="0" bIns="0" rtlCol="0" anchor="ctr"/>
+          <a:lstStyle/>
+          <a:p>
+            <a:pPr algn="ctr" indent="0" marL="0">
+              <a:buNone/>
+            </a:pPr>
+            <a:r>
+              <a:rPr lang="en-US" sz="5400" b="1" dirty="0">
+                <a:solidFill>
+                  <a:srgbClr val="2C5F2D"/>
+                </a:solidFill>
+                <a:latin typeface="Cambria" pitchFamily="34" charset="0"/>
+                <a:ea typeface="Cambria" pitchFamily="34" charset="-122"/>
+                <a:cs typeface="Cambria" pitchFamily="34" charset="-120"/>
+              </a:rPr>
+              <a:t>0.503</a:t>
+            </a:r>
+            <a:endParaRPr lang="en-US" sz="5400" dirty="0"/>
+          </a:p>
+        </p:txBody>
+      </p:sp>
+      <p:sp>
+        <p:nvSpPr>
+          <p:cNvPr id="15" name="Text 13"/>
+          <p:cNvSpPr/>
+          <p:nvPr/>
+        </p:nvSpPr>
+        <p:spPr>
+          <a:xfrm>
+            <a:off x="4434840" y="2852928"/>
+            <a:ext cx="3291840" cy="594360"/>
+          </a:xfrm>
+          <a:prstGeom prst="rect">
+            <a:avLst/>
+          </a:prstGeom>
+          <a:noFill/>
+          <a:ln/>
+        </p:spPr>
+        <p:txBody>
+          <a:bodyPr wrap="square" lIns="0" tIns="0" rIns="0" bIns="0" rtlCol="0" anchor="ctr"/>
+          <a:lstStyle/>
+          <a:p>
+            <a:pPr algn="ctr" indent="0" marL="0">
+              <a:buNone/>
+            </a:pPr>
+            <a:r>
+              <a:rPr lang="en-US" sz="1250" dirty="0">
+                <a:solidFill>
+                  <a:srgbClr val="5A6478"/>
+                </a:solidFill>
+                <a:latin typeface="Calibri" pitchFamily="34" charset="0"/>
+                <a:ea typeface="Calibri" pitchFamily="34" charset="-122"/>
+                <a:cs typeface="Calibri" pitchFamily="34" charset="-120"/>
+              </a:rPr>
+              <a:t>alignment lift vs a same-run noise floor that absorbs model jitter</a:t>
+            </a:r>
+            <a:endParaRPr lang="en-US" sz="1250" dirty="0"/>
+          </a:p>
+        </p:txBody>
+      </p:sp>
+      <p:sp>
+        <p:nvSpPr>
+          <p:cNvPr id="16" name="Text 14"/>
+          <p:cNvSpPr/>
+          <p:nvPr/>
+        </p:nvSpPr>
+        <p:spPr>
+          <a:xfrm>
+            <a:off x="8138160" y="2011680"/>
+            <a:ext cx="3291840" cy="822960"/>
+          </a:xfrm>
+          <a:prstGeom prst="rect">
+            <a:avLst/>
+          </a:prstGeom>
+          <a:noFill/>
+          <a:ln/>
+        </p:spPr>
+        <p:txBody>
+          <a:bodyPr wrap="square" lIns="0" tIns="0" rIns="0" bIns="0" rtlCol="0" anchor="ctr"/>
+          <a:lstStyle/>
+          <a:p>
+            <a:pPr algn="ctr" indent="0" marL="0">
+              <a:buNone/>
+            </a:pPr>
+            <a:r>
+              <a:rPr lang="en-US" sz="5400" b="1" dirty="0">
+                <a:solidFill>
+                  <a:srgbClr val="1E2761"/>
+                </a:solidFill>
+                <a:latin typeface="Cambria" pitchFamily="34" charset="0"/>
+                <a:ea typeface="Cambria" pitchFamily="34" charset="-122"/>
+                <a:cs typeface="Cambria" pitchFamily="34" charset="-120"/>
+              </a:rPr>
+              <a:t>0 / 2.5%</a:t>
+            </a:r>
+            <a:endParaRPr lang="en-US" sz="5400" dirty="0"/>
+          </a:p>
+        </p:txBody>
+      </p:sp>
+      <p:sp>
+        <p:nvSpPr>
+          <p:cNvPr id="17" name="Text 15"/>
+          <p:cNvSpPr/>
+          <p:nvPr/>
+        </p:nvSpPr>
+        <p:spPr>
+          <a:xfrm>
+            <a:off x="8138160" y="2852928"/>
+            <a:ext cx="3291840" cy="594360"/>
+          </a:xfrm>
+          <a:prstGeom prst="rect">
+            <a:avLst/>
+          </a:prstGeom>
+          <a:noFill/>
+          <a:ln/>
+        </p:spPr>
+        <p:txBody>
+          <a:bodyPr wrap="square" lIns="0" tIns="0" rIns="0" bIns="0" rtlCol="0" anchor="ctr"/>
+          <a:lstStyle/>
+          <a:p>
+            <a:pPr algn="ctr" indent="0" marL="0">
+              <a:buNone/>
+            </a:pPr>
+            <a:r>
+              <a:rPr lang="en-US" sz="1250" dirty="0">
+                <a:solidFill>
+                  <a:srgbClr val="5A6478"/>
+                </a:solidFill>
+                <a:latin typeface="Calibri" pitchFamily="34" charset="0"/>
+                <a:ea typeface="Calibri" pitchFamily="34" charset="-122"/>
+                <a:cs typeface="Calibri" pitchFamily="34" charset="-120"/>
+              </a:rPr>
+              <a:t>PII leaks across the whole ledger / hallucination rate at the 17-Jul run (EN-scope check by construction)</a:t>
+            </a:r>
+            <a:endParaRPr lang="en-US" sz="1250" dirty="0"/>
+          </a:p>
+        </p:txBody>
+      </p:sp>
+      <p:sp>
+        <p:nvSpPr>
+          <p:cNvPr id="18" name="Shape 16"/>
+          <p:cNvSpPr/>
+          <p:nvPr/>
+        </p:nvSpPr>
+        <p:spPr>
+          <a:xfrm>
+            <a:off x="731520" y="4206240"/>
+            <a:ext cx="10698480" cy="1828800"/>
           </a:xfrm>
           <a:prstGeom prst="roundRect">
             <a:avLst>
-              <a:gd name="adj" fmla="val 5556"/>
+              <a:gd name="adj" fmla="val 3000"/>
             </a:avLst>
           </a:prstGeom>
           <a:solidFill>
-            <a:srgbClr val="F4F7FC"/>
+            <a:srgbClr val="FDF3F3"/>
           </a:solidFill>
           <a:ln w="12700">
             <a:solidFill>
-              <a:srgbClr val="CADCFC"/>
+              <a:srgbClr val="990011"/>
             </a:solidFill>
             <a:prstDash val="solid"/>
           </a:ln>
@@ -8874,14 +10079,14 @@
       </p:sp>
       <p:sp>
         <p:nvSpPr>
-          <p:cNvPr id="13" name="Text 11"/>
-          <p:cNvSpPr/>
-          <p:nvPr/>
-        </p:nvSpPr>
-        <p:spPr>
-          <a:xfrm>
-            <a:off x="685800" y="1691640"/>
-            <a:ext cx="5760720" cy="292608"/>
+          <p:cNvPr id="19" name="Text 17"/>
+          <p:cNvSpPr/>
+          <p:nvPr/>
+        </p:nvSpPr>
+        <p:spPr>
+          <a:xfrm>
+            <a:off x="960120" y="4343400"/>
+            <a:ext cx="10241280" cy="320040"/>
           </a:xfrm>
           <a:prstGeom prst="rect">
             <a:avLst/>
@@ -8897,30 +10102,30 @@
               <a:buNone/>
             </a:pPr>
             <a:r>
-              <a:rPr lang="en-US" sz="1350" b="1" dirty="0">
-                <a:solidFill>
-                  <a:srgbClr val="1E2761"/>
-                </a:solidFill>
-                <a:latin typeface="Calibri" pitchFamily="34" charset="0"/>
-                <a:ea typeface="Calibri" pitchFamily="34" charset="-122"/>
-                <a:cs typeface="Calibri" pitchFamily="34" charset="-120"/>
-              </a:rPr>
-              <a:t>Amplitude</a:t>
-            </a:r>
-            <a:endParaRPr lang="en-US" sz="1350" dirty="0"/>
-          </a:p>
-        </p:txBody>
-      </p:sp>
-      <p:sp>
-        <p:nvSpPr>
-          <p:cNvPr id="14" name="Text 12"/>
-          <p:cNvSpPr/>
-          <p:nvPr/>
-        </p:nvSpPr>
-        <p:spPr>
-          <a:xfrm>
-            <a:off x="685800" y="1984248"/>
-            <a:ext cx="5760720" cy="512064"/>
+              <a:rPr lang="en-US" sz="1400" b="1" dirty="0">
+                <a:solidFill>
+                  <a:srgbClr val="990011"/>
+                </a:solidFill>
+                <a:latin typeface="Calibri" pitchFamily="34" charset="0"/>
+                <a:ea typeface="Calibri" pitchFamily="34" charset="-122"/>
+                <a:cs typeface="Calibri" pitchFamily="34" charset="-120"/>
+              </a:rPr>
+              <a:t>The honest boundary</a:t>
+            </a:r>
+            <a:endParaRPr lang="en-US" sz="1400" dirty="0"/>
+          </a:p>
+        </p:txBody>
+      </p:sp>
+      <p:sp>
+        <p:nvSpPr>
+          <p:cNvPr id="20" name="Text 18"/>
+          <p:cNvSpPr/>
+          <p:nvPr/>
+        </p:nvSpPr>
+        <p:spPr>
+          <a:xfrm>
+            <a:off x="960120" y="4681728"/>
+            <a:ext cx="10241280" cy="1234440"/>
           </a:xfrm>
           <a:prstGeom prst="rect">
             <a:avLst/>
@@ -8936,7 +10141,7 @@
               <a:buNone/>
             </a:pPr>
             <a:r>
-              <a:rPr lang="en-US" sz="1150" dirty="0">
+              <a:rPr lang="en-US" sz="1400" dirty="0">
                 <a:solidFill>
                   <a:srgbClr val="1A1A2E"/>
                 </a:solidFill>
@@ -8944,597 +10149,9 @@
                 <a:ea typeface="Calibri" pitchFamily="34" charset="-122"/>
                 <a:cs typeface="Calibri" pitchFamily="34" charset="-120"/>
               </a:rPr>
-              <a:t>ties feedback to behavioural/revenue data it owns — recommends, doesn't contract closure</a:t>
-            </a:r>
-            <a:endParaRPr lang="en-US" sz="1150" dirty="0"/>
-          </a:p>
-        </p:txBody>
-      </p:sp>
-      <p:sp>
-        <p:nvSpPr>
-          <p:cNvPr id="15" name="Shape 13"/>
-          <p:cNvSpPr/>
-          <p:nvPr/>
-        </p:nvSpPr>
-        <p:spPr>
-          <a:xfrm>
-            <a:off x="548640" y="2715768"/>
-            <a:ext cx="6035040" cy="987552"/>
-          </a:xfrm>
-          <a:prstGeom prst="roundRect">
-            <a:avLst>
-              <a:gd name="adj" fmla="val 5556"/>
-            </a:avLst>
-          </a:prstGeom>
-          <a:solidFill>
-            <a:srgbClr val="F4F7FC"/>
-          </a:solidFill>
-          <a:ln w="12700">
-            <a:solidFill>
-              <a:srgbClr val="CADCFC"/>
-            </a:solidFill>
-            <a:prstDash val="solid"/>
-          </a:ln>
-        </p:spPr>
-      </p:sp>
-      <p:sp>
-        <p:nvSpPr>
-          <p:cNvPr id="16" name="Text 14"/>
-          <p:cNvSpPr/>
-          <p:nvPr/>
-        </p:nvSpPr>
-        <p:spPr>
-          <a:xfrm>
-            <a:off x="685800" y="2807208"/>
-            <a:ext cx="5760720" cy="292608"/>
-          </a:xfrm>
-          <a:prstGeom prst="rect">
-            <a:avLst/>
-          </a:prstGeom>
-          <a:noFill/>
-          <a:ln/>
-        </p:spPr>
-        <p:txBody>
-          <a:bodyPr wrap="square" lIns="0" tIns="0" rIns="0" bIns="0" rtlCol="0" anchor="ctr"/>
-          <a:lstStyle/>
-          <a:p>
-            <a:pPr indent="0" marL="0">
-              <a:buNone/>
-            </a:pPr>
-            <a:r>
-              <a:rPr lang="en-US" sz="1350" b="1" dirty="0">
-                <a:solidFill>
-                  <a:srgbClr val="1E2761"/>
-                </a:solidFill>
-                <a:latin typeface="Calibri" pitchFamily="34" charset="0"/>
-                <a:ea typeface="Calibri" pitchFamily="34" charset="-122"/>
-                <a:cs typeface="Calibri" pitchFamily="34" charset="-120"/>
-              </a:rPr>
-              <a:t>Medallia + Ada</a:t>
-            </a:r>
-            <a:endParaRPr lang="en-US" sz="1350" dirty="0"/>
-          </a:p>
-        </p:txBody>
-      </p:sp>
-      <p:sp>
-        <p:nvSpPr>
-          <p:cNvPr id="17" name="Text 15"/>
-          <p:cNvSpPr/>
-          <p:nvPr/>
-        </p:nvSpPr>
-        <p:spPr>
-          <a:xfrm>
-            <a:off x="685800" y="3099816"/>
-            <a:ext cx="5760720" cy="512064"/>
-          </a:xfrm>
-          <a:prstGeom prst="rect">
-            <a:avLst/>
-          </a:prstGeom>
-          <a:noFill/>
-          <a:ln/>
-        </p:spPr>
-        <p:txBody>
-          <a:bodyPr wrap="square" lIns="0" tIns="0" rIns="0" bIns="0" rtlCol="0" anchor="ctr"/>
-          <a:lstStyle/>
-          <a:p>
-            <a:pPr indent="0" marL="0">
-              <a:buNone/>
-            </a:pPr>
-            <a:r>
-              <a:rPr lang="en-US" sz="1150" dirty="0">
-                <a:solidFill>
-                  <a:srgbClr val="1A1A2E"/>
-                </a:solidFill>
-                <a:latin typeface="Calibri" pitchFamily="34" charset="0"/>
-                <a:ea typeface="Calibri" pitchFamily="34" charset="-122"/>
-                <a:cs typeface="Calibri" pitchFamily="34" charset="-120"/>
-              </a:rPr>
-              <a:t>executes policy-aware workflows from insight — enterprise scale, published gains</a:t>
-            </a:r>
-            <a:endParaRPr lang="en-US" sz="1150" dirty="0"/>
-          </a:p>
-        </p:txBody>
-      </p:sp>
-      <p:sp>
-        <p:nvSpPr>
-          <p:cNvPr id="18" name="Shape 16"/>
-          <p:cNvSpPr/>
-          <p:nvPr/>
-        </p:nvSpPr>
-        <p:spPr>
-          <a:xfrm>
-            <a:off x="548640" y="3831336"/>
-            <a:ext cx="6035040" cy="987552"/>
-          </a:xfrm>
-          <a:prstGeom prst="roundRect">
-            <a:avLst>
-              <a:gd name="adj" fmla="val 5556"/>
-            </a:avLst>
-          </a:prstGeom>
-          <a:solidFill>
-            <a:srgbClr val="F4F7FC"/>
-          </a:solidFill>
-          <a:ln w="12700">
-            <a:solidFill>
-              <a:srgbClr val="CADCFC"/>
-            </a:solidFill>
-            <a:prstDash val="solid"/>
-          </a:ln>
-        </p:spPr>
-      </p:sp>
-      <p:sp>
-        <p:nvSpPr>
-          <p:cNvPr id="19" name="Text 17"/>
-          <p:cNvSpPr/>
-          <p:nvPr/>
-        </p:nvSpPr>
-        <p:spPr>
-          <a:xfrm>
-            <a:off x="685800" y="3922776"/>
-            <a:ext cx="5760720" cy="292608"/>
-          </a:xfrm>
-          <a:prstGeom prst="rect">
-            <a:avLst/>
-          </a:prstGeom>
-          <a:noFill/>
-          <a:ln/>
-        </p:spPr>
-        <p:txBody>
-          <a:bodyPr wrap="square" lIns="0" tIns="0" rIns="0" bIns="0" rtlCol="0" anchor="ctr"/>
-          <a:lstStyle/>
-          <a:p>
-            <a:pPr indent="0" marL="0">
-              <a:buNone/>
-            </a:pPr>
-            <a:r>
-              <a:rPr lang="en-US" sz="1350" b="1" dirty="0">
-                <a:solidFill>
-                  <a:srgbClr val="1E2761"/>
-                </a:solidFill>
-                <a:latin typeface="Calibri" pitchFamily="34" charset="0"/>
-                <a:ea typeface="Calibri" pitchFamily="34" charset="-122"/>
-                <a:cs typeface="Calibri" pitchFamily="34" charset="-120"/>
-              </a:rPr>
-              <a:t>Sprinklr</a:t>
-            </a:r>
-            <a:endParaRPr lang="en-US" sz="1350" dirty="0"/>
-          </a:p>
-        </p:txBody>
-      </p:sp>
-      <p:sp>
-        <p:nvSpPr>
-          <p:cNvPr id="20" name="Text 18"/>
-          <p:cNvSpPr/>
-          <p:nvPr/>
-        </p:nvSpPr>
-        <p:spPr>
-          <a:xfrm>
-            <a:off x="685800" y="4215384"/>
-            <a:ext cx="5760720" cy="512064"/>
-          </a:xfrm>
-          <a:prstGeom prst="rect">
-            <a:avLst/>
-          </a:prstGeom>
-          <a:noFill/>
-          <a:ln/>
-        </p:spPr>
-        <p:txBody>
-          <a:bodyPr wrap="square" lIns="0" tIns="0" rIns="0" bIns="0" rtlCol="0" anchor="ctr"/>
-          <a:lstStyle/>
-          <a:p>
-            <a:pPr indent="0" marL="0">
-              <a:buNone/>
-            </a:pPr>
-            <a:r>
-              <a:rPr lang="en-US" sz="1150" dirty="0">
-                <a:solidFill>
-                  <a:srgbClr val="1A1A2E"/>
-                </a:solidFill>
-                <a:latin typeface="Calibri" pitchFamily="34" charset="0"/>
-                <a:ea typeface="Calibri" pitchFamily="34" charset="-122"/>
-                <a:cs typeface="Calibri" pitchFamily="34" charset="-120"/>
-              </a:rPr>
-              <a:t>audit trails &amp; agent evaluation — governance artefacts at enterprise level</a:t>
-            </a:r>
-            <a:endParaRPr lang="en-US" sz="1150" dirty="0"/>
-          </a:p>
-        </p:txBody>
-      </p:sp>
-      <p:sp>
-        <p:nvSpPr>
-          <p:cNvPr id="21" name="Shape 19"/>
-          <p:cNvSpPr/>
-          <p:nvPr/>
-        </p:nvSpPr>
-        <p:spPr>
-          <a:xfrm>
-            <a:off x="548640" y="4946904"/>
-            <a:ext cx="6035040" cy="987552"/>
-          </a:xfrm>
-          <a:prstGeom prst="roundRect">
-            <a:avLst>
-              <a:gd name="adj" fmla="val 5556"/>
-            </a:avLst>
-          </a:prstGeom>
-          <a:solidFill>
-            <a:srgbClr val="F4F7FC"/>
-          </a:solidFill>
-          <a:ln w="12700">
-            <a:solidFill>
-              <a:srgbClr val="CADCFC"/>
-            </a:solidFill>
-            <a:prstDash val="solid"/>
-          </a:ln>
-        </p:spPr>
-      </p:sp>
-      <p:sp>
-        <p:nvSpPr>
-          <p:cNvPr id="22" name="Text 20"/>
-          <p:cNvSpPr/>
-          <p:nvPr/>
-        </p:nvSpPr>
-        <p:spPr>
-          <a:xfrm>
-            <a:off x="685800" y="5038344"/>
-            <a:ext cx="5760720" cy="292608"/>
-          </a:xfrm>
-          <a:prstGeom prst="rect">
-            <a:avLst/>
-          </a:prstGeom>
-          <a:noFill/>
-          <a:ln/>
-        </p:spPr>
-        <p:txBody>
-          <a:bodyPr wrap="square" lIns="0" tIns="0" rIns="0" bIns="0" rtlCol="0" anchor="ctr"/>
-          <a:lstStyle/>
-          <a:p>
-            <a:pPr indent="0" marL="0">
-              <a:buNone/>
-            </a:pPr>
-            <a:r>
-              <a:rPr lang="en-US" sz="1350" b="1" dirty="0">
-                <a:solidFill>
-                  <a:srgbClr val="1E2761"/>
-                </a:solidFill>
-                <a:latin typeface="Calibri" pitchFamily="34" charset="0"/>
-                <a:ea typeface="Calibri" pitchFamily="34" charset="-122"/>
-                <a:cs typeface="Calibri" pitchFamily="34" charset="-120"/>
-              </a:rPr>
-              <a:t>Dovetail / Enterpret</a:t>
-            </a:r>
-            <a:endParaRPr lang="en-US" sz="1350" dirty="0"/>
-          </a:p>
-        </p:txBody>
-      </p:sp>
-      <p:sp>
-        <p:nvSpPr>
-          <p:cNvPr id="23" name="Text 21"/>
-          <p:cNvSpPr/>
-          <p:nvPr/>
-        </p:nvSpPr>
-        <p:spPr>
-          <a:xfrm>
-            <a:off x="685800" y="5330952"/>
-            <a:ext cx="5760720" cy="512064"/>
-          </a:xfrm>
-          <a:prstGeom prst="rect">
-            <a:avLst/>
-          </a:prstGeom>
-          <a:noFill/>
-          <a:ln/>
-        </p:spPr>
-        <p:txBody>
-          <a:bodyPr wrap="square" lIns="0" tIns="0" rIns="0" bIns="0" rtlCol="0" anchor="ctr"/>
-          <a:lstStyle/>
-          <a:p>
-            <a:pPr indent="0" marL="0">
-              <a:buNone/>
-            </a:pPr>
-            <a:r>
-              <a:rPr lang="en-US" sz="1150" dirty="0">
-                <a:solidFill>
-                  <a:srgbClr val="1A1A2E"/>
-                </a:solidFill>
-                <a:latin typeface="Calibri" pitchFamily="34" charset="0"/>
-                <a:ea typeface="Calibri" pitchFamily="34" charset="-122"/>
-                <a:cs typeface="Calibri" pitchFamily="34" charset="-120"/>
-              </a:rPr>
-              <a:t>SMB agents "trigger real work" / MCP breadth — no approval gates, no outcome measurement (verified)</a:t>
-            </a:r>
-            <a:endParaRPr lang="en-US" sz="1150" dirty="0"/>
-          </a:p>
-        </p:txBody>
-      </p:sp>
-      <p:sp>
-        <p:nvSpPr>
-          <p:cNvPr id="24" name="Shape 22"/>
-          <p:cNvSpPr/>
-          <p:nvPr/>
-        </p:nvSpPr>
-        <p:spPr>
-          <a:xfrm>
-            <a:off x="6858000" y="1600200"/>
-            <a:ext cx="4754880" cy="3108960"/>
-          </a:xfrm>
-          <a:prstGeom prst="roundRect">
-            <a:avLst>
-              <a:gd name="adj" fmla="val 1765"/>
-            </a:avLst>
-          </a:prstGeom>
-          <a:solidFill>
-            <a:srgbClr val="1E2761"/>
-          </a:solidFill>
-          <a:ln/>
-        </p:spPr>
-      </p:sp>
-      <p:sp>
-        <p:nvSpPr>
-          <p:cNvPr id="25" name="Text 23"/>
-          <p:cNvSpPr/>
-          <p:nvPr/>
-        </p:nvSpPr>
-        <p:spPr>
-          <a:xfrm>
-            <a:off x="7086600" y="1783080"/>
-            <a:ext cx="4297680" cy="365760"/>
-          </a:xfrm>
-          <a:prstGeom prst="rect">
-            <a:avLst/>
-          </a:prstGeom>
-          <a:noFill/>
-          <a:ln/>
-        </p:spPr>
-        <p:txBody>
-          <a:bodyPr wrap="square" lIns="0" tIns="0" rIns="0" bIns="0" rtlCol="0" anchor="ctr"/>
-          <a:lstStyle/>
-          <a:p>
-            <a:pPr indent="0" marL="0">
-              <a:buNone/>
-            </a:pPr>
-            <a:r>
-              <a:rPr lang="en-US" sz="1500" b="1" dirty="0">
-                <a:solidFill>
-                  <a:srgbClr val="CADCFC"/>
-                </a:solidFill>
-                <a:latin typeface="Calibri" pitchFamily="34" charset="0"/>
-                <a:ea typeface="Calibri" pitchFamily="34" charset="-122"/>
-                <a:cs typeface="Calibri" pitchFamily="34" charset="-120"/>
-              </a:rPr>
-              <a:t>The unclaimed combination</a:t>
-            </a:r>
-            <a:endParaRPr lang="en-US" sz="1500" dirty="0"/>
-          </a:p>
-        </p:txBody>
-      </p:sp>
-      <p:sp>
-        <p:nvSpPr>
-          <p:cNvPr id="26" name="Text 24"/>
-          <p:cNvSpPr/>
-          <p:nvPr/>
-        </p:nvSpPr>
-        <p:spPr>
-          <a:xfrm>
-            <a:off x="7086600" y="2194560"/>
-            <a:ext cx="4297680" cy="2377440"/>
-          </a:xfrm>
-          <a:prstGeom prst="rect">
-            <a:avLst/>
-          </a:prstGeom>
-          <a:noFill/>
-          <a:ln/>
-        </p:spPr>
-        <p:txBody>
-          <a:bodyPr wrap="square" lIns="0" tIns="0" rIns="0" bIns="0" rtlCol="0" anchor="ctr"/>
-          <a:lstStyle/>
-          <a:p>
-            <a:pPr indent="0" marL="0">
-              <a:buNone/>
-            </a:pPr>
-            <a:r>
-              <a:rPr lang="en-US" sz="1450" dirty="0">
-                <a:solidFill>
-                  <a:srgbClr val="FFFFFF"/>
-                </a:solidFill>
-                <a:latin typeface="Calibri" pitchFamily="34" charset="0"/>
-                <a:ea typeface="Calibri" pitchFamily="34" charset="-122"/>
-                <a:cs typeface="Calibri" pitchFamily="34" charset="-120"/>
-              </a:rPr>
-              <a:t>Outcome contracts (verified closure)</a:t>
-            </a:r>
-            <a:endParaRPr lang="en-US" sz="1450" dirty="0"/>
-          </a:p>
-          <a:p>
-            <a:pPr indent="0" marL="0">
-              <a:buNone/>
-            </a:pPr>
-            <a:r>
-              <a:rPr lang="en-US" sz="1450" dirty="0">
-                <a:solidFill>
-                  <a:srgbClr val="FFFFFF"/>
-                </a:solidFill>
-                <a:latin typeface="Calibri" pitchFamily="34" charset="0"/>
-                <a:ea typeface="Calibri" pitchFamily="34" charset="-122"/>
-                <a:cs typeface="Calibri" pitchFamily="34" charset="-120"/>
-              </a:rPr>
-              <a:t>+ approval-gated cross-system action</a:t>
-            </a:r>
-            <a:endParaRPr lang="en-US" sz="1450" dirty="0"/>
-          </a:p>
-          <a:p>
-            <a:pPr indent="0" marL="0">
-              <a:buNone/>
-            </a:pPr>
-            <a:r>
-              <a:rPr lang="en-US" sz="1450" dirty="0">
-                <a:solidFill>
-                  <a:srgbClr val="FFFFFF"/>
-                </a:solidFill>
-                <a:latin typeface="Calibri" pitchFamily="34" charset="0"/>
-                <a:ea typeface="Calibri" pitchFamily="34" charset="-122"/>
-                <a:cs typeface="Calibri" pitchFamily="34" charset="-120"/>
-              </a:rPr>
-              <a:t>+ decaying learning memory</a:t>
-            </a:r>
-            <a:endParaRPr lang="en-US" sz="1450" dirty="0"/>
-          </a:p>
-          <a:p>
-            <a:pPr indent="0" marL="0">
-              <a:buNone/>
-            </a:pPr>
-            <a:r>
-              <a:rPr lang="en-US" sz="1450" dirty="0">
-                <a:solidFill>
-                  <a:srgbClr val="FFFFFF"/>
-                </a:solidFill>
-                <a:latin typeface="Calibri" pitchFamily="34" charset="0"/>
-                <a:ea typeface="Calibri" pitchFamily="34" charset="-122"/>
-                <a:cs typeface="Calibri" pitchFamily="34" charset="-120"/>
-              </a:rPr>
-              <a:t>+ EU-sovereign deployment</a:t>
-            </a:r>
-            <a:endParaRPr lang="en-US" sz="1450" dirty="0"/>
-          </a:p>
-          <a:p>
-            <a:pPr indent="0" marL="0">
-              <a:buNone/>
-            </a:pPr>
-            <a:r>
-              <a:rPr lang="en-US" sz="1450" dirty="0">
-                <a:solidFill>
-                  <a:srgbClr val="FFFFFF"/>
-                </a:solidFill>
-                <a:latin typeface="Calibri" pitchFamily="34" charset="0"/>
-                <a:ea typeface="Calibri" pitchFamily="34" charset="-122"/>
-                <a:cs typeface="Calibri" pitchFamily="34" charset="-120"/>
-              </a:rPr>
-              <a:t>+ accessible to 10–500-employee firms</a:t>
-            </a:r>
-            <a:endParaRPr lang="en-US" sz="1450" dirty="0"/>
-          </a:p>
-        </p:txBody>
-      </p:sp>
-      <p:sp>
-        <p:nvSpPr>
-          <p:cNvPr id="27" name="Shape 25"/>
-          <p:cNvSpPr/>
-          <p:nvPr/>
-        </p:nvSpPr>
-        <p:spPr>
-          <a:xfrm>
-            <a:off x="6858000" y="4892040"/>
-            <a:ext cx="4754880" cy="1371600"/>
-          </a:xfrm>
-          <a:prstGeom prst="roundRect">
-            <a:avLst>
-              <a:gd name="adj" fmla="val 4000"/>
-            </a:avLst>
-          </a:prstGeom>
-          <a:solidFill>
-            <a:srgbClr val="F4F7FC"/>
-          </a:solidFill>
-          <a:ln w="12700">
-            <a:solidFill>
-              <a:srgbClr val="CADCFC"/>
-            </a:solidFill>
-            <a:prstDash val="solid"/>
-          </a:ln>
-        </p:spPr>
-      </p:sp>
-      <p:sp>
-        <p:nvSpPr>
-          <p:cNvPr id="28" name="Text 26"/>
-          <p:cNvSpPr/>
-          <p:nvPr/>
-        </p:nvSpPr>
-        <p:spPr>
-          <a:xfrm>
-            <a:off x="7059168" y="5029200"/>
-            <a:ext cx="4389120" cy="1143000"/>
-          </a:xfrm>
-          <a:prstGeom prst="rect">
-            <a:avLst/>
-          </a:prstGeom>
-          <a:noFill/>
-          <a:ln/>
-        </p:spPr>
-        <p:txBody>
-          <a:bodyPr wrap="square" lIns="0" tIns="0" rIns="0" bIns="0" rtlCol="0" anchor="ctr"/>
-          <a:lstStyle/>
-          <a:p>
-            <a:pPr indent="0" marL="0">
-              <a:buNone/>
-            </a:pPr>
-            <a:r>
-              <a:rPr lang="en-US" sz="1250" dirty="0">
-                <a:solidFill>
-                  <a:srgbClr val="1A1A2E"/>
-                </a:solidFill>
-                <a:latin typeface="Calibri" pitchFamily="34" charset="0"/>
-                <a:ea typeface="Calibri" pitchFamily="34" charset="-122"/>
-                <a:cs typeface="Calibri" pitchFamily="34" charset="-120"/>
-              </a:rPr>
-              <a:t>Gartner (2025): &gt;40% of agentic-AI projects cancelled by 2027 — for unclear business value and inadequate risk controls. Exactly the two failure modes this design answers.</a:t>
-            </a:r>
-            <a:endParaRPr lang="en-US" sz="1250" dirty="0"/>
-          </a:p>
-        </p:txBody>
-      </p:sp>
-      <p:sp>
-        <p:nvSpPr>
-          <p:cNvPr id="29" name="Text 27"/>
-          <p:cNvSpPr/>
-          <p:nvPr/>
-        </p:nvSpPr>
-        <p:spPr>
-          <a:xfrm>
-            <a:off x="548640" y="6172200"/>
-            <a:ext cx="6035040" cy="548640"/>
-          </a:xfrm>
-          <a:prstGeom prst="rect">
-            <a:avLst/>
-          </a:prstGeom>
-          <a:noFill/>
-          <a:ln/>
-        </p:spPr>
-        <p:txBody>
-          <a:bodyPr wrap="square" rtlCol="0" anchor="ctr"/>
-          <a:lstStyle/>
-          <a:p>
-            <a:pPr indent="0" marL="0">
-              <a:buNone/>
-            </a:pPr>
-            <a:r>
-              <a:rPr lang="en-US" sz="1200" i="1" dirty="0">
-                <a:solidFill>
-                  <a:srgbClr val="5A6478"/>
-                </a:solidFill>
-                <a:latin typeface="Calibri" pitchFamily="34" charset="0"/>
-                <a:ea typeface="Calibri" pitchFamily="34" charset="-122"/>
-                <a:cs typeface="Calibri" pitchFamily="34" charset="-120"/>
-              </a:rPr>
-              <a:t>Forrester retired its CFM Wave (Q1 2026): insight is commoditised; the new axes are autonomous action and trust.</a:t>
-            </a:r>
-            <a:endParaRPr lang="en-US" sz="1200" dirty="0"/>
+              <a:t>Outcome data behind these learnings is still SIMULATED. Adoption shows the loop steers recommendations; whether the steered remedy is BETTER requires a live outcome contract on real data — the single most important open step. We claim mechanism, not benefit.</a:t>
+            </a:r>
+            <a:endParaRPr lang="en-US" sz="1400" dirty="0"/>
           </a:p>
         </p:txBody>
       </p:sp>
@@ -9596,7 +10213,7 @@
                 <a:ea typeface="Cambria" pitchFamily="34" charset="-122"/>
                 <a:cs typeface="Cambria" pitchFamily="34" charset="-120"/>
               </a:rPr>
-              <a:t>Limitations and what comes next</a:t>
+              <a:t>What is proven, demonstrated, and pending</a:t>
             </a:r>
             <a:endParaRPr lang="en-US" sz="3200" dirty="0"/>
           </a:p>
@@ -9635,7 +10252,7 @@
                 <a:ea typeface="Calibri" pitchFamily="34" charset="-122"/>
                 <a:cs typeface="Calibri" pitchFamily="34" charset="-120"/>
               </a:rPr>
-              <a:t>Bounded claims, and the one experiment that matters most</a:t>
+              <a:t>The traceability matrix — the thesis's honesty map (Appendix D)</a:t>
             </a:r>
             <a:endParaRPr lang="en-US" sz="1400" dirty="0"/>
           </a:p>
@@ -9877,16 +10494,1435 @@
           </a:p>
         </p:txBody>
       </p:sp>
-      <p:sp>
-        <p:nvSpPr>
-          <p:cNvPr id="12" name="Text 10"/>
-          <p:cNvSpPr/>
-          <p:nvPr/>
-        </p:nvSpPr>
-        <p:spPr>
-          <a:xfrm>
-            <a:off x="548640" y="1554480"/>
-            <a:ext cx="5486400" cy="365760"/>
+      <p:graphicFrame>
+        <p:nvGraphicFramePr>
+          <p:cNvPr id="18" name="Table 0"/>
+          <p:cNvGraphicFramePr>
+            <a:graphicFrameLocks noGrp="1"/>
+          </p:cNvGraphicFramePr>
+          <p:nvPr>
+            <p:extLst>
+              <p:ext uri="{D42A27DB-BD31-4B8C-83A1-F6EECF244321}">
+                <p14:modId xmlns:p14="http://schemas.microsoft.com/office/powerpoint/2010/main" val="1579011935"/>
+              </p:ext>
+            </p:extLst>
+          </p:nvPr>
+        </p:nvGraphicFramePr>
+        <p:xfrm>
+          <a:off x="548640" y="1645920"/>
+          <a:ext cx="11064240" cy="914400"/>
+        </p:xfrm>
+        <a:graphic>
+          <a:graphicData uri="http://schemas.openxmlformats.org/drawingml/2006/table">
+            <a:tbl>
+              <a:tblPr/>
+              <a:tblGrid>
+                <a:gridCol w="4023360"/>
+                <a:gridCol w="2560320"/>
+                <a:gridCol w="4480560"/>
+              </a:tblGrid>
+              <a:tr h="457200">
+                <a:tc>
+                  <a:txBody>
+                    <a:bodyPr/>
+                    <a:lstStyle/>
+                    <a:p>
+                      <a:pPr indent="0" marL="0">
+                        <a:buNone/>
+                      </a:pPr>
+                      <a:r>
+                        <a:rPr lang="en-US" sz="1300" b="1" dirty="0">
+                          <a:solidFill>
+                            <a:srgbClr val="FFFFFF"/>
+                          </a:solidFill>
+                          <a:latin typeface="Calibri" pitchFamily="34" charset="0"/>
+                          <a:ea typeface="Calibri" pitchFamily="34" charset="-122"/>
+                          <a:cs typeface="Calibri" pitchFamily="34" charset="-120"/>
+                        </a:rPr>
+                        <a:t>Claim</a:t>
+                      </a:r>
+                      <a:endParaRPr lang="en-US" sz="1300" dirty="0">
+                        <a:latin typeface="Calibri" charset="0"/>
+                        <a:ea typeface="Calibri" charset="0"/>
+                        <a:cs typeface="Calibri" charset="0"/>
+                      </a:endParaRPr>
+                    </a:p>
+                  </a:txBody>
+                  <a:tcPr marL="91440" marR="91440" marT="45720" marB="45720" anchor="ctr">
+                    <a:lnL w="12700" cap="flat" cmpd="sng" algn="ctr">
+                      <a:solidFill>
+                        <a:srgbClr val="CADCFC"/>
+                      </a:solidFill>
+                      <a:prstDash val="solid"/>
+                      <a:round/>
+                      <a:headEnd type="none" w="med" len="med"/>
+                      <a:tailEnd type="none" w="med" len="med"/>
+                    </a:lnL>
+                    <a:lnR w="12700" cap="flat" cmpd="sng" algn="ctr">
+                      <a:solidFill>
+                        <a:srgbClr val="CADCFC"/>
+                      </a:solidFill>
+                      <a:prstDash val="solid"/>
+                      <a:round/>
+                      <a:headEnd type="none" w="med" len="med"/>
+                      <a:tailEnd type="none" w="med" len="med"/>
+                    </a:lnR>
+                    <a:lnT w="12700" cap="flat" cmpd="sng" algn="ctr">
+                      <a:solidFill>
+                        <a:srgbClr val="CADCFC"/>
+                      </a:solidFill>
+                      <a:prstDash val="solid"/>
+                      <a:round/>
+                      <a:headEnd type="none" w="med" len="med"/>
+                      <a:tailEnd type="none" w="med" len="med"/>
+                    </a:lnT>
+                    <a:lnB w="12700" cap="flat" cmpd="sng" algn="ctr">
+                      <a:solidFill>
+                        <a:srgbClr val="CADCFC"/>
+                      </a:solidFill>
+                      <a:prstDash val="solid"/>
+                      <a:round/>
+                      <a:headEnd type="none" w="med" len="med"/>
+                      <a:tailEnd type="none" w="med" len="med"/>
+                    </a:lnB>
+                    <a:solidFill>
+                      <a:srgbClr val="1E2761"/>
+                    </a:solidFill>
+                  </a:tcPr>
+                </a:tc>
+                <a:tc>
+                  <a:txBody>
+                    <a:bodyPr/>
+                    <a:lstStyle/>
+                    <a:p>
+                      <a:pPr indent="0" marL="0">
+                        <a:buNone/>
+                      </a:pPr>
+                      <a:r>
+                        <a:rPr lang="en-US" sz="1300" b="1" dirty="0">
+                          <a:solidFill>
+                            <a:srgbClr val="FFFFFF"/>
+                          </a:solidFill>
+                          <a:latin typeface="Calibri" pitchFamily="34" charset="0"/>
+                          <a:ea typeface="Calibri" pitchFamily="34" charset="-122"/>
+                          <a:cs typeface="Calibri" pitchFamily="34" charset="-120"/>
+                        </a:rPr>
+                        <a:t>Status</a:t>
+                      </a:r>
+                      <a:endParaRPr lang="en-US" sz="1300" dirty="0">
+                        <a:latin typeface="Calibri" charset="0"/>
+                        <a:ea typeface="Calibri" charset="0"/>
+                        <a:cs typeface="Calibri" charset="0"/>
+                      </a:endParaRPr>
+                    </a:p>
+                  </a:txBody>
+                  <a:tcPr marL="91440" marR="91440" marT="45720" marB="45720" anchor="ctr">
+                    <a:lnL w="12700" cap="flat" cmpd="sng" algn="ctr">
+                      <a:solidFill>
+                        <a:srgbClr val="CADCFC"/>
+                      </a:solidFill>
+                      <a:prstDash val="solid"/>
+                      <a:round/>
+                      <a:headEnd type="none" w="med" len="med"/>
+                      <a:tailEnd type="none" w="med" len="med"/>
+                    </a:lnL>
+                    <a:lnR w="12700" cap="flat" cmpd="sng" algn="ctr">
+                      <a:solidFill>
+                        <a:srgbClr val="CADCFC"/>
+                      </a:solidFill>
+                      <a:prstDash val="solid"/>
+                      <a:round/>
+                      <a:headEnd type="none" w="med" len="med"/>
+                      <a:tailEnd type="none" w="med" len="med"/>
+                    </a:lnR>
+                    <a:lnT w="12700" cap="flat" cmpd="sng" algn="ctr">
+                      <a:solidFill>
+                        <a:srgbClr val="CADCFC"/>
+                      </a:solidFill>
+                      <a:prstDash val="solid"/>
+                      <a:round/>
+                      <a:headEnd type="none" w="med" len="med"/>
+                      <a:tailEnd type="none" w="med" len="med"/>
+                    </a:lnT>
+                    <a:lnB w="12700" cap="flat" cmpd="sng" algn="ctr">
+                      <a:solidFill>
+                        <a:srgbClr val="CADCFC"/>
+                      </a:solidFill>
+                      <a:prstDash val="solid"/>
+                      <a:round/>
+                      <a:headEnd type="none" w="med" len="med"/>
+                      <a:tailEnd type="none" w="med" len="med"/>
+                    </a:lnB>
+                    <a:solidFill>
+                      <a:srgbClr val="1E2761"/>
+                    </a:solidFill>
+                  </a:tcPr>
+                </a:tc>
+                <a:tc>
+                  <a:txBody>
+                    <a:bodyPr/>
+                    <a:lstStyle/>
+                    <a:p>
+                      <a:pPr indent="0" marL="0">
+                        <a:buNone/>
+                      </a:pPr>
+                      <a:r>
+                        <a:rPr lang="en-US" sz="1300" b="1" dirty="0">
+                          <a:solidFill>
+                            <a:srgbClr val="FFFFFF"/>
+                          </a:solidFill>
+                          <a:latin typeface="Calibri" pitchFamily="34" charset="0"/>
+                          <a:ea typeface="Calibri" pitchFamily="34" charset="-122"/>
+                          <a:cs typeface="Calibri" pitchFamily="34" charset="-120"/>
+                        </a:rPr>
+                        <a:t>Evidence</a:t>
+                      </a:r>
+                      <a:endParaRPr lang="en-US" sz="1300" dirty="0">
+                        <a:latin typeface="Calibri" charset="0"/>
+                        <a:ea typeface="Calibri" charset="0"/>
+                        <a:cs typeface="Calibri" charset="0"/>
+                      </a:endParaRPr>
+                    </a:p>
+                  </a:txBody>
+                  <a:tcPr marL="91440" marR="91440" marT="45720" marB="45720" anchor="ctr">
+                    <a:lnL w="12700" cap="flat" cmpd="sng" algn="ctr">
+                      <a:solidFill>
+                        <a:srgbClr val="CADCFC"/>
+                      </a:solidFill>
+                      <a:prstDash val="solid"/>
+                      <a:round/>
+                      <a:headEnd type="none" w="med" len="med"/>
+                      <a:tailEnd type="none" w="med" len="med"/>
+                    </a:lnL>
+                    <a:lnR w="12700" cap="flat" cmpd="sng" algn="ctr">
+                      <a:solidFill>
+                        <a:srgbClr val="CADCFC"/>
+                      </a:solidFill>
+                      <a:prstDash val="solid"/>
+                      <a:round/>
+                      <a:headEnd type="none" w="med" len="med"/>
+                      <a:tailEnd type="none" w="med" len="med"/>
+                    </a:lnR>
+                    <a:lnT w="12700" cap="flat" cmpd="sng" algn="ctr">
+                      <a:solidFill>
+                        <a:srgbClr val="CADCFC"/>
+                      </a:solidFill>
+                      <a:prstDash val="solid"/>
+                      <a:round/>
+                      <a:headEnd type="none" w="med" len="med"/>
+                      <a:tailEnd type="none" w="med" len="med"/>
+                    </a:lnT>
+                    <a:lnB w="12700" cap="flat" cmpd="sng" algn="ctr">
+                      <a:solidFill>
+                        <a:srgbClr val="CADCFC"/>
+                      </a:solidFill>
+                      <a:prstDash val="solid"/>
+                      <a:round/>
+                      <a:headEnd type="none" w="med" len="med"/>
+                      <a:tailEnd type="none" w="med" len="med"/>
+                    </a:lnB>
+                    <a:solidFill>
+                      <a:srgbClr val="1E2761"/>
+                    </a:solidFill>
+                  </a:tcPr>
+                </a:tc>
+              </a:tr>
+              <a:tr h="457200">
+                <a:tc>
+                  <a:txBody>
+                    <a:bodyPr/>
+                    <a:lstStyle/>
+                    <a:p>
+                      <a:pPr indent="0" marL="0">
+                        <a:buNone/>
+                      </a:pPr>
+                      <a:r>
+                        <a:rPr lang="en-US" sz="1300" dirty="0">
+                          <a:solidFill>
+                            <a:srgbClr val="000000"/>
+                          </a:solidFill>
+                          <a:latin typeface="Calibri" pitchFamily="34" charset="0"/>
+                          <a:ea typeface="Calibri" pitchFamily="34" charset="-122"/>
+                          <a:cs typeface="Calibri" pitchFamily="34" charset="-120"/>
+                        </a:rPr>
+                        <a:t>Triage accuracy (H3, RQ3a)</a:t>
+                      </a:r>
+                      <a:endParaRPr lang="en-US" sz="1300" dirty="0">
+                        <a:latin typeface="Calibri" charset="0"/>
+                        <a:ea typeface="Calibri" charset="0"/>
+                        <a:cs typeface="Calibri" charset="0"/>
+                      </a:endParaRPr>
+                    </a:p>
+                  </a:txBody>
+                  <a:tcPr marL="91440" marR="91440" marT="45720" marB="45720" anchor="ctr">
+                    <a:lnL w="12700" cap="flat" cmpd="sng" algn="ctr">
+                      <a:solidFill>
+                        <a:srgbClr val="CADCFC"/>
+                      </a:solidFill>
+                      <a:prstDash val="solid"/>
+                      <a:round/>
+                      <a:headEnd type="none" w="med" len="med"/>
+                      <a:tailEnd type="none" w="med" len="med"/>
+                    </a:lnL>
+                    <a:lnR w="12700" cap="flat" cmpd="sng" algn="ctr">
+                      <a:solidFill>
+                        <a:srgbClr val="CADCFC"/>
+                      </a:solidFill>
+                      <a:prstDash val="solid"/>
+                      <a:round/>
+                      <a:headEnd type="none" w="med" len="med"/>
+                      <a:tailEnd type="none" w="med" len="med"/>
+                    </a:lnR>
+                    <a:lnT w="12700" cap="flat" cmpd="sng" algn="ctr">
+                      <a:solidFill>
+                        <a:srgbClr val="CADCFC"/>
+                      </a:solidFill>
+                      <a:prstDash val="solid"/>
+                      <a:round/>
+                      <a:headEnd type="none" w="med" len="med"/>
+                      <a:tailEnd type="none" w="med" len="med"/>
+                    </a:lnT>
+                    <a:lnB w="12700" cap="flat" cmpd="sng" algn="ctr">
+                      <a:solidFill>
+                        <a:srgbClr val="CADCFC"/>
+                      </a:solidFill>
+                      <a:prstDash val="solid"/>
+                      <a:round/>
+                      <a:headEnd type="none" w="med" len="med"/>
+                      <a:tailEnd type="none" w="med" len="med"/>
+                    </a:lnB>
+                  </a:tcPr>
+                </a:tc>
+                <a:tc>
+                  <a:txBody>
+                    <a:bodyPr/>
+                    <a:lstStyle/>
+                    <a:p>
+                      <a:pPr indent="0" marL="0">
+                        <a:buNone/>
+                      </a:pPr>
+                      <a:r>
+                        <a:rPr lang="en-US" sz="1300" dirty="0">
+                          <a:solidFill>
+                            <a:srgbClr val="000000"/>
+                          </a:solidFill>
+                          <a:latin typeface="Calibri" pitchFamily="34" charset="0"/>
+                          <a:ea typeface="Calibri" pitchFamily="34" charset="-122"/>
+                          <a:cs typeface="Calibri" pitchFamily="34" charset="-120"/>
+                        </a:rPr>
+                        <a:t>MEASURED</a:t>
+                      </a:r>
+                      <a:endParaRPr lang="en-US" sz="1300" dirty="0">
+                        <a:latin typeface="Calibri" charset="0"/>
+                        <a:ea typeface="Calibri" charset="0"/>
+                        <a:cs typeface="Calibri" charset="0"/>
+                      </a:endParaRPr>
+                    </a:p>
+                  </a:txBody>
+                  <a:tcPr marL="91440" marR="91440" marT="45720" marB="45720" anchor="ctr">
+                    <a:lnL w="12700" cap="flat" cmpd="sng" algn="ctr">
+                      <a:solidFill>
+                        <a:srgbClr val="CADCFC"/>
+                      </a:solidFill>
+                      <a:prstDash val="solid"/>
+                      <a:round/>
+                      <a:headEnd type="none" w="med" len="med"/>
+                      <a:tailEnd type="none" w="med" len="med"/>
+                    </a:lnL>
+                    <a:lnR w="12700" cap="flat" cmpd="sng" algn="ctr">
+                      <a:solidFill>
+                        <a:srgbClr val="CADCFC"/>
+                      </a:solidFill>
+                      <a:prstDash val="solid"/>
+                      <a:round/>
+                      <a:headEnd type="none" w="med" len="med"/>
+                      <a:tailEnd type="none" w="med" len="med"/>
+                    </a:lnR>
+                    <a:lnT w="12700" cap="flat" cmpd="sng" algn="ctr">
+                      <a:solidFill>
+                        <a:srgbClr val="CADCFC"/>
+                      </a:solidFill>
+                      <a:prstDash val="solid"/>
+                      <a:round/>
+                      <a:headEnd type="none" w="med" len="med"/>
+                      <a:tailEnd type="none" w="med" len="med"/>
+                    </a:lnT>
+                    <a:lnB w="12700" cap="flat" cmpd="sng" algn="ctr">
+                      <a:solidFill>
+                        <a:srgbClr val="CADCFC"/>
+                      </a:solidFill>
+                      <a:prstDash val="solid"/>
+                      <a:round/>
+                      <a:headEnd type="none" w="med" len="med"/>
+                      <a:tailEnd type="none" w="med" len="med"/>
+                    </a:lnB>
+                  </a:tcPr>
+                </a:tc>
+                <a:tc>
+                  <a:txBody>
+                    <a:bodyPr/>
+                    <a:lstStyle/>
+                    <a:p>
+                      <a:pPr indent="0" marL="0">
+                        <a:buNone/>
+                      </a:pPr>
+                      <a:r>
+                        <a:rPr lang="en-US" sz="1300" dirty="0">
+                          <a:solidFill>
+                            <a:srgbClr val="000000"/>
+                          </a:solidFill>
+                          <a:latin typeface="Calibri" pitchFamily="34" charset="0"/>
+                          <a:ea typeface="Calibri" pitchFamily="34" charset="-122"/>
+                          <a:cs typeface="Calibri" pitchFamily="34" charset="-120"/>
+                        </a:rPr>
+                        <a:t>three predictors, one gold standard (§5A.3–5A.4)</a:t>
+                      </a:r>
+                      <a:endParaRPr lang="en-US" sz="1300" dirty="0">
+                        <a:latin typeface="Calibri" charset="0"/>
+                        <a:ea typeface="Calibri" charset="0"/>
+                        <a:cs typeface="Calibri" charset="0"/>
+                      </a:endParaRPr>
+                    </a:p>
+                  </a:txBody>
+                  <a:tcPr marL="91440" marR="91440" marT="45720" marB="45720" anchor="ctr">
+                    <a:lnL w="12700" cap="flat" cmpd="sng" algn="ctr">
+                      <a:solidFill>
+                        <a:srgbClr val="CADCFC"/>
+                      </a:solidFill>
+                      <a:prstDash val="solid"/>
+                      <a:round/>
+                      <a:headEnd type="none" w="med" len="med"/>
+                      <a:tailEnd type="none" w="med" len="med"/>
+                    </a:lnL>
+                    <a:lnR w="12700" cap="flat" cmpd="sng" algn="ctr">
+                      <a:solidFill>
+                        <a:srgbClr val="CADCFC"/>
+                      </a:solidFill>
+                      <a:prstDash val="solid"/>
+                      <a:round/>
+                      <a:headEnd type="none" w="med" len="med"/>
+                      <a:tailEnd type="none" w="med" len="med"/>
+                    </a:lnR>
+                    <a:lnT w="12700" cap="flat" cmpd="sng" algn="ctr">
+                      <a:solidFill>
+                        <a:srgbClr val="CADCFC"/>
+                      </a:solidFill>
+                      <a:prstDash val="solid"/>
+                      <a:round/>
+                      <a:headEnd type="none" w="med" len="med"/>
+                      <a:tailEnd type="none" w="med" len="med"/>
+                    </a:lnT>
+                    <a:lnB w="12700" cap="flat" cmpd="sng" algn="ctr">
+                      <a:solidFill>
+                        <a:srgbClr val="CADCFC"/>
+                      </a:solidFill>
+                      <a:prstDash val="solid"/>
+                      <a:round/>
+                      <a:headEnd type="none" w="med" len="med"/>
+                      <a:tailEnd type="none" w="med" len="med"/>
+                    </a:lnB>
+                  </a:tcPr>
+                </a:tc>
+              </a:tr>
+              <a:tr h="457200">
+                <a:tc>
+                  <a:txBody>
+                    <a:bodyPr/>
+                    <a:lstStyle/>
+                    <a:p>
+                      <a:pPr indent="0" marL="0">
+                        <a:buNone/>
+                      </a:pPr>
+                      <a:r>
+                        <a:rPr lang="en-US" sz="1300" dirty="0">
+                          <a:solidFill>
+                            <a:srgbClr val="000000"/>
+                          </a:solidFill>
+                          <a:latin typeface="Calibri" pitchFamily="34" charset="0"/>
+                          <a:ea typeface="Calibri" pitchFamily="34" charset="-122"/>
+                          <a:cs typeface="Calibri" pitchFamily="34" charset="-120"/>
+                        </a:rPr>
+                        <a:t>Escalation equity (RQ3b)</a:t>
+                      </a:r>
+                      <a:endParaRPr lang="en-US" sz="1300" dirty="0">
+                        <a:latin typeface="Calibri" charset="0"/>
+                        <a:ea typeface="Calibri" charset="0"/>
+                        <a:cs typeface="Calibri" charset="0"/>
+                      </a:endParaRPr>
+                    </a:p>
+                  </a:txBody>
+                  <a:tcPr marL="91440" marR="91440" marT="45720" marB="45720" anchor="ctr">
+                    <a:lnL w="12700" cap="flat" cmpd="sng" algn="ctr">
+                      <a:solidFill>
+                        <a:srgbClr val="CADCFC"/>
+                      </a:solidFill>
+                      <a:prstDash val="solid"/>
+                      <a:round/>
+                      <a:headEnd type="none" w="med" len="med"/>
+                      <a:tailEnd type="none" w="med" len="med"/>
+                    </a:lnL>
+                    <a:lnR w="12700" cap="flat" cmpd="sng" algn="ctr">
+                      <a:solidFill>
+                        <a:srgbClr val="CADCFC"/>
+                      </a:solidFill>
+                      <a:prstDash val="solid"/>
+                      <a:round/>
+                      <a:headEnd type="none" w="med" len="med"/>
+                      <a:tailEnd type="none" w="med" len="med"/>
+                    </a:lnR>
+                    <a:lnT w="12700" cap="flat" cmpd="sng" algn="ctr">
+                      <a:solidFill>
+                        <a:srgbClr val="CADCFC"/>
+                      </a:solidFill>
+                      <a:prstDash val="solid"/>
+                      <a:round/>
+                      <a:headEnd type="none" w="med" len="med"/>
+                      <a:tailEnd type="none" w="med" len="med"/>
+                    </a:lnT>
+                    <a:lnB w="12700" cap="flat" cmpd="sng" algn="ctr">
+                      <a:solidFill>
+                        <a:srgbClr val="CADCFC"/>
+                      </a:solidFill>
+                      <a:prstDash val="solid"/>
+                      <a:round/>
+                      <a:headEnd type="none" w="med" len="med"/>
+                      <a:tailEnd type="none" w="med" len="med"/>
+                    </a:lnB>
+                  </a:tcPr>
+                </a:tc>
+                <a:tc>
+                  <a:txBody>
+                    <a:bodyPr/>
+                    <a:lstStyle/>
+                    <a:p>
+                      <a:pPr indent="0" marL="0">
+                        <a:buNone/>
+                      </a:pPr>
+                      <a:r>
+                        <a:rPr lang="en-US" sz="1300" dirty="0">
+                          <a:solidFill>
+                            <a:srgbClr val="000000"/>
+                          </a:solidFill>
+                          <a:latin typeface="Calibri" pitchFamily="34" charset="0"/>
+                          <a:ea typeface="Calibri" pitchFamily="34" charset="-122"/>
+                          <a:cs typeface="Calibri" pitchFamily="34" charset="-120"/>
+                        </a:rPr>
+                        <a:t>MEASURED (bounded)</a:t>
+                      </a:r>
+                      <a:endParaRPr lang="en-US" sz="1300" dirty="0">
+                        <a:latin typeface="Calibri" charset="0"/>
+                        <a:ea typeface="Calibri" charset="0"/>
+                        <a:cs typeface="Calibri" charset="0"/>
+                      </a:endParaRPr>
+                    </a:p>
+                  </a:txBody>
+                  <a:tcPr marL="91440" marR="91440" marT="45720" marB="45720" anchor="ctr">
+                    <a:lnL w="12700" cap="flat" cmpd="sng" algn="ctr">
+                      <a:solidFill>
+                        <a:srgbClr val="CADCFC"/>
+                      </a:solidFill>
+                      <a:prstDash val="solid"/>
+                      <a:round/>
+                      <a:headEnd type="none" w="med" len="med"/>
+                      <a:tailEnd type="none" w="med" len="med"/>
+                    </a:lnL>
+                    <a:lnR w="12700" cap="flat" cmpd="sng" algn="ctr">
+                      <a:solidFill>
+                        <a:srgbClr val="CADCFC"/>
+                      </a:solidFill>
+                      <a:prstDash val="solid"/>
+                      <a:round/>
+                      <a:headEnd type="none" w="med" len="med"/>
+                      <a:tailEnd type="none" w="med" len="med"/>
+                    </a:lnR>
+                    <a:lnT w="12700" cap="flat" cmpd="sng" algn="ctr">
+                      <a:solidFill>
+                        <a:srgbClr val="CADCFC"/>
+                      </a:solidFill>
+                      <a:prstDash val="solid"/>
+                      <a:round/>
+                      <a:headEnd type="none" w="med" len="med"/>
+                      <a:tailEnd type="none" w="med" len="med"/>
+                    </a:lnT>
+                    <a:lnB w="12700" cap="flat" cmpd="sng" algn="ctr">
+                      <a:solidFill>
+                        <a:srgbClr val="CADCFC"/>
+                      </a:solidFill>
+                      <a:prstDash val="solid"/>
+                      <a:round/>
+                      <a:headEnd type="none" w="med" len="med"/>
+                      <a:tailEnd type="none" w="med" len="med"/>
+                    </a:lnB>
+                  </a:tcPr>
+                </a:tc>
+                <a:tc>
+                  <a:txBody>
+                    <a:bodyPr/>
+                    <a:lstStyle/>
+                    <a:p>
+                      <a:pPr indent="0" marL="0">
+                        <a:buNone/>
+                      </a:pPr>
+                      <a:r>
+                        <a:rPr lang="en-US" sz="1300" dirty="0">
+                          <a:solidFill>
+                            <a:srgbClr val="000000"/>
+                          </a:solidFill>
+                          <a:latin typeface="Calibri" pitchFamily="34" charset="0"/>
+                          <a:ea typeface="Calibri" pitchFamily="34" charset="-122"/>
+                          <a:cs typeface="Calibri" pitchFamily="34" charset="-120"/>
+                        </a:rPr>
+                        <a:t>equal-opportunity recall; DE stratum n=8 (§5A.5)</a:t>
+                      </a:r>
+                      <a:endParaRPr lang="en-US" sz="1300" dirty="0">
+                        <a:latin typeface="Calibri" charset="0"/>
+                        <a:ea typeface="Calibri" charset="0"/>
+                        <a:cs typeface="Calibri" charset="0"/>
+                      </a:endParaRPr>
+                    </a:p>
+                  </a:txBody>
+                  <a:tcPr marL="91440" marR="91440" marT="45720" marB="45720" anchor="ctr">
+                    <a:lnL w="12700" cap="flat" cmpd="sng" algn="ctr">
+                      <a:solidFill>
+                        <a:srgbClr val="CADCFC"/>
+                      </a:solidFill>
+                      <a:prstDash val="solid"/>
+                      <a:round/>
+                      <a:headEnd type="none" w="med" len="med"/>
+                      <a:tailEnd type="none" w="med" len="med"/>
+                    </a:lnL>
+                    <a:lnR w="12700" cap="flat" cmpd="sng" algn="ctr">
+                      <a:solidFill>
+                        <a:srgbClr val="CADCFC"/>
+                      </a:solidFill>
+                      <a:prstDash val="solid"/>
+                      <a:round/>
+                      <a:headEnd type="none" w="med" len="med"/>
+                      <a:tailEnd type="none" w="med" len="med"/>
+                    </a:lnR>
+                    <a:lnT w="12700" cap="flat" cmpd="sng" algn="ctr">
+                      <a:solidFill>
+                        <a:srgbClr val="CADCFC"/>
+                      </a:solidFill>
+                      <a:prstDash val="solid"/>
+                      <a:round/>
+                      <a:headEnd type="none" w="med" len="med"/>
+                      <a:tailEnd type="none" w="med" len="med"/>
+                    </a:lnT>
+                    <a:lnB w="12700" cap="flat" cmpd="sng" algn="ctr">
+                      <a:solidFill>
+                        <a:srgbClr val="CADCFC"/>
+                      </a:solidFill>
+                      <a:prstDash val="solid"/>
+                      <a:round/>
+                      <a:headEnd type="none" w="med" len="med"/>
+                      <a:tailEnd type="none" w="med" len="med"/>
+                    </a:lnB>
+                  </a:tcPr>
+                </a:tc>
+              </a:tr>
+              <a:tr h="457200">
+                <a:tc>
+                  <a:txBody>
+                    <a:bodyPr/>
+                    <a:lstStyle/>
+                    <a:p>
+                      <a:pPr indent="0" marL="0">
+                        <a:buNone/>
+                      </a:pPr>
+                      <a:r>
+                        <a:rPr lang="en-US" sz="1300" dirty="0">
+                          <a:solidFill>
+                            <a:srgbClr val="000000"/>
+                          </a:solidFill>
+                          <a:latin typeface="Calibri" pitchFamily="34" charset="0"/>
+                          <a:ea typeface="Calibri" pitchFamily="34" charset="-122"/>
+                          <a:cs typeface="Calibri" pitchFamily="34" charset="-120"/>
+                        </a:rPr>
+                        <a:t>Routing fields (H4, H5)</a:t>
+                      </a:r>
+                      <a:endParaRPr lang="en-US" sz="1300" dirty="0">
+                        <a:latin typeface="Calibri" charset="0"/>
+                        <a:ea typeface="Calibri" charset="0"/>
+                        <a:cs typeface="Calibri" charset="0"/>
+                      </a:endParaRPr>
+                    </a:p>
+                  </a:txBody>
+                  <a:tcPr marL="91440" marR="91440" marT="45720" marB="45720" anchor="ctr">
+                    <a:lnL w="12700" cap="flat" cmpd="sng" algn="ctr">
+                      <a:solidFill>
+                        <a:srgbClr val="CADCFC"/>
+                      </a:solidFill>
+                      <a:prstDash val="solid"/>
+                      <a:round/>
+                      <a:headEnd type="none" w="med" len="med"/>
+                      <a:tailEnd type="none" w="med" len="med"/>
+                    </a:lnL>
+                    <a:lnR w="12700" cap="flat" cmpd="sng" algn="ctr">
+                      <a:solidFill>
+                        <a:srgbClr val="CADCFC"/>
+                      </a:solidFill>
+                      <a:prstDash val="solid"/>
+                      <a:round/>
+                      <a:headEnd type="none" w="med" len="med"/>
+                      <a:tailEnd type="none" w="med" len="med"/>
+                    </a:lnR>
+                    <a:lnT w="12700" cap="flat" cmpd="sng" algn="ctr">
+                      <a:solidFill>
+                        <a:srgbClr val="CADCFC"/>
+                      </a:solidFill>
+                      <a:prstDash val="solid"/>
+                      <a:round/>
+                      <a:headEnd type="none" w="med" len="med"/>
+                      <a:tailEnd type="none" w="med" len="med"/>
+                    </a:lnT>
+                    <a:lnB w="12700" cap="flat" cmpd="sng" algn="ctr">
+                      <a:solidFill>
+                        <a:srgbClr val="CADCFC"/>
+                      </a:solidFill>
+                      <a:prstDash val="solid"/>
+                      <a:round/>
+                      <a:headEnd type="none" w="med" len="med"/>
+                      <a:tailEnd type="none" w="med" len="med"/>
+                    </a:lnB>
+                  </a:tcPr>
+                </a:tc>
+                <a:tc>
+                  <a:txBody>
+                    <a:bodyPr/>
+                    <a:lstStyle/>
+                    <a:p>
+                      <a:pPr indent="0" marL="0">
+                        <a:buNone/>
+                      </a:pPr>
+                      <a:r>
+                        <a:rPr lang="en-US" sz="1300" dirty="0">
+                          <a:solidFill>
+                            <a:srgbClr val="000000"/>
+                          </a:solidFill>
+                          <a:latin typeface="Calibri" pitchFamily="34" charset="0"/>
+                          <a:ea typeface="Calibri" pitchFamily="34" charset="-122"/>
+                          <a:cs typeface="Calibri" pitchFamily="34" charset="-120"/>
+                        </a:rPr>
+                        <a:t>MEASURED (bounded)</a:t>
+                      </a:r>
+                      <a:endParaRPr lang="en-US" sz="1300" dirty="0">
+                        <a:latin typeface="Calibri" charset="0"/>
+                        <a:ea typeface="Calibri" charset="0"/>
+                        <a:cs typeface="Calibri" charset="0"/>
+                      </a:endParaRPr>
+                    </a:p>
+                  </a:txBody>
+                  <a:tcPr marL="91440" marR="91440" marT="45720" marB="45720" anchor="ctr">
+                    <a:lnL w="12700" cap="flat" cmpd="sng" algn="ctr">
+                      <a:solidFill>
+                        <a:srgbClr val="CADCFC"/>
+                      </a:solidFill>
+                      <a:prstDash val="solid"/>
+                      <a:round/>
+                      <a:headEnd type="none" w="med" len="med"/>
+                      <a:tailEnd type="none" w="med" len="med"/>
+                    </a:lnL>
+                    <a:lnR w="12700" cap="flat" cmpd="sng" algn="ctr">
+                      <a:solidFill>
+                        <a:srgbClr val="CADCFC"/>
+                      </a:solidFill>
+                      <a:prstDash val="solid"/>
+                      <a:round/>
+                      <a:headEnd type="none" w="med" len="med"/>
+                      <a:tailEnd type="none" w="med" len="med"/>
+                    </a:lnR>
+                    <a:lnT w="12700" cap="flat" cmpd="sng" algn="ctr">
+                      <a:solidFill>
+                        <a:srgbClr val="CADCFC"/>
+                      </a:solidFill>
+                      <a:prstDash val="solid"/>
+                      <a:round/>
+                      <a:headEnd type="none" w="med" len="med"/>
+                      <a:tailEnd type="none" w="med" len="med"/>
+                    </a:lnT>
+                    <a:lnB w="12700" cap="flat" cmpd="sng" algn="ctr">
+                      <a:solidFill>
+                        <a:srgbClr val="CADCFC"/>
+                      </a:solidFill>
+                      <a:prstDash val="solid"/>
+                      <a:round/>
+                      <a:headEnd type="none" w="med" len="med"/>
+                      <a:tailEnd type="none" w="med" len="med"/>
+                    </a:lnB>
+                  </a:tcPr>
+                </a:tc>
+                <a:tc>
+                  <a:txBody>
+                    <a:bodyPr/>
+                    <a:lstStyle/>
+                    <a:p>
+                      <a:pPr indent="0" marL="0">
+                        <a:buNone/>
+                      </a:pPr>
+                      <a:r>
+                        <a:rPr lang="en-US" sz="1300" dirty="0">
+                          <a:solidFill>
+                            <a:srgbClr val="000000"/>
+                          </a:solidFill>
+                          <a:latin typeface="Calibri" pitchFamily="34" charset="0"/>
+                          <a:ea typeface="Calibri" pitchFamily="34" charset="-122"/>
+                          <a:cs typeface="Calibri" pitchFamily="34" charset="-120"/>
+                        </a:rPr>
+                        <a:t>supplied inventory = upper bound (§5A.4.1)</a:t>
+                      </a:r>
+                      <a:endParaRPr lang="en-US" sz="1300" dirty="0">
+                        <a:latin typeface="Calibri" charset="0"/>
+                        <a:ea typeface="Calibri" charset="0"/>
+                        <a:cs typeface="Calibri" charset="0"/>
+                      </a:endParaRPr>
+                    </a:p>
+                  </a:txBody>
+                  <a:tcPr marL="91440" marR="91440" marT="45720" marB="45720" anchor="ctr">
+                    <a:lnL w="12700" cap="flat" cmpd="sng" algn="ctr">
+                      <a:solidFill>
+                        <a:srgbClr val="CADCFC"/>
+                      </a:solidFill>
+                      <a:prstDash val="solid"/>
+                      <a:round/>
+                      <a:headEnd type="none" w="med" len="med"/>
+                      <a:tailEnd type="none" w="med" len="med"/>
+                    </a:lnL>
+                    <a:lnR w="12700" cap="flat" cmpd="sng" algn="ctr">
+                      <a:solidFill>
+                        <a:srgbClr val="CADCFC"/>
+                      </a:solidFill>
+                      <a:prstDash val="solid"/>
+                      <a:round/>
+                      <a:headEnd type="none" w="med" len="med"/>
+                      <a:tailEnd type="none" w="med" len="med"/>
+                    </a:lnR>
+                    <a:lnT w="12700" cap="flat" cmpd="sng" algn="ctr">
+                      <a:solidFill>
+                        <a:srgbClr val="CADCFC"/>
+                      </a:solidFill>
+                      <a:prstDash val="solid"/>
+                      <a:round/>
+                      <a:headEnd type="none" w="med" len="med"/>
+                      <a:tailEnd type="none" w="med" len="med"/>
+                    </a:lnT>
+                    <a:lnB w="12700" cap="flat" cmpd="sng" algn="ctr">
+                      <a:solidFill>
+                        <a:srgbClr val="CADCFC"/>
+                      </a:solidFill>
+                      <a:prstDash val="solid"/>
+                      <a:round/>
+                      <a:headEnd type="none" w="med" len="med"/>
+                      <a:tailEnd type="none" w="med" len="med"/>
+                    </a:lnB>
+                  </a:tcPr>
+                </a:tc>
+              </a:tr>
+              <a:tr h="457200">
+                <a:tc>
+                  <a:txBody>
+                    <a:bodyPr/>
+                    <a:lstStyle/>
+                    <a:p>
+                      <a:pPr indent="0" marL="0">
+                        <a:buNone/>
+                      </a:pPr>
+                      <a:r>
+                        <a:rPr lang="en-US" sz="1300" dirty="0">
+                          <a:solidFill>
+                            <a:srgbClr val="000000"/>
+                          </a:solidFill>
+                          <a:latin typeface="Calibri" pitchFamily="34" charset="0"/>
+                          <a:ea typeface="Calibri" pitchFamily="34" charset="-122"/>
+                          <a:cs typeface="Calibri" pitchFamily="34" charset="-120"/>
+                        </a:rPr>
+                        <a:t>DP2 memory influence</a:t>
+                      </a:r>
+                      <a:endParaRPr lang="en-US" sz="1300" dirty="0">
+                        <a:latin typeface="Calibri" charset="0"/>
+                        <a:ea typeface="Calibri" charset="0"/>
+                        <a:cs typeface="Calibri" charset="0"/>
+                      </a:endParaRPr>
+                    </a:p>
+                  </a:txBody>
+                  <a:tcPr marL="91440" marR="91440" marT="45720" marB="45720" anchor="ctr">
+                    <a:lnL w="12700" cap="flat" cmpd="sng" algn="ctr">
+                      <a:solidFill>
+                        <a:srgbClr val="CADCFC"/>
+                      </a:solidFill>
+                      <a:prstDash val="solid"/>
+                      <a:round/>
+                      <a:headEnd type="none" w="med" len="med"/>
+                      <a:tailEnd type="none" w="med" len="med"/>
+                    </a:lnL>
+                    <a:lnR w="12700" cap="flat" cmpd="sng" algn="ctr">
+                      <a:solidFill>
+                        <a:srgbClr val="CADCFC"/>
+                      </a:solidFill>
+                      <a:prstDash val="solid"/>
+                      <a:round/>
+                      <a:headEnd type="none" w="med" len="med"/>
+                      <a:tailEnd type="none" w="med" len="med"/>
+                    </a:lnR>
+                    <a:lnT w="12700" cap="flat" cmpd="sng" algn="ctr">
+                      <a:solidFill>
+                        <a:srgbClr val="CADCFC"/>
+                      </a:solidFill>
+                      <a:prstDash val="solid"/>
+                      <a:round/>
+                      <a:headEnd type="none" w="med" len="med"/>
+                      <a:tailEnd type="none" w="med" len="med"/>
+                    </a:lnT>
+                    <a:lnB w="12700" cap="flat" cmpd="sng" algn="ctr">
+                      <a:solidFill>
+                        <a:srgbClr val="CADCFC"/>
+                      </a:solidFill>
+                      <a:prstDash val="solid"/>
+                      <a:round/>
+                      <a:headEnd type="none" w="med" len="med"/>
+                      <a:tailEnd type="none" w="med" len="med"/>
+                    </a:lnB>
+                  </a:tcPr>
+                </a:tc>
+                <a:tc>
+                  <a:txBody>
+                    <a:bodyPr/>
+                    <a:lstStyle/>
+                    <a:p>
+                      <a:pPr indent="0" marL="0">
+                        <a:buNone/>
+                      </a:pPr>
+                      <a:r>
+                        <a:rPr lang="en-US" sz="1300" dirty="0">
+                          <a:solidFill>
+                            <a:srgbClr val="000000"/>
+                          </a:solidFill>
+                          <a:latin typeface="Calibri" pitchFamily="34" charset="0"/>
+                          <a:ea typeface="Calibri" pitchFamily="34" charset="-122"/>
+                          <a:cs typeface="Calibri" pitchFamily="34" charset="-120"/>
+                        </a:rPr>
+                        <a:t>PARTIALLY MEASURED</a:t>
+                      </a:r>
+                      <a:endParaRPr lang="en-US" sz="1300" dirty="0">
+                        <a:latin typeface="Calibri" charset="0"/>
+                        <a:ea typeface="Calibri" charset="0"/>
+                        <a:cs typeface="Calibri" charset="0"/>
+                      </a:endParaRPr>
+                    </a:p>
+                  </a:txBody>
+                  <a:tcPr marL="91440" marR="91440" marT="45720" marB="45720" anchor="ctr">
+                    <a:lnL w="12700" cap="flat" cmpd="sng" algn="ctr">
+                      <a:solidFill>
+                        <a:srgbClr val="CADCFC"/>
+                      </a:solidFill>
+                      <a:prstDash val="solid"/>
+                      <a:round/>
+                      <a:headEnd type="none" w="med" len="med"/>
+                      <a:tailEnd type="none" w="med" len="med"/>
+                    </a:lnL>
+                    <a:lnR w="12700" cap="flat" cmpd="sng" algn="ctr">
+                      <a:solidFill>
+                        <a:srgbClr val="CADCFC"/>
+                      </a:solidFill>
+                      <a:prstDash val="solid"/>
+                      <a:round/>
+                      <a:headEnd type="none" w="med" len="med"/>
+                      <a:tailEnd type="none" w="med" len="med"/>
+                    </a:lnR>
+                    <a:lnT w="12700" cap="flat" cmpd="sng" algn="ctr">
+                      <a:solidFill>
+                        <a:srgbClr val="CADCFC"/>
+                      </a:solidFill>
+                      <a:prstDash val="solid"/>
+                      <a:round/>
+                      <a:headEnd type="none" w="med" len="med"/>
+                      <a:tailEnd type="none" w="med" len="med"/>
+                    </a:lnT>
+                    <a:lnB w="12700" cap="flat" cmpd="sng" algn="ctr">
+                      <a:solidFill>
+                        <a:srgbClr val="CADCFC"/>
+                      </a:solidFill>
+                      <a:prstDash val="solid"/>
+                      <a:round/>
+                      <a:headEnd type="none" w="med" len="med"/>
+                      <a:tailEnd type="none" w="med" len="med"/>
+                    </a:lnB>
+                  </a:tcPr>
+                </a:tc>
+                <a:tc>
+                  <a:txBody>
+                    <a:bodyPr/>
+                    <a:lstStyle/>
+                    <a:p>
+                      <a:pPr indent="0" marL="0">
+                        <a:buNone/>
+                      </a:pPr>
+                      <a:r>
+                        <a:rPr lang="en-US" sz="1300" dirty="0">
+                          <a:solidFill>
+                            <a:srgbClr val="000000"/>
+                          </a:solidFill>
+                          <a:latin typeface="Calibri" pitchFamily="34" charset="0"/>
+                          <a:ea typeface="Calibri" pitchFamily="34" charset="-122"/>
+                          <a:cs typeface="Calibri" pitchFamily="34" charset="-120"/>
+                        </a:rPr>
+                        <a:t>adoption 21→71%; outcomes simulated</a:t>
+                      </a:r>
+                      <a:endParaRPr lang="en-US" sz="1300" dirty="0">
+                        <a:latin typeface="Calibri" charset="0"/>
+                        <a:ea typeface="Calibri" charset="0"/>
+                        <a:cs typeface="Calibri" charset="0"/>
+                      </a:endParaRPr>
+                    </a:p>
+                  </a:txBody>
+                  <a:tcPr marL="91440" marR="91440" marT="45720" marB="45720" anchor="ctr">
+                    <a:lnL w="12700" cap="flat" cmpd="sng" algn="ctr">
+                      <a:solidFill>
+                        <a:srgbClr val="CADCFC"/>
+                      </a:solidFill>
+                      <a:prstDash val="solid"/>
+                      <a:round/>
+                      <a:headEnd type="none" w="med" len="med"/>
+                      <a:tailEnd type="none" w="med" len="med"/>
+                    </a:lnL>
+                    <a:lnR w="12700" cap="flat" cmpd="sng" algn="ctr">
+                      <a:solidFill>
+                        <a:srgbClr val="CADCFC"/>
+                      </a:solidFill>
+                      <a:prstDash val="solid"/>
+                      <a:round/>
+                      <a:headEnd type="none" w="med" len="med"/>
+                      <a:tailEnd type="none" w="med" len="med"/>
+                    </a:lnR>
+                    <a:lnT w="12700" cap="flat" cmpd="sng" algn="ctr">
+                      <a:solidFill>
+                        <a:srgbClr val="CADCFC"/>
+                      </a:solidFill>
+                      <a:prstDash val="solid"/>
+                      <a:round/>
+                      <a:headEnd type="none" w="med" len="med"/>
+                      <a:tailEnd type="none" w="med" len="med"/>
+                    </a:lnT>
+                    <a:lnB w="12700" cap="flat" cmpd="sng" algn="ctr">
+                      <a:solidFill>
+                        <a:srgbClr val="CADCFC"/>
+                      </a:solidFill>
+                      <a:prstDash val="solid"/>
+                      <a:round/>
+                      <a:headEnd type="none" w="med" len="med"/>
+                      <a:tailEnd type="none" w="med" len="med"/>
+                    </a:lnB>
+                  </a:tcPr>
+                </a:tc>
+              </a:tr>
+              <a:tr h="457200">
+                <a:tc>
+                  <a:txBody>
+                    <a:bodyPr/>
+                    <a:lstStyle/>
+                    <a:p>
+                      <a:pPr indent="0" marL="0">
+                        <a:buNone/>
+                      </a:pPr>
+                      <a:r>
+                        <a:rPr lang="en-US" sz="1300" dirty="0">
+                          <a:solidFill>
+                            <a:srgbClr val="000000"/>
+                          </a:solidFill>
+                          <a:latin typeface="Calibri" pitchFamily="34" charset="0"/>
+                          <a:ea typeface="Calibri" pitchFamily="34" charset="-122"/>
+                          <a:cs typeface="Calibri" pitchFamily="34" charset="-120"/>
+                        </a:rPr>
+                        <a:t>DP1 outcome contracts</a:t>
+                      </a:r>
+                      <a:endParaRPr lang="en-US" sz="1300" dirty="0">
+                        <a:latin typeface="Calibri" charset="0"/>
+                        <a:ea typeface="Calibri" charset="0"/>
+                        <a:cs typeface="Calibri" charset="0"/>
+                      </a:endParaRPr>
+                    </a:p>
+                  </a:txBody>
+                  <a:tcPr marL="91440" marR="91440" marT="45720" marB="45720" anchor="ctr">
+                    <a:lnL w="12700" cap="flat" cmpd="sng" algn="ctr">
+                      <a:solidFill>
+                        <a:srgbClr val="CADCFC"/>
+                      </a:solidFill>
+                      <a:prstDash val="solid"/>
+                      <a:round/>
+                      <a:headEnd type="none" w="med" len="med"/>
+                      <a:tailEnd type="none" w="med" len="med"/>
+                    </a:lnL>
+                    <a:lnR w="12700" cap="flat" cmpd="sng" algn="ctr">
+                      <a:solidFill>
+                        <a:srgbClr val="CADCFC"/>
+                      </a:solidFill>
+                      <a:prstDash val="solid"/>
+                      <a:round/>
+                      <a:headEnd type="none" w="med" len="med"/>
+                      <a:tailEnd type="none" w="med" len="med"/>
+                    </a:lnR>
+                    <a:lnT w="12700" cap="flat" cmpd="sng" algn="ctr">
+                      <a:solidFill>
+                        <a:srgbClr val="CADCFC"/>
+                      </a:solidFill>
+                      <a:prstDash val="solid"/>
+                      <a:round/>
+                      <a:headEnd type="none" w="med" len="med"/>
+                      <a:tailEnd type="none" w="med" len="med"/>
+                    </a:lnT>
+                    <a:lnB w="12700" cap="flat" cmpd="sng" algn="ctr">
+                      <a:solidFill>
+                        <a:srgbClr val="CADCFC"/>
+                      </a:solidFill>
+                      <a:prstDash val="solid"/>
+                      <a:round/>
+                      <a:headEnd type="none" w="med" len="med"/>
+                      <a:tailEnd type="none" w="med" len="med"/>
+                    </a:lnB>
+                  </a:tcPr>
+                </a:tc>
+                <a:tc>
+                  <a:txBody>
+                    <a:bodyPr/>
+                    <a:lstStyle/>
+                    <a:p>
+                      <a:pPr indent="0" marL="0">
+                        <a:buNone/>
+                      </a:pPr>
+                      <a:r>
+                        <a:rPr lang="en-US" sz="1300" dirty="0">
+                          <a:solidFill>
+                            <a:srgbClr val="000000"/>
+                          </a:solidFill>
+                          <a:latin typeface="Calibri" pitchFamily="34" charset="0"/>
+                          <a:ea typeface="Calibri" pitchFamily="34" charset="-122"/>
+                          <a:cs typeface="Calibri" pitchFamily="34" charset="-120"/>
+                        </a:rPr>
+                        <a:t>DEMONSTRATED</a:t>
+                      </a:r>
+                      <a:endParaRPr lang="en-US" sz="1300" dirty="0">
+                        <a:latin typeface="Calibri" charset="0"/>
+                        <a:ea typeface="Calibri" charset="0"/>
+                        <a:cs typeface="Calibri" charset="0"/>
+                      </a:endParaRPr>
+                    </a:p>
+                  </a:txBody>
+                  <a:tcPr marL="91440" marR="91440" marT="45720" marB="45720" anchor="ctr">
+                    <a:lnL w="12700" cap="flat" cmpd="sng" algn="ctr">
+                      <a:solidFill>
+                        <a:srgbClr val="CADCFC"/>
+                      </a:solidFill>
+                      <a:prstDash val="solid"/>
+                      <a:round/>
+                      <a:headEnd type="none" w="med" len="med"/>
+                      <a:tailEnd type="none" w="med" len="med"/>
+                    </a:lnL>
+                    <a:lnR w="12700" cap="flat" cmpd="sng" algn="ctr">
+                      <a:solidFill>
+                        <a:srgbClr val="CADCFC"/>
+                      </a:solidFill>
+                      <a:prstDash val="solid"/>
+                      <a:round/>
+                      <a:headEnd type="none" w="med" len="med"/>
+                      <a:tailEnd type="none" w="med" len="med"/>
+                    </a:lnR>
+                    <a:lnT w="12700" cap="flat" cmpd="sng" algn="ctr">
+                      <a:solidFill>
+                        <a:srgbClr val="CADCFC"/>
+                      </a:solidFill>
+                      <a:prstDash val="solid"/>
+                      <a:round/>
+                      <a:headEnd type="none" w="med" len="med"/>
+                      <a:tailEnd type="none" w="med" len="med"/>
+                    </a:lnT>
+                    <a:lnB w="12700" cap="flat" cmpd="sng" algn="ctr">
+                      <a:solidFill>
+                        <a:srgbClr val="CADCFC"/>
+                      </a:solidFill>
+                      <a:prstDash val="solid"/>
+                      <a:round/>
+                      <a:headEnd type="none" w="med" len="med"/>
+                      <a:tailEnd type="none" w="med" len="med"/>
+                    </a:lnB>
+                  </a:tcPr>
+                </a:tc>
+                <a:tc>
+                  <a:txBody>
+                    <a:bodyPr/>
+                    <a:lstStyle/>
+                    <a:p>
+                      <a:pPr indent="0" marL="0">
+                        <a:buNone/>
+                      </a:pPr>
+                      <a:r>
+                        <a:rPr lang="en-US" sz="1300" dirty="0">
+                          <a:solidFill>
+                            <a:srgbClr val="000000"/>
+                          </a:solidFill>
+                          <a:latin typeface="Calibri" pitchFamily="34" charset="0"/>
+                          <a:ea typeface="Calibri" pitchFamily="34" charset="-122"/>
+                          <a:cs typeface="Calibri" pitchFamily="34" charset="-120"/>
+                        </a:rPr>
+                        <a:t>designed + instrumented; live contract pending</a:t>
+                      </a:r>
+                      <a:endParaRPr lang="en-US" sz="1300" dirty="0">
+                        <a:latin typeface="Calibri" charset="0"/>
+                        <a:ea typeface="Calibri" charset="0"/>
+                        <a:cs typeface="Calibri" charset="0"/>
+                      </a:endParaRPr>
+                    </a:p>
+                  </a:txBody>
+                  <a:tcPr marL="91440" marR="91440" marT="45720" marB="45720" anchor="ctr">
+                    <a:lnL w="12700" cap="flat" cmpd="sng" algn="ctr">
+                      <a:solidFill>
+                        <a:srgbClr val="CADCFC"/>
+                      </a:solidFill>
+                      <a:prstDash val="solid"/>
+                      <a:round/>
+                      <a:headEnd type="none" w="med" len="med"/>
+                      <a:tailEnd type="none" w="med" len="med"/>
+                    </a:lnL>
+                    <a:lnR w="12700" cap="flat" cmpd="sng" algn="ctr">
+                      <a:solidFill>
+                        <a:srgbClr val="CADCFC"/>
+                      </a:solidFill>
+                      <a:prstDash val="solid"/>
+                      <a:round/>
+                      <a:headEnd type="none" w="med" len="med"/>
+                      <a:tailEnd type="none" w="med" len="med"/>
+                    </a:lnR>
+                    <a:lnT w="12700" cap="flat" cmpd="sng" algn="ctr">
+                      <a:solidFill>
+                        <a:srgbClr val="CADCFC"/>
+                      </a:solidFill>
+                      <a:prstDash val="solid"/>
+                      <a:round/>
+                      <a:headEnd type="none" w="med" len="med"/>
+                      <a:tailEnd type="none" w="med" len="med"/>
+                    </a:lnT>
+                    <a:lnB w="12700" cap="flat" cmpd="sng" algn="ctr">
+                      <a:solidFill>
+                        <a:srgbClr val="CADCFC"/>
+                      </a:solidFill>
+                      <a:prstDash val="solid"/>
+                      <a:round/>
+                      <a:headEnd type="none" w="med" len="med"/>
+                      <a:tailEnd type="none" w="med" len="med"/>
+                    </a:lnB>
+                  </a:tcPr>
+                </a:tc>
+              </a:tr>
+              <a:tr h="457200">
+                <a:tc>
+                  <a:txBody>
+                    <a:bodyPr/>
+                    <a:lstStyle/>
+                    <a:p>
+                      <a:pPr indent="0" marL="0">
+                        <a:buNone/>
+                      </a:pPr>
+                      <a:r>
+                        <a:rPr lang="en-US" sz="1300" dirty="0">
+                          <a:solidFill>
+                            <a:srgbClr val="000000"/>
+                          </a:solidFill>
+                          <a:latin typeface="Calibri" pitchFamily="34" charset="0"/>
+                          <a:ea typeface="Calibri" pitchFamily="34" charset="-122"/>
+                          <a:cs typeface="Calibri" pitchFamily="34" charset="-120"/>
+                        </a:rPr>
+                        <a:t>Practitioner value (RQ4)</a:t>
+                      </a:r>
+                      <a:endParaRPr lang="en-US" sz="1300" dirty="0">
+                        <a:latin typeface="Calibri" charset="0"/>
+                        <a:ea typeface="Calibri" charset="0"/>
+                        <a:cs typeface="Calibri" charset="0"/>
+                      </a:endParaRPr>
+                    </a:p>
+                  </a:txBody>
+                  <a:tcPr marL="91440" marR="91440" marT="45720" marB="45720" anchor="ctr">
+                    <a:lnL w="12700" cap="flat" cmpd="sng" algn="ctr">
+                      <a:solidFill>
+                        <a:srgbClr val="CADCFC"/>
+                      </a:solidFill>
+                      <a:prstDash val="solid"/>
+                      <a:round/>
+                      <a:headEnd type="none" w="med" len="med"/>
+                      <a:tailEnd type="none" w="med" len="med"/>
+                    </a:lnL>
+                    <a:lnR w="12700" cap="flat" cmpd="sng" algn="ctr">
+                      <a:solidFill>
+                        <a:srgbClr val="CADCFC"/>
+                      </a:solidFill>
+                      <a:prstDash val="solid"/>
+                      <a:round/>
+                      <a:headEnd type="none" w="med" len="med"/>
+                      <a:tailEnd type="none" w="med" len="med"/>
+                    </a:lnR>
+                    <a:lnT w="12700" cap="flat" cmpd="sng" algn="ctr">
+                      <a:solidFill>
+                        <a:srgbClr val="CADCFC"/>
+                      </a:solidFill>
+                      <a:prstDash val="solid"/>
+                      <a:round/>
+                      <a:headEnd type="none" w="med" len="med"/>
+                      <a:tailEnd type="none" w="med" len="med"/>
+                    </a:lnT>
+                    <a:lnB w="12700" cap="flat" cmpd="sng" algn="ctr">
+                      <a:solidFill>
+                        <a:srgbClr val="CADCFC"/>
+                      </a:solidFill>
+                      <a:prstDash val="solid"/>
+                      <a:round/>
+                      <a:headEnd type="none" w="med" len="med"/>
+                      <a:tailEnd type="none" w="med" len="med"/>
+                    </a:lnB>
+                  </a:tcPr>
+                </a:tc>
+                <a:tc>
+                  <a:txBody>
+                    <a:bodyPr/>
+                    <a:lstStyle/>
+                    <a:p>
+                      <a:pPr indent="0" marL="0">
+                        <a:buNone/>
+                      </a:pPr>
+                      <a:r>
+                        <a:rPr lang="en-US" sz="1300" dirty="0">
+                          <a:solidFill>
+                            <a:srgbClr val="000000"/>
+                          </a:solidFill>
+                          <a:latin typeface="Calibri" pitchFamily="34" charset="0"/>
+                          <a:ea typeface="Calibri" pitchFamily="34" charset="-122"/>
+                          <a:cs typeface="Calibri" pitchFamily="34" charset="-120"/>
+                        </a:rPr>
+                        <a:t>PENDING</a:t>
+                      </a:r>
+                      <a:endParaRPr lang="en-US" sz="1300" dirty="0">
+                        <a:latin typeface="Calibri" charset="0"/>
+                        <a:ea typeface="Calibri" charset="0"/>
+                        <a:cs typeface="Calibri" charset="0"/>
+                      </a:endParaRPr>
+                    </a:p>
+                  </a:txBody>
+                  <a:tcPr marL="91440" marR="91440" marT="45720" marB="45720" anchor="ctr">
+                    <a:lnL w="12700" cap="flat" cmpd="sng" algn="ctr">
+                      <a:solidFill>
+                        <a:srgbClr val="CADCFC"/>
+                      </a:solidFill>
+                      <a:prstDash val="solid"/>
+                      <a:round/>
+                      <a:headEnd type="none" w="med" len="med"/>
+                      <a:tailEnd type="none" w="med" len="med"/>
+                    </a:lnL>
+                    <a:lnR w="12700" cap="flat" cmpd="sng" algn="ctr">
+                      <a:solidFill>
+                        <a:srgbClr val="CADCFC"/>
+                      </a:solidFill>
+                      <a:prstDash val="solid"/>
+                      <a:round/>
+                      <a:headEnd type="none" w="med" len="med"/>
+                      <a:tailEnd type="none" w="med" len="med"/>
+                    </a:lnR>
+                    <a:lnT w="12700" cap="flat" cmpd="sng" algn="ctr">
+                      <a:solidFill>
+                        <a:srgbClr val="CADCFC"/>
+                      </a:solidFill>
+                      <a:prstDash val="solid"/>
+                      <a:round/>
+                      <a:headEnd type="none" w="med" len="med"/>
+                      <a:tailEnd type="none" w="med" len="med"/>
+                    </a:lnT>
+                    <a:lnB w="12700" cap="flat" cmpd="sng" algn="ctr">
+                      <a:solidFill>
+                        <a:srgbClr val="CADCFC"/>
+                      </a:solidFill>
+                      <a:prstDash val="solid"/>
+                      <a:round/>
+                      <a:headEnd type="none" w="med" len="med"/>
+                      <a:tailEnd type="none" w="med" len="med"/>
+                    </a:lnB>
+                  </a:tcPr>
+                </a:tc>
+                <a:tc>
+                  <a:txBody>
+                    <a:bodyPr/>
+                    <a:lstStyle/>
+                    <a:p>
+                      <a:pPr indent="0" marL="0">
+                        <a:buNone/>
+                      </a:pPr>
+                      <a:r>
+                        <a:rPr lang="en-US" sz="1300" dirty="0">
+                          <a:solidFill>
+                            <a:srgbClr val="000000"/>
+                          </a:solidFill>
+                          <a:latin typeface="Calibri" pitchFamily="34" charset="0"/>
+                          <a:ea typeface="Calibri" pitchFamily="34" charset="-122"/>
+                          <a:cs typeface="Calibri" pitchFamily="34" charset="-120"/>
+                        </a:rPr>
+                        <a:t>instruments ready; interviews NOT started</a:t>
+                      </a:r>
+                      <a:endParaRPr lang="en-US" sz="1300" dirty="0">
+                        <a:latin typeface="Calibri" charset="0"/>
+                        <a:ea typeface="Calibri" charset="0"/>
+                        <a:cs typeface="Calibri" charset="0"/>
+                      </a:endParaRPr>
+                    </a:p>
+                  </a:txBody>
+                  <a:tcPr marL="91440" marR="91440" marT="45720" marB="45720" anchor="ctr">
+                    <a:lnL w="12700" cap="flat" cmpd="sng" algn="ctr">
+                      <a:solidFill>
+                        <a:srgbClr val="CADCFC"/>
+                      </a:solidFill>
+                      <a:prstDash val="solid"/>
+                      <a:round/>
+                      <a:headEnd type="none" w="med" len="med"/>
+                      <a:tailEnd type="none" w="med" len="med"/>
+                    </a:lnL>
+                    <a:lnR w="12700" cap="flat" cmpd="sng" algn="ctr">
+                      <a:solidFill>
+                        <a:srgbClr val="CADCFC"/>
+                      </a:solidFill>
+                      <a:prstDash val="solid"/>
+                      <a:round/>
+                      <a:headEnd type="none" w="med" len="med"/>
+                      <a:tailEnd type="none" w="med" len="med"/>
+                    </a:lnR>
+                    <a:lnT w="12700" cap="flat" cmpd="sng" algn="ctr">
+                      <a:solidFill>
+                        <a:srgbClr val="CADCFC"/>
+                      </a:solidFill>
+                      <a:prstDash val="solid"/>
+                      <a:round/>
+                      <a:headEnd type="none" w="med" len="med"/>
+                      <a:tailEnd type="none" w="med" len="med"/>
+                    </a:lnT>
+                    <a:lnB w="12700" cap="flat" cmpd="sng" algn="ctr">
+                      <a:solidFill>
+                        <a:srgbClr val="CADCFC"/>
+                      </a:solidFill>
+                      <a:prstDash val="solid"/>
+                      <a:round/>
+                      <a:headEnd type="none" w="med" len="med"/>
+                      <a:tailEnd type="none" w="med" len="med"/>
+                    </a:lnB>
+                  </a:tcPr>
+                </a:tc>
+              </a:tr>
+            </a:tbl>
+          </a:graphicData>
+        </a:graphic>
+      </p:graphicFrame>
+      <p:sp>
+        <p:nvSpPr>
+          <p:cNvPr id="13" name="Text 10"/>
+          <p:cNvSpPr/>
+          <p:nvPr/>
+        </p:nvSpPr>
+        <p:spPr>
+          <a:xfrm>
+            <a:off x="548640" y="4983480"/>
+            <a:ext cx="11064240" cy="1005840"/>
           </a:xfrm>
           <a:prstGeom prst="rect">
             <a:avLst/>
@@ -9902,287 +11938,15 @@
               <a:buNone/>
             </a:pPr>
             <a:r>
-              <a:rPr lang="en-US" sz="1700" b="1" dirty="0">
-                <a:solidFill>
-                  <a:srgbClr val="1E2761"/>
-                </a:solidFill>
-                <a:latin typeface="Cambria" pitchFamily="34" charset="0"/>
-                <a:ea typeface="Cambria" pitchFamily="34" charset="-122"/>
-                <a:cs typeface="Cambria" pitchFamily="34" charset="-120"/>
-              </a:rPr>
-              <a:t>Limitations (stated, not buried)</a:t>
-            </a:r>
-            <a:endParaRPr lang="en-US" sz="1700" dirty="0"/>
-          </a:p>
-        </p:txBody>
-      </p:sp>
-      <p:sp>
-        <p:nvSpPr>
-          <p:cNvPr id="13" name="Text 11"/>
-          <p:cNvSpPr/>
-          <p:nvPr/>
-        </p:nvSpPr>
-        <p:spPr>
-          <a:xfrm>
-            <a:off x="731520" y="2011680"/>
-            <a:ext cx="5303520" cy="3108960"/>
-          </a:xfrm>
-          <a:prstGeom prst="rect">
-            <a:avLst/>
-          </a:prstGeom>
-          <a:noFill/>
-          <a:ln/>
-        </p:spPr>
-        <p:txBody>
-          <a:bodyPr wrap="square" rtlCol="0" anchor="ctr"/>
-          <a:lstStyle/>
-          <a:p>
-            <a:pPr marL="342900" indent="-342900">
-              <a:spcAft>
-                <a:spcPts val="800"/>
-              </a:spcAft>
-              <a:buSzPct val="100000"/>
-              <a:buChar char="•"/>
-            </a:pPr>
-            <a:r>
-              <a:rPr lang="en-US" sz="1300" dirty="0">
-                <a:solidFill>
-                  <a:srgbClr val="1A1A2E"/>
-                </a:solidFill>
-                <a:latin typeface="Calibri" pitchFamily="34" charset="0"/>
-                <a:ea typeface="Calibri" pitchFamily="34" charset="-122"/>
-                <a:cs typeface="Calibri" pitchFamily="34" charset="-120"/>
-              </a:rPr>
-              <a:t>Modest, balanced corpus — characterises the pipeline, not a population</a:t>
-            </a:r>
-            <a:endParaRPr lang="en-US" sz="1300" dirty="0"/>
-          </a:p>
-          <a:p>
-            <a:pPr marL="342900" indent="-342900">
-              <a:spcAft>
-                <a:spcPts val="800"/>
-              </a:spcAft>
-              <a:buSzPct val="100000"/>
-              <a:buChar char="•"/>
-            </a:pPr>
-            <a:r>
-              <a:rPr lang="en-US" sz="1300" dirty="0">
-                <a:solidFill>
-                  <a:srgbClr val="1A1A2E"/>
-                </a:solidFill>
-                <a:latin typeface="Calibri" pitchFamily="34" charset="0"/>
-                <a:ea typeface="Calibri" pitchFamily="34" charset="-122"/>
-                <a:cs typeface="Calibri" pitchFamily="34" charset="-120"/>
-              </a:rPr>
-              <a:t>Qualitative study small-N, design-validity — no causal effect claims</a:t>
-            </a:r>
-            <a:endParaRPr lang="en-US" sz="1300" dirty="0"/>
-          </a:p>
-          <a:p>
-            <a:pPr marL="342900" indent="-342900">
-              <a:spcAft>
-                <a:spcPts val="800"/>
-              </a:spcAft>
-              <a:buSzPct val="100000"/>
-              <a:buChar char="•"/>
-            </a:pPr>
-            <a:r>
-              <a:rPr lang="en-US" sz="1300" dirty="0">
-                <a:solidFill>
-                  <a:srgbClr val="1A1A2E"/>
-                </a:solidFill>
-                <a:latin typeface="Calibri" pitchFamily="34" charset="0"/>
-                <a:ea typeface="Calibri" pitchFamily="34" charset="-122"/>
-                <a:cs typeface="Calibri" pitchFamily="34" charset="-120"/>
-              </a:rPr>
-              <a:t>Researcher-as-designer-and-founder — managed by external labels, standard instruments, reproducibility</a:t>
-            </a:r>
-            <a:endParaRPr lang="en-US" sz="1300" dirty="0"/>
-          </a:p>
-          <a:p>
-            <a:pPr marL="342900" indent="-342900">
-              <a:spcAft>
-                <a:spcPts val="800"/>
-              </a:spcAft>
-              <a:buSzPct val="100000"/>
-              <a:buChar char="•"/>
-            </a:pPr>
-            <a:r>
-              <a:rPr lang="en-US" sz="1300" dirty="0">
-                <a:solidFill>
-                  <a:srgbClr val="1A1A2E"/>
-                </a:solidFill>
-                <a:latin typeface="Calibri" pitchFamily="34" charset="0"/>
-                <a:ea typeface="Calibri" pitchFamily="34" charset="-122"/>
-                <a:cs typeface="Calibri" pitchFamily="34" charset="-120"/>
-              </a:rPr>
-              <a:t>Security review found 10 HIGH findings → hardened; not warranted multi-tenant</a:t>
-            </a:r>
-            <a:endParaRPr lang="en-US" sz="1300" dirty="0"/>
-          </a:p>
-          <a:p>
-            <a:pPr marL="342900" indent="-342900">
-              <a:spcAft>
-                <a:spcPts val="800"/>
-              </a:spcAft>
-              <a:buSzPct val="100000"/>
-              <a:buChar char="•"/>
-            </a:pPr>
-            <a:r>
-              <a:rPr lang="en-US" sz="1300" dirty="0">
-                <a:solidFill>
-                  <a:srgbClr val="1A1A2E"/>
-                </a:solidFill>
-                <a:latin typeface="Calibri" pitchFamily="34" charset="0"/>
-                <a:ea typeface="Calibri" pitchFamily="34" charset="-122"/>
-                <a:cs typeface="Calibri" pitchFamily="34" charset="-120"/>
-              </a:rPr>
-              <a:t>Distinctive claims demonstrated + partially measured, not field-proven</a:t>
-            </a:r>
-            <a:endParaRPr lang="en-US" sz="1300" dirty="0"/>
-          </a:p>
-        </p:txBody>
-      </p:sp>
-      <p:sp>
-        <p:nvSpPr>
-          <p:cNvPr id="14" name="Text 12"/>
-          <p:cNvSpPr/>
-          <p:nvPr/>
-        </p:nvSpPr>
-        <p:spPr>
-          <a:xfrm>
-            <a:off x="6400800" y="1554480"/>
-            <a:ext cx="5212080" cy="365760"/>
-          </a:xfrm>
-          <a:prstGeom prst="rect">
-            <a:avLst/>
-          </a:prstGeom>
-          <a:noFill/>
-          <a:ln/>
-        </p:spPr>
-        <p:txBody>
-          <a:bodyPr wrap="square" rtlCol="0" anchor="ctr"/>
-          <a:lstStyle/>
-          <a:p>
-            <a:pPr indent="0" marL="0">
-              <a:buNone/>
-            </a:pPr>
-            <a:r>
-              <a:rPr lang="en-US" sz="1700" b="1" dirty="0">
-                <a:solidFill>
-                  <a:srgbClr val="1E2761"/>
-                </a:solidFill>
-                <a:latin typeface="Cambria" pitchFamily="34" charset="0"/>
-                <a:ea typeface="Cambria" pitchFamily="34" charset="-122"/>
-                <a:cs typeface="Cambria" pitchFamily="34" charset="-120"/>
-              </a:rPr>
-              <a:t>Future work</a:t>
-            </a:r>
-            <a:endParaRPr lang="en-US" sz="1700" dirty="0"/>
-          </a:p>
-        </p:txBody>
-      </p:sp>
-      <p:sp>
-        <p:nvSpPr>
-          <p:cNvPr id="15" name="Text 13"/>
-          <p:cNvSpPr/>
-          <p:nvPr/>
-        </p:nvSpPr>
-        <p:spPr>
-          <a:xfrm>
-            <a:off x="6583680" y="2011680"/>
-            <a:ext cx="5029200" cy="3108960"/>
-          </a:xfrm>
-          <a:prstGeom prst="rect">
-            <a:avLst/>
-          </a:prstGeom>
-          <a:noFill/>
-          <a:ln/>
-        </p:spPr>
-        <p:txBody>
-          <a:bodyPr wrap="square" rtlCol="0" anchor="ctr"/>
-          <a:lstStyle/>
-          <a:p>
-            <a:pPr marL="342900" indent="-342900">
-              <a:spcAft>
-                <a:spcPts val="800"/>
-              </a:spcAft>
-              <a:buSzPct val="100000"/>
-              <a:buChar char="•"/>
-            </a:pPr>
-            <a:r>
-              <a:rPr lang="en-US" sz="1300" dirty="0">
-                <a:solidFill>
-                  <a:srgbClr val="1A1A2E"/>
-                </a:solidFill>
-                <a:latin typeface="Calibri" pitchFamily="34" charset="0"/>
-                <a:ea typeface="Calibri" pitchFamily="34" charset="-122"/>
-                <a:cs typeface="Calibri" pitchFamily="34" charset="-120"/>
-              </a:rPr>
-              <a:t>① One LIVE outcome contract on real data — scored by interrupted time series; then synthetic difference-in-differences as panels accumulate (Arkhangelsky et al., 2021)</a:t>
-            </a:r>
-            <a:endParaRPr lang="en-US" sz="1300" dirty="0"/>
-          </a:p>
-          <a:p>
-            <a:pPr marL="342900" indent="-342900">
-              <a:spcAft>
-                <a:spcPts val="800"/>
-              </a:spcAft>
-              <a:buSzPct val="100000"/>
-              <a:buChar char="•"/>
-            </a:pPr>
-            <a:r>
-              <a:rPr lang="en-US" sz="1300" dirty="0">
-                <a:solidFill>
-                  <a:srgbClr val="1A1A2E"/>
-                </a:solidFill>
-                <a:latin typeface="Calibri" pitchFamily="34" charset="0"/>
-                <a:ea typeface="Calibri" pitchFamily="34" charset="-122"/>
-                <a:cs typeface="Calibri" pitchFamily="34" charset="-120"/>
-              </a:rPr>
-              <a:t>② Unify the two LLM evidence streams on one gold standard; golden set grown 60→100 bilingual — exemplar lift now significant on exact-tags (p=0.001, n=80) AND urgency (83%→90%, p=0.039, n=100); next: model-score calibration + FR/ES/IT strata</a:t>
-            </a:r>
-            <a:endParaRPr lang="en-US" sz="1300" dirty="0"/>
-          </a:p>
-          <a:p>
-            <a:pPr marL="342900" indent="-342900">
-              <a:spcAft>
-                <a:spcPts val="800"/>
-              </a:spcAft>
-              <a:buSzPct val="100000"/>
-              <a:buChar char="•"/>
-            </a:pPr>
-            <a:r>
-              <a:rPr lang="en-US" sz="1300" dirty="0">
-                <a:solidFill>
-                  <a:srgbClr val="1A1A2E"/>
-                </a:solidFill>
-                <a:latin typeface="Calibri" pitchFamily="34" charset="0"/>
-                <a:ea typeface="Calibri" pitchFamily="34" charset="-122"/>
-                <a:cs typeface="Calibri" pitchFamily="34" charset="-120"/>
-              </a:rPr>
-              <a:t>③ Connector parity + broader pulls</a:t>
-            </a:r>
-            <a:endParaRPr lang="en-US" sz="1300" dirty="0"/>
-          </a:p>
-          <a:p>
-            <a:pPr marL="342900" indent="-342900">
-              <a:spcAft>
-                <a:spcPts val="800"/>
-              </a:spcAft>
-              <a:buSzPct val="100000"/>
-              <a:buChar char="•"/>
-            </a:pPr>
-            <a:r>
-              <a:rPr lang="en-US" sz="1300" dirty="0">
-                <a:solidFill>
-                  <a:srgbClr val="1A1A2E"/>
-                </a:solidFill>
-                <a:latin typeface="Calibri" pitchFamily="34" charset="0"/>
-                <a:ea typeface="Calibri" pitchFamily="34" charset="-122"/>
-                <a:cs typeface="Calibri" pitchFamily="34" charset="-120"/>
-              </a:rPr>
-              <a:t>④ Standing fairness monitoring of routing across segments and languages</a:t>
+              <a:rPr lang="en-US" sz="1300" i="1" dirty="0">
+                <a:solidFill>
+                  <a:srgbClr val="5A6478"/>
+                </a:solidFill>
+                <a:latin typeface="Calibri" pitchFamily="34" charset="0"/>
+                <a:ea typeface="Calibri" pitchFamily="34" charset="-122"/>
+                <a:cs typeface="Calibri" pitchFamily="34" charset="-120"/>
+              </a:rPr>
+              <a:t>A claim's status is stated once, in one place, and the chapters must agree with it. This is the discipline that keeps a design-science thesis honest when the artifact is also a company — and it is exactly what the August run broke and I had to repair: three rows above changed status, so six locations in the manuscript disagreed with this matrix until this week.</a:t>
             </a:r>
             <a:endParaRPr lang="en-US" sz="1300" dirty="0"/>
           </a:p>
@@ -10199,13 +11963,6 @@
 <file path=ppt/slides/slide18.xml><?xml version="1.0" encoding="utf-8"?>
 <p:sld xmlns:a="http://schemas.openxmlformats.org/drawingml/2006/main" xmlns:r="http://schemas.openxmlformats.org/officeDocument/2006/relationships" xmlns:p="http://schemas.openxmlformats.org/presentationml/2006/main">
   <p:cSld name="Slide 18">
-    <p:bg>
-      <p:bgPr>
-        <a:solidFill>
-          <a:srgbClr val="1E2761"/>
-        </a:solidFill>
-      </p:bgPr>
-    </p:bg>
     <p:spTree>
       <p:nvGrpSpPr>
         <p:cNvPr id="1" name=""/>
@@ -10228,8 +11985,8 @@
         </p:nvSpPr>
         <p:spPr>
           <a:xfrm>
-            <a:off x="822960" y="502920"/>
-            <a:ext cx="10515600" cy="731520"/>
+            <a:off x="548640" y="320040"/>
+            <a:ext cx="11064240" cy="777240"/>
           </a:xfrm>
           <a:prstGeom prst="rect">
             <a:avLst/>
@@ -10245,52 +12002,332 @@
               <a:buNone/>
             </a:pPr>
             <a:r>
-              <a:rPr lang="en-US" sz="3600" b="1" dirty="0">
-                <a:solidFill>
-                  <a:srgbClr val="FFFFFF"/>
+              <a:rPr lang="en-US" sz="3200" b="1" dirty="0">
+                <a:solidFill>
+                  <a:srgbClr val="1A1A2E"/>
                 </a:solidFill>
                 <a:latin typeface="Cambria" pitchFamily="34" charset="0"/>
                 <a:ea typeface="Cambria" pitchFamily="34" charset="-122"/>
                 <a:cs typeface="Cambria" pitchFamily="34" charset="-120"/>
               </a:rPr>
-              <a:t>Contributions</a:t>
-            </a:r>
-            <a:endParaRPr lang="en-US" sz="3600" dirty="0"/>
-          </a:p>
-        </p:txBody>
-      </p:sp>
-      <p:sp>
-        <p:nvSpPr>
-          <p:cNvPr id="3" name="Shape 1"/>
-          <p:cNvSpPr/>
-          <p:nvPr/>
-        </p:nvSpPr>
-        <p:spPr>
-          <a:xfrm>
-            <a:off x="822960" y="1554480"/>
-            <a:ext cx="5212080" cy="1783080"/>
+              <a:t>Where this sits (August 2026)</a:t>
+            </a:r>
+            <a:endParaRPr lang="en-US" sz="3200" dirty="0"/>
+          </a:p>
+        </p:txBody>
+      </p:sp>
+      <p:sp>
+        <p:nvSpPr>
+          <p:cNvPr id="3" name="Text 1"/>
+          <p:cNvSpPr/>
+          <p:nvPr/>
+        </p:nvSpPr>
+        <p:spPr>
+          <a:xfrm>
+            <a:off x="548640" y="987552"/>
+            <a:ext cx="11064240" cy="365760"/>
+          </a:xfrm>
+          <a:prstGeom prst="rect">
+            <a:avLst/>
+          </a:prstGeom>
+          <a:noFill/>
+          <a:ln/>
+        </p:spPr>
+        <p:txBody>
+          <a:bodyPr wrap="square" rtlCol="0" anchor="ctr"/>
+          <a:lstStyle/>
+          <a:p>
+            <a:pPr indent="0" marL="0">
+              <a:buNone/>
+            </a:pPr>
+            <a:r>
+              <a:rPr lang="en-US" sz="1400" i="1" dirty="0">
+                <a:solidFill>
+                  <a:srgbClr val="5A6478"/>
+                </a:solidFill>
+                <a:latin typeface="Calibri" pitchFamily="34" charset="0"/>
+                <a:ea typeface="Calibri" pitchFamily="34" charset="-122"/>
+                <a:cs typeface="Calibri" pitchFamily="34" charset="-120"/>
+              </a:rPr>
+              <a:t>No single differentiator survives — the contribution is the combination</a:t>
+            </a:r>
+            <a:endParaRPr lang="en-US" sz="1400" dirty="0"/>
+          </a:p>
+        </p:txBody>
+      </p:sp>
+      <p:sp>
+        <p:nvSpPr>
+          <p:cNvPr id="4" name="Shape 2"/>
+          <p:cNvSpPr/>
+          <p:nvPr/>
+        </p:nvSpPr>
+        <p:spPr>
+          <a:xfrm>
+            <a:off x="10424160" y="411480"/>
+            <a:ext cx="292608" cy="292608"/>
+          </a:xfrm>
+          <a:prstGeom prst="ellipse">
+            <a:avLst/>
+          </a:prstGeom>
+          <a:solidFill>
+            <a:srgbClr val="CADCFC"/>
+          </a:solidFill>
+          <a:ln/>
+        </p:spPr>
+      </p:sp>
+      <p:sp>
+        <p:nvSpPr>
+          <p:cNvPr id="5" name="Text 3"/>
+          <p:cNvSpPr/>
+          <p:nvPr/>
+        </p:nvSpPr>
+        <p:spPr>
+          <a:xfrm>
+            <a:off x="10424160" y="395935"/>
+            <a:ext cx="292608" cy="310896"/>
+          </a:xfrm>
+          <a:prstGeom prst="rect">
+            <a:avLst/>
+          </a:prstGeom>
+          <a:noFill/>
+          <a:ln/>
+        </p:spPr>
+        <p:txBody>
+          <a:bodyPr wrap="square" lIns="0" tIns="0" rIns="0" bIns="0" rtlCol="0" anchor="ctr"/>
+          <a:lstStyle/>
+          <a:p>
+            <a:pPr algn="ctr" indent="0" marL="0">
+              <a:buNone/>
+            </a:pPr>
+            <a:r>
+              <a:rPr lang="en-US" sz="1100" b="1" dirty="0">
+                <a:solidFill>
+                  <a:srgbClr val="1E2761"/>
+                </a:solidFill>
+                <a:latin typeface="Calibri" pitchFamily="34" charset="0"/>
+                <a:ea typeface="Calibri" pitchFamily="34" charset="-122"/>
+                <a:cs typeface="Calibri" pitchFamily="34" charset="-120"/>
+              </a:rPr>
+              <a:t>S</a:t>
+            </a:r>
+            <a:endParaRPr lang="en-US" sz="1100" dirty="0"/>
+          </a:p>
+        </p:txBody>
+      </p:sp>
+      <p:sp>
+        <p:nvSpPr>
+          <p:cNvPr id="6" name="Shape 4"/>
+          <p:cNvSpPr/>
+          <p:nvPr/>
+        </p:nvSpPr>
+        <p:spPr>
+          <a:xfrm>
+            <a:off x="10808208" y="411480"/>
+            <a:ext cx="292608" cy="292608"/>
+          </a:xfrm>
+          <a:prstGeom prst="ellipse">
+            <a:avLst/>
+          </a:prstGeom>
+          <a:solidFill>
+            <a:srgbClr val="CADCFC"/>
+          </a:solidFill>
+          <a:ln/>
+        </p:spPr>
+      </p:sp>
+      <p:sp>
+        <p:nvSpPr>
+          <p:cNvPr id="7" name="Text 5"/>
+          <p:cNvSpPr/>
+          <p:nvPr/>
+        </p:nvSpPr>
+        <p:spPr>
+          <a:xfrm>
+            <a:off x="10808208" y="395935"/>
+            <a:ext cx="292608" cy="310896"/>
+          </a:xfrm>
+          <a:prstGeom prst="rect">
+            <a:avLst/>
+          </a:prstGeom>
+          <a:noFill/>
+          <a:ln/>
+        </p:spPr>
+        <p:txBody>
+          <a:bodyPr wrap="square" lIns="0" tIns="0" rIns="0" bIns="0" rtlCol="0" anchor="ctr"/>
+          <a:lstStyle/>
+          <a:p>
+            <a:pPr algn="ctr" indent="0" marL="0">
+              <a:buNone/>
+            </a:pPr>
+            <a:r>
+              <a:rPr lang="en-US" sz="1100" b="1" dirty="0">
+                <a:solidFill>
+                  <a:srgbClr val="1E2761"/>
+                </a:solidFill>
+                <a:latin typeface="Calibri" pitchFamily="34" charset="0"/>
+                <a:ea typeface="Calibri" pitchFamily="34" charset="-122"/>
+                <a:cs typeface="Calibri" pitchFamily="34" charset="-120"/>
+              </a:rPr>
+              <a:t>I</a:t>
+            </a:r>
+            <a:endParaRPr lang="en-US" sz="1100" dirty="0"/>
+          </a:p>
+        </p:txBody>
+      </p:sp>
+      <p:sp>
+        <p:nvSpPr>
+          <p:cNvPr id="8" name="Shape 6"/>
+          <p:cNvSpPr/>
+          <p:nvPr/>
+        </p:nvSpPr>
+        <p:spPr>
+          <a:xfrm>
+            <a:off x="11192256" y="411480"/>
+            <a:ext cx="292608" cy="292608"/>
+          </a:xfrm>
+          <a:prstGeom prst="ellipse">
+            <a:avLst/>
+          </a:prstGeom>
+          <a:solidFill>
+            <a:srgbClr val="1E2761"/>
+          </a:solidFill>
+          <a:ln/>
+        </p:spPr>
+      </p:sp>
+      <p:sp>
+        <p:nvSpPr>
+          <p:cNvPr id="9" name="Text 7"/>
+          <p:cNvSpPr/>
+          <p:nvPr/>
+        </p:nvSpPr>
+        <p:spPr>
+          <a:xfrm>
+            <a:off x="11192256" y="395935"/>
+            <a:ext cx="292608" cy="310896"/>
+          </a:xfrm>
+          <a:prstGeom prst="rect">
+            <a:avLst/>
+          </a:prstGeom>
+          <a:noFill/>
+          <a:ln/>
+        </p:spPr>
+        <p:txBody>
+          <a:bodyPr wrap="square" lIns="0" tIns="0" rIns="0" bIns="0" rtlCol="0" anchor="ctr"/>
+          <a:lstStyle/>
+          <a:p>
+            <a:pPr algn="ctr" indent="0" marL="0">
+              <a:buNone/>
+            </a:pPr>
+            <a:r>
+              <a:rPr lang="en-US" sz="1100" b="1" dirty="0">
+                <a:solidFill>
+                  <a:srgbClr val="FFFFFF"/>
+                </a:solidFill>
+                <a:latin typeface="Calibri" pitchFamily="34" charset="0"/>
+                <a:ea typeface="Calibri" pitchFamily="34" charset="-122"/>
+                <a:cs typeface="Calibri" pitchFamily="34" charset="-120"/>
+              </a:rPr>
+              <a:t>A</a:t>
+            </a:r>
+            <a:endParaRPr lang="en-US" sz="1100" dirty="0"/>
+          </a:p>
+        </p:txBody>
+      </p:sp>
+      <p:sp>
+        <p:nvSpPr>
+          <p:cNvPr id="10" name="Shape 8"/>
+          <p:cNvSpPr/>
+          <p:nvPr/>
+        </p:nvSpPr>
+        <p:spPr>
+          <a:xfrm>
+            <a:off x="11576304" y="411480"/>
+            <a:ext cx="292608" cy="292608"/>
+          </a:xfrm>
+          <a:prstGeom prst="ellipse">
+            <a:avLst/>
+          </a:prstGeom>
+          <a:solidFill>
+            <a:srgbClr val="CADCFC"/>
+          </a:solidFill>
+          <a:ln/>
+        </p:spPr>
+      </p:sp>
+      <p:sp>
+        <p:nvSpPr>
+          <p:cNvPr id="11" name="Text 9"/>
+          <p:cNvSpPr/>
+          <p:nvPr/>
+        </p:nvSpPr>
+        <p:spPr>
+          <a:xfrm>
+            <a:off x="11576304" y="395935"/>
+            <a:ext cx="292608" cy="310896"/>
+          </a:xfrm>
+          <a:prstGeom prst="rect">
+            <a:avLst/>
+          </a:prstGeom>
+          <a:noFill/>
+          <a:ln/>
+        </p:spPr>
+        <p:txBody>
+          <a:bodyPr wrap="square" lIns="0" tIns="0" rIns="0" bIns="0" rtlCol="0" anchor="ctr"/>
+          <a:lstStyle/>
+          <a:p>
+            <a:pPr algn="ctr" indent="0" marL="0">
+              <a:buNone/>
+            </a:pPr>
+            <a:r>
+              <a:rPr lang="en-US" sz="1100" b="1" dirty="0">
+                <a:solidFill>
+                  <a:srgbClr val="1E2761"/>
+                </a:solidFill>
+                <a:latin typeface="Calibri" pitchFamily="34" charset="0"/>
+                <a:ea typeface="Calibri" pitchFamily="34" charset="-122"/>
+                <a:cs typeface="Calibri" pitchFamily="34" charset="-120"/>
+              </a:rPr>
+              <a:t>L</a:t>
+            </a:r>
+            <a:endParaRPr lang="en-US" sz="1100" dirty="0"/>
+          </a:p>
+        </p:txBody>
+      </p:sp>
+      <p:sp>
+        <p:nvSpPr>
+          <p:cNvPr id="12" name="Shape 10"/>
+          <p:cNvSpPr/>
+          <p:nvPr/>
+        </p:nvSpPr>
+        <p:spPr>
+          <a:xfrm>
+            <a:off x="548640" y="1600200"/>
+            <a:ext cx="6035040" cy="987552"/>
           </a:xfrm>
           <a:prstGeom prst="roundRect">
             <a:avLst>
-              <a:gd name="adj" fmla="val 3077"/>
+              <a:gd name="adj" fmla="val 5556"/>
             </a:avLst>
           </a:prstGeom>
           <a:solidFill>
-            <a:srgbClr val="2A3575"/>
+            <a:srgbClr val="F4F7FC"/>
           </a:solidFill>
-          <a:ln/>
-        </p:spPr>
-      </p:sp>
-      <p:sp>
-        <p:nvSpPr>
-          <p:cNvPr id="4" name="Text 2"/>
-          <p:cNvSpPr/>
-          <p:nvPr/>
-        </p:nvSpPr>
-        <p:spPr>
-          <a:xfrm>
-            <a:off x="1024128" y="1691640"/>
-            <a:ext cx="4800600" cy="365760"/>
+          <a:ln w="12700">
+            <a:solidFill>
+              <a:srgbClr val="CADCFC"/>
+            </a:solidFill>
+            <a:prstDash val="solid"/>
+          </a:ln>
+        </p:spPr>
+      </p:sp>
+      <p:sp>
+        <p:nvSpPr>
+          <p:cNvPr id="13" name="Text 11"/>
+          <p:cNvSpPr/>
+          <p:nvPr/>
+        </p:nvSpPr>
+        <p:spPr>
+          <a:xfrm>
+            <a:off x="685800" y="1691640"/>
+            <a:ext cx="5760720" cy="292608"/>
           </a:xfrm>
           <a:prstGeom prst="rect">
             <a:avLst/>
@@ -10306,30 +12343,30 @@
               <a:buNone/>
             </a:pPr>
             <a:r>
-              <a:rPr lang="en-US" sz="1600" b="1" dirty="0">
-                <a:solidFill>
-                  <a:srgbClr val="02C39A"/>
-                </a:solidFill>
-                <a:latin typeface="Calibri" pitchFamily="34" charset="0"/>
-                <a:ea typeface="Calibri" pitchFamily="34" charset="-122"/>
-                <a:cs typeface="Calibri" pitchFamily="34" charset="-120"/>
-              </a:rPr>
-              <a:t>A working artifact</a:t>
-            </a:r>
-            <a:endParaRPr lang="en-US" sz="1600" dirty="0"/>
-          </a:p>
-        </p:txBody>
-      </p:sp>
-      <p:sp>
-        <p:nvSpPr>
-          <p:cNvPr id="5" name="Text 3"/>
-          <p:cNvSpPr/>
-          <p:nvPr/>
-        </p:nvSpPr>
-        <p:spPr>
-          <a:xfrm>
-            <a:off x="1024128" y="2084832"/>
-            <a:ext cx="4800600" cy="1143000"/>
+              <a:rPr lang="en-US" sz="1350" b="1" dirty="0">
+                <a:solidFill>
+                  <a:srgbClr val="1E2761"/>
+                </a:solidFill>
+                <a:latin typeface="Calibri" pitchFamily="34" charset="0"/>
+                <a:ea typeface="Calibri" pitchFamily="34" charset="-122"/>
+                <a:cs typeface="Calibri" pitchFamily="34" charset="-120"/>
+              </a:rPr>
+              <a:t>Amplitude</a:t>
+            </a:r>
+            <a:endParaRPr lang="en-US" sz="1350" dirty="0"/>
+          </a:p>
+        </p:txBody>
+      </p:sp>
+      <p:sp>
+        <p:nvSpPr>
+          <p:cNvPr id="14" name="Text 12"/>
+          <p:cNvSpPr/>
+          <p:nvPr/>
+        </p:nvSpPr>
+        <p:spPr>
+          <a:xfrm>
+            <a:off x="685800" y="1984248"/>
+            <a:ext cx="5760720" cy="512064"/>
           </a:xfrm>
           <a:prstGeom prst="rect">
             <a:avLst/>
@@ -10345,52 +12382,57 @@
               <a:buNone/>
             </a:pPr>
             <a:r>
-              <a:rPr lang="en-US" sz="1300" dirty="0">
-                <a:solidFill>
-                  <a:srgbClr val="FFFFFF"/>
-                </a:solidFill>
-                <a:latin typeface="Calibri" pitchFamily="34" charset="0"/>
-                <a:ea typeface="Calibri" pitchFamily="34" charset="-122"/>
-                <a:cs typeface="Calibri" pitchFamily="34" charset="-120"/>
-              </a:rPr>
-              <a:t>the full governed loop — signal to measured outcome to reusable learning — running end to end, in production, with real external writes</a:t>
-            </a:r>
-            <a:endParaRPr lang="en-US" sz="1300" dirty="0"/>
-          </a:p>
-        </p:txBody>
-      </p:sp>
-      <p:sp>
-        <p:nvSpPr>
-          <p:cNvPr id="6" name="Shape 4"/>
-          <p:cNvSpPr/>
-          <p:nvPr/>
-        </p:nvSpPr>
-        <p:spPr>
-          <a:xfrm>
-            <a:off x="6309360" y="1554480"/>
-            <a:ext cx="5212080" cy="1783080"/>
+              <a:rPr lang="en-US" sz="1150" dirty="0">
+                <a:solidFill>
+                  <a:srgbClr val="1A1A2E"/>
+                </a:solidFill>
+                <a:latin typeface="Calibri" pitchFamily="34" charset="0"/>
+                <a:ea typeface="Calibri" pitchFamily="34" charset="-122"/>
+                <a:cs typeface="Calibri" pitchFamily="34" charset="-120"/>
+              </a:rPr>
+              <a:t>ties feedback to behavioural/revenue data it owns — recommends, doesn't contract closure</a:t>
+            </a:r>
+            <a:endParaRPr lang="en-US" sz="1150" dirty="0"/>
+          </a:p>
+        </p:txBody>
+      </p:sp>
+      <p:sp>
+        <p:nvSpPr>
+          <p:cNvPr id="15" name="Shape 13"/>
+          <p:cNvSpPr/>
+          <p:nvPr/>
+        </p:nvSpPr>
+        <p:spPr>
+          <a:xfrm>
+            <a:off x="548640" y="2715768"/>
+            <a:ext cx="6035040" cy="987552"/>
           </a:xfrm>
           <a:prstGeom prst="roundRect">
             <a:avLst>
-              <a:gd name="adj" fmla="val 3077"/>
+              <a:gd name="adj" fmla="val 5556"/>
             </a:avLst>
           </a:prstGeom>
           <a:solidFill>
-            <a:srgbClr val="2A3575"/>
+            <a:srgbClr val="F4F7FC"/>
           </a:solidFill>
-          <a:ln/>
-        </p:spPr>
-      </p:sp>
-      <p:sp>
-        <p:nvSpPr>
-          <p:cNvPr id="7" name="Text 5"/>
-          <p:cNvSpPr/>
-          <p:nvPr/>
-        </p:nvSpPr>
-        <p:spPr>
-          <a:xfrm>
-            <a:off x="6510528" y="1691640"/>
-            <a:ext cx="4800600" cy="365760"/>
+          <a:ln w="12700">
+            <a:solidFill>
+              <a:srgbClr val="CADCFC"/>
+            </a:solidFill>
+            <a:prstDash val="solid"/>
+          </a:ln>
+        </p:spPr>
+      </p:sp>
+      <p:sp>
+        <p:nvSpPr>
+          <p:cNvPr id="16" name="Text 14"/>
+          <p:cNvSpPr/>
+          <p:nvPr/>
+        </p:nvSpPr>
+        <p:spPr>
+          <a:xfrm>
+            <a:off x="685800" y="2807208"/>
+            <a:ext cx="5760720" cy="292608"/>
           </a:xfrm>
           <a:prstGeom prst="rect">
             <a:avLst/>
@@ -10406,30 +12448,30 @@
               <a:buNone/>
             </a:pPr>
             <a:r>
-              <a:rPr lang="en-US" sz="1600" b="1" dirty="0">
-                <a:solidFill>
-                  <a:srgbClr val="02C39A"/>
-                </a:solidFill>
-                <a:latin typeface="Calibri" pitchFamily="34" charset="0"/>
-                <a:ea typeface="Calibri" pitchFamily="34" charset="-122"/>
-                <a:cs typeface="Calibri" pitchFamily="34" charset="-120"/>
-              </a:rPr>
-              <a:t>Six design principles</a:t>
-            </a:r>
-            <a:endParaRPr lang="en-US" sz="1600" dirty="0"/>
-          </a:p>
-        </p:txBody>
-      </p:sp>
-      <p:sp>
-        <p:nvSpPr>
-          <p:cNvPr id="8" name="Text 6"/>
-          <p:cNvSpPr/>
-          <p:nvPr/>
-        </p:nvSpPr>
-        <p:spPr>
-          <a:xfrm>
-            <a:off x="6510528" y="2084832"/>
-            <a:ext cx="4800600" cy="1143000"/>
+              <a:rPr lang="en-US" sz="1350" b="1" dirty="0">
+                <a:solidFill>
+                  <a:srgbClr val="1E2761"/>
+                </a:solidFill>
+                <a:latin typeface="Calibri" pitchFamily="34" charset="0"/>
+                <a:ea typeface="Calibri" pitchFamily="34" charset="-122"/>
+                <a:cs typeface="Calibri" pitchFamily="34" charset="-120"/>
+              </a:rPr>
+              <a:t>Medallia + Ada</a:t>
+            </a:r>
+            <a:endParaRPr lang="en-US" sz="1350" dirty="0"/>
+          </a:p>
+        </p:txBody>
+      </p:sp>
+      <p:sp>
+        <p:nvSpPr>
+          <p:cNvPr id="17" name="Text 15"/>
+          <p:cNvSpPr/>
+          <p:nvPr/>
+        </p:nvSpPr>
+        <p:spPr>
+          <a:xfrm>
+            <a:off x="685800" y="3099816"/>
+            <a:ext cx="5760720" cy="512064"/>
           </a:xfrm>
           <a:prstGeom prst="rect">
             <a:avLst/>
@@ -10445,52 +12487,57 @@
               <a:buNone/>
             </a:pPr>
             <a:r>
-              <a:rPr lang="en-US" sz="1300" dirty="0">
-                <a:solidFill>
-                  <a:srgbClr val="FFFFFF"/>
-                </a:solidFill>
-                <a:latin typeface="Calibri" pitchFamily="34" charset="0"/>
-                <a:ea typeface="Calibri" pitchFamily="34" charset="-122"/>
-                <a:cs typeface="Calibri" pitchFamily="34" charset="-120"/>
-              </a:rPr>
-              <a:t>each with its cost: closure as contract, perishable memory, set-based severity, graduated authority, bounded model, adaptation by configuration</a:t>
-            </a:r>
-            <a:endParaRPr lang="en-US" sz="1300" dirty="0"/>
-          </a:p>
-        </p:txBody>
-      </p:sp>
-      <p:sp>
-        <p:nvSpPr>
-          <p:cNvPr id="9" name="Shape 7"/>
-          <p:cNvSpPr/>
-          <p:nvPr/>
-        </p:nvSpPr>
-        <p:spPr>
-          <a:xfrm>
-            <a:off x="822960" y="3520440"/>
-            <a:ext cx="5212080" cy="1783080"/>
+              <a:rPr lang="en-US" sz="1150" dirty="0">
+                <a:solidFill>
+                  <a:srgbClr val="1A1A2E"/>
+                </a:solidFill>
+                <a:latin typeface="Calibri" pitchFamily="34" charset="0"/>
+                <a:ea typeface="Calibri" pitchFamily="34" charset="-122"/>
+                <a:cs typeface="Calibri" pitchFamily="34" charset="-120"/>
+              </a:rPr>
+              <a:t>executes policy-aware workflows from insight — enterprise scale, published gains</a:t>
+            </a:r>
+            <a:endParaRPr lang="en-US" sz="1150" dirty="0"/>
+          </a:p>
+        </p:txBody>
+      </p:sp>
+      <p:sp>
+        <p:nvSpPr>
+          <p:cNvPr id="18" name="Shape 16"/>
+          <p:cNvSpPr/>
+          <p:nvPr/>
+        </p:nvSpPr>
+        <p:spPr>
+          <a:xfrm>
+            <a:off x="548640" y="3831336"/>
+            <a:ext cx="6035040" cy="987552"/>
           </a:xfrm>
           <a:prstGeom prst="roundRect">
             <a:avLst>
-              <a:gd name="adj" fmla="val 3077"/>
+              <a:gd name="adj" fmla="val 5556"/>
             </a:avLst>
           </a:prstGeom>
           <a:solidFill>
-            <a:srgbClr val="2A3575"/>
+            <a:srgbClr val="F4F7FC"/>
           </a:solidFill>
-          <a:ln/>
-        </p:spPr>
-      </p:sp>
-      <p:sp>
-        <p:nvSpPr>
-          <p:cNvPr id="10" name="Text 8"/>
-          <p:cNvSpPr/>
-          <p:nvPr/>
-        </p:nvSpPr>
-        <p:spPr>
-          <a:xfrm>
-            <a:off x="1024128" y="3657600"/>
-            <a:ext cx="4800600" cy="365760"/>
+          <a:ln w="12700">
+            <a:solidFill>
+              <a:srgbClr val="CADCFC"/>
+            </a:solidFill>
+            <a:prstDash val="solid"/>
+          </a:ln>
+        </p:spPr>
+      </p:sp>
+      <p:sp>
+        <p:nvSpPr>
+          <p:cNvPr id="19" name="Text 17"/>
+          <p:cNvSpPr/>
+          <p:nvPr/>
+        </p:nvSpPr>
+        <p:spPr>
+          <a:xfrm>
+            <a:off x="685800" y="3922776"/>
+            <a:ext cx="5760720" cy="292608"/>
           </a:xfrm>
           <a:prstGeom prst="rect">
             <a:avLst/>
@@ -10506,30 +12553,30 @@
               <a:buNone/>
             </a:pPr>
             <a:r>
-              <a:rPr lang="en-US" sz="1600" b="1" dirty="0">
-                <a:solidFill>
-                  <a:srgbClr val="02C39A"/>
-                </a:solidFill>
-                <a:latin typeface="Calibri" pitchFamily="34" charset="0"/>
-                <a:ea typeface="Calibri" pitchFamily="34" charset="-122"/>
-                <a:cs typeface="Calibri" pitchFamily="34" charset="-120"/>
-              </a:rPr>
-              <a:t>A real-data evaluation</a:t>
-            </a:r>
-            <a:endParaRPr lang="en-US" sz="1600" dirty="0"/>
-          </a:p>
-        </p:txBody>
-      </p:sp>
-      <p:sp>
-        <p:nvSpPr>
-          <p:cNvPr id="11" name="Text 9"/>
-          <p:cNvSpPr/>
-          <p:nvPr/>
-        </p:nvSpPr>
-        <p:spPr>
-          <a:xfrm>
-            <a:off x="1024128" y="4050792"/>
-            <a:ext cx="4800600" cy="1143000"/>
+              <a:rPr lang="en-US" sz="1350" b="1" dirty="0">
+                <a:solidFill>
+                  <a:srgbClr val="1E2761"/>
+                </a:solidFill>
+                <a:latin typeface="Calibri" pitchFamily="34" charset="0"/>
+                <a:ea typeface="Calibri" pitchFamily="34" charset="-122"/>
+                <a:cs typeface="Calibri" pitchFamily="34" charset="-120"/>
+              </a:rPr>
+              <a:t>Sprinklr</a:t>
+            </a:r>
+            <a:endParaRPr lang="en-US" sz="1350" dirty="0"/>
+          </a:p>
+        </p:txBody>
+      </p:sp>
+      <p:sp>
+        <p:nvSpPr>
+          <p:cNvPr id="20" name="Text 18"/>
+          <p:cNvSpPr/>
+          <p:nvPr/>
+        </p:nvSpPr>
+        <p:spPr>
+          <a:xfrm>
+            <a:off x="685800" y="4215384"/>
+            <a:ext cx="5760720" cy="512064"/>
           </a:xfrm>
           <a:prstGeom prst="rect">
             <a:avLst/>
@@ -10545,52 +12592,57 @@
               <a:buNone/>
             </a:pPr>
             <a:r>
-              <a:rPr lang="en-US" sz="1300" dirty="0">
-                <a:solidFill>
-                  <a:srgbClr val="FFFFFF"/>
-                </a:solidFill>
-                <a:latin typeface="Calibri" pitchFamily="34" charset="0"/>
-                <a:ea typeface="Calibri" pitchFamily="34" charset="-122"/>
-                <a:cs typeface="Calibri" pitchFamily="34" charset="-120"/>
-              </a:rPr>
-              <a:t>188 multilingual signals, two independent gold standards; triage is method-dependent and the loop's precondition is satisfiable</a:t>
-            </a:r>
-            <a:endParaRPr lang="en-US" sz="1300" dirty="0"/>
-          </a:p>
-        </p:txBody>
-      </p:sp>
-      <p:sp>
-        <p:nvSpPr>
-          <p:cNvPr id="12" name="Shape 10"/>
-          <p:cNvSpPr/>
-          <p:nvPr/>
-        </p:nvSpPr>
-        <p:spPr>
-          <a:xfrm>
-            <a:off x="6309360" y="3520440"/>
-            <a:ext cx="5212080" cy="1783080"/>
+              <a:rPr lang="en-US" sz="1150" dirty="0">
+                <a:solidFill>
+                  <a:srgbClr val="1A1A2E"/>
+                </a:solidFill>
+                <a:latin typeface="Calibri" pitchFamily="34" charset="0"/>
+                <a:ea typeface="Calibri" pitchFamily="34" charset="-122"/>
+                <a:cs typeface="Calibri" pitchFamily="34" charset="-120"/>
+              </a:rPr>
+              <a:t>audit trails &amp; agent evaluation — governance artefacts at enterprise level</a:t>
+            </a:r>
+            <a:endParaRPr lang="en-US" sz="1150" dirty="0"/>
+          </a:p>
+        </p:txBody>
+      </p:sp>
+      <p:sp>
+        <p:nvSpPr>
+          <p:cNvPr id="21" name="Shape 19"/>
+          <p:cNvSpPr/>
+          <p:nvPr/>
+        </p:nvSpPr>
+        <p:spPr>
+          <a:xfrm>
+            <a:off x="548640" y="4946904"/>
+            <a:ext cx="6035040" cy="987552"/>
           </a:xfrm>
           <a:prstGeom prst="roundRect">
             <a:avLst>
-              <a:gd name="adj" fmla="val 3077"/>
+              <a:gd name="adj" fmla="val 5556"/>
             </a:avLst>
           </a:prstGeom>
           <a:solidFill>
-            <a:srgbClr val="2A3575"/>
+            <a:srgbClr val="F4F7FC"/>
           </a:solidFill>
-          <a:ln/>
-        </p:spPr>
-      </p:sp>
-      <p:sp>
-        <p:nvSpPr>
-          <p:cNvPr id="13" name="Text 11"/>
-          <p:cNvSpPr/>
-          <p:nvPr/>
-        </p:nvSpPr>
-        <p:spPr>
-          <a:xfrm>
-            <a:off x="6510528" y="3657600"/>
-            <a:ext cx="4800600" cy="365760"/>
+          <a:ln w="12700">
+            <a:solidFill>
+              <a:srgbClr val="CADCFC"/>
+            </a:solidFill>
+            <a:prstDash val="solid"/>
+          </a:ln>
+        </p:spPr>
+      </p:sp>
+      <p:sp>
+        <p:nvSpPr>
+          <p:cNvPr id="22" name="Text 20"/>
+          <p:cNvSpPr/>
+          <p:nvPr/>
+        </p:nvSpPr>
+        <p:spPr>
+          <a:xfrm>
+            <a:off x="685800" y="5038344"/>
+            <a:ext cx="5760720" cy="292608"/>
           </a:xfrm>
           <a:prstGeom prst="rect">
             <a:avLst/>
@@ -10606,30 +12658,30 @@
               <a:buNone/>
             </a:pPr>
             <a:r>
-              <a:rPr lang="en-US" sz="1600" b="1" dirty="0">
-                <a:solidFill>
-                  <a:srgbClr val="02C39A"/>
-                </a:solidFill>
-                <a:latin typeface="Calibri" pitchFamily="34" charset="0"/>
-                <a:ea typeface="Calibri" pitchFamily="34" charset="-122"/>
-                <a:cs typeface="Calibri" pitchFamily="34" charset="-120"/>
-              </a:rPr>
-              <a:t>Integral Responsible AI</a:t>
-            </a:r>
-            <a:endParaRPr lang="en-US" sz="1600" dirty="0"/>
-          </a:p>
-        </p:txBody>
-      </p:sp>
-      <p:sp>
-        <p:nvSpPr>
-          <p:cNvPr id="14" name="Text 12"/>
-          <p:cNvSpPr/>
-          <p:nvPr/>
-        </p:nvSpPr>
-        <p:spPr>
-          <a:xfrm>
-            <a:off x="6510528" y="4050792"/>
-            <a:ext cx="4800600" cy="1143000"/>
+              <a:rPr lang="en-US" sz="1350" b="1" dirty="0">
+                <a:solidFill>
+                  <a:srgbClr val="1E2761"/>
+                </a:solidFill>
+                <a:latin typeface="Calibri" pitchFamily="34" charset="0"/>
+                <a:ea typeface="Calibri" pitchFamily="34" charset="-122"/>
+                <a:cs typeface="Calibri" pitchFamily="34" charset="-120"/>
+              </a:rPr>
+              <a:t>Dovetail / Enterpret</a:t>
+            </a:r>
+            <a:endParaRPr lang="en-US" sz="1350" dirty="0"/>
+          </a:p>
+        </p:txBody>
+      </p:sp>
+      <p:sp>
+        <p:nvSpPr>
+          <p:cNvPr id="23" name="Text 21"/>
+          <p:cNvSpPr/>
+          <p:nvPr/>
+        </p:nvSpPr>
+        <p:spPr>
+          <a:xfrm>
+            <a:off x="685800" y="5330952"/>
+            <a:ext cx="5760720" cy="512064"/>
           </a:xfrm>
           <a:prstGeom prst="rect">
             <a:avLst/>
@@ -10645,7 +12697,107 @@
               <a:buNone/>
             </a:pPr>
             <a:r>
-              <a:rPr lang="en-US" sz="1300" dirty="0">
+              <a:rPr lang="en-US" sz="1150" dirty="0">
+                <a:solidFill>
+                  <a:srgbClr val="1A1A2E"/>
+                </a:solidFill>
+                <a:latin typeface="Calibri" pitchFamily="34" charset="0"/>
+                <a:ea typeface="Calibri" pitchFamily="34" charset="-122"/>
+                <a:cs typeface="Calibri" pitchFamily="34" charset="-120"/>
+              </a:rPr>
+              <a:t>SMB agents "trigger real work" / MCP breadth — no approval gates, no outcome measurement (verified)</a:t>
+            </a:r>
+            <a:endParaRPr lang="en-US" sz="1150" dirty="0"/>
+          </a:p>
+        </p:txBody>
+      </p:sp>
+      <p:sp>
+        <p:nvSpPr>
+          <p:cNvPr id="24" name="Shape 22"/>
+          <p:cNvSpPr/>
+          <p:nvPr/>
+        </p:nvSpPr>
+        <p:spPr>
+          <a:xfrm>
+            <a:off x="6858000" y="1600200"/>
+            <a:ext cx="4754880" cy="3108960"/>
+          </a:xfrm>
+          <a:prstGeom prst="roundRect">
+            <a:avLst>
+              <a:gd name="adj" fmla="val 1765"/>
+            </a:avLst>
+          </a:prstGeom>
+          <a:solidFill>
+            <a:srgbClr val="1E2761"/>
+          </a:solidFill>
+          <a:ln/>
+        </p:spPr>
+      </p:sp>
+      <p:sp>
+        <p:nvSpPr>
+          <p:cNvPr id="25" name="Text 23"/>
+          <p:cNvSpPr/>
+          <p:nvPr/>
+        </p:nvSpPr>
+        <p:spPr>
+          <a:xfrm>
+            <a:off x="7086600" y="1783080"/>
+            <a:ext cx="4297680" cy="365760"/>
+          </a:xfrm>
+          <a:prstGeom prst="rect">
+            <a:avLst/>
+          </a:prstGeom>
+          <a:noFill/>
+          <a:ln/>
+        </p:spPr>
+        <p:txBody>
+          <a:bodyPr wrap="square" lIns="0" tIns="0" rIns="0" bIns="0" rtlCol="0" anchor="ctr"/>
+          <a:lstStyle/>
+          <a:p>
+            <a:pPr indent="0" marL="0">
+              <a:buNone/>
+            </a:pPr>
+            <a:r>
+              <a:rPr lang="en-US" sz="1500" b="1" dirty="0">
+                <a:solidFill>
+                  <a:srgbClr val="CADCFC"/>
+                </a:solidFill>
+                <a:latin typeface="Calibri" pitchFamily="34" charset="0"/>
+                <a:ea typeface="Calibri" pitchFamily="34" charset="-122"/>
+                <a:cs typeface="Calibri" pitchFamily="34" charset="-120"/>
+              </a:rPr>
+              <a:t>The unclaimed combination</a:t>
+            </a:r>
+            <a:endParaRPr lang="en-US" sz="1500" dirty="0"/>
+          </a:p>
+        </p:txBody>
+      </p:sp>
+      <p:sp>
+        <p:nvSpPr>
+          <p:cNvPr id="26" name="Text 24"/>
+          <p:cNvSpPr/>
+          <p:nvPr/>
+        </p:nvSpPr>
+        <p:spPr>
+          <a:xfrm>
+            <a:off x="7086600" y="2194560"/>
+            <a:ext cx="4297680" cy="2377440"/>
+          </a:xfrm>
+          <a:prstGeom prst="rect">
+            <a:avLst/>
+          </a:prstGeom>
+          <a:noFill/>
+          <a:ln/>
+        </p:spPr>
+        <p:txBody>
+          <a:bodyPr wrap="square" lIns="0" tIns="0" rIns="0" bIns="0" rtlCol="0" anchor="ctr"/>
+          <a:lstStyle/>
+          <a:p>
+            <a:pPr indent="0" marL="0">
+              <a:buNone/>
+            </a:pPr>
+            <a:r>
+              <a:rPr lang="en-US" sz="1450" dirty="0">
                 <a:solidFill>
                   <a:srgbClr val="FFFFFF"/>
                 </a:solidFill>
@@ -10653,22 +12805,156 @@
                 <a:ea typeface="Calibri" pitchFamily="34" charset="-122"/>
                 <a:cs typeface="Calibri" pitchFamily="34" charset="-120"/>
               </a:rPr>
-              <a:t>oversight designed beyond Art 14, transparency via Art 50(4), auditability that found its own gaps — governance as durable design commitment</a:t>
-            </a:r>
-            <a:endParaRPr lang="en-US" sz="1300" dirty="0"/>
-          </a:p>
-        </p:txBody>
-      </p:sp>
-      <p:sp>
-        <p:nvSpPr>
-          <p:cNvPr id="15" name="Text 13"/>
-          <p:cNvSpPr/>
-          <p:nvPr/>
-        </p:nvSpPr>
-        <p:spPr>
-          <a:xfrm>
-            <a:off x="822960" y="5623560"/>
-            <a:ext cx="10515600" cy="457200"/>
+              <a:t>Outcome contracts (verified closure)</a:t>
+            </a:r>
+            <a:endParaRPr lang="en-US" sz="1450" dirty="0"/>
+          </a:p>
+          <a:p>
+            <a:pPr indent="0" marL="0">
+              <a:buNone/>
+            </a:pPr>
+            <a:r>
+              <a:rPr lang="en-US" sz="1450" dirty="0">
+                <a:solidFill>
+                  <a:srgbClr val="FFFFFF"/>
+                </a:solidFill>
+                <a:latin typeface="Calibri" pitchFamily="34" charset="0"/>
+                <a:ea typeface="Calibri" pitchFamily="34" charset="-122"/>
+                <a:cs typeface="Calibri" pitchFamily="34" charset="-120"/>
+              </a:rPr>
+              <a:t>+ approval-gated cross-system action</a:t>
+            </a:r>
+            <a:endParaRPr lang="en-US" sz="1450" dirty="0"/>
+          </a:p>
+          <a:p>
+            <a:pPr indent="0" marL="0">
+              <a:buNone/>
+            </a:pPr>
+            <a:r>
+              <a:rPr lang="en-US" sz="1450" dirty="0">
+                <a:solidFill>
+                  <a:srgbClr val="FFFFFF"/>
+                </a:solidFill>
+                <a:latin typeface="Calibri" pitchFamily="34" charset="0"/>
+                <a:ea typeface="Calibri" pitchFamily="34" charset="-122"/>
+                <a:cs typeface="Calibri" pitchFamily="34" charset="-120"/>
+              </a:rPr>
+              <a:t>+ decaying learning memory</a:t>
+            </a:r>
+            <a:endParaRPr lang="en-US" sz="1450" dirty="0"/>
+          </a:p>
+          <a:p>
+            <a:pPr indent="0" marL="0">
+              <a:buNone/>
+            </a:pPr>
+            <a:r>
+              <a:rPr lang="en-US" sz="1450" dirty="0">
+                <a:solidFill>
+                  <a:srgbClr val="FFFFFF"/>
+                </a:solidFill>
+                <a:latin typeface="Calibri" pitchFamily="34" charset="0"/>
+                <a:ea typeface="Calibri" pitchFamily="34" charset="-122"/>
+                <a:cs typeface="Calibri" pitchFamily="34" charset="-120"/>
+              </a:rPr>
+              <a:t>+ EU-sovereign deployment</a:t>
+            </a:r>
+            <a:endParaRPr lang="en-US" sz="1450" dirty="0"/>
+          </a:p>
+          <a:p>
+            <a:pPr indent="0" marL="0">
+              <a:buNone/>
+            </a:pPr>
+            <a:r>
+              <a:rPr lang="en-US" sz="1450" dirty="0">
+                <a:solidFill>
+                  <a:srgbClr val="FFFFFF"/>
+                </a:solidFill>
+                <a:latin typeface="Calibri" pitchFamily="34" charset="0"/>
+                <a:ea typeface="Calibri" pitchFamily="34" charset="-122"/>
+                <a:cs typeface="Calibri" pitchFamily="34" charset="-120"/>
+              </a:rPr>
+              <a:t>+ accessible to 10–500-employee firms</a:t>
+            </a:r>
+            <a:endParaRPr lang="en-US" sz="1450" dirty="0"/>
+          </a:p>
+        </p:txBody>
+      </p:sp>
+      <p:sp>
+        <p:nvSpPr>
+          <p:cNvPr id="27" name="Shape 25"/>
+          <p:cNvSpPr/>
+          <p:nvPr/>
+        </p:nvSpPr>
+        <p:spPr>
+          <a:xfrm>
+            <a:off x="6858000" y="4892040"/>
+            <a:ext cx="4754880" cy="1371600"/>
+          </a:xfrm>
+          <a:prstGeom prst="roundRect">
+            <a:avLst>
+              <a:gd name="adj" fmla="val 4000"/>
+            </a:avLst>
+          </a:prstGeom>
+          <a:solidFill>
+            <a:srgbClr val="F4F7FC"/>
+          </a:solidFill>
+          <a:ln w="12700">
+            <a:solidFill>
+              <a:srgbClr val="CADCFC"/>
+            </a:solidFill>
+            <a:prstDash val="solid"/>
+          </a:ln>
+        </p:spPr>
+      </p:sp>
+      <p:sp>
+        <p:nvSpPr>
+          <p:cNvPr id="28" name="Text 26"/>
+          <p:cNvSpPr/>
+          <p:nvPr/>
+        </p:nvSpPr>
+        <p:spPr>
+          <a:xfrm>
+            <a:off x="7059168" y="5029200"/>
+            <a:ext cx="4389120" cy="1143000"/>
+          </a:xfrm>
+          <a:prstGeom prst="rect">
+            <a:avLst/>
+          </a:prstGeom>
+          <a:noFill/>
+          <a:ln/>
+        </p:spPr>
+        <p:txBody>
+          <a:bodyPr wrap="square" lIns="0" tIns="0" rIns="0" bIns="0" rtlCol="0" anchor="ctr"/>
+          <a:lstStyle/>
+          <a:p>
+            <a:pPr indent="0" marL="0">
+              <a:buNone/>
+            </a:pPr>
+            <a:r>
+              <a:rPr lang="en-US" sz="1250" dirty="0">
+                <a:solidFill>
+                  <a:srgbClr val="1A1A2E"/>
+                </a:solidFill>
+                <a:latin typeface="Calibri" pitchFamily="34" charset="0"/>
+                <a:ea typeface="Calibri" pitchFamily="34" charset="-122"/>
+                <a:cs typeface="Calibri" pitchFamily="34" charset="-120"/>
+              </a:rPr>
+              <a:t>Gartner (2025): &gt;40% of agentic-AI projects cancelled by 2027 — for unclear business value and inadequate risk controls. Exactly the two failure modes this design answers.</a:t>
+            </a:r>
+            <a:endParaRPr lang="en-US" sz="1250" dirty="0"/>
+          </a:p>
+        </p:txBody>
+      </p:sp>
+      <p:sp>
+        <p:nvSpPr>
+          <p:cNvPr id="29" name="Text 27"/>
+          <p:cNvSpPr/>
+          <p:nvPr/>
+        </p:nvSpPr>
+        <p:spPr>
+          <a:xfrm>
+            <a:off x="548640" y="6172200"/>
+            <a:ext cx="6035040" cy="548640"/>
           </a:xfrm>
           <a:prstGeom prst="rect">
             <a:avLst/>
@@ -10684,30 +12970,55 @@
               <a:buNone/>
             </a:pPr>
             <a:r>
-              <a:rPr lang="en-US" sz="1600" i="1" dirty="0">
-                <a:solidFill>
-                  <a:srgbClr val="CADCFC"/>
-                </a:solidFill>
-                <a:latin typeface="Calibri" pitchFamily="34" charset="0"/>
-                <a:ea typeface="Calibri" pitchFamily="34" charset="-122"/>
-                <a:cs typeface="Calibri" pitchFamily="34" charset="-120"/>
-              </a:rPr>
-              <a:t>Closing the loop and governing the closing are not in opposition — they are two halves of one well-designed workflow.</a:t>
-            </a:r>
-            <a:endParaRPr lang="en-US" sz="1600" dirty="0"/>
-          </a:p>
-        </p:txBody>
-      </p:sp>
-      <p:sp>
-        <p:nvSpPr>
-          <p:cNvPr id="16" name="Text 14"/>
-          <p:cNvSpPr/>
-          <p:nvPr/>
-        </p:nvSpPr>
-        <p:spPr>
-          <a:xfrm>
-            <a:off x="822960" y="6172200"/>
-            <a:ext cx="10515600" cy="457200"/>
+              <a:rPr lang="en-US" sz="1200" i="1" dirty="0">
+                <a:solidFill>
+                  <a:srgbClr val="5A6478"/>
+                </a:solidFill>
+                <a:latin typeface="Calibri" pitchFamily="34" charset="0"/>
+                <a:ea typeface="Calibri" pitchFamily="34" charset="-122"/>
+                <a:cs typeface="Calibri" pitchFamily="34" charset="-120"/>
+              </a:rPr>
+              <a:t>Forrester retired its CFM Wave (Q1 2026): insight is commoditised; the new axes are autonomous action and trust.</a:t>
+            </a:r>
+            <a:endParaRPr lang="en-US" sz="1200" dirty="0"/>
+          </a:p>
+        </p:txBody>
+      </p:sp>
+    </p:spTree>
+  </p:cSld>
+  <p:clrMapOvr>
+    <a:masterClrMapping/>
+  </p:clrMapOvr>
+</p:sld>
+</file>
+
+<file path=ppt/slides/slide19.xml><?xml version="1.0" encoding="utf-8"?>
+<p:sld xmlns:a="http://schemas.openxmlformats.org/drawingml/2006/main" xmlns:r="http://schemas.openxmlformats.org/officeDocument/2006/relationships" xmlns:p="http://schemas.openxmlformats.org/presentationml/2006/main">
+  <p:cSld name="Slide 19">
+    <p:spTree>
+      <p:nvGrpSpPr>
+        <p:cNvPr id="1" name=""/>
+        <p:cNvGrpSpPr/>
+        <p:nvPr/>
+      </p:nvGrpSpPr>
+      <p:grpSpPr>
+        <a:xfrm>
+          <a:off x="0" y="0"/>
+          <a:ext cx="0" cy="0"/>
+          <a:chOff x="0" y="0"/>
+          <a:chExt cx="0" cy="0"/>
+        </a:xfrm>
+      </p:grpSpPr>
+      <p:sp>
+        <p:nvSpPr>
+          <p:cNvPr id="2" name="Text 0"/>
+          <p:cNvSpPr/>
+          <p:nvPr/>
+        </p:nvSpPr>
+        <p:spPr>
+          <a:xfrm>
+            <a:off x="548640" y="320040"/>
+            <a:ext cx="11064240" cy="777240"/>
           </a:xfrm>
           <a:prstGeom prst="rect">
             <a:avLst/>
@@ -10723,17 +13034,624 @@
               <a:buNone/>
             </a:pPr>
             <a:r>
-              <a:rPr lang="en-US" sz="1800" b="1" dirty="0">
-                <a:solidFill>
-                  <a:srgbClr val="FFFFFF"/>
+              <a:rPr lang="en-US" sz="3200" b="1" dirty="0">
+                <a:solidFill>
+                  <a:srgbClr val="1A1A2E"/>
                 </a:solidFill>
                 <a:latin typeface="Cambria" pitchFamily="34" charset="0"/>
                 <a:ea typeface="Cambria" pitchFamily="34" charset="-122"/>
                 <a:cs typeface="Cambria" pitchFamily="34" charset="-120"/>
               </a:rPr>
-              <a:t>Thank you — questions welcome.</a:t>
-            </a:r>
-            <a:endParaRPr lang="en-US" sz="1800" dirty="0"/>
+              <a:t>Limitations and what comes next</a:t>
+            </a:r>
+            <a:endParaRPr lang="en-US" sz="3200" dirty="0"/>
+          </a:p>
+        </p:txBody>
+      </p:sp>
+      <p:sp>
+        <p:nvSpPr>
+          <p:cNvPr id="3" name="Text 1"/>
+          <p:cNvSpPr/>
+          <p:nvPr/>
+        </p:nvSpPr>
+        <p:spPr>
+          <a:xfrm>
+            <a:off x="548640" y="987552"/>
+            <a:ext cx="11064240" cy="365760"/>
+          </a:xfrm>
+          <a:prstGeom prst="rect">
+            <a:avLst/>
+          </a:prstGeom>
+          <a:noFill/>
+          <a:ln/>
+        </p:spPr>
+        <p:txBody>
+          <a:bodyPr wrap="square" rtlCol="0" anchor="ctr"/>
+          <a:lstStyle/>
+          <a:p>
+            <a:pPr indent="0" marL="0">
+              <a:buNone/>
+            </a:pPr>
+            <a:r>
+              <a:rPr lang="en-US" sz="1400" i="1" dirty="0">
+                <a:solidFill>
+                  <a:srgbClr val="5A6478"/>
+                </a:solidFill>
+                <a:latin typeface="Calibri" pitchFamily="34" charset="0"/>
+                <a:ea typeface="Calibri" pitchFamily="34" charset="-122"/>
+                <a:cs typeface="Calibri" pitchFamily="34" charset="-120"/>
+              </a:rPr>
+              <a:t>Bounded claims, and the one experiment that matters most</a:t>
+            </a:r>
+            <a:endParaRPr lang="en-US" sz="1400" dirty="0"/>
+          </a:p>
+        </p:txBody>
+      </p:sp>
+      <p:sp>
+        <p:nvSpPr>
+          <p:cNvPr id="4" name="Shape 2"/>
+          <p:cNvSpPr/>
+          <p:nvPr/>
+        </p:nvSpPr>
+        <p:spPr>
+          <a:xfrm>
+            <a:off x="10424160" y="411480"/>
+            <a:ext cx="292608" cy="292608"/>
+          </a:xfrm>
+          <a:prstGeom prst="ellipse">
+            <a:avLst/>
+          </a:prstGeom>
+          <a:solidFill>
+            <a:srgbClr val="CADCFC"/>
+          </a:solidFill>
+          <a:ln/>
+        </p:spPr>
+      </p:sp>
+      <p:sp>
+        <p:nvSpPr>
+          <p:cNvPr id="5" name="Text 3"/>
+          <p:cNvSpPr/>
+          <p:nvPr/>
+        </p:nvSpPr>
+        <p:spPr>
+          <a:xfrm>
+            <a:off x="10424160" y="395935"/>
+            <a:ext cx="292608" cy="310896"/>
+          </a:xfrm>
+          <a:prstGeom prst="rect">
+            <a:avLst/>
+          </a:prstGeom>
+          <a:noFill/>
+          <a:ln/>
+        </p:spPr>
+        <p:txBody>
+          <a:bodyPr wrap="square" lIns="0" tIns="0" rIns="0" bIns="0" rtlCol="0" anchor="ctr"/>
+          <a:lstStyle/>
+          <a:p>
+            <a:pPr algn="ctr" indent="0" marL="0">
+              <a:buNone/>
+            </a:pPr>
+            <a:r>
+              <a:rPr lang="en-US" sz="1100" b="1" dirty="0">
+                <a:solidFill>
+                  <a:srgbClr val="1E2761"/>
+                </a:solidFill>
+                <a:latin typeface="Calibri" pitchFamily="34" charset="0"/>
+                <a:ea typeface="Calibri" pitchFamily="34" charset="-122"/>
+                <a:cs typeface="Calibri" pitchFamily="34" charset="-120"/>
+              </a:rPr>
+              <a:t>S</a:t>
+            </a:r>
+            <a:endParaRPr lang="en-US" sz="1100" dirty="0"/>
+          </a:p>
+        </p:txBody>
+      </p:sp>
+      <p:sp>
+        <p:nvSpPr>
+          <p:cNvPr id="6" name="Shape 4"/>
+          <p:cNvSpPr/>
+          <p:nvPr/>
+        </p:nvSpPr>
+        <p:spPr>
+          <a:xfrm>
+            <a:off x="10808208" y="411480"/>
+            <a:ext cx="292608" cy="292608"/>
+          </a:xfrm>
+          <a:prstGeom prst="ellipse">
+            <a:avLst/>
+          </a:prstGeom>
+          <a:solidFill>
+            <a:srgbClr val="CADCFC"/>
+          </a:solidFill>
+          <a:ln/>
+        </p:spPr>
+      </p:sp>
+      <p:sp>
+        <p:nvSpPr>
+          <p:cNvPr id="7" name="Text 5"/>
+          <p:cNvSpPr/>
+          <p:nvPr/>
+        </p:nvSpPr>
+        <p:spPr>
+          <a:xfrm>
+            <a:off x="10808208" y="395935"/>
+            <a:ext cx="292608" cy="310896"/>
+          </a:xfrm>
+          <a:prstGeom prst="rect">
+            <a:avLst/>
+          </a:prstGeom>
+          <a:noFill/>
+          <a:ln/>
+        </p:spPr>
+        <p:txBody>
+          <a:bodyPr wrap="square" lIns="0" tIns="0" rIns="0" bIns="0" rtlCol="0" anchor="ctr"/>
+          <a:lstStyle/>
+          <a:p>
+            <a:pPr algn="ctr" indent="0" marL="0">
+              <a:buNone/>
+            </a:pPr>
+            <a:r>
+              <a:rPr lang="en-US" sz="1100" b="1" dirty="0">
+                <a:solidFill>
+                  <a:srgbClr val="1E2761"/>
+                </a:solidFill>
+                <a:latin typeface="Calibri" pitchFamily="34" charset="0"/>
+                <a:ea typeface="Calibri" pitchFamily="34" charset="-122"/>
+                <a:cs typeface="Calibri" pitchFamily="34" charset="-120"/>
+              </a:rPr>
+              <a:t>I</a:t>
+            </a:r>
+            <a:endParaRPr lang="en-US" sz="1100" dirty="0"/>
+          </a:p>
+        </p:txBody>
+      </p:sp>
+      <p:sp>
+        <p:nvSpPr>
+          <p:cNvPr id="8" name="Shape 6"/>
+          <p:cNvSpPr/>
+          <p:nvPr/>
+        </p:nvSpPr>
+        <p:spPr>
+          <a:xfrm>
+            <a:off x="11192256" y="411480"/>
+            <a:ext cx="292608" cy="292608"/>
+          </a:xfrm>
+          <a:prstGeom prst="ellipse">
+            <a:avLst/>
+          </a:prstGeom>
+          <a:solidFill>
+            <a:srgbClr val="CADCFC"/>
+          </a:solidFill>
+          <a:ln/>
+        </p:spPr>
+      </p:sp>
+      <p:sp>
+        <p:nvSpPr>
+          <p:cNvPr id="9" name="Text 7"/>
+          <p:cNvSpPr/>
+          <p:nvPr/>
+        </p:nvSpPr>
+        <p:spPr>
+          <a:xfrm>
+            <a:off x="11192256" y="395935"/>
+            <a:ext cx="292608" cy="310896"/>
+          </a:xfrm>
+          <a:prstGeom prst="rect">
+            <a:avLst/>
+          </a:prstGeom>
+          <a:noFill/>
+          <a:ln/>
+        </p:spPr>
+        <p:txBody>
+          <a:bodyPr wrap="square" lIns="0" tIns="0" rIns="0" bIns="0" rtlCol="0" anchor="ctr"/>
+          <a:lstStyle/>
+          <a:p>
+            <a:pPr algn="ctr" indent="0" marL="0">
+              <a:buNone/>
+            </a:pPr>
+            <a:r>
+              <a:rPr lang="en-US" sz="1100" b="1" dirty="0">
+                <a:solidFill>
+                  <a:srgbClr val="1E2761"/>
+                </a:solidFill>
+                <a:latin typeface="Calibri" pitchFamily="34" charset="0"/>
+                <a:ea typeface="Calibri" pitchFamily="34" charset="-122"/>
+                <a:cs typeface="Calibri" pitchFamily="34" charset="-120"/>
+              </a:rPr>
+              <a:t>A</a:t>
+            </a:r>
+            <a:endParaRPr lang="en-US" sz="1100" dirty="0"/>
+          </a:p>
+        </p:txBody>
+      </p:sp>
+      <p:sp>
+        <p:nvSpPr>
+          <p:cNvPr id="10" name="Shape 8"/>
+          <p:cNvSpPr/>
+          <p:nvPr/>
+        </p:nvSpPr>
+        <p:spPr>
+          <a:xfrm>
+            <a:off x="11576304" y="411480"/>
+            <a:ext cx="292608" cy="292608"/>
+          </a:xfrm>
+          <a:prstGeom prst="ellipse">
+            <a:avLst/>
+          </a:prstGeom>
+          <a:solidFill>
+            <a:srgbClr val="1E2761"/>
+          </a:solidFill>
+          <a:ln/>
+        </p:spPr>
+      </p:sp>
+      <p:sp>
+        <p:nvSpPr>
+          <p:cNvPr id="11" name="Text 9"/>
+          <p:cNvSpPr/>
+          <p:nvPr/>
+        </p:nvSpPr>
+        <p:spPr>
+          <a:xfrm>
+            <a:off x="11576304" y="395935"/>
+            <a:ext cx="292608" cy="310896"/>
+          </a:xfrm>
+          <a:prstGeom prst="rect">
+            <a:avLst/>
+          </a:prstGeom>
+          <a:noFill/>
+          <a:ln/>
+        </p:spPr>
+        <p:txBody>
+          <a:bodyPr wrap="square" lIns="0" tIns="0" rIns="0" bIns="0" rtlCol="0" anchor="ctr"/>
+          <a:lstStyle/>
+          <a:p>
+            <a:pPr algn="ctr" indent="0" marL="0">
+              <a:buNone/>
+            </a:pPr>
+            <a:r>
+              <a:rPr lang="en-US" sz="1100" b="1" dirty="0">
+                <a:solidFill>
+                  <a:srgbClr val="FFFFFF"/>
+                </a:solidFill>
+                <a:latin typeface="Calibri" pitchFamily="34" charset="0"/>
+                <a:ea typeface="Calibri" pitchFamily="34" charset="-122"/>
+                <a:cs typeface="Calibri" pitchFamily="34" charset="-120"/>
+              </a:rPr>
+              <a:t>L</a:t>
+            </a:r>
+            <a:endParaRPr lang="en-US" sz="1100" dirty="0"/>
+          </a:p>
+        </p:txBody>
+      </p:sp>
+      <p:sp>
+        <p:nvSpPr>
+          <p:cNvPr id="12" name="Text 10"/>
+          <p:cNvSpPr/>
+          <p:nvPr/>
+        </p:nvSpPr>
+        <p:spPr>
+          <a:xfrm>
+            <a:off x="548640" y="1554480"/>
+            <a:ext cx="5486400" cy="365760"/>
+          </a:xfrm>
+          <a:prstGeom prst="rect">
+            <a:avLst/>
+          </a:prstGeom>
+          <a:noFill/>
+          <a:ln/>
+        </p:spPr>
+        <p:txBody>
+          <a:bodyPr wrap="square" rtlCol="0" anchor="ctr"/>
+          <a:lstStyle/>
+          <a:p>
+            <a:pPr indent="0" marL="0">
+              <a:buNone/>
+            </a:pPr>
+            <a:r>
+              <a:rPr lang="en-US" sz="1700" b="1" dirty="0">
+                <a:solidFill>
+                  <a:srgbClr val="1E2761"/>
+                </a:solidFill>
+                <a:latin typeface="Cambria" pitchFamily="34" charset="0"/>
+                <a:ea typeface="Cambria" pitchFamily="34" charset="-122"/>
+                <a:cs typeface="Cambria" pitchFamily="34" charset="-120"/>
+              </a:rPr>
+              <a:t>Limitations (stated, not buried)</a:t>
+            </a:r>
+            <a:endParaRPr lang="en-US" sz="1700" dirty="0"/>
+          </a:p>
+        </p:txBody>
+      </p:sp>
+      <p:sp>
+        <p:nvSpPr>
+          <p:cNvPr id="13" name="Text 11"/>
+          <p:cNvSpPr/>
+          <p:nvPr/>
+        </p:nvSpPr>
+        <p:spPr>
+          <a:xfrm>
+            <a:off x="731520" y="2011680"/>
+            <a:ext cx="5303520" cy="3108960"/>
+          </a:xfrm>
+          <a:prstGeom prst="rect">
+            <a:avLst/>
+          </a:prstGeom>
+          <a:noFill/>
+          <a:ln/>
+        </p:spPr>
+        <p:txBody>
+          <a:bodyPr wrap="square" rtlCol="0" anchor="ctr"/>
+          <a:lstStyle/>
+          <a:p>
+            <a:pPr marL="342900" indent="-342900">
+              <a:spcAft>
+                <a:spcPts val="800"/>
+              </a:spcAft>
+              <a:buSzPct val="100000"/>
+              <a:buChar char="•"/>
+            </a:pPr>
+            <a:r>
+              <a:rPr lang="en-US" sz="1300" dirty="0">
+                <a:solidFill>
+                  <a:srgbClr val="1A1A2E"/>
+                </a:solidFill>
+                <a:latin typeface="Calibri" pitchFamily="34" charset="0"/>
+                <a:ea typeface="Calibri" pitchFamily="34" charset="-122"/>
+                <a:cs typeface="Calibri" pitchFamily="34" charset="-120"/>
+              </a:rPr>
+              <a:t>Modest, balanced corpus — characterises the pipeline, not a population</a:t>
+            </a:r>
+            <a:endParaRPr lang="en-US" sz="1300" dirty="0"/>
+          </a:p>
+          <a:p>
+            <a:pPr marL="342900" indent="-342900">
+              <a:spcAft>
+                <a:spcPts val="800"/>
+              </a:spcAft>
+              <a:buSzPct val="100000"/>
+              <a:buChar char="•"/>
+            </a:pPr>
+            <a:r>
+              <a:rPr lang="en-US" sz="1300" dirty="0">
+                <a:solidFill>
+                  <a:srgbClr val="1A1A2E"/>
+                </a:solidFill>
+                <a:latin typeface="Calibri" pitchFamily="34" charset="0"/>
+                <a:ea typeface="Calibri" pitchFamily="34" charset="-122"/>
+                <a:cs typeface="Calibri" pitchFamily="34" charset="-120"/>
+              </a:rPr>
+              <a:t>New in August, from the completed run: language confounded with sector (one fairness claim retracted); DE escalate stratum n=8; routing scored only under a supplied inventory = upper bound; theme + action still unscored</a:t>
+            </a:r>
+            <a:endParaRPr lang="en-US" sz="1300" dirty="0"/>
+          </a:p>
+          <a:p>
+            <a:pPr marL="342900" indent="-342900">
+              <a:spcAft>
+                <a:spcPts val="800"/>
+              </a:spcAft>
+              <a:buSzPct val="100000"/>
+              <a:buChar char="•"/>
+            </a:pPr>
+            <a:r>
+              <a:rPr lang="en-US" sz="1300" dirty="0">
+                <a:solidFill>
+                  <a:srgbClr val="1A1A2E"/>
+                </a:solidFill>
+                <a:latin typeface="Calibri" pitchFamily="34" charset="0"/>
+                <a:ea typeface="Calibri" pitchFamily="34" charset="-122"/>
+                <a:cs typeface="Calibri" pitchFamily="34" charset="-120"/>
+              </a:rPr>
+              <a:t>Qualitative study small-N, design-validity — no causal effect claims</a:t>
+            </a:r>
+            <a:endParaRPr lang="en-US" sz="1300" dirty="0"/>
+          </a:p>
+          <a:p>
+            <a:pPr marL="342900" indent="-342900">
+              <a:spcAft>
+                <a:spcPts val="800"/>
+              </a:spcAft>
+              <a:buSzPct val="100000"/>
+              <a:buChar char="•"/>
+            </a:pPr>
+            <a:r>
+              <a:rPr lang="en-US" sz="1300" dirty="0">
+                <a:solidFill>
+                  <a:srgbClr val="1A1A2E"/>
+                </a:solidFill>
+                <a:latin typeface="Calibri" pitchFamily="34" charset="0"/>
+                <a:ea typeface="Calibri" pitchFamily="34" charset="-122"/>
+                <a:cs typeface="Calibri" pitchFamily="34" charset="-120"/>
+              </a:rPr>
+              <a:t>Researcher-as-designer-and-founder — managed by external labels, standard instruments, reproducibility</a:t>
+            </a:r>
+            <a:endParaRPr lang="en-US" sz="1300" dirty="0"/>
+          </a:p>
+          <a:p>
+            <a:pPr marL="342900" indent="-342900">
+              <a:spcAft>
+                <a:spcPts val="800"/>
+              </a:spcAft>
+              <a:buSzPct val="100000"/>
+              <a:buChar char="•"/>
+            </a:pPr>
+            <a:r>
+              <a:rPr lang="en-US" sz="1300" dirty="0">
+                <a:solidFill>
+                  <a:srgbClr val="1A1A2E"/>
+                </a:solidFill>
+                <a:latin typeface="Calibri" pitchFamily="34" charset="0"/>
+                <a:ea typeface="Calibri" pitchFamily="34" charset="-122"/>
+                <a:cs typeface="Calibri" pitchFamily="34" charset="-120"/>
+              </a:rPr>
+              <a:t>Security review found 10 HIGH findings → hardened; not warranted multi-tenant</a:t>
+            </a:r>
+            <a:endParaRPr lang="en-US" sz="1300" dirty="0"/>
+          </a:p>
+          <a:p>
+            <a:pPr marL="342900" indent="-342900">
+              <a:spcAft>
+                <a:spcPts val="800"/>
+              </a:spcAft>
+              <a:buSzPct val="100000"/>
+              <a:buChar char="•"/>
+            </a:pPr>
+            <a:r>
+              <a:rPr lang="en-US" sz="1300" dirty="0">
+                <a:solidFill>
+                  <a:srgbClr val="1A1A2E"/>
+                </a:solidFill>
+                <a:latin typeface="Calibri" pitchFamily="34" charset="0"/>
+                <a:ea typeface="Calibri" pitchFamily="34" charset="-122"/>
+                <a:cs typeface="Calibri" pitchFamily="34" charset="-120"/>
+              </a:rPr>
+              <a:t>Distinctive claims demonstrated + partially measured, not field-proven</a:t>
+            </a:r>
+            <a:endParaRPr lang="en-US" sz="1300" dirty="0"/>
+          </a:p>
+        </p:txBody>
+      </p:sp>
+      <p:sp>
+        <p:nvSpPr>
+          <p:cNvPr id="14" name="Text 12"/>
+          <p:cNvSpPr/>
+          <p:nvPr/>
+        </p:nvSpPr>
+        <p:spPr>
+          <a:xfrm>
+            <a:off x="6400800" y="1554480"/>
+            <a:ext cx="5212080" cy="365760"/>
+          </a:xfrm>
+          <a:prstGeom prst="rect">
+            <a:avLst/>
+          </a:prstGeom>
+          <a:noFill/>
+          <a:ln/>
+        </p:spPr>
+        <p:txBody>
+          <a:bodyPr wrap="square" rtlCol="0" anchor="ctr"/>
+          <a:lstStyle/>
+          <a:p>
+            <a:pPr indent="0" marL="0">
+              <a:buNone/>
+            </a:pPr>
+            <a:r>
+              <a:rPr lang="en-US" sz="1700" b="1" dirty="0">
+                <a:solidFill>
+                  <a:srgbClr val="1E2761"/>
+                </a:solidFill>
+                <a:latin typeface="Cambria" pitchFamily="34" charset="0"/>
+                <a:ea typeface="Cambria" pitchFamily="34" charset="-122"/>
+                <a:cs typeface="Cambria" pitchFamily="34" charset="-120"/>
+              </a:rPr>
+              <a:t>Future work</a:t>
+            </a:r>
+            <a:endParaRPr lang="en-US" sz="1700" dirty="0"/>
+          </a:p>
+        </p:txBody>
+      </p:sp>
+      <p:sp>
+        <p:nvSpPr>
+          <p:cNvPr id="15" name="Text 13"/>
+          <p:cNvSpPr/>
+          <p:nvPr/>
+        </p:nvSpPr>
+        <p:spPr>
+          <a:xfrm>
+            <a:off x="6583680" y="2011680"/>
+            <a:ext cx="5029200" cy="3108960"/>
+          </a:xfrm>
+          <a:prstGeom prst="rect">
+            <a:avLst/>
+          </a:prstGeom>
+          <a:noFill/>
+          <a:ln/>
+        </p:spPr>
+        <p:txBody>
+          <a:bodyPr wrap="square" rtlCol="0" anchor="ctr"/>
+          <a:lstStyle/>
+          <a:p>
+            <a:pPr marL="342900" indent="-342900">
+              <a:spcAft>
+                <a:spcPts val="800"/>
+              </a:spcAft>
+              <a:buSzPct val="100000"/>
+              <a:buChar char="•"/>
+            </a:pPr>
+            <a:r>
+              <a:rPr lang="en-US" sz="1300" dirty="0">
+                <a:solidFill>
+                  <a:srgbClr val="1A1A2E"/>
+                </a:solidFill>
+                <a:latin typeface="Calibri" pitchFamily="34" charset="0"/>
+                <a:ea typeface="Calibri" pitchFamily="34" charset="-122"/>
+                <a:cs typeface="Calibri" pitchFamily="34" charset="-120"/>
+              </a:rPr>
+              <a:t>① One LIVE outcome contract on real data — scored by interrupted time series; then synthetic difference-in-differences as panels accumulate (Arkhangelsky et al., 2021)</a:t>
+            </a:r>
+            <a:endParaRPr lang="en-US" sz="1300" dirty="0"/>
+          </a:p>
+          <a:p>
+            <a:pPr marL="342900" indent="-342900">
+              <a:spcAft>
+                <a:spcPts val="800"/>
+              </a:spcAft>
+              <a:buSzPct val="100000"/>
+              <a:buChar char="•"/>
+            </a:pPr>
+            <a:r>
+              <a:rPr lang="en-US" sz="1300" dirty="0">
+                <a:solidFill>
+                  <a:srgbClr val="1A1A2E"/>
+                </a:solidFill>
+                <a:latin typeface="Calibri" pitchFamily="34" charset="0"/>
+                <a:ea typeface="Calibri" pitchFamily="34" charset="-122"/>
+                <a:cs typeface="Calibri" pitchFamily="34" charset="-120"/>
+              </a:rPr>
+              <a:t>② Complete the evaluation's COVERAGE — unifying the two streams is DONE (4 Aug). What remains: theme + recommended action are still unscored (2 of 6 gold fields), routing needs scoring in the free-form production condition, and natural German data would break the language/sector confound</a:t>
+            </a:r>
+            <a:endParaRPr lang="en-US" sz="1300" dirty="0"/>
+          </a:p>
+          <a:p>
+            <a:pPr marL="342900" indent="-342900">
+              <a:spcAft>
+                <a:spcPts val="800"/>
+              </a:spcAft>
+              <a:buSzPct val="100000"/>
+              <a:buChar char="•"/>
+            </a:pPr>
+            <a:r>
+              <a:rPr lang="en-US" sz="1300" dirty="0">
+                <a:solidFill>
+                  <a:srgbClr val="1A1A2E"/>
+                </a:solidFill>
+                <a:latin typeface="Calibri" pitchFamily="34" charset="0"/>
+                <a:ea typeface="Calibri" pitchFamily="34" charset="-122"/>
+                <a:cs typeface="Calibri" pitchFamily="34" charset="-120"/>
+              </a:rPr>
+              <a:t>③ Connector parity + broader pulls</a:t>
+            </a:r>
+            <a:endParaRPr lang="en-US" sz="1300" dirty="0"/>
+          </a:p>
+          <a:p>
+            <a:pPr marL="342900" indent="-342900">
+              <a:spcAft>
+                <a:spcPts val="800"/>
+              </a:spcAft>
+              <a:buSzPct val="100000"/>
+              <a:buChar char="•"/>
+            </a:pPr>
+            <a:r>
+              <a:rPr lang="en-US" sz="1300" dirty="0">
+                <a:solidFill>
+                  <a:srgbClr val="1A1A2E"/>
+                </a:solidFill>
+                <a:latin typeface="Calibri" pitchFamily="34" charset="0"/>
+                <a:ea typeface="Calibri" pitchFamily="34" charset="-122"/>
+                <a:cs typeface="Calibri" pitchFamily="34" charset="-120"/>
+              </a:rPr>
+              <a:t>④ Standing fairness monitoring of routing across segments and languages</a:t>
+            </a:r>
+            <a:endParaRPr lang="en-US" sz="1300" dirty="0"/>
           </a:p>
         </p:txBody>
       </p:sp>
@@ -11644,6 +14562,555 @@
 </p:sld>
 </file>
 
+<file path=ppt/slides/slide20.xml><?xml version="1.0" encoding="utf-8"?>
+<p:sld xmlns:a="http://schemas.openxmlformats.org/drawingml/2006/main" xmlns:r="http://schemas.openxmlformats.org/officeDocument/2006/relationships" xmlns:p="http://schemas.openxmlformats.org/presentationml/2006/main">
+  <p:cSld name="Slide 20">
+    <p:bg>
+      <p:bgPr>
+        <a:solidFill>
+          <a:srgbClr val="1E2761"/>
+        </a:solidFill>
+      </p:bgPr>
+    </p:bg>
+    <p:spTree>
+      <p:nvGrpSpPr>
+        <p:cNvPr id="1" name=""/>
+        <p:cNvGrpSpPr/>
+        <p:nvPr/>
+      </p:nvGrpSpPr>
+      <p:grpSpPr>
+        <a:xfrm>
+          <a:off x="0" y="0"/>
+          <a:ext cx="0" cy="0"/>
+          <a:chOff x="0" y="0"/>
+          <a:chExt cx="0" cy="0"/>
+        </a:xfrm>
+      </p:grpSpPr>
+      <p:sp>
+        <p:nvSpPr>
+          <p:cNvPr id="2" name="Text 0"/>
+          <p:cNvSpPr/>
+          <p:nvPr/>
+        </p:nvSpPr>
+        <p:spPr>
+          <a:xfrm>
+            <a:off x="822960" y="502920"/>
+            <a:ext cx="10515600" cy="731520"/>
+          </a:xfrm>
+          <a:prstGeom prst="rect">
+            <a:avLst/>
+          </a:prstGeom>
+          <a:noFill/>
+          <a:ln/>
+        </p:spPr>
+        <p:txBody>
+          <a:bodyPr wrap="square" rtlCol="0" anchor="ctr"/>
+          <a:lstStyle/>
+          <a:p>
+            <a:pPr indent="0" marL="0">
+              <a:buNone/>
+            </a:pPr>
+            <a:r>
+              <a:rPr lang="en-US" sz="3600" b="1" dirty="0">
+                <a:solidFill>
+                  <a:srgbClr val="FFFFFF"/>
+                </a:solidFill>
+                <a:latin typeface="Cambria" pitchFamily="34" charset="0"/>
+                <a:ea typeface="Cambria" pitchFamily="34" charset="-122"/>
+                <a:cs typeface="Cambria" pitchFamily="34" charset="-120"/>
+              </a:rPr>
+              <a:t>Contributions</a:t>
+            </a:r>
+            <a:endParaRPr lang="en-US" sz="3600" dirty="0"/>
+          </a:p>
+        </p:txBody>
+      </p:sp>
+      <p:sp>
+        <p:nvSpPr>
+          <p:cNvPr id="3" name="Shape 1"/>
+          <p:cNvSpPr/>
+          <p:nvPr/>
+        </p:nvSpPr>
+        <p:spPr>
+          <a:xfrm>
+            <a:off x="822960" y="1554480"/>
+            <a:ext cx="5212080" cy="1783080"/>
+          </a:xfrm>
+          <a:prstGeom prst="roundRect">
+            <a:avLst>
+              <a:gd name="adj" fmla="val 3077"/>
+            </a:avLst>
+          </a:prstGeom>
+          <a:solidFill>
+            <a:srgbClr val="2A3575"/>
+          </a:solidFill>
+          <a:ln/>
+        </p:spPr>
+      </p:sp>
+      <p:sp>
+        <p:nvSpPr>
+          <p:cNvPr id="4" name="Text 2"/>
+          <p:cNvSpPr/>
+          <p:nvPr/>
+        </p:nvSpPr>
+        <p:spPr>
+          <a:xfrm>
+            <a:off x="1024128" y="1691640"/>
+            <a:ext cx="4800600" cy="365760"/>
+          </a:xfrm>
+          <a:prstGeom prst="rect">
+            <a:avLst/>
+          </a:prstGeom>
+          <a:noFill/>
+          <a:ln/>
+        </p:spPr>
+        <p:txBody>
+          <a:bodyPr wrap="square" lIns="0" tIns="0" rIns="0" bIns="0" rtlCol="0" anchor="ctr"/>
+          <a:lstStyle/>
+          <a:p>
+            <a:pPr indent="0" marL="0">
+              <a:buNone/>
+            </a:pPr>
+            <a:r>
+              <a:rPr lang="en-US" sz="1600" b="1" dirty="0">
+                <a:solidFill>
+                  <a:srgbClr val="02C39A"/>
+                </a:solidFill>
+                <a:latin typeface="Calibri" pitchFamily="34" charset="0"/>
+                <a:ea typeface="Calibri" pitchFamily="34" charset="-122"/>
+                <a:cs typeface="Calibri" pitchFamily="34" charset="-120"/>
+              </a:rPr>
+              <a:t>A working artifact</a:t>
+            </a:r>
+            <a:endParaRPr lang="en-US" sz="1600" dirty="0"/>
+          </a:p>
+        </p:txBody>
+      </p:sp>
+      <p:sp>
+        <p:nvSpPr>
+          <p:cNvPr id="5" name="Text 3"/>
+          <p:cNvSpPr/>
+          <p:nvPr/>
+        </p:nvSpPr>
+        <p:spPr>
+          <a:xfrm>
+            <a:off x="1024128" y="2084832"/>
+            <a:ext cx="4800600" cy="1143000"/>
+          </a:xfrm>
+          <a:prstGeom prst="rect">
+            <a:avLst/>
+          </a:prstGeom>
+          <a:noFill/>
+          <a:ln/>
+        </p:spPr>
+        <p:txBody>
+          <a:bodyPr wrap="square" lIns="0" tIns="0" rIns="0" bIns="0" rtlCol="0" anchor="ctr"/>
+          <a:lstStyle/>
+          <a:p>
+            <a:pPr indent="0" marL="0">
+              <a:buNone/>
+            </a:pPr>
+            <a:r>
+              <a:rPr lang="en-US" sz="1300" dirty="0">
+                <a:solidFill>
+                  <a:srgbClr val="FFFFFF"/>
+                </a:solidFill>
+                <a:latin typeface="Calibri" pitchFamily="34" charset="0"/>
+                <a:ea typeface="Calibri" pitchFamily="34" charset="-122"/>
+                <a:cs typeface="Calibri" pitchFamily="34" charset="-120"/>
+              </a:rPr>
+              <a:t>the full governed loop — signal to measured outcome to reusable learning — running end to end, in production, with real external writes</a:t>
+            </a:r>
+            <a:endParaRPr lang="en-US" sz="1300" dirty="0"/>
+          </a:p>
+        </p:txBody>
+      </p:sp>
+      <p:sp>
+        <p:nvSpPr>
+          <p:cNvPr id="6" name="Shape 4"/>
+          <p:cNvSpPr/>
+          <p:nvPr/>
+        </p:nvSpPr>
+        <p:spPr>
+          <a:xfrm>
+            <a:off x="6309360" y="1554480"/>
+            <a:ext cx="5212080" cy="1783080"/>
+          </a:xfrm>
+          <a:prstGeom prst="roundRect">
+            <a:avLst>
+              <a:gd name="adj" fmla="val 3077"/>
+            </a:avLst>
+          </a:prstGeom>
+          <a:solidFill>
+            <a:srgbClr val="2A3575"/>
+          </a:solidFill>
+          <a:ln/>
+        </p:spPr>
+      </p:sp>
+      <p:sp>
+        <p:nvSpPr>
+          <p:cNvPr id="7" name="Text 5"/>
+          <p:cNvSpPr/>
+          <p:nvPr/>
+        </p:nvSpPr>
+        <p:spPr>
+          <a:xfrm>
+            <a:off x="6510528" y="1691640"/>
+            <a:ext cx="4800600" cy="365760"/>
+          </a:xfrm>
+          <a:prstGeom prst="rect">
+            <a:avLst/>
+          </a:prstGeom>
+          <a:noFill/>
+          <a:ln/>
+        </p:spPr>
+        <p:txBody>
+          <a:bodyPr wrap="square" lIns="0" tIns="0" rIns="0" bIns="0" rtlCol="0" anchor="ctr"/>
+          <a:lstStyle/>
+          <a:p>
+            <a:pPr indent="0" marL="0">
+              <a:buNone/>
+            </a:pPr>
+            <a:r>
+              <a:rPr lang="en-US" sz="1600" b="1" dirty="0">
+                <a:solidFill>
+                  <a:srgbClr val="02C39A"/>
+                </a:solidFill>
+                <a:latin typeface="Calibri" pitchFamily="34" charset="0"/>
+                <a:ea typeface="Calibri" pitchFamily="34" charset="-122"/>
+                <a:cs typeface="Calibri" pitchFamily="34" charset="-120"/>
+              </a:rPr>
+              <a:t>Six design principles</a:t>
+            </a:r>
+            <a:endParaRPr lang="en-US" sz="1600" dirty="0"/>
+          </a:p>
+        </p:txBody>
+      </p:sp>
+      <p:sp>
+        <p:nvSpPr>
+          <p:cNvPr id="8" name="Text 6"/>
+          <p:cNvSpPr/>
+          <p:nvPr/>
+        </p:nvSpPr>
+        <p:spPr>
+          <a:xfrm>
+            <a:off x="6510528" y="2084832"/>
+            <a:ext cx="4800600" cy="1143000"/>
+          </a:xfrm>
+          <a:prstGeom prst="rect">
+            <a:avLst/>
+          </a:prstGeom>
+          <a:noFill/>
+          <a:ln/>
+        </p:spPr>
+        <p:txBody>
+          <a:bodyPr wrap="square" lIns="0" tIns="0" rIns="0" bIns="0" rtlCol="0" anchor="ctr"/>
+          <a:lstStyle/>
+          <a:p>
+            <a:pPr indent="0" marL="0">
+              <a:buNone/>
+            </a:pPr>
+            <a:r>
+              <a:rPr lang="en-US" sz="1300" dirty="0">
+                <a:solidFill>
+                  <a:srgbClr val="FFFFFF"/>
+                </a:solidFill>
+                <a:latin typeface="Calibri" pitchFamily="34" charset="0"/>
+                <a:ea typeface="Calibri" pitchFamily="34" charset="-122"/>
+                <a:cs typeface="Calibri" pitchFamily="34" charset="-120"/>
+              </a:rPr>
+              <a:t>each with its cost: closure as contract, perishable memory, set-based severity, graduated authority, bounded model, adaptation by configuration</a:t>
+            </a:r>
+            <a:endParaRPr lang="en-US" sz="1300" dirty="0"/>
+          </a:p>
+        </p:txBody>
+      </p:sp>
+      <p:sp>
+        <p:nvSpPr>
+          <p:cNvPr id="9" name="Shape 7"/>
+          <p:cNvSpPr/>
+          <p:nvPr/>
+        </p:nvSpPr>
+        <p:spPr>
+          <a:xfrm>
+            <a:off x="822960" y="3520440"/>
+            <a:ext cx="5212080" cy="1783080"/>
+          </a:xfrm>
+          <a:prstGeom prst="roundRect">
+            <a:avLst>
+              <a:gd name="adj" fmla="val 3077"/>
+            </a:avLst>
+          </a:prstGeom>
+          <a:solidFill>
+            <a:srgbClr val="2A3575"/>
+          </a:solidFill>
+          <a:ln/>
+        </p:spPr>
+      </p:sp>
+      <p:sp>
+        <p:nvSpPr>
+          <p:cNvPr id="10" name="Text 8"/>
+          <p:cNvSpPr/>
+          <p:nvPr/>
+        </p:nvSpPr>
+        <p:spPr>
+          <a:xfrm>
+            <a:off x="1024128" y="3657600"/>
+            <a:ext cx="4800600" cy="365760"/>
+          </a:xfrm>
+          <a:prstGeom prst="rect">
+            <a:avLst/>
+          </a:prstGeom>
+          <a:noFill/>
+          <a:ln/>
+        </p:spPr>
+        <p:txBody>
+          <a:bodyPr wrap="square" lIns="0" tIns="0" rIns="0" bIns="0" rtlCol="0" anchor="ctr"/>
+          <a:lstStyle/>
+          <a:p>
+            <a:pPr indent="0" marL="0">
+              <a:buNone/>
+            </a:pPr>
+            <a:r>
+              <a:rPr lang="en-US" sz="1600" b="1" dirty="0">
+                <a:solidFill>
+                  <a:srgbClr val="02C39A"/>
+                </a:solidFill>
+                <a:latin typeface="Calibri" pitchFamily="34" charset="0"/>
+                <a:ea typeface="Calibri" pitchFamily="34" charset="-122"/>
+                <a:cs typeface="Calibri" pitchFamily="34" charset="-120"/>
+              </a:rPr>
+              <a:t>A real-data evaluation</a:t>
+            </a:r>
+            <a:endParaRPr lang="en-US" sz="1600" dirty="0"/>
+          </a:p>
+        </p:txBody>
+      </p:sp>
+      <p:sp>
+        <p:nvSpPr>
+          <p:cNvPr id="11" name="Text 9"/>
+          <p:cNvSpPr/>
+          <p:nvPr/>
+        </p:nvSpPr>
+        <p:spPr>
+          <a:xfrm>
+            <a:off x="1024128" y="4050792"/>
+            <a:ext cx="4800600" cy="1143000"/>
+          </a:xfrm>
+          <a:prstGeom prst="rect">
+            <a:avLst/>
+          </a:prstGeom>
+          <a:noFill/>
+          <a:ln/>
+        </p:spPr>
+        <p:txBody>
+          <a:bodyPr wrap="square" lIns="0" tIns="0" rIns="0" bIns="0" rtlCol="0" anchor="ctr"/>
+          <a:lstStyle/>
+          <a:p>
+            <a:pPr indent="0" marL="0">
+              <a:buNone/>
+            </a:pPr>
+            <a:r>
+              <a:rPr lang="en-US" sz="1300" dirty="0">
+                <a:solidFill>
+                  <a:srgbClr val="FFFFFF"/>
+                </a:solidFill>
+                <a:latin typeface="Calibri" pitchFamily="34" charset="0"/>
+                <a:ea typeface="Calibri" pitchFamily="34" charset="-122"/>
+                <a:cs typeface="Calibri" pitchFamily="34" charset="-120"/>
+              </a:rPr>
+              <a:t>188 multilingual signals, two independent gold standards; triage is method-dependent — and the choice of method is an EQUITY decision, not only an accuracy one</a:t>
+            </a:r>
+            <a:endParaRPr lang="en-US" sz="1300" dirty="0"/>
+          </a:p>
+        </p:txBody>
+      </p:sp>
+      <p:sp>
+        <p:nvSpPr>
+          <p:cNvPr id="12" name="Shape 10"/>
+          <p:cNvSpPr/>
+          <p:nvPr/>
+        </p:nvSpPr>
+        <p:spPr>
+          <a:xfrm>
+            <a:off x="6309360" y="3520440"/>
+            <a:ext cx="5212080" cy="1783080"/>
+          </a:xfrm>
+          <a:prstGeom prst="roundRect">
+            <a:avLst>
+              <a:gd name="adj" fmla="val 3077"/>
+            </a:avLst>
+          </a:prstGeom>
+          <a:solidFill>
+            <a:srgbClr val="2A3575"/>
+          </a:solidFill>
+          <a:ln/>
+        </p:spPr>
+      </p:sp>
+      <p:sp>
+        <p:nvSpPr>
+          <p:cNvPr id="13" name="Text 11"/>
+          <p:cNvSpPr/>
+          <p:nvPr/>
+        </p:nvSpPr>
+        <p:spPr>
+          <a:xfrm>
+            <a:off x="6510528" y="3657600"/>
+            <a:ext cx="4800600" cy="365760"/>
+          </a:xfrm>
+          <a:prstGeom prst="rect">
+            <a:avLst/>
+          </a:prstGeom>
+          <a:noFill/>
+          <a:ln/>
+        </p:spPr>
+        <p:txBody>
+          <a:bodyPr wrap="square" lIns="0" tIns="0" rIns="0" bIns="0" rtlCol="0" anchor="ctr"/>
+          <a:lstStyle/>
+          <a:p>
+            <a:pPr indent="0" marL="0">
+              <a:buNone/>
+            </a:pPr>
+            <a:r>
+              <a:rPr lang="en-US" sz="1600" b="1" dirty="0">
+                <a:solidFill>
+                  <a:srgbClr val="02C39A"/>
+                </a:solidFill>
+                <a:latin typeface="Calibri" pitchFamily="34" charset="0"/>
+                <a:ea typeface="Calibri" pitchFamily="34" charset="-122"/>
+                <a:cs typeface="Calibri" pitchFamily="34" charset="-120"/>
+              </a:rPr>
+              <a:t>Integral Responsible AI</a:t>
+            </a:r>
+            <a:endParaRPr lang="en-US" sz="1600" dirty="0"/>
+          </a:p>
+        </p:txBody>
+      </p:sp>
+      <p:sp>
+        <p:nvSpPr>
+          <p:cNvPr id="14" name="Text 12"/>
+          <p:cNvSpPr/>
+          <p:nvPr/>
+        </p:nvSpPr>
+        <p:spPr>
+          <a:xfrm>
+            <a:off x="6510528" y="4050792"/>
+            <a:ext cx="4800600" cy="1143000"/>
+          </a:xfrm>
+          <a:prstGeom prst="rect">
+            <a:avLst/>
+          </a:prstGeom>
+          <a:noFill/>
+          <a:ln/>
+        </p:spPr>
+        <p:txBody>
+          <a:bodyPr wrap="square" lIns="0" tIns="0" rIns="0" bIns="0" rtlCol="0" anchor="ctr"/>
+          <a:lstStyle/>
+          <a:p>
+            <a:pPr indent="0" marL="0">
+              <a:buNone/>
+            </a:pPr>
+            <a:r>
+              <a:rPr lang="en-US" sz="1300" dirty="0">
+                <a:solidFill>
+                  <a:srgbClr val="FFFFFF"/>
+                </a:solidFill>
+                <a:latin typeface="Calibri" pitchFamily="34" charset="0"/>
+                <a:ea typeface="Calibri" pitchFamily="34" charset="-122"/>
+                <a:cs typeface="Calibri" pitchFamily="34" charset="-120"/>
+              </a:rPr>
+              <a:t>oversight designed beyond Art 14, transparency via Art 50(4), auditability that found its own gaps — governance as durable design commitment</a:t>
+            </a:r>
+            <a:endParaRPr lang="en-US" sz="1300" dirty="0"/>
+          </a:p>
+        </p:txBody>
+      </p:sp>
+      <p:sp>
+        <p:nvSpPr>
+          <p:cNvPr id="15" name="Text 13"/>
+          <p:cNvSpPr/>
+          <p:nvPr/>
+        </p:nvSpPr>
+        <p:spPr>
+          <a:xfrm>
+            <a:off x="822960" y="5623560"/>
+            <a:ext cx="10515600" cy="457200"/>
+          </a:xfrm>
+          <a:prstGeom prst="rect">
+            <a:avLst/>
+          </a:prstGeom>
+          <a:noFill/>
+          <a:ln/>
+        </p:spPr>
+        <p:txBody>
+          <a:bodyPr wrap="square" rtlCol="0" anchor="ctr"/>
+          <a:lstStyle/>
+          <a:p>
+            <a:pPr indent="0" marL="0">
+              <a:buNone/>
+            </a:pPr>
+            <a:r>
+              <a:rPr lang="en-US" sz="1600" i="1" dirty="0">
+                <a:solidFill>
+                  <a:srgbClr val="CADCFC"/>
+                </a:solidFill>
+                <a:latin typeface="Calibri" pitchFamily="34" charset="0"/>
+                <a:ea typeface="Calibri" pitchFamily="34" charset="-122"/>
+                <a:cs typeface="Calibri" pitchFamily="34" charset="-120"/>
+              </a:rPr>
+              <a:t>Closing the loop and governing the closing are not in opposition — they are two halves of one well-designed workflow.</a:t>
+            </a:r>
+            <a:endParaRPr lang="en-US" sz="1600" dirty="0"/>
+          </a:p>
+        </p:txBody>
+      </p:sp>
+      <p:sp>
+        <p:nvSpPr>
+          <p:cNvPr id="16" name="Text 14"/>
+          <p:cNvSpPr/>
+          <p:nvPr/>
+        </p:nvSpPr>
+        <p:spPr>
+          <a:xfrm>
+            <a:off x="822960" y="6172200"/>
+            <a:ext cx="10515600" cy="457200"/>
+          </a:xfrm>
+          <a:prstGeom prst="rect">
+            <a:avLst/>
+          </a:prstGeom>
+          <a:noFill/>
+          <a:ln/>
+        </p:spPr>
+        <p:txBody>
+          <a:bodyPr wrap="square" rtlCol="0" anchor="ctr"/>
+          <a:lstStyle/>
+          <a:p>
+            <a:pPr indent="0" marL="0">
+              <a:buNone/>
+            </a:pPr>
+            <a:r>
+              <a:rPr lang="en-US" sz="1800" b="1" dirty="0">
+                <a:solidFill>
+                  <a:srgbClr val="FFFFFF"/>
+                </a:solidFill>
+                <a:latin typeface="Cambria" pitchFamily="34" charset="0"/>
+                <a:ea typeface="Cambria" pitchFamily="34" charset="-122"/>
+                <a:cs typeface="Cambria" pitchFamily="34" charset="-120"/>
+              </a:rPr>
+              <a:t>Thank you — questions welcome.</a:t>
+            </a:r>
+            <a:endParaRPr lang="en-US" sz="1800" dirty="0"/>
+          </a:p>
+        </p:txBody>
+      </p:sp>
+    </p:spTree>
+  </p:cSld>
+  <p:clrMapOvr>
+    <a:masterClrMapping/>
+  </p:clrMapOvr>
+</p:sld>
+</file>
+
 <file path=ppt/slides/slide3.xml><?xml version="1.0" encoding="utf-8"?>
 <p:sld xmlns:a="http://schemas.openxmlformats.org/drawingml/2006/main" xmlns:r="http://schemas.openxmlformats.org/officeDocument/2006/relationships" xmlns:p="http://schemas.openxmlformats.org/presentationml/2006/main">
   <p:cSld name="Slide 3">
@@ -11983,12 +15450,12 @@
         </p:nvSpPr>
         <p:spPr>
           <a:xfrm>
-            <a:off x="548640" y="1600200"/>
-            <a:ext cx="5440680" cy="1508760"/>
+            <a:off x="548640" y="1554480"/>
+            <a:ext cx="5440680" cy="1078992"/>
           </a:xfrm>
           <a:prstGeom prst="roundRect">
             <a:avLst>
-              <a:gd name="adj" fmla="val 3636"/>
+              <a:gd name="adj" fmla="val 5085"/>
             </a:avLst>
           </a:prstGeom>
           <a:solidFill>
@@ -12010,7 +15477,7 @@
         </p:nvSpPr>
         <p:spPr>
           <a:xfrm>
-            <a:off x="685800" y="1691640"/>
+            <a:off x="685800" y="1645920"/>
             <a:ext cx="5166360" cy="292608"/>
           </a:xfrm>
           <a:prstGeom prst="rect">
@@ -12049,8 +15516,8 @@
         </p:nvSpPr>
         <p:spPr>
           <a:xfrm>
-            <a:off x="685800" y="1984248"/>
-            <a:ext cx="5166360" cy="1033272"/>
+            <a:off x="685800" y="1938528"/>
+            <a:ext cx="5166360" cy="603504"/>
           </a:xfrm>
           <a:prstGeom prst="rect">
             <a:avLst/>
@@ -12088,12 +15555,12 @@
         </p:nvSpPr>
         <p:spPr>
           <a:xfrm>
-            <a:off x="6172200" y="1600200"/>
-            <a:ext cx="5440680" cy="1508760"/>
+            <a:off x="6172200" y="1554480"/>
+            <a:ext cx="5440680" cy="1078992"/>
           </a:xfrm>
           <a:prstGeom prst="roundRect">
             <a:avLst>
-              <a:gd name="adj" fmla="val 3636"/>
+              <a:gd name="adj" fmla="val 5085"/>
             </a:avLst>
           </a:prstGeom>
           <a:solidFill>
@@ -12115,7 +15582,7 @@
         </p:nvSpPr>
         <p:spPr>
           <a:xfrm>
-            <a:off x="6309360" y="1691640"/>
+            <a:off x="6309360" y="1645920"/>
             <a:ext cx="5166360" cy="292608"/>
           </a:xfrm>
           <a:prstGeom prst="rect">
@@ -12154,8 +15621,8 @@
         </p:nvSpPr>
         <p:spPr>
           <a:xfrm>
-            <a:off x="6309360" y="1984248"/>
-            <a:ext cx="5166360" cy="1033272"/>
+            <a:off x="6309360" y="1938528"/>
+            <a:ext cx="5166360" cy="603504"/>
           </a:xfrm>
           <a:prstGeom prst="rect">
             <a:avLst/>
@@ -12193,12 +15660,12 @@
         </p:nvSpPr>
         <p:spPr>
           <a:xfrm>
-            <a:off x="548640" y="3291840"/>
-            <a:ext cx="5440680" cy="1508760"/>
+            <a:off x="548640" y="2743200"/>
+            <a:ext cx="5440680" cy="1078992"/>
           </a:xfrm>
           <a:prstGeom prst="roundRect">
             <a:avLst>
-              <a:gd name="adj" fmla="val 3636"/>
+              <a:gd name="adj" fmla="val 5085"/>
             </a:avLst>
           </a:prstGeom>
           <a:solidFill>
@@ -12220,7 +15687,7 @@
         </p:nvSpPr>
         <p:spPr>
           <a:xfrm>
-            <a:off x="685800" y="3383280"/>
+            <a:off x="685800" y="2834640"/>
             <a:ext cx="5166360" cy="292608"/>
           </a:xfrm>
           <a:prstGeom prst="rect">
@@ -12245,7 +15712,7 @@
                 <a:ea typeface="Calibri" pitchFamily="34" charset="-122"/>
                 <a:cs typeface="Calibri" pitchFamily="34" charset="-120"/>
               </a:rPr>
-              <a:t>RQ3 · Quantitative</a:t>
+              <a:t>RQ3a · Accuracy</a:t>
             </a:r>
             <a:endParaRPr lang="en-US" sz="1350" dirty="0"/>
           </a:p>
@@ -12259,8 +15726,8 @@
         </p:nvSpPr>
         <p:spPr>
           <a:xfrm>
-            <a:off x="685800" y="3675888"/>
-            <a:ext cx="5166360" cy="1033272"/>
+            <a:off x="685800" y="3127248"/>
+            <a:ext cx="5166360" cy="603504"/>
           </a:xfrm>
           <a:prstGeom prst="rect">
             <a:avLst/>
@@ -12284,7 +15751,7 @@
                 <a:ea typeface="Calibri" pitchFamily="34" charset="-122"/>
                 <a:cs typeface="Calibri" pitchFamily="34" charset="-120"/>
               </a:rPr>
-              <a:t>How accurately does AI enrichment/routing reproduce human labels on real feedback, across sectors &amp; languages?</a:t>
+              <a:t>How accurately does AI enrichment/routing reproduce human labels on real feedback, across sectors? (answered — three predictors, one gold standard)</a:t>
             </a:r>
             <a:endParaRPr lang="en-US" sz="1150" dirty="0"/>
           </a:p>
@@ -12298,12 +15765,12 @@
         </p:nvSpPr>
         <p:spPr>
           <a:xfrm>
-            <a:off x="6172200" y="3291840"/>
-            <a:ext cx="5440680" cy="1508760"/>
+            <a:off x="6172200" y="2743200"/>
+            <a:ext cx="5440680" cy="1078992"/>
           </a:xfrm>
           <a:prstGeom prst="roundRect">
             <a:avLst>
-              <a:gd name="adj" fmla="val 3636"/>
+              <a:gd name="adj" fmla="val 5085"/>
             </a:avLst>
           </a:prstGeom>
           <a:solidFill>
@@ -12325,7 +15792,7 @@
         </p:nvSpPr>
         <p:spPr>
           <a:xfrm>
-            <a:off x="6309360" y="3383280"/>
+            <a:off x="6309360" y="2834640"/>
             <a:ext cx="5166360" cy="292608"/>
           </a:xfrm>
           <a:prstGeom prst="rect">
@@ -12350,7 +15817,7 @@
                 <a:ea typeface="Calibri" pitchFamily="34" charset="-122"/>
                 <a:cs typeface="Calibri" pitchFamily="34" charset="-120"/>
               </a:rPr>
-              <a:t>RQ4 · Qualitative</a:t>
+              <a:t>RQ3b · Equity</a:t>
             </a:r>
             <a:endParaRPr lang="en-US" sz="1350" dirty="0"/>
           </a:p>
@@ -12364,8 +15831,8 @@
         </p:nvSpPr>
         <p:spPr>
           <a:xfrm>
-            <a:off x="6309360" y="3675888"/>
-            <a:ext cx="5166360" cy="1033272"/>
+            <a:off x="6309360" y="3127248"/>
+            <a:ext cx="5166360" cy="603504"/>
           </a:xfrm>
           <a:prstGeom prst="rect">
             <a:avLst/>
@@ -12389,7 +15856,7 @@
                 <a:ea typeface="Calibri" pitchFamily="34" charset="-122"/>
                 <a:cs typeface="Calibri" pitchFamily="34" charset="-120"/>
               </a:rPr>
-              <a:t>How do practitioners judge usefulness, usability, trustworthiness? (interviews + SUS/TAM — in progress)</a:t>
+              <a:t>Is triage reliability EQUAL across languages — whose problems reach a human? (split out from RQ3 after the August run made it answerable)</a:t>
             </a:r>
             <a:endParaRPr lang="en-US" sz="1150" dirty="0"/>
           </a:p>
@@ -12403,12 +15870,12 @@
         </p:nvSpPr>
         <p:spPr>
           <a:xfrm>
-            <a:off x="548640" y="5120640"/>
-            <a:ext cx="11064240" cy="1143000"/>
+            <a:off x="548640" y="3931920"/>
+            <a:ext cx="11064240" cy="1078992"/>
           </a:xfrm>
           <a:prstGeom prst="roundRect">
             <a:avLst>
-              <a:gd name="adj" fmla="val 4800"/>
+              <a:gd name="adj" fmla="val 5085"/>
             </a:avLst>
           </a:prstGeom>
           <a:solidFill>
@@ -12430,8 +15897,8 @@
         </p:nvSpPr>
         <p:spPr>
           <a:xfrm>
-            <a:off x="777240" y="5257800"/>
-            <a:ext cx="10607040" cy="914400"/>
+            <a:off x="685800" y="4023360"/>
+            <a:ext cx="10789920" cy="292608"/>
           </a:xfrm>
           <a:prstGeom prst="rect">
             <a:avLst/>
@@ -12447,7 +15914,46 @@
               <a:buNone/>
             </a:pPr>
             <a:r>
-              <a:rPr lang="en-US" sz="1350" dirty="0">
+              <a:rPr lang="en-US" sz="1350" b="1" dirty="0">
+                <a:solidFill>
+                  <a:srgbClr val="1E2761"/>
+                </a:solidFill>
+                <a:latin typeface="Calibri" pitchFamily="34" charset="0"/>
+                <a:ea typeface="Calibri" pitchFamily="34" charset="-122"/>
+                <a:cs typeface="Calibri" pitchFamily="34" charset="-120"/>
+              </a:rPr>
+              <a:t>RQ4 · Qualitative</a:t>
+            </a:r>
+            <a:endParaRPr lang="en-US" sz="1350" dirty="0"/>
+          </a:p>
+        </p:txBody>
+      </p:sp>
+      <p:sp>
+        <p:nvSpPr>
+          <p:cNvPr id="26" name="Text 24"/>
+          <p:cNvSpPr/>
+          <p:nvPr/>
+        </p:nvSpPr>
+        <p:spPr>
+          <a:xfrm>
+            <a:off x="685800" y="4315968"/>
+            <a:ext cx="10789920" cy="603504"/>
+          </a:xfrm>
+          <a:prstGeom prst="rect">
+            <a:avLst/>
+          </a:prstGeom>
+          <a:noFill/>
+          <a:ln/>
+        </p:spPr>
+        <p:txBody>
+          <a:bodyPr wrap="square" lIns="0" tIns="0" rIns="0" bIns="0" rtlCol="0" anchor="ctr"/>
+          <a:lstStyle/>
+          <a:p>
+            <a:pPr indent="0" marL="0">
+              <a:buNone/>
+            </a:pPr>
+            <a:r>
+              <a:rPr lang="en-US" sz="1150" dirty="0">
                 <a:solidFill>
                   <a:srgbClr val="1A1A2E"/>
                 </a:solidFill>
@@ -12455,9 +15961,75 @@
                 <a:ea typeface="Calibri" pitchFamily="34" charset="-122"/>
                 <a:cs typeface="Calibri" pitchFamily="34" charset="-120"/>
               </a:rPr>
+              <a:t>How do practitioners judge usefulness, usability, trustworthiness? (interviews + SUS/TAM — not yet started; the critical path)</a:t>
+            </a:r>
+            <a:endParaRPr lang="en-US" sz="1150" dirty="0"/>
+          </a:p>
+        </p:txBody>
+      </p:sp>
+      <p:sp>
+        <p:nvSpPr>
+          <p:cNvPr id="27" name="Shape 25"/>
+          <p:cNvSpPr/>
+          <p:nvPr/>
+        </p:nvSpPr>
+        <p:spPr>
+          <a:xfrm>
+            <a:off x="548640" y="5230368"/>
+            <a:ext cx="11064240" cy="1097280"/>
+          </a:xfrm>
+          <a:prstGeom prst="roundRect">
+            <a:avLst>
+              <a:gd name="adj" fmla="val 5000"/>
+            </a:avLst>
+          </a:prstGeom>
+          <a:solidFill>
+            <a:srgbClr val="F4F7FC"/>
+          </a:solidFill>
+          <a:ln w="12700">
+            <a:solidFill>
+              <a:srgbClr val="CADCFC"/>
+            </a:solidFill>
+            <a:prstDash val="solid"/>
+          </a:ln>
+        </p:spPr>
+      </p:sp>
+      <p:sp>
+        <p:nvSpPr>
+          <p:cNvPr id="28" name="Text 26"/>
+          <p:cNvSpPr/>
+          <p:nvPr/>
+        </p:nvSpPr>
+        <p:spPr>
+          <a:xfrm>
+            <a:off x="777240" y="5349240"/>
+            <a:ext cx="10607040" cy="868680"/>
+          </a:xfrm>
+          <a:prstGeom prst="rect">
+            <a:avLst/>
+          </a:prstGeom>
+          <a:noFill/>
+          <a:ln/>
+        </p:spPr>
+        <p:txBody>
+          <a:bodyPr wrap="square" lIns="0" tIns="0" rIns="0" bIns="0" rtlCol="0" anchor="ctr"/>
+          <a:lstStyle/>
+          <a:p>
+            <a:pPr indent="0" marL="0">
+              <a:buNone/>
+            </a:pPr>
+            <a:r>
+              <a:rPr lang="en-US" sz="1300" dirty="0">
+                <a:solidFill>
+                  <a:srgbClr val="1A1A2E"/>
+                </a:solidFill>
+                <a:latin typeface="Calibri" pitchFamily="34" charset="0"/>
+                <a:ea typeface="Calibri" pitchFamily="34" charset="-122"/>
+                <a:cs typeface="Calibri" pitchFamily="34" charset="-120"/>
+              </a:rPr>
               <a:t>Method: problem-centred DSRM — problem → objectives → design &amp; build → demonstrate → evaluate → communicate. Mixed-methods evaluation: a quantitative gold-set on 188 real, multilingual signals + a practitioner study (12–15 interviews, task sessions, SUS/TAM). Design-validity claims, not statistical effects.</a:t>
             </a:r>
-            <a:endParaRPr lang="en-US" sz="1350" dirty="0"/>
+            <a:endParaRPr lang="en-US" sz="1300" dirty="0"/>
           </a:p>
         </p:txBody>
       </p:sp>

--- a/thesis/defense/defense_deck.pptx
+++ b/thesis/defense/defense_deck.pptx
@@ -6922,7 +6922,7 @@
                 <a:ea typeface="Calibri" pitchFamily="34" charset="-122"/>
                 <a:cs typeface="Calibri" pitchFamily="34" charset="-120"/>
               </a:rPr>
-              <a:t>critical German signals escalated by the keyword floor — none</a:t>
+              <a:t>critical German signals escalated by the keyword floor — none of them</a:t>
             </a:r>
             <a:endParaRPr lang="en-US" sz="1250" dirty="0"/>
           </a:p>
@@ -6961,7 +6961,7 @@
                 <a:ea typeface="Cambria" pitchFamily="34" charset="-122"/>
                 <a:cs typeface="Cambria" pitchFamily="34" charset="-120"/>
               </a:rPr>
-              <a:t>87.5 / 87.8</a:t>
+              <a:t>7 of 8</a:t>
             </a:r>
             <a:endParaRPr lang="en-US" sz="5400" dirty="0"/>
           </a:p>
@@ -7000,7 +7000,7 @@
                 <a:ea typeface="Calibri" pitchFamily="34" charset="-122"/>
                 <a:cs typeface="Calibri" pitchFamily="34" charset="-120"/>
               </a:rPr>
-              <a:t>German / English escalation recall on the LLM path — near-parity</a:t>
+              <a:t>the same signals, escalated by the LLM path — 87.5%, against 87.8% for English</a:t>
             </a:r>
             <a:endParaRPr lang="en-US" sz="1250" dirty="0"/>
           </a:p>

--- a/thesis/defense/defense_deck.pptx
+++ b/thesis/defense/defense_deck.pptx
@@ -1753,7 +1753,7 @@
           <a:p>
             <a:r>
               <a:rPr lang="en-US" dirty="0"/>
-              <a:t>2 min. Walk the diagram left to right: sources → ingestion → enrich → synthesize → rules → the approval diamond → execute → measure → learn, with governance cross-cutting. Emphasise the architectural principle: bounded model, deterministic loop. Single build: CLARA (FastAPI + LangGraph), in production — the earlier prototype is acknowledged once as the first design cycle and archived.</a:t>
+              <a:t>2 min. Walk it left to right: sources → ingestion → enrich → synthesize → rules → the approval diamond → execute → measure → learn, governance cross-cutting. Use the legend deliberately — the colours ARE the argument: blue appears exactly twice, and everything downstream of it is white. If she asks why that matters: a model that can act anywhere cannot be reasoned about in advance; confined to named stages, every point it can influence an outcome is one you can name, test and audit, and the cost is a lower ceiling. The red diamond is a LangGraph interrupt node, not a UI confirmation — there is no code path to an external effect that bypasses it. Single build: CLARA (FastAPI + LangGraph), in production.</a:t>
             </a:r>
             <a:endParaRPr lang="en-US" dirty="0"/>
           </a:p>
@@ -16388,7 +16388,7 @@
         </p:blipFill>
         <p:spPr>
           <a:xfrm>
-            <a:off x="548640" y="1554480"/>
+            <a:off x="548640" y="1481328"/>
             <a:ext cx="11064240" cy="3886200"/>
           </a:xfrm>
           <a:prstGeom prst="rect">
@@ -16398,14 +16398,278 @@
       </p:pic>
       <p:sp>
         <p:nvSpPr>
-          <p:cNvPr id="13" name="Text 10"/>
-          <p:cNvSpPr/>
-          <p:nvPr/>
-        </p:nvSpPr>
-        <p:spPr>
-          <a:xfrm>
-            <a:off x="548640" y="5623560"/>
-            <a:ext cx="11064240" cy="777240"/>
+          <p:cNvPr id="13" name="Shape 10"/>
+          <p:cNvSpPr/>
+          <p:nvPr/>
+        </p:nvSpPr>
+        <p:spPr>
+          <a:xfrm>
+            <a:off x="685800" y="5509260"/>
+            <a:ext cx="201168" cy="201168"/>
+          </a:xfrm>
+          <a:prstGeom prst="roundRect">
+            <a:avLst>
+              <a:gd name="adj" fmla="val 13636"/>
+            </a:avLst>
+          </a:prstGeom>
+          <a:solidFill>
+            <a:srgbClr val="E2ECFD"/>
+          </a:solidFill>
+          <a:ln w="15875">
+            <a:solidFill>
+              <a:srgbClr val="3B6EA5"/>
+            </a:solidFill>
+            <a:prstDash val="solid"/>
+          </a:ln>
+        </p:spPr>
+      </p:sp>
+      <p:sp>
+        <p:nvSpPr>
+          <p:cNvPr id="14" name="Text 11"/>
+          <p:cNvSpPr/>
+          <p:nvPr/>
+        </p:nvSpPr>
+        <p:spPr>
+          <a:xfrm>
+            <a:off x="960120" y="5468112"/>
+            <a:ext cx="2080260" cy="274320"/>
+          </a:xfrm>
+          <a:prstGeom prst="rect">
+            <a:avLst/>
+          </a:prstGeom>
+          <a:noFill/>
+          <a:ln/>
+        </p:spPr>
+        <p:txBody>
+          <a:bodyPr wrap="square" lIns="0" tIns="0" rIns="0" bIns="0" rtlCol="0" anchor="ctr"/>
+          <a:lstStyle/>
+          <a:p>
+            <a:pPr indent="0" marL="0">
+              <a:buNone/>
+            </a:pPr>
+            <a:r>
+              <a:rPr lang="en-US" sz="1150" dirty="0">
+                <a:solidFill>
+                  <a:srgbClr val="1A1A2E"/>
+                </a:solidFill>
+                <a:latin typeface="Calibri" pitchFamily="34" charset="0"/>
+                <a:ea typeface="Calibri" pitchFamily="34" charset="-122"/>
+                <a:cs typeface="Calibri" pitchFamily="34" charset="-120"/>
+              </a:rPr>
+              <a:t>LLM reasoning — only here</a:t>
+            </a:r>
+            <a:endParaRPr lang="en-US" sz="1150" dirty="0"/>
+          </a:p>
+        </p:txBody>
+      </p:sp>
+      <p:sp>
+        <p:nvSpPr>
+          <p:cNvPr id="15" name="Shape 12"/>
+          <p:cNvSpPr/>
+          <p:nvPr/>
+        </p:nvSpPr>
+        <p:spPr>
+          <a:xfrm>
+            <a:off x="3150108" y="5509260"/>
+            <a:ext cx="201168" cy="201168"/>
+          </a:xfrm>
+          <a:prstGeom prst="roundRect">
+            <a:avLst>
+              <a:gd name="adj" fmla="val 13636"/>
+            </a:avLst>
+          </a:prstGeom>
+          <a:solidFill>
+            <a:srgbClr val="FFFFFF"/>
+          </a:solidFill>
+          <a:ln w="15875">
+            <a:solidFill>
+              <a:srgbClr val="5A6478"/>
+            </a:solidFill>
+            <a:prstDash val="solid"/>
+          </a:ln>
+        </p:spPr>
+      </p:sp>
+      <p:sp>
+        <p:nvSpPr>
+          <p:cNvPr id="16" name="Text 13"/>
+          <p:cNvSpPr/>
+          <p:nvPr/>
+        </p:nvSpPr>
+        <p:spPr>
+          <a:xfrm>
+            <a:off x="3424428" y="5468112"/>
+            <a:ext cx="1548994" cy="274320"/>
+          </a:xfrm>
+          <a:prstGeom prst="rect">
+            <a:avLst/>
+          </a:prstGeom>
+          <a:noFill/>
+          <a:ln/>
+        </p:spPr>
+        <p:txBody>
+          <a:bodyPr wrap="square" lIns="0" tIns="0" rIns="0" bIns="0" rtlCol="0" anchor="ctr"/>
+          <a:lstStyle/>
+          <a:p>
+            <a:pPr indent="0" marL="0">
+              <a:buNone/>
+            </a:pPr>
+            <a:r>
+              <a:rPr lang="en-US" sz="1150" dirty="0">
+                <a:solidFill>
+                  <a:srgbClr val="1A1A2E"/>
+                </a:solidFill>
+                <a:latin typeface="Calibri" pitchFamily="34" charset="0"/>
+                <a:ea typeface="Calibri" pitchFamily="34" charset="-122"/>
+                <a:cs typeface="Calibri" pitchFamily="34" charset="-120"/>
+              </a:rPr>
+              <a:t>Deterministic code</a:t>
+            </a:r>
+            <a:endParaRPr lang="en-US" sz="1150" dirty="0"/>
+          </a:p>
+        </p:txBody>
+      </p:sp>
+      <p:sp>
+        <p:nvSpPr>
+          <p:cNvPr id="17" name="Shape 14"/>
+          <p:cNvSpPr/>
+          <p:nvPr/>
+        </p:nvSpPr>
+        <p:spPr>
+          <a:xfrm>
+            <a:off x="5083150" y="5509260"/>
+            <a:ext cx="201168" cy="201168"/>
+          </a:xfrm>
+          <a:prstGeom prst="roundRect">
+            <a:avLst>
+              <a:gd name="adj" fmla="val 13636"/>
+            </a:avLst>
+          </a:prstGeom>
+          <a:solidFill>
+            <a:srgbClr val="FDE2E2"/>
+          </a:solidFill>
+          <a:ln w="15875">
+            <a:solidFill>
+              <a:srgbClr val="C0392B"/>
+            </a:solidFill>
+            <a:prstDash val="solid"/>
+          </a:ln>
+        </p:spPr>
+      </p:sp>
+      <p:sp>
+        <p:nvSpPr>
+          <p:cNvPr id="18" name="Text 15"/>
+          <p:cNvSpPr/>
+          <p:nvPr/>
+        </p:nvSpPr>
+        <p:spPr>
+          <a:xfrm>
+            <a:off x="5357470" y="5468112"/>
+            <a:ext cx="2004365" cy="274320"/>
+          </a:xfrm>
+          <a:prstGeom prst="rect">
+            <a:avLst/>
+          </a:prstGeom>
+          <a:noFill/>
+          <a:ln/>
+        </p:spPr>
+        <p:txBody>
+          <a:bodyPr wrap="square" lIns="0" tIns="0" rIns="0" bIns="0" rtlCol="0" anchor="ctr"/>
+          <a:lstStyle/>
+          <a:p>
+            <a:pPr indent="0" marL="0">
+              <a:buNone/>
+            </a:pPr>
+            <a:r>
+              <a:rPr lang="en-US" sz="1150" dirty="0">
+                <a:solidFill>
+                  <a:srgbClr val="1A1A2E"/>
+                </a:solidFill>
+                <a:latin typeface="Calibri" pitchFamily="34" charset="0"/>
+                <a:ea typeface="Calibri" pitchFamily="34" charset="-122"/>
+                <a:cs typeface="Calibri" pitchFamily="34" charset="-120"/>
+              </a:rPr>
+              <a:t>Governance control point</a:t>
+            </a:r>
+            <a:endParaRPr lang="en-US" sz="1150" dirty="0"/>
+          </a:p>
+        </p:txBody>
+      </p:sp>
+      <p:sp>
+        <p:nvSpPr>
+          <p:cNvPr id="19" name="Shape 16"/>
+          <p:cNvSpPr/>
+          <p:nvPr/>
+        </p:nvSpPr>
+        <p:spPr>
+          <a:xfrm>
+            <a:off x="7471562" y="5509260"/>
+            <a:ext cx="201168" cy="201168"/>
+          </a:xfrm>
+          <a:prstGeom prst="roundRect">
+            <a:avLst>
+              <a:gd name="adj" fmla="val 13636"/>
+            </a:avLst>
+          </a:prstGeom>
+          <a:solidFill>
+            <a:srgbClr val="EEF0F4"/>
+          </a:solidFill>
+          <a:ln w="15875">
+            <a:solidFill>
+              <a:srgbClr val="98A0AE"/>
+            </a:solidFill>
+            <a:prstDash val="solid"/>
+          </a:ln>
+        </p:spPr>
+      </p:sp>
+      <p:sp>
+        <p:nvSpPr>
+          <p:cNvPr id="20" name="Text 17"/>
+          <p:cNvSpPr/>
+          <p:nvPr/>
+        </p:nvSpPr>
+        <p:spPr>
+          <a:xfrm>
+            <a:off x="7745882" y="5468112"/>
+            <a:ext cx="2307946" cy="274320"/>
+          </a:xfrm>
+          <a:prstGeom prst="rect">
+            <a:avLst/>
+          </a:prstGeom>
+          <a:noFill/>
+          <a:ln/>
+        </p:spPr>
+        <p:txBody>
+          <a:bodyPr wrap="square" lIns="0" tIns="0" rIns="0" bIns="0" rtlCol="0" anchor="ctr"/>
+          <a:lstStyle/>
+          <a:p>
+            <a:pPr indent="0" marL="0">
+              <a:buNone/>
+            </a:pPr>
+            <a:r>
+              <a:rPr lang="en-US" sz="1150" dirty="0">
+                <a:solidFill>
+                  <a:srgbClr val="1A1A2E"/>
+                </a:solidFill>
+                <a:latin typeface="Calibri" pitchFamily="34" charset="0"/>
+                <a:ea typeface="Calibri" pitchFamily="34" charset="-122"/>
+                <a:cs typeface="Calibri" pitchFamily="34" charset="-120"/>
+              </a:rPr>
+              <a:t>External system (integrated)</a:t>
+            </a:r>
+            <a:endParaRPr lang="en-US" sz="1150" dirty="0"/>
+          </a:p>
+        </p:txBody>
+      </p:sp>
+      <p:sp>
+        <p:nvSpPr>
+          <p:cNvPr id="21" name="Text 18"/>
+          <p:cNvSpPr/>
+          <p:nvPr/>
+        </p:nvSpPr>
+        <p:spPr>
+          <a:xfrm>
+            <a:off x="548640" y="5888736"/>
+            <a:ext cx="11064240" cy="548640"/>
           </a:xfrm>
           <a:prstGeom prst="rect">
             <a:avLst/>
@@ -16421,7 +16685,7 @@
               <a:buNone/>
             </a:pPr>
             <a:r>
-              <a:rPr lang="en-US" sz="1400" i="1" dirty="0">
+              <a:rPr lang="en-US" sz="1350" i="1" dirty="0">
                 <a:solidFill>
                   <a:srgbClr val="5A6478"/>
                 </a:solidFill>
@@ -16429,9 +16693,9 @@
                 <a:ea typeface="Calibri" pitchFamily="34" charset="-122"/>
                 <a:cs typeface="Calibri" pitchFamily="34" charset="-120"/>
               </a:rPr>
-              <a:t>Deterministic code owns validation, conflict resolution, execution, audit. Language-model reasoning is confined to named, bounded stages. The points where the system can act are finite, named, individually auditable — that is what makes it governable.</a:t>
-            </a:r>
-            <a:endParaRPr lang="en-US" sz="1400" dirty="0"/>
+              <a:t>Only two stages are model-driven. Everything that validates, resolves conflicts, executes and audits is ordinary testable code — so every point where the system can act is finite, named and individually auditable. That is what makes it governable.</a:t>
+            </a:r>
+            <a:endParaRPr lang="en-US" sz="1350" dirty="0"/>
           </a:p>
         </p:txBody>
       </p:sp>

--- a/thesis/defense/defense_deck.pptx
+++ b/thesis/defense/defense_deck.pptx
@@ -526,7 +526,7 @@
           <a:p>
             <a:r>
               <a:rPr lang="en-US" dirty="0"/>
-              <a:t>40 seconds. Thanks for the time. Frame it in one line: organisations collect more feedback than ever and fewer than a third close the loop, and this thesis builds and evaluates a platform where the loop is governed and measured and where what worked is kept. Then say straight away that today is a progress review and that the second slide is the whole meeting, so she can steer from there.</a:t>
+              <a:t>40 seconds. Thanks for the time. Frame it in one line: organisations collect more feedback than ever and rarely verify that acting on it resolved anything, and this thesis builds and evaluates a platform where the loop is governed and measured and where what worked is kept. Then say straight away that today is a progress review and that the second slide is the whole meeting, so she can steer from there.</a:t>
             </a:r>
             <a:endParaRPr lang="en-US" dirty="0"/>
           </a:p>
@@ -1406,7 +1406,7 @@
           <a:p>
             <a:r>
               <a:rPr lang="en-US" dirty="0"/>
-              <a:t>45 seconds if summoned. Anchor on Bone for the gap and on the Uber experiment for why acting without measuring is not enough. The fragmentation line is about the buyer's world, not about what CLARA connects to.</a:t>
+              <a:t>45 seconds if summoned. Anchor on the Forrester series for the gap, on Bone for why solicitation itself has effects, and on the Uber experiment for why acting without measuring is not enough. The fragmentation line is about the buyer's world, not about what CLARA connects to.</a:t>
             </a:r>
             <a:endParaRPr lang="en-US" dirty="0"/>
           </a:p>
@@ -2286,7 +2286,7 @@
           <a:p>
             <a:r>
               <a:rPr lang="en-US" dirty="0"/>
-              <a:t>45 seconds. This is the first time the deck shows the artifact rather than a diagram of it, and the loop bar renders the thesis's five stages as software you can click. If she asks to see it live I can, but flag first that the figures in Chapter 4 are the July build.</a:t>
+              <a:t>45 seconds. This is the first time the deck shows the artifact rather than a diagram of it, and the loop bar renders the thesis's five stages as software you can click. If she asks to see it live I can, but flag first that the Chapter 4 screenshots are the July build.</a:t>
             </a:r>
             <a:endParaRPr lang="en-US" dirty="0"/>
           </a:p>
@@ -12739,7 +12739,7 @@
                 <a:ea typeface="Calibri" pitchFamily="34" charset="-122"/>
                 <a:cs typeface="Calibri" pitchFamily="34" charset="-120"/>
               </a:rPr>
-              <a:t>Fewer than 30% close the loop</a:t>
+              <a:t>Closing the loop is the weak link</a:t>
             </a:r>
             <a:endParaRPr lang="en-US" sz="1450" dirty="0"/>
           </a:p>
@@ -12778,7 +12778,7 @@
                 <a:ea typeface="Calibri" pitchFamily="34" charset="-122"/>
                 <a:cs typeface="Calibri" pitchFamily="34" charset="-120"/>
               </a:rPr>
-              <a:t>Silos, unclear ownership and no workflow from feedback to the responsible team (Bone et al., 2017). Forrester found in 2025 that only 27% of CX teams communicate insights in time to act.</a:t>
+              <a:t>Forrester's 2025 feedback-management series finds close-the-loop practice promising but ineffective, and the communication of feedback too slow to drive action (Forrester, 2025). Bone et al. (2017) show that how feedback is solicited changes what customers then spend, so collection is not neutral either.</a:t>
             </a:r>
             <a:endParaRPr lang="en-US" sz="1200" dirty="0"/>
           </a:p>
@@ -14079,7 +14079,7 @@
       </p:sp>
       <p:pic>
         <p:nvPicPr>
-          <p:cNvPr id="5" name="Image 0" descr="/tank/projects/CLARA/thesis/diagrams/rendered/07_evaluation_pipeline.png">    </p:cNvPr>
+          <p:cNvPr id="5" name="Image 0" descr="/home/user/CLARA/thesis/diagrams/rendered/07_evaluation_pipeline.png">    </p:cNvPr>
           <p:cNvPicPr>
             <a:picLocks noChangeAspect="1"/>
           </p:cNvPicPr>
@@ -14591,7 +14591,7 @@
                 <a:ea typeface="Calibri" pitchFamily="34" charset="-122"/>
                 <a:cs typeface="Calibri" pitchFamily="34" charset="-120"/>
               </a:rPr>
-              <a:t>One typed LangGraph: enrich, synthesise, evaluate rules, interrupt for human approval, execute, measure, learn. The interrupt is the Article 14 gate, and there is no code path to an external effect that goes around it. About 84 REST endpoints across seven domain routers.</a:t>
+              <a:t>One typed LangGraph: enrich, synthesise, evaluate rules, interrupt for human approval, execute, measure, learn. The interrupt is the Article 14 gate, and there is no code path to an external effect that goes around it. About 89 REST endpoints across seven domain routers.</a:t>
             </a:r>
             <a:endParaRPr lang="en-US" sz="1200" dirty="0"/>
           </a:p>
@@ -14945,7 +14945,7 @@
                 <a:ea typeface="Calibri" pitchFamily="34" charset="-122"/>
                 <a:cs typeface="Calibri" pitchFamily="34" charset="-120"/>
               </a:rPr>
-              <a:t>The rendered architecture figure still prints an older endpoint count and is queued for a re-render. The numbers above are the verified ones.</a:t>
+              <a:t>Diagrams re-rendered from the September sources, which draw the deployed graph and tables. The numbers above are the verified ones.</a:t>
             </a:r>
             <a:endParaRPr lang="en-US" sz="1300" dirty="0"/>
           </a:p>
@@ -15095,7 +15095,7 @@
       </p:sp>
       <p:pic>
         <p:nvPicPr>
-          <p:cNvPr id="5" name="Image 0" descr="/tank/projects/CLARA/thesis/diagrams/rendered/04_pipeline_flow.png">    </p:cNvPr>
+          <p:cNvPr id="5" name="Image 0" descr="/home/user/CLARA/thesis/diagrams/rendered/04_pipeline_flow.png">    </p:cNvPr>
           <p:cNvPicPr>
             <a:picLocks noChangeAspect="1"/>
           </p:cNvPicPr>
@@ -15119,7 +15119,7 @@
       </p:pic>
       <p:pic>
         <p:nvPicPr>
-          <p:cNvPr id="6" name="Image 1" descr="/tank/projects/CLARA/thesis/diagrams/rendered/05_sequence_hitl.png">    </p:cNvPr>
+          <p:cNvPr id="6" name="Image 1" descr="/home/user/CLARA/thesis/diagrams/rendered/05_sequence_hitl.png">    </p:cNvPr>
           <p:cNvPicPr>
             <a:picLocks noChangeAspect="1"/>
           </p:cNvPicPr>
@@ -15324,7 +15324,7 @@
       </p:sp>
       <p:pic>
         <p:nvPicPr>
-          <p:cNvPr id="5" name="Image 0" descr="/tank/projects/CLARA/thesis/diagrams/rendered/06_data_model_er.png">    </p:cNvPr>
+          <p:cNvPr id="5" name="Image 0" descr="/home/user/CLARA/thesis/diagrams/rendered/06_data_model_er.png">    </p:cNvPr>
           <p:cNvPicPr>
             <a:picLocks noChangeAspect="1"/>
           </p:cNvPicPr>
@@ -15863,7 +15863,7 @@
                 <a:ea typeface="Calibri" pitchFamily="34" charset="-122"/>
                 <a:cs typeface="Calibri" pitchFamily="34" charset="-120"/>
               </a:rPr>
-              <a:t>1. Rule conflict resolution</a:t>
+              <a:t>1. Authority graduated by consequence class</a:t>
             </a:r>
             <a:endParaRPr lang="en-US" sz="1450" dirty="0"/>
           </a:p>
@@ -15902,7 +15902,7 @@
                 <a:ea typeface="Calibri" pitchFamily="34" charset="-122"/>
                 <a:cs typeface="Calibri" pitchFamily="34" charset="-120"/>
               </a:rPr>
-              <a:t>Priority, then specificity, then action-type deduplication, with superseded rules logged. Cost: configuration debt. It entrenches a wrong rule as faithfully as a right one.</a:t>
+              <a:t>Every action is a draft; a person approves it, and consequential actions can require two. The first design cycle resolved rule conflicts by priority, specificity and de-duplication; the deployed build keeps rules as configuration and puts the decision with the reviewer. Cost: throughput is bounded by reviewer attention.</a:t>
             </a:r>
             <a:endParaRPr lang="en-US" sz="1200" dirty="0"/>
           </a:p>
@@ -18179,7 +18179,7 @@
       </p:sp>
       <p:pic>
         <p:nvPicPr>
-          <p:cNvPr id="5" name="Image 0" descr="/tank/projects/CLARA/thesis/defense/01_architecture_colour.png">    </p:cNvPr>
+          <p:cNvPr id="5" name="Image 0" descr="/home/user/CLARA/thesis/defense/01_architecture_colour.png">    </p:cNvPr>
           <p:cNvPicPr>
             <a:picLocks noChangeAspect="1"/>
           </p:cNvPicPr>
@@ -18648,7 +18648,7 @@
       </p:sp>
       <p:pic>
         <p:nvPicPr>
-          <p:cNvPr id="5" name="Image 0" descr="/tank/projects/CLARA/apps/web/public/images/product-loop-bar.jpg">    </p:cNvPr>
+          <p:cNvPr id="5" name="Image 0" descr="/home/user/CLARA/apps/web/public/images/product-loop-bar.jpg">    </p:cNvPr>
           <p:cNvPicPr>
             <a:picLocks noChangeAspect="1"/>
           </p:cNvPicPr>
@@ -18672,7 +18672,7 @@
       </p:pic>
       <p:pic>
         <p:nvPicPr>
-          <p:cNvPr id="6" name="Image 1" descr="/tank/projects/CLARA/apps/web/public/images/product-decision-queue.jpg">    </p:cNvPr>
+          <p:cNvPr id="6" name="Image 1" descr="/home/user/CLARA/apps/web/public/images/product-decision-queue.jpg">    </p:cNvPr>
           <p:cNvPicPr>
             <a:picLocks noChangeAspect="1"/>
           </p:cNvPicPr>
@@ -18871,7 +18871,7 @@
                 <a:ea typeface="Calibri" pitchFamily="34" charset="-122"/>
                 <a:cs typeface="Calibri" pitchFamily="34" charset="-120"/>
               </a:rPr>
-              <a:t>Every count on this page comes from one shared status function, so the numbers reconcile by construction rather than by discipline. That is the same commitment the thesis makes about closure: an outcome contract is a foreign key at creation, not a status flag someone remembers to set. The manuscript figures still show the 16 July build, since this redesign landed on 13 August.</a:t>
+              <a:t>Every count on this page comes from one shared status function, so the numbers reconcile by construction rather than by discipline. That is the same commitment the thesis makes about closure: an outcome contract is a foreign key at creation, not a status flag someone remembers to set. The Chapter 4 diagrams were re-rendered in September from the deployed build; the screenshots are from the 16 July build, before this redesign landed on 13 August.</a:t>
             </a:r>
             <a:endParaRPr lang="en-US" sz="1350" dirty="0"/>
           </a:p>
@@ -19118,7 +19118,7 @@
                 <a:ea typeface="Calibri" pitchFamily="34" charset="-122"/>
                 <a:cs typeface="Calibri" pitchFamily="34" charset="-120"/>
               </a:rPr>
-              <a:t>A rule with auto_execute false makes the graph interrupt and wait. The interrupt is the gate, so no code path reaches an external effect without it. Designed past the Article requirement, because awareness alone does not de-bias an overseer (Laux and Ruschemeier, 2025; Siebert et al., 2023).</a:t>
+              <a:t>Every consequential action is a draft until a person approves it: the graph's approval node is a LangGraph interrupt, and no code path reaches an external effect without a recorded approval. Authority is graduated by consequence class, from draft to single approval to four-eyes. Designed past the Article requirement, because awareness alone does not de-bias an overseer (Laux and Ruschemeier, 2025; Siebert et al., 2023).</a:t>
             </a:r>
             <a:endParaRPr lang="en-US" sz="1300" dirty="0"/>
           </a:p>
@@ -19433,7 +19433,7 @@
                 <a:ea typeface="Calibri" pitchFamily="34" charset="-122"/>
                 <a:cs typeface="Calibri" pitchFamily="34" charset="-120"/>
               </a:rPr>
-              <a:t>The model layer is provider agnostic, so it runs hosted, behind an EU gateway, or self-hosted. PII masking, retention limits and workspace isolation enforced in Postgres below the application. Sentiment on text is not emotion recognition under Article 3(39), which is biometric.</a:t>
+              <a:t>The model layer is provider agnostic, so it runs hosted, behind an EU gateway, or self-hosted. Direct identifiers are redacted before any text reaches a model; retention limits and workspace isolation are enforced in Postgres below the application. Sentiment on text is not emotion recognition under Article 3(39), which is biometric.</a:t>
             </a:r>
             <a:endParaRPr lang="en-US" sz="1300" dirty="0"/>
           </a:p>
@@ -21812,7 +21812,7 @@
       </p:sp>
       <p:pic>
         <p:nvPicPr>
-          <p:cNvPr id="10" name="Image 0" descr="/tank/projects/CLARA/thesis/evaluation/results/risk_confusion.png">    </p:cNvPr>
+          <p:cNvPr id="10" name="Image 0" descr="/home/user/CLARA/thesis/evaluation/results/risk_confusion.png">    </p:cNvPr>
           <p:cNvPicPr>
             <a:picLocks noChangeAspect="1"/>
           </p:cNvPicPr>

--- a/thesis/defense/defense_deck.pptx
+++ b/thesis/defense/defense_deck.pptx
@@ -17753,7 +17753,7 @@
                 <a:ea typeface="Calibri" pitchFamily="34" charset="-122"/>
                 <a:cs typeface="Calibri" pitchFamily="34" charset="-120"/>
               </a:rPr>
-              <a:t>How accurately does AI enrichment and routing reproduce human labels on real feedback, across sectors? Answered: three predictors on one gold standard.</a:t>
+              <a:t>How accurately does AI enrichment and routing reproduce reference labels (star ratings, assistant-drafted seeds) on real feedback, across sectors? Answered: three predictors on one gold standard.</a:t>
             </a:r>
             <a:endParaRPr lang="en-US" sz="1300" dirty="0"/>
           </a:p>

--- a/thesis/defense/defense_deck.pptx
+++ b/thesis/defense/defense_deck.pptx
@@ -2638,7 +2638,7 @@
           <a:p>
             <a:r>
               <a:rPr lang="en-US" dirty="0"/>
-              <a:t>2 minutes. Walk the three rungs, then go to the paired tests, which are new since she last saw this. The honest headline is that the contextual path is not measurably better than a TF-IDF model on severity at this sample size. The confusion matrix shows how the floor fails: it calls 19 of the 27 critical signals low and gets only 4 of them right, a recall of 0.15. Two caveats to have ready. The severity numbers come from Trade Republic and Henkel only, because Lieferando ships no risk label, so food delivery is absent from every n = 106 figure. And the learned model is five-fold cross-validated while the contextual path was run once at temperature 0. If she asks whether 0.86 or the 0.97 on the in-repo set is the real number: different gold standards, curated sets select for label clarity, and the thesis quotes 0.86.</a:t>
+              <a:t>2 minutes. Walk the three rungs, then go to the paired tests, which are new since she last saw this. The honest headline is that the contextual path is not measurably better than a TF-IDF model on severity at this sample size. The confusion matrix shows how the floor fails: it calls 19 of the 27 critical signals low and gets only 4 of them right, a recall of 0.15. Two caveats to have ready. The severity numbers come from Trade Republic and Henkel only, because Lieferando ships no risk label, so food delivery is absent from every n = 106 figure. And the learned model is five-fold cross-validated while the contextual path was run once at temperature 0. If she asks whether 0.86 or the 0.97 on the in-repo set is the real number: different gold standards, curated sets select for label clarity, and the thesis quotes the star-proxy figures (0.86 for the prompt, 0.83 and 0.84 for the production stage). New since August: the production stage was run on the corpus on both models, the generic prompt four times, and the production default is close to deterministic at temperature 0.</a:t>
             </a:r>
             <a:endParaRPr lang="en-US" dirty="0"/>
           </a:p>
@@ -3741,11 +3741,12 @@
             <a:tbl>
               <a:tblPr/>
               <a:tblGrid>
-                <a:gridCol w="2377440"/>
-                <a:gridCol w="548640"/>
-                <a:gridCol w="1554480"/>
-                <a:gridCol w="1554480"/>
-                <a:gridCol w="1005840"/>
+                <a:gridCol w="2011680"/>
+                <a:gridCol w="457200"/>
+                <a:gridCol w="1280160"/>
+                <a:gridCol w="1280160"/>
+                <a:gridCol w="1097280"/>
+                <a:gridCol w="914400"/>
               </a:tblGrid>
               <a:tr h="457200">
                 <a:tc>
@@ -4038,6 +4039,74 @@
                           <a:cs typeface="Calibri" pitchFamily="34" charset="-120"/>
                         </a:rPr>
                         <a:t>Contextual path</a:t>
+                      </a:r>
+                      <a:endParaRPr lang="en-US" sz="1400" dirty="0">
+                        <a:latin typeface="Calibri" charset="0"/>
+                        <a:ea typeface="Calibri" charset="0"/>
+                        <a:cs typeface="Calibri" charset="0"/>
+                      </a:endParaRPr>
+                    </a:p>
+                  </a:txBody>
+                  <a:tcPr marL="91440" marR="91440" marT="45720" marB="45720" anchor="ctr">
+                    <a:lnL w="12700" cap="flat" cmpd="sng" algn="ctr">
+                      <a:solidFill>
+                        <a:srgbClr val="CADCFC"/>
+                      </a:solidFill>
+                      <a:prstDash val="solid"/>
+                      <a:round/>
+                      <a:headEnd type="none" w="med" len="med"/>
+                      <a:tailEnd type="none" w="med" len="med"/>
+                    </a:lnL>
+                    <a:lnR w="12700" cap="flat" cmpd="sng" algn="ctr">
+                      <a:solidFill>
+                        <a:srgbClr val="CADCFC"/>
+                      </a:solidFill>
+                      <a:prstDash val="solid"/>
+                      <a:round/>
+                      <a:headEnd type="none" w="med" len="med"/>
+                      <a:tailEnd type="none" w="med" len="med"/>
+                    </a:lnR>
+                    <a:lnT w="12700" cap="flat" cmpd="sng" algn="ctr">
+                      <a:solidFill>
+                        <a:srgbClr val="CADCFC"/>
+                      </a:solidFill>
+                      <a:prstDash val="solid"/>
+                      <a:round/>
+                      <a:headEnd type="none" w="med" len="med"/>
+                      <a:tailEnd type="none" w="med" len="med"/>
+                    </a:lnT>
+                    <a:lnB w="12700" cap="flat" cmpd="sng" algn="ctr">
+                      <a:solidFill>
+                        <a:srgbClr val="CADCFC"/>
+                      </a:solidFill>
+                      <a:prstDash val="solid"/>
+                      <a:round/>
+                      <a:headEnd type="none" w="med" len="med"/>
+                      <a:tailEnd type="none" w="med" len="med"/>
+                    </a:lnB>
+                    <a:solidFill>
+                      <a:srgbClr val="1E2761"/>
+                    </a:solidFill>
+                  </a:tcPr>
+                </a:tc>
+                <a:tc>
+                  <a:txBody>
+                    <a:bodyPr/>
+                    <a:lstStyle/>
+                    <a:p>
+                      <a:pPr indent="0" marL="0">
+                        <a:buNone/>
+                      </a:pPr>
+                      <a:r>
+                        <a:rPr lang="en-US" sz="1400" b="1" dirty="0">
+                          <a:solidFill>
+                            <a:srgbClr val="FFFFFF"/>
+                          </a:solidFill>
+                          <a:latin typeface="Calibri" pitchFamily="34" charset="0"/>
+                          <a:ea typeface="Calibri" pitchFamily="34" charset="-122"/>
+                          <a:cs typeface="Calibri" pitchFamily="34" charset="-120"/>
+                        </a:rPr>
+                        <a:t>Production stage</a:t>
                       </a:r>
                       <a:endParaRPr lang="en-US" sz="1400" dirty="0">
                         <a:latin typeface="Calibri" charset="0"/>
@@ -4415,6 +4484,71 @@
                     </a:lnB>
                   </a:tcPr>
                 </a:tc>
+                <a:tc>
+                  <a:txBody>
+                    <a:bodyPr/>
+                    <a:lstStyle/>
+                    <a:p>
+                      <a:pPr indent="0" marL="0">
+                        <a:buNone/>
+                      </a:pPr>
+                      <a:r>
+                        <a:rPr lang="en-US" sz="1400" dirty="0">
+                          <a:solidFill>
+                            <a:srgbClr val="000000"/>
+                          </a:solidFill>
+                          <a:latin typeface="Calibri" pitchFamily="34" charset="0"/>
+                          <a:ea typeface="Calibri" pitchFamily="34" charset="-122"/>
+                          <a:cs typeface="Calibri" pitchFamily="34" charset="-120"/>
+                        </a:rPr>
+                        <a:t>62.5%</a:t>
+                      </a:r>
+                      <a:endParaRPr lang="en-US" sz="1400" dirty="0">
+                        <a:latin typeface="Calibri" charset="0"/>
+                        <a:ea typeface="Calibri" charset="0"/>
+                        <a:cs typeface="Calibri" charset="0"/>
+                      </a:endParaRPr>
+                    </a:p>
+                  </a:txBody>
+                  <a:tcPr marL="91440" marR="91440" marT="45720" marB="45720" anchor="ctr">
+                    <a:lnL w="12700" cap="flat" cmpd="sng" algn="ctr">
+                      <a:solidFill>
+                        <a:srgbClr val="CADCFC"/>
+                      </a:solidFill>
+                      <a:prstDash val="solid"/>
+                      <a:round/>
+                      <a:headEnd type="none" w="med" len="med"/>
+                      <a:tailEnd type="none" w="med" len="med"/>
+                    </a:lnL>
+                    <a:lnR w="12700" cap="flat" cmpd="sng" algn="ctr">
+                      <a:solidFill>
+                        <a:srgbClr val="CADCFC"/>
+                      </a:solidFill>
+                      <a:prstDash val="solid"/>
+                      <a:round/>
+                      <a:headEnd type="none" w="med" len="med"/>
+                      <a:tailEnd type="none" w="med" len="med"/>
+                    </a:lnR>
+                    <a:lnT w="12700" cap="flat" cmpd="sng" algn="ctr">
+                      <a:solidFill>
+                        <a:srgbClr val="CADCFC"/>
+                      </a:solidFill>
+                      <a:prstDash val="solid"/>
+                      <a:round/>
+                      <a:headEnd type="none" w="med" len="med"/>
+                      <a:tailEnd type="none" w="med" len="med"/>
+                    </a:lnT>
+                    <a:lnB w="12700" cap="flat" cmpd="sng" algn="ctr">
+                      <a:solidFill>
+                        <a:srgbClr val="CADCFC"/>
+                      </a:solidFill>
+                      <a:prstDash val="solid"/>
+                      <a:round/>
+                      <a:headEnd type="none" w="med" len="med"/>
+                      <a:tailEnd type="none" w="med" len="med"/>
+                    </a:lnB>
+                  </a:tcPr>
+                </a:tc>
               </a:tr>
               <a:tr h="457200">
                 <a:tc>
@@ -4742,6 +4876,71 @@
                     </a:lnB>
                   </a:tcPr>
                 </a:tc>
+                <a:tc>
+                  <a:txBody>
+                    <a:bodyPr/>
+                    <a:lstStyle/>
+                    <a:p>
+                      <a:pPr indent="0" marL="0">
+                        <a:buNone/>
+                      </a:pPr>
+                      <a:r>
+                        <a:rPr lang="en-US" sz="1400" dirty="0">
+                          <a:solidFill>
+                            <a:srgbClr val="000000"/>
+                          </a:solidFill>
+                          <a:latin typeface="Calibri" pitchFamily="34" charset="0"/>
+                          <a:ea typeface="Calibri" pitchFamily="34" charset="-122"/>
+                          <a:cs typeface="Calibri" pitchFamily="34" charset="-120"/>
+                        </a:rPr>
+                        <a:t>53.7%</a:t>
+                      </a:r>
+                      <a:endParaRPr lang="en-US" sz="1400" dirty="0">
+                        <a:latin typeface="Calibri" charset="0"/>
+                        <a:ea typeface="Calibri" charset="0"/>
+                        <a:cs typeface="Calibri" charset="0"/>
+                      </a:endParaRPr>
+                    </a:p>
+                  </a:txBody>
+                  <a:tcPr marL="91440" marR="91440" marT="45720" marB="45720" anchor="ctr">
+                    <a:lnL w="12700" cap="flat" cmpd="sng" algn="ctr">
+                      <a:solidFill>
+                        <a:srgbClr val="CADCFC"/>
+                      </a:solidFill>
+                      <a:prstDash val="solid"/>
+                      <a:round/>
+                      <a:headEnd type="none" w="med" len="med"/>
+                      <a:tailEnd type="none" w="med" len="med"/>
+                    </a:lnL>
+                    <a:lnR w="12700" cap="flat" cmpd="sng" algn="ctr">
+                      <a:solidFill>
+                        <a:srgbClr val="CADCFC"/>
+                      </a:solidFill>
+                      <a:prstDash val="solid"/>
+                      <a:round/>
+                      <a:headEnd type="none" w="med" len="med"/>
+                      <a:tailEnd type="none" w="med" len="med"/>
+                    </a:lnR>
+                    <a:lnT w="12700" cap="flat" cmpd="sng" algn="ctr">
+                      <a:solidFill>
+                        <a:srgbClr val="CADCFC"/>
+                      </a:solidFill>
+                      <a:prstDash val="solid"/>
+                      <a:round/>
+                      <a:headEnd type="none" w="med" len="med"/>
+                      <a:tailEnd type="none" w="med" len="med"/>
+                    </a:lnT>
+                    <a:lnB w="12700" cap="flat" cmpd="sng" algn="ctr">
+                      <a:solidFill>
+                        <a:srgbClr val="CADCFC"/>
+                      </a:solidFill>
+                      <a:prstDash val="solid"/>
+                      <a:round/>
+                      <a:headEnd type="none" w="med" len="med"/>
+                      <a:tailEnd type="none" w="med" len="med"/>
+                    </a:lnB>
+                  </a:tcPr>
+                </a:tc>
               </a:tr>
             </a:tbl>
           </a:graphicData>
@@ -4780,7 +4979,7 @@
                 <a:ea typeface="Calibri" pitchFamily="34" charset="-122"/>
                 <a:cs typeface="Calibri" pitchFamily="34" charset="-120"/>
               </a:rPr>
-              <a:t>On the same eight critical German-source signals: the floor escalates none of them, the learned model five, the contextual path seven. The learned model does not separate from the contextual path on aggregate severity accuracy (p = 0.644) and very distinguishable in whom it escalates: 32.6 points between the strata.</a:t>
+              <a:t>On the same eight critical German-source signals: the floor escalates none, the learned model five, the contextual path seven (six in each repeat, 78 to 81% on the English side). The learned model ties the contextual path on severity accuracy and differs in whom it escalates: 32.6 points between strata. The production stage escalates fewer in both, with no detectable gap.</a:t>
             </a:r>
             <a:endParaRPr lang="en-US" sz="1400" dirty="0"/>
           </a:p>
@@ -9587,7 +9786,7 @@
                           <a:ea typeface="Calibri" pitchFamily="34" charset="-122"/>
                           <a:cs typeface="Calibri" pitchFamily="34" charset="-120"/>
                         </a:rPr>
-                        <a:t>floor 0.0, learned 62.5, contextual 87.5 against 87.8; stratum n = 8</a:t>
+                        <a:t>floor 0.0, learned 62.5, contextual 87.5 vs 87.8, production 62.5 vs 53.7; n = 8</a:t>
                       </a:r>
                       <a:endParaRPr lang="en-US" sz="1400" dirty="0">
                         <a:latin typeface="Calibri" charset="0"/>
@@ -9981,7 +10180,7 @@
                           <a:ea typeface="Calibri" pitchFamily="34" charset="-122"/>
                           <a:cs typeface="Calibri" pitchFamily="34" charset="-120"/>
                         </a:rPr>
-                        <a:t>remedy adoption 21% to 71%; the outcomes behind it are simulated</a:t>
+                        <a:t>remedy adoption 21% to 71%; replicated on GLM-5.2, not on the production default; simulated outcomes</a:t>
                       </a:r>
                       <a:endParaRPr lang="en-US" sz="1400" dirty="0">
                         <a:latin typeface="Calibri" charset="0"/>
@@ -17753,7 +17952,7 @@
                 <a:ea typeface="Calibri" pitchFamily="34" charset="-122"/>
                 <a:cs typeface="Calibri" pitchFamily="34" charset="-120"/>
               </a:rPr>
-              <a:t>How accurately does AI enrichment and routing reproduce reference labels (star ratings, assistant-drafted seeds) on real feedback, across sectors? Answered: three predictors on one gold standard.</a:t>
+              <a:t>How accurately does AI enrichment and routing reproduce reference labels on real feedback, across sectors? Answered: three predictors on one gold standard.</a:t>
             </a:r>
             <a:endParaRPr lang="en-US" sz="1300" dirty="0"/>
           </a:p>
@@ -21483,7 +21682,7 @@
                           <a:ea typeface="Calibri" pitchFamily="34" charset="-122"/>
                           <a:cs typeface="Calibri" pitchFamily="34" charset="-120"/>
                         </a:rPr>
-                        <a:t>Contextual model path</a:t>
+                        <a:t>Contextual model path (generic prompt)</a:t>
                       </a:r>
                       <a:endParaRPr lang="en-US" sz="1400" dirty="0">
                         <a:latin typeface="Calibri" charset="0"/>
@@ -21662,6 +21861,400 @@
                   </a:tcPr>
                 </a:tc>
               </a:tr>
+              <a:tr h="457200">
+                <a:tc>
+                  <a:txBody>
+                    <a:bodyPr/>
+                    <a:lstStyle/>
+                    <a:p>
+                      <a:pPr indent="0" marL="0">
+                        <a:buNone/>
+                      </a:pPr>
+                      <a:r>
+                        <a:rPr lang="en-US" sz="1400" dirty="0">
+                          <a:solidFill>
+                            <a:srgbClr val="000000"/>
+                          </a:solidFill>
+                          <a:latin typeface="Calibri" pitchFamily="34" charset="0"/>
+                          <a:ea typeface="Calibri" pitchFamily="34" charset="-122"/>
+                          <a:cs typeface="Calibri" pitchFamily="34" charset="-120"/>
+                        </a:rPr>
+                        <a:t>Production enrichment stage, same model</a:t>
+                      </a:r>
+                      <a:endParaRPr lang="en-US" sz="1400" dirty="0">
+                        <a:latin typeface="Calibri" charset="0"/>
+                        <a:ea typeface="Calibri" charset="0"/>
+                        <a:cs typeface="Calibri" charset="0"/>
+                      </a:endParaRPr>
+                    </a:p>
+                  </a:txBody>
+                  <a:tcPr marL="91440" marR="91440" marT="45720" marB="45720" anchor="ctr">
+                    <a:lnL w="12700" cap="flat" cmpd="sng" algn="ctr">
+                      <a:solidFill>
+                        <a:srgbClr val="CADCFC"/>
+                      </a:solidFill>
+                      <a:prstDash val="solid"/>
+                      <a:round/>
+                      <a:headEnd type="none" w="med" len="med"/>
+                      <a:tailEnd type="none" w="med" len="med"/>
+                    </a:lnL>
+                    <a:lnR w="12700" cap="flat" cmpd="sng" algn="ctr">
+                      <a:solidFill>
+                        <a:srgbClr val="CADCFC"/>
+                      </a:solidFill>
+                      <a:prstDash val="solid"/>
+                      <a:round/>
+                      <a:headEnd type="none" w="med" len="med"/>
+                      <a:tailEnd type="none" w="med" len="med"/>
+                    </a:lnR>
+                    <a:lnT w="12700" cap="flat" cmpd="sng" algn="ctr">
+                      <a:solidFill>
+                        <a:srgbClr val="CADCFC"/>
+                      </a:solidFill>
+                      <a:prstDash val="solid"/>
+                      <a:round/>
+                      <a:headEnd type="none" w="med" len="med"/>
+                      <a:tailEnd type="none" w="med" len="med"/>
+                    </a:lnT>
+                    <a:lnB w="12700" cap="flat" cmpd="sng" algn="ctr">
+                      <a:solidFill>
+                        <a:srgbClr val="CADCFC"/>
+                      </a:solidFill>
+                      <a:prstDash val="solid"/>
+                      <a:round/>
+                      <a:headEnd type="none" w="med" len="med"/>
+                      <a:tailEnd type="none" w="med" len="med"/>
+                    </a:lnB>
+                  </a:tcPr>
+                </a:tc>
+                <a:tc>
+                  <a:txBody>
+                    <a:bodyPr/>
+                    <a:lstStyle/>
+                    <a:p>
+                      <a:pPr indent="0" marL="0">
+                        <a:buNone/>
+                      </a:pPr>
+                      <a:r>
+                        <a:rPr lang="en-US" sz="1400" dirty="0">
+                          <a:solidFill>
+                            <a:srgbClr val="000000"/>
+                          </a:solidFill>
+                          <a:latin typeface="Calibri" pitchFamily="34" charset="0"/>
+                          <a:ea typeface="Calibri" pitchFamily="34" charset="-122"/>
+                          <a:cs typeface="Calibri" pitchFamily="34" charset="-120"/>
+                        </a:rPr>
+                        <a:t>0.83</a:t>
+                      </a:r>
+                      <a:endParaRPr lang="en-US" sz="1400" dirty="0">
+                        <a:latin typeface="Calibri" charset="0"/>
+                        <a:ea typeface="Calibri" charset="0"/>
+                        <a:cs typeface="Calibri" charset="0"/>
+                      </a:endParaRPr>
+                    </a:p>
+                  </a:txBody>
+                  <a:tcPr marL="91440" marR="91440" marT="45720" marB="45720" anchor="ctr">
+                    <a:lnL w="12700" cap="flat" cmpd="sng" algn="ctr">
+                      <a:solidFill>
+                        <a:srgbClr val="CADCFC"/>
+                      </a:solidFill>
+                      <a:prstDash val="solid"/>
+                      <a:round/>
+                      <a:headEnd type="none" w="med" len="med"/>
+                      <a:tailEnd type="none" w="med" len="med"/>
+                    </a:lnL>
+                    <a:lnR w="12700" cap="flat" cmpd="sng" algn="ctr">
+                      <a:solidFill>
+                        <a:srgbClr val="CADCFC"/>
+                      </a:solidFill>
+                      <a:prstDash val="solid"/>
+                      <a:round/>
+                      <a:headEnd type="none" w="med" len="med"/>
+                      <a:tailEnd type="none" w="med" len="med"/>
+                    </a:lnR>
+                    <a:lnT w="12700" cap="flat" cmpd="sng" algn="ctr">
+                      <a:solidFill>
+                        <a:srgbClr val="CADCFC"/>
+                      </a:solidFill>
+                      <a:prstDash val="solid"/>
+                      <a:round/>
+                      <a:headEnd type="none" w="med" len="med"/>
+                      <a:tailEnd type="none" w="med" len="med"/>
+                    </a:lnT>
+                    <a:lnB w="12700" cap="flat" cmpd="sng" algn="ctr">
+                      <a:solidFill>
+                        <a:srgbClr val="CADCFC"/>
+                      </a:solidFill>
+                      <a:prstDash val="solid"/>
+                      <a:round/>
+                      <a:headEnd type="none" w="med" len="med"/>
+                      <a:tailEnd type="none" w="med" len="med"/>
+                    </a:lnB>
+                  </a:tcPr>
+                </a:tc>
+                <a:tc>
+                  <a:txBody>
+                    <a:bodyPr/>
+                    <a:lstStyle/>
+                    <a:p>
+                      <a:pPr indent="0" marL="0">
+                        <a:buNone/>
+                      </a:pPr>
+                      <a:r>
+                        <a:rPr lang="en-US" sz="1400" dirty="0">
+                          <a:solidFill>
+                            <a:srgbClr val="000000"/>
+                          </a:solidFill>
+                          <a:latin typeface="Calibri" pitchFamily="34" charset="0"/>
+                          <a:ea typeface="Calibri" pitchFamily="34" charset="-122"/>
+                          <a:cs typeface="Calibri" pitchFamily="34" charset="-120"/>
+                        </a:rPr>
+                        <a:t>0.41</a:t>
+                      </a:r>
+                      <a:endParaRPr lang="en-US" sz="1400" dirty="0">
+                        <a:latin typeface="Calibri" charset="0"/>
+                        <a:ea typeface="Calibri" charset="0"/>
+                        <a:cs typeface="Calibri" charset="0"/>
+                      </a:endParaRPr>
+                    </a:p>
+                  </a:txBody>
+                  <a:tcPr marL="91440" marR="91440" marT="45720" marB="45720" anchor="ctr">
+                    <a:lnL w="12700" cap="flat" cmpd="sng" algn="ctr">
+                      <a:solidFill>
+                        <a:srgbClr val="CADCFC"/>
+                      </a:solidFill>
+                      <a:prstDash val="solid"/>
+                      <a:round/>
+                      <a:headEnd type="none" w="med" len="med"/>
+                      <a:tailEnd type="none" w="med" len="med"/>
+                    </a:lnL>
+                    <a:lnR w="12700" cap="flat" cmpd="sng" algn="ctr">
+                      <a:solidFill>
+                        <a:srgbClr val="CADCFC"/>
+                      </a:solidFill>
+                      <a:prstDash val="solid"/>
+                      <a:round/>
+                      <a:headEnd type="none" w="med" len="med"/>
+                      <a:tailEnd type="none" w="med" len="med"/>
+                    </a:lnR>
+                    <a:lnT w="12700" cap="flat" cmpd="sng" algn="ctr">
+                      <a:solidFill>
+                        <a:srgbClr val="CADCFC"/>
+                      </a:solidFill>
+                      <a:prstDash val="solid"/>
+                      <a:round/>
+                      <a:headEnd type="none" w="med" len="med"/>
+                      <a:tailEnd type="none" w="med" len="med"/>
+                    </a:lnT>
+                    <a:lnB w="12700" cap="flat" cmpd="sng" algn="ctr">
+                      <a:solidFill>
+                        <a:srgbClr val="CADCFC"/>
+                      </a:solidFill>
+                      <a:prstDash val="solid"/>
+                      <a:round/>
+                      <a:headEnd type="none" w="med" len="med"/>
+                      <a:tailEnd type="none" w="med" len="med"/>
+                    </a:lnB>
+                  </a:tcPr>
+                </a:tc>
+              </a:tr>
+              <a:tr h="457200">
+                <a:tc>
+                  <a:txBody>
+                    <a:bodyPr/>
+                    <a:lstStyle/>
+                    <a:p>
+                      <a:pPr indent="0" marL="0">
+                        <a:buNone/>
+                      </a:pPr>
+                      <a:r>
+                        <a:rPr lang="en-US" sz="1400" dirty="0">
+                          <a:solidFill>
+                            <a:srgbClr val="000000"/>
+                          </a:solidFill>
+                          <a:latin typeface="Calibri" pitchFamily="34" charset="0"/>
+                          <a:ea typeface="Calibri" pitchFamily="34" charset="-122"/>
+                          <a:cs typeface="Calibri" pitchFamily="34" charset="-120"/>
+                        </a:rPr>
+                        <a:t>Production enrichment stage, production default</a:t>
+                      </a:r>
+                      <a:endParaRPr lang="en-US" sz="1400" dirty="0">
+                        <a:latin typeface="Calibri" charset="0"/>
+                        <a:ea typeface="Calibri" charset="0"/>
+                        <a:cs typeface="Calibri" charset="0"/>
+                      </a:endParaRPr>
+                    </a:p>
+                  </a:txBody>
+                  <a:tcPr marL="91440" marR="91440" marT="45720" marB="45720" anchor="ctr">
+                    <a:lnL w="12700" cap="flat" cmpd="sng" algn="ctr">
+                      <a:solidFill>
+                        <a:srgbClr val="CADCFC"/>
+                      </a:solidFill>
+                      <a:prstDash val="solid"/>
+                      <a:round/>
+                      <a:headEnd type="none" w="med" len="med"/>
+                      <a:tailEnd type="none" w="med" len="med"/>
+                    </a:lnL>
+                    <a:lnR w="12700" cap="flat" cmpd="sng" algn="ctr">
+                      <a:solidFill>
+                        <a:srgbClr val="CADCFC"/>
+                      </a:solidFill>
+                      <a:prstDash val="solid"/>
+                      <a:round/>
+                      <a:headEnd type="none" w="med" len="med"/>
+                      <a:tailEnd type="none" w="med" len="med"/>
+                    </a:lnR>
+                    <a:lnT w="12700" cap="flat" cmpd="sng" algn="ctr">
+                      <a:solidFill>
+                        <a:srgbClr val="CADCFC"/>
+                      </a:solidFill>
+                      <a:prstDash val="solid"/>
+                      <a:round/>
+                      <a:headEnd type="none" w="med" len="med"/>
+                      <a:tailEnd type="none" w="med" len="med"/>
+                    </a:lnT>
+                    <a:lnB w="12700" cap="flat" cmpd="sng" algn="ctr">
+                      <a:solidFill>
+                        <a:srgbClr val="CADCFC"/>
+                      </a:solidFill>
+                      <a:prstDash val="solid"/>
+                      <a:round/>
+                      <a:headEnd type="none" w="med" len="med"/>
+                      <a:tailEnd type="none" w="med" len="med"/>
+                    </a:lnB>
+                  </a:tcPr>
+                </a:tc>
+                <a:tc>
+                  <a:txBody>
+                    <a:bodyPr/>
+                    <a:lstStyle/>
+                    <a:p>
+                      <a:pPr indent="0" marL="0">
+                        <a:buNone/>
+                      </a:pPr>
+                      <a:r>
+                        <a:rPr lang="en-US" sz="1400" dirty="0">
+                          <a:solidFill>
+                            <a:srgbClr val="000000"/>
+                          </a:solidFill>
+                          <a:latin typeface="Calibri" pitchFamily="34" charset="0"/>
+                          <a:ea typeface="Calibri" pitchFamily="34" charset="-122"/>
+                          <a:cs typeface="Calibri" pitchFamily="34" charset="-120"/>
+                        </a:rPr>
+                        <a:t>0.84</a:t>
+                      </a:r>
+                      <a:endParaRPr lang="en-US" sz="1400" dirty="0">
+                        <a:latin typeface="Calibri" charset="0"/>
+                        <a:ea typeface="Calibri" charset="0"/>
+                        <a:cs typeface="Calibri" charset="0"/>
+                      </a:endParaRPr>
+                    </a:p>
+                  </a:txBody>
+                  <a:tcPr marL="91440" marR="91440" marT="45720" marB="45720" anchor="ctr">
+                    <a:lnL w="12700" cap="flat" cmpd="sng" algn="ctr">
+                      <a:solidFill>
+                        <a:srgbClr val="CADCFC"/>
+                      </a:solidFill>
+                      <a:prstDash val="solid"/>
+                      <a:round/>
+                      <a:headEnd type="none" w="med" len="med"/>
+                      <a:tailEnd type="none" w="med" len="med"/>
+                    </a:lnL>
+                    <a:lnR w="12700" cap="flat" cmpd="sng" algn="ctr">
+                      <a:solidFill>
+                        <a:srgbClr val="CADCFC"/>
+                      </a:solidFill>
+                      <a:prstDash val="solid"/>
+                      <a:round/>
+                      <a:headEnd type="none" w="med" len="med"/>
+                      <a:tailEnd type="none" w="med" len="med"/>
+                    </a:lnR>
+                    <a:lnT w="12700" cap="flat" cmpd="sng" algn="ctr">
+                      <a:solidFill>
+                        <a:srgbClr val="CADCFC"/>
+                      </a:solidFill>
+                      <a:prstDash val="solid"/>
+                      <a:round/>
+                      <a:headEnd type="none" w="med" len="med"/>
+                      <a:tailEnd type="none" w="med" len="med"/>
+                    </a:lnT>
+                    <a:lnB w="12700" cap="flat" cmpd="sng" algn="ctr">
+                      <a:solidFill>
+                        <a:srgbClr val="CADCFC"/>
+                      </a:solidFill>
+                      <a:prstDash val="solid"/>
+                      <a:round/>
+                      <a:headEnd type="none" w="med" len="med"/>
+                      <a:tailEnd type="none" w="med" len="med"/>
+                    </a:lnB>
+                  </a:tcPr>
+                </a:tc>
+                <a:tc>
+                  <a:txBody>
+                    <a:bodyPr/>
+                    <a:lstStyle/>
+                    <a:p>
+                      <a:pPr indent="0" marL="0">
+                        <a:buNone/>
+                      </a:pPr>
+                      <a:r>
+                        <a:rPr lang="en-US" sz="1400" dirty="0">
+                          <a:solidFill>
+                            <a:srgbClr val="000000"/>
+                          </a:solidFill>
+                          <a:latin typeface="Calibri" pitchFamily="34" charset="0"/>
+                          <a:ea typeface="Calibri" pitchFamily="34" charset="-122"/>
+                          <a:cs typeface="Calibri" pitchFamily="34" charset="-120"/>
+                        </a:rPr>
+                        <a:t>0.53</a:t>
+                      </a:r>
+                      <a:endParaRPr lang="en-US" sz="1400" dirty="0">
+                        <a:latin typeface="Calibri" charset="0"/>
+                        <a:ea typeface="Calibri" charset="0"/>
+                        <a:cs typeface="Calibri" charset="0"/>
+                      </a:endParaRPr>
+                    </a:p>
+                  </a:txBody>
+                  <a:tcPr marL="91440" marR="91440" marT="45720" marB="45720" anchor="ctr">
+                    <a:lnL w="12700" cap="flat" cmpd="sng" algn="ctr">
+                      <a:solidFill>
+                        <a:srgbClr val="CADCFC"/>
+                      </a:solidFill>
+                      <a:prstDash val="solid"/>
+                      <a:round/>
+                      <a:headEnd type="none" w="med" len="med"/>
+                      <a:tailEnd type="none" w="med" len="med"/>
+                    </a:lnL>
+                    <a:lnR w="12700" cap="flat" cmpd="sng" algn="ctr">
+                      <a:solidFill>
+                        <a:srgbClr val="CADCFC"/>
+                      </a:solidFill>
+                      <a:prstDash val="solid"/>
+                      <a:round/>
+                      <a:headEnd type="none" w="med" len="med"/>
+                      <a:tailEnd type="none" w="med" len="med"/>
+                    </a:lnR>
+                    <a:lnT w="12700" cap="flat" cmpd="sng" algn="ctr">
+                      <a:solidFill>
+                        <a:srgbClr val="CADCFC"/>
+                      </a:solidFill>
+                      <a:prstDash val="solid"/>
+                      <a:round/>
+                      <a:headEnd type="none" w="med" len="med"/>
+                      <a:tailEnd type="none" w="med" len="med"/>
+                    </a:lnT>
+                    <a:lnB w="12700" cap="flat" cmpd="sng" algn="ctr">
+                      <a:solidFill>
+                        <a:srgbClr val="CADCFC"/>
+                      </a:solidFill>
+                      <a:prstDash val="solid"/>
+                      <a:round/>
+                      <a:headEnd type="none" w="med" len="med"/>
+                      <a:tailEnd type="none" w="med" len="med"/>
+                    </a:lnB>
+                  </a:tcPr>
+                </a:tc>
+              </a:tr>
             </a:tbl>
           </a:graphicData>
         </a:graphic>
@@ -21757,7 +22350,7 @@
               <a:buNone/>
             </a:pPr>
             <a:r>
-              <a:rPr lang="en-US" sz="1350" dirty="0">
+              <a:rPr lang="en-US" sz="1150" dirty="0">
                 <a:solidFill>
                   <a:srgbClr val="1A1A2E"/>
                 </a:solidFill>
@@ -21765,9 +22358,9 @@
                 <a:ea typeface="Calibri" pitchFamily="34" charset="-122"/>
                 <a:cs typeface="Calibri" pitchFamily="34" charset="-120"/>
               </a:rPr>
-              <a:t>Both learned methods beat the floor on both tasks (p &lt; 0.0001). The contextual path beats the learned model on sentiment (p = 0.029) and does not separate from it on severity accuracy, 0.68 against 0.72 (p = 0.644).</a:t>
-            </a:r>
-            <a:endParaRPr lang="en-US" sz="1350" dirty="0"/>
+              <a:t>Both learned methods beat the floor (p &lt; 0.0001). The contextual path beats the learned model on sentiment in all four runs (p = 0.019 to 0.029) and ties it on severity; the production stage matches it on sentiment and sits one severity level below the seeds.</a:t>
+            </a:r>
+            <a:endParaRPr lang="en-US" sz="1150" dirty="0"/>
           </a:p>
         </p:txBody>
       </p:sp>
@@ -21804,7 +22397,7 @@
                 <a:ea typeface="Calibri" pitchFamily="34" charset="-122"/>
                 <a:cs typeface="Calibri" pitchFamily="34" charset="-120"/>
               </a:rPr>
-              <a:t>Contextual reasoning buys a great deal on sentiment and nothing I can demonstrate on severity, because severity is carried by lexical markers that character n-grams already learn. So the loop's precondition can be met by more than one method, and a deployer weighing cost, latency and model sovereignty has a choice to make rather than an instruction to follow.</a:t>
+              <a:t>Contextual reasoning buys a great deal on sentiment and nothing demonstrable on severity, which lexical markers already carry. The production stage's severity shift is partly the seed labels' own calibration: a blind second rater put seven of ten seed-critical items at high (kappa 0.55, weighted 0.70). The precondition can be met by more than one method; a deployer has a choice, not an instruction.</a:t>
             </a:r>
             <a:endParaRPr lang="en-US" sz="1400" dirty="0"/>
           </a:p>
@@ -21925,7 +22518,7 @@
               <a:buNone/>
             </a:pPr>
             <a:r>
-              <a:rPr lang="en-US" sz="1200" dirty="0">
+              <a:rPr lang="en-US" sz="1100" dirty="0">
                 <a:solidFill>
                   <a:srgbClr val="1A1A2E"/>
                 </a:solidFill>
@@ -21933,9 +22526,9 @@
                 <a:ea typeface="Calibri" pitchFamily="34" charset="-122"/>
                 <a:cs typeface="Calibri" pitchFamily="34" charset="-120"/>
               </a:rPr>
-              <a:t>188 real public signals, paraphrased and de-identified, with seed labels authored independently of the artifact. Sentiment is scored against the 1 to 5 star rating, which is independent of the text the classifier reads.</a:t>
-            </a:r>
-            <a:endParaRPr lang="en-US" sz="1200" dirty="0"/>
+              <a:t>188 real public signals, paraphrased and de-identified; seed labels drafted by a language-model assistant, used as delivered. Sentiment is scored against the star rating, the one human-origin reference.</a:t>
+            </a:r>
+            <a:endParaRPr lang="en-US" sz="1100" dirty="0"/>
           </a:p>
         </p:txBody>
       </p:sp>

--- a/thesis/defense/defense_deck.pptx
+++ b/thesis/defense/defense_deck.pptx
@@ -614,7 +614,7 @@
           <a:p>
             <a:r>
               <a:rPr lang="en-US" dirty="0"/>
-              <a:t>2 minutes, and for a Responsible AI thesis this is the most important results slide. Read the zero out loud and then pause. Then make the new point: the middle column was added on 20 August and it sharpens the finding, because a respectable learned model shows the same gap, so this is not an artefact of a weak baseline. Volunteer the bounds before she asks. Be precise if she pushes: the supported claim is the paired one on the same eight signals, not a cross-stratum claim that German is handled worse than English, which this corpus cannot establish. If she asks whether it generalises, the answer is no, the thesis says so, and the claim is about method choice on this corpus. One more honest caveat if she presses on the zero: across the three new datasets the same floor escalates German-source signals at 0.36 and 0.40, so the zero here is the low end of what a keyword floor does, not a fixed property of it.</a:t>
+              <a:t>2 minutes, and for a Responsible AI thesis this is the most important results slide. Read the zero out loud and then pause. Then make the new point: the middle column was added on 20 August and it shows that a respectable learned model has an observed gap of its own, so this is not only about a weak baseline. Say plainly, before she does, that the learned model's significant within-predictor test beside the contextual path's non-significant one does not rank the two predictors (Gelman and Stern, 2006): the eight-item stratum cannot carry a ranking, and the thesis reports the gaps descriptively and recommends per-stratum monitoring rather than a predictor. Volunteer the bounds before she asks. Be precise if she pushes: the supported claim is the paired one on the same eight signals, not a cross-stratum claim that German is handled worse than English, which this corpus cannot establish. If she asks whether it generalises, the answer is no, the thesis says so, and the claim is about method choice on this corpus. One more honest caveat if she presses on the zero: across the three new datasets the same floor escalates German-source signals at 0.36 and 0.40, so the zero here is the low end of what a keyword floor does, not a fixed property of it.</a:t>
             </a:r>
             <a:endParaRPr lang="en-US" dirty="0"/>
           </a:p>
@@ -1054,7 +1054,7 @@
           <a:p>
             <a:r>
               <a:rPr lang="en-US" dirty="0"/>
-              <a:t>90 seconds. Use this to pre-empt the founder question: externally authored labels, standard instruments, a reproducible harness, a declared conflict of interest, and this table. Since 20 August participants are told before consent that the interviewer built the prototype and has a commercial interest, there is a fourth consent checkbox, and there is a standing rule of no sales content in sessions and no commercial follow-up for six months. Be honest that the manuscript's method chapter does not yet cite that policy. The two pending rows are what the asks are about.</a:t>
+              <a:t>90 seconds. Use this to pre-empt the founder question: externally authored labels, standard instruments, a reproducible harness, a declared conflict of interest, and this table. Since 20 August participants are told before consent that the interviewer built the prototype and has a commercial interest, there is a fourth consent checkbox, and there is a standing rule of no sales content in sessions and no commercial follow-up for six months. Be honest that the manuscript's method chapter does not yet cite that policy. The pending RQ4 row and the once-measured agreement row are what the asks are about.</a:t>
             </a:r>
             <a:endParaRPr lang="en-US" dirty="0"/>
           </a:p>
@@ -2550,7 +2550,7 @@
           <a:p>
             <a:r>
               <a:rPr lang="en-US" dirty="0"/>
-              <a:t>2 minutes, and this is the slide I would spend extra time on if she engages. The embedding story is the portable architecture lesson: cosine thresholds are not comparable across embedding models, so a provider swap that looks like a config change silently rewrites the behaviour of every semantic feature. Be honest about the residual, which is that the calibrated values live in the deployment environment and the in-code defaults are still the old ones. If she asks what is still open from the review: there is still no inter-annotator agreement number behind either gold standard, and that is the most attackable gap in the thesis.</a:t>
+              <a:t>2 minutes, and this is the slide I would spend extra time on if she engages. The embedding story is the portable architecture lesson: cosine thresholds are not comparable across embedding models, so a provider swap that looks like a config change silently rewrites the behaviour of every semantic feature. Be honest about the residual, which is that the calibrated values live in the deployment environment and the in-code defaults are still the old ones. If she asks what is still open from the review: the one agreement number is the 40-item blind second risk rating (kappa 0.55 unweighted, 0.70 weighted), attested as a second person's, with its provenance recorded in PROVENANCE_kappa.md and the rater's exposure to AI suggestions unrecorded; there is none behind the in-repo golden set, and that remains the most attackable gap.</a:t>
             </a:r>
             <a:endParaRPr lang="en-US" dirty="0"/>
           </a:p>
@@ -4979,7 +4979,7 @@
                 <a:ea typeface="Calibri" pitchFamily="34" charset="-122"/>
                 <a:cs typeface="Calibri" pitchFamily="34" charset="-120"/>
               </a:rPr>
-              <a:t>On the same eight critical German-source signals: the floor escalates none, the learned model five, the contextual path seven (six in each repeat, 78 to 81% on the English side). The learned model ties the contextual path on severity accuracy and differs in whom it escalates: 32.6 points between strata. The production stage escalates fewer in both, with no detectable gap.</a:t>
+              <a:t>On the same eight German-source signals whose reference label warrants escalation: the floor escalates none, the learned model five, the contextual path seven (six in each repeat, 78 to 81% on the English side). The learned model ties the contextual path on severity accuracy; its stratum recalls differ by 32.6 points and the contextual path's by 0.3, descriptive figures on eight items. A significant test for one predictor beside a non-significant one for another does not compare the two gaps. The production stage escalates fewer in both strata.</a:t>
             </a:r>
             <a:endParaRPr lang="en-US" sz="1400" dirty="0"/>
           </a:p>
@@ -5076,7 +5076,7 @@
               <a:buNone/>
             </a:pPr>
             <a:r>
-              <a:rPr lang="en-US" sz="1150" dirty="0">
+              <a:rPr lang="en-US" sz="1100" dirty="0">
                 <a:solidFill>
                   <a:srgbClr val="1A1A2E"/>
                 </a:solidFill>
@@ -5086,20 +5086,20 @@
               </a:rPr>
               <a:t>The German-source escalate stratum is eight signals. A 95% interval on 7 of 8 runs from roughly 47% to 100%, and on 5 of 8 from roughly 25% to 92%.</a:t>
             </a:r>
-            <a:endParaRPr lang="en-US" sz="1150" dirty="0"/>
+            <a:endParaRPr lang="en-US" sz="1100" dirty="0"/>
           </a:p>
           <a:p>
             <a:pPr indent="0" marL="0">
               <a:buNone/>
             </a:pPr>
-            <a:endParaRPr lang="en-US" sz="1150" dirty="0"/>
+            <a:endParaRPr lang="en-US" sz="1100" dirty="0"/>
           </a:p>
           <a:p>
             <a:pPr indent="0" marL="0">
               <a:buNone/>
             </a:pPr>
             <a:r>
-              <a:rPr lang="en-US" sz="1150" dirty="0">
+              <a:rPr lang="en-US" sz="1100" dirty="0">
                 <a:solidFill>
                   <a:srgbClr val="1A1A2E"/>
                 </a:solidFill>
@@ -5109,20 +5109,20 @@
               </a:rPr>
               <a:t>Language is confounded with sector on this corpus.</a:t>
             </a:r>
-            <a:endParaRPr lang="en-US" sz="1150" dirty="0"/>
+            <a:endParaRPr lang="en-US" sz="1100" dirty="0"/>
           </a:p>
           <a:p>
             <a:pPr indent="0" marL="0">
               <a:buNone/>
             </a:pPr>
-            <a:endParaRPr lang="en-US" sz="1150" dirty="0"/>
+            <a:endParaRPr lang="en-US" sz="1100" dirty="0"/>
           </a:p>
           <a:p>
             <a:pPr indent="0" marL="0">
               <a:buNone/>
             </a:pPr>
             <a:r>
-              <a:rPr lang="en-US" sz="1150" dirty="0">
+              <a:rPr lang="en-US" sz="1100" dirty="0">
                 <a:solidFill>
                   <a:srgbClr val="1A1A2E"/>
                 </a:solidFill>
@@ -5132,20 +5132,20 @@
               </a:rPr>
               <a:t>The texts are English paraphrases throughout, so the mechanism cannot be German-language processing. What differs is what German-language customers wrote about, and how they phrased it.</a:t>
             </a:r>
-            <a:endParaRPr lang="en-US" sz="1150" dirty="0"/>
+            <a:endParaRPr lang="en-US" sz="1100" dirty="0"/>
           </a:p>
           <a:p>
             <a:pPr indent="0" marL="0">
               <a:buNone/>
             </a:pPr>
-            <a:endParaRPr lang="en-US" sz="1150" dirty="0"/>
+            <a:endParaRPr lang="en-US" sz="1100" dirty="0"/>
           </a:p>
           <a:p>
             <a:pPr indent="0" marL="0">
               <a:buNone/>
             </a:pPr>
             <a:r>
-              <a:rPr lang="en-US" sz="1150" dirty="0">
+              <a:rPr lang="en-US" sz="1100" dirty="0">
                 <a:solidFill>
                   <a:srgbClr val="1A1A2E"/>
                 </a:solidFill>
@@ -5155,7 +5155,30 @@
               </a:rPr>
               <a:t>The aggregate cross-language accuracy comparison was retracted for the same reason.</a:t>
             </a:r>
-            <a:endParaRPr lang="en-US" sz="1150" dirty="0"/>
+            <a:endParaRPr lang="en-US" sz="1100" dirty="0"/>
+          </a:p>
+          <a:p>
+            <a:pPr indent="0" marL="0">
+              <a:buNone/>
+            </a:pPr>
+            <a:endParaRPr lang="en-US" sz="1100" dirty="0"/>
+          </a:p>
+          <a:p>
+            <a:pPr indent="0" marL="0">
+              <a:buNone/>
+            </a:pPr>
+            <a:r>
+              <a:rPr lang="en-US" sz="1100" dirty="0">
+                <a:solidFill>
+                  <a:srgbClr val="1A1A2E"/>
+                </a:solidFill>
+                <a:latin typeface="Calibri" pitchFamily="34" charset="0"/>
+                <a:ea typeface="Calibri" pitchFamily="34" charset="-122"/>
+                <a:cs typeface="Calibri" pitchFamily="34" charset="-120"/>
+              </a:rPr>
+              <a:t>The Fisher tests are within-predictor. No test on the difference between predictors' gaps has been run (Gelman and Stern, 2006).</a:t>
+            </a:r>
+            <a:endParaRPr lang="en-US" sz="1100" dirty="0"/>
           </a:p>
         </p:txBody>
       </p:sp>
@@ -7235,7 +7258,7 @@
                 <a:ea typeface="Calibri" pitchFamily="34" charset="-122"/>
                 <a:cs typeface="Calibri" pitchFamily="34" charset="-120"/>
               </a:rPr>
-              <a:t>Vodafone is the only new set with two source strata large enough to compare. There the learned model escalates German-source signals at 50% against English-source at 81.8%. Same direction, and nearly the same size as the 32.6 point gap on the thesis corpus.</a:t>
+              <a:t>Vodafone is the only new set with two source strata large enough to compare. There the learned model escalates German-source signals at 50% against English-source at 81.8%. Same direction as the learned model's observed 32.6 point gap on the thesis corpus, on draft labels, and descriptive in both cases.</a:t>
             </a:r>
             <a:endParaRPr lang="en-US" sz="1300" dirty="0"/>
           </a:p>
@@ -10706,7 +10729,7 @@
                           <a:ea typeface="Calibri" pitchFamily="34" charset="-122"/>
                           <a:cs typeface="Calibri" pitchFamily="34" charset="-120"/>
                         </a:rPr>
-                        <a:t>Pending</a:t>
+                        <a:t>Measured once, on attestation</a:t>
                       </a:r>
                       <a:endParaRPr lang="en-US" sz="1400" dirty="0">
                         <a:latin typeface="Calibri" charset="0"/>
@@ -10771,7 +10794,7 @@
                           <a:ea typeface="Calibri" pitchFamily="34" charset="-122"/>
                           <a:cs typeface="Calibri" pitchFamily="34" charset="-120"/>
                         </a:rPr>
-                        <a:t>export and scoring tooling shipped; no second annotator, no kappa</a:t>
+                        <a:t>40-item blind risk rating: kappa 0.55 unweighted, 0.70 weighted; a second person on the owner's attestation, AI exposure unrecorded; none on the golden set</a:t>
                       </a:r>
                       <a:endParaRPr lang="en-US" sz="1400" dirty="0">
                         <a:latin typeface="Calibri" charset="0"/>
@@ -11559,7 +11582,7 @@
                 <a:ea typeface="Calibri" pitchFamily="34" charset="-122"/>
                 <a:cs typeface="Calibri" pitchFamily="34" charset="-120"/>
               </a:rPr>
-              <a:t>No inter-annotator agreement number exists behind either gold standard.</a:t>
+              <a:t>One agreement number exists: kappa 0.55 on a 40-item blind risk rating, a second person's on the owner's attestation, with the rater's exposure to AI suggestions unrecorded. None exists behind the golden set.</a:t>
             </a:r>
             <a:endParaRPr lang="en-US" sz="1250" dirty="0"/>
           </a:p>
@@ -11746,7 +11769,7 @@
                 <a:ea typeface="Calibri" pitchFamily="34" charset="-122"/>
                 <a:cs typeface="Calibri" pitchFamily="34" charset="-120"/>
               </a:rPr>
-              <a:t>A second annotator on a stratified sample of the gold set, which produces the missing kappa.</a:t>
+              <a:t>A second independent human rating on a new sample of the risk seeds, and a first one on the golden set, with rater and date recorded: the existing kappa rests on attestation, and repeats on the same forty items would not be replication.</a:t>
             </a:r>
             <a:endParaRPr lang="en-US" sz="1250" dirty="0"/>
           </a:p>
@@ -12266,7 +12289,7 @@
                 <a:ea typeface="Calibri" pitchFamily="34" charset="-122"/>
                 <a:cs typeface="Calibri" pitchFamily="34" charset="-120"/>
               </a:rPr>
-              <a:t>Of what is left, interviews, one live outcome measurement, a second annotator for the missing kappa, semantic scoring of two gold fields and free-form routing, which do you consider required and which is honest future work?</a:t>
+              <a:t>Of what is left, interviews, one live outcome measurement, a second independent human rating on a new sample (the existing kappa rests on attestation), semantic scoring of two gold fields and free-form routing, which do you consider required and which is honest future work?</a:t>
             </a:r>
             <a:endParaRPr lang="en-US" sz="1200" dirty="0"/>
           </a:p>
@@ -12476,7 +12499,7 @@
                 <a:ea typeface="Calibri" pitchFamily="34" charset="-122"/>
                 <a:cs typeface="Calibri" pitchFamily="34" charset="-120"/>
               </a:rPr>
-              <a:t>The learned model now carries a 32.6 point gap of its own, which answers the strawman objection, and the German-source stratum is still eight signals. Is that enough as written, or do I need natural German-language data first? That decides whether relabelling the new corpora is required work.</a:t>
+              <a:t>The learned model now shows an observed 32.6 point gap of its own on eight German-source signals, reported descriptively because within-predictor tests do not rank predictors, and the stratum is still eight signals. Is that enough as written, or do I need natural German-language data first? That decides whether relabelling the new corpora is required work.</a:t>
             </a:r>
             <a:endParaRPr lang="en-US" sz="1200" dirty="0"/>
           </a:p>
@@ -13889,7 +13912,7 @@
                 <a:ea typeface="Calibri" pitchFamily="34" charset="-122"/>
                 <a:cs typeface="Calibri" pitchFamily="34" charset="-120"/>
               </a:rPr>
-              <a:t>Triage accuracy depends on the method, and the method decides whose problems reach a human. Only the contextual path escalates German-source and English-source signals at close to the same rate.</a:t>
+              <a:t>Triage accuracy depends on the method, and the method can change whose problems reach a human. On eight German-source signals whose label warrants escalation the floor escalates none, the learned model five and the contextual path seven: descriptive on that stratum, reported without ranking the predictors.</a:t>
             </a:r>
             <a:endParaRPr lang="en-US" sz="1200" dirty="0"/>
           </a:p>
@@ -19916,7 +19939,7 @@
                 <a:ea typeface="Calibri" pitchFamily="34" charset="-122"/>
                 <a:cs typeface="Calibri" pitchFamily="34" charset="-120"/>
               </a:rPr>
-              <a:t>The learned model joined the escalation equity table and carries a 32.6 point gap of its own, so that finding is no longer about a weak baseline.</a:t>
+              <a:t>The learned model joined the escalation equity table: 62.5% against 95.1% across the two strata, an observed 32.6 point gap on eight German-source items, reported as descriptive and without ranking the predictors.</a:t>
             </a:r>
             <a:endParaRPr lang="en-US" sz="1350" dirty="0"/>
           </a:p>
@@ -22358,7 +22381,7 @@
                 <a:ea typeface="Calibri" pitchFamily="34" charset="-122"/>
                 <a:cs typeface="Calibri" pitchFamily="34" charset="-120"/>
               </a:rPr>
-              <a:t>Both learned methods beat the floor (p &lt; 0.0001). The contextual path beats the learned model on sentiment in all four runs (p = 0.019 to 0.029) and ties it on severity; the production stage matches it on sentiment and sits one severity level below the seeds.</a:t>
+              <a:t>Both learned methods beat the floor (p &lt; 0.0001). The contextual path beats the learned model on sentiment in all four runs (p = 0.019 to 0.029) and ties it on severity; the production stage lands within three points of it on sentiment (8 discordant pairs to 3, p = 0.23) and one severity level below the seeds. The two production rows differ in model, batch size and run date together, so they compare deployment configurations, not the model alone.</a:t>
             </a:r>
             <a:endParaRPr lang="en-US" sz="1150" dirty="0"/>
           </a:p>

--- a/thesis/defense/defense_deck.pptx
+++ b/thesis/defense/defense_deck.pptx
@@ -4971,7 +4971,7 @@
               <a:buNone/>
             </a:pPr>
             <a:r>
-              <a:rPr lang="en-US" sz="1400" dirty="0">
+              <a:rPr lang="en-US" sz="1300" dirty="0">
                 <a:solidFill>
                   <a:srgbClr val="1A1A2E"/>
                 </a:solidFill>
@@ -4979,9 +4979,9 @@
                 <a:ea typeface="Calibri" pitchFamily="34" charset="-122"/>
                 <a:cs typeface="Calibri" pitchFamily="34" charset="-120"/>
               </a:rPr>
-              <a:t>On the same eight German-source signals whose reference label warrants escalation: the floor escalates none, the learned model five, the contextual path seven (six in each repeat, 78 to 81% on the English side). The learned model ties the contextual path on severity accuracy; its stratum recalls differ by 32.6 points and the contextual path's by 0.3, descriptive figures on eight items. A significant test for one predictor beside a non-significant one for another does not compare the two gaps. The production stage escalates fewer in both strata.</a:t>
-            </a:r>
-            <a:endParaRPr lang="en-US" sz="1400" dirty="0"/>
+              <a:t>On the eight German-source signals whose reference label warrants escalation: the floor escalates none, the learned model five, the contextual path seven. The learned model ties the contextual path on severity accuracy; its stratum recalls differ by 32.6 points, the contextual path's by 0.3, descriptive figures on eight items. One significant test beside a non-significant one does not compare the two gaps.</a:t>
+            </a:r>
+            <a:endParaRPr lang="en-US" sz="1300" dirty="0"/>
           </a:p>
         </p:txBody>
       </p:sp>
@@ -5084,7 +5084,7 @@
                 <a:ea typeface="Calibri" pitchFamily="34" charset="-122"/>
                 <a:cs typeface="Calibri" pitchFamily="34" charset="-120"/>
               </a:rPr>
-              <a:t>The German-source escalate stratum is eight signals. A 95% interval on 7 of 8 runs from roughly 47% to 100%, and on 5 of 8 from roughly 25% to 92%.</a:t>
+              <a:t>The German-source escalate stratum is eight signals. A 95% interval on 7 of 8 runs from roughly 47% to 100%, on 5 of 8 from 25% to 92%.</a:t>
             </a:r>
             <a:endParaRPr lang="en-US" sz="1100" dirty="0"/>
           </a:p>
@@ -5092,6 +5092,17 @@
             <a:pPr indent="0" marL="0">
               <a:buNone/>
             </a:pPr>
+            <a:r>
+              <a:rPr lang="en-US" sz="1100" dirty="0">
+                <a:solidFill>
+                  <a:srgbClr val="1A1A2E"/>
+                </a:solidFill>
+                <a:latin typeface="Calibri" pitchFamily="34" charset="0"/>
+                <a:ea typeface="Calibri" pitchFamily="34" charset="-122"/>
+                <a:cs typeface="Calibri" pitchFamily="34" charset="-120"/>
+              </a:rPr>
+              <a:t>Language is confounded with sector on this corpus.</a:t>
+            </a:r>
             <a:endParaRPr lang="en-US" sz="1100" dirty="0"/>
           </a:p>
           <a:p>
@@ -5107,7 +5118,7 @@
                 <a:ea typeface="Calibri" pitchFamily="34" charset="-122"/>
                 <a:cs typeface="Calibri" pitchFamily="34" charset="-120"/>
               </a:rPr>
-              <a:t>Language is confounded with sector on this corpus.</a:t>
+              <a:t>The texts are English paraphrases, so the mechanism cannot be German-language processing; what differs is what German-language customers wrote about, and how.</a:t>
             </a:r>
             <a:endParaRPr lang="en-US" sz="1100" dirty="0"/>
           </a:p>
@@ -5115,6 +5126,17 @@
             <a:pPr indent="0" marL="0">
               <a:buNone/>
             </a:pPr>
+            <a:r>
+              <a:rPr lang="en-US" sz="1100" dirty="0">
+                <a:solidFill>
+                  <a:srgbClr val="1A1A2E"/>
+                </a:solidFill>
+                <a:latin typeface="Calibri" pitchFamily="34" charset="0"/>
+                <a:ea typeface="Calibri" pitchFamily="34" charset="-122"/>
+                <a:cs typeface="Calibri" pitchFamily="34" charset="-120"/>
+              </a:rPr>
+              <a:t>The aggregate cross-language accuracy comparison was retracted for the same reason.</a:t>
+            </a:r>
             <a:endParaRPr lang="en-US" sz="1100" dirty="0"/>
           </a:p>
           <a:p>
@@ -5130,53 +5152,7 @@
                 <a:ea typeface="Calibri" pitchFamily="34" charset="-122"/>
                 <a:cs typeface="Calibri" pitchFamily="34" charset="-120"/>
               </a:rPr>
-              <a:t>The texts are English paraphrases throughout, so the mechanism cannot be German-language processing. What differs is what German-language customers wrote about, and how they phrased it.</a:t>
-            </a:r>
-            <a:endParaRPr lang="en-US" sz="1100" dirty="0"/>
-          </a:p>
-          <a:p>
-            <a:pPr indent="0" marL="0">
-              <a:buNone/>
-            </a:pPr>
-            <a:endParaRPr lang="en-US" sz="1100" dirty="0"/>
-          </a:p>
-          <a:p>
-            <a:pPr indent="0" marL="0">
-              <a:buNone/>
-            </a:pPr>
-            <a:r>
-              <a:rPr lang="en-US" sz="1100" dirty="0">
-                <a:solidFill>
-                  <a:srgbClr val="1A1A2E"/>
-                </a:solidFill>
-                <a:latin typeface="Calibri" pitchFamily="34" charset="0"/>
-                <a:ea typeface="Calibri" pitchFamily="34" charset="-122"/>
-                <a:cs typeface="Calibri" pitchFamily="34" charset="-120"/>
-              </a:rPr>
-              <a:t>The aggregate cross-language accuracy comparison was retracted for the same reason.</a:t>
-            </a:r>
-            <a:endParaRPr lang="en-US" sz="1100" dirty="0"/>
-          </a:p>
-          <a:p>
-            <a:pPr indent="0" marL="0">
-              <a:buNone/>
-            </a:pPr>
-            <a:endParaRPr lang="en-US" sz="1100" dirty="0"/>
-          </a:p>
-          <a:p>
-            <a:pPr indent="0" marL="0">
-              <a:buNone/>
-            </a:pPr>
-            <a:r>
-              <a:rPr lang="en-US" sz="1100" dirty="0">
-                <a:solidFill>
-                  <a:srgbClr val="1A1A2E"/>
-                </a:solidFill>
-                <a:latin typeface="Calibri" pitchFamily="34" charset="0"/>
-                <a:ea typeface="Calibri" pitchFamily="34" charset="-122"/>
-                <a:cs typeface="Calibri" pitchFamily="34" charset="-120"/>
-              </a:rPr>
-              <a:t>The Fisher tests are within-predictor. No test on the difference between predictors' gaps has been run (Gelman and Stern, 2006).</a:t>
+              <a:t>The Fisher tests are within-predictor; no test on the difference between predictors' gaps has been run (Gelman and Stern, 2006).</a:t>
             </a:r>
             <a:endParaRPr lang="en-US" sz="1100" dirty="0"/>
           </a:p>
@@ -7258,7 +7234,7 @@
                 <a:ea typeface="Calibri" pitchFamily="34" charset="-122"/>
                 <a:cs typeface="Calibri" pitchFamily="34" charset="-120"/>
               </a:rPr>
-              <a:t>Vodafone is the only new set with two source strata large enough to compare. There the learned model escalates German-source signals at 50% against English-source at 81.8%. Same direction as the learned model's observed 32.6 point gap on the thesis corpus, on draft labels, and descriptive in both cases.</a:t>
+              <a:t>Vodafone is the only new set with two source strata large enough to compare: the learned model escalates German-source signals at 50% against 81.8% English-source. Same direction as its observed 32.6-point gap on the thesis corpus; draft labels, descriptive in both cases.</a:t>
             </a:r>
             <a:endParaRPr lang="en-US" sz="1300" dirty="0"/>
           </a:p>
@@ -10794,7 +10770,7 @@
                           <a:ea typeface="Calibri" pitchFamily="34" charset="-122"/>
                           <a:cs typeface="Calibri" pitchFamily="34" charset="-120"/>
                         </a:rPr>
-                        <a:t>40-item blind risk rating: kappa 0.55 unweighted, 0.70 weighted; a second person on the owner's attestation, AI exposure unrecorded; none on the golden set</a:t>
+                        <a:t>kappa 0.55 (0.70 weighted), 40 blind risk items; second person (attested), AI exposure unrecorded; none on golden set</a:t>
                       </a:r>
                       <a:endParaRPr lang="en-US" sz="1400" dirty="0">
                         <a:latin typeface="Calibri" charset="0"/>
@@ -11519,7 +11495,7 @@
                 <a:ea typeface="Calibri" pitchFamily="34" charset="-122"/>
                 <a:cs typeface="Calibri" pitchFamily="34" charset="-120"/>
               </a:rPr>
-              <a:t>Language is confounded with sector, and the texts are English paraphrases throughout, so every per-language result is a source-language stratum. One cross-language claim was retracted rather than defended.</a:t>
+              <a:t>Language is confounded with sector and the texts are English paraphrases, so every per-language result is a source-language stratum; one cross-language claim was retracted rather than defended.</a:t>
             </a:r>
             <a:endParaRPr lang="en-US" sz="1250" dirty="0"/>
           </a:p>
@@ -11582,7 +11558,7 @@
                 <a:ea typeface="Calibri" pitchFamily="34" charset="-122"/>
                 <a:cs typeface="Calibri" pitchFamily="34" charset="-120"/>
               </a:rPr>
-              <a:t>One agreement number exists: kappa 0.55 on a 40-item blind risk rating, a second person's on the owner's attestation, with the rater's exposure to AI suggestions unrecorded. None exists behind the golden set.</a:t>
+              <a:t>One agreement number: kappa 0.55, 40 blind risk items, second person (attested; AI exposure unrecorded); none on golden set.</a:t>
             </a:r>
             <a:endParaRPr lang="en-US" sz="1250" dirty="0"/>
           </a:p>
@@ -11603,7 +11579,7 @@
                 <a:ea typeface="Calibri" pitchFamily="34" charset="-122"/>
                 <a:cs typeface="Calibri" pitchFamily="34" charset="-120"/>
               </a:rPr>
-              <a:t>The urgency exemplar effect was tested at n = 60, 80 and 100 without alpha spending, so the claim rests on three consecutive significant runs rather than on the first crossing.</a:t>
+              <a:t>Urgency exemplar effect tested at n = 60, 80, 100 without alpha spending; the claim rests on three consecutive significant runs, not the first crossing.</a:t>
             </a:r>
             <a:endParaRPr lang="en-US" sz="1250" dirty="0"/>
           </a:p>
@@ -12499,7 +12475,7 @@
                 <a:ea typeface="Calibri" pitchFamily="34" charset="-122"/>
                 <a:cs typeface="Calibri" pitchFamily="34" charset="-120"/>
               </a:rPr>
-              <a:t>The learned model now shows an observed 32.6 point gap of its own on eight German-source signals, reported descriptively because within-predictor tests do not rank predictors, and the stratum is still eight signals. Is that enough as written, or do I need natural German-language data first? That decides whether relabelling the new corpora is required work.</a:t>
+              <a:t>The learned model shows an observed 32.6-point gap of its own on eight German-source signals, reported descriptively because within-predictor tests do not rank predictors. Is that enough as written, or do I need natural German-language data first? That decides whether relabelling the new corpora is required work.</a:t>
             </a:r>
             <a:endParaRPr lang="en-US" sz="1200" dirty="0"/>
           </a:p>
@@ -13912,7 +13888,7 @@
                 <a:ea typeface="Calibri" pitchFamily="34" charset="-122"/>
                 <a:cs typeface="Calibri" pitchFamily="34" charset="-120"/>
               </a:rPr>
-              <a:t>Triage accuracy depends on the method, and the method can change whose problems reach a human. On eight German-source signals whose label warrants escalation the floor escalates none, the learned model five and the contextual path seven: descriptive on that stratum, reported without ranking the predictors.</a:t>
+              <a:t>Triage accuracy depends on the method, and the method can change whose problems reach a human. On eight German-source signals whose label warrants escalation: floor none, learned model five, contextual path seven (descriptive; no predictor ranking).</a:t>
             </a:r>
             <a:endParaRPr lang="en-US" sz="1200" dirty="0"/>
           </a:p>
@@ -19939,7 +19915,7 @@
                 <a:ea typeface="Calibri" pitchFamily="34" charset="-122"/>
                 <a:cs typeface="Calibri" pitchFamily="34" charset="-120"/>
               </a:rPr>
-              <a:t>The learned model joined the escalation equity table: 62.5% against 95.1% across the two strata, an observed 32.6 point gap on eight German-source items, reported as descriptive and without ranking the predictors.</a:t>
+              <a:t>The learned model joined the escalation equity table: 62.5% against 95.1% across the two strata, a 32.6-point gap on eight German-source items; descriptive, no ranking.</a:t>
             </a:r>
             <a:endParaRPr lang="en-US" sz="1350" dirty="0"/>
           </a:p>
@@ -22373,7 +22349,7 @@
               <a:buNone/>
             </a:pPr>
             <a:r>
-              <a:rPr lang="en-US" sz="1150" dirty="0">
+              <a:rPr lang="en-US" sz="1050" dirty="0">
                 <a:solidFill>
                   <a:srgbClr val="1A1A2E"/>
                 </a:solidFill>
@@ -22381,9 +22357,9 @@
                 <a:ea typeface="Calibri" pitchFamily="34" charset="-122"/>
                 <a:cs typeface="Calibri" pitchFamily="34" charset="-120"/>
               </a:rPr>
-              <a:t>Both learned methods beat the floor (p &lt; 0.0001). The contextual path beats the learned model on sentiment in all four runs (p = 0.019 to 0.029) and ties it on severity; the production stage lands within three points of it on sentiment (8 discordant pairs to 3, p = 0.23) and one severity level below the seeds. The two production rows differ in model, batch size and run date together, so they compare deployment configurations, not the model alone.</a:t>
-            </a:r>
-            <a:endParaRPr lang="en-US" sz="1150" dirty="0"/>
+              <a:t>Both learned methods beat the floor (p &lt; 0.0001). The contextual path beats the learned model on sentiment in all four runs (p = 0.019–0.029) and ties it on severity; the production stage is within three points on sentiment (p = 0.23) and one severity level below the seeds. The production rows compare configurations (model, batch size, run date), not the model alone.</a:t>
+            </a:r>
+            <a:endParaRPr lang="en-US" sz="1050" dirty="0"/>
           </a:p>
         </p:txBody>
       </p:sp>

--- a/thesis/defense/defense_deck.pptx
+++ b/thesis/defense/defense_deck.pptx
@@ -2550,7 +2550,7 @@
           <a:p>
             <a:r>
               <a:rPr lang="en-US" dirty="0"/>
-              <a:t>2 minutes, and this is the slide I would spend extra time on if she engages. The embedding story is the portable architecture lesson: cosine thresholds are not comparable across embedding models, so a provider swap that looks like a config change silently rewrites the behaviour of every semantic feature. Be honest about the residual, which is that the calibrated values live in the deployment environment and the in-code defaults are still the old ones. If she asks what is still open from the review: the one agreement number is the 40-item blind second risk rating (kappa 0.55 unweighted, 0.70 weighted), attested as a second person's, with its provenance recorded in PROVENANCE_kappa.md and the rater's exposure to AI suggestions unrecorded; there is none behind the in-repo golden set, and that remains the most attackable gap.</a:t>
+              <a:t>2 minutes, and this is the slide I would spend extra time on if she engages. The embedding story is the portable architecture lesson: cosine thresholds are not comparable across embedding models, so a provider swap that looks like a config change silently rewrites the behaviour of every semantic feature. Be honest about the residual, which is that the calibrated values live in the deployment environment and the in-code defaults are still the old ones. If she asks what is still open from the review: the one agreement number is the 40-item second risk rating (kappa 0.55 unweighted, 0.70 weighted); its independent human provenance is unverified (the owner attests a second person, the files identify no rater, and the 13 September review reports an AI-assistant task record with identical labels), so it is second-rating agreement and not a human check; there is none behind the in-repo golden set, and that remains the most attackable gap.</a:t>
             </a:r>
             <a:endParaRPr lang="en-US" dirty="0"/>
           </a:p>
@@ -10640,7 +10640,7 @@
                           <a:ea typeface="Calibri" pitchFamily="34" charset="-122"/>
                           <a:cs typeface="Calibri" pitchFamily="34" charset="-120"/>
                         </a:rPr>
-                        <a:t>Inter-annotator agreement</a:t>
+                        <a:t>Second-rating agreement</a:t>
                       </a:r>
                       <a:endParaRPr lang="en-US" sz="1400" dirty="0">
                         <a:latin typeface="Calibri" charset="0"/>
@@ -10705,7 +10705,7 @@
                           <a:ea typeface="Calibri" pitchFamily="34" charset="-122"/>
                           <a:cs typeface="Calibri" pitchFamily="34" charset="-120"/>
                         </a:rPr>
-                        <a:t>Measured once, on attestation</a:t>
+                        <a:t>Measured once, provenance unverified</a:t>
                       </a:r>
                       <a:endParaRPr lang="en-US" sz="1400" dirty="0">
                         <a:latin typeface="Calibri" charset="0"/>
@@ -10770,7 +10770,7 @@
                           <a:ea typeface="Calibri" pitchFamily="34" charset="-122"/>
                           <a:cs typeface="Calibri" pitchFamily="34" charset="-120"/>
                         </a:rPr>
-                        <a:t>kappa 0.55 (0.70 weighted), 40 blind risk items; second person (attested), AI exposure unrecorded; none on golden set</a:t>
+                        <a:t>kappa 0.55 (0.70 weighted), 40 risk items; independent human provenance unverified, so no human check; none on golden set</a:t>
                       </a:r>
                       <a:endParaRPr lang="en-US" sz="1400" dirty="0">
                         <a:latin typeface="Calibri" charset="0"/>
@@ -11558,7 +11558,7 @@
                 <a:ea typeface="Calibri" pitchFamily="34" charset="-122"/>
                 <a:cs typeface="Calibri" pitchFamily="34" charset="-120"/>
               </a:rPr>
-              <a:t>One agreement number: kappa 0.55, 40 blind risk items, second person (attested; AI exposure unrecorded); none on golden set.</a:t>
+              <a:t>One agreement number: kappa 0.55 on 40 risk items, human provenance unverified, so no human check; none on golden set.</a:t>
             </a:r>
             <a:endParaRPr lang="en-US" sz="1250" dirty="0"/>
           </a:p>
@@ -11579,7 +11579,7 @@
                 <a:ea typeface="Calibri" pitchFamily="34" charset="-122"/>
                 <a:cs typeface="Calibri" pitchFamily="34" charset="-120"/>
               </a:rPr>
-              <a:t>Urgency exemplar effect tested at n = 60, 80, 100 without alpha spending; the claim rests on three consecutive significant runs, not the first crossing.</a:t>
+              <a:t>Urgency exemplar effect tested at n = 60, 80, 100 without alpha spending; same-item re-runs bound model noise and do not replace alpha control, so the claim is exploratory.</a:t>
             </a:r>
             <a:endParaRPr lang="en-US" sz="1250" dirty="0"/>
           </a:p>
@@ -11745,7 +11745,7 @@
                 <a:ea typeface="Calibri" pitchFamily="34" charset="-122"/>
                 <a:cs typeface="Calibri" pitchFamily="34" charset="-120"/>
               </a:rPr>
-              <a:t>A second independent human rating on a new sample of the risk seeds, and a first one on the golden set, with rater and date recorded: the existing kappa rests on attestation, and repeats on the same forty items would not be replication.</a:t>
+              <a:t>A human rating with recorded provenance on a new sample of the risk seeds, and a first one on the golden set, with rater role, dates and AI access recorded: the existing kappa's independent human provenance is unverified, and repeats on the same forty items would not be replication.</a:t>
             </a:r>
             <a:endParaRPr lang="en-US" sz="1250" dirty="0"/>
           </a:p>
@@ -12265,7 +12265,7 @@
                 <a:ea typeface="Calibri" pitchFamily="34" charset="-122"/>
                 <a:cs typeface="Calibri" pitchFamily="34" charset="-120"/>
               </a:rPr>
-              <a:t>Of what is left, interviews, one live outcome measurement, a second independent human rating on a new sample (the existing kappa rests on attestation), semantic scoring of two gold fields and free-form routing, which do you consider required and which is honest future work?</a:t>
+              <a:t>Of what is left, interviews, one live outcome measurement, a human rating with recorded provenance on a new sample (the existing kappa's independent human provenance is unverified), semantic scoring of two gold fields and free-form routing, which do you consider required and which is honest future work?</a:t>
             </a:r>
             <a:endParaRPr lang="en-US" sz="1200" dirty="0"/>
           </a:p>
@@ -22396,7 +22396,7 @@
                 <a:ea typeface="Calibri" pitchFamily="34" charset="-122"/>
                 <a:cs typeface="Calibri" pitchFamily="34" charset="-120"/>
               </a:rPr>
-              <a:t>Contextual reasoning buys a great deal on sentiment and nothing demonstrable on severity, which lexical markers already carry. The production stage's severity shift is partly the seed labels' own calibration: a blind second rater put seven of ten seed-critical items at high (kappa 0.55, weighted 0.70). The precondition can be met by more than one method; a deployer has a choice, not an instruction.</a:t>
+              <a:t>Contextual reasoning buys a great deal on sentiment and nothing demonstrable on severity, which lexical markers already carry. The production stage's severity shift is partly the seed labels' own calibration: a second rating, of unverified independent provenance, put seven of ten seed-critical items at high (kappa 0.55, weighted 0.70). The precondition can be met by more than one method; a deployer has a choice, not an instruction.</a:t>
             </a:r>
             <a:endParaRPr lang="en-US" sz="1400" dirty="0"/>
           </a:p>

--- a/thesis/defense/defense_deck.pptx
+++ b/thesis/defense/defense_deck.pptx
@@ -22357,7 +22357,7 @@
                 <a:ea typeface="Calibri" pitchFamily="34" charset="-122"/>
                 <a:cs typeface="Calibri" pitchFamily="34" charset="-120"/>
               </a:rPr>
-              <a:t>Both learned methods beat the floor (p &lt; 0.0001). The contextual path beats the learned model on sentiment in all four runs (p = 0.019–0.029) and ties it on severity; the production stage is within three points on sentiment (p = 0.23) and one severity level below the seeds. The production rows compare configurations (model, batch size, run date), not the model alone.</a:t>
+              <a:t>Both learned methods beat the floor (p &lt; 0.0001). The contextual path leads the learned model on sentiment in all four runs (p = 0.02–0.03; 0.09 Holm-corrected, so exploratory) and ties it on severity. The production stage is within three points on sentiment (p = 0.23), one severity level below the seeds, and compares configurations, not the model alone.</a:t>
             </a:r>
             <a:endParaRPr lang="en-US" sz="1050" dirty="0"/>
           </a:p>

--- a/thesis/defense/defense_deck.pptx
+++ b/thesis/defense/defense_deck.pptx
@@ -790,7 +790,7 @@
           <a:p>
             <a:r>
               <a:rPr lang="en-US" dirty="0"/>
-              <a:t>90 seconds. Present this as exploratory replication and not as corpus growth, and say the corpus is still 188 in the same breath. The interesting half is the negative one: the severity advantage of a learned model over a keyword floor does not reproduce on any of the three new sets, which is a caution about how much weight the severity numbers can carry. The Vodafone escalation gap is the encouraging half, because it is an independent set in a different sector pointing the same way. Ask five on the last slide is about whether relabelling these to gold standard is required work before submission.</a:t>
+              <a:t>90 seconds. Present this as a descriptive check on held-out sets and not as corpus growth, and say the corpus is still 188 in the same breath. The interesting half is the negative one: the severity advantage of a learned model over a keyword floor does not reproduce on any of the three new sets, which is a caution about how much weight the severity numbers can carry. The Vodafone escalation gap is the encouraging half, because it is an independent set in a different sector pointing the same way. Ask five on the last slide is about whether relabelling these to gold standard is required work before submission.</a:t>
             </a:r>
             <a:endParaRPr lang="en-US" dirty="0"/>
           </a:p>
@@ -966,7 +966,7 @@
           <a:p>
             <a:r>
               <a:rPr lang="en-US" dirty="0"/>
-              <a:t>90 seconds. Lead with the number and land on the boundary. The distinction between a mechanism that is measured and a benefit that is not is the one an examiner rewards, and it is written into the traceability matrix on the next slide rather than only said out loud here. Ask four is exactly this trade-off.</a:t>
+              <a:t>90 seconds. Lead with the number and land on the boundary. The distinction between a retrieval effect probed on one model and a benefit that is not established is the one an examiner rewards, and it is written into the traceability matrix on the next slide rather than only said out loud here. Ask four is exactly this trade-off.</a:t>
             </a:r>
             <a:endParaRPr lang="en-US" dirty="0"/>
           </a:p>
@@ -1054,7 +1054,7 @@
           <a:p>
             <a:r>
               <a:rPr lang="en-US" dirty="0"/>
-              <a:t>90 seconds. Use this to pre-empt the founder question: externally authored labels, standard instruments, a reproducible harness, a declared conflict of interest, and this table. Since 20 August participants are told before consent that the interviewer built the prototype and has a commercial interest, there is a fourth consent checkbox, and there is a standing rule of no sales content in sessions and no commercial follow-up for six months. Be honest that the manuscript's method chapter does not yet cite that policy. The pending RQ4 row and the once-measured agreement row are what the asks are about.</a:t>
+              <a:t>90 seconds. Use this to pre-empt the founder question: reference labels of stated provenance, standard instruments, a reproducible harness, a declared conflict of interest, and this table. The consent form tells participants before consent that the interviewer built the prototype and has a commercial interest, there is a fourth consent checkbox, and there is a standing rule of no sales content in sessions and no commercial follow-up for six months. The not-conducted RQ4 row and the provenance-unverified agreement row are what the asks are about.</a:t>
             </a:r>
             <a:endParaRPr lang="en-US" dirty="0"/>
           </a:p>
@@ -1142,7 +1142,7 @@
           <a:p>
             <a:r>
               <a:rPr lang="en-US" dirty="0"/>
-              <a:t>90 seconds. Say the first item slowly, because it is the single most important next artifact. One real action, one real metric, one contract, one window, one verdict. Everything else on the right is bounded work with a known method. Stop here and move to the asks.</a:t>
+              <a:t>90 seconds. Say the first item slowly, because until the practitioner sessions run RQ4 is unanswered. The fourth item is the single most important next artifact for the outcome claim: one real action, one real metric, one contract, one window, one verdict. Everything else on the right is bounded work with a known method. Stop here and move to the asks.</a:t>
             </a:r>
             <a:endParaRPr lang="en-US" dirty="0"/>
           </a:p>
@@ -1582,7 +1582,7 @@
           <a:p>
             <a:r>
               <a:rPr lang="en-US" dirty="0"/>
-              <a:t>60 seconds if summoned. The honesty features are the point: real data only, seed labels written before and outside the artifact, a non-circular sentiment reference, and a reproducible harness. Two gold standards exist, they disagree, and the thesis quotes the lower one.</a:t>
+              <a:t>60 seconds if summoned. The design features are the point: real data only, seed labels of stated provenance produced without reference to the artifact, a non-circular sentiment reference, and a reproducible harness. Two gold standards exist, they disagree, and the thesis quotes the lower one.</a:t>
             </a:r>
             <a:endParaRPr lang="en-US" dirty="0"/>
           </a:p>
@@ -2022,7 +2022,7 @@
           <a:p>
             <a:r>
               <a:rPr lang="en-US" dirty="0"/>
-              <a:t>90 seconds if summoned, and only for commercial questions. The category moved toward the thesis. Each rival owns a fragment and nobody verifiably holds the combination, and I apply the same verification standard to my own artifact, which is why the traceability slide says the outcome half is demonstrated rather than proven.</a:t>
+              <a:t>90 seconds if summoned, and only for commercial questions. The category moved toward the thesis. Each rival owns a fragment and, within the literature and product documentation reviewed, no evaluated system was identified that holds the combination; I apply the same documentation standard to my own artifact, which is why the traceability slide says the outcome half is implemented and tested on simulated data rather than field-measured.</a:t>
             </a:r>
             <a:endParaRPr lang="en-US" dirty="0"/>
           </a:p>
@@ -2110,7 +2110,7 @@
           <a:p>
             <a:r>
               <a:rPr lang="en-US" dirty="0"/>
-              <a:t>60 seconds. Why design science in one line: the question is what works by design, not what is. Then the change I need her view on. RQ3 became RQ3a and RQ3b after the August run, because the equity answer turned out to be the more important one and it was sitting inside RQ3 as a sub-clause. For a Responsible AI thesis that felt wrong. Say plainly that RQ4 has not started and that ask one and ask two are about unblocking it.</a:t>
+              <a:t>60 seconds. Why design science in one line: the question is what works by design, not what is. Then the change I need her view on. RQ3 became RQ3a and RQ3b after the August run, because the equity answer turned out to be the more important one and it was sitting inside RQ3 as a sub-clause. For a Responsible AI thesis that felt wrong. Say plainly that RQ4 was not conducted, that the thesis reports it as such with the tiers fixed in advance, and that ask one and ask two are about unblocking it.</a:t>
             </a:r>
             <a:endParaRPr lang="en-US" dirty="0"/>
           </a:p>
@@ -2374,7 +2374,7 @@
           <a:p>
             <a:r>
               <a:rPr lang="en-US" dirty="0"/>
-              <a:t>2 minutes. This is the heart of the Responsible AI argument. Two lines matter most. The gate goes past Article 14 on purpose, because the legal literature says awareness measures alone do not de-bias overseers. And the audit instrumentation is what found the platform's own unenforced controls in July, which is governance working rather than governance claimed. Finish on the three levels of closure, because the results slides measure the first two and not yet the third.</a:t>
+              <a:t>2 minutes. This is the heart of the Responsible AI argument. Two lines matter most. The gate goes past Article 14 on purpose, because the legal literature says awareness measures alone do not de-bias overseers, and it carries its limit: it controls false positives and cannot recover what the enrichment ranks too low. And the audit instrumentation is what found the platform's own unenforced controls in July, which is governance working rather than governance claimed. Finish on the three meanings of closure: the estimator has run on simulated outcome data only, so target attainment and attributed improvement are demonstrated, not field-measured.</a:t>
             </a:r>
             <a:endParaRPr lang="en-US" dirty="0"/>
           </a:p>
@@ -2550,7 +2550,7 @@
           <a:p>
             <a:r>
               <a:rPr lang="en-US" dirty="0"/>
-              <a:t>2 minutes, and this is the slide I would spend extra time on if she engages. The embedding story is the portable architecture lesson: cosine thresholds are not comparable across embedding models, so a provider swap that looks like a config change silently rewrites the behaviour of every semantic feature. Be honest about the residual, which is that the calibrated values live in the deployment environment and the in-code defaults are still the old ones. If she asks what is still open from the review: the one agreement number is the 40-item second risk rating (kappa 0.55 unweighted, 0.70 weighted); its independent human provenance is unverified (the owner attests a second person, the files identify no rater, and the 13 September review reports an AI-assistant task record with identical labels), so it is second-rating agreement and not a human check; there is none behind the in-repo golden set, and that remains the most attackable gap.</a:t>
+              <a:t>2 minutes, and this is the slide I would spend extra time on if she engages. The embedding story is the portable architecture lesson: cosine thresholds are not comparable across embedding models, so a provider swap that looks like a config change silently rewrites the behaviour of every semantic feature. Be honest about the residual, which is that the calibrated values live in the deployment environment and the in-code defaults are still the old ones. If she asks what is still open from the review: the one agreement number is the 40-item second risk rating (kappa 0.55 unweighted, 0.70 weighted); its independent human provenance is unverified (Appendix G.1 keeps what is observed and what is attested apart), so it is second-rating agreement with independent human provenance unverified and is never used as human validation; there is none behind the in-repo golden set, and that remains the most attackable gap.</a:t>
             </a:r>
             <a:endParaRPr lang="en-US" dirty="0"/>
           </a:p>
@@ -2638,7 +2638,7 @@
           <a:p>
             <a:r>
               <a:rPr lang="en-US" dirty="0"/>
-              <a:t>2 minutes. Walk the three rungs, then go to the paired tests, which are new since she last saw this. The honest headline is that the contextual path is not measurably better than a TF-IDF model on severity at this sample size. The confusion matrix shows how the floor fails: it calls 19 of the 27 critical signals low and gets only 4 of them right, a recall of 0.15. Two caveats to have ready. The severity numbers come from Trade Republic and Henkel only, because Lieferando ships no risk label, so food delivery is absent from every n = 106 figure. And the learned model is five-fold cross-validated while the contextual path was run once at temperature 0. If she asks whether 0.86 or the 0.97 on the in-repo set is the real number: different gold standards, curated sets select for label clarity, and the thesis quotes the star-proxy figures (0.86 for the prompt, 0.83 and 0.84 for the production stage). New since August: the production stage was run on the corpus on both models, the generic prompt four times, and the production default is close to deterministic at temperature 0.</a:t>
+              <a:t>2 minutes. Walk the five rows, then go to the paired tests, which are new since she last saw this. The headline is that after the retrospective Holm correction only the floor comparisons survive on sentiment, and on risk the generic prompt and TF-IDF are not distinguishable on this corpus. The confusion matrix shows how the floor fails: it calls 19 of the 27 critical signals low. Two caveats to have ready. The risk numbers come from Trade Republic and Henkel only, because Lieferando ships no risk label, so food delivery is absent from every n = 106 figure. And the learned model is five-fold cross-validated while the generic prompt rests on a reported run plus three repeats at temperature 0, and the production stage on GLM-5.2 was run once. If she asks whether 0.86 or the 99% on the in-repo set is the real number: different gold standards, the golden set is a development and validation benchmark co-developed with the artifact, and the thesis quotes the star-proxy figures (0.86 for the prompt, 0.83 and 0.84 for the production stage). New since August: the production stage was run on the corpus on both models, the generic prompt four times, and the production default assigns identical sentiment labels on 99.3–100% of items across four runs at temperature 0.</a:t>
             </a:r>
             <a:endParaRPr lang="en-US" dirty="0"/>
           </a:p>
@@ -3970,7 +3970,7 @@
                           <a:ea typeface="Calibri" pitchFamily="34" charset="-122"/>
                           <a:cs typeface="Calibri" pitchFamily="34" charset="-120"/>
                         </a:rPr>
-                        <a:t>TF-IDF and LR</a:t>
+                        <a:t>TF-IDF + LR</a:t>
                       </a:r>
                       <a:endParaRPr lang="en-US" sz="1400" dirty="0">
                         <a:latin typeface="Calibri" charset="0"/>
@@ -4038,7 +4038,7 @@
                           <a:ea typeface="Calibri" pitchFamily="34" charset="-122"/>
                           <a:cs typeface="Calibri" pitchFamily="34" charset="-120"/>
                         </a:rPr>
-                        <a:t>Contextual path</a:t>
+                        <a:t>Generic prompt</a:t>
                       </a:r>
                       <a:endParaRPr lang="en-US" sz="1400" dirty="0">
                         <a:latin typeface="Calibri" charset="0"/>
@@ -4306,7 +4306,7 @@
                           <a:ea typeface="Calibri" pitchFamily="34" charset="-122"/>
                           <a:cs typeface="Calibri" pitchFamily="34" charset="-120"/>
                         </a:rPr>
-                        <a:t>0.0%</a:t>
+                        <a:t>0 of 8</a:t>
                       </a:r>
                       <a:endParaRPr lang="en-US" sz="1400" dirty="0">
                         <a:latin typeface="Calibri" charset="0"/>
@@ -4371,7 +4371,7 @@
                           <a:ea typeface="Calibri" pitchFamily="34" charset="-122"/>
                           <a:cs typeface="Calibri" pitchFamily="34" charset="-120"/>
                         </a:rPr>
-                        <a:t>62.5%</a:t>
+                        <a:t>5 of 8</a:t>
                       </a:r>
                       <a:endParaRPr lang="en-US" sz="1400" dirty="0">
                         <a:latin typeface="Calibri" charset="0"/>
@@ -4436,7 +4436,7 @@
                           <a:ea typeface="Calibri" pitchFamily="34" charset="-122"/>
                           <a:cs typeface="Calibri" pitchFamily="34" charset="-120"/>
                         </a:rPr>
-                        <a:t>87.5%</a:t>
+                        <a:t>7 of 8</a:t>
                       </a:r>
                       <a:endParaRPr lang="en-US" sz="1400" dirty="0">
                         <a:latin typeface="Calibri" charset="0"/>
@@ -4501,7 +4501,7 @@
                           <a:ea typeface="Calibri" pitchFamily="34" charset="-122"/>
                           <a:cs typeface="Calibri" pitchFamily="34" charset="-120"/>
                         </a:rPr>
-                        <a:t>62.5%</a:t>
+                        <a:t>5 of 8</a:t>
                       </a:r>
                       <a:endParaRPr lang="en-US" sz="1400" dirty="0">
                         <a:latin typeface="Calibri" charset="0"/>
@@ -4698,7 +4698,7 @@
                           <a:ea typeface="Calibri" pitchFamily="34" charset="-122"/>
                           <a:cs typeface="Calibri" pitchFamily="34" charset="-120"/>
                         </a:rPr>
-                        <a:t>19.5%</a:t>
+                        <a:t>8 of 41</a:t>
                       </a:r>
                       <a:endParaRPr lang="en-US" sz="1400" dirty="0">
                         <a:latin typeface="Calibri" charset="0"/>
@@ -4763,7 +4763,7 @@
                           <a:ea typeface="Calibri" pitchFamily="34" charset="-122"/>
                           <a:cs typeface="Calibri" pitchFamily="34" charset="-120"/>
                         </a:rPr>
-                        <a:t>95.1%</a:t>
+                        <a:t>39 of 41</a:t>
                       </a:r>
                       <a:endParaRPr lang="en-US" sz="1400" dirty="0">
                         <a:latin typeface="Calibri" charset="0"/>
@@ -4828,7 +4828,7 @@
                           <a:ea typeface="Calibri" pitchFamily="34" charset="-122"/>
                           <a:cs typeface="Calibri" pitchFamily="34" charset="-120"/>
                         </a:rPr>
-                        <a:t>87.8%</a:t>
+                        <a:t>36 of 41</a:t>
                       </a:r>
                       <a:endParaRPr lang="en-US" sz="1400" dirty="0">
                         <a:latin typeface="Calibri" charset="0"/>
@@ -4893,7 +4893,7 @@
                           <a:ea typeface="Calibri" pitchFamily="34" charset="-122"/>
                           <a:cs typeface="Calibri" pitchFamily="34" charset="-120"/>
                         </a:rPr>
-                        <a:t>53.7%</a:t>
+                        <a:t>22 of 41</a:t>
                       </a:r>
                       <a:endParaRPr lang="en-US" sz="1400" dirty="0">
                         <a:latin typeface="Calibri" charset="0"/>
@@ -4971,7 +4971,7 @@
               <a:buNone/>
             </a:pPr>
             <a:r>
-              <a:rPr lang="en-US" sz="1300" dirty="0">
+              <a:rPr lang="en-US" sz="1250" dirty="0">
                 <a:solidFill>
                   <a:srgbClr val="1A1A2E"/>
                 </a:solidFill>
@@ -4979,9 +4979,9 @@
                 <a:ea typeface="Calibri" pitchFamily="34" charset="-122"/>
                 <a:cs typeface="Calibri" pitchFamily="34" charset="-120"/>
               </a:rPr>
-              <a:t>On the eight German-source signals whose reference label warrants escalation: the floor escalates none, the learned model five, the contextual path seven. The learned model ties the contextual path on severity accuracy; its stratum recalls differ by 32.6 points, the contextual path's by 0.3, descriptive figures on eight items. One significant test beside a non-significant one does not compare the two gaps.</a:t>
-            </a:r>
-            <a:endParaRPr lang="en-US" sz="1300" dirty="0"/>
+              <a:t>On the eight German-source positives the floor escalates none, the learned model five, the generic prompt seven, the production stage five. The learned model and the generic prompt are not distinguishable on risk accuracy; the stratum recalls are descriptive figures on eight items (within-predictor Fisher p 0.026 and 1.0), and a significant test beside a non-significant one does not compare the two gaps.</a:t>
+            </a:r>
+            <a:endParaRPr lang="en-US" sz="1250" dirty="0"/>
           </a:p>
         </p:txBody>
       </p:sp>
@@ -5084,7 +5084,7 @@
                 <a:ea typeface="Calibri" pitchFamily="34" charset="-122"/>
                 <a:cs typeface="Calibri" pitchFamily="34" charset="-120"/>
               </a:rPr>
-              <a:t>The German-source escalate stratum is eight signals. A 95% interval on 7 of 8 runs from roughly 47% to 100%, on 5 of 8 from 25% to 92%.</a:t>
+              <a:t>The German-source escalate stratum is eight signals. A 95% interval on 7 of 8 runs from 53% to 98%, on 5 of 8 from 31% to 86%.</a:t>
             </a:r>
             <a:endParaRPr lang="en-US" sz="1100" dirty="0"/>
           </a:p>
@@ -5252,7 +5252,7 @@
                 <a:ea typeface="Calibri" pitchFamily="34" charset="-122"/>
                 <a:cs typeface="Calibri" pitchFamily="34" charset="-120"/>
               </a:rPr>
-              <a:t>An uneven triage layer does not only score worse. It means some customers' problems are systematically less likely to reach a human at all. That is a fairness property of the loop rather than of a classifier, and the choice of triage method largely determines it.</a:t>
+              <a:t>An uneven triage layer does not only score worse. It means some customers' problems are less likely to reach a human at all, a fairness property of the loop rather than of a classifier. On this corpus the figures are descriptive and no predictor is ranked; per-stratum monitoring is the design consequence.</a:t>
             </a:r>
             <a:endParaRPr lang="en-US" sz="1550" dirty="0"/>
           </a:p>
@@ -5472,7 +5472,7 @@
                 <a:ea typeface="Calibri" pitchFamily="34" charset="-122"/>
                 <a:cs typeface="Calibri" pitchFamily="34" charset="-120"/>
               </a:rPr>
-              <a:t>of genuine reviews flagged by a stylometric detector at 81% recall. At 1 to 5% contamination that is 78 to 95 real customers per 100 flags.</a:t>
+              <a:t>of genuine reviews flagged by a stylometric detector at 81% recall, on 6,740 texts. Most flags would land on real customers.</a:t>
             </a:r>
             <a:endParaRPr lang="en-US" sz="1300" dirty="0"/>
           </a:p>
@@ -5550,7 +5550,7 @@
                 <a:ea typeface="Calibri" pitchFamily="34" charset="-122"/>
                 <a:cs typeface="Calibri" pitchFamily="34" charset="-120"/>
               </a:rPr>
-              <a:t>AUROC for a Binoculars cross-perplexity detector, English stratum. Below 0.5 is worse than chance: complaint text is the more predictable text.</a:t>
+              <a:t>AUROC of a Binoculars-style detector, English stratum. Below 0.5 is worse than chance: complaint text is the more predictable text.</a:t>
             </a:r>
             <a:endParaRPr lang="en-US" sz="1300" dirty="0"/>
           </a:p>
@@ -5628,7 +5628,7 @@
                 <a:ea typeface="Calibri" pitchFamily="34" charset="-122"/>
                 <a:cs typeface="Calibri" pitchFamily="34" charset="-120"/>
               </a:rPr>
-              <a:t>spread in flag rate across languages, Greek 44.4% against Polish 14.8%, because the lexicon encoded English and German cues only.</a:t>
+              <a:t>spread in flag rate across languages, because the lexicon encoded English and German cues only.</a:t>
             </a:r>
             <a:endParaRPr lang="en-US" sz="1300" dirty="0"/>
           </a:p>
@@ -5767,7 +5767,7 @@
                 <a:ea typeface="Calibri" pitchFamily="34" charset="-122"/>
                 <a:cs typeface="Calibri" pitchFamily="34" charset="-120"/>
               </a:rPr>
-              <a:t>Provenance, exact duplication, volume bursts against a source's own trailing median, and batch-level uniformity, annotated for a human rather than enforced. It abstains below ten words, which is 23% of a real corpus, and it reports its own flag rate per language so an uneven filter is visible before anyone excludes anything.</a:t>
+              <a:t>Provenance, exact duplication, volume bursts against a source's own trailing median, and batch-level uniformity, annotated for a human rather than enforced. It abstains below ten words, which is 23% of all 6,740 texts, and it reports its own flag rate per language so an uneven filter is visible before anyone excludes anything.</a:t>
             </a:r>
             <a:endParaRPr lang="en-US" sz="1300" dirty="0"/>
           </a:p>
@@ -5790,7 +5790,7 @@
                 <a:ea typeface="Calibri" pitchFamily="34" charset="-122"/>
                 <a:cs typeface="Calibri" pitchFamily="34" charset="-120"/>
               </a:rPr>
-              <a:t>Per-comment authorship attribution is not implemented. On the same 6,154 genuine reviews the shipped gate flags 0.86%, and every one is a true duplicate.</a:t>
+              <a:t>Per-comment authorship attribution is not implemented. On 6,154 genuine reviews the shipped gate flags 0.86%, and every one is an exact duplicate.</a:t>
             </a:r>
             <a:endParaRPr lang="en-US" sz="1300" dirty="0"/>
           </a:p>
@@ -7090,7 +7090,7 @@
                 <a:ea typeface="Calibri" pitchFamily="34" charset="-122"/>
                 <a:cs typeface="Calibri" pitchFamily="34" charset="-120"/>
               </a:rPr>
-              <a:t>What replicates, and what does not</a:t>
+              <a:t>What holds on the new sets, and what does not</a:t>
             </a:r>
             <a:endParaRPr lang="en-US" sz="1450" dirty="0"/>
           </a:p>
@@ -7129,7 +7129,7 @@
                 <a:ea typeface="Calibri" pitchFamily="34" charset="-122"/>
                 <a:cs typeface="Calibri" pitchFamily="34" charset="-120"/>
               </a:rPr>
-              <a:t>The sentiment result holds on all three. The severity result does not. On none of the three does the learned model separate from the keyword floor on severity, where on the thesis corpus it clearly did. Severity behaviour looks corpus dependent, and the discussion should say so.</a:t>
+              <a:t>The sentiment result holds on all three. The severity result does not. On none of the three does the learned model separate from the keyword floor on severity, where on the thesis corpus it did. Severity behaviour looks corpus dependent, and the discussion should say so.</a:t>
             </a:r>
             <a:endParaRPr lang="en-US" sz="1300" dirty="0"/>
           </a:p>
@@ -7234,7 +7234,7 @@
                 <a:ea typeface="Calibri" pitchFamily="34" charset="-122"/>
                 <a:cs typeface="Calibri" pitchFamily="34" charset="-120"/>
               </a:rPr>
-              <a:t>Vodafone is the only new set with two source strata large enough to compare: the learned model escalates German-source signals at 50% against 81.8% English-source. Same direction as its observed 32.6-point gap on the thesis corpus; draft labels, descriptive in both cases.</a:t>
+              <a:t>Vodafone is the only new set with two source strata large enough to compare: the learned model escalates German-source signals at 50% against 81.8% English-source. Same direction as its observed gap on the thesis corpus (5 of 8 against 39 of 41); draft labels, descriptive in both cases.</a:t>
             </a:r>
             <a:endParaRPr lang="en-US" sz="1300" dirty="0"/>
           </a:p>
@@ -8455,7 +8455,7 @@
                 <a:ea typeface="Calibri" pitchFamily="34" charset="-122"/>
                 <a:cs typeface="Calibri" pitchFamily="34" charset="-120"/>
               </a:rPr>
-              <a:t>Supplying the class inventory is easier than the free-form condition production runs, so 0.59 and 0.40 are an upper bound and not an estimate. n = 182, with six signals lost to endpoint errors. Restricted to classes with at least five gold examples, macro-F1 falls to 0.28 and 0.18.</a:t>
+              <a:t>The class inventory is supplied, so this is a constrained task distinct from the free-form routing production runs, not a bound on it. n = 182, with six signals lost to endpoint errors; macro-F1 0.50 and 0.32. On classes with at least five examples, macro-F1 is 0.55 and 0.42 and accuracy 0.58 and 0.44.</a:t>
             </a:r>
             <a:endParaRPr lang="en-US" sz="1250" dirty="0"/>
           </a:p>
@@ -8516,7 +8516,7 @@
                 <a:ea typeface="Calibri" pitchFamily="34" charset="-122"/>
                 <a:cs typeface="Calibri" pitchFamily="34" charset="-120"/>
               </a:rPr>
-              <a:t>Why this strengthens the design</a:t>
+              <a:t>What the approval gate controls, and what it cannot</a:t>
             </a:r>
             <a:endParaRPr lang="en-US" sz="1400" dirty="0"/>
           </a:p>
@@ -8547,7 +8547,7 @@
               <a:buNone/>
             </a:pPr>
             <a:r>
-              <a:rPr lang="en-US" sz="1400" dirty="0">
+              <a:rPr lang="en-US" sz="1350" dirty="0">
                 <a:solidFill>
                   <a:srgbClr val="FFFFFF"/>
                 </a:solidFill>
@@ -8555,22 +8555,22 @@
                 <a:ea typeface="Calibri" pitchFamily="34" charset="-122"/>
                 <a:cs typeface="Calibri" pitchFamily="34" charset="-120"/>
               </a:rPr>
-              <a:t>The approval gate is the control that makes a pipeline of this accuracy safe to deploy. These fields are useful as a draft that a human accepts or corrects, and unsafe as an unattended decision. I did not choose the numbers to make that argument. They are what the run produced, and I report them because they are the strongest available answer to the question of why the agent does not simply route it.</a:t>
-            </a:r>
-            <a:endParaRPr lang="en-US" sz="1400" dirty="0"/>
+              <a:t>The gate controls false positives, the wrong or harmful actions that would otherwise reach an external system. It cannot recover escalation-worthy signals the enrichment ranks too low: 22 of 50 under the seed labels on the production rubric. These fields are a draft that a human accepts or corrects, not an unattended decision. The numbers are what the run produced; they are the strongest available answer to why the agent does not simply route it.</a:t>
+            </a:r>
+            <a:endParaRPr lang="en-US" sz="1350" dirty="0"/>
           </a:p>
           <a:p>
             <a:pPr indent="0" marL="0">
               <a:buNone/>
             </a:pPr>
-            <a:endParaRPr lang="en-US" sz="1400" dirty="0"/>
+            <a:endParaRPr lang="en-US" sz="1350" dirty="0"/>
           </a:p>
           <a:p>
             <a:pPr indent="0" marL="0">
               <a:buNone/>
             </a:pPr>
             <a:r>
-              <a:rPr lang="en-US" sz="1400" dirty="0">
+              <a:rPr lang="en-US" sz="1350" dirty="0">
                 <a:solidFill>
                   <a:srgbClr val="FFFFFF"/>
                 </a:solidFill>
@@ -8578,9 +8578,9 @@
                 <a:ea typeface="Calibri" pitchFamily="34" charset="-122"/>
                 <a:cs typeface="Calibri" pitchFamily="34" charset="-120"/>
               </a:rPr>
-              <a:t>Since the review, journey-stage routing can run the closed-inventory condition in production behind a flag, off by default. Measuring that condition is the next iteration.</a:t>
-            </a:r>
-            <a:endParaRPr lang="en-US" sz="1400" dirty="0"/>
+              <a:t>Journey-stage routing can run the closed-inventory condition behind a flag, off by default, in the build at the September commits. Measuring that condition is the next iteration.</a:t>
+            </a:r>
+            <a:endParaRPr lang="en-US" sz="1350" dirty="0"/>
           </a:p>
         </p:txBody>
       </p:sp>
@@ -8681,7 +8681,7 @@
                 <a:ea typeface="Cambria" pitchFamily="34" charset="-122"/>
                 <a:cs typeface="Cambria" pitchFamily="34" charset="-120"/>
               </a:rPr>
-              <a:t>The memory steers the recommendation</a:t>
+              <a:t>The memory can steer the recommendation</a:t>
             </a:r>
             <a:endParaRPr lang="en-US" sz="3000" dirty="0"/>
           </a:p>
@@ -8720,7 +8720,7 @@
                 <a:ea typeface="Calibri" pitchFamily="34" charset="-122"/>
                 <a:cs typeface="Calibri" pitchFamily="34" charset="-120"/>
               </a:rPr>
-              <a:t>The mechanism is measured. The benefit is not.</a:t>
+              <a:t>Retrieval altered recommendations in small probes on GLM-5.2. The benefit of decay is untested.</a:t>
             </a:r>
             <a:endParaRPr lang="en-US" sz="1500" dirty="0"/>
           </a:p>
@@ -8798,7 +8798,7 @@
                 <a:ea typeface="Calibri" pitchFamily="34" charset="-122"/>
                 <a:cs typeface="Calibri" pitchFamily="34" charset="-120"/>
               </a:rPr>
-              <a:t>share of a past remedy appearing in the new recommendation once retrieval is on, at 66.7% adoption</a:t>
+              <a:t>share of a past remedy appearing in the new recommendation once retrieval is on (3 July 2026, GLM-5.2; contemporaneous record only)</a:t>
             </a:r>
             <a:endParaRPr lang="en-US" sz="1300" dirty="0"/>
           </a:p>
@@ -8837,7 +8837,7 @@
                 <a:ea typeface="Cambria" pitchFamily="34" charset="-122"/>
                 <a:cs typeface="Cambria" pitchFamily="34" charset="-120"/>
               </a:rPr>
-              <a:t>0.503</a:t>
+              <a:t>3 of 3</a:t>
             </a:r>
             <a:endParaRPr lang="en-US" sz="4600" dirty="0"/>
           </a:p>
@@ -8876,7 +8876,7 @@
                 <a:ea typeface="Calibri" pitchFamily="34" charset="-122"/>
                 <a:cs typeface="Calibri" pitchFamily="34" charset="-120"/>
               </a:rPr>
-              <a:t>alignment lift against a same-run noise floor that absorbs model jitter</a:t>
+              <a:t>themes on which the 6 September re-run reproduced adoption on GLM-5.2 (contemporaneous record)</a:t>
             </a:r>
             <a:endParaRPr lang="en-US" sz="1300" dirty="0"/>
           </a:p>
@@ -8909,13 +8909,13 @@
             <a:r>
               <a:rPr lang="en-US" sz="4600" b="1" dirty="0">
                 <a:solidFill>
-                  <a:srgbClr val="1E2761"/>
+                  <a:srgbClr val="990011"/>
                 </a:solidFill>
                 <a:latin typeface="Cambria" pitchFamily="34" charset="0"/>
                 <a:ea typeface="Cambria" pitchFamily="34" charset="-122"/>
                 <a:cs typeface="Cambria" pitchFamily="34" charset="-120"/>
               </a:rPr>
-              <a:t>0 and 2.5%</a:t>
+              <a:t>1 of 4</a:t>
             </a:r>
             <a:endParaRPr lang="en-US" sz="4600" dirty="0"/>
           </a:p>
@@ -8954,7 +8954,7 @@
                 <a:ea typeface="Calibri" pitchFamily="34" charset="-122"/>
                 <a:cs typeface="Calibri" pitchFamily="34" charset="-120"/>
               </a:rPr>
-              <a:t>PII leaks across the local run ledger, and the hallucination rate at the 17 July run, English scope by construction</a:t>
+              <a:t>themes on the production default in the same re-run: the effect did not reproduce on Mistral Small 4</a:t>
             </a:r>
             <a:endParaRPr lang="en-US" sz="1300" dirty="0"/>
           </a:p>
@@ -9059,7 +9059,7 @@
                 <a:ea typeface="Calibri" pitchFamily="34" charset="-122"/>
                 <a:cs typeface="Calibri" pitchFamily="34" charset="-120"/>
               </a:rPr>
-              <a:t>The outcome data behind these learnings is simulated. Adoption shows that the loop steers recommendations. Whether the steered remedy is better needs a live outcome contract on real data, which is the single most important open step in the thesis.</a:t>
+              <a:t>The probes varied whether a learning was retrieved, not its age, and ran on simulation-authored learnings over simulated outcome data, a condition the retrieval gate no longer admits. Decay (DP2) is an implemented design hypothesis whose benefit remains untested; whether the steered remedy is better needs a live outcome contract on real data.</a:t>
             </a:r>
             <a:endParaRPr lang="en-US" sz="1500" dirty="0"/>
           </a:p>
@@ -9162,7 +9162,7 @@
                 <a:ea typeface="Cambria" pitchFamily="34" charset="-122"/>
                 <a:cs typeface="Cambria" pitchFamily="34" charset="-120"/>
               </a:rPr>
-              <a:t>What is proven, what is demonstrated, what is pending</a:t>
+              <a:t>What is measured, demonstrated, and not conducted</a:t>
             </a:r>
             <a:endParaRPr lang="en-US" sz="3000" dirty="0"/>
           </a:p>
@@ -9201,7 +9201,7 @@
                 <a:ea typeface="Calibri" pitchFamily="34" charset="-122"/>
                 <a:cs typeface="Calibri" pitchFamily="34" charset="-120"/>
               </a:rPr>
-              <a:t>The traceability matrix, Appendix D</a:t>
+              <a:t>The traceability matrix, Appendix D, in the status vocabulary of §1.7</a:t>
             </a:r>
             <a:endParaRPr lang="en-US" sz="1500" dirty="0"/>
           </a:p>
@@ -9458,7 +9458,7 @@
                           <a:ea typeface="Calibri" pitchFamily="34" charset="-122"/>
                           <a:cs typeface="Calibri" pitchFamily="34" charset="-120"/>
                         </a:rPr>
-                        <a:t>Triage accuracy (RQ3a)</a:t>
+                        <a:t>Triage agreement (RQ3a)</a:t>
                       </a:r>
                       <a:endParaRPr lang="en-US" sz="1400" dirty="0">
                         <a:latin typeface="Calibri" charset="0"/>
@@ -9523,7 +9523,7 @@
                           <a:ea typeface="Calibri" pitchFamily="34" charset="-122"/>
                           <a:cs typeface="Calibri" pitchFamily="34" charset="-120"/>
                         </a:rPr>
-                        <a:t>Measured</a:t>
+                        <a:t>Measured (bounded)</a:t>
                       </a:r>
                       <a:endParaRPr lang="en-US" sz="1400" dirty="0">
                         <a:latin typeface="Calibri" charset="0"/>
@@ -9588,7 +9588,7 @@
                           <a:ea typeface="Calibri" pitchFamily="34" charset="-122"/>
                           <a:cs typeface="Calibri" pitchFamily="34" charset="-120"/>
                         </a:rPr>
-                        <a:t>three predictors on one gold standard, with pairwise McNemar tests</a:t>
+                        <a:t>five predictors on one gold standard; McNemar tests in one retrospective Holm family per task</a:t>
                       </a:r>
                       <a:endParaRPr lang="en-US" sz="1400" dirty="0">
                         <a:latin typeface="Calibri" charset="0"/>
@@ -9720,7 +9720,7 @@
                           <a:ea typeface="Calibri" pitchFamily="34" charset="-122"/>
                           <a:cs typeface="Calibri" pitchFamily="34" charset="-120"/>
                         </a:rPr>
-                        <a:t>Measured, bounded</a:t>
+                        <a:t>Descriptive</a:t>
                       </a:r>
                       <a:endParaRPr lang="en-US" sz="1400" dirty="0">
                         <a:latin typeface="Calibri" charset="0"/>
@@ -9785,7 +9785,7 @@
                           <a:ea typeface="Calibri" pitchFamily="34" charset="-122"/>
                           <a:cs typeface="Calibri" pitchFamily="34" charset="-120"/>
                         </a:rPr>
-                        <a:t>floor 0.0, learned 62.5, contextual 87.5 vs 87.8, production 62.5 vs 53.7; n = 8</a:t>
+                        <a:t>German-source 8 positives: floor 0, TF-IDF 5, generic 7, production 5; English-source 41: 8, 39, 36, 22</a:t>
                       </a:r>
                       <a:endParaRPr lang="en-US" sz="1400" dirty="0">
                         <a:latin typeface="Calibri" charset="0"/>
@@ -9917,7 +9917,7 @@
                           <a:ea typeface="Calibri" pitchFamily="34" charset="-122"/>
                           <a:cs typeface="Calibri" pitchFamily="34" charset="-120"/>
                         </a:rPr>
-                        <a:t>Measured, bounded</a:t>
+                        <a:t>Measured (bounded)</a:t>
                       </a:r>
                       <a:endParaRPr lang="en-US" sz="1400" dirty="0">
                         <a:latin typeface="Calibri" charset="0"/>
@@ -9982,7 +9982,7 @@
                           <a:ea typeface="Calibri" pitchFamily="34" charset="-122"/>
                           <a:cs typeface="Calibri" pitchFamily="34" charset="-120"/>
                         </a:rPr>
-                        <a:t>scored with the inventory supplied, which is an upper bound</a:t>
+                        <a:t>scored with the inventory supplied, a constrained task distinct from free-form routing; n = 182</a:t>
                       </a:r>
                       <a:endParaRPr lang="en-US" sz="1400" dirty="0">
                         <a:latin typeface="Calibri" charset="0"/>
@@ -10114,7 +10114,7 @@
                           <a:ea typeface="Calibri" pitchFamily="34" charset="-122"/>
                           <a:cs typeface="Calibri" pitchFamily="34" charset="-120"/>
                         </a:rPr>
-                        <a:t>Partially measured</a:t>
+                        <a:t>Implemented; untested hypothesis</a:t>
                       </a:r>
                       <a:endParaRPr lang="en-US" sz="1400" dirty="0">
                         <a:latin typeface="Calibri" charset="0"/>
@@ -10179,7 +10179,7 @@
                           <a:ea typeface="Calibri" pitchFamily="34" charset="-122"/>
                           <a:cs typeface="Calibri" pitchFamily="34" charset="-120"/>
                         </a:rPr>
-                        <a:t>remedy adoption 21% to 71%; replicated on GLM-5.2, not on the production default; simulated outcomes</a:t>
+                        <a:t>retrieval altered recommendations in small probes on GLM-5.2, not on the production default; simulated outcomes</a:t>
                       </a:r>
                       <a:endParaRPr lang="en-US" sz="1400" dirty="0">
                         <a:latin typeface="Calibri" charset="0"/>
@@ -10311,7 +10311,7 @@
                           <a:ea typeface="Calibri" pitchFamily="34" charset="-122"/>
                           <a:cs typeface="Calibri" pitchFamily="34" charset="-120"/>
                         </a:rPr>
-                        <a:t>Demonstrated</a:t>
+                        <a:t>Implemented and tested</a:t>
                       </a:r>
                       <a:endParaRPr lang="en-US" sz="1400" dirty="0">
                         <a:latin typeface="Calibri" charset="0"/>
@@ -10376,7 +10376,7 @@
                           <a:ea typeface="Calibri" pitchFamily="34" charset="-122"/>
                           <a:cs typeface="Calibri" pitchFamily="34" charset="-120"/>
                         </a:rPr>
-                        <a:t>designed, built and instrumented; one live contract still pending</a:t>
+                        <a:t>refusal below minimum data requirements tested; simulated outcome data only; not deployed at the time of writing</a:t>
                       </a:r>
                       <a:endParaRPr lang="en-US" sz="1400" dirty="0">
                         <a:latin typeface="Calibri" charset="0"/>
@@ -10508,7 +10508,7 @@
                           <a:ea typeface="Calibri" pitchFamily="34" charset="-122"/>
                           <a:cs typeface="Calibri" pitchFamily="34" charset="-120"/>
                         </a:rPr>
-                        <a:t>Shipped, partly measured</a:t>
+                        <a:t>Implemented and tested</a:t>
                       </a:r>
                       <a:endParaRPr lang="en-US" sz="1400" dirty="0">
                         <a:latin typeface="Calibri" charset="0"/>
@@ -10573,7 +10573,7 @@
                           <a:ea typeface="Calibri" pitchFamily="34" charset="-122"/>
                           <a:cs typeface="Calibri" pitchFamily="34" charset="-120"/>
                         </a:rPr>
-                        <a:t>calibration and the refusal harness measured; the rest covered by unit tests</a:t>
+                        <a:t>calibration and the refusal harness measured; the rest covered by regression tests</a:t>
                       </a:r>
                       <a:endParaRPr lang="en-US" sz="1400" dirty="0">
                         <a:latin typeface="Calibri" charset="0"/>
@@ -10705,7 +10705,7 @@
                           <a:ea typeface="Calibri" pitchFamily="34" charset="-122"/>
                           <a:cs typeface="Calibri" pitchFamily="34" charset="-120"/>
                         </a:rPr>
-                        <a:t>Measured once, provenance unverified</a:t>
+                        <a:t>Provenance unverified</a:t>
                       </a:r>
                       <a:endParaRPr lang="en-US" sz="1400" dirty="0">
                         <a:latin typeface="Calibri" charset="0"/>
@@ -10770,7 +10770,7 @@
                           <a:ea typeface="Calibri" pitchFamily="34" charset="-122"/>
                           <a:cs typeface="Calibri" pitchFamily="34" charset="-120"/>
                         </a:rPr>
-                        <a:t>kappa 0.55 (0.70 weighted), 40 risk items; independent human provenance unverified, so no human check; none on golden set</a:t>
+                        <a:t>kappa 0.55 (0.70 weighted), 40 risk items; independent human provenance unverified, so not human validation</a:t>
                       </a:r>
                       <a:endParaRPr lang="en-US" sz="1400" dirty="0">
                         <a:latin typeface="Calibri" charset="0"/>
@@ -10902,7 +10902,7 @@
                           <a:ea typeface="Calibri" pitchFamily="34" charset="-122"/>
                           <a:cs typeface="Calibri" pitchFamily="34" charset="-120"/>
                         </a:rPr>
-                        <a:t>Measured, refused</a:t>
+                        <a:t>Measured (bounded)</a:t>
                       </a:r>
                       <a:endParaRPr lang="en-US" sz="1400" dirty="0">
                         <a:latin typeface="Calibri" charset="0"/>
@@ -11034,7 +11034,7 @@
                           <a:ea typeface="Calibri" pitchFamily="34" charset="-122"/>
                           <a:cs typeface="Calibri" pitchFamily="34" charset="-120"/>
                         </a:rPr>
-                        <a:t>Practitioner value (RQ4)</a:t>
+                        <a:t>Practitioner experience (RQ4)</a:t>
                       </a:r>
                       <a:endParaRPr lang="en-US" sz="1400" dirty="0">
                         <a:latin typeface="Calibri" charset="0"/>
@@ -11099,7 +11099,7 @@
                           <a:ea typeface="Calibri" pitchFamily="34" charset="-122"/>
                           <a:cs typeface="Calibri" pitchFamily="34" charset="-120"/>
                         </a:rPr>
-                        <a:t>Pending</a:t>
+                        <a:t>Not conducted</a:t>
                       </a:r>
                       <a:endParaRPr lang="en-US" sz="1400" dirty="0">
                         <a:latin typeface="Calibri" charset="0"/>
@@ -11164,7 +11164,7 @@
                           <a:ea typeface="Calibri" pitchFamily="34" charset="-122"/>
                           <a:cs typeface="Calibri" pitchFamily="34" charset="-120"/>
                         </a:rPr>
-                        <a:t>instruments ready; interviews not started</a:t>
+                        <a:t>protocol, instruments and pre-registered tiers retained (Appendix A; §5B)</a:t>
                       </a:r>
                       <a:endParaRPr lang="en-US" sz="1400" dirty="0">
                         <a:latin typeface="Calibri" charset="0"/>
@@ -11250,7 +11250,7 @@
                 <a:ea typeface="Calibri" pitchFamily="34" charset="-122"/>
                 <a:cs typeface="Calibri" pitchFamily="34" charset="-120"/>
               </a:rPr>
-              <a:t>A claim's status is stated once, in one place, and every chapter has to agree with it. That is what the truth audit tested on 20 August. Where a chapter disagreed with this table, I changed the chapter.</a:t>
+              <a:t>A claim's status is stated once, in one place, and every chapter has to agree with it. That is what the truth audit tested on 20 August and the 17 September revision re-checked. Where a chapter disagreed with this table, I changed the chapter.</a:t>
             </a:r>
             <a:endParaRPr lang="en-US" sz="1300" dirty="0"/>
           </a:p>
@@ -11460,13 +11460,13 @@
           <a:p>
             <a:pPr marL="342900" indent="-342900">
               <a:spcAft>
-                <a:spcPts val="700"/>
+                <a:spcPts val="500"/>
               </a:spcAft>
               <a:buSzPct val="100000"/>
               <a:buChar char="•"/>
             </a:pPr>
             <a:r>
-              <a:rPr lang="en-US" sz="1250" dirty="0">
+              <a:rPr lang="en-US" sz="1150" dirty="0">
                 <a:solidFill>
                   <a:srgbClr val="1A1A2E"/>
                 </a:solidFill>
@@ -11476,8 +11476,216 @@
               </a:rPr>
               <a:t>A modest, balanced corpus of 188 signals. It characterises the pipeline, not a population.</a:t>
             </a:r>
-            <a:endParaRPr lang="en-US" sz="1250" dirty="0"/>
-          </a:p>
+            <a:endParaRPr lang="en-US" sz="1150" dirty="0"/>
+          </a:p>
+          <a:p>
+            <a:pPr marL="342900" indent="-342900">
+              <a:spcAft>
+                <a:spcPts val="500"/>
+              </a:spcAft>
+              <a:buSzPct val="100000"/>
+              <a:buChar char="•"/>
+            </a:pPr>
+            <a:r>
+              <a:rPr lang="en-US" sz="1150" dirty="0">
+                <a:solidFill>
+                  <a:srgbClr val="1A1A2E"/>
+                </a:solidFill>
+                <a:latin typeface="Calibri" pitchFamily="34" charset="0"/>
+                <a:ea typeface="Calibri" pitchFamily="34" charset="-122"/>
+                <a:cs typeface="Calibri" pitchFamily="34" charset="-120"/>
+              </a:rPr>
+              <a:t>Language is confounded with sector, the texts are English paraphrases, and the German-source escalate stratum is eight signals; one cross-language claim was retracted.</a:t>
+            </a:r>
+            <a:endParaRPr lang="en-US" sz="1150" dirty="0"/>
+          </a:p>
+          <a:p>
+            <a:pPr marL="342900" indent="-342900">
+              <a:spcAft>
+                <a:spcPts val="500"/>
+              </a:spcAft>
+              <a:buSzPct val="100000"/>
+              <a:buChar char="•"/>
+            </a:pPr>
+            <a:r>
+              <a:rPr lang="en-US" sz="1150" dirty="0">
+                <a:solidFill>
+                  <a:srgbClr val="1A1A2E"/>
+                </a:solidFill>
+                <a:latin typeface="Calibri" pitchFamily="34" charset="0"/>
+                <a:ea typeface="Calibri" pitchFamily="34" charset="-122"/>
+                <a:cs typeface="Calibri" pitchFamily="34" charset="-120"/>
+              </a:rPr>
+              <a:t>Routing is scored only with the inventory supplied, a constrained task; theme and action carry labels but no metric.</a:t>
+            </a:r>
+            <a:endParaRPr lang="en-US" sz="1150" dirty="0"/>
+          </a:p>
+          <a:p>
+            <a:pPr marL="342900" indent="-342900">
+              <a:spcAft>
+                <a:spcPts val="500"/>
+              </a:spcAft>
+              <a:buSzPct val="100000"/>
+              <a:buChar char="•"/>
+            </a:pPr>
+            <a:r>
+              <a:rPr lang="en-US" sz="1150" dirty="0">
+                <a:solidFill>
+                  <a:srgbClr val="1A1A2E"/>
+                </a:solidFill>
+                <a:latin typeface="Calibri" pitchFamily="34" charset="0"/>
+                <a:ea typeface="Calibri" pitchFamily="34" charset="-122"/>
+                <a:cs typeface="Calibri" pitchFamily="34" charset="-120"/>
+              </a:rPr>
+              <a:t>One agreement number: kappa 0.55 on 40 risk items, second-rating agreement with independent human provenance unverified, never used as human validation; none on golden set.</a:t>
+            </a:r>
+            <a:endParaRPr lang="en-US" sz="1150" dirty="0"/>
+          </a:p>
+          <a:p>
+            <a:pPr marL="342900" indent="-342900">
+              <a:spcAft>
+                <a:spcPts val="500"/>
+              </a:spcAft>
+              <a:buSzPct val="100000"/>
+              <a:buChar char="•"/>
+            </a:pPr>
+            <a:r>
+              <a:rPr lang="en-US" sz="1150" dirty="0">
+                <a:solidFill>
+                  <a:srgbClr val="1A1A2E"/>
+                </a:solidFill>
+                <a:latin typeface="Calibri" pitchFamily="34" charset="0"/>
+                <a:ea typeface="Calibri" pitchFamily="34" charset="-122"/>
+                <a:cs typeface="Calibri" pitchFamily="34" charset="-120"/>
+              </a:rPr>
+              <a:t>The golden set's urgency exemplar effect is sequential testing without alpha spending; same-item re-runs do not replace alpha control, so it carries no confirmatory weight.</a:t>
+            </a:r>
+            <a:endParaRPr lang="en-US" sz="1150" dirty="0"/>
+          </a:p>
+          <a:p>
+            <a:pPr marL="342900" indent="-342900">
+              <a:spcAft>
+                <a:spcPts val="500"/>
+              </a:spcAft>
+              <a:buSzPct val="100000"/>
+              <a:buChar char="•"/>
+            </a:pPr>
+            <a:r>
+              <a:rPr lang="en-US" sz="1150" dirty="0">
+                <a:solidFill>
+                  <a:srgbClr val="1A1A2E"/>
+                </a:solidFill>
+                <a:latin typeface="Calibri" pitchFamily="34" charset="0"/>
+                <a:ea typeface="Calibri" pitchFamily="34" charset="-122"/>
+                <a:cs typeface="Calibri" pitchFamily="34" charset="-120"/>
+              </a:rPr>
+              <a:t>Outcome data behind the learning loop is simulated; the contract, verdict and memory mechanisms are tested at commits not deployed at the time of writing.</a:t>
+            </a:r>
+            <a:endParaRPr lang="en-US" sz="1150" dirty="0"/>
+          </a:p>
+          <a:p>
+            <a:pPr marL="342900" indent="-342900">
+              <a:spcAft>
+                <a:spcPts val="500"/>
+              </a:spcAft>
+              <a:buSzPct val="100000"/>
+              <a:buChar char="•"/>
+            </a:pPr>
+            <a:r>
+              <a:rPr lang="en-US" sz="1150" dirty="0">
+                <a:solidFill>
+                  <a:srgbClr val="1A1A2E"/>
+                </a:solidFill>
+                <a:latin typeface="Calibri" pitchFamily="34" charset="0"/>
+                <a:ea typeface="Calibri" pitchFamily="34" charset="-122"/>
+                <a:cs typeface="Calibri" pitchFamily="34" charset="-120"/>
+              </a:rPr>
+              <a:t>The practitioner study was not conducted, so RQ4 is unanswered and the friction clause of RQ2 is open.</a:t>
+            </a:r>
+            <a:endParaRPr lang="en-US" sz="1150" dirty="0"/>
+          </a:p>
+          <a:p>
+            <a:pPr marL="342900" indent="-342900">
+              <a:spcAft>
+                <a:spcPts val="500"/>
+              </a:spcAft>
+              <a:buSzPct val="100000"/>
+              <a:buChar char="•"/>
+            </a:pPr>
+            <a:r>
+              <a:rPr lang="en-US" sz="1150" dirty="0">
+                <a:solidFill>
+                  <a:srgbClr val="1A1A2E"/>
+                </a:solidFill>
+                <a:latin typeface="Calibri" pitchFamily="34" charset="0"/>
+                <a:ea typeface="Calibri" pitchFamily="34" charset="-122"/>
+                <a:cs typeface="Calibri" pitchFamily="34" charset="-120"/>
+              </a:rPr>
+              <a:t>I am the designer, the founder and the researcher, managed by reference labels of stated provenance, standard instruments and a reproducible harness.</a:t>
+            </a:r>
+            <a:endParaRPr lang="en-US" sz="1150" dirty="0"/>
+          </a:p>
+        </p:txBody>
+      </p:sp>
+      <p:sp>
+        <p:nvSpPr>
+          <p:cNvPr id="7" name="Text 5"/>
+          <p:cNvSpPr/>
+          <p:nvPr/>
+        </p:nvSpPr>
+        <p:spPr>
+          <a:xfrm>
+            <a:off x="6309360" y="1371600"/>
+            <a:ext cx="5303520" cy="310896"/>
+          </a:xfrm>
+          <a:prstGeom prst="rect">
+            <a:avLst/>
+          </a:prstGeom>
+          <a:noFill/>
+          <a:ln/>
+        </p:spPr>
+        <p:txBody>
+          <a:bodyPr wrap="square" rtlCol="0" anchor="ctr"/>
+          <a:lstStyle/>
+          <a:p>
+            <a:pPr indent="0" marL="0">
+              <a:buNone/>
+            </a:pPr>
+            <a:r>
+              <a:rPr lang="en-US" sz="1700" b="1" dirty="0">
+                <a:solidFill>
+                  <a:srgbClr val="1E2761"/>
+                </a:solidFill>
+                <a:latin typeface="Cambria" pitchFamily="34" charset="0"/>
+                <a:ea typeface="Cambria" pitchFamily="34" charset="-122"/>
+                <a:cs typeface="Cambria" pitchFamily="34" charset="-120"/>
+              </a:rPr>
+              <a:t>Next, in the order of §6.5</a:t>
+            </a:r>
+            <a:endParaRPr lang="en-US" sz="1700" dirty="0"/>
+          </a:p>
+        </p:txBody>
+      </p:sp>
+      <p:sp>
+        <p:nvSpPr>
+          <p:cNvPr id="8" name="Text 6"/>
+          <p:cNvSpPr/>
+          <p:nvPr/>
+        </p:nvSpPr>
+        <p:spPr>
+          <a:xfrm>
+            <a:off x="6492240" y="1755648"/>
+            <a:ext cx="5120640" cy="4297680"/>
+          </a:xfrm>
+          <a:prstGeom prst="rect">
+            <a:avLst/>
+          </a:prstGeom>
+          <a:noFill/>
+          <a:ln/>
+        </p:spPr>
+        <p:txBody>
+          <a:bodyPr wrap="square" rtlCol="0" anchor="ctr"/>
+          <a:lstStyle/>
           <a:p>
             <a:pPr marL="342900" indent="-342900">
               <a:spcAft>
@@ -11487,7 +11695,7 @@
               <a:buChar char="•"/>
             </a:pPr>
             <a:r>
-              <a:rPr lang="en-US" sz="1250" dirty="0">
+              <a:rPr lang="en-US" sz="1200" dirty="0">
                 <a:solidFill>
                   <a:srgbClr val="1A1A2E"/>
                 </a:solidFill>
@@ -11495,9 +11703,9 @@
                 <a:ea typeface="Calibri" pitchFamily="34" charset="-122"/>
                 <a:cs typeface="Calibri" pitchFamily="34" charset="-120"/>
               </a:rPr>
-              <a:t>Language is confounded with sector and the texts are English paraphrases, so every per-language result is a source-language stratum; one cross-language claim was retracted rather than defended.</a:t>
-            </a:r>
-            <a:endParaRPr lang="en-US" sz="1250" dirty="0"/>
+              <a:t>The practitioner study. Instruments, reporting tiers and the survey script are ready; twelve to fifteen interviews and task sessions, with the survey for breadth.</a:t>
+            </a:r>
+            <a:endParaRPr lang="en-US" sz="1200" dirty="0"/>
           </a:p>
           <a:p>
             <a:pPr marL="342900" indent="-342900">
@@ -11508,7 +11716,7 @@
               <a:buChar char="•"/>
             </a:pPr>
             <a:r>
-              <a:rPr lang="en-US" sz="1250" dirty="0">
+              <a:rPr lang="en-US" sz="1200" dirty="0">
                 <a:solidFill>
                   <a:srgbClr val="1A1A2E"/>
                 </a:solidFill>
@@ -11516,9 +11724,9 @@
                 <a:ea typeface="Calibri" pitchFamily="34" charset="-122"/>
                 <a:cs typeface="Calibri" pitchFamily="34" charset="-120"/>
               </a:rPr>
-              <a:t>The German-source escalate stratum is eight signals.</a:t>
-            </a:r>
-            <a:endParaRPr lang="en-US" sz="1250" dirty="0"/>
+              <a:t>The human annotation study on the existing corpus, with a provenance audit of the seed labels first: two raters blind, adjudication, every prediction file re-scored, the learned baseline retrained on the adjudicated gold.</a:t>
+            </a:r>
+            <a:endParaRPr lang="en-US" sz="1200" dirty="0"/>
           </a:p>
           <a:p>
             <a:pPr marL="342900" indent="-342900">
@@ -11529,7 +11737,7 @@
               <a:buChar char="•"/>
             </a:pPr>
             <a:r>
-              <a:rPr lang="en-US" sz="1250" dirty="0">
+              <a:rPr lang="en-US" sz="1200" dirty="0">
                 <a:solidFill>
                   <a:srgbClr val="1A1A2E"/>
                 </a:solidFill>
@@ -11537,9 +11745,9 @@
                 <a:ea typeface="Calibri" pitchFamily="34" charset="-122"/>
                 <a:cs typeface="Calibri" pitchFamily="34" charset="-120"/>
               </a:rPr>
-              <a:t>Routing is scored only with the inventory supplied, and two of the six gold fields are not scored at all.</a:t>
-            </a:r>
-            <a:endParaRPr lang="en-US" sz="1250" dirty="0"/>
+              <a:t>Compare no memory, memory without decay and memory with decay on frozen scenarios, with blind assessment across several half-lives, as the test of DP2.</a:t>
+            </a:r>
+            <a:endParaRPr lang="en-US" sz="1200" dirty="0"/>
           </a:p>
           <a:p>
             <a:pPr marL="342900" indent="-342900">
@@ -11550,7 +11758,7 @@
               <a:buChar char="•"/>
             </a:pPr>
             <a:r>
-              <a:rPr lang="en-US" sz="1250" dirty="0">
+              <a:rPr lang="en-US" sz="1200" dirty="0">
                 <a:solidFill>
                   <a:srgbClr val="1A1A2E"/>
                 </a:solidFill>
@@ -11558,9 +11766,9 @@
                 <a:ea typeface="Calibri" pitchFamily="34" charset="-122"/>
                 <a:cs typeface="Calibri" pitchFamily="34" charset="-120"/>
               </a:rPr>
-              <a:t>One agreement number: kappa 0.55 on 40 risk items, human provenance unverified, so no human check; none on golden set.</a:t>
-            </a:r>
-            <a:endParaRPr lang="en-US" sz="1250" dirty="0"/>
+              <a:t>One live outcome contract on non-simulated data measured through its window, preceded by a retrospective observational read of the shipped estimator over real dated inflow, which describes rather than attributes.</a:t>
+            </a:r>
+            <a:endParaRPr lang="en-US" sz="1200" dirty="0"/>
           </a:p>
           <a:p>
             <a:pPr marL="342900" indent="-342900">
@@ -11571,7 +11779,7 @@
               <a:buChar char="•"/>
             </a:pPr>
             <a:r>
-              <a:rPr lang="en-US" sz="1250" dirty="0">
+              <a:rPr lang="en-US" sz="1200" dirty="0">
                 <a:solidFill>
                   <a:srgbClr val="1A1A2E"/>
                 </a:solidFill>
@@ -11579,9 +11787,9 @@
                 <a:ea typeface="Calibri" pitchFamily="34" charset="-122"/>
                 <a:cs typeface="Calibri" pitchFamily="34" charset="-120"/>
               </a:rPr>
-              <a:t>Urgency exemplar effect tested at n = 60, 80, 100 without alpha spending; same-item re-runs bound model noise and do not replace alpha control, so the claim is exploratory.</a:t>
-            </a:r>
-            <a:endParaRPr lang="en-US" sz="1250" dirty="0"/>
+              <a:t>Source-stratum fairness monitoring of escalation and routing distributions, with denominators, as a standing control.</a:t>
+            </a:r>
+            <a:endParaRPr lang="en-US" sz="1200" dirty="0"/>
           </a:p>
           <a:p>
             <a:pPr marL="342900" indent="-342900">
@@ -11592,7 +11800,7 @@
               <a:buChar char="•"/>
             </a:pPr>
             <a:r>
-              <a:rPr lang="en-US" sz="1250" dirty="0">
+              <a:rPr lang="en-US" sz="1200" dirty="0">
                 <a:solidFill>
                   <a:srgbClr val="1A1A2E"/>
                 </a:solidFill>
@@ -11600,217 +11808,9 @@
                 <a:ea typeface="Calibri" pitchFamily="34" charset="-122"/>
                 <a:cs typeface="Calibri" pitchFamily="34" charset="-120"/>
               </a:rPr>
-              <a:t>Outcome data behind the learning loop is simulated, so the distinctive claim is demonstrated and not field-proven.</a:t>
-            </a:r>
-            <a:endParaRPr lang="en-US" sz="1250" dirty="0"/>
-          </a:p>
-          <a:p>
-            <a:pPr marL="342900" indent="-342900">
-              <a:spcAft>
-                <a:spcPts val="700"/>
-              </a:spcAft>
-              <a:buSzPct val="100000"/>
-              <a:buChar char="•"/>
-            </a:pPr>
-            <a:r>
-              <a:rPr lang="en-US" sz="1250" dirty="0">
-                <a:solidFill>
-                  <a:srgbClr val="1A1A2E"/>
-                </a:solidFill>
-                <a:latin typeface="Calibri" pitchFamily="34" charset="0"/>
-                <a:ea typeface="Calibri" pitchFamily="34" charset="-122"/>
-                <a:cs typeface="Calibri" pitchFamily="34" charset="-120"/>
-              </a:rPr>
-              <a:t>I am the designer, the founder and the researcher, managed by external labels, standard instruments and a reproducible harness.</a:t>
-            </a:r>
-            <a:endParaRPr lang="en-US" sz="1250" dirty="0"/>
-          </a:p>
-        </p:txBody>
-      </p:sp>
-      <p:sp>
-        <p:nvSpPr>
-          <p:cNvPr id="7" name="Text 5"/>
-          <p:cNvSpPr/>
-          <p:nvPr/>
-        </p:nvSpPr>
-        <p:spPr>
-          <a:xfrm>
-            <a:off x="6309360" y="1371600"/>
-            <a:ext cx="5303520" cy="310896"/>
-          </a:xfrm>
-          <a:prstGeom prst="rect">
-            <a:avLst/>
-          </a:prstGeom>
-          <a:noFill/>
-          <a:ln/>
-        </p:spPr>
-        <p:txBody>
-          <a:bodyPr wrap="square" rtlCol="0" anchor="ctr"/>
-          <a:lstStyle/>
-          <a:p>
-            <a:pPr indent="0" marL="0">
-              <a:buNone/>
-            </a:pPr>
-            <a:r>
-              <a:rPr lang="en-US" sz="1700" b="1" dirty="0">
-                <a:solidFill>
-                  <a:srgbClr val="1E2761"/>
-                </a:solidFill>
-                <a:latin typeface="Cambria" pitchFamily="34" charset="0"/>
-                <a:ea typeface="Cambria" pitchFamily="34" charset="-122"/>
-                <a:cs typeface="Cambria" pitchFamily="34" charset="-120"/>
-              </a:rPr>
-              <a:t>Next, in order of value</a:t>
-            </a:r>
-            <a:endParaRPr lang="en-US" sz="1700" dirty="0"/>
-          </a:p>
-        </p:txBody>
-      </p:sp>
-      <p:sp>
-        <p:nvSpPr>
-          <p:cNvPr id="8" name="Text 6"/>
-          <p:cNvSpPr/>
-          <p:nvPr/>
-        </p:nvSpPr>
-        <p:spPr>
-          <a:xfrm>
-            <a:off x="6492240" y="1755648"/>
-            <a:ext cx="5120640" cy="4297680"/>
-          </a:xfrm>
-          <a:prstGeom prst="rect">
-            <a:avLst/>
-          </a:prstGeom>
-          <a:noFill/>
-          <a:ln/>
-        </p:spPr>
-        <p:txBody>
-          <a:bodyPr wrap="square" rtlCol="0" anchor="ctr"/>
-          <a:lstStyle/>
-          <a:p>
-            <a:pPr marL="342900" indent="-342900">
-              <a:spcAft>
-                <a:spcPts val="700"/>
-              </a:spcAft>
-              <a:buSzPct val="100000"/>
-              <a:buChar char="•"/>
-            </a:pPr>
-            <a:r>
-              <a:rPr lang="en-US" sz="1250" dirty="0">
-                <a:solidFill>
-                  <a:srgbClr val="1A1A2E"/>
-                </a:solidFill>
-                <a:latin typeface="Calibri" pitchFamily="34" charset="0"/>
-                <a:ea typeface="Calibri" pitchFamily="34" charset="-122"/>
-                <a:cs typeface="Calibri" pitchFamily="34" charset="-120"/>
-              </a:rPr>
-              <a:t>One live outcome contract on real data, scored by interrupted time series at the action date, then synthetic difference in differences as panels accumulate (Arkhangelsky et al., 2021). The estimator is already built and tested.</a:t>
-            </a:r>
-            <a:endParaRPr lang="en-US" sz="1250" dirty="0"/>
-          </a:p>
-          <a:p>
-            <a:pPr marL="342900" indent="-342900">
-              <a:spcAft>
-                <a:spcPts val="700"/>
-              </a:spcAft>
-              <a:buSzPct val="100000"/>
-              <a:buChar char="•"/>
-            </a:pPr>
-            <a:r>
-              <a:rPr lang="en-US" sz="1250" dirty="0">
-                <a:solidFill>
-                  <a:srgbClr val="1A1A2E"/>
-                </a:solidFill>
-                <a:latin typeface="Calibri" pitchFamily="34" charset="0"/>
-                <a:ea typeface="Calibri" pitchFamily="34" charset="-122"/>
-                <a:cs typeface="Calibri" pitchFamily="34" charset="-120"/>
-              </a:rPr>
-              <a:t>The practitioner study. Twelve to fifteen interviews and task sessions, with the survey for breadth.</a:t>
-            </a:r>
-            <a:endParaRPr lang="en-US" sz="1250" dirty="0"/>
-          </a:p>
-          <a:p>
-            <a:pPr marL="342900" indent="-342900">
-              <a:spcAft>
-                <a:spcPts val="700"/>
-              </a:spcAft>
-              <a:buSzPct val="100000"/>
-              <a:buChar char="•"/>
-            </a:pPr>
-            <a:r>
-              <a:rPr lang="en-US" sz="1250" dirty="0">
-                <a:solidFill>
-                  <a:srgbClr val="1A1A2E"/>
-                </a:solidFill>
-                <a:latin typeface="Calibri" pitchFamily="34" charset="0"/>
-                <a:ea typeface="Calibri" pitchFamily="34" charset="-122"/>
-                <a:cs typeface="Calibri" pitchFamily="34" charset="-120"/>
-              </a:rPr>
-              <a:t>A human rating with recorded provenance on a new sample of the risk seeds, and a first one on the golden set, with rater role, dates and AI access recorded: the existing kappa's independent human provenance is unverified, and repeats on the same forty items would not be replication.</a:t>
-            </a:r>
-            <a:endParaRPr lang="en-US" sz="1250" dirty="0"/>
-          </a:p>
-          <a:p>
-            <a:pPr marL="342900" indent="-342900">
-              <a:spcAft>
-                <a:spcPts val="700"/>
-              </a:spcAft>
-              <a:buSzPct val="100000"/>
-              <a:buChar char="•"/>
-            </a:pPr>
-            <a:r>
-              <a:rPr lang="en-US" sz="1250" dirty="0">
-                <a:solidFill>
-                  <a:srgbClr val="1A1A2E"/>
-                </a:solidFill>
-                <a:latin typeface="Calibri" pitchFamily="34" charset="0"/>
-                <a:ea typeface="Calibri" pitchFamily="34" charset="-122"/>
-                <a:cs typeface="Calibri" pitchFamily="34" charset="-120"/>
-              </a:rPr>
-              <a:t>Score theme and recommended action by the semantic agreement procedure, closing the last two of six gold fields.</a:t>
-            </a:r>
-            <a:endParaRPr lang="en-US" sz="1250" dirty="0"/>
-          </a:p>
-          <a:p>
-            <a:pPr marL="342900" indent="-342900">
-              <a:spcAft>
-                <a:spcPts val="700"/>
-              </a:spcAft>
-              <a:buSzPct val="100000"/>
-              <a:buChar char="•"/>
-            </a:pPr>
-            <a:r>
-              <a:rPr lang="en-US" sz="1250" dirty="0">
-                <a:solidFill>
-                  <a:srgbClr val="1A1A2E"/>
-                </a:solidFill>
-                <a:latin typeface="Calibri" pitchFamily="34" charset="0"/>
-                <a:ea typeface="Calibri" pitchFamily="34" charset="-122"/>
-                <a:cs typeface="Calibri" pitchFamily="34" charset="-120"/>
-              </a:rPr>
-              <a:t>Score routing in the free-form production condition, so the numbers describe the deployed system.</a:t>
-            </a:r>
-            <a:endParaRPr lang="en-US" sz="1250" dirty="0"/>
-          </a:p>
-          <a:p>
-            <a:pPr marL="342900" indent="-342900">
-              <a:spcAft>
-                <a:spcPts val="700"/>
-              </a:spcAft>
-              <a:buSzPct val="100000"/>
-              <a:buChar char="•"/>
-            </a:pPr>
-            <a:r>
-              <a:rPr lang="en-US" sz="1250" dirty="0">
-                <a:solidFill>
-                  <a:srgbClr val="1A1A2E"/>
-                </a:solidFill>
-                <a:latin typeface="Calibri" pitchFamily="34" charset="0"/>
-                <a:ea typeface="Calibri" pitchFamily="34" charset="-122"/>
-                <a:cs typeface="Calibri" pitchFamily="34" charset="-120"/>
-              </a:rPr>
-              <a:t>Relabel the new multi-market data to gold standard, which would break the language and sector confound.</a:t>
-            </a:r>
-            <a:endParaRPr lang="en-US" sz="1250" dirty="0"/>
+              <a:t>Also open: score theme and action by the semantic-agreement procedure (not executed), score routing free-form, relabel the held-out corpora to gold.</a:t>
+            </a:r>
+            <a:endParaRPr lang="en-US" sz="1200" dirty="0"/>
           </a:p>
         </p:txBody>
       </p:sp>
@@ -12370,7 +12370,7 @@
                 <a:ea typeface="Calibri" pitchFamily="34" charset="-122"/>
                 <a:cs typeface="Calibri" pitchFamily="34" charset="-120"/>
               </a:rPr>
-              <a:t>Section 6.5 still calls one live outcome contract the most important next step. Is the thesis defensible with the contract demonstrated and perceived but not measured, or do I force one small live measurement in at the cost of interview time?</a:t>
+              <a:t>Section 6.5 lists one live outcome contract among its five items. Is the thesis defensible with the contract implemented and tested on simulated outcome data but not measured live, or do I force one small live measurement in at the cost of interview time?</a:t>
             </a:r>
             <a:endParaRPr lang="en-US" sz="1200" dirty="0"/>
           </a:p>
@@ -12475,7 +12475,7 @@
                 <a:ea typeface="Calibri" pitchFamily="34" charset="-122"/>
                 <a:cs typeface="Calibri" pitchFamily="34" charset="-120"/>
               </a:rPr>
-              <a:t>The learned model shows an observed 32.6-point gap of its own on eight German-source signals, reported descriptively because within-predictor tests do not rank predictors. Is that enough as written, or do I need natural German-language data first? That decides whether relabelling the new corpora is required work.</a:t>
+              <a:t>The learned model escalates 5 of 8 German-source against 39 of 41 English-source positives, reported descriptively because within-predictor tests do not rank predictors. Is that enough as written, or do I need natural German-language data first? That decides whether relabelling the new corpora is required work.</a:t>
             </a:r>
             <a:endParaRPr lang="en-US" sz="1200" dirty="0"/>
           </a:p>
@@ -13639,7 +13639,7 @@
                 <a:ea typeface="Calibri" pitchFamily="34" charset="-122"/>
                 <a:cs typeface="Calibri" pitchFamily="34" charset="-120"/>
               </a:rPr>
-              <a:t>Built and running</a:t>
+              <a:t>Built, tested, partly deployed</a:t>
             </a:r>
             <a:endParaRPr lang="en-US" sz="1450" dirty="0"/>
           </a:p>
@@ -13678,7 +13678,7 @@
                 <a:ea typeface="Calibri" pitchFamily="34" charset="-122"/>
                 <a:cs typeface="Calibri" pitchFamily="34" charset="-120"/>
               </a:rPr>
-              <a:t>The artifact runs the whole loop in production. Signal in, insight, approved action out to Jira and Slack, outcome measured against a contract, learning kept and retrieved on the next decision.</a:t>
+              <a:t>In production since July 2026: signal in, insight, approved action out to Jira and Slack. The outcome contracts, loop verdicts and learning memory are implemented and regression-tested at September commits, not deployed at the time of writing.</a:t>
             </a:r>
             <a:endParaRPr lang="en-US" sz="1200" dirty="0"/>
           </a:p>
@@ -13744,7 +13744,7 @@
                 <a:ea typeface="Calibri" pitchFamily="34" charset="-122"/>
                 <a:cs typeface="Calibri" pitchFamily="34" charset="-120"/>
               </a:rPr>
-              <a:t>Measured</a:t>
+              <a:t>Measured (bounded)</a:t>
             </a:r>
             <a:endParaRPr lang="en-US" sz="1450" dirty="0"/>
           </a:p>
@@ -13783,7 +13783,7 @@
                 <a:ea typeface="Calibri" pitchFamily="34" charset="-122"/>
                 <a:cs typeface="Calibri" pitchFamily="34" charset="-120"/>
               </a:rPr>
-              <a:t>The quantitative evaluation is complete on 188 real seed-labelled signals. Three predictors now sit on one gold standard, with paired significance tests between all three.</a:t>
+              <a:t>The quantitative evaluation is complete on 188 paraphrased signals with reference labels of stated provenance. Five predictors sit on one gold standard, with paired McNemar tests corrected in one retrospective Holm family per task.</a:t>
             </a:r>
             <a:endParaRPr lang="en-US" sz="1200" dirty="0"/>
           </a:p>
@@ -13993,7 +13993,7 @@
                 <a:ea typeface="Calibri" pitchFamily="34" charset="-122"/>
                 <a:cs typeface="Calibri" pitchFamily="34" charset="-120"/>
               </a:rPr>
-              <a:t>The practitioner study is still at zero interviews, and the outcome data behind the learning loop is still simulated. Both sit on the critical path to submission.</a:t>
+              <a:t>The practitioner study was not conducted, and the outcome data behind the learning loop is still simulated. Both sit on the critical path to submission.</a:t>
             </a:r>
             <a:endParaRPr lang="en-US" sz="1200" dirty="0"/>
           </a:p>
@@ -14398,7 +14398,7 @@
                 <a:ea typeface="Calibri" pitchFamily="34" charset="-122"/>
                 <a:cs typeface="Calibri" pitchFamily="34" charset="-120"/>
               </a:rPr>
-              <a:t>188 real public signals, paraphrased and de-identified. Fintech 67, food delivery 82, B2B industrial 39. Source language English 102, German 84. Seed labels authored independently of the artifact.</a:t>
+              <a:t>188 English paraphrases of public reviews, de-identified. Fintech 67, food delivery 82, B2B industrial 39. Source language English 102, German 84. Seed labels drafted by a language-model assistant on 21 June 2026 and used as delivered; neither gold standard is human-labelled.</a:t>
             </a:r>
             <a:endParaRPr lang="en-US" sz="1300" dirty="0"/>
           </a:p>
@@ -14503,7 +14503,7 @@
                 <a:ea typeface="Calibri" pitchFamily="34" charset="-122"/>
                 <a:cs typeface="Calibri" pitchFamily="34" charset="-120"/>
               </a:rPr>
-              <a:t>100 curated bilingual cases committed in the repository, with published metrics served from the model card. Reported as convergent evidence and never merged into the tables, because the gold standards differ.</a:t>
+              <a:t>100 curated bilingual cases committed in the repository, with published metrics served from the model card. A development and validation benchmark co-developed with the artifact, not independent confirmation, and never merged into the tables, because the gold standards differ.</a:t>
             </a:r>
             <a:endParaRPr lang="en-US" sz="1300" dirty="0"/>
           </a:p>
@@ -15143,7 +15143,7 @@
                 <a:ea typeface="Calibri" pitchFamily="34" charset="-122"/>
                 <a:cs typeface="Calibri" pitchFamily="34" charset="-120"/>
               </a:rPr>
-              <a:t>Diagrams re-rendered from the September sources, which draw the deployed graph and tables. The numbers above are the verified ones.</a:t>
+              <a:t>Diagrams re-rendered from the September sources, which draw the build at the September commits; the serving image predates them (§4.1). The counts above are read from the repository.</a:t>
             </a:r>
             <a:endParaRPr lang="en-US" sz="1300" dirty="0"/>
           </a:p>
@@ -15643,7 +15643,7 @@
                 <a:ea typeface="Calibri" pitchFamily="34" charset="-122"/>
                 <a:cs typeface="Calibri" pitchFamily="34" charset="-120"/>
               </a:rPr>
-              <a:t>actions_log binds one to one to outcome_contracts at creation, and outcome_measurements grade closure from operational to customer to outcome. A closed action is a row with evidence behind it.</a:t>
+              <a:t>actions_log binds one to one to outcome_contracts at creation, and outcome_measurements carry each checkpoint reading with its grade (D, E if manual) beside the fitted estimate (C). The loop verdict is issued on target attainment, never on dispatch; a closed action is a row with evidence behind it.</a:t>
             </a:r>
             <a:endParaRPr lang="en-US" sz="1200" dirty="0"/>
           </a:p>
@@ -16415,7 +16415,7 @@
                 <a:ea typeface="Calibri" pitchFamily="34" charset="-122"/>
                 <a:cs typeface="Calibri" pitchFamily="34" charset="-120"/>
               </a:rPr>
-              <a:t>Decayed-confidence retrieval into new decisions, in the case-based reasoning lineage. Only human-validated conclusions are retrieval-eligible, so an unvalidated causal claim cannot launder itself into the next recommendation. Cost: retrieval quality gates usefulness.</a:t>
+              <a:t>Decayed-confidence retrieval into new decisions, in the case-based reasoning lineage. Only human-validated conclusions are retrieval-eligible, so an unvalidated causal claim cannot launder itself into the next recommendation. Cost: retrieval quality bounds the benefit, which is untested.</a:t>
             </a:r>
             <a:endParaRPr lang="en-US" sz="1200" dirty="0"/>
           </a:p>
@@ -17182,7 +17182,7 @@
                 <a:ea typeface="Calibri" pitchFamily="34" charset="-122"/>
                 <a:cs typeface="Calibri" pitchFamily="34" charset="-120"/>
               </a:rPr>
-              <a:t>SMB agents that trigger real work, and broad connector coverage. No approval gates and no outcome measurement that could be verified.</a:t>
+              <a:t>SMB agents that trigger work, broad connectors. Outcome measurement not documented in the sources reviewed; autonomy contradicted.</a:t>
             </a:r>
             <a:endParaRPr lang="en-US" sz="1250" dirty="0"/>
           </a:p>
@@ -17243,7 +17243,7 @@
                 <a:ea typeface="Calibri" pitchFamily="34" charset="-122"/>
                 <a:cs typeface="Calibri" pitchFamily="34" charset="-120"/>
               </a:rPr>
-              <a:t>The unclaimed combination</a:t>
+              <a:t>The combination no reviewed source holds</a:t>
             </a:r>
             <a:endParaRPr lang="en-US" sz="1400" dirty="0"/>
           </a:p>
@@ -17282,7 +17282,7 @@
                 <a:ea typeface="Calibri" pitchFamily="34" charset="-122"/>
                 <a:cs typeface="Calibri" pitchFamily="34" charset="-120"/>
               </a:rPr>
-              <a:t>Outcome contracts with verified closure</a:t>
+              <a:t>Outcome contracts measured against a contract, with explicit grades</a:t>
             </a:r>
             <a:endParaRPr lang="en-US" sz="1550" dirty="0"/>
           </a:p>
@@ -17455,7 +17455,7 @@
                 <a:ea typeface="Calibri" pitchFamily="34" charset="-122"/>
                 <a:cs typeface="Calibri" pitchFamily="34" charset="-120"/>
               </a:rPr>
-              <a:t>Gartner (2025) expects more than 40% of agentic AI projects to be cancelled by 2027, for unclear business value and inadequate risk controls. Those are the two this design answers.</a:t>
+              <a:t>Gartner (2025) expects many agentic AI projects to be cancelled for unclear business value and inadequate risk controls. Those are the two a draft-and-approve loop is built to avoid.</a:t>
             </a:r>
             <a:endParaRPr lang="en-US" sz="1300" dirty="0"/>
           </a:p>
@@ -17733,7 +17733,7 @@
               <a:buNone/>
             </a:pPr>
             <a:r>
-              <a:rPr lang="en-US" sz="1300" dirty="0">
+              <a:rPr lang="en-US" sz="1250" dirty="0">
                 <a:solidFill>
                   <a:srgbClr val="1A1A2E"/>
                 </a:solidFill>
@@ -17741,9 +17741,9 @@
                 <a:ea typeface="Calibri" pitchFamily="34" charset="-122"/>
                 <a:cs typeface="Calibri" pitchFamily="34" charset="-120"/>
               </a:rPr>
-              <a:t>How can an artifact make actions governed, executed and verified to have closed, and turn what worked into learning that is reused?</a:t>
-            </a:r>
-            <a:endParaRPr lang="en-US" sz="1300" dirty="0"/>
+              <a:t>How can an artifact make actions governed, executed and measured for closure against a contract, with reusable learning captured? Answered by design and demonstration.</a:t>
+            </a:r>
+            <a:endParaRPr lang="en-US" sz="1250" dirty="0"/>
           </a:p>
         </p:txBody>
       </p:sp>
@@ -17838,7 +17838,7 @@
               <a:buNone/>
             </a:pPr>
             <a:r>
-              <a:rPr lang="en-US" sz="1300" dirty="0">
+              <a:rPr lang="en-US" sz="1250" dirty="0">
                 <a:solidFill>
                   <a:srgbClr val="1A1A2E"/>
                 </a:solidFill>
@@ -17846,9 +17846,9 @@
                 <a:ea typeface="Calibri" pitchFamily="34" charset="-122"/>
                 <a:cs typeface="Calibri" pitchFamily="34" charset="-120"/>
               </a:rPr>
-              <a:t>What design lets automated action meet the EU AI Act and GDPR without slowing practitioners more than the risk warrants?</a:t>
-            </a:r>
-            <a:endParaRPr lang="en-US" sz="1300" dirty="0"/>
+              <a:t>What design principles enable governed action-taking under the EU AI Act and GDPR, and how do practitioners experience the friction? Controls tested; friction clause not conducted.</a:t>
+            </a:r>
+            <a:endParaRPr lang="en-US" sz="1250" dirty="0"/>
           </a:p>
         </p:txBody>
       </p:sp>
@@ -17912,7 +17912,7 @@
                 <a:ea typeface="Calibri" pitchFamily="34" charset="-122"/>
                 <a:cs typeface="Calibri" pitchFamily="34" charset="-120"/>
               </a:rPr>
-              <a:t>RQ3a. Accuracy</a:t>
+              <a:t>RQ3a. Agreement</a:t>
             </a:r>
             <a:endParaRPr lang="en-US" sz="1450" dirty="0"/>
           </a:p>
@@ -17943,7 +17943,7 @@
               <a:buNone/>
             </a:pPr>
             <a:r>
-              <a:rPr lang="en-US" sz="1300" dirty="0">
+              <a:rPr lang="en-US" sz="1250" dirty="0">
                 <a:solidFill>
                   <a:srgbClr val="1A1A2E"/>
                 </a:solidFill>
@@ -17951,9 +17951,9 @@
                 <a:ea typeface="Calibri" pitchFamily="34" charset="-122"/>
                 <a:cs typeface="Calibri" pitchFamily="34" charset="-120"/>
               </a:rPr>
-              <a:t>How accurately does AI enrichment and routing reproduce reference labels on real feedback, across sectors? Answered: three predictors on one gold standard.</a:t>
-            </a:r>
-            <a:endParaRPr lang="en-US" sz="1300" dirty="0"/>
+              <a:t>How closely does the enrichment pipeline agree with reference labels on paraphrased public reviews? Measured (bounded): five predictors on one gold standard.</a:t>
+            </a:r>
+            <a:endParaRPr lang="en-US" sz="1250" dirty="0"/>
           </a:p>
         </p:txBody>
       </p:sp>
@@ -18048,7 +18048,7 @@
               <a:buNone/>
             </a:pPr>
             <a:r>
-              <a:rPr lang="en-US" sz="1300" dirty="0">
+              <a:rPr lang="en-US" sz="1250" dirty="0">
                 <a:solidFill>
                   <a:srgbClr val="1A1A2E"/>
                 </a:solidFill>
@@ -18056,9 +18056,9 @@
                 <a:ea typeface="Calibri" pitchFamily="34" charset="-122"/>
                 <a:cs typeface="Calibri" pitchFamily="34" charset="-120"/>
               </a:rPr>
-              <a:t>Is triage reliability equal across language strata, defined here by the source review's language? Answered, and tightly bounded.</a:t>
-            </a:r>
-            <a:endParaRPr lang="en-US" sz="1300" dirty="0"/>
+              <a:t>Does the choice of triage method change whose problems are escalated, across source-language strata? Answered descriptively; no ranking, no language effect.</a:t>
+            </a:r>
+            <a:endParaRPr lang="en-US" sz="1250" dirty="0"/>
           </a:p>
         </p:txBody>
       </p:sp>
@@ -18071,11 +18071,11 @@
         <p:spPr>
           <a:xfrm>
             <a:off x="548640" y="4041648"/>
-            <a:ext cx="11064240" cy="960120"/>
+            <a:ext cx="11064240" cy="1078992"/>
           </a:xfrm>
           <a:prstGeom prst="roundRect">
             <a:avLst>
-              <a:gd name="adj" fmla="val 5714"/>
+              <a:gd name="adj" fmla="val 5085"/>
             </a:avLst>
           </a:prstGeom>
           <a:solidFill>
@@ -18122,7 +18122,7 @@
                 <a:ea typeface="Calibri" pitchFamily="34" charset="-122"/>
                 <a:cs typeface="Calibri" pitchFamily="34" charset="-120"/>
               </a:rPr>
-              <a:t>RQ4. Practitioner value</a:t>
+              <a:t>RQ4. Practitioner experience: not conducted</a:t>
             </a:r>
             <a:endParaRPr lang="en-US" sz="1450" dirty="0"/>
           </a:p>
@@ -18137,7 +18137,7 @@
         <p:spPr>
           <a:xfrm>
             <a:off x="713232" y="4425696"/>
-            <a:ext cx="10735056" cy="466344"/>
+            <a:ext cx="10735056" cy="585216"/>
           </a:xfrm>
           <a:prstGeom prst="rect">
             <a:avLst/>
@@ -18153,7 +18153,7 @@
               <a:buNone/>
             </a:pPr>
             <a:r>
-              <a:rPr lang="en-US" sz="1300" dirty="0">
+              <a:rPr lang="en-US" sz="1200" dirty="0">
                 <a:solidFill>
                   <a:srgbClr val="1A1A2E"/>
                 </a:solidFill>
@@ -18161,9 +18161,9 @@
                 <a:ea typeface="Calibri" pitchFamily="34" charset="-122"/>
                 <a:cs typeface="Calibri" pitchFamily="34" charset="-120"/>
               </a:rPr>
-              <a:t>How do practitioners judge usefulness, usability and trust? Twelve to fifteen interviews and task sessions with SUS and TAM, plus an anonymous survey for breadth. Not started, and it is the critical path.</a:t>
-            </a:r>
-            <a:endParaRPr lang="en-US" sz="1300" dirty="0"/>
+              <a:t>How do practitioners assess the artifact's usefulness, usability and trustworthiness? Not conducted at the time of writing; the protocol, instruments and pre-registered tiers are retained (Appendix A; §5B). Interviews: reported as designed at twelve or more, as descriptive ranges at six to eleven, as a walkthrough below six. Survey: verdicts only at n ≥ 40, descriptive at 10 to 39, a count below 10.</a:t>
+            </a:r>
+            <a:endParaRPr lang="en-US" sz="1200" dirty="0"/>
           </a:p>
         </p:txBody>
       </p:sp>
@@ -19069,7 +19069,7 @@
                 <a:ea typeface="Calibri" pitchFamily="34" charset="-122"/>
                 <a:cs typeface="Calibri" pitchFamily="34" charset="-120"/>
               </a:rPr>
-              <a:t>Every count on this page comes from one shared status function, so the numbers reconcile by construction rather than by discipline. That is the same commitment the thesis makes about closure: an outcome contract is a foreign key at creation, not a status flag someone remembers to set. The Chapter 4 diagrams were re-rendered in September from the deployed build; the screenshots are from the 16 July build, before this redesign landed on 13 August.</a:t>
+              <a:t>Every count on this page comes from one shared status function, so the numbers reconcile by construction rather than by discipline. That is the same commitment the thesis makes about closure: an outcome contract is a foreign key at creation, not a status flag someone remembers to set. The Chapter 4 diagrams draw the build at the September commits, which the serving image predates (§4.1); the screenshots are from the 16 July build.</a:t>
             </a:r>
             <a:endParaRPr lang="en-US" sz="1350" dirty="0"/>
           </a:p>
@@ -19308,7 +19308,7 @@
               <a:buNone/>
             </a:pPr>
             <a:r>
-              <a:rPr lang="en-US" sz="1300" dirty="0">
+              <a:rPr lang="en-US" sz="1200" dirty="0">
                 <a:solidFill>
                   <a:srgbClr val="1A1A2E"/>
                 </a:solidFill>
@@ -19316,9 +19316,9 @@
                 <a:ea typeface="Calibri" pitchFamily="34" charset="-122"/>
                 <a:cs typeface="Calibri" pitchFamily="34" charset="-120"/>
               </a:rPr>
-              <a:t>Every consequential action is a draft until a person approves it: the graph's approval node is a LangGraph interrupt, and no code path reaches an external effect without a recorded approval. Authority is graduated by consequence class, from draft to single approval to four-eyes. Designed past the Article requirement, because awareness alone does not de-bias an overseer (Laux and Ruschemeier, 2025; Siebert et al., 2023).</a:t>
-            </a:r>
-            <a:endParaRPr lang="en-US" sz="1300" dirty="0"/>
+              <a:t>Every action is a draft until a person approves it: the approval node is a LangGraph interrupt, and no code path reaches an external effect without a recorded approval. Authority is graduated by consequence class, up to four-eyes. The gate controls false positives; it cannot recover escalation-worthy signals ranked too low (22 of 50 on the production rubric). Awareness alone does not de-bias an overseer (Laux and Ruschemeier, 2025).</a:t>
+            </a:r>
+            <a:endParaRPr lang="en-US" sz="1200" dirty="0"/>
           </a:p>
         </p:txBody>
       </p:sp>
@@ -19413,7 +19413,7 @@
               <a:buNone/>
             </a:pPr>
             <a:r>
-              <a:rPr lang="en-US" sz="1300" dirty="0">
+              <a:rPr lang="en-US" sz="1200" dirty="0">
                 <a:solidFill>
                   <a:srgbClr val="1A1A2E"/>
                 </a:solidFill>
@@ -19423,7 +19423,7 @@
               </a:rPr>
               <a:t>Every action records the rule, the parameters, the executor and the result. The evidence pack is hashed at decision time, so evidence that changed afterwards is provable rather than arguable. Four-eyes approval is available for consequential actions.</a:t>
             </a:r>
-            <a:endParaRPr lang="en-US" sz="1300" dirty="0"/>
+            <a:endParaRPr lang="en-US" sz="1200" dirty="0"/>
           </a:p>
         </p:txBody>
       </p:sp>
@@ -19518,7 +19518,7 @@
               <a:buNone/>
             </a:pPr>
             <a:r>
-              <a:rPr lang="en-US" sz="1300" dirty="0">
+              <a:rPr lang="en-US" sz="1200" dirty="0">
                 <a:solidFill>
                   <a:srgbClr val="1A1A2E"/>
                 </a:solidFill>
@@ -19528,7 +19528,7 @@
               </a:rPr>
               <a:t>AI output carries its provenance, and human editorial review is the exemption mechanism, which makes the approval gate itself the compliance artefact. The 2026 Digital Omnibus moved the Annex III high-risk duties to December 2027 and left Article 50 on its August 2026 schedule.</a:t>
             </a:r>
-            <a:endParaRPr lang="en-US" sz="1300" dirty="0"/>
+            <a:endParaRPr lang="en-US" sz="1200" dirty="0"/>
           </a:p>
         </p:txBody>
       </p:sp>
@@ -19623,7 +19623,7 @@
               <a:buNone/>
             </a:pPr>
             <a:r>
-              <a:rPr lang="en-US" sz="1300" dirty="0">
+              <a:rPr lang="en-US" sz="1200" dirty="0">
                 <a:solidFill>
                   <a:srgbClr val="1A1A2E"/>
                 </a:solidFill>
@@ -19633,7 +19633,7 @@
               </a:rPr>
               <a:t>The model layer is provider agnostic, so it runs hosted, behind an EU gateway, or self-hosted. Direct identifiers are redacted before any text reaches a model; retention limits and workspace isolation are enforced in Postgres below the application. Sentiment on text is not emotion recognition under Article 3(39), which is biometric.</a:t>
             </a:r>
-            <a:endParaRPr lang="en-US" sz="1300" dirty="0"/>
+            <a:endParaRPr lang="en-US" sz="1200" dirty="0"/>
           </a:p>
         </p:txBody>
       </p:sp>
@@ -19645,8 +19645,8 @@
         </p:nvSpPr>
         <p:spPr>
           <a:xfrm>
-            <a:off x="548640" y="5715000"/>
-            <a:ext cx="11064240" cy="411480"/>
+            <a:off x="548640" y="5596128"/>
+            <a:ext cx="11064240" cy="713232"/>
           </a:xfrm>
           <a:prstGeom prst="rect">
             <a:avLst/>
@@ -19670,7 +19670,7 @@
                 <a:ea typeface="Calibri" pitchFamily="34" charset="-122"/>
                 <a:cs typeface="Calibri" pitchFamily="34" charset="-120"/>
               </a:rPr>
-              <a:t>Closure has three levels. The ticket is done, the reporter is told, the metric moved. Closed means the third.</a:t>
+              <a:t>Closure has three meanings: delivery, target attainment measured against a contract, attributed improvement. The loop verdict is issued on attainment; attribution is never asserted.</a:t>
             </a:r>
             <a:endParaRPr lang="en-US" sz="1500" dirty="0"/>
           </a:p>
@@ -19886,7 +19886,7 @@
               <a:buChar char="•"/>
             </a:pPr>
             <a:r>
-              <a:rPr lang="en-US" sz="1350" dirty="0">
+              <a:rPr lang="en-US" sz="1300" dirty="0">
                 <a:solidFill>
                   <a:srgbClr val="1A1A2E"/>
                 </a:solidFill>
@@ -19894,9 +19894,9 @@
                 <a:ea typeface="Calibri" pitchFamily="34" charset="-122"/>
                 <a:cs typeface="Calibri" pitchFamily="34" charset="-120"/>
               </a:rPr>
-              <a:t>Paired McNemar tests between all three predictors on identical items. The contextual path leads the learned model on sentiment (p = 0.029) and does not separate from it on severity (p = 0.644).</a:t>
-            </a:r>
-            <a:endParaRPr lang="en-US" sz="1350" dirty="0"/>
+              <a:t>Paired McNemar tests on identical items, one retrospective Holm family per task. The generic prompt's sentiment lead over TF-IDF is stable across repeated runs on the same items and not significant after the correction (0.174); on risk the two are not distinguishable (0.644).</a:t>
+            </a:r>
+            <a:endParaRPr lang="en-US" sz="1300" dirty="0"/>
           </a:p>
           <a:p>
             <a:pPr marL="342900" indent="-342900">
@@ -19907,7 +19907,7 @@
               <a:buChar char="•"/>
             </a:pPr>
             <a:r>
-              <a:rPr lang="en-US" sz="1350" dirty="0">
+              <a:rPr lang="en-US" sz="1300" dirty="0">
                 <a:solidFill>
                   <a:srgbClr val="1A1A2E"/>
                 </a:solidFill>
@@ -19915,9 +19915,9 @@
                 <a:ea typeface="Calibri" pitchFamily="34" charset="-122"/>
                 <a:cs typeface="Calibri" pitchFamily="34" charset="-120"/>
               </a:rPr>
-              <a:t>The learned model joined the escalation equity table: 62.5% against 95.1% across the two strata, a 32.6-point gap on eight German-source items; descriptive, no ranking.</a:t>
-            </a:r>
-            <a:endParaRPr lang="en-US" sz="1350" dirty="0"/>
+              <a:t>The learned model joined the escalation equity table: 5 of 8 German-source against 39 of 41 English-source positives; descriptive, no ranking.</a:t>
+            </a:r>
+            <a:endParaRPr lang="en-US" sz="1300" dirty="0"/>
           </a:p>
           <a:p>
             <a:pPr marL="342900" indent="-342900">
@@ -19928,7 +19928,7 @@
               <a:buChar char="•"/>
             </a:pPr>
             <a:r>
-              <a:rPr lang="en-US" sz="1350" dirty="0">
+              <a:rPr lang="en-US" sz="1300" dirty="0">
                 <a:solidFill>
                   <a:srgbClr val="1A1A2E"/>
                 </a:solidFill>
@@ -19938,7 +19938,7 @@
               </a:rPr>
               <a:t>Three more datasets collected and run on 21 August, held outside the frozen 188-signal corpus: Vodafone Germany, Delivery Hero across eight EU markets, German consumer banks.</a:t>
             </a:r>
-            <a:endParaRPr lang="en-US" sz="1350" dirty="0"/>
+            <a:endParaRPr lang="en-US" sz="1300" dirty="0"/>
           </a:p>
           <a:p>
             <a:pPr marL="342900" indent="-342900">
@@ -19949,7 +19949,7 @@
               <a:buChar char="•"/>
             </a:pPr>
             <a:r>
-              <a:rPr lang="en-US" sz="1350" dirty="0">
+              <a:rPr lang="en-US" sz="1300" dirty="0">
                 <a:solidFill>
                   <a:srgbClr val="1A1A2E"/>
                 </a:solidFill>
@@ -19957,9 +19957,9 @@
                 <a:ea typeface="Calibri" pitchFamily="34" charset="-122"/>
                 <a:cs typeface="Calibri" pitchFamily="34" charset="-120"/>
               </a:rPr>
-              <a:t>An AI-verbatim detector measured on 6,740 real texts and then refused, because it flags 15% of genuine reviews and 3x more in some languages than others.</a:t>
-            </a:r>
-            <a:endParaRPr lang="en-US" sz="1350" dirty="0"/>
+              <a:t>An AI-verbatim detector measured on 6,740 real texts and refused: it flags 15% of genuine reviews, 3x more in some languages than others.</a:t>
+            </a:r>
+            <a:endParaRPr lang="en-US" sz="1300" dirty="0"/>
           </a:p>
         </p:txBody>
       </p:sp>
@@ -20163,7 +20163,7 @@
                 <a:ea typeface="Calibri" pitchFamily="34" charset="-122"/>
                 <a:cs typeface="Calibri" pitchFamily="34" charset="-120"/>
               </a:rPr>
-              <a:t>One thing did not move. RQ4 is still at zero interviews, zero survey responses and no ethics sign-off, and that is what I most need from this meeting.</a:t>
+              <a:t>One thing did not move. RQ4 was not conducted: no interview, task session or survey response, and no ethics sign-off. That is what I most need from this meeting.</a:t>
             </a:r>
             <a:endParaRPr lang="en-US" sz="1550" dirty="0"/>
           </a:p>
@@ -21030,7 +21030,7 @@
                 <a:ea typeface="Calibri" pitchFamily="34" charset="-122"/>
                 <a:cs typeface="Calibri" pitchFamily="34" charset="-120"/>
               </a:rPr>
-              <a:t>Three predictors, one gold standard, paired tests on identical items</a:t>
+              <a:t>Five predictors, one gold standard, paired tests on identical items, one retrospective Holm family per task</a:t>
             </a:r>
             <a:endParaRPr lang="en-US" sz="1500" dirty="0"/>
           </a:p>
@@ -21217,7 +21217,7 @@
                           <a:ea typeface="Calibri" pitchFamily="34" charset="-122"/>
                           <a:cs typeface="Calibri" pitchFamily="34" charset="-120"/>
                         </a:rPr>
-                        <a:t>Severity macro-F1 (n = 106)</a:t>
+                        <a:t>Risk macro-F1 (n = 106)</a:t>
                       </a:r>
                       <a:endParaRPr lang="en-US" sz="1400" dirty="0">
                         <a:latin typeface="Calibri" charset="0"/>
@@ -21484,7 +21484,7 @@
                           <a:ea typeface="Calibri" pitchFamily="34" charset="-122"/>
                           <a:cs typeface="Calibri" pitchFamily="34" charset="-120"/>
                         </a:rPr>
-                        <a:t>TF-IDF and logistic regression</a:t>
+                        <a:t>TF-IDF + logistic regression (5-fold CV)</a:t>
                       </a:r>
                       <a:endParaRPr lang="en-US" sz="1400" dirty="0">
                         <a:latin typeface="Calibri" charset="0"/>
@@ -21681,7 +21681,7 @@
                           <a:ea typeface="Calibri" pitchFamily="34" charset="-122"/>
                           <a:cs typeface="Calibri" pitchFamily="34" charset="-120"/>
                         </a:rPr>
-                        <a:t>Contextual model path (generic prompt)</a:t>
+                        <a:t>Generic prompt, GLM-5.2 (run 0)</a:t>
                       </a:r>
                       <a:endParaRPr lang="en-US" sz="1400" dirty="0">
                         <a:latin typeface="Calibri" charset="0"/>
@@ -21878,7 +21878,7 @@
                           <a:ea typeface="Calibri" pitchFamily="34" charset="-122"/>
                           <a:cs typeface="Calibri" pitchFamily="34" charset="-120"/>
                         </a:rPr>
-                        <a:t>Production enrichment stage, same model</a:t>
+                        <a:t>Production stage, GLM-5.2</a:t>
                       </a:r>
                       <a:endParaRPr lang="en-US" sz="1400" dirty="0">
                         <a:latin typeface="Calibri" charset="0"/>
@@ -22075,7 +22075,7 @@
                           <a:ea typeface="Calibri" pitchFamily="34" charset="-122"/>
                           <a:cs typeface="Calibri" pitchFamily="34" charset="-120"/>
                         </a:rPr>
-                        <a:t>Production enrichment stage, production default</a:t>
+                        <a:t>Production stage, Mistral Small 4 (the production default)</a:t>
                       </a:r>
                       <a:endParaRPr lang="en-US" sz="1400" dirty="0">
                         <a:latin typeface="Calibri" charset="0"/>
@@ -22267,11 +22267,11 @@
         <p:spPr>
           <a:xfrm>
             <a:off x="548640" y="3310128"/>
-            <a:ext cx="6766560" cy="1188720"/>
+            <a:ext cx="6766560" cy="1463040"/>
           </a:xfrm>
           <a:prstGeom prst="roundRect">
             <a:avLst>
-              <a:gd name="adj" fmla="val 4615"/>
+              <a:gd name="adj" fmla="val 3750"/>
             </a:avLst>
           </a:prstGeom>
           <a:solidFill>
@@ -22318,7 +22318,7 @@
                 <a:ea typeface="Calibri" pitchFamily="34" charset="-122"/>
                 <a:cs typeface="Calibri" pitchFamily="34" charset="-120"/>
               </a:rPr>
-              <a:t>Paired McNemar on the same items, testing accuracy</a:t>
+              <a:t>Paired McNemar on the same items, Holm-corrected (m = 10)</a:t>
             </a:r>
             <a:endParaRPr lang="en-US" sz="1450" dirty="0"/>
           </a:p>
@@ -22333,7 +22333,7 @@
         <p:spPr>
           <a:xfrm>
             <a:off x="713232" y="3694176"/>
-            <a:ext cx="6437376" cy="694944"/>
+            <a:ext cx="6437376" cy="969264"/>
           </a:xfrm>
           <a:prstGeom prst="rect">
             <a:avLst/>
@@ -22357,7 +22357,7 @@
                 <a:ea typeface="Calibri" pitchFamily="34" charset="-122"/>
                 <a:cs typeface="Calibri" pitchFamily="34" charset="-120"/>
               </a:rPr>
-              <a:t>Both learned methods beat the floor (p &lt; 0.0001). The contextual path leads the learned model on sentiment in all four runs (p = 0.02–0.03; 0.09 Holm-corrected, so exploratory) and ties it on severity. The production stage is within three points on sentiment (p = 0.23), one severity level below the seeds, and compares configurations, not the model alone.</a:t>
+              <a:t>All four floor comparisons survive on sentiment (Holm &lt; 0.001). The generic prompt's sentiment lead over TF-IDF is stable across repeated runs on the same items and not significant after the retrospective correction (0.174); on risk the two are not distinguishable (0.644). The production stage sits three points below the generic prompt on sentiment (0.906) and one risk level below the seeds: a prompt/pipeline × run date contrast, not the model alone.</a:t>
             </a:r>
             <a:endParaRPr lang="en-US" sz="1050" dirty="0"/>
           </a:p>
@@ -22371,8 +22371,8 @@
         </p:nvSpPr>
         <p:spPr>
           <a:xfrm>
-            <a:off x="548640" y="4663440"/>
-            <a:ext cx="6766560" cy="1371600"/>
+            <a:off x="548640" y="4846320"/>
+            <a:ext cx="6766560" cy="1280160"/>
           </a:xfrm>
           <a:prstGeom prst="rect">
             <a:avLst/>
@@ -22388,7 +22388,7 @@
               <a:buNone/>
             </a:pPr>
             <a:r>
-              <a:rPr lang="en-US" sz="1400" dirty="0">
+              <a:rPr lang="en-US" sz="1250" dirty="0">
                 <a:solidFill>
                   <a:srgbClr val="1A1A2E"/>
                 </a:solidFill>
@@ -22396,9 +22396,9 @@
                 <a:ea typeface="Calibri" pitchFamily="34" charset="-122"/>
                 <a:cs typeface="Calibri" pitchFamily="34" charset="-120"/>
               </a:rPr>
-              <a:t>Contextual reasoning buys a great deal on sentiment and nothing demonstrable on severity, which lexical markers already carry. The production stage's severity shift is partly the seed labels' own calibration: a second rating, of unverified independent provenance, put seven of ten seed-critical items at high (kappa 0.55, weighted 0.70). The precondition can be met by more than one method; a deployer has a choice, not an instruction.</a:t>
-            </a:r>
-            <a:endParaRPr lang="en-US" sz="1400" dirty="0"/>
+              <a:t>Which learned or contextual predictor is better is not decided on this corpus. The production stage's risk shift is partly the seed labels' own calibration: a second rating, reported as second-rating agreement with independent human provenance unverified, put seven of ten seed-critical items at high (kappa 0.55, weighted 0.70). Escalation recall under the seed labels falls to 28 of 50 on either production model. A deployer has a choice, not an instruction.</a:t>
+            </a:r>
+            <a:endParaRPr lang="en-US" sz="1250" dirty="0"/>
           </a:p>
         </p:txBody>
       </p:sp>
